--- a/library/lectures/lec-01/rendered/lec-01.pptx
+++ b/library/lectures/lec-01/rendered/lec-01.pptx
@@ -34795,11 +34795,11 @@
         <p:spPr>
           <a:xfrm>
             <a:off x="502920" y="1691640"/>
-            <a:ext cx="3902228" cy="4434840"/>
+            <a:ext cx="5218211" cy="4434840"/>
           </a:xfrm>
           <a:prstGeom prst="roundRect">
             <a:avLst>
-              <a:gd name="adj" fmla="val 7810"/>
+              <a:gd name="adj" fmla="val 6872"/>
             </a:avLst>
           </a:prstGeom>
           <a:solidFill>
@@ -34843,7 +34843,7 @@
         <p:spPr>
           <a:xfrm>
             <a:off x="502920" y="1691640"/>
-            <a:ext cx="3902228" cy="777240"/>
+            <a:ext cx="5218211" cy="777240"/>
           </a:xfrm>
           <a:prstGeom prst="roundRect">
             <a:avLst>
@@ -34889,7 +34889,7 @@
         <p:spPr>
           <a:xfrm>
             <a:off x="502920" y="1764792"/>
-            <a:ext cx="3902228" cy="320040"/>
+            <a:ext cx="5218211" cy="320040"/>
           </a:xfrm>
           <a:prstGeom prst="rect">
             <a:avLst/>
@@ -34928,7 +34928,7 @@
         <p:spPr>
           <a:xfrm>
             <a:off x="594360" y="2057400"/>
-            <a:ext cx="3719348" cy="457200"/>
+            <a:ext cx="5035331" cy="457200"/>
           </a:xfrm>
           <a:prstGeom prst="rect">
             <a:avLst/>
@@ -34953,7 +34953,7 @@
                 </a:solidFill>
                 <a:latin typeface="Arial"/>
               </a:rPr>
-              <a:t>Основы
+              <a:t>Теор.-метод. основы
 + знакомые индустрии</a:t>
             </a:r>
           </a:p>
@@ -34968,7 +34968,7 @@
         <p:spPr>
           <a:xfrm>
             <a:off x="640080" y="2651760"/>
-            <a:ext cx="3673628" cy="365760"/>
+            <a:ext cx="4989611" cy="365760"/>
           </a:xfrm>
           <a:prstGeom prst="rect">
             <a:avLst/>
@@ -35007,7 +35007,7 @@
         <p:spPr>
           <a:xfrm>
             <a:off x="640080" y="3044952"/>
-            <a:ext cx="3673628" cy="365760"/>
+            <a:ext cx="4989611" cy="365760"/>
           </a:xfrm>
           <a:prstGeom prst="rect">
             <a:avLst/>
@@ -35046,7 +35046,7 @@
         <p:spPr>
           <a:xfrm>
             <a:off x="640080" y="3438144"/>
-            <a:ext cx="3673628" cy="365760"/>
+            <a:ext cx="4989611" cy="365760"/>
           </a:xfrm>
           <a:prstGeom prst="rect">
             <a:avLst/>
@@ -35085,7 +35085,7 @@
         <p:spPr>
           <a:xfrm>
             <a:off x="640080" y="3831336"/>
-            <a:ext cx="3673628" cy="365760"/>
+            <a:ext cx="4989611" cy="365760"/>
           </a:xfrm>
           <a:prstGeom prst="rect">
             <a:avLst/>
@@ -35124,7 +35124,7 @@
         <p:spPr>
           <a:xfrm>
             <a:off x="640080" y="4224528"/>
-            <a:ext cx="3673628" cy="365760"/>
+            <a:ext cx="4989611" cy="365760"/>
           </a:xfrm>
           <a:prstGeom prst="rect">
             <a:avLst/>
@@ -35163,7 +35163,7 @@
         <p:spPr>
           <a:xfrm>
             <a:off x="640080" y="4617720"/>
-            <a:ext cx="3673628" cy="365760"/>
+            <a:ext cx="4989611" cy="365760"/>
           </a:xfrm>
           <a:prstGeom prst="rect">
             <a:avLst/>
@@ -35188,6 +35188,45 @@
                 </a:solidFill>
                 <a:latin typeface="Arial"/>
               </a:rPr>
+              <a:t>6. Инж. проект.</a:t>
+            </a:r>
+          </a:p>
+        </p:txBody>
+      </p:sp>
+      <p:sp>
+        <p:nvSpPr>
+          <p:cNvPr id="13" name="TextBox 12"/>
+          <p:cNvSpPr txBox="1"/>
+          <p:nvPr/>
+        </p:nvSpPr>
+        <p:spPr>
+          <a:xfrm>
+            <a:off x="640080" y="5010912"/>
+            <a:ext cx="4989611" cy="365760"/>
+          </a:xfrm>
+          <a:prstGeom prst="rect">
+            <a:avLst/>
+          </a:prstGeom>
+          <a:noFill/>
+        </p:spPr>
+        <p:txBody>
+          <a:bodyPr wrap="square" lIns="0" rIns="0" tIns="0" bIns="0" anchor="t">
+            <a:spAutoFit/>
+          </a:bodyPr>
+          <a:lstStyle/>
+          <a:p>
+            <a:pPr algn="l">
+              <a:lnSpc>
+                <a:spcPct val="120000"/>
+              </a:lnSpc>
+            </a:pPr>
+            <a:r>
+              <a:rPr sz="1000" b="0" i="0">
+                <a:solidFill>
+                  <a:srgbClr val="21295C"/>
+                </a:solidFill>
+                <a:latin typeface="Arial"/>
+              </a:rPr>
               <a:t>7. Медицина</a:t>
             </a:r>
           </a:p>
@@ -35195,18 +35234,57 @@
       </p:sp>
       <p:sp>
         <p:nvSpPr>
-          <p:cNvPr id="13" name="Rounded Rectangle 12"/>
+          <p:cNvPr id="14" name="TextBox 13"/>
+          <p:cNvSpPr txBox="1"/>
+          <p:nvPr/>
+        </p:nvSpPr>
+        <p:spPr>
+          <a:xfrm>
+            <a:off x="640080" y="5404104"/>
+            <a:ext cx="4989611" cy="365760"/>
+          </a:xfrm>
+          <a:prstGeom prst="rect">
+            <a:avLst/>
+          </a:prstGeom>
+          <a:noFill/>
+        </p:spPr>
+        <p:txBody>
+          <a:bodyPr wrap="square" lIns="0" rIns="0" tIns="0" bIns="0" anchor="t">
+            <a:spAutoFit/>
+          </a:bodyPr>
+          <a:lstStyle/>
+          <a:p>
+            <a:pPr algn="l">
+              <a:lnSpc>
+                <a:spcPct val="120000"/>
+              </a:lnSpc>
+            </a:pPr>
+            <a:r>
+              <a:rPr sz="1000" b="0" i="0">
+                <a:solidFill>
+                  <a:srgbClr val="21295C"/>
+                </a:solidFill>
+                <a:latin typeface="Arial"/>
+              </a:rPr>
+              <a:t>8. Креативные ◆РК1</a:t>
+            </a:r>
+          </a:p>
+        </p:txBody>
+      </p:sp>
+      <p:sp>
+        <p:nvSpPr>
+          <p:cNvPr id="15" name="Rounded Rectangle 14"/>
           <p:cNvSpPr/>
           <p:nvPr/>
         </p:nvSpPr>
         <p:spPr>
           <a:xfrm>
-            <a:off x="4450868" y="1691640"/>
-            <a:ext cx="3244237" cy="4434840"/>
+            <a:off x="5766851" y="1691640"/>
+            <a:ext cx="2586245" cy="4434840"/>
           </a:xfrm>
           <a:prstGeom prst="roundRect">
             <a:avLst>
-              <a:gd name="adj" fmla="val 9395"/>
+              <a:gd name="adj" fmla="val 11785"/>
             </a:avLst>
           </a:prstGeom>
           <a:solidFill>
@@ -35243,14 +35321,14 @@
       </p:sp>
       <p:sp>
         <p:nvSpPr>
-          <p:cNvPr id="14" name="Rounded Rectangle 13"/>
+          <p:cNvPr id="16" name="Rounded Rectangle 15"/>
           <p:cNvSpPr/>
           <p:nvPr/>
         </p:nvSpPr>
         <p:spPr>
           <a:xfrm>
-            <a:off x="4450868" y="1691640"/>
-            <a:ext cx="3244237" cy="777240"/>
+            <a:off x="5766851" y="1691640"/>
+            <a:ext cx="2586245" cy="777240"/>
           </a:xfrm>
           <a:prstGeom prst="roundRect">
             <a:avLst>
@@ -35289,14 +35367,14 @@
       </p:sp>
       <p:sp>
         <p:nvSpPr>
-          <p:cNvPr id="15" name="TextBox 14"/>
-          <p:cNvSpPr txBox="1"/>
-          <p:nvPr/>
-        </p:nvSpPr>
-        <p:spPr>
-          <a:xfrm>
-            <a:off x="4450868" y="1764792"/>
-            <a:ext cx="3244237" cy="320040"/>
+          <p:cNvPr id="17" name="TextBox 16"/>
+          <p:cNvSpPr txBox="1"/>
+          <p:nvPr/>
+        </p:nvSpPr>
+        <p:spPr>
+          <a:xfrm>
+            <a:off x="5766851" y="1764792"/>
+            <a:ext cx="2586245" cy="320040"/>
           </a:xfrm>
           <a:prstGeom prst="rect">
             <a:avLst/>
@@ -35328,14 +35406,14 @@
       </p:sp>
       <p:sp>
         <p:nvSpPr>
-          <p:cNvPr id="16" name="TextBox 15"/>
-          <p:cNvSpPr txBox="1"/>
-          <p:nvPr/>
-        </p:nvSpPr>
-        <p:spPr>
-          <a:xfrm>
-            <a:off x="4542308" y="2057400"/>
-            <a:ext cx="3061357" cy="457200"/>
+          <p:cNvPr id="18" name="TextBox 17"/>
+          <p:cNvSpPr txBox="1"/>
+          <p:nvPr/>
+        </p:nvSpPr>
+        <p:spPr>
+          <a:xfrm>
+            <a:off x="5858291" y="2057400"/>
+            <a:ext cx="2403365" cy="457200"/>
           </a:xfrm>
           <a:prstGeom prst="rect">
             <a:avLst/>
@@ -35360,22 +35438,22 @@
                 </a:solidFill>
                 <a:latin typeface="Arial"/>
               </a:rPr>
-              <a:t>Высокотехнологичные
-отрасли</a:t>
-            </a:r>
-          </a:p>
-        </p:txBody>
-      </p:sp>
-      <p:sp>
-        <p:nvSpPr>
-          <p:cNvPr id="17" name="TextBox 16"/>
-          <p:cNvSpPr txBox="1"/>
-          <p:nvPr/>
-        </p:nvSpPr>
-        <p:spPr>
-          <a:xfrm>
-            <a:off x="4588028" y="2651760"/>
-            <a:ext cx="3015637" cy="365760"/>
+              <a:t>Высокотехнол. отрасли
+(матпроизв., двойн. назн.)</a:t>
+            </a:r>
+          </a:p>
+        </p:txBody>
+      </p:sp>
+      <p:sp>
+        <p:nvSpPr>
+          <p:cNvPr id="19" name="TextBox 18"/>
+          <p:cNvSpPr txBox="1"/>
+          <p:nvPr/>
+        </p:nvSpPr>
+        <p:spPr>
+          <a:xfrm>
+            <a:off x="5904011" y="2651760"/>
+            <a:ext cx="2357645" cy="365760"/>
           </a:xfrm>
           <a:prstGeom prst="rect">
             <a:avLst/>
@@ -35400,21 +35478,21 @@
                 </a:solidFill>
                 <a:latin typeface="Arial"/>
               </a:rPr>
-              <a:t>6. Инж. проект.</a:t>
-            </a:r>
-          </a:p>
-        </p:txBody>
-      </p:sp>
-      <p:sp>
-        <p:nvSpPr>
-          <p:cNvPr id="18" name="TextBox 17"/>
-          <p:cNvSpPr txBox="1"/>
-          <p:nvPr/>
-        </p:nvSpPr>
-        <p:spPr>
-          <a:xfrm>
-            <a:off x="4588028" y="3044952"/>
-            <a:ext cx="3015637" cy="365760"/>
+              <a:t>9. Авиакосмос</a:t>
+            </a:r>
+          </a:p>
+        </p:txBody>
+      </p:sp>
+      <p:sp>
+        <p:nvSpPr>
+          <p:cNvPr id="20" name="TextBox 19"/>
+          <p:cNvSpPr txBox="1"/>
+          <p:nvPr/>
+        </p:nvSpPr>
+        <p:spPr>
+          <a:xfrm>
+            <a:off x="5904011" y="3044952"/>
+            <a:ext cx="2357645" cy="365760"/>
           </a:xfrm>
           <a:prstGeom prst="rect">
             <a:avLst/>
@@ -35439,21 +35517,21 @@
                 </a:solidFill>
                 <a:latin typeface="Arial"/>
               </a:rPr>
-              <a:t>9. Авиакосмос</a:t>
-            </a:r>
-          </a:p>
-        </p:txBody>
-      </p:sp>
-      <p:sp>
-        <p:nvSpPr>
-          <p:cNvPr id="19" name="TextBox 18"/>
-          <p:cNvSpPr txBox="1"/>
-          <p:nvPr/>
-        </p:nvSpPr>
-        <p:spPr>
-          <a:xfrm>
-            <a:off x="4588028" y="3438144"/>
-            <a:ext cx="3015637" cy="365760"/>
+              <a:t>10. Сельское хоз-во</a:t>
+            </a:r>
+          </a:p>
+        </p:txBody>
+      </p:sp>
+      <p:sp>
+        <p:nvSpPr>
+          <p:cNvPr id="21" name="TextBox 20"/>
+          <p:cNvSpPr txBox="1"/>
+          <p:nvPr/>
+        </p:nvSpPr>
+        <p:spPr>
+          <a:xfrm>
+            <a:off x="5904011" y="3438144"/>
+            <a:ext cx="2357645" cy="365760"/>
           </a:xfrm>
           <a:prstGeom prst="rect">
             <a:avLst/>
@@ -35478,21 +35556,21 @@
                 </a:solidFill>
                 <a:latin typeface="Arial"/>
               </a:rPr>
-              <a:t>10. Сельское хоз-во</a:t>
-            </a:r>
-          </a:p>
-        </p:txBody>
-      </p:sp>
-      <p:sp>
-        <p:nvSpPr>
-          <p:cNvPr id="20" name="TextBox 19"/>
-          <p:cNvSpPr txBox="1"/>
-          <p:nvPr/>
-        </p:nvSpPr>
-        <p:spPr>
-          <a:xfrm>
-            <a:off x="4588028" y="3831336"/>
-            <a:ext cx="3015637" cy="365760"/>
+              <a:t>11. Производство</a:t>
+            </a:r>
+          </a:p>
+        </p:txBody>
+      </p:sp>
+      <p:sp>
+        <p:nvSpPr>
+          <p:cNvPr id="22" name="TextBox 21"/>
+          <p:cNvSpPr txBox="1"/>
+          <p:nvPr/>
+        </p:nvSpPr>
+        <p:spPr>
+          <a:xfrm>
+            <a:off x="5904011" y="3831336"/>
+            <a:ext cx="2357645" cy="365760"/>
           </a:xfrm>
           <a:prstGeom prst="rect">
             <a:avLst/>
@@ -35517,45 +35595,6 @@
                 </a:solidFill>
                 <a:latin typeface="Arial"/>
               </a:rPr>
-              <a:t>11. Производство</a:t>
-            </a:r>
-          </a:p>
-        </p:txBody>
-      </p:sp>
-      <p:sp>
-        <p:nvSpPr>
-          <p:cNvPr id="21" name="TextBox 20"/>
-          <p:cNvSpPr txBox="1"/>
-          <p:nvPr/>
-        </p:nvSpPr>
-        <p:spPr>
-          <a:xfrm>
-            <a:off x="4588028" y="4224528"/>
-            <a:ext cx="3015637" cy="365760"/>
-          </a:xfrm>
-          <a:prstGeom prst="rect">
-            <a:avLst/>
-          </a:prstGeom>
-          <a:noFill/>
-        </p:spPr>
-        <p:txBody>
-          <a:bodyPr wrap="square" lIns="0" rIns="0" tIns="0" bIns="0" anchor="t">
-            <a:spAutoFit/>
-          </a:bodyPr>
-          <a:lstStyle/>
-          <a:p>
-            <a:pPr algn="l">
-              <a:lnSpc>
-                <a:spcPct val="120000"/>
-              </a:lnSpc>
-            </a:pPr>
-            <a:r>
-              <a:rPr sz="1000" b="0" i="0">
-                <a:solidFill>
-                  <a:srgbClr val="21295C"/>
-                </a:solidFill>
-                <a:latin typeface="Arial"/>
-              </a:rPr>
               <a:t>12. Цифровые двойники ◆РК2</a:t>
             </a:r>
           </a:p>
@@ -35563,18 +35602,18 @@
       </p:sp>
       <p:sp>
         <p:nvSpPr>
-          <p:cNvPr id="22" name="Rounded Rectangle 21"/>
+          <p:cNvPr id="23" name="Rounded Rectangle 22"/>
           <p:cNvSpPr/>
           <p:nvPr/>
         </p:nvSpPr>
         <p:spPr>
           <a:xfrm>
-            <a:off x="7740826" y="1691640"/>
-            <a:ext cx="3902228" cy="4434840"/>
+            <a:off x="8398817" y="1691640"/>
+            <a:ext cx="3244237" cy="4434840"/>
           </a:xfrm>
           <a:prstGeom prst="roundRect">
             <a:avLst>
-              <a:gd name="adj" fmla="val 7810"/>
+              <a:gd name="adj" fmla="val 9395"/>
             </a:avLst>
           </a:prstGeom>
           <a:solidFill>
@@ -35611,14 +35650,14 @@
       </p:sp>
       <p:sp>
         <p:nvSpPr>
-          <p:cNvPr id="23" name="Rounded Rectangle 22"/>
+          <p:cNvPr id="24" name="Rounded Rectangle 23"/>
           <p:cNvSpPr/>
           <p:nvPr/>
         </p:nvSpPr>
         <p:spPr>
           <a:xfrm>
-            <a:off x="7740826" y="1691640"/>
-            <a:ext cx="3902228" cy="777240"/>
+            <a:off x="8398817" y="1691640"/>
+            <a:ext cx="3244237" cy="777240"/>
           </a:xfrm>
           <a:prstGeom prst="roundRect">
             <a:avLst>
@@ -35657,14 +35696,14 @@
       </p:sp>
       <p:sp>
         <p:nvSpPr>
-          <p:cNvPr id="24" name="TextBox 23"/>
-          <p:cNvSpPr txBox="1"/>
-          <p:nvPr/>
-        </p:nvSpPr>
-        <p:spPr>
-          <a:xfrm>
-            <a:off x="7740826" y="1764792"/>
-            <a:ext cx="3902228" cy="320040"/>
+          <p:cNvPr id="25" name="TextBox 24"/>
+          <p:cNvSpPr txBox="1"/>
+          <p:nvPr/>
+        </p:nvSpPr>
+        <p:spPr>
+          <a:xfrm>
+            <a:off x="8398817" y="1764792"/>
+            <a:ext cx="3244237" cy="320040"/>
           </a:xfrm>
           <a:prstGeom prst="rect">
             <a:avLst/>
@@ -35696,14 +35735,14 @@
       </p:sp>
       <p:sp>
         <p:nvSpPr>
-          <p:cNvPr id="25" name="TextBox 24"/>
-          <p:cNvSpPr txBox="1"/>
-          <p:nvPr/>
-        </p:nvSpPr>
-        <p:spPr>
-          <a:xfrm>
-            <a:off x="7832266" y="2057400"/>
-            <a:ext cx="3719348" cy="457200"/>
+          <p:cNvPr id="26" name="TextBox 25"/>
+          <p:cNvSpPr txBox="1"/>
+          <p:nvPr/>
+        </p:nvSpPr>
+        <p:spPr>
+          <a:xfrm>
+            <a:off x="8490257" y="2057400"/>
+            <a:ext cx="3061357" cy="457200"/>
           </a:xfrm>
           <a:prstGeom prst="rect">
             <a:avLst/>
@@ -35728,7 +35767,7 @@
                 </a:solidFill>
                 <a:latin typeface="Arial"/>
               </a:rPr>
-              <a:t>Креатив, ИКТ,
+              <a:t>Инфокоммуникации,
 наука, добыча, синтез</a:t>
             </a:r>
           </a:p>
@@ -35736,14 +35775,14 @@
       </p:sp>
       <p:sp>
         <p:nvSpPr>
-          <p:cNvPr id="26" name="TextBox 25"/>
-          <p:cNvSpPr txBox="1"/>
-          <p:nvPr/>
-        </p:nvSpPr>
-        <p:spPr>
-          <a:xfrm>
-            <a:off x="7877986" y="2651760"/>
-            <a:ext cx="3673628" cy="365760"/>
+          <p:cNvPr id="27" name="TextBox 26"/>
+          <p:cNvSpPr txBox="1"/>
+          <p:nvPr/>
+        </p:nvSpPr>
+        <p:spPr>
+          <a:xfrm>
+            <a:off x="8535977" y="2651760"/>
+            <a:ext cx="3015637" cy="365760"/>
           </a:xfrm>
           <a:prstGeom prst="rect">
             <a:avLst/>
@@ -35768,21 +35807,21 @@
                 </a:solidFill>
                 <a:latin typeface="Arial"/>
               </a:rPr>
-              <a:t>8. Креативные ◆РК1</a:t>
-            </a:r>
-          </a:p>
-        </p:txBody>
-      </p:sp>
-      <p:sp>
-        <p:nvSpPr>
-          <p:cNvPr id="27" name="TextBox 26"/>
-          <p:cNvSpPr txBox="1"/>
-          <p:nvPr/>
-        </p:nvSpPr>
-        <p:spPr>
-          <a:xfrm>
-            <a:off x="7877986" y="3044952"/>
-            <a:ext cx="3673628" cy="365760"/>
+              <a:t>13. Логистика</a:t>
+            </a:r>
+          </a:p>
+        </p:txBody>
+      </p:sp>
+      <p:sp>
+        <p:nvSpPr>
+          <p:cNvPr id="28" name="TextBox 27"/>
+          <p:cNvSpPr txBox="1"/>
+          <p:nvPr/>
+        </p:nvSpPr>
+        <p:spPr>
+          <a:xfrm>
+            <a:off x="8535977" y="3044952"/>
+            <a:ext cx="3015637" cy="365760"/>
           </a:xfrm>
           <a:prstGeom prst="rect">
             <a:avLst/>
@@ -35807,21 +35846,21 @@
                 </a:solidFill>
                 <a:latin typeface="Arial"/>
               </a:rPr>
-              <a:t>13. Логистика</a:t>
-            </a:r>
-          </a:p>
-        </p:txBody>
-      </p:sp>
-      <p:sp>
-        <p:nvSpPr>
-          <p:cNvPr id="28" name="TextBox 27"/>
-          <p:cNvSpPr txBox="1"/>
-          <p:nvPr/>
-        </p:nvSpPr>
-        <p:spPr>
-          <a:xfrm>
-            <a:off x="7877986" y="3438144"/>
-            <a:ext cx="3673628" cy="365760"/>
+              <a:t>14. Телеком + cybersec</a:t>
+            </a:r>
+          </a:p>
+        </p:txBody>
+      </p:sp>
+      <p:sp>
+        <p:nvSpPr>
+          <p:cNvPr id="29" name="TextBox 28"/>
+          <p:cNvSpPr txBox="1"/>
+          <p:nvPr/>
+        </p:nvSpPr>
+        <p:spPr>
+          <a:xfrm>
+            <a:off x="8535977" y="3438144"/>
+            <a:ext cx="3015637" cy="365760"/>
           </a:xfrm>
           <a:prstGeom prst="rect">
             <a:avLst/>
@@ -35846,21 +35885,21 @@
                 </a:solidFill>
                 <a:latin typeface="Arial"/>
               </a:rPr>
-              <a:t>14. Телеком + cybersec</a:t>
-            </a:r>
-          </a:p>
-        </p:txBody>
-      </p:sp>
-      <p:sp>
-        <p:nvSpPr>
-          <p:cNvPr id="29" name="TextBox 28"/>
-          <p:cNvSpPr txBox="1"/>
-          <p:nvPr/>
-        </p:nvSpPr>
-        <p:spPr>
-          <a:xfrm>
-            <a:off x="7877986" y="3831336"/>
-            <a:ext cx="3673628" cy="365760"/>
+              <a:t>15. Наука</a:t>
+            </a:r>
+          </a:p>
+        </p:txBody>
+      </p:sp>
+      <p:sp>
+        <p:nvSpPr>
+          <p:cNvPr id="30" name="TextBox 29"/>
+          <p:cNvSpPr txBox="1"/>
+          <p:nvPr/>
+        </p:nvSpPr>
+        <p:spPr>
+          <a:xfrm>
+            <a:off x="8535977" y="3831336"/>
+            <a:ext cx="3015637" cy="365760"/>
           </a:xfrm>
           <a:prstGeom prst="rect">
             <a:avLst/>
@@ -35885,45 +35924,6 @@
                 </a:solidFill>
                 <a:latin typeface="Arial"/>
               </a:rPr>
-              <a:t>15. Наука</a:t>
-            </a:r>
-          </a:p>
-        </p:txBody>
-      </p:sp>
-      <p:sp>
-        <p:nvSpPr>
-          <p:cNvPr id="30" name="TextBox 29"/>
-          <p:cNvSpPr txBox="1"/>
-          <p:nvPr/>
-        </p:nvSpPr>
-        <p:spPr>
-          <a:xfrm>
-            <a:off x="7877986" y="4224528"/>
-            <a:ext cx="3673628" cy="365760"/>
-          </a:xfrm>
-          <a:prstGeom prst="rect">
-            <a:avLst/>
-          </a:prstGeom>
-          <a:noFill/>
-        </p:spPr>
-        <p:txBody>
-          <a:bodyPr wrap="square" lIns="0" rIns="0" tIns="0" bIns="0" anchor="t">
-            <a:spAutoFit/>
-          </a:bodyPr>
-          <a:lstStyle/>
-          <a:p>
-            <a:pPr algn="l">
-              <a:lnSpc>
-                <a:spcPct val="120000"/>
-              </a:lnSpc>
-            </a:pPr>
-            <a:r>
-              <a:rPr sz="1000" b="0" i="0">
-                <a:solidFill>
-                  <a:srgbClr val="21295C"/>
-                </a:solidFill>
-                <a:latin typeface="Arial"/>
-              </a:rPr>
               <a:t>16. Нефтегаз</a:t>
             </a:r>
           </a:p>
@@ -35937,8 +35937,8 @@
         </p:nvSpPr>
         <p:spPr>
           <a:xfrm>
-            <a:off x="7877986" y="4617720"/>
-            <a:ext cx="3673628" cy="365760"/>
+            <a:off x="8535977" y="4224528"/>
+            <a:ext cx="3015637" cy="365760"/>
           </a:xfrm>
           <a:prstGeom prst="rect">
             <a:avLst/>

--- a/library/lectures/lec-01/rendered/lec-01.pptx
+++ b/library/lectures/lec-01/rendered/lec-01.pptx
@@ -723,25 +723,25 @@
           <a:p/>
           <a:p>
             <a:r>
-              <a:t>Эпизод первый — Mistral 7B, сентябрь двадцать третьего года. Французская лаборатория Mistral AI, основанная в начале того же года выходцами из Meta и Google DeepMind, выпустила модель под лицензией Apache 2.0 — без ограничений на коммерческое использование. По бенчмаркам Mistral 7B превзошёл Llama-2 13B, модель почти вдвое большего размера. Урок: небольшая европейская команда может выпустить модель уровня крупных игроков за несколько месяцев от основания компании.</a:t>
+              <a:t>Урок: небольшая европейская команда может выпустить модель уровня крупных игроков за несколько месяцев от основания компании. Эпизод первый — Mistral 7B, сентябрь двадцать третьего года. Французская лаборатория Mistral AI, основанная в начале того же года выходцами из Meta и Google DeepMind, выпустила модель под лицензией Apache 2.0 — без ограничений на коммерческое использование. По бенчмаркам Mistral 7B превзошёл Llama-2 13B, модель почти вдвое большего размера.</a:t>
             </a:r>
           </a:p>
           <a:p/>
           <a:p>
             <a:r>
-              <a:t>Эпизод второй — DeepSeek R1, январь двадцать пятого. Китайская лаборатория выпустила reasoning-модель уровня OpenAI o1: девяносто семь и три процента на бенчмарке MATH-500 против девяносто шести и четырёх у o1. Опубликованная стоимость одного финального тренировочного прогона V3 — около пяти и шести миллионов долларов, на порядки меньше западных оценок. Полная стоимость инфраструктуры по оценке SemiAnalysis — один и три–один и шесть миллиарда. Это разные числа: marginal training run и полная инфраструктура. Двадцать седьмого января рынок отреагировал — капитализация Nvidia упала на пятьсот восемьдесят девять миллиардов долларов за один день, крупнейшая single-day потеря капитализации в истории.</a:t>
+              <a:t>Урок: даже спорная методология подсчёта себестоимости может вызвать реальный, измеримый шок на глобальном рынке — проверяйте заявленные цифры, но не игнорируйте их эффект. Эпизод второй — DeepSeek R1, январь двадцать пятого. Китайская лаборатория выпустила reasoning-модель уровня OpenAI o1: девяносто семь и три процента на бенчмарке MATH-500 против девяносто шести и четырёх у o1. Опубликованная стоимость одного финального тренировочного прогона V3 — около пяти и шести миллионов долларов, на порядки меньше западных оценок. Полная стоимость инфраструктуры по оценке SemiAnalysis — один и три–один и шесть миллиарда. Это разные числа: стоимость одного тренировочного прогона и полная инфраструктура. Двадцать седьмого января рынок отреагировал — капитализация Nvidia упала на пятьсот восемьдесят девять миллиардов долларов за один день, крупнейшая однодневная потеря капитализации в истории.</a:t>
             </a:r>
           </a:p>
           <a:p/>
           <a:p>
             <a:r>
-              <a:t>Эпизод третий — OpenClaw, ноябрь двадцать пятого. Питер Стейнбергер, известный по Mac-разработке, в одиночку запустил open-source автономного AI-агента. Проект сменил несколько имён — Clawdbot, Moltbot — и закрепился как OpenClaw. К началу двадцать шестого года проект собрал больше ста тысяч звёзд на GitHub (из них шестьдесят тысяч за первые семьдесят два часа). Урок: один человек с правильным концептом может выпустить агент или продукт, меняющий рынок за недели.</a:t>
+              <a:t>Урок: один человек с правильным концептом может выпустить агент или продукт, меняющий рынок за недели. Эпизод третий — OpenClaw, ноябрь двадцать пятого. Питер Стейнбергер, известный по Mac-разработке, в одиночку запустил open-source автономного AI-агента. Проект сменил несколько имён — Clawdbot, Moltbot — и закрепился как OpenClaw. К началу двадцать шестого года проект собрал больше ста тысяч звёзд на GitHub (из них шестьдесят тысяч за первые семьдесят два часа).</a:t>
             </a:r>
           </a:p>
           <a:p/>
           <a:p>
             <a:r>
-              <a:t>Эпизод четвёртый — llama.cpp и ggml.ai, история Георгия Герганова. Проект начался как сольная инициатива Герганова — автора whisper.cpp — и вырос в маленькую независимую команду ggml.ai. Двадцатого февраля двадцать шестого года команда, вместо привлечения венчурного финансирования, присоединилась к Hugging Face за инфраструктурную поддержку, сохранив полную автономию и техническое лидерство: проект остался «на сто процентов open-source, community-driven, как и сейчас». В марте двадцать шестого llama.cpp пересёк сто тысяч звёзд на GitHub — быстрее, чем PyTorch или TensorFlow. К середине года — около ста семнадцати тысяч звёзд, около двадцати тысяч форков, вклад более семисот разработчиков. Урок: один человек с правильным концептом может построить инфраструктурный слой, на который опираются тысячи — не продукт для конечного пользователя, а фундамент, на котором работает вся открытая экосистема.</a:t>
+              <a:t>Урок: один человек с правильным концептом может построить инфраструктурный слой, на который опираются тысячи — не продукт для конечного пользователя, а фундамент, на котором работает вся открытая экосистема. Эпизод четвёртый — llama.cpp и ggml.ai, история Георгия Герганова. Проект начался как сольная инициатива Герганова — автора whisper.cpp — и вырос в маленькую независимую команду ggml.ai. Двадцатого февраля двадцать шестого года команда, вместо привлечения венчурного финансирования, присоединилась к Hugging Face за инфраструктурную поддержку, сохранив полную автономию и техническое лидерство: проект остался «на сто процентов open-source, community-driven, как и сейчас». В марте двадцать шестого llama.cpp пересёк сто тысяч звёзд на GitHub — быстрее, чем PyTorch или TensorFlow. К середине года — около ста семнадцати тысяч звёзд, около двадцати тысяч форков, вклад более семисот разработчиков.</a:t>
             </a:r>
           </a:p>
           <a:p/>
@@ -1429,13 +1429,13 @@
           <a:p/>
           <a:p>
             <a:r>
-              <a:t>Возьмём конкретный пример. Инженер получает непонятный нормативный документ — скажем, ТЗ от смежного отдела с массой ссылок на стандарты и сложными формулировками. Задача — разобраться и составить чек-лист для собственной работы. Это типовой кейс для чата: разовая задача, требующая диалога, с уточнениями по ходу. Здесь не нужна standalone-модель, потому что нет потока однотипных задач. Не нужен агент, потому что не требуется автоматически открывать файлы и API. И нет специализированного приложения. Чат — оптимальный инструмент.</a:t>
+              <a:t>Возьмём конкретный пример. Инженер получает непонятный нормативный документ — скажем, ТЗ от смежного отдела с массой ссылок на стандарты и сложными формулировками. Задача — разобраться и составить чек-лист для собственной работы. Это типовой кейс для чата: разовая задача, требующая диалога, с уточнениями по ходу. Здесь не нужна отдельная специализированная модель, потому что нет потока однотипных задач. Не нужен агент, потому что не требуется автоматически открывать файлы и API. И нет специализированного приложения. Чат — оптимальный инструмент.</a:t>
             </a:r>
           </a:p>
           <a:p/>
           <a:p>
             <a:r>
-              <a:t>Важный disclaimer для производственных систем. Чистые чаты в том виде, как они есть «из коробки» — то есть просто LLM плюс UI плюс короткая память сессии — в корпоративной среде почти не встречаются. Почти везде, где речь идёт о реальном внедрении, чат расширен до агента: хотя бы для того, чтобы хранить долгосрочную память между сессиями, или для того, чтобы искать ответ в корпоративной базе знаний через RAG (retrieval-augmented generation). Архитектуру агента — что именно добавляется к чату — разберём на следующем слайде.</a:t>
+              <a:t>Важная оговорка для промышленных систем. Чистые чаты в том виде, как они есть «из коробки» — то есть просто LLM плюс UI плюс короткая память сессии — в корпоративной среде почти не встречаются. Почти везде, где речь идёт о реальном внедрении, чат расширен до агента: хотя бы для того, чтобы хранить долгосрочную память между сессиями, или для того, чтобы искать ответ в корпоративной базе знаний через RAG (retrieval-augmented generation). Архитектуру агента — что именно добавляется к чату — разберём на следующем слайде.</a:t>
             </a:r>
           </a:p>
           <a:p/>
@@ -2918,12 +2918,6 @@
           <a:p>
             <a:r>
               <a:t>Модуль четыре — экзамен.</a:t>
-            </a:r>
-          </a:p>
-          <a:p/>
-          <a:p>
-            <a:r>
-              <a:t>Прогрессия навыков промптинга через курс. Сегодня мы зафиксировали минимальную формулу: промпт равен роль плюс задача плюс контекст. Позже в курсе формализуем более подробную схему и разберём chain-of-thought, few-shot, self-consistency. К концу курса вы работаете с промптингом как с инженерной дисциплиной, не как с магией.</a:t>
             </a:r>
           </a:p>
         </p:txBody>
@@ -20127,7 +20121,7 @@
                 </a:solidFill>
                 <a:latin typeface="Arial"/>
               </a:rPr>
-              <a:t>Disclaimer для прод-систем</a:t>
+              <a:t>Оговорка для промышленных систем</a:t>
             </a:r>
           </a:p>
         </p:txBody>
@@ -20141,7 +20135,7 @@
         <p:spPr>
           <a:xfrm>
             <a:off x="7040879" y="2743200"/>
-            <a:ext cx="4389120" cy="2011680"/>
+            <a:ext cx="4389120" cy="1280160"/>
           </a:xfrm>
           <a:prstGeom prst="rect">
             <a:avLst/>
@@ -20156,17 +20150,17 @@
           <a:p>
             <a:pPr algn="l">
               <a:lnSpc>
-                <a:spcPct val="130000"/>
-              </a:lnSpc>
-            </a:pPr>
-            <a:r>
-              <a:rPr sz="1800" b="1" i="0">
+                <a:spcPct val="125000"/>
+              </a:lnSpc>
+            </a:pPr>
+            <a:r>
+              <a:rPr sz="1600" b="1" i="0">
                 <a:solidFill>
                   <a:srgbClr val="21295C"/>
                 </a:solidFill>
                 <a:latin typeface="Arial"/>
               </a:rPr>
-              <a:t>Чистые чаты почти не используются в production.</a:t>
+              <a:t>Чистые чаты почти не используются в промышленной эксплуатации.</a:t>
             </a:r>
           </a:p>
         </p:txBody>
@@ -20179,8 +20173,8 @@
         </p:nvSpPr>
         <p:spPr>
           <a:xfrm>
-            <a:off x="7040879" y="3749039"/>
-            <a:ext cx="4389120" cy="2194560"/>
+            <a:off x="7040879" y="4114800"/>
+            <a:ext cx="4389120" cy="1828800"/>
           </a:xfrm>
           <a:prstGeom prst="rect">
             <a:avLst/>
@@ -20616,7 +20610,7 @@
                 </a:solidFill>
                 <a:latin typeface="Arial"/>
               </a:rPr>
-              <a:t>Plan</a:t>
+              <a:t>План</a:t>
             </a:r>
           </a:p>
         </p:txBody>
@@ -20629,8 +20623,8 @@
         </p:nvSpPr>
         <p:spPr>
           <a:xfrm>
-            <a:off x="2286000" y="3017520"/>
-            <a:ext cx="1783080" cy="457200"/>
+            <a:off x="2267712" y="3017520"/>
+            <a:ext cx="1819656" cy="457200"/>
           </a:xfrm>
           <a:prstGeom prst="rect">
             <a:avLst/>
@@ -20645,17 +20639,17 @@
           <a:p>
             <a:pPr algn="ctr">
               <a:lnSpc>
-                <a:spcPct val="120000"/>
-              </a:lnSpc>
-            </a:pPr>
-            <a:r>
-              <a:rPr sz="1050" b="0" i="1">
+                <a:spcPct val="115000"/>
+              </a:lnSpc>
+            </a:pPr>
+            <a:r>
+              <a:rPr sz="950" b="0" i="1">
                 <a:solidFill>
                   <a:srgbClr val="FFFFFF"/>
                 </a:solidFill>
                 <a:latin typeface="Arial"/>
               </a:rPr>
-              <a:t>план действий</a:t>
+              <a:t>план действий (Plan)</a:t>
             </a:r>
           </a:p>
         </p:txBody>
@@ -20786,7 +20780,7 @@
                 </a:solidFill>
                 <a:latin typeface="Arial"/>
               </a:rPr>
-              <a:t>Act</a:t>
+              <a:t>Действие</a:t>
             </a:r>
           </a:p>
         </p:txBody>
@@ -20799,8 +20793,8 @@
         </p:nvSpPr>
         <p:spPr>
           <a:xfrm>
-            <a:off x="4663440" y="3017520"/>
-            <a:ext cx="1783080" cy="457200"/>
+            <a:off x="4645152" y="3017520"/>
+            <a:ext cx="1819656" cy="457200"/>
           </a:xfrm>
           <a:prstGeom prst="rect">
             <a:avLst/>
@@ -20815,17 +20809,17 @@
           <a:p>
             <a:pPr algn="ctr">
               <a:lnSpc>
-                <a:spcPct val="120000"/>
-              </a:lnSpc>
-            </a:pPr>
-            <a:r>
-              <a:rPr sz="1050" b="0" i="1">
+                <a:spcPct val="115000"/>
+              </a:lnSpc>
+            </a:pPr>
+            <a:r>
+              <a:rPr sz="950" b="0" i="1">
                 <a:solidFill>
                   <a:srgbClr val="FFFFFF"/>
                 </a:solidFill>
                 <a:latin typeface="Arial"/>
               </a:rPr>
-              <a:t>вызов инструмента</a:t>
+              <a:t>вызов инструмента (Act)</a:t>
             </a:r>
           </a:p>
         </p:txBody>
@@ -20950,13 +20944,13 @@
               </a:lnSpc>
             </a:pPr>
             <a:r>
-              <a:rPr sz="1700" b="1" i="0">
+              <a:rPr sz="1400" b="1" i="0">
                 <a:solidFill>
                   <a:srgbClr val="FFFFFF"/>
                 </a:solidFill>
                 <a:latin typeface="Arial"/>
               </a:rPr>
-              <a:t>Observe</a:t>
+              <a:t>Наблюдение</a:t>
             </a:r>
           </a:p>
         </p:txBody>
@@ -20969,8 +20963,8 @@
         </p:nvSpPr>
         <p:spPr>
           <a:xfrm>
-            <a:off x="7040880" y="3017520"/>
-            <a:ext cx="1783080" cy="457200"/>
+            <a:off x="7022592" y="3017520"/>
+            <a:ext cx="1819656" cy="457200"/>
           </a:xfrm>
           <a:prstGeom prst="rect">
             <a:avLst/>
@@ -20985,17 +20979,17 @@
           <a:p>
             <a:pPr algn="ctr">
               <a:lnSpc>
-                <a:spcPct val="120000"/>
-              </a:lnSpc>
-            </a:pPr>
-            <a:r>
-              <a:rPr sz="1050" b="0" i="1">
+                <a:spcPct val="115000"/>
+              </a:lnSpc>
+            </a:pPr>
+            <a:r>
+              <a:rPr sz="950" b="0" i="1">
                 <a:solidFill>
                   <a:srgbClr val="FFFFFF"/>
                 </a:solidFill>
                 <a:latin typeface="Arial"/>
               </a:rPr>
-              <a:t>результат в память</a:t>
+              <a:t>результат в память (Observe)</a:t>
             </a:r>
           </a:p>
         </p:txBody>
@@ -21120,13 +21114,13 @@
               </a:lnSpc>
             </a:pPr>
             <a:r>
-              <a:rPr sz="1700" b="1" i="0">
+              <a:rPr sz="1400" b="1" i="0">
                 <a:solidFill>
                   <a:srgbClr val="FFFFFF"/>
                 </a:solidFill>
                 <a:latin typeface="Arial"/>
               </a:rPr>
-              <a:t>Reflect</a:t>
+              <a:t>Рефлексия</a:t>
             </a:r>
           </a:p>
         </p:txBody>
@@ -21139,8 +21133,8 @@
         </p:nvSpPr>
         <p:spPr>
           <a:xfrm>
-            <a:off x="9418320" y="3017520"/>
-            <a:ext cx="1783080" cy="457200"/>
+            <a:off x="9400032" y="3017520"/>
+            <a:ext cx="1819656" cy="457200"/>
           </a:xfrm>
           <a:prstGeom prst="rect">
             <a:avLst/>
@@ -21155,17 +21149,17 @@
           <a:p>
             <a:pPr algn="ctr">
               <a:lnSpc>
-                <a:spcPct val="120000"/>
-              </a:lnSpc>
-            </a:pPr>
-            <a:r>
-              <a:rPr sz="1050" b="0" i="1">
+                <a:spcPct val="115000"/>
+              </a:lnSpc>
+            </a:pPr>
+            <a:r>
+              <a:rPr sz="950" b="0" i="1">
                 <a:solidFill>
                   <a:srgbClr val="FFFFFF"/>
                 </a:solidFill>
                 <a:latin typeface="Arial"/>
               </a:rPr>
-              <a:t>цель достигнута?</a:t>
+              <a:t>цель достигнута? (Reflect)</a:t>
             </a:r>
           </a:p>
         </p:txBody>
@@ -21336,7 +21330,7 @@
                 </a:solidFill>
                 <a:latin typeface="Arial"/>
               </a:rPr>
-              <a:t>stop → результат пользователю</a:t>
+              <a:t>стоп → результат пользователю</a:t>
             </a:r>
           </a:p>
         </p:txBody>
@@ -21507,7 +21501,7 @@
                 </a:solidFill>
                 <a:latin typeface="Arial"/>
               </a:rPr>
-              <a:t>continue — цикл повторяется</a:t>
+              <a:t>продолжить — цикл повторяется</a:t>
             </a:r>
           </a:p>
         </p:txBody>
@@ -21857,6 +21851,84 @@
       <p:sp>
         <p:nvSpPr>
           <p:cNvPr id="38" name="TextBox 37"/>
+          <p:cNvSpPr txBox="1"/>
+          <p:nvPr/>
+        </p:nvSpPr>
+        <p:spPr>
+          <a:xfrm>
+            <a:off x="4251960" y="3886200"/>
+            <a:ext cx="2606039" cy="201168"/>
+          </a:xfrm>
+          <a:prstGeom prst="rect">
+            <a:avLst/>
+          </a:prstGeom>
+          <a:noFill/>
+        </p:spPr>
+        <p:txBody>
+          <a:bodyPr wrap="square" lIns="0" rIns="0" tIns="0" bIns="0" anchor="t">
+            <a:spAutoFit/>
+          </a:bodyPr>
+          <a:lstStyle/>
+          <a:p>
+            <a:pPr algn="ctr">
+              <a:lnSpc>
+                <a:spcPct val="115000"/>
+              </a:lnSpc>
+            </a:pPr>
+            <a:r>
+              <a:rPr sz="850" b="0" i="1">
+                <a:solidFill>
+                  <a:srgbClr val="028090"/>
+                </a:solidFill>
+                <a:latin typeface="Arial"/>
+              </a:rPr>
+              <a:t>использует</a:t>
+            </a:r>
+          </a:p>
+        </p:txBody>
+      </p:sp>
+      <p:sp>
+        <p:nvSpPr>
+          <p:cNvPr id="39" name="TextBox 38"/>
+          <p:cNvSpPr txBox="1"/>
+          <p:nvPr/>
+        </p:nvSpPr>
+        <p:spPr>
+          <a:xfrm>
+            <a:off x="6629400" y="3886200"/>
+            <a:ext cx="2606039" cy="201168"/>
+          </a:xfrm>
+          <a:prstGeom prst="rect">
+            <a:avLst/>
+          </a:prstGeom>
+          <a:noFill/>
+        </p:spPr>
+        <p:txBody>
+          <a:bodyPr wrap="square" lIns="0" rIns="0" tIns="0" bIns="0" anchor="t">
+            <a:spAutoFit/>
+          </a:bodyPr>
+          <a:lstStyle/>
+          <a:p>
+            <a:pPr algn="ctr">
+              <a:lnSpc>
+                <a:spcPct val="115000"/>
+              </a:lnSpc>
+            </a:pPr>
+            <a:r>
+              <a:rPr sz="850" b="0" i="1">
+                <a:solidFill>
+                  <a:srgbClr val="1C7293"/>
+                </a:solidFill>
+                <a:latin typeface="Arial"/>
+              </a:rPr>
+              <a:t>использует</a:t>
+            </a:r>
+          </a:p>
+        </p:txBody>
+      </p:sp>
+      <p:sp>
+        <p:nvSpPr>
+          <p:cNvPr id="40" name="TextBox 39"/>
           <p:cNvSpPr txBox="1"/>
           <p:nvPr/>
         </p:nvSpPr>
@@ -22627,8 +22699,8 @@
         </p:nvSpPr>
         <p:spPr>
           <a:xfrm>
-            <a:off x="9281160" y="2404872"/>
-            <a:ext cx="2103120" cy="292607"/>
+            <a:off x="9326880" y="2404872"/>
+            <a:ext cx="2011680" cy="292607"/>
           </a:xfrm>
           <a:prstGeom prst="rect">
             <a:avLst/>
@@ -22653,7 +22725,7 @@
                 </a:solidFill>
                 <a:latin typeface="Arial"/>
               </a:rPr>
-              <a:t>file system</a:t>
+              <a:t>файловая система</a:t>
             </a:r>
           </a:p>
         </p:txBody>
@@ -22836,8 +22908,8 @@
         </p:nvSpPr>
         <p:spPr>
           <a:xfrm>
-            <a:off x="9281160" y="2935224"/>
-            <a:ext cx="2103120" cy="292607"/>
+            <a:off x="9326880" y="2935224"/>
+            <a:ext cx="2011680" cy="292607"/>
           </a:xfrm>
           <a:prstGeom prst="rect">
             <a:avLst/>
@@ -22862,7 +22934,7 @@
                 </a:solidFill>
                 <a:latin typeface="Arial"/>
               </a:rPr>
-              <a:t>PDF reader</a:t>
+              <a:t>чтение PDF</a:t>
             </a:r>
           </a:p>
         </p:txBody>
@@ -23045,8 +23117,8 @@
         </p:nvSpPr>
         <p:spPr>
           <a:xfrm>
-            <a:off x="9281160" y="3465576"/>
-            <a:ext cx="2103120" cy="292607"/>
+            <a:off x="9326880" y="3465576"/>
+            <a:ext cx="2011680" cy="292607"/>
           </a:xfrm>
           <a:prstGeom prst="rect">
             <a:avLst/>
@@ -23065,13 +23137,13 @@
               </a:lnSpc>
             </a:pPr>
             <a:r>
-              <a:rPr sz="1000" b="0" i="1">
+              <a:rPr sz="850" b="0" i="1">
                 <a:solidFill>
                   <a:srgbClr val="028090"/>
                 </a:solidFill>
                 <a:latin typeface="Arial"/>
               </a:rPr>
-              <a:t>text extraction (OCR / parser)</a:t>
+              <a:t>извлечение текста (OCR / парсер)</a:t>
             </a:r>
           </a:p>
         </p:txBody>
@@ -23254,8 +23326,8 @@
         </p:nvSpPr>
         <p:spPr>
           <a:xfrm>
-            <a:off x="9281160" y="3995927"/>
-            <a:ext cx="2103120" cy="292607"/>
+            <a:off x="9326880" y="3995927"/>
+            <a:ext cx="2011680" cy="292607"/>
           </a:xfrm>
           <a:prstGeom prst="rect">
             <a:avLst/>
@@ -23280,7 +23352,7 @@
                 </a:solidFill>
                 <a:latin typeface="Arial"/>
               </a:rPr>
-              <a:t>embeddings + vector DB</a:t>
+              <a:t>эмбеддинги + векторная БД</a:t>
             </a:r>
           </a:p>
         </p:txBody>
@@ -23463,8 +23535,8 @@
         </p:nvSpPr>
         <p:spPr>
           <a:xfrm>
-            <a:off x="9281160" y="4526279"/>
-            <a:ext cx="2103120" cy="292607"/>
+            <a:off x="9326880" y="4526279"/>
+            <a:ext cx="2011680" cy="292607"/>
           </a:xfrm>
           <a:prstGeom prst="rect">
             <a:avLst/>
@@ -23489,7 +23561,7 @@
                 </a:solidFill>
                 <a:latin typeface="Arial"/>
               </a:rPr>
-              <a:t>search + LLM extract</a:t>
+              <a:t>поиск + извлечение LLM</a:t>
             </a:r>
           </a:p>
         </p:txBody>
@@ -23672,8 +23744,8 @@
         </p:nvSpPr>
         <p:spPr>
           <a:xfrm>
-            <a:off x="9281160" y="5056631"/>
-            <a:ext cx="2103120" cy="292607"/>
+            <a:off x="9326880" y="5056631"/>
+            <a:ext cx="2011680" cy="292607"/>
           </a:xfrm>
           <a:prstGeom prst="rect">
             <a:avLst/>
@@ -23692,13 +23764,13 @@
               </a:lnSpc>
             </a:pPr>
             <a:r>
-              <a:rPr sz="1000" b="0" i="1">
+              <a:rPr sz="850" b="0" i="1">
                 <a:solidFill>
                   <a:srgbClr val="028090"/>
                 </a:solidFill>
                 <a:latin typeface="Arial"/>
               </a:rPr>
-              <a:t>Sheets API / CSV writer</a:t>
+              <a:t>запись в таблицу (Sheets API / CSV)</a:t>
             </a:r>
           </a:p>
         </p:txBody>
@@ -23881,8 +23953,8 @@
         </p:nvSpPr>
         <p:spPr>
           <a:xfrm>
-            <a:off x="9281160" y="5586983"/>
-            <a:ext cx="2103120" cy="292607"/>
+            <a:off x="9326880" y="5586983"/>
+            <a:ext cx="2011680" cy="292607"/>
           </a:xfrm>
           <a:prstGeom prst="rect">
             <a:avLst/>
@@ -23907,7 +23979,7 @@
                 </a:solidFill>
                 <a:latin typeface="Arial"/>
               </a:rPr>
-              <a:t>orchestrator loop</a:t>
+              <a:t>цикл оркестратора</a:t>
             </a:r>
           </a:p>
         </p:txBody>
@@ -24252,8 +24324,8 @@
         </p:nvSpPr>
         <p:spPr>
           <a:xfrm>
-            <a:off x="868680" y="5330952"/>
-            <a:ext cx="2377440" cy="292608"/>
+            <a:off x="868680" y="5321808"/>
+            <a:ext cx="5029200" cy="256032"/>
           </a:xfrm>
           <a:prstGeom prst="rect">
             <a:avLst/>
@@ -24272,13 +24344,13 @@
               </a:lnSpc>
             </a:pPr>
             <a:r>
-              <a:rPr sz="1300" b="1" i="0">
+              <a:rPr sz="1150" b="1" i="0">
                 <a:solidFill>
                   <a:srgbClr val="FFFFFF"/>
                 </a:solidFill>
                 <a:latin typeface="Arial"/>
               </a:rPr>
-              <a:t>1. Operator</a:t>
+              <a:t>1. Оператор (Operator)</a:t>
             </a:r>
           </a:p>
         </p:txBody>
@@ -24291,8 +24363,8 @@
         </p:nvSpPr>
         <p:spPr>
           <a:xfrm>
-            <a:off x="868680" y="5641848"/>
-            <a:ext cx="5029200" cy="274320"/>
+            <a:off x="868680" y="5586984"/>
+            <a:ext cx="5029200" cy="201168"/>
           </a:xfrm>
           <a:prstGeom prst="rect">
             <a:avLst/>
@@ -24311,7 +24383,7 @@
               </a:lnSpc>
             </a:pPr>
             <a:r>
-              <a:rPr sz="1000" b="0" i="1">
+              <a:rPr sz="950" b="0" i="1">
                 <a:solidFill>
                   <a:srgbClr val="FFFFFF"/>
                 </a:solidFill>
@@ -24330,8 +24402,8 @@
         </p:nvSpPr>
         <p:spPr>
           <a:xfrm>
-            <a:off x="3291839" y="5330952"/>
-            <a:ext cx="2606039" cy="292608"/>
+            <a:off x="868680" y="5769864"/>
+            <a:ext cx="5029200" cy="182880"/>
           </a:xfrm>
           <a:prstGeom prst="rect">
             <a:avLst/>
@@ -24350,7 +24422,7 @@
               </a:lnSpc>
             </a:pPr>
             <a:r>
-              <a:rPr sz="1000" b="0" i="0">
+              <a:rPr sz="900" b="0" i="0">
                 <a:solidFill>
                   <a:srgbClr val="FFFFFF"/>
                 </a:solidFill>
@@ -24415,8 +24487,8 @@
         </p:nvSpPr>
         <p:spPr>
           <a:xfrm>
-            <a:off x="868680" y="4617720"/>
-            <a:ext cx="2377440" cy="292608"/>
+            <a:off x="868680" y="4608576"/>
+            <a:ext cx="5029200" cy="256032"/>
           </a:xfrm>
           <a:prstGeom prst="rect">
             <a:avLst/>
@@ -24435,13 +24507,13 @@
               </a:lnSpc>
             </a:pPr>
             <a:r>
-              <a:rPr sz="1300" b="1" i="0">
+              <a:rPr sz="1150" b="1" i="0">
                 <a:solidFill>
                   <a:srgbClr val="FFFFFF"/>
                 </a:solidFill>
                 <a:latin typeface="Arial"/>
               </a:rPr>
-              <a:t>2. Collaborator</a:t>
+              <a:t>2. Соавтор (Collaborator)</a:t>
             </a:r>
           </a:p>
         </p:txBody>
@@ -24454,8 +24526,8 @@
         </p:nvSpPr>
         <p:spPr>
           <a:xfrm>
-            <a:off x="868680" y="4928616"/>
-            <a:ext cx="5029200" cy="274320"/>
+            <a:off x="868680" y="4873752"/>
+            <a:ext cx="5029200" cy="201168"/>
           </a:xfrm>
           <a:prstGeom prst="rect">
             <a:avLst/>
@@ -24474,7 +24546,7 @@
               </a:lnSpc>
             </a:pPr>
             <a:r>
-              <a:rPr sz="1000" b="0" i="1">
+              <a:rPr sz="950" b="0" i="1">
                 <a:solidFill>
                   <a:srgbClr val="FFFFFF"/>
                 </a:solidFill>
@@ -24493,8 +24565,8 @@
         </p:nvSpPr>
         <p:spPr>
           <a:xfrm>
-            <a:off x="3291839" y="4617720"/>
-            <a:ext cx="2606039" cy="292608"/>
+            <a:off x="868680" y="5056632"/>
+            <a:ext cx="5029200" cy="182880"/>
           </a:xfrm>
           <a:prstGeom prst="rect">
             <a:avLst/>
@@ -24513,7 +24585,7 @@
               </a:lnSpc>
             </a:pPr>
             <a:r>
-              <a:rPr sz="1000" b="0" i="0">
+              <a:rPr sz="900" b="0" i="0">
                 <a:solidFill>
                   <a:srgbClr val="FFFFFF"/>
                 </a:solidFill>
@@ -24578,8 +24650,8 @@
         </p:nvSpPr>
         <p:spPr>
           <a:xfrm>
-            <a:off x="868680" y="3904488"/>
-            <a:ext cx="2377440" cy="292608"/>
+            <a:off x="868680" y="3895344"/>
+            <a:ext cx="5029200" cy="256032"/>
           </a:xfrm>
           <a:prstGeom prst="rect">
             <a:avLst/>
@@ -24598,13 +24670,13 @@
               </a:lnSpc>
             </a:pPr>
             <a:r>
-              <a:rPr sz="1300" b="1" i="0">
+              <a:rPr sz="1150" b="1" i="0">
                 <a:solidFill>
                   <a:srgbClr val="FFFFFF"/>
                 </a:solidFill>
                 <a:latin typeface="Arial"/>
               </a:rPr>
-              <a:t>3. Consultant</a:t>
+              <a:t>3. Консультант (Consultant)</a:t>
             </a:r>
           </a:p>
         </p:txBody>
@@ -24617,8 +24689,8 @@
         </p:nvSpPr>
         <p:spPr>
           <a:xfrm>
-            <a:off x="868680" y="4215384"/>
-            <a:ext cx="5029200" cy="274320"/>
+            <a:off x="868680" y="4160520"/>
+            <a:ext cx="5029200" cy="201168"/>
           </a:xfrm>
           <a:prstGeom prst="rect">
             <a:avLst/>
@@ -24637,7 +24709,7 @@
               </a:lnSpc>
             </a:pPr>
             <a:r>
-              <a:rPr sz="1000" b="0" i="1">
+              <a:rPr sz="950" b="0" i="1">
                 <a:solidFill>
                   <a:srgbClr val="FFFFFF"/>
                 </a:solidFill>
@@ -24656,8 +24728,8 @@
         </p:nvSpPr>
         <p:spPr>
           <a:xfrm>
-            <a:off x="3291839" y="3904488"/>
-            <a:ext cx="2606039" cy="292608"/>
+            <a:off x="868680" y="4343400"/>
+            <a:ext cx="5029200" cy="182880"/>
           </a:xfrm>
           <a:prstGeom prst="rect">
             <a:avLst/>
@@ -24676,7 +24748,7 @@
               </a:lnSpc>
             </a:pPr>
             <a:r>
-              <a:rPr sz="1000" b="0" i="0">
+              <a:rPr sz="900" b="0" i="0">
                 <a:solidFill>
                   <a:srgbClr val="FFFFFF"/>
                 </a:solidFill>
@@ -24741,8 +24813,8 @@
         </p:nvSpPr>
         <p:spPr>
           <a:xfrm>
-            <a:off x="868680" y="3191256"/>
-            <a:ext cx="2377440" cy="292608"/>
+            <a:off x="868680" y="3182112"/>
+            <a:ext cx="5029200" cy="256032"/>
           </a:xfrm>
           <a:prstGeom prst="rect">
             <a:avLst/>
@@ -24761,13 +24833,13 @@
               </a:lnSpc>
             </a:pPr>
             <a:r>
-              <a:rPr sz="1300" b="1" i="0">
+              <a:rPr sz="1150" b="1" i="0">
                 <a:solidFill>
                   <a:srgbClr val="FFFFFF"/>
                 </a:solidFill>
                 <a:latin typeface="Arial"/>
               </a:rPr>
-              <a:t>4. Approver</a:t>
+              <a:t>4. Утверждающий (Approver)</a:t>
             </a:r>
           </a:p>
         </p:txBody>
@@ -24780,8 +24852,8 @@
         </p:nvSpPr>
         <p:spPr>
           <a:xfrm>
-            <a:off x="868680" y="3502152"/>
-            <a:ext cx="5029200" cy="274320"/>
+            <a:off x="868680" y="3447288"/>
+            <a:ext cx="5029200" cy="201168"/>
           </a:xfrm>
           <a:prstGeom prst="rect">
             <a:avLst/>
@@ -24800,13 +24872,13 @@
               </a:lnSpc>
             </a:pPr>
             <a:r>
-              <a:rPr sz="1000" b="0" i="1">
+              <a:rPr sz="950" b="0" i="1">
                 <a:solidFill>
                   <a:srgbClr val="FFFFFF"/>
                 </a:solidFill>
                 <a:latin typeface="Arial"/>
               </a:rPr>
-              <a:t>agent действует, gate на узлах</a:t>
+              <a:t>агент действует, gate на узлах</a:t>
             </a:r>
           </a:p>
         </p:txBody>
@@ -24819,8 +24891,8 @@
         </p:nvSpPr>
         <p:spPr>
           <a:xfrm>
-            <a:off x="3291839" y="3191256"/>
-            <a:ext cx="2606039" cy="292608"/>
+            <a:off x="868680" y="3630168"/>
+            <a:ext cx="5029200" cy="182880"/>
           </a:xfrm>
           <a:prstGeom prst="rect">
             <a:avLst/>
@@ -24839,13 +24911,13 @@
               </a:lnSpc>
             </a:pPr>
             <a:r>
-              <a:rPr sz="1000" b="0" i="0">
+              <a:rPr sz="900" b="0" i="0">
                 <a:solidFill>
                   <a:srgbClr val="FFFFFF"/>
                 </a:solidFill>
                 <a:latin typeface="Arial"/>
               </a:rPr>
-              <a:t>agent собирает PR, ждёт review</a:t>
+              <a:t>агент собирает PR, ждёт review</a:t>
             </a:r>
           </a:p>
         </p:txBody>
@@ -24906,8 +24978,8 @@
         </p:nvSpPr>
         <p:spPr>
           <a:xfrm>
-            <a:off x="868680" y="2478024"/>
-            <a:ext cx="2377440" cy="292608"/>
+            <a:off x="868680" y="2468880"/>
+            <a:ext cx="5029200" cy="256032"/>
           </a:xfrm>
           <a:prstGeom prst="rect">
             <a:avLst/>
@@ -24926,13 +24998,13 @@
               </a:lnSpc>
             </a:pPr>
             <a:r>
-              <a:rPr sz="1300" b="1" i="0">
+              <a:rPr sz="1150" b="1" i="0">
                 <a:solidFill>
                   <a:srgbClr val="21295C"/>
                 </a:solidFill>
                 <a:latin typeface="Arial"/>
               </a:rPr>
-              <a:t>5. Observer</a:t>
+              <a:t>5. Наблюдатель (Observer)</a:t>
             </a:r>
           </a:p>
         </p:txBody>
@@ -24945,8 +25017,8 @@
         </p:nvSpPr>
         <p:spPr>
           <a:xfrm>
-            <a:off x="868680" y="2788920"/>
-            <a:ext cx="5029200" cy="274320"/>
+            <a:off x="868680" y="2734056"/>
+            <a:ext cx="5029200" cy="201168"/>
           </a:xfrm>
           <a:prstGeom prst="rect">
             <a:avLst/>
@@ -24965,7 +25037,7 @@
               </a:lnSpc>
             </a:pPr>
             <a:r>
-              <a:rPr sz="1000" b="0" i="1">
+              <a:rPr sz="950" b="0" i="1">
                 <a:solidFill>
                   <a:srgbClr val="21295C"/>
                 </a:solidFill>
@@ -24984,8 +25056,8 @@
         </p:nvSpPr>
         <p:spPr>
           <a:xfrm>
-            <a:off x="3291839" y="2478024"/>
-            <a:ext cx="2606039" cy="292608"/>
+            <a:off x="868680" y="2916936"/>
+            <a:ext cx="5029200" cy="182880"/>
           </a:xfrm>
           <a:prstGeom prst="rect">
             <a:avLst/>
@@ -25004,7 +25076,7 @@
               </a:lnSpc>
             </a:pPr>
             <a:r>
-              <a:rPr sz="1000" b="0" i="0">
+              <a:rPr sz="900" b="0" i="0">
                 <a:solidFill>
                   <a:srgbClr val="21295C"/>
                 </a:solidFill>
@@ -25178,13 +25250,13 @@
               </a:lnSpc>
             </a:pPr>
             <a:r>
-              <a:rPr sz="1200" b="1" i="0">
+              <a:rPr sz="1050" b="1" i="0">
                 <a:solidFill>
                   <a:srgbClr val="1C7293"/>
                 </a:solidFill>
                 <a:latin typeface="Arial"/>
               </a:rPr>
-              <a:t>Human-in-the-loop</a:t>
+              <a:t>Человек в цикле (Human-in-the-loop)</a:t>
             </a:r>
           </a:p>
         </p:txBody>
@@ -25304,13 +25376,13 @@
               </a:lnSpc>
             </a:pPr>
             <a:r>
-              <a:rPr sz="1200" b="1" i="0">
+              <a:rPr sz="1050" b="1" i="0">
                 <a:solidFill>
                   <a:srgbClr val="065A82"/>
                 </a:solidFill>
                 <a:latin typeface="Arial"/>
               </a:rPr>
-              <a:t>Human-on-the-loop</a:t>
+              <a:t>Человек над циклом (Human-on-the-loop)</a:t>
             </a:r>
           </a:p>
         </p:txBody>
@@ -25430,13 +25502,13 @@
               </a:lnSpc>
             </a:pPr>
             <a:r>
-              <a:rPr sz="1200" b="1" i="0">
+              <a:rPr sz="1050" b="1" i="0">
                 <a:solidFill>
                   <a:srgbClr val="F0AB00"/>
                 </a:solidFill>
                 <a:latin typeface="Arial"/>
               </a:rPr>
-              <a:t>Human-out-of-the-loop</a:t>
+              <a:t>Человек вне цикла (Human-out-of-the-loop)</a:t>
             </a:r>
           </a:p>
         </p:txBody>
@@ -25556,13 +25628,13 @@
               </a:lnSpc>
             </a:pPr>
             <a:r>
-              <a:rPr sz="1200" b="1" i="0">
+              <a:rPr sz="1050" b="1" i="0">
                 <a:solidFill>
                   <a:srgbClr val="028090"/>
                 </a:solidFill>
                 <a:latin typeface="Arial"/>
               </a:rPr>
-              <a:t>Override modes</a:t>
+              <a:t>Режимы ручного перехвата (Override)</a:t>
             </a:r>
           </a:p>
         </p:txBody>
@@ -25759,11 +25831,11 @@
         <p:spPr>
           <a:xfrm>
             <a:off x="502920" y="1691640"/>
-            <a:ext cx="11201400" cy="1280160"/>
+            <a:ext cx="11201400" cy="1554480"/>
           </a:xfrm>
           <a:prstGeom prst="roundRect">
             <a:avLst>
-              <a:gd name="adj" fmla="val 23809"/>
+              <a:gd name="adj" fmla="val 19607"/>
             </a:avLst>
           </a:prstGeom>
           <a:solidFill>
@@ -25806,8 +25878,8 @@
         </p:nvSpPr>
         <p:spPr>
           <a:xfrm>
-            <a:off x="777240" y="1874520"/>
-            <a:ext cx="10652760" cy="365760"/>
+            <a:off x="777240" y="1856232"/>
+            <a:ext cx="10652760" cy="320040"/>
           </a:xfrm>
           <a:prstGeom prst="rect">
             <a:avLst/>
@@ -25845,8 +25917,8 @@
         </p:nvSpPr>
         <p:spPr>
           <a:xfrm>
-            <a:off x="777240" y="2286000"/>
-            <a:ext cx="10652760" cy="640080"/>
+            <a:off x="777240" y="2221992"/>
+            <a:ext cx="10652760" cy="685800"/>
           </a:xfrm>
           <a:prstGeom prst="rect">
             <a:avLst/>
@@ -25865,7 +25937,7 @@
               </a:lnSpc>
             </a:pPr>
             <a:r>
-              <a:rPr sz="2600" b="1" i="0">
+              <a:rPr sz="2400" b="1" i="0">
                 <a:solidFill>
                   <a:srgbClr val="21295C"/>
                 </a:solidFill>
@@ -25874,16 +25946,16 @@
               <a:t>1+ миллиард </a:t>
             </a:r>
             <a:r>
-              <a:rPr sz="1400" b="0" i="0">
+              <a:rPr sz="1300" b="0" i="0">
                 <a:solidFill>
                   <a:srgbClr val="21295C"/>
                 </a:solidFill>
                 <a:latin typeface="Arial"/>
               </a:rPr>
-              <a:t>уникальных пользователей в месяц  ·  </a:t>
-            </a:r>
-            <a:r>
-              <a:rPr sz="2600" b="1" i="0">
+              <a:t>пользователей в месяц  ·  </a:t>
+            </a:r>
+            <a:r>
+              <a:rPr sz="2400" b="1" i="0">
                 <a:solidFill>
                   <a:srgbClr val="F0AB00"/>
                 </a:solidFill>
@@ -25892,13 +25964,13 @@
               <a:t>1 триллион </a:t>
             </a:r>
             <a:r>
-              <a:rPr sz="1400" b="0" i="0">
+              <a:rPr sz="1300" b="0" i="0">
                 <a:solidFill>
                   <a:srgbClr val="21295C"/>
                 </a:solidFill>
                 <a:latin typeface="Arial"/>
               </a:rPr>
-              <a:t>переведённых слов / месяц</a:t>
+              <a:t>слов переведено / месяц</a:t>
             </a:r>
           </a:p>
         </p:txBody>
@@ -25911,7 +25983,7 @@
         </p:nvSpPr>
         <p:spPr>
           <a:xfrm>
-            <a:off x="777240" y="2651760"/>
+            <a:off x="777240" y="2898648"/>
             <a:ext cx="10652760" cy="274320"/>
           </a:xfrm>
           <a:prstGeom prst="rect">
@@ -25937,7 +26009,7 @@
                 </a:solidFill>
                 <a:latin typeface="Arial"/>
               </a:rPr>
-              <a:t>across Google Translate, Search, Lens и Circle to Search (Google Blog, апрель 2026)</a:t>
+              <a:t>в Google Translate, Search, Lens и Circle to Search (Google Blog, апрель 2026)</a:t>
             </a:r>
           </a:p>
         </p:txBody>
@@ -25950,12 +26022,12 @@
         </p:nvSpPr>
         <p:spPr>
           <a:xfrm>
-            <a:off x="502920" y="3246120"/>
-            <a:ext cx="3703320" cy="1280160"/>
+            <a:off x="502920" y="3383280"/>
+            <a:ext cx="3703320" cy="1188720"/>
           </a:xfrm>
           <a:prstGeom prst="roundRect">
             <a:avLst>
-              <a:gd name="adj" fmla="val 23809"/>
+              <a:gd name="adj" fmla="val 25000"/>
             </a:avLst>
           </a:prstGeom>
           <a:solidFill>
@@ -26006,7 +26078,7 @@
         </p:blipFill>
         <p:spPr>
           <a:xfrm>
-            <a:off x="685800" y="3520439"/>
+            <a:off x="685800" y="3657600"/>
             <a:ext cx="731520" cy="731520"/>
           </a:xfrm>
           <a:prstGeom prst="rect">
@@ -26022,7 +26094,7 @@
         </p:nvSpPr>
         <p:spPr>
           <a:xfrm>
-            <a:off x="1554480" y="3474720"/>
+            <a:off x="1554480" y="3611880"/>
             <a:ext cx="2514600" cy="365760"/>
           </a:xfrm>
           <a:prstGeom prst="rect">
@@ -26061,7 +26133,7 @@
         </p:nvSpPr>
         <p:spPr>
           <a:xfrm>
-            <a:off x="1554480" y="3886200"/>
+            <a:off x="1554480" y="4023360"/>
             <a:ext cx="2514600" cy="502920"/>
           </a:xfrm>
           <a:prstGeom prst="rect">
@@ -26100,12 +26172,12 @@
         </p:nvSpPr>
         <p:spPr>
           <a:xfrm>
-            <a:off x="4297679" y="3246120"/>
-            <a:ext cx="3703320" cy="1280160"/>
+            <a:off x="4297679" y="3383280"/>
+            <a:ext cx="3703320" cy="1188720"/>
           </a:xfrm>
           <a:prstGeom prst="roundRect">
             <a:avLst>
-              <a:gd name="adj" fmla="val 23809"/>
+              <a:gd name="adj" fmla="val 25000"/>
             </a:avLst>
           </a:prstGeom>
           <a:solidFill>
@@ -26156,7 +26228,7 @@
         </p:blipFill>
         <p:spPr>
           <a:xfrm>
-            <a:off x="4480559" y="3520439"/>
+            <a:off x="4480559" y="3657600"/>
             <a:ext cx="731520" cy="731520"/>
           </a:xfrm>
           <a:prstGeom prst="rect">
@@ -26172,7 +26244,7 @@
         </p:nvSpPr>
         <p:spPr>
           <a:xfrm>
-            <a:off x="5349240" y="3474720"/>
+            <a:off x="5349240" y="3611880"/>
             <a:ext cx="2514600" cy="365760"/>
           </a:xfrm>
           <a:prstGeom prst="rect">
@@ -26211,7 +26283,7 @@
         </p:nvSpPr>
         <p:spPr>
           <a:xfrm>
-            <a:off x="5349240" y="3886200"/>
+            <a:off x="5349240" y="4023360"/>
             <a:ext cx="2514600" cy="502920"/>
           </a:xfrm>
           <a:prstGeom prst="rect">
@@ -26250,12 +26322,12 @@
         </p:nvSpPr>
         <p:spPr>
           <a:xfrm>
-            <a:off x="8092440" y="3246120"/>
-            <a:ext cx="3703320" cy="1280160"/>
+            <a:off x="8092440" y="3383280"/>
+            <a:ext cx="3703320" cy="1188720"/>
           </a:xfrm>
           <a:prstGeom prst="roundRect">
             <a:avLst>
-              <a:gd name="adj" fmla="val 23809"/>
+              <a:gd name="adj" fmla="val 25000"/>
             </a:avLst>
           </a:prstGeom>
           <a:solidFill>
@@ -26306,7 +26378,7 @@
         </p:blipFill>
         <p:spPr>
           <a:xfrm>
-            <a:off x="8275319" y="3520439"/>
+            <a:off x="8275319" y="3657600"/>
             <a:ext cx="731520" cy="731520"/>
           </a:xfrm>
           <a:prstGeom prst="rect">
@@ -26322,7 +26394,7 @@
         </p:nvSpPr>
         <p:spPr>
           <a:xfrm>
-            <a:off x="9144000" y="3474720"/>
+            <a:off x="9144000" y="3611880"/>
             <a:ext cx="2514600" cy="365760"/>
           </a:xfrm>
           <a:prstGeom prst="rect">
@@ -26361,7 +26433,7 @@
         </p:nvSpPr>
         <p:spPr>
           <a:xfrm>
-            <a:off x="9144000" y="3886200"/>
+            <a:off x="9144000" y="4023360"/>
             <a:ext cx="2514600" cy="502920"/>
           </a:xfrm>
           <a:prstGeom prst="rect">
@@ -26400,12 +26472,12 @@
         </p:nvSpPr>
         <p:spPr>
           <a:xfrm>
-            <a:off x="502920" y="4617720"/>
-            <a:ext cx="3703320" cy="1280160"/>
+            <a:off x="502920" y="4663440"/>
+            <a:ext cx="3703320" cy="1188720"/>
           </a:xfrm>
           <a:prstGeom prst="roundRect">
             <a:avLst>
-              <a:gd name="adj" fmla="val 23809"/>
+              <a:gd name="adj" fmla="val 25000"/>
             </a:avLst>
           </a:prstGeom>
           <a:solidFill>
@@ -26456,7 +26528,7 @@
         </p:blipFill>
         <p:spPr>
           <a:xfrm>
-            <a:off x="685800" y="4892040"/>
+            <a:off x="685800" y="4937760"/>
             <a:ext cx="731520" cy="731520"/>
           </a:xfrm>
           <a:prstGeom prst="rect">
@@ -26472,7 +26544,7 @@
         </p:nvSpPr>
         <p:spPr>
           <a:xfrm>
-            <a:off x="1554480" y="4846320"/>
+            <a:off x="1554480" y="4892040"/>
             <a:ext cx="2514600" cy="365760"/>
           </a:xfrm>
           <a:prstGeom prst="rect">
@@ -26511,7 +26583,7 @@
         </p:nvSpPr>
         <p:spPr>
           <a:xfrm>
-            <a:off x="1554480" y="5257800"/>
+            <a:off x="1554480" y="5303520"/>
             <a:ext cx="2514600" cy="502920"/>
           </a:xfrm>
           <a:prstGeom prst="rect">
@@ -26550,12 +26622,12 @@
         </p:nvSpPr>
         <p:spPr>
           <a:xfrm>
-            <a:off x="4297679" y="4617720"/>
-            <a:ext cx="3703320" cy="1280160"/>
+            <a:off x="4297679" y="4663440"/>
+            <a:ext cx="3703320" cy="1188720"/>
           </a:xfrm>
           <a:prstGeom prst="roundRect">
             <a:avLst>
-              <a:gd name="adj" fmla="val 23809"/>
+              <a:gd name="adj" fmla="val 25000"/>
             </a:avLst>
           </a:prstGeom>
           <a:solidFill>
@@ -26606,7 +26678,7 @@
         </p:blipFill>
         <p:spPr>
           <a:xfrm>
-            <a:off x="4480559" y="4892040"/>
+            <a:off x="4480559" y="4937760"/>
             <a:ext cx="731520" cy="731520"/>
           </a:xfrm>
           <a:prstGeom prst="rect">
@@ -26622,7 +26694,7 @@
         </p:nvSpPr>
         <p:spPr>
           <a:xfrm>
-            <a:off x="5349240" y="4846320"/>
+            <a:off x="5349240" y="4892040"/>
             <a:ext cx="2514600" cy="365760"/>
           </a:xfrm>
           <a:prstGeom prst="rect">
@@ -26661,7 +26733,7 @@
         </p:nvSpPr>
         <p:spPr>
           <a:xfrm>
-            <a:off x="5349240" y="5257800"/>
+            <a:off x="5349240" y="5303520"/>
             <a:ext cx="2514600" cy="502920"/>
           </a:xfrm>
           <a:prstGeom prst="rect">
@@ -26700,12 +26772,12 @@
         </p:nvSpPr>
         <p:spPr>
           <a:xfrm>
-            <a:off x="8092440" y="4617720"/>
-            <a:ext cx="3703320" cy="1280160"/>
+            <a:off x="8092440" y="4663440"/>
+            <a:ext cx="3703320" cy="1188720"/>
           </a:xfrm>
           <a:prstGeom prst="roundRect">
             <a:avLst>
-              <a:gd name="adj" fmla="val 23809"/>
+              <a:gd name="adj" fmla="val 25000"/>
             </a:avLst>
           </a:prstGeom>
           <a:solidFill>
@@ -26756,7 +26828,7 @@
         </p:blipFill>
         <p:spPr>
           <a:xfrm>
-            <a:off x="8275319" y="4892040"/>
+            <a:off x="8275319" y="4937760"/>
             <a:ext cx="731520" cy="731520"/>
           </a:xfrm>
           <a:prstGeom prst="rect">
@@ -26772,7 +26844,7 @@
         </p:nvSpPr>
         <p:spPr>
           <a:xfrm>
-            <a:off x="9144000" y="4846320"/>
+            <a:off x="9144000" y="4892040"/>
             <a:ext cx="2514600" cy="365760"/>
           </a:xfrm>
           <a:prstGeom prst="rect">
@@ -26811,7 +26883,7 @@
         </p:nvSpPr>
         <p:spPr>
           <a:xfrm>
-            <a:off x="9144000" y="5257800"/>
+            <a:off x="9144000" y="5303520"/>
             <a:ext cx="2514600" cy="502920"/>
           </a:xfrm>
           <a:prstGeom prst="rect">
@@ -35375,7 +35447,7 @@
                 </a:solidFill>
                 <a:latin typeface="Arial"/>
               </a:rPr>
-              <a:t>Карта семестра: 17 лекций × 4 модуля.</a:t>
+              <a:t>Карта семестра: 17 лекций, 3 модуля + экзамен.</a:t>
             </a:r>
           </a:p>
         </p:txBody>
@@ -36690,7 +36762,7 @@
                 </a:solidFill>
                 <a:latin typeface="Arial"/>
               </a:rPr>
-              <a:t>Модуль 4</a:t>
+              <a:t>Экзамен</a:t>
             </a:r>
           </a:p>
         </p:txBody>
@@ -36729,7 +36801,8 @@
                 </a:solidFill>
                 <a:latin typeface="Arial"/>
               </a:rPr>
-              <a:t>Экзамен</a:t>
+              <a:t>Итоговая
+аттестация</a:t>
             </a:r>
           </a:p>
         </p:txBody>
@@ -37837,16 +37910,40 @@
         <p:nvPr/>
       </p:nvGrpSpPr>
       <p:grpSpPr/>
-      <p:sp>
-        <p:nvSpPr>
-          <p:cNvPr id="2" name="TextBox 1"/>
-          <p:cNvSpPr txBox="1"/>
-          <p:nvPr/>
-        </p:nvSpPr>
-        <p:spPr>
-          <a:xfrm>
-            <a:off x="7315200" y="2468880"/>
-            <a:ext cx="4846320" cy="4297680"/>
+      <p:pic>
+        <p:nvPicPr>
+          <p:cNvPr id="2" name="Picture 1" descr="hero-cover-light.png"/>
+          <p:cNvPicPr>
+            <a:picLocks noChangeAspect="1"/>
+          </p:cNvPicPr>
+          <p:nvPr/>
+        </p:nvPicPr>
+        <p:blipFill>
+          <a:blip r:embed="rId2"/>
+          <a:stretch>
+            <a:fillRect/>
+          </a:stretch>
+        </p:blipFill>
+        <p:spPr>
+          <a:xfrm>
+            <a:off x="7315200" y="822960"/>
+            <a:ext cx="4572000" cy="4572000"/>
+          </a:xfrm>
+          <a:prstGeom prst="rect">
+            <a:avLst/>
+          </a:prstGeom>
+        </p:spPr>
+      </p:pic>
+      <p:sp>
+        <p:nvSpPr>
+          <p:cNvPr id="3" name="TextBox 2"/>
+          <p:cNvSpPr txBox="1"/>
+          <p:nvPr/>
+        </p:nvSpPr>
+        <p:spPr>
+          <a:xfrm>
+            <a:off x="7315200" y="2651760"/>
+            <a:ext cx="4846320" cy="3291840"/>
           </a:xfrm>
           <a:prstGeom prst="rect">
             <a:avLst/>
@@ -37865,7 +37962,7 @@
               </a:lnSpc>
             </a:pPr>
             <a:r>
-              <a:rPr sz="32000" b="1" i="0">
+              <a:rPr sz="23000" b="1" i="0">
                 <a:solidFill>
                   <a:srgbClr val="D9E2EC"/>
                 </a:solidFill>
@@ -37878,7 +37975,7 @@
       </p:sp>
       <p:sp>
         <p:nvSpPr>
-          <p:cNvPr id="3" name="TextBox 2"/>
+          <p:cNvPr id="4" name="TextBox 3"/>
           <p:cNvSpPr txBox="1"/>
           <p:nvPr/>
         </p:nvSpPr>
@@ -37917,7 +38014,7 @@
       </p:sp>
       <p:sp>
         <p:nvSpPr>
-          <p:cNvPr id="4" name="Rectangle 3"/>
+          <p:cNvPr id="5" name="Rectangle 4"/>
           <p:cNvSpPr/>
           <p:nvPr/>
         </p:nvSpPr>
@@ -37961,7 +38058,7 @@
       </p:sp>
       <p:sp>
         <p:nvSpPr>
-          <p:cNvPr id="5" name="TextBox 4"/>
+          <p:cNvPr id="6" name="TextBox 5"/>
           <p:cNvSpPr txBox="1"/>
           <p:nvPr/>
         </p:nvSpPr>
@@ -38001,7 +38098,7 @@
       </p:sp>
       <p:sp>
         <p:nvSpPr>
-          <p:cNvPr id="6" name="Rectangle 5"/>
+          <p:cNvPr id="7" name="Rectangle 6"/>
           <p:cNvSpPr/>
           <p:nvPr/>
         </p:nvSpPr>
@@ -38045,7 +38142,7 @@
       </p:sp>
       <p:sp>
         <p:nvSpPr>
-          <p:cNvPr id="7" name="TextBox 6"/>
+          <p:cNvPr id="8" name="TextBox 7"/>
           <p:cNvSpPr txBox="1"/>
           <p:nvPr/>
         </p:nvSpPr>
@@ -38082,30 +38179,6 @@
           </a:p>
         </p:txBody>
       </p:sp>
-      <p:pic>
-        <p:nvPicPr>
-          <p:cNvPr id="8" name="Picture 7" descr="hero-cover-light.png"/>
-          <p:cNvPicPr>
-            <a:picLocks noChangeAspect="1"/>
-          </p:cNvPicPr>
-          <p:nvPr/>
-        </p:nvPicPr>
-        <p:blipFill>
-          <a:blip r:embed="rId2"/>
-          <a:stretch>
-            <a:fillRect/>
-          </a:stretch>
-        </p:blipFill>
-        <p:spPr>
-          <a:xfrm>
-            <a:off x="7315200" y="822960"/>
-            <a:ext cx="4572000" cy="4572000"/>
-          </a:xfrm>
-          <a:prstGeom prst="rect">
-            <a:avLst/>
-          </a:prstGeom>
-        </p:spPr>
-      </p:pic>
     </p:spTree>
   </p:cSld>
   <p:clrMapOvr>

--- a/library/lectures/lec-01/rendered/lec-01.pptx
+++ b/library/lectures/lec-01/rendered/lec-01.pptx
@@ -40192,7 +40192,7 @@
                 </a:solidFill>
                 <a:latin typeface="Arial"/>
               </a:rPr>
-              <a:t>Определений AI много — потому что AI это moving target.</a:t>
+              <a:t>Определений AI много — потому что AI это движущаяся цель.</a:t>
             </a:r>
           </a:p>
         </p:txBody>

--- a/library/lectures/lec-01/rendered/lec-01.pptx
+++ b/library/lectures/lec-01/rendered/lec-01.pptx
@@ -647,7 +647,7 @@
           <a:p/>
           <a:p>
             <a:r>
-              <a:t>И параллельно — контр-факт. По сводным данным деловых изданий, около девяноста процентов AI-пилотов в России не доходят до полноценного промышленного развёртывания — оценка построена на выборке примерно из пятидесяти крупнейших российских организаций по данным CNews, Vedomosti и Intellectual Analytics за март две тысячи двадцать шестого года. Это не репрезентативная выборка по всей экономике; это срез по крупным игрокам, где AI-пилоты лучше всего задокументированы. Тем не менее, сочетание массового внедрения и массового провала формирует центральную инженерную задачу курса.</a:t>
+              <a:t>И параллельно — контр-факт. По сводным данным деловых изданий, около девяноста процентов AI-пилотов в России не доходят до полноценного промышленного развёртывания. Источник оценки — исследование консалтинговой компании Intellectual Analytics (декабрь 2025 — февраль 2026, опубликовано Vedomosti в марте), выборка из пятидесяти крупнейших организаций в IT, промышленности, финансах, госсекторе и транспорте/логистике. Это не репрезентативная выборка по всей экономике; это срез по крупным игрокам, где AI-пилоты лучше всего задокументированы. Тем не менее, сочетание массового внедрения и массового провала формирует центральную инженерную задачу курса.</a:t>
             </a:r>
           </a:p>
         </p:txBody>
@@ -2629,7 +2629,7 @@
           <a:p/>
           <a:p>
             <a:r>
-              <a:t>Финальный, пятый раздел — что со всем этим делать. Шесть с половиной минут. Сначала короткое резюме лекции — три главных вывода, которые стоит унести домой. Потом — задание к семинару один: что конкретно принести и зачем. Потом — карта всего семестра, чтобы сегодняшняя лекция встала в контекст следующих шестнадцати. И в финале — тизер лекции два, с возвратом к YOLO-демо из самого начала. После этого — Q&amp;A.</a:t>
+              <a:t>Финальный, пятый раздел — что со всем этим делать. Шесть с половиной минут. Сначала короткое резюме лекции — три главных вывода, которые стоит унести домой. Потом — карта всего семестра, чтобы сегодняшняя лекция встала в контекст следующих шестнадцати. И в финале — тизер лекции два, с возвратом к YOLO-демо из самого начала. После этого — Q&amp;A.</a:t>
             </a:r>
           </a:p>
           <a:p/>

--- a/library/lectures/lec-01/rendered/lec-01.pptx
+++ b/library/lectures/lec-01/rendered/lec-01.pptx
@@ -3245,7 +3245,7 @@
           <a:lstStyle/>
           <a:p>
             <a:r>
-              <a:t>Это вводная лекция курса «AI в разных отраслях». За 75 минут мы построим общую карту: что такое AI как класс технологий, в каком состоянии он находится в 2026 году, какие способы реализации систем с AI существуют в инженерной практике, и где у этих систем границы.</a:t>
+              <a:t>Это вводная лекция курса «AI в разных отраслях». Мы построим общую карту: что такое AI как класс технологий, в каком состоянии он находится в 2026 году, какие способы реализации систем с AI существуют в инженерной практике, и где у этих систем границы.</a:t>
             </a:r>
           </a:p>
           <a:p/>

--- a/library/lectures/lec-01/rendered/lec-01.pptx
+++ b/library/lectures/lec-01/rendered/lec-01.pptx
@@ -14359,7 +14359,7 @@
         </p:blipFill>
         <p:spPr>
           <a:xfrm>
-            <a:off x="2537460" y="1673351"/>
+            <a:off x="2697480" y="1673351"/>
             <a:ext cx="365760" cy="365760"/>
           </a:xfrm>
           <a:prstGeom prst="rect">
@@ -14376,7 +14376,7 @@
         <p:spPr>
           <a:xfrm>
             <a:off x="1920240" y="2057400"/>
-            <a:ext cx="1600200" cy="365760"/>
+            <a:ext cx="1920240" cy="365760"/>
           </a:xfrm>
           <a:prstGeom prst="rect">
             <a:avLst/>
@@ -14422,7 +14422,7 @@
         </p:blipFill>
         <p:spPr>
           <a:xfrm>
-            <a:off x="4137659" y="1673351"/>
+            <a:off x="4617720" y="1673351"/>
             <a:ext cx="365760" cy="365760"/>
           </a:xfrm>
           <a:prstGeom prst="rect">
@@ -14438,8 +14438,8 @@
         </p:nvSpPr>
         <p:spPr>
           <a:xfrm>
-            <a:off x="3520440" y="2057400"/>
-            <a:ext cx="1600200" cy="365760"/>
+            <a:off x="3840480" y="2057400"/>
+            <a:ext cx="1920240" cy="365760"/>
           </a:xfrm>
           <a:prstGeom prst="rect">
             <a:avLst/>
@@ -14485,7 +14485,7 @@
         </p:blipFill>
         <p:spPr>
           <a:xfrm>
-            <a:off x="5737859" y="1673351"/>
+            <a:off x="6537960" y="1673351"/>
             <a:ext cx="365760" cy="365760"/>
           </a:xfrm>
           <a:prstGeom prst="rect">
@@ -14501,8 +14501,8 @@
         </p:nvSpPr>
         <p:spPr>
           <a:xfrm>
-            <a:off x="5120640" y="2057400"/>
-            <a:ext cx="1600200" cy="365760"/>
+            <a:off x="5760720" y="2057400"/>
+            <a:ext cx="1920240" cy="365760"/>
           </a:xfrm>
           <a:prstGeom prst="rect">
             <a:avLst/>
@@ -14548,7 +14548,7 @@
         </p:blipFill>
         <p:spPr>
           <a:xfrm>
-            <a:off x="7338060" y="1673351"/>
+            <a:off x="8458200" y="1673351"/>
             <a:ext cx="365760" cy="365760"/>
           </a:xfrm>
           <a:prstGeom prst="rect">
@@ -14564,8 +14564,8 @@
         </p:nvSpPr>
         <p:spPr>
           <a:xfrm>
-            <a:off x="6720840" y="2057400"/>
-            <a:ext cx="1600200" cy="365760"/>
+            <a:off x="7680960" y="2057400"/>
+            <a:ext cx="1920240" cy="365760"/>
           </a:xfrm>
           <a:prstGeom prst="rect">
             <a:avLst/>
@@ -14611,7 +14611,7 @@
         </p:blipFill>
         <p:spPr>
           <a:xfrm>
-            <a:off x="8938260" y="1673351"/>
+            <a:off x="10378440" y="1673351"/>
             <a:ext cx="365760" cy="365760"/>
           </a:xfrm>
           <a:prstGeom prst="rect">
@@ -14627,8 +14627,8 @@
         </p:nvSpPr>
         <p:spPr>
           <a:xfrm>
-            <a:off x="8321040" y="2057400"/>
-            <a:ext cx="1600200" cy="365760"/>
+            <a:off x="9601200" y="2057400"/>
+            <a:ext cx="1920240" cy="365760"/>
           </a:xfrm>
           <a:prstGeom prst="rect">
             <a:avLst/>
@@ -14658,30 +14658,45 @@
           </a:p>
         </p:txBody>
       </p:sp>
-      <p:pic>
-        <p:nvPicPr>
-          <p:cNvPr id="14" name="Picture 13" descr="lucide-list-checks-blue.png"/>
-          <p:cNvPicPr>
-            <a:picLocks noChangeAspect="1"/>
-          </p:cNvPicPr>
-          <p:nvPr/>
-        </p:nvPicPr>
-        <p:blipFill>
-          <a:blip r:embed="rId7"/>
-          <a:stretch>
-            <a:fillRect/>
-          </a:stretch>
-        </p:blipFill>
-        <p:spPr>
-          <a:xfrm>
-            <a:off x="10538460" y="1673351"/>
-            <a:ext cx="365760" cy="365760"/>
-          </a:xfrm>
-          <a:prstGeom prst="rect">
-            <a:avLst/>
-          </a:prstGeom>
-        </p:spPr>
-      </p:pic>
+      <p:sp>
+        <p:nvSpPr>
+          <p:cNvPr id="14" name="TextBox 13"/>
+          <p:cNvSpPr txBox="1"/>
+          <p:nvPr/>
+        </p:nvSpPr>
+        <p:spPr>
+          <a:xfrm>
+            <a:off x="594360" y="2782062"/>
+            <a:ext cx="1280160" cy="402336"/>
+          </a:xfrm>
+          <a:prstGeom prst="rect">
+            <a:avLst/>
+          </a:prstGeom>
+          <a:noFill/>
+        </p:spPr>
+        <p:txBody>
+          <a:bodyPr wrap="square" lIns="0" rIns="0" tIns="0" bIns="0" anchor="t">
+            <a:spAutoFit/>
+          </a:bodyPr>
+          <a:lstStyle/>
+          <a:p>
+            <a:pPr algn="r">
+              <a:lnSpc>
+                <a:spcPct val="115000"/>
+              </a:lnSpc>
+            </a:pPr>
+            <a:r>
+              <a:rPr sz="1400" b="1" i="0">
+                <a:solidFill>
+                  <a:srgbClr val="065A82"/>
+                </a:solidFill>
+                <a:latin typeface="Arial"/>
+              </a:rPr>
+              <a:t>Текст</a:t>
+            </a:r>
+          </a:p>
+        </p:txBody>
+      </p:sp>
       <p:sp>
         <p:nvSpPr>
           <p:cNvPr id="15" name="TextBox 14"/>
@@ -14690,23 +14705,23 @@
         </p:nvSpPr>
         <p:spPr>
           <a:xfrm>
-            <a:off x="9921240" y="2057400"/>
-            <a:ext cx="1600200" cy="365760"/>
-          </a:xfrm>
-          <a:prstGeom prst="rect">
-            <a:avLst/>
-          </a:prstGeom>
-          <a:noFill/>
-        </p:spPr>
-        <p:txBody>
-          <a:bodyPr wrap="square" lIns="0" rIns="0" tIns="0" bIns="0" anchor="t">
-            <a:spAutoFit/>
-          </a:bodyPr>
-          <a:lstStyle/>
-          <a:p>
-            <a:pPr algn="ctr">
-              <a:lnSpc>
-                <a:spcPct val="110000"/>
+            <a:off x="594360" y="3627882"/>
+            <a:ext cx="1280160" cy="402336"/>
+          </a:xfrm>
+          <a:prstGeom prst="rect">
+            <a:avLst/>
+          </a:prstGeom>
+          <a:noFill/>
+        </p:spPr>
+        <p:txBody>
+          <a:bodyPr wrap="square" lIns="0" rIns="0" tIns="0" bIns="0" anchor="t">
+            <a:spAutoFit/>
+          </a:bodyPr>
+          <a:lstStyle/>
+          <a:p>
+            <a:pPr algn="r">
+              <a:lnSpc>
+                <a:spcPct val="115000"/>
               </a:lnSpc>
             </a:pPr>
             <a:r>
@@ -14716,7 +14731,7 @@
                 </a:solidFill>
                 <a:latin typeface="Arial"/>
               </a:rPr>
-              <a:t>Планиров.</a:t>
+              <a:t>Изображ.</a:t>
             </a:r>
           </a:p>
         </p:txBody>
@@ -14729,7 +14744,7 @@
         </p:nvSpPr>
         <p:spPr>
           <a:xfrm>
-            <a:off x="594360" y="2697480"/>
+            <a:off x="594360" y="4473702"/>
             <a:ext cx="1280160" cy="402336"/>
           </a:xfrm>
           <a:prstGeom prst="rect">
@@ -14755,7 +14770,7 @@
                 </a:solidFill>
                 <a:latin typeface="Arial"/>
               </a:rPr>
-              <a:t>Текст</a:t>
+              <a:t>Звук / видео</a:t>
             </a:r>
           </a:p>
         </p:txBody>
@@ -14768,7 +14783,7 @@
         </p:nvSpPr>
         <p:spPr>
           <a:xfrm>
-            <a:off x="594360" y="3374136"/>
+            <a:off x="594360" y="5319522"/>
             <a:ext cx="1280160" cy="402336"/>
           </a:xfrm>
           <a:prstGeom prst="rect">
@@ -14794,84 +14809,6 @@
                 </a:solidFill>
                 <a:latin typeface="Arial"/>
               </a:rPr>
-              <a:t>Изображ.</a:t>
-            </a:r>
-          </a:p>
-        </p:txBody>
-      </p:sp>
-      <p:sp>
-        <p:nvSpPr>
-          <p:cNvPr id="18" name="TextBox 17"/>
-          <p:cNvSpPr txBox="1"/>
-          <p:nvPr/>
-        </p:nvSpPr>
-        <p:spPr>
-          <a:xfrm>
-            <a:off x="594360" y="4050792"/>
-            <a:ext cx="1280160" cy="402336"/>
-          </a:xfrm>
-          <a:prstGeom prst="rect">
-            <a:avLst/>
-          </a:prstGeom>
-          <a:noFill/>
-        </p:spPr>
-        <p:txBody>
-          <a:bodyPr wrap="square" lIns="0" rIns="0" tIns="0" bIns="0" anchor="t">
-            <a:spAutoFit/>
-          </a:bodyPr>
-          <a:lstStyle/>
-          <a:p>
-            <a:pPr algn="r">
-              <a:lnSpc>
-                <a:spcPct val="115000"/>
-              </a:lnSpc>
-            </a:pPr>
-            <a:r>
-              <a:rPr sz="1400" b="1" i="0">
-                <a:solidFill>
-                  <a:srgbClr val="065A82"/>
-                </a:solidFill>
-                <a:latin typeface="Arial"/>
-              </a:rPr>
-              <a:t>Звук / видео</a:t>
-            </a:r>
-          </a:p>
-        </p:txBody>
-      </p:sp>
-      <p:sp>
-        <p:nvSpPr>
-          <p:cNvPr id="19" name="TextBox 18"/>
-          <p:cNvSpPr txBox="1"/>
-          <p:nvPr/>
-        </p:nvSpPr>
-        <p:spPr>
-          <a:xfrm>
-            <a:off x="594360" y="4727448"/>
-            <a:ext cx="1280160" cy="402336"/>
-          </a:xfrm>
-          <a:prstGeom prst="rect">
-            <a:avLst/>
-          </a:prstGeom>
-          <a:noFill/>
-        </p:spPr>
-        <p:txBody>
-          <a:bodyPr wrap="square" lIns="0" rIns="0" tIns="0" bIns="0" anchor="t">
-            <a:spAutoFit/>
-          </a:bodyPr>
-          <a:lstStyle/>
-          <a:p>
-            <a:pPr algn="r">
-              <a:lnSpc>
-                <a:spcPct val="115000"/>
-              </a:lnSpc>
-            </a:pPr>
-            <a:r>
-              <a:rPr sz="1400" b="1" i="0">
-                <a:solidFill>
-                  <a:srgbClr val="065A82"/>
-                </a:solidFill>
-                <a:latin typeface="Arial"/>
-              </a:rPr>
               <a:t>Структ. данные</a:t>
             </a:r>
           </a:p>
@@ -14879,46 +14816,7 @@
       </p:sp>
       <p:sp>
         <p:nvSpPr>
-          <p:cNvPr id="20" name="TextBox 19"/>
-          <p:cNvSpPr txBox="1"/>
-          <p:nvPr/>
-        </p:nvSpPr>
-        <p:spPr>
-          <a:xfrm>
-            <a:off x="594360" y="5404104"/>
-            <a:ext cx="1280160" cy="402336"/>
-          </a:xfrm>
-          <a:prstGeom prst="rect">
-            <a:avLst/>
-          </a:prstGeom>
-          <a:noFill/>
-        </p:spPr>
-        <p:txBody>
-          <a:bodyPr wrap="square" lIns="0" rIns="0" tIns="0" bIns="0" anchor="t">
-            <a:spAutoFit/>
-          </a:bodyPr>
-          <a:lstStyle/>
-          <a:p>
-            <a:pPr algn="r">
-              <a:lnSpc>
-                <a:spcPct val="115000"/>
-              </a:lnSpc>
-            </a:pPr>
-            <a:r>
-              <a:rPr sz="1400" b="1" i="0">
-                <a:solidFill>
-                  <a:srgbClr val="065A82"/>
-                </a:solidFill>
-                <a:latin typeface="Arial"/>
-              </a:rPr>
-              <a:t>Код</a:t>
-            </a:r>
-          </a:p>
-        </p:txBody>
-      </p:sp>
-      <p:sp>
-        <p:nvSpPr>
-          <p:cNvPr id="21" name="Rectangle 20"/>
+          <p:cNvPr id="18" name="Rectangle 17"/>
           <p:cNvSpPr/>
           <p:nvPr/>
         </p:nvSpPr>
@@ -14962,13 +14860,13 @@
       </p:sp>
       <p:sp>
         <p:nvSpPr>
-          <p:cNvPr id="22" name="Rectangle 21"/>
+          <p:cNvPr id="19" name="Rectangle 18"/>
           <p:cNvSpPr/>
           <p:nvPr/>
         </p:nvSpPr>
         <p:spPr>
           <a:xfrm>
-            <a:off x="3515868" y="2514600"/>
+            <a:off x="3835908" y="2514600"/>
             <a:ext cx="9144" cy="3383279"/>
           </a:xfrm>
           <a:prstGeom prst="rect">
@@ -15006,13 +14904,13 @@
       </p:sp>
       <p:sp>
         <p:nvSpPr>
-          <p:cNvPr id="23" name="Rectangle 22"/>
+          <p:cNvPr id="20" name="Rectangle 19"/>
           <p:cNvSpPr/>
           <p:nvPr/>
         </p:nvSpPr>
         <p:spPr>
           <a:xfrm>
-            <a:off x="5116068" y="2514600"/>
+            <a:off x="5756148" y="2514600"/>
             <a:ext cx="9144" cy="3383279"/>
           </a:xfrm>
           <a:prstGeom prst="rect">
@@ -15050,13 +14948,13 @@
       </p:sp>
       <p:sp>
         <p:nvSpPr>
-          <p:cNvPr id="24" name="Rectangle 23"/>
+          <p:cNvPr id="21" name="Rectangle 20"/>
           <p:cNvSpPr/>
           <p:nvPr/>
         </p:nvSpPr>
         <p:spPr>
           <a:xfrm>
-            <a:off x="6716268" y="2514600"/>
+            <a:off x="7676388" y="2514600"/>
             <a:ext cx="9144" cy="3383279"/>
           </a:xfrm>
           <a:prstGeom prst="rect">
@@ -15094,13 +14992,13 @@
       </p:sp>
       <p:sp>
         <p:nvSpPr>
-          <p:cNvPr id="25" name="Rectangle 24"/>
+          <p:cNvPr id="22" name="Rectangle 21"/>
           <p:cNvSpPr/>
           <p:nvPr/>
         </p:nvSpPr>
         <p:spPr>
           <a:xfrm>
-            <a:off x="8316467" y="2514600"/>
+            <a:off x="9596628" y="2514600"/>
             <a:ext cx="9144" cy="3383279"/>
           </a:xfrm>
           <a:prstGeom prst="rect">
@@ -15138,13 +15036,13 @@
       </p:sp>
       <p:sp>
         <p:nvSpPr>
-          <p:cNvPr id="26" name="Rectangle 25"/>
+          <p:cNvPr id="23" name="Rectangle 22"/>
           <p:cNvSpPr/>
           <p:nvPr/>
         </p:nvSpPr>
         <p:spPr>
           <a:xfrm>
-            <a:off x="9916667" y="2514600"/>
+            <a:off x="11516867" y="2514600"/>
             <a:ext cx="9144" cy="3383279"/>
           </a:xfrm>
           <a:prstGeom prst="rect">
@@ -15182,14 +15080,14 @@
       </p:sp>
       <p:sp>
         <p:nvSpPr>
-          <p:cNvPr id="27" name="Rectangle 26"/>
+          <p:cNvPr id="24" name="Rectangle 23"/>
           <p:cNvSpPr/>
           <p:nvPr/>
         </p:nvSpPr>
         <p:spPr>
           <a:xfrm>
-            <a:off x="11516867" y="2514600"/>
-            <a:ext cx="9144" cy="3383279"/>
+            <a:off x="1920240" y="2510028"/>
+            <a:ext cx="9601200" cy="9144"/>
           </a:xfrm>
           <a:prstGeom prst="rect">
             <a:avLst/>
@@ -15226,13 +15124,13 @@
       </p:sp>
       <p:sp>
         <p:nvSpPr>
-          <p:cNvPr id="28" name="Rectangle 27"/>
+          <p:cNvPr id="25" name="Rectangle 24"/>
           <p:cNvSpPr/>
           <p:nvPr/>
         </p:nvSpPr>
         <p:spPr>
           <a:xfrm>
-            <a:off x="1920240" y="2510028"/>
+            <a:off x="1920240" y="3355848"/>
             <a:ext cx="9601200" cy="9144"/>
           </a:xfrm>
           <a:prstGeom prst="rect">
@@ -15270,13 +15168,13 @@
       </p:sp>
       <p:sp>
         <p:nvSpPr>
-          <p:cNvPr id="29" name="Rectangle 28"/>
+          <p:cNvPr id="26" name="Rectangle 25"/>
           <p:cNvSpPr/>
           <p:nvPr/>
         </p:nvSpPr>
         <p:spPr>
           <a:xfrm>
-            <a:off x="1920240" y="3186684"/>
+            <a:off x="1920240" y="4201668"/>
             <a:ext cx="9601200" cy="9144"/>
           </a:xfrm>
           <a:prstGeom prst="rect">
@@ -15314,13 +15212,13 @@
       </p:sp>
       <p:sp>
         <p:nvSpPr>
-          <p:cNvPr id="30" name="Rectangle 29"/>
+          <p:cNvPr id="27" name="Rectangle 26"/>
           <p:cNvSpPr/>
           <p:nvPr/>
         </p:nvSpPr>
         <p:spPr>
           <a:xfrm>
-            <a:off x="1920240" y="3863340"/>
+            <a:off x="1920240" y="5047488"/>
             <a:ext cx="9601200" cy="9144"/>
           </a:xfrm>
           <a:prstGeom prst="rect">
@@ -15358,13 +15256,13 @@
       </p:sp>
       <p:sp>
         <p:nvSpPr>
-          <p:cNvPr id="31" name="Rectangle 30"/>
+          <p:cNvPr id="28" name="Rectangle 27"/>
           <p:cNvSpPr/>
           <p:nvPr/>
         </p:nvSpPr>
         <p:spPr>
           <a:xfrm>
-            <a:off x="1920240" y="4539996"/>
+            <a:off x="1920240" y="5893307"/>
             <a:ext cx="9601200" cy="9144"/>
           </a:xfrm>
           <a:prstGeom prst="rect">
@@ -15402,102 +15300,14 @@
       </p:sp>
       <p:sp>
         <p:nvSpPr>
-          <p:cNvPr id="32" name="Rectangle 31"/>
+          <p:cNvPr id="29" name="Rounded Rectangle 28"/>
           <p:cNvSpPr/>
           <p:nvPr/>
         </p:nvSpPr>
         <p:spPr>
           <a:xfrm>
-            <a:off x="1920240" y="5216652"/>
-            <a:ext cx="9601200" cy="9144"/>
-          </a:xfrm>
-          <a:prstGeom prst="rect">
-            <a:avLst/>
-          </a:prstGeom>
-          <a:solidFill>
-            <a:srgbClr val="E5EAF0"/>
-          </a:solidFill>
-          <a:ln>
-            <a:noFill/>
-          </a:ln>
-          <a:effectLst/>
-        </p:spPr>
-        <p:style>
-          <a:lnRef idx="1">
-            <a:schemeClr val="accent1"/>
-          </a:lnRef>
-          <a:fillRef idx="3">
-            <a:schemeClr val="accent1"/>
-          </a:fillRef>
-          <a:effectRef idx="2">
-            <a:schemeClr val="accent1"/>
-          </a:effectRef>
-          <a:fontRef idx="minor">
-            <a:schemeClr val="lt1"/>
-          </a:fontRef>
-        </p:style>
-        <p:txBody>
-          <a:bodyPr rtlCol="0" anchor="ctr"/>
-          <a:lstStyle/>
-          <a:p>
-            <a:pPr algn="ctr"/>
-          </a:p>
-        </p:txBody>
-      </p:sp>
-      <p:sp>
-        <p:nvSpPr>
-          <p:cNvPr id="33" name="Rectangle 32"/>
-          <p:cNvSpPr/>
-          <p:nvPr/>
-        </p:nvSpPr>
-        <p:spPr>
-          <a:xfrm>
-            <a:off x="1920240" y="5893308"/>
-            <a:ext cx="9601200" cy="9144"/>
-          </a:xfrm>
-          <a:prstGeom prst="rect">
-            <a:avLst/>
-          </a:prstGeom>
-          <a:solidFill>
-            <a:srgbClr val="E5EAF0"/>
-          </a:solidFill>
-          <a:ln>
-            <a:noFill/>
-          </a:ln>
-          <a:effectLst/>
-        </p:spPr>
-        <p:style>
-          <a:lnRef idx="1">
-            <a:schemeClr val="accent1"/>
-          </a:lnRef>
-          <a:fillRef idx="3">
-            <a:schemeClr val="accent1"/>
-          </a:fillRef>
-          <a:effectRef idx="2">
-            <a:schemeClr val="accent1"/>
-          </a:effectRef>
-          <a:fontRef idx="minor">
-            <a:schemeClr val="lt1"/>
-          </a:fontRef>
-        </p:style>
-        <p:txBody>
-          <a:bodyPr rtlCol="0" anchor="ctr"/>
-          <a:lstStyle/>
-          <a:p>
-            <a:pPr algn="ctr"/>
-          </a:p>
-        </p:txBody>
-      </p:sp>
-      <p:sp>
-        <p:nvSpPr>
-          <p:cNvPr id="34" name="Rounded Rectangle 33"/>
-          <p:cNvSpPr/>
-          <p:nvPr/>
-        </p:nvSpPr>
-        <p:spPr>
-          <a:xfrm>
             <a:off x="1975104" y="2587752"/>
-            <a:ext cx="1490472" cy="530352"/>
+            <a:ext cx="1810512" cy="699515"/>
           </a:xfrm>
           <a:prstGeom prst="roundRect">
             <a:avLst>
@@ -15536,14 +15346,14 @@
       </p:sp>
       <p:sp>
         <p:nvSpPr>
-          <p:cNvPr id="35" name="TextBox 34"/>
-          <p:cNvSpPr txBox="1"/>
-          <p:nvPr/>
-        </p:nvSpPr>
-        <p:spPr>
-          <a:xfrm>
-            <a:off x="2011680" y="2706624"/>
-            <a:ext cx="1417319" cy="310896"/>
+          <p:cNvPr id="30" name="TextBox 29"/>
+          <p:cNvSpPr txBox="1"/>
+          <p:nvPr/>
+        </p:nvSpPr>
+        <p:spPr>
+          <a:xfrm>
+            <a:off x="2011680" y="2791206"/>
+            <a:ext cx="1737360" cy="310896"/>
           </a:xfrm>
           <a:prstGeom prst="rect">
             <a:avLst/>
@@ -15575,14 +15385,14 @@
       </p:sp>
       <p:sp>
         <p:nvSpPr>
-          <p:cNvPr id="36" name="Rounded Rectangle 35"/>
+          <p:cNvPr id="31" name="Rounded Rectangle 30"/>
           <p:cNvSpPr/>
           <p:nvPr/>
         </p:nvSpPr>
         <p:spPr>
           <a:xfrm>
-            <a:off x="1975104" y="3264408"/>
-            <a:ext cx="1490472" cy="530352"/>
+            <a:off x="1975104" y="3433572"/>
+            <a:ext cx="1810512" cy="699515"/>
           </a:xfrm>
           <a:prstGeom prst="roundRect">
             <a:avLst>
@@ -15621,14 +15431,14 @@
       </p:sp>
       <p:sp>
         <p:nvSpPr>
-          <p:cNvPr id="37" name="TextBox 36"/>
-          <p:cNvSpPr txBox="1"/>
-          <p:nvPr/>
-        </p:nvSpPr>
-        <p:spPr>
-          <a:xfrm>
-            <a:off x="2011680" y="3383280"/>
-            <a:ext cx="1417319" cy="310896"/>
+          <p:cNvPr id="32" name="TextBox 31"/>
+          <p:cNvSpPr txBox="1"/>
+          <p:nvPr/>
+        </p:nvSpPr>
+        <p:spPr>
+          <a:xfrm>
+            <a:off x="2011680" y="3637026"/>
+            <a:ext cx="1737360" cy="310896"/>
           </a:xfrm>
           <a:prstGeom prst="rect">
             <a:avLst/>
@@ -15660,14 +15470,14 @@
       </p:sp>
       <p:sp>
         <p:nvSpPr>
-          <p:cNvPr id="38" name="Rounded Rectangle 37"/>
+          <p:cNvPr id="33" name="Rounded Rectangle 32"/>
           <p:cNvSpPr/>
           <p:nvPr/>
         </p:nvSpPr>
         <p:spPr>
           <a:xfrm>
-            <a:off x="1975104" y="3941064"/>
-            <a:ext cx="1490472" cy="530352"/>
+            <a:off x="1975104" y="4279392"/>
+            <a:ext cx="1810512" cy="699515"/>
           </a:xfrm>
           <a:prstGeom prst="roundRect">
             <a:avLst>
@@ -15706,14 +15516,14 @@
       </p:sp>
       <p:sp>
         <p:nvSpPr>
-          <p:cNvPr id="39" name="TextBox 38"/>
-          <p:cNvSpPr txBox="1"/>
-          <p:nvPr/>
-        </p:nvSpPr>
-        <p:spPr>
-          <a:xfrm>
-            <a:off x="2011680" y="4059936"/>
-            <a:ext cx="1417319" cy="310896"/>
+          <p:cNvPr id="34" name="TextBox 33"/>
+          <p:cNvSpPr txBox="1"/>
+          <p:nvPr/>
+        </p:nvSpPr>
+        <p:spPr>
+          <a:xfrm>
+            <a:off x="2011680" y="4482846"/>
+            <a:ext cx="1737360" cy="310896"/>
           </a:xfrm>
           <a:prstGeom prst="rect">
             <a:avLst/>
@@ -15745,14 +15555,14 @@
       </p:sp>
       <p:sp>
         <p:nvSpPr>
-          <p:cNvPr id="40" name="Rounded Rectangle 39"/>
+          <p:cNvPr id="35" name="Rounded Rectangle 34"/>
           <p:cNvSpPr/>
           <p:nvPr/>
         </p:nvSpPr>
         <p:spPr>
           <a:xfrm>
-            <a:off x="1975104" y="4617720"/>
-            <a:ext cx="1490472" cy="530352"/>
+            <a:off x="1975104" y="5125212"/>
+            <a:ext cx="1810512" cy="699515"/>
           </a:xfrm>
           <a:prstGeom prst="roundRect">
             <a:avLst>
@@ -15791,14 +15601,14 @@
       </p:sp>
       <p:sp>
         <p:nvSpPr>
-          <p:cNvPr id="41" name="TextBox 40"/>
-          <p:cNvSpPr txBox="1"/>
-          <p:nvPr/>
-        </p:nvSpPr>
-        <p:spPr>
-          <a:xfrm>
-            <a:off x="2011680" y="4736592"/>
-            <a:ext cx="1417319" cy="310896"/>
+          <p:cNvPr id="36" name="TextBox 35"/>
+          <p:cNvSpPr txBox="1"/>
+          <p:nvPr/>
+        </p:nvSpPr>
+        <p:spPr>
+          <a:xfrm>
+            <a:off x="2011680" y="5328666"/>
+            <a:ext cx="1737360" cy="310896"/>
           </a:xfrm>
           <a:prstGeom prst="rect">
             <a:avLst/>
@@ -15830,14 +15640,354 @@
       </p:sp>
       <p:sp>
         <p:nvSpPr>
-          <p:cNvPr id="42" name="Rounded Rectangle 41"/>
+          <p:cNvPr id="37" name="Rounded Rectangle 36"/>
           <p:cNvSpPr/>
           <p:nvPr/>
         </p:nvSpPr>
         <p:spPr>
           <a:xfrm>
-            <a:off x="1975104" y="5294376"/>
-            <a:ext cx="1490472" cy="530352"/>
+            <a:off x="3895344" y="2587752"/>
+            <a:ext cx="1810512" cy="699515"/>
+          </a:xfrm>
+          <a:prstGeom prst="roundRect">
+            <a:avLst>
+              <a:gd name="adj" fmla="val 18000"/>
+            </a:avLst>
+          </a:prstGeom>
+          <a:solidFill>
+            <a:srgbClr val="1C7293"/>
+          </a:solidFill>
+          <a:ln>
+            <a:noFill/>
+          </a:ln>
+          <a:effectLst/>
+        </p:spPr>
+        <p:style>
+          <a:lnRef idx="1">
+            <a:schemeClr val="accent1"/>
+          </a:lnRef>
+          <a:fillRef idx="3">
+            <a:schemeClr val="accent1"/>
+          </a:fillRef>
+          <a:effectRef idx="2">
+            <a:schemeClr val="accent1"/>
+          </a:effectRef>
+          <a:fontRef idx="minor">
+            <a:schemeClr val="lt1"/>
+          </a:fontRef>
+        </p:style>
+        <p:txBody>
+          <a:bodyPr rtlCol="0" anchor="ctr"/>
+          <a:lstStyle/>
+          <a:p>
+            <a:pPr algn="ctr"/>
+          </a:p>
+        </p:txBody>
+      </p:sp>
+      <p:sp>
+        <p:nvSpPr>
+          <p:cNvPr id="38" name="TextBox 37"/>
+          <p:cNvSpPr txBox="1"/>
+          <p:nvPr/>
+        </p:nvSpPr>
+        <p:spPr>
+          <a:xfrm>
+            <a:off x="3931920" y="2791206"/>
+            <a:ext cx="1737360" cy="310896"/>
+          </a:xfrm>
+          <a:prstGeom prst="rect">
+            <a:avLst/>
+          </a:prstGeom>
+          <a:noFill/>
+        </p:spPr>
+        <p:txBody>
+          <a:bodyPr wrap="square" lIns="0" rIns="0" tIns="0" bIns="0" anchor="ctr">
+            <a:spAutoFit/>
+          </a:bodyPr>
+          <a:lstStyle/>
+          <a:p>
+            <a:pPr algn="ctr">
+              <a:lnSpc>
+                <a:spcPct val="110000"/>
+              </a:lnSpc>
+            </a:pPr>
+            <a:r>
+              <a:rPr sz="1200" b="0" i="0">
+                <a:solidFill>
+                  <a:srgbClr val="FFFFFF"/>
+                </a:solidFill>
+                <a:latin typeface="Arial"/>
+              </a:rPr>
+              <a:t>spaCy NER</a:t>
+            </a:r>
+          </a:p>
+        </p:txBody>
+      </p:sp>
+      <p:sp>
+        <p:nvSpPr>
+          <p:cNvPr id="39" name="Rounded Rectangle 38"/>
+          <p:cNvSpPr/>
+          <p:nvPr/>
+        </p:nvSpPr>
+        <p:spPr>
+          <a:xfrm>
+            <a:off x="3895344" y="3433572"/>
+            <a:ext cx="1810512" cy="699515"/>
+          </a:xfrm>
+          <a:prstGeom prst="roundRect">
+            <a:avLst>
+              <a:gd name="adj" fmla="val 18000"/>
+            </a:avLst>
+          </a:prstGeom>
+          <a:solidFill>
+            <a:srgbClr val="1C7293"/>
+          </a:solidFill>
+          <a:ln>
+            <a:noFill/>
+          </a:ln>
+          <a:effectLst/>
+        </p:spPr>
+        <p:style>
+          <a:lnRef idx="1">
+            <a:schemeClr val="accent1"/>
+          </a:lnRef>
+          <a:fillRef idx="3">
+            <a:schemeClr val="accent1"/>
+          </a:fillRef>
+          <a:effectRef idx="2">
+            <a:schemeClr val="accent1"/>
+          </a:effectRef>
+          <a:fontRef idx="minor">
+            <a:schemeClr val="lt1"/>
+          </a:fontRef>
+        </p:style>
+        <p:txBody>
+          <a:bodyPr rtlCol="0" anchor="ctr"/>
+          <a:lstStyle/>
+          <a:p>
+            <a:pPr algn="ctr"/>
+          </a:p>
+        </p:txBody>
+      </p:sp>
+      <p:sp>
+        <p:nvSpPr>
+          <p:cNvPr id="40" name="TextBox 39"/>
+          <p:cNvSpPr txBox="1"/>
+          <p:nvPr/>
+        </p:nvSpPr>
+        <p:spPr>
+          <a:xfrm>
+            <a:off x="3931920" y="3637026"/>
+            <a:ext cx="1737360" cy="310896"/>
+          </a:xfrm>
+          <a:prstGeom prst="rect">
+            <a:avLst/>
+          </a:prstGeom>
+          <a:noFill/>
+        </p:spPr>
+        <p:txBody>
+          <a:bodyPr wrap="square" lIns="0" rIns="0" tIns="0" bIns="0" anchor="ctr">
+            <a:spAutoFit/>
+          </a:bodyPr>
+          <a:lstStyle/>
+          <a:p>
+            <a:pPr algn="ctr">
+              <a:lnSpc>
+                <a:spcPct val="110000"/>
+              </a:lnSpc>
+            </a:pPr>
+            <a:r>
+              <a:rPr sz="1200" b="0" i="0">
+                <a:solidFill>
+                  <a:srgbClr val="FFFFFF"/>
+                </a:solidFill>
+                <a:latin typeface="Arial"/>
+              </a:rPr>
+              <a:t>YOLO</a:t>
+            </a:r>
+          </a:p>
+        </p:txBody>
+      </p:sp>
+      <p:sp>
+        <p:nvSpPr>
+          <p:cNvPr id="41" name="Rounded Rectangle 40"/>
+          <p:cNvSpPr/>
+          <p:nvPr/>
+        </p:nvSpPr>
+        <p:spPr>
+          <a:xfrm>
+            <a:off x="3895344" y="4279392"/>
+            <a:ext cx="1810512" cy="699515"/>
+          </a:xfrm>
+          <a:prstGeom prst="roundRect">
+            <a:avLst>
+              <a:gd name="adj" fmla="val 18000"/>
+            </a:avLst>
+          </a:prstGeom>
+          <a:solidFill>
+            <a:srgbClr val="1C7293"/>
+          </a:solidFill>
+          <a:ln>
+            <a:noFill/>
+          </a:ln>
+          <a:effectLst/>
+        </p:spPr>
+        <p:style>
+          <a:lnRef idx="1">
+            <a:schemeClr val="accent1"/>
+          </a:lnRef>
+          <a:fillRef idx="3">
+            <a:schemeClr val="accent1"/>
+          </a:fillRef>
+          <a:effectRef idx="2">
+            <a:schemeClr val="accent1"/>
+          </a:effectRef>
+          <a:fontRef idx="minor">
+            <a:schemeClr val="lt1"/>
+          </a:fontRef>
+        </p:style>
+        <p:txBody>
+          <a:bodyPr rtlCol="0" anchor="ctr"/>
+          <a:lstStyle/>
+          <a:p>
+            <a:pPr algn="ctr"/>
+          </a:p>
+        </p:txBody>
+      </p:sp>
+      <p:sp>
+        <p:nvSpPr>
+          <p:cNvPr id="42" name="TextBox 41"/>
+          <p:cNvSpPr txBox="1"/>
+          <p:nvPr/>
+        </p:nvSpPr>
+        <p:spPr>
+          <a:xfrm>
+            <a:off x="3931920" y="4482846"/>
+            <a:ext cx="1737360" cy="310896"/>
+          </a:xfrm>
+          <a:prstGeom prst="rect">
+            <a:avLst/>
+          </a:prstGeom>
+          <a:noFill/>
+        </p:spPr>
+        <p:txBody>
+          <a:bodyPr wrap="square" lIns="0" rIns="0" tIns="0" bIns="0" anchor="ctr">
+            <a:spAutoFit/>
+          </a:bodyPr>
+          <a:lstStyle/>
+          <a:p>
+            <a:pPr algn="ctr">
+              <a:lnSpc>
+                <a:spcPct val="110000"/>
+              </a:lnSpc>
+            </a:pPr>
+            <a:r>
+              <a:rPr sz="1200" b="0" i="0">
+                <a:solidFill>
+                  <a:srgbClr val="FFFFFF"/>
+                </a:solidFill>
+                <a:latin typeface="Arial"/>
+              </a:rPr>
+              <a:t>Whisper</a:t>
+            </a:r>
+          </a:p>
+        </p:txBody>
+      </p:sp>
+      <p:sp>
+        <p:nvSpPr>
+          <p:cNvPr id="43" name="Rounded Rectangle 42"/>
+          <p:cNvSpPr/>
+          <p:nvPr/>
+        </p:nvSpPr>
+        <p:spPr>
+          <a:xfrm>
+            <a:off x="3895344" y="5125212"/>
+            <a:ext cx="1810512" cy="699515"/>
+          </a:xfrm>
+          <a:prstGeom prst="roundRect">
+            <a:avLst>
+              <a:gd name="adj" fmla="val 18000"/>
+            </a:avLst>
+          </a:prstGeom>
+          <a:solidFill>
+            <a:srgbClr val="1C7293"/>
+          </a:solidFill>
+          <a:ln>
+            <a:noFill/>
+          </a:ln>
+          <a:effectLst/>
+        </p:spPr>
+        <p:style>
+          <a:lnRef idx="1">
+            <a:schemeClr val="accent1"/>
+          </a:lnRef>
+          <a:fillRef idx="3">
+            <a:schemeClr val="accent1"/>
+          </a:fillRef>
+          <a:effectRef idx="2">
+            <a:schemeClr val="accent1"/>
+          </a:effectRef>
+          <a:fontRef idx="minor">
+            <a:schemeClr val="lt1"/>
+          </a:fontRef>
+        </p:style>
+        <p:txBody>
+          <a:bodyPr rtlCol="0" anchor="ctr"/>
+          <a:lstStyle/>
+          <a:p>
+            <a:pPr algn="ctr"/>
+          </a:p>
+        </p:txBody>
+      </p:sp>
+      <p:sp>
+        <p:nvSpPr>
+          <p:cNvPr id="44" name="TextBox 43"/>
+          <p:cNvSpPr txBox="1"/>
+          <p:nvPr/>
+        </p:nvSpPr>
+        <p:spPr>
+          <a:xfrm>
+            <a:off x="3931920" y="5328666"/>
+            <a:ext cx="1737360" cy="310896"/>
+          </a:xfrm>
+          <a:prstGeom prst="rect">
+            <a:avLst/>
+          </a:prstGeom>
+          <a:noFill/>
+        </p:spPr>
+        <p:txBody>
+          <a:bodyPr wrap="square" lIns="0" rIns="0" tIns="0" bIns="0" anchor="ctr">
+            <a:spAutoFit/>
+          </a:bodyPr>
+          <a:lstStyle/>
+          <a:p>
+            <a:pPr algn="ctr">
+              <a:lnSpc>
+                <a:spcPct val="110000"/>
+              </a:lnSpc>
+            </a:pPr>
+            <a:r>
+              <a:rPr sz="1200" b="0" i="0">
+                <a:solidFill>
+                  <a:srgbClr val="FFFFFF"/>
+                </a:solidFill>
+                <a:latin typeface="Arial"/>
+              </a:rPr>
+              <a:t>OCR таблиц</a:t>
+            </a:r>
+          </a:p>
+        </p:txBody>
+      </p:sp>
+      <p:sp>
+        <p:nvSpPr>
+          <p:cNvPr id="45" name="Rounded Rectangle 44"/>
+          <p:cNvSpPr/>
+          <p:nvPr/>
+        </p:nvSpPr>
+        <p:spPr>
+          <a:xfrm>
+            <a:off x="5815584" y="2587752"/>
+            <a:ext cx="1810512" cy="699515"/>
           </a:xfrm>
           <a:prstGeom prst="roundRect">
             <a:avLst>
@@ -15876,14 +16026,14 @@
       </p:sp>
       <p:sp>
         <p:nvSpPr>
-          <p:cNvPr id="43" name="TextBox 42"/>
-          <p:cNvSpPr txBox="1"/>
-          <p:nvPr/>
-        </p:nvSpPr>
-        <p:spPr>
-          <a:xfrm>
-            <a:off x="2011680" y="5413248"/>
-            <a:ext cx="1417319" cy="310896"/>
+          <p:cNvPr id="46" name="TextBox 45"/>
+          <p:cNvSpPr txBox="1"/>
+          <p:nvPr/>
+        </p:nvSpPr>
+        <p:spPr>
+          <a:xfrm>
+            <a:off x="5852160" y="2791206"/>
+            <a:ext cx="1737360" cy="310896"/>
           </a:xfrm>
           <a:prstGeom prst="rect">
             <a:avLst/>
@@ -15908,21 +16058,701 @@
                 </a:solidFill>
                 <a:latin typeface="Arial"/>
               </a:rPr>
-              <a:t>CodeBERT</a:t>
-            </a:r>
-          </a:p>
-        </p:txBody>
-      </p:sp>
-      <p:sp>
-        <p:nvSpPr>
-          <p:cNvPr id="44" name="Rounded Rectangle 43"/>
+              <a:t>BM25</a:t>
+            </a:r>
+          </a:p>
+        </p:txBody>
+      </p:sp>
+      <p:sp>
+        <p:nvSpPr>
+          <p:cNvPr id="47" name="Rounded Rectangle 46"/>
           <p:cNvSpPr/>
           <p:nvPr/>
         </p:nvSpPr>
         <p:spPr>
           <a:xfrm>
-            <a:off x="3575304" y="2587752"/>
-            <a:ext cx="1490472" cy="530352"/>
+            <a:off x="5815584" y="3433572"/>
+            <a:ext cx="1810512" cy="699515"/>
+          </a:xfrm>
+          <a:prstGeom prst="roundRect">
+            <a:avLst>
+              <a:gd name="adj" fmla="val 18000"/>
+            </a:avLst>
+          </a:prstGeom>
+          <a:solidFill>
+            <a:srgbClr val="065A82"/>
+          </a:solidFill>
+          <a:ln>
+            <a:noFill/>
+          </a:ln>
+          <a:effectLst/>
+        </p:spPr>
+        <p:style>
+          <a:lnRef idx="1">
+            <a:schemeClr val="accent1"/>
+          </a:lnRef>
+          <a:fillRef idx="3">
+            <a:schemeClr val="accent1"/>
+          </a:fillRef>
+          <a:effectRef idx="2">
+            <a:schemeClr val="accent1"/>
+          </a:effectRef>
+          <a:fontRef idx="minor">
+            <a:schemeClr val="lt1"/>
+          </a:fontRef>
+        </p:style>
+        <p:txBody>
+          <a:bodyPr rtlCol="0" anchor="ctr"/>
+          <a:lstStyle/>
+          <a:p>
+            <a:pPr algn="ctr"/>
+          </a:p>
+        </p:txBody>
+      </p:sp>
+      <p:sp>
+        <p:nvSpPr>
+          <p:cNvPr id="48" name="TextBox 47"/>
+          <p:cNvSpPr txBox="1"/>
+          <p:nvPr/>
+        </p:nvSpPr>
+        <p:spPr>
+          <a:xfrm>
+            <a:off x="5852160" y="3637026"/>
+            <a:ext cx="1737360" cy="310896"/>
+          </a:xfrm>
+          <a:prstGeom prst="rect">
+            <a:avLst/>
+          </a:prstGeom>
+          <a:noFill/>
+        </p:spPr>
+        <p:txBody>
+          <a:bodyPr wrap="square" lIns="0" rIns="0" tIns="0" bIns="0" anchor="ctr">
+            <a:spAutoFit/>
+          </a:bodyPr>
+          <a:lstStyle/>
+          <a:p>
+            <a:pPr algn="ctr">
+              <a:lnSpc>
+                <a:spcPct val="110000"/>
+              </a:lnSpc>
+            </a:pPr>
+            <a:r>
+              <a:rPr sz="1200" b="0" i="0">
+                <a:solidFill>
+                  <a:srgbClr val="FFFFFF"/>
+                </a:solidFill>
+                <a:latin typeface="Arial"/>
+              </a:rPr>
+              <a:t>CLIP</a:t>
+            </a:r>
+          </a:p>
+        </p:txBody>
+      </p:sp>
+      <p:sp>
+        <p:nvSpPr>
+          <p:cNvPr id="49" name="Rounded Rectangle 48"/>
+          <p:cNvSpPr/>
+          <p:nvPr/>
+        </p:nvSpPr>
+        <p:spPr>
+          <a:xfrm>
+            <a:off x="5815584" y="4279392"/>
+            <a:ext cx="1810512" cy="699515"/>
+          </a:xfrm>
+          <a:prstGeom prst="roundRect">
+            <a:avLst>
+              <a:gd name="adj" fmla="val 18000"/>
+            </a:avLst>
+          </a:prstGeom>
+          <a:solidFill>
+            <a:srgbClr val="065A82"/>
+          </a:solidFill>
+          <a:ln>
+            <a:noFill/>
+          </a:ln>
+          <a:effectLst/>
+        </p:spPr>
+        <p:style>
+          <a:lnRef idx="1">
+            <a:schemeClr val="accent1"/>
+          </a:lnRef>
+          <a:fillRef idx="3">
+            <a:schemeClr val="accent1"/>
+          </a:fillRef>
+          <a:effectRef idx="2">
+            <a:schemeClr val="accent1"/>
+          </a:effectRef>
+          <a:fontRef idx="minor">
+            <a:schemeClr val="lt1"/>
+          </a:fontRef>
+        </p:style>
+        <p:txBody>
+          <a:bodyPr rtlCol="0" anchor="ctr"/>
+          <a:lstStyle/>
+          <a:p>
+            <a:pPr algn="ctr"/>
+          </a:p>
+        </p:txBody>
+      </p:sp>
+      <p:sp>
+        <p:nvSpPr>
+          <p:cNvPr id="50" name="TextBox 49"/>
+          <p:cNvSpPr txBox="1"/>
+          <p:nvPr/>
+        </p:nvSpPr>
+        <p:spPr>
+          <a:xfrm>
+            <a:off x="5852160" y="4482846"/>
+            <a:ext cx="1737360" cy="310896"/>
+          </a:xfrm>
+          <a:prstGeom prst="rect">
+            <a:avLst/>
+          </a:prstGeom>
+          <a:noFill/>
+        </p:spPr>
+        <p:txBody>
+          <a:bodyPr wrap="square" lIns="0" rIns="0" tIns="0" bIns="0" anchor="ctr">
+            <a:spAutoFit/>
+          </a:bodyPr>
+          <a:lstStyle/>
+          <a:p>
+            <a:pPr algn="ctr">
+              <a:lnSpc>
+                <a:spcPct val="110000"/>
+              </a:lnSpc>
+            </a:pPr>
+            <a:r>
+              <a:rPr sz="1200" b="0" i="0">
+                <a:solidFill>
+                  <a:srgbClr val="FFFFFF"/>
+                </a:solidFill>
+                <a:latin typeface="Arial"/>
+              </a:rPr>
+              <a:t>Shazam</a:t>
+            </a:r>
+          </a:p>
+        </p:txBody>
+      </p:sp>
+      <p:sp>
+        <p:nvSpPr>
+          <p:cNvPr id="51" name="Rounded Rectangle 50"/>
+          <p:cNvSpPr/>
+          <p:nvPr/>
+        </p:nvSpPr>
+        <p:spPr>
+          <a:xfrm>
+            <a:off x="5815584" y="5125212"/>
+            <a:ext cx="1810512" cy="699515"/>
+          </a:xfrm>
+          <a:prstGeom prst="roundRect">
+            <a:avLst>
+              <a:gd name="adj" fmla="val 18000"/>
+            </a:avLst>
+          </a:prstGeom>
+          <a:solidFill>
+            <a:srgbClr val="065A82"/>
+          </a:solidFill>
+          <a:ln>
+            <a:noFill/>
+          </a:ln>
+          <a:effectLst/>
+        </p:spPr>
+        <p:style>
+          <a:lnRef idx="1">
+            <a:schemeClr val="accent1"/>
+          </a:lnRef>
+          <a:fillRef idx="3">
+            <a:schemeClr val="accent1"/>
+          </a:fillRef>
+          <a:effectRef idx="2">
+            <a:schemeClr val="accent1"/>
+          </a:effectRef>
+          <a:fontRef idx="minor">
+            <a:schemeClr val="lt1"/>
+          </a:fontRef>
+        </p:style>
+        <p:txBody>
+          <a:bodyPr rtlCol="0" anchor="ctr"/>
+          <a:lstStyle/>
+          <a:p>
+            <a:pPr algn="ctr"/>
+          </a:p>
+        </p:txBody>
+      </p:sp>
+      <p:sp>
+        <p:nvSpPr>
+          <p:cNvPr id="52" name="TextBox 51"/>
+          <p:cNvSpPr txBox="1"/>
+          <p:nvPr/>
+        </p:nvSpPr>
+        <p:spPr>
+          <a:xfrm>
+            <a:off x="5852160" y="5328666"/>
+            <a:ext cx="1737360" cy="310896"/>
+          </a:xfrm>
+          <a:prstGeom prst="rect">
+            <a:avLst/>
+          </a:prstGeom>
+          <a:noFill/>
+        </p:spPr>
+        <p:txBody>
+          <a:bodyPr wrap="square" lIns="0" rIns="0" tIns="0" bIns="0" anchor="ctr">
+            <a:spAutoFit/>
+          </a:bodyPr>
+          <a:lstStyle/>
+          <a:p>
+            <a:pPr algn="ctr">
+              <a:lnSpc>
+                <a:spcPct val="110000"/>
+              </a:lnSpc>
+            </a:pPr>
+            <a:r>
+              <a:rPr sz="1200" b="0" i="0">
+                <a:solidFill>
+                  <a:srgbClr val="FFFFFF"/>
+                </a:solidFill>
+                <a:latin typeface="Arial"/>
+              </a:rPr>
+              <a:t>vector DB</a:t>
+            </a:r>
+          </a:p>
+        </p:txBody>
+      </p:sp>
+      <p:sp>
+        <p:nvSpPr>
+          <p:cNvPr id="53" name="Rounded Rectangle 52"/>
+          <p:cNvSpPr/>
+          <p:nvPr/>
+        </p:nvSpPr>
+        <p:spPr>
+          <a:xfrm>
+            <a:off x="7735824" y="2587752"/>
+            <a:ext cx="1810512" cy="699515"/>
+          </a:xfrm>
+          <a:prstGeom prst="roundRect">
+            <a:avLst>
+              <a:gd name="adj" fmla="val 18000"/>
+            </a:avLst>
+          </a:prstGeom>
+          <a:solidFill>
+            <a:srgbClr val="028090"/>
+          </a:solidFill>
+          <a:ln>
+            <a:noFill/>
+          </a:ln>
+          <a:effectLst/>
+        </p:spPr>
+        <p:style>
+          <a:lnRef idx="1">
+            <a:schemeClr val="accent1"/>
+          </a:lnRef>
+          <a:fillRef idx="3">
+            <a:schemeClr val="accent1"/>
+          </a:fillRef>
+          <a:effectRef idx="2">
+            <a:schemeClr val="accent1"/>
+          </a:effectRef>
+          <a:fontRef idx="minor">
+            <a:schemeClr val="lt1"/>
+          </a:fontRef>
+        </p:style>
+        <p:txBody>
+          <a:bodyPr rtlCol="0" anchor="ctr"/>
+          <a:lstStyle/>
+          <a:p>
+            <a:pPr algn="ctr"/>
+          </a:p>
+        </p:txBody>
+      </p:sp>
+      <p:sp>
+        <p:nvSpPr>
+          <p:cNvPr id="54" name="TextBox 53"/>
+          <p:cNvSpPr txBox="1"/>
+          <p:nvPr/>
+        </p:nvSpPr>
+        <p:spPr>
+          <a:xfrm>
+            <a:off x="7772400" y="2791206"/>
+            <a:ext cx="1737360" cy="310896"/>
+          </a:xfrm>
+          <a:prstGeom prst="rect">
+            <a:avLst/>
+          </a:prstGeom>
+          <a:noFill/>
+        </p:spPr>
+        <p:txBody>
+          <a:bodyPr wrap="square" lIns="0" rIns="0" tIns="0" bIns="0" anchor="ctr">
+            <a:spAutoFit/>
+          </a:bodyPr>
+          <a:lstStyle/>
+          <a:p>
+            <a:pPr algn="ctr">
+              <a:lnSpc>
+                <a:spcPct val="110000"/>
+              </a:lnSpc>
+            </a:pPr>
+            <a:r>
+              <a:rPr sz="1200" b="0" i="0">
+                <a:solidFill>
+                  <a:srgbClr val="FFFFFF"/>
+                </a:solidFill>
+                <a:latin typeface="Arial"/>
+              </a:rPr>
+              <a:t>GPT-4o, Claude</a:t>
+            </a:r>
+          </a:p>
+        </p:txBody>
+      </p:sp>
+      <p:sp>
+        <p:nvSpPr>
+          <p:cNvPr id="55" name="Rounded Rectangle 54"/>
+          <p:cNvSpPr/>
+          <p:nvPr/>
+        </p:nvSpPr>
+        <p:spPr>
+          <a:xfrm>
+            <a:off x="7735824" y="3433572"/>
+            <a:ext cx="1810512" cy="699515"/>
+          </a:xfrm>
+          <a:prstGeom prst="roundRect">
+            <a:avLst>
+              <a:gd name="adj" fmla="val 18000"/>
+            </a:avLst>
+          </a:prstGeom>
+          <a:solidFill>
+            <a:srgbClr val="028090"/>
+          </a:solidFill>
+          <a:ln>
+            <a:noFill/>
+          </a:ln>
+          <a:effectLst/>
+        </p:spPr>
+        <p:style>
+          <a:lnRef idx="1">
+            <a:schemeClr val="accent1"/>
+          </a:lnRef>
+          <a:fillRef idx="3">
+            <a:schemeClr val="accent1"/>
+          </a:fillRef>
+          <a:effectRef idx="2">
+            <a:schemeClr val="accent1"/>
+          </a:effectRef>
+          <a:fontRef idx="minor">
+            <a:schemeClr val="lt1"/>
+          </a:fontRef>
+        </p:style>
+        <p:txBody>
+          <a:bodyPr rtlCol="0" anchor="ctr"/>
+          <a:lstStyle/>
+          <a:p>
+            <a:pPr algn="ctr"/>
+          </a:p>
+        </p:txBody>
+      </p:sp>
+      <p:sp>
+        <p:nvSpPr>
+          <p:cNvPr id="56" name="TextBox 55"/>
+          <p:cNvSpPr txBox="1"/>
+          <p:nvPr/>
+        </p:nvSpPr>
+        <p:spPr>
+          <a:xfrm>
+            <a:off x="7772400" y="3637026"/>
+            <a:ext cx="1737360" cy="310896"/>
+          </a:xfrm>
+          <a:prstGeom prst="rect">
+            <a:avLst/>
+          </a:prstGeom>
+          <a:noFill/>
+        </p:spPr>
+        <p:txBody>
+          <a:bodyPr wrap="square" lIns="0" rIns="0" tIns="0" bIns="0" anchor="ctr">
+            <a:spAutoFit/>
+          </a:bodyPr>
+          <a:lstStyle/>
+          <a:p>
+            <a:pPr algn="ctr">
+              <a:lnSpc>
+                <a:spcPct val="110000"/>
+              </a:lnSpc>
+            </a:pPr>
+            <a:r>
+              <a:rPr sz="1200" b="0" i="0">
+                <a:solidFill>
+                  <a:srgbClr val="FFFFFF"/>
+                </a:solidFill>
+                <a:latin typeface="Arial"/>
+              </a:rPr>
+              <a:t>DALL-E, MJ</a:t>
+            </a:r>
+          </a:p>
+        </p:txBody>
+      </p:sp>
+      <p:sp>
+        <p:nvSpPr>
+          <p:cNvPr id="57" name="Rounded Rectangle 56"/>
+          <p:cNvSpPr/>
+          <p:nvPr/>
+        </p:nvSpPr>
+        <p:spPr>
+          <a:xfrm>
+            <a:off x="7735824" y="4279392"/>
+            <a:ext cx="1810512" cy="699515"/>
+          </a:xfrm>
+          <a:prstGeom prst="roundRect">
+            <a:avLst>
+              <a:gd name="adj" fmla="val 18000"/>
+            </a:avLst>
+          </a:prstGeom>
+          <a:solidFill>
+            <a:srgbClr val="028090"/>
+          </a:solidFill>
+          <a:ln>
+            <a:noFill/>
+          </a:ln>
+          <a:effectLst/>
+        </p:spPr>
+        <p:style>
+          <a:lnRef idx="1">
+            <a:schemeClr val="accent1"/>
+          </a:lnRef>
+          <a:fillRef idx="3">
+            <a:schemeClr val="accent1"/>
+          </a:fillRef>
+          <a:effectRef idx="2">
+            <a:schemeClr val="accent1"/>
+          </a:effectRef>
+          <a:fontRef idx="minor">
+            <a:schemeClr val="lt1"/>
+          </a:fontRef>
+        </p:style>
+        <p:txBody>
+          <a:bodyPr rtlCol="0" anchor="ctr"/>
+          <a:lstStyle/>
+          <a:p>
+            <a:pPr algn="ctr"/>
+          </a:p>
+        </p:txBody>
+      </p:sp>
+      <p:sp>
+        <p:nvSpPr>
+          <p:cNvPr id="58" name="TextBox 57"/>
+          <p:cNvSpPr txBox="1"/>
+          <p:nvPr/>
+        </p:nvSpPr>
+        <p:spPr>
+          <a:xfrm>
+            <a:off x="7772400" y="4482846"/>
+            <a:ext cx="1737360" cy="310896"/>
+          </a:xfrm>
+          <a:prstGeom prst="rect">
+            <a:avLst/>
+          </a:prstGeom>
+          <a:noFill/>
+        </p:spPr>
+        <p:txBody>
+          <a:bodyPr wrap="square" lIns="0" rIns="0" tIns="0" bIns="0" anchor="ctr">
+            <a:spAutoFit/>
+          </a:bodyPr>
+          <a:lstStyle/>
+          <a:p>
+            <a:pPr algn="ctr">
+              <a:lnSpc>
+                <a:spcPct val="110000"/>
+              </a:lnSpc>
+            </a:pPr>
+            <a:r>
+              <a:rPr sz="1200" b="0" i="0">
+                <a:solidFill>
+                  <a:srgbClr val="FFFFFF"/>
+                </a:solidFill>
+                <a:latin typeface="Arial"/>
+              </a:rPr>
+              <a:t>ElevenLabs, Sora</a:t>
+            </a:r>
+          </a:p>
+        </p:txBody>
+      </p:sp>
+      <p:sp>
+        <p:nvSpPr>
+          <p:cNvPr id="59" name="Rounded Rectangle 58"/>
+          <p:cNvSpPr/>
+          <p:nvPr/>
+        </p:nvSpPr>
+        <p:spPr>
+          <a:xfrm>
+            <a:off x="7735824" y="5125212"/>
+            <a:ext cx="1810512" cy="699515"/>
+          </a:xfrm>
+          <a:prstGeom prst="roundRect">
+            <a:avLst>
+              <a:gd name="adj" fmla="val 18000"/>
+            </a:avLst>
+          </a:prstGeom>
+          <a:solidFill>
+            <a:srgbClr val="028090"/>
+          </a:solidFill>
+          <a:ln>
+            <a:noFill/>
+          </a:ln>
+          <a:effectLst/>
+        </p:spPr>
+        <p:style>
+          <a:lnRef idx="1">
+            <a:schemeClr val="accent1"/>
+          </a:lnRef>
+          <a:fillRef idx="3">
+            <a:schemeClr val="accent1"/>
+          </a:fillRef>
+          <a:effectRef idx="2">
+            <a:schemeClr val="accent1"/>
+          </a:effectRef>
+          <a:fontRef idx="minor">
+            <a:schemeClr val="lt1"/>
+          </a:fontRef>
+        </p:style>
+        <p:txBody>
+          <a:bodyPr rtlCol="0" anchor="ctr"/>
+          <a:lstStyle/>
+          <a:p>
+            <a:pPr algn="ctr"/>
+          </a:p>
+        </p:txBody>
+      </p:sp>
+      <p:sp>
+        <p:nvSpPr>
+          <p:cNvPr id="60" name="TextBox 59"/>
+          <p:cNvSpPr txBox="1"/>
+          <p:nvPr/>
+        </p:nvSpPr>
+        <p:spPr>
+          <a:xfrm>
+            <a:off x="7772400" y="5328666"/>
+            <a:ext cx="1737360" cy="310896"/>
+          </a:xfrm>
+          <a:prstGeom prst="rect">
+            <a:avLst/>
+          </a:prstGeom>
+          <a:noFill/>
+        </p:spPr>
+        <p:txBody>
+          <a:bodyPr wrap="square" lIns="0" rIns="0" tIns="0" bIns="0" anchor="ctr">
+            <a:spAutoFit/>
+          </a:bodyPr>
+          <a:lstStyle/>
+          <a:p>
+            <a:pPr algn="ctr">
+              <a:lnSpc>
+                <a:spcPct val="110000"/>
+              </a:lnSpc>
+            </a:pPr>
+            <a:r>
+              <a:rPr sz="1200" b="0" i="0">
+                <a:solidFill>
+                  <a:srgbClr val="FFFFFF"/>
+                </a:solidFill>
+                <a:latin typeface="Arial"/>
+              </a:rPr>
+              <a:t>Codex tab.</a:t>
+            </a:r>
+          </a:p>
+        </p:txBody>
+      </p:sp>
+      <p:sp>
+        <p:nvSpPr>
+          <p:cNvPr id="61" name="Rounded Rectangle 60"/>
+          <p:cNvSpPr/>
+          <p:nvPr/>
+        </p:nvSpPr>
+        <p:spPr>
+          <a:xfrm>
+            <a:off x="9656064" y="2587752"/>
+            <a:ext cx="1810512" cy="699515"/>
+          </a:xfrm>
+          <a:prstGeom prst="roundRect">
+            <a:avLst>
+              <a:gd name="adj" fmla="val 18000"/>
+            </a:avLst>
+          </a:prstGeom>
+          <a:solidFill>
+            <a:srgbClr val="028090"/>
+          </a:solidFill>
+          <a:ln>
+            <a:noFill/>
+          </a:ln>
+          <a:effectLst/>
+        </p:spPr>
+        <p:style>
+          <a:lnRef idx="1">
+            <a:schemeClr val="accent1"/>
+          </a:lnRef>
+          <a:fillRef idx="3">
+            <a:schemeClr val="accent1"/>
+          </a:fillRef>
+          <a:effectRef idx="2">
+            <a:schemeClr val="accent1"/>
+          </a:effectRef>
+          <a:fontRef idx="minor">
+            <a:schemeClr val="lt1"/>
+          </a:fontRef>
+        </p:style>
+        <p:txBody>
+          <a:bodyPr rtlCol="0" anchor="ctr"/>
+          <a:lstStyle/>
+          <a:p>
+            <a:pPr algn="ctr"/>
+          </a:p>
+        </p:txBody>
+      </p:sp>
+      <p:sp>
+        <p:nvSpPr>
+          <p:cNvPr id="62" name="TextBox 61"/>
+          <p:cNvSpPr txBox="1"/>
+          <p:nvPr/>
+        </p:nvSpPr>
+        <p:spPr>
+          <a:xfrm>
+            <a:off x="9692640" y="2791206"/>
+            <a:ext cx="1737360" cy="310896"/>
+          </a:xfrm>
+          <a:prstGeom prst="rect">
+            <a:avLst/>
+          </a:prstGeom>
+          <a:noFill/>
+        </p:spPr>
+        <p:txBody>
+          <a:bodyPr wrap="square" lIns="0" rIns="0" tIns="0" bIns="0" anchor="ctr">
+            <a:spAutoFit/>
+          </a:bodyPr>
+          <a:lstStyle/>
+          <a:p>
+            <a:pPr algn="ctr">
+              <a:lnSpc>
+                <a:spcPct val="110000"/>
+              </a:lnSpc>
+            </a:pPr>
+            <a:r>
+              <a:rPr sz="1200" b="0" i="0">
+                <a:solidFill>
+                  <a:srgbClr val="FFFFFF"/>
+                </a:solidFill>
+                <a:latin typeface="Arial"/>
+              </a:rPr>
+              <a:t>GPT-4o, Claude</a:t>
+            </a:r>
+          </a:p>
+        </p:txBody>
+      </p:sp>
+      <p:sp>
+        <p:nvSpPr>
+          <p:cNvPr id="63" name="Rounded Rectangle 62"/>
+          <p:cNvSpPr/>
+          <p:nvPr/>
+        </p:nvSpPr>
+        <p:spPr>
+          <a:xfrm>
+            <a:off x="9656064" y="3433572"/>
+            <a:ext cx="1810512" cy="699515"/>
           </a:xfrm>
           <a:prstGeom prst="roundRect">
             <a:avLst>
@@ -15961,14 +16791,14 @@
       </p:sp>
       <p:sp>
         <p:nvSpPr>
-          <p:cNvPr id="45" name="TextBox 44"/>
-          <p:cNvSpPr txBox="1"/>
-          <p:nvPr/>
-        </p:nvSpPr>
-        <p:spPr>
-          <a:xfrm>
-            <a:off x="3611880" y="2706624"/>
-            <a:ext cx="1417319" cy="310896"/>
+          <p:cNvPr id="64" name="TextBox 63"/>
+          <p:cNvSpPr txBox="1"/>
+          <p:nvPr/>
+        </p:nvSpPr>
+        <p:spPr>
+          <a:xfrm>
+            <a:off x="9692640" y="3637026"/>
+            <a:ext cx="1737360" cy="310896"/>
           </a:xfrm>
           <a:prstGeom prst="rect">
             <a:avLst/>
@@ -15993,21 +16823,21 @@
                 </a:solidFill>
                 <a:latin typeface="Arial"/>
               </a:rPr>
-              <a:t>spaCy NER</a:t>
-            </a:r>
-          </a:p>
-        </p:txBody>
-      </p:sp>
-      <p:sp>
-        <p:nvSpPr>
-          <p:cNvPr id="46" name="Rounded Rectangle 45"/>
+              <a:t>frame predict</a:t>
+            </a:r>
+          </a:p>
+        </p:txBody>
+      </p:sp>
+      <p:sp>
+        <p:nvSpPr>
+          <p:cNvPr id="65" name="Rounded Rectangle 64"/>
           <p:cNvSpPr/>
           <p:nvPr/>
         </p:nvSpPr>
         <p:spPr>
           <a:xfrm>
-            <a:off x="3575304" y="3264408"/>
-            <a:ext cx="1490472" cy="530352"/>
+            <a:off x="9656064" y="4279392"/>
+            <a:ext cx="1810512" cy="699515"/>
           </a:xfrm>
           <a:prstGeom prst="roundRect">
             <a:avLst>
@@ -16046,14 +16876,14 @@
       </p:sp>
       <p:sp>
         <p:nvSpPr>
-          <p:cNvPr id="47" name="TextBox 46"/>
-          <p:cNvSpPr txBox="1"/>
-          <p:nvPr/>
-        </p:nvSpPr>
-        <p:spPr>
-          <a:xfrm>
-            <a:off x="3611880" y="3383280"/>
-            <a:ext cx="1417319" cy="310896"/>
+          <p:cNvPr id="66" name="TextBox 65"/>
+          <p:cNvSpPr txBox="1"/>
+          <p:nvPr/>
+        </p:nvSpPr>
+        <p:spPr>
+          <a:xfrm>
+            <a:off x="9692640" y="4482846"/>
+            <a:ext cx="1737360" cy="310896"/>
           </a:xfrm>
           <a:prstGeom prst="rect">
             <a:avLst/>
@@ -16078,21 +16908,21 @@
                 </a:solidFill>
                 <a:latin typeface="Arial"/>
               </a:rPr>
-              <a:t>YOLO</a:t>
-            </a:r>
-          </a:p>
-        </p:txBody>
-      </p:sp>
-      <p:sp>
-        <p:nvSpPr>
-          <p:cNvPr id="48" name="Rounded Rectangle 47"/>
+              <a:t>video forecast</a:t>
+            </a:r>
+          </a:p>
+        </p:txBody>
+      </p:sp>
+      <p:sp>
+        <p:nvSpPr>
+          <p:cNvPr id="67" name="Rounded Rectangle 66"/>
           <p:cNvSpPr/>
           <p:nvPr/>
         </p:nvSpPr>
         <p:spPr>
           <a:xfrm>
-            <a:off x="3575304" y="3941064"/>
-            <a:ext cx="1490472" cy="530352"/>
+            <a:off x="9656064" y="5125212"/>
+            <a:ext cx="1810512" cy="699515"/>
           </a:xfrm>
           <a:prstGeom prst="roundRect">
             <a:avLst>
@@ -16131,14 +16961,14 @@
       </p:sp>
       <p:sp>
         <p:nvSpPr>
-          <p:cNvPr id="49" name="TextBox 48"/>
-          <p:cNvSpPr txBox="1"/>
-          <p:nvPr/>
-        </p:nvSpPr>
-        <p:spPr>
-          <a:xfrm>
-            <a:off x="3611880" y="4059936"/>
-            <a:ext cx="1417319" cy="310896"/>
+          <p:cNvPr id="68" name="TextBox 67"/>
+          <p:cNvSpPr txBox="1"/>
+          <p:nvPr/>
+        </p:nvSpPr>
+        <p:spPr>
+          <a:xfrm>
+            <a:off x="9692640" y="5328666"/>
+            <a:ext cx="1737360" cy="310896"/>
           </a:xfrm>
           <a:prstGeom prst="rect">
             <a:avLst/>
@@ -16163,1320 +16993,6 @@
                 </a:solidFill>
                 <a:latin typeface="Arial"/>
               </a:rPr>
-              <a:t>Whisper</a:t>
-            </a:r>
-          </a:p>
-        </p:txBody>
-      </p:sp>
-      <p:sp>
-        <p:nvSpPr>
-          <p:cNvPr id="50" name="Rounded Rectangle 49"/>
-          <p:cNvSpPr/>
-          <p:nvPr/>
-        </p:nvSpPr>
-        <p:spPr>
-          <a:xfrm>
-            <a:off x="3575304" y="4617720"/>
-            <a:ext cx="1490472" cy="530352"/>
-          </a:xfrm>
-          <a:prstGeom prst="roundRect">
-            <a:avLst>
-              <a:gd name="adj" fmla="val 18000"/>
-            </a:avLst>
-          </a:prstGeom>
-          <a:solidFill>
-            <a:srgbClr val="1C7293"/>
-          </a:solidFill>
-          <a:ln>
-            <a:noFill/>
-          </a:ln>
-          <a:effectLst/>
-        </p:spPr>
-        <p:style>
-          <a:lnRef idx="1">
-            <a:schemeClr val="accent1"/>
-          </a:lnRef>
-          <a:fillRef idx="3">
-            <a:schemeClr val="accent1"/>
-          </a:fillRef>
-          <a:effectRef idx="2">
-            <a:schemeClr val="accent1"/>
-          </a:effectRef>
-          <a:fontRef idx="minor">
-            <a:schemeClr val="lt1"/>
-          </a:fontRef>
-        </p:style>
-        <p:txBody>
-          <a:bodyPr rtlCol="0" anchor="ctr"/>
-          <a:lstStyle/>
-          <a:p>
-            <a:pPr algn="ctr"/>
-          </a:p>
-        </p:txBody>
-      </p:sp>
-      <p:sp>
-        <p:nvSpPr>
-          <p:cNvPr id="51" name="TextBox 50"/>
-          <p:cNvSpPr txBox="1"/>
-          <p:nvPr/>
-        </p:nvSpPr>
-        <p:spPr>
-          <a:xfrm>
-            <a:off x="3611880" y="4736592"/>
-            <a:ext cx="1417319" cy="310896"/>
-          </a:xfrm>
-          <a:prstGeom prst="rect">
-            <a:avLst/>
-          </a:prstGeom>
-          <a:noFill/>
-        </p:spPr>
-        <p:txBody>
-          <a:bodyPr wrap="square" lIns="0" rIns="0" tIns="0" bIns="0" anchor="ctr">
-            <a:spAutoFit/>
-          </a:bodyPr>
-          <a:lstStyle/>
-          <a:p>
-            <a:pPr algn="ctr">
-              <a:lnSpc>
-                <a:spcPct val="110000"/>
-              </a:lnSpc>
-            </a:pPr>
-            <a:r>
-              <a:rPr sz="1200" b="0" i="0">
-                <a:solidFill>
-                  <a:srgbClr val="FFFFFF"/>
-                </a:solidFill>
-                <a:latin typeface="Arial"/>
-              </a:rPr>
-              <a:t>OCR таблиц</a:t>
-            </a:r>
-          </a:p>
-        </p:txBody>
-      </p:sp>
-      <p:sp>
-        <p:nvSpPr>
-          <p:cNvPr id="52" name="Rounded Rectangle 51"/>
-          <p:cNvSpPr/>
-          <p:nvPr/>
-        </p:nvSpPr>
-        <p:spPr>
-          <a:xfrm>
-            <a:off x="3575304" y="5294376"/>
-            <a:ext cx="1490472" cy="530352"/>
-          </a:xfrm>
-          <a:prstGeom prst="roundRect">
-            <a:avLst>
-              <a:gd name="adj" fmla="val 18000"/>
-            </a:avLst>
-          </a:prstGeom>
-          <a:solidFill>
-            <a:srgbClr val="1C7293"/>
-          </a:solidFill>
-          <a:ln>
-            <a:noFill/>
-          </a:ln>
-          <a:effectLst/>
-        </p:spPr>
-        <p:style>
-          <a:lnRef idx="1">
-            <a:schemeClr val="accent1"/>
-          </a:lnRef>
-          <a:fillRef idx="3">
-            <a:schemeClr val="accent1"/>
-          </a:fillRef>
-          <a:effectRef idx="2">
-            <a:schemeClr val="accent1"/>
-          </a:effectRef>
-          <a:fontRef idx="minor">
-            <a:schemeClr val="lt1"/>
-          </a:fontRef>
-        </p:style>
-        <p:txBody>
-          <a:bodyPr rtlCol="0" anchor="ctr"/>
-          <a:lstStyle/>
-          <a:p>
-            <a:pPr algn="ctr"/>
-          </a:p>
-        </p:txBody>
-      </p:sp>
-      <p:sp>
-        <p:nvSpPr>
-          <p:cNvPr id="53" name="TextBox 52"/>
-          <p:cNvSpPr txBox="1"/>
-          <p:nvPr/>
-        </p:nvSpPr>
-        <p:spPr>
-          <a:xfrm>
-            <a:off x="3611880" y="5413248"/>
-            <a:ext cx="1417319" cy="310896"/>
-          </a:xfrm>
-          <a:prstGeom prst="rect">
-            <a:avLst/>
-          </a:prstGeom>
-          <a:noFill/>
-        </p:spPr>
-        <p:txBody>
-          <a:bodyPr wrap="square" lIns="0" rIns="0" tIns="0" bIns="0" anchor="ctr">
-            <a:spAutoFit/>
-          </a:bodyPr>
-          <a:lstStyle/>
-          <a:p>
-            <a:pPr algn="ctr">
-              <a:lnSpc>
-                <a:spcPct val="110000"/>
-              </a:lnSpc>
-            </a:pPr>
-            <a:r>
-              <a:rPr sz="1200" b="0" i="0">
-                <a:solidFill>
-                  <a:srgbClr val="FFFFFF"/>
-                </a:solidFill>
-                <a:latin typeface="Arial"/>
-              </a:rPr>
-              <a:t>Snyk, Sonar</a:t>
-            </a:r>
-          </a:p>
-        </p:txBody>
-      </p:sp>
-      <p:sp>
-        <p:nvSpPr>
-          <p:cNvPr id="54" name="Rounded Rectangle 53"/>
-          <p:cNvSpPr/>
-          <p:nvPr/>
-        </p:nvSpPr>
-        <p:spPr>
-          <a:xfrm>
-            <a:off x="5175503" y="2587752"/>
-            <a:ext cx="1490472" cy="530352"/>
-          </a:xfrm>
-          <a:prstGeom prst="roundRect">
-            <a:avLst>
-              <a:gd name="adj" fmla="val 18000"/>
-            </a:avLst>
-          </a:prstGeom>
-          <a:solidFill>
-            <a:srgbClr val="065A82"/>
-          </a:solidFill>
-          <a:ln>
-            <a:noFill/>
-          </a:ln>
-          <a:effectLst/>
-        </p:spPr>
-        <p:style>
-          <a:lnRef idx="1">
-            <a:schemeClr val="accent1"/>
-          </a:lnRef>
-          <a:fillRef idx="3">
-            <a:schemeClr val="accent1"/>
-          </a:fillRef>
-          <a:effectRef idx="2">
-            <a:schemeClr val="accent1"/>
-          </a:effectRef>
-          <a:fontRef idx="minor">
-            <a:schemeClr val="lt1"/>
-          </a:fontRef>
-        </p:style>
-        <p:txBody>
-          <a:bodyPr rtlCol="0" anchor="ctr"/>
-          <a:lstStyle/>
-          <a:p>
-            <a:pPr algn="ctr"/>
-          </a:p>
-        </p:txBody>
-      </p:sp>
-      <p:sp>
-        <p:nvSpPr>
-          <p:cNvPr id="55" name="TextBox 54"/>
-          <p:cNvSpPr txBox="1"/>
-          <p:nvPr/>
-        </p:nvSpPr>
-        <p:spPr>
-          <a:xfrm>
-            <a:off x="5212079" y="2706624"/>
-            <a:ext cx="1417319" cy="310896"/>
-          </a:xfrm>
-          <a:prstGeom prst="rect">
-            <a:avLst/>
-          </a:prstGeom>
-          <a:noFill/>
-        </p:spPr>
-        <p:txBody>
-          <a:bodyPr wrap="square" lIns="0" rIns="0" tIns="0" bIns="0" anchor="ctr">
-            <a:spAutoFit/>
-          </a:bodyPr>
-          <a:lstStyle/>
-          <a:p>
-            <a:pPr algn="ctr">
-              <a:lnSpc>
-                <a:spcPct val="110000"/>
-              </a:lnSpc>
-            </a:pPr>
-            <a:r>
-              <a:rPr sz="1200" b="0" i="0">
-                <a:solidFill>
-                  <a:srgbClr val="FFFFFF"/>
-                </a:solidFill>
-                <a:latin typeface="Arial"/>
-              </a:rPr>
-              <a:t>BM25</a:t>
-            </a:r>
-          </a:p>
-        </p:txBody>
-      </p:sp>
-      <p:sp>
-        <p:nvSpPr>
-          <p:cNvPr id="56" name="Rounded Rectangle 55"/>
-          <p:cNvSpPr/>
-          <p:nvPr/>
-        </p:nvSpPr>
-        <p:spPr>
-          <a:xfrm>
-            <a:off x="5175503" y="3264408"/>
-            <a:ext cx="1490472" cy="530352"/>
-          </a:xfrm>
-          <a:prstGeom prst="roundRect">
-            <a:avLst>
-              <a:gd name="adj" fmla="val 18000"/>
-            </a:avLst>
-          </a:prstGeom>
-          <a:solidFill>
-            <a:srgbClr val="065A82"/>
-          </a:solidFill>
-          <a:ln>
-            <a:noFill/>
-          </a:ln>
-          <a:effectLst/>
-        </p:spPr>
-        <p:style>
-          <a:lnRef idx="1">
-            <a:schemeClr val="accent1"/>
-          </a:lnRef>
-          <a:fillRef idx="3">
-            <a:schemeClr val="accent1"/>
-          </a:fillRef>
-          <a:effectRef idx="2">
-            <a:schemeClr val="accent1"/>
-          </a:effectRef>
-          <a:fontRef idx="minor">
-            <a:schemeClr val="lt1"/>
-          </a:fontRef>
-        </p:style>
-        <p:txBody>
-          <a:bodyPr rtlCol="0" anchor="ctr"/>
-          <a:lstStyle/>
-          <a:p>
-            <a:pPr algn="ctr"/>
-          </a:p>
-        </p:txBody>
-      </p:sp>
-      <p:sp>
-        <p:nvSpPr>
-          <p:cNvPr id="57" name="TextBox 56"/>
-          <p:cNvSpPr txBox="1"/>
-          <p:nvPr/>
-        </p:nvSpPr>
-        <p:spPr>
-          <a:xfrm>
-            <a:off x="5212079" y="3383280"/>
-            <a:ext cx="1417319" cy="310896"/>
-          </a:xfrm>
-          <a:prstGeom prst="rect">
-            <a:avLst/>
-          </a:prstGeom>
-          <a:noFill/>
-        </p:spPr>
-        <p:txBody>
-          <a:bodyPr wrap="square" lIns="0" rIns="0" tIns="0" bIns="0" anchor="ctr">
-            <a:spAutoFit/>
-          </a:bodyPr>
-          <a:lstStyle/>
-          <a:p>
-            <a:pPr algn="ctr">
-              <a:lnSpc>
-                <a:spcPct val="110000"/>
-              </a:lnSpc>
-            </a:pPr>
-            <a:r>
-              <a:rPr sz="1200" b="0" i="0">
-                <a:solidFill>
-                  <a:srgbClr val="FFFFFF"/>
-                </a:solidFill>
-                <a:latin typeface="Arial"/>
-              </a:rPr>
-              <a:t>CLIP</a:t>
-            </a:r>
-          </a:p>
-        </p:txBody>
-      </p:sp>
-      <p:sp>
-        <p:nvSpPr>
-          <p:cNvPr id="58" name="Rounded Rectangle 57"/>
-          <p:cNvSpPr/>
-          <p:nvPr/>
-        </p:nvSpPr>
-        <p:spPr>
-          <a:xfrm>
-            <a:off x="5175503" y="3941064"/>
-            <a:ext cx="1490472" cy="530352"/>
-          </a:xfrm>
-          <a:prstGeom prst="roundRect">
-            <a:avLst>
-              <a:gd name="adj" fmla="val 18000"/>
-            </a:avLst>
-          </a:prstGeom>
-          <a:solidFill>
-            <a:srgbClr val="065A82"/>
-          </a:solidFill>
-          <a:ln>
-            <a:noFill/>
-          </a:ln>
-          <a:effectLst/>
-        </p:spPr>
-        <p:style>
-          <a:lnRef idx="1">
-            <a:schemeClr val="accent1"/>
-          </a:lnRef>
-          <a:fillRef idx="3">
-            <a:schemeClr val="accent1"/>
-          </a:fillRef>
-          <a:effectRef idx="2">
-            <a:schemeClr val="accent1"/>
-          </a:effectRef>
-          <a:fontRef idx="minor">
-            <a:schemeClr val="lt1"/>
-          </a:fontRef>
-        </p:style>
-        <p:txBody>
-          <a:bodyPr rtlCol="0" anchor="ctr"/>
-          <a:lstStyle/>
-          <a:p>
-            <a:pPr algn="ctr"/>
-          </a:p>
-        </p:txBody>
-      </p:sp>
-      <p:sp>
-        <p:nvSpPr>
-          <p:cNvPr id="59" name="TextBox 58"/>
-          <p:cNvSpPr txBox="1"/>
-          <p:nvPr/>
-        </p:nvSpPr>
-        <p:spPr>
-          <a:xfrm>
-            <a:off x="5212079" y="4059936"/>
-            <a:ext cx="1417319" cy="310896"/>
-          </a:xfrm>
-          <a:prstGeom prst="rect">
-            <a:avLst/>
-          </a:prstGeom>
-          <a:noFill/>
-        </p:spPr>
-        <p:txBody>
-          <a:bodyPr wrap="square" lIns="0" rIns="0" tIns="0" bIns="0" anchor="ctr">
-            <a:spAutoFit/>
-          </a:bodyPr>
-          <a:lstStyle/>
-          <a:p>
-            <a:pPr algn="ctr">
-              <a:lnSpc>
-                <a:spcPct val="110000"/>
-              </a:lnSpc>
-            </a:pPr>
-            <a:r>
-              <a:rPr sz="1200" b="0" i="0">
-                <a:solidFill>
-                  <a:srgbClr val="FFFFFF"/>
-                </a:solidFill>
-                <a:latin typeface="Arial"/>
-              </a:rPr>
-              <a:t>Shazam</a:t>
-            </a:r>
-          </a:p>
-        </p:txBody>
-      </p:sp>
-      <p:sp>
-        <p:nvSpPr>
-          <p:cNvPr id="60" name="Rounded Rectangle 59"/>
-          <p:cNvSpPr/>
-          <p:nvPr/>
-        </p:nvSpPr>
-        <p:spPr>
-          <a:xfrm>
-            <a:off x="5175503" y="4617720"/>
-            <a:ext cx="1490472" cy="530352"/>
-          </a:xfrm>
-          <a:prstGeom prst="roundRect">
-            <a:avLst>
-              <a:gd name="adj" fmla="val 18000"/>
-            </a:avLst>
-          </a:prstGeom>
-          <a:solidFill>
-            <a:srgbClr val="065A82"/>
-          </a:solidFill>
-          <a:ln>
-            <a:noFill/>
-          </a:ln>
-          <a:effectLst/>
-        </p:spPr>
-        <p:style>
-          <a:lnRef idx="1">
-            <a:schemeClr val="accent1"/>
-          </a:lnRef>
-          <a:fillRef idx="3">
-            <a:schemeClr val="accent1"/>
-          </a:fillRef>
-          <a:effectRef idx="2">
-            <a:schemeClr val="accent1"/>
-          </a:effectRef>
-          <a:fontRef idx="minor">
-            <a:schemeClr val="lt1"/>
-          </a:fontRef>
-        </p:style>
-        <p:txBody>
-          <a:bodyPr rtlCol="0" anchor="ctr"/>
-          <a:lstStyle/>
-          <a:p>
-            <a:pPr algn="ctr"/>
-          </a:p>
-        </p:txBody>
-      </p:sp>
-      <p:sp>
-        <p:nvSpPr>
-          <p:cNvPr id="61" name="TextBox 60"/>
-          <p:cNvSpPr txBox="1"/>
-          <p:nvPr/>
-        </p:nvSpPr>
-        <p:spPr>
-          <a:xfrm>
-            <a:off x="5212079" y="4736592"/>
-            <a:ext cx="1417319" cy="310896"/>
-          </a:xfrm>
-          <a:prstGeom prst="rect">
-            <a:avLst/>
-          </a:prstGeom>
-          <a:noFill/>
-        </p:spPr>
-        <p:txBody>
-          <a:bodyPr wrap="square" lIns="0" rIns="0" tIns="0" bIns="0" anchor="ctr">
-            <a:spAutoFit/>
-          </a:bodyPr>
-          <a:lstStyle/>
-          <a:p>
-            <a:pPr algn="ctr">
-              <a:lnSpc>
-                <a:spcPct val="110000"/>
-              </a:lnSpc>
-            </a:pPr>
-            <a:r>
-              <a:rPr sz="1200" b="0" i="0">
-                <a:solidFill>
-                  <a:srgbClr val="FFFFFF"/>
-                </a:solidFill>
-                <a:latin typeface="Arial"/>
-              </a:rPr>
-              <a:t>vector DB</a:t>
-            </a:r>
-          </a:p>
-        </p:txBody>
-      </p:sp>
-      <p:sp>
-        <p:nvSpPr>
-          <p:cNvPr id="62" name="Rounded Rectangle 61"/>
-          <p:cNvSpPr/>
-          <p:nvPr/>
-        </p:nvSpPr>
-        <p:spPr>
-          <a:xfrm>
-            <a:off x="5175503" y="5294376"/>
-            <a:ext cx="1490472" cy="530352"/>
-          </a:xfrm>
-          <a:prstGeom prst="roundRect">
-            <a:avLst>
-              <a:gd name="adj" fmla="val 18000"/>
-            </a:avLst>
-          </a:prstGeom>
-          <a:solidFill>
-            <a:srgbClr val="065A82"/>
-          </a:solidFill>
-          <a:ln>
-            <a:noFill/>
-          </a:ln>
-          <a:effectLst/>
-        </p:spPr>
-        <p:style>
-          <a:lnRef idx="1">
-            <a:schemeClr val="accent1"/>
-          </a:lnRef>
-          <a:fillRef idx="3">
-            <a:schemeClr val="accent1"/>
-          </a:fillRef>
-          <a:effectRef idx="2">
-            <a:schemeClr val="accent1"/>
-          </a:effectRef>
-          <a:fontRef idx="minor">
-            <a:schemeClr val="lt1"/>
-          </a:fontRef>
-        </p:style>
-        <p:txBody>
-          <a:bodyPr rtlCol="0" anchor="ctr"/>
-          <a:lstStyle/>
-          <a:p>
-            <a:pPr algn="ctr"/>
-          </a:p>
-        </p:txBody>
-      </p:sp>
-      <p:sp>
-        <p:nvSpPr>
-          <p:cNvPr id="63" name="TextBox 62"/>
-          <p:cNvSpPr txBox="1"/>
-          <p:nvPr/>
-        </p:nvSpPr>
-        <p:spPr>
-          <a:xfrm>
-            <a:off x="5212079" y="5413248"/>
-            <a:ext cx="1417319" cy="310896"/>
-          </a:xfrm>
-          <a:prstGeom prst="rect">
-            <a:avLst/>
-          </a:prstGeom>
-          <a:noFill/>
-        </p:spPr>
-        <p:txBody>
-          <a:bodyPr wrap="square" lIns="0" rIns="0" tIns="0" bIns="0" anchor="ctr">
-            <a:spAutoFit/>
-          </a:bodyPr>
-          <a:lstStyle/>
-          <a:p>
-            <a:pPr algn="ctr">
-              <a:lnSpc>
-                <a:spcPct val="110000"/>
-              </a:lnSpc>
-            </a:pPr>
-            <a:r>
-              <a:rPr sz="1200" b="0" i="0">
-                <a:solidFill>
-                  <a:srgbClr val="FFFFFF"/>
-                </a:solidFill>
-                <a:latin typeface="Arial"/>
-              </a:rPr>
-              <a:t>Copilot search</a:t>
-            </a:r>
-          </a:p>
-        </p:txBody>
-      </p:sp>
-      <p:sp>
-        <p:nvSpPr>
-          <p:cNvPr id="64" name="Rounded Rectangle 63"/>
-          <p:cNvSpPr/>
-          <p:nvPr/>
-        </p:nvSpPr>
-        <p:spPr>
-          <a:xfrm>
-            <a:off x="6775703" y="2587752"/>
-            <a:ext cx="1490472" cy="530352"/>
-          </a:xfrm>
-          <a:prstGeom prst="roundRect">
-            <a:avLst>
-              <a:gd name="adj" fmla="val 18000"/>
-            </a:avLst>
-          </a:prstGeom>
-          <a:solidFill>
-            <a:srgbClr val="028090"/>
-          </a:solidFill>
-          <a:ln>
-            <a:noFill/>
-          </a:ln>
-          <a:effectLst/>
-        </p:spPr>
-        <p:style>
-          <a:lnRef idx="1">
-            <a:schemeClr val="accent1"/>
-          </a:lnRef>
-          <a:fillRef idx="3">
-            <a:schemeClr val="accent1"/>
-          </a:fillRef>
-          <a:effectRef idx="2">
-            <a:schemeClr val="accent1"/>
-          </a:effectRef>
-          <a:fontRef idx="minor">
-            <a:schemeClr val="lt1"/>
-          </a:fontRef>
-        </p:style>
-        <p:txBody>
-          <a:bodyPr rtlCol="0" anchor="ctr"/>
-          <a:lstStyle/>
-          <a:p>
-            <a:pPr algn="ctr"/>
-          </a:p>
-        </p:txBody>
-      </p:sp>
-      <p:sp>
-        <p:nvSpPr>
-          <p:cNvPr id="65" name="TextBox 64"/>
-          <p:cNvSpPr txBox="1"/>
-          <p:nvPr/>
-        </p:nvSpPr>
-        <p:spPr>
-          <a:xfrm>
-            <a:off x="6812279" y="2706624"/>
-            <a:ext cx="1417319" cy="310896"/>
-          </a:xfrm>
-          <a:prstGeom prst="rect">
-            <a:avLst/>
-          </a:prstGeom>
-          <a:noFill/>
-        </p:spPr>
-        <p:txBody>
-          <a:bodyPr wrap="square" lIns="0" rIns="0" tIns="0" bIns="0" anchor="ctr">
-            <a:spAutoFit/>
-          </a:bodyPr>
-          <a:lstStyle/>
-          <a:p>
-            <a:pPr algn="ctr">
-              <a:lnSpc>
-                <a:spcPct val="110000"/>
-              </a:lnSpc>
-            </a:pPr>
-            <a:r>
-              <a:rPr sz="1200" b="0" i="0">
-                <a:solidFill>
-                  <a:srgbClr val="FFFFFF"/>
-                </a:solidFill>
-                <a:latin typeface="Arial"/>
-              </a:rPr>
-              <a:t>GPT-4o, Claude</a:t>
-            </a:r>
-          </a:p>
-        </p:txBody>
-      </p:sp>
-      <p:sp>
-        <p:nvSpPr>
-          <p:cNvPr id="66" name="Rounded Rectangle 65"/>
-          <p:cNvSpPr/>
-          <p:nvPr/>
-        </p:nvSpPr>
-        <p:spPr>
-          <a:xfrm>
-            <a:off x="6775703" y="3264408"/>
-            <a:ext cx="1490472" cy="530352"/>
-          </a:xfrm>
-          <a:prstGeom prst="roundRect">
-            <a:avLst>
-              <a:gd name="adj" fmla="val 18000"/>
-            </a:avLst>
-          </a:prstGeom>
-          <a:solidFill>
-            <a:srgbClr val="028090"/>
-          </a:solidFill>
-          <a:ln>
-            <a:noFill/>
-          </a:ln>
-          <a:effectLst/>
-        </p:spPr>
-        <p:style>
-          <a:lnRef idx="1">
-            <a:schemeClr val="accent1"/>
-          </a:lnRef>
-          <a:fillRef idx="3">
-            <a:schemeClr val="accent1"/>
-          </a:fillRef>
-          <a:effectRef idx="2">
-            <a:schemeClr val="accent1"/>
-          </a:effectRef>
-          <a:fontRef idx="minor">
-            <a:schemeClr val="lt1"/>
-          </a:fontRef>
-        </p:style>
-        <p:txBody>
-          <a:bodyPr rtlCol="0" anchor="ctr"/>
-          <a:lstStyle/>
-          <a:p>
-            <a:pPr algn="ctr"/>
-          </a:p>
-        </p:txBody>
-      </p:sp>
-      <p:sp>
-        <p:nvSpPr>
-          <p:cNvPr id="67" name="TextBox 66"/>
-          <p:cNvSpPr txBox="1"/>
-          <p:nvPr/>
-        </p:nvSpPr>
-        <p:spPr>
-          <a:xfrm>
-            <a:off x="6812279" y="3383280"/>
-            <a:ext cx="1417319" cy="310896"/>
-          </a:xfrm>
-          <a:prstGeom prst="rect">
-            <a:avLst/>
-          </a:prstGeom>
-          <a:noFill/>
-        </p:spPr>
-        <p:txBody>
-          <a:bodyPr wrap="square" lIns="0" rIns="0" tIns="0" bIns="0" anchor="ctr">
-            <a:spAutoFit/>
-          </a:bodyPr>
-          <a:lstStyle/>
-          <a:p>
-            <a:pPr algn="ctr">
-              <a:lnSpc>
-                <a:spcPct val="110000"/>
-              </a:lnSpc>
-            </a:pPr>
-            <a:r>
-              <a:rPr sz="1200" b="0" i="0">
-                <a:solidFill>
-                  <a:srgbClr val="FFFFFF"/>
-                </a:solidFill>
-                <a:latin typeface="Arial"/>
-              </a:rPr>
-              <a:t>DALL-E, MJ</a:t>
-            </a:r>
-          </a:p>
-        </p:txBody>
-      </p:sp>
-      <p:sp>
-        <p:nvSpPr>
-          <p:cNvPr id="68" name="Rounded Rectangle 67"/>
-          <p:cNvSpPr/>
-          <p:nvPr/>
-        </p:nvSpPr>
-        <p:spPr>
-          <a:xfrm>
-            <a:off x="6775703" y="3941064"/>
-            <a:ext cx="1490472" cy="530352"/>
-          </a:xfrm>
-          <a:prstGeom prst="roundRect">
-            <a:avLst>
-              <a:gd name="adj" fmla="val 18000"/>
-            </a:avLst>
-          </a:prstGeom>
-          <a:solidFill>
-            <a:srgbClr val="028090"/>
-          </a:solidFill>
-          <a:ln>
-            <a:noFill/>
-          </a:ln>
-          <a:effectLst/>
-        </p:spPr>
-        <p:style>
-          <a:lnRef idx="1">
-            <a:schemeClr val="accent1"/>
-          </a:lnRef>
-          <a:fillRef idx="3">
-            <a:schemeClr val="accent1"/>
-          </a:fillRef>
-          <a:effectRef idx="2">
-            <a:schemeClr val="accent1"/>
-          </a:effectRef>
-          <a:fontRef idx="minor">
-            <a:schemeClr val="lt1"/>
-          </a:fontRef>
-        </p:style>
-        <p:txBody>
-          <a:bodyPr rtlCol="0" anchor="ctr"/>
-          <a:lstStyle/>
-          <a:p>
-            <a:pPr algn="ctr"/>
-          </a:p>
-        </p:txBody>
-      </p:sp>
-      <p:sp>
-        <p:nvSpPr>
-          <p:cNvPr id="69" name="TextBox 68"/>
-          <p:cNvSpPr txBox="1"/>
-          <p:nvPr/>
-        </p:nvSpPr>
-        <p:spPr>
-          <a:xfrm>
-            <a:off x="6812279" y="4059936"/>
-            <a:ext cx="1417319" cy="310896"/>
-          </a:xfrm>
-          <a:prstGeom prst="rect">
-            <a:avLst/>
-          </a:prstGeom>
-          <a:noFill/>
-        </p:spPr>
-        <p:txBody>
-          <a:bodyPr wrap="square" lIns="0" rIns="0" tIns="0" bIns="0" anchor="ctr">
-            <a:spAutoFit/>
-          </a:bodyPr>
-          <a:lstStyle/>
-          <a:p>
-            <a:pPr algn="ctr">
-              <a:lnSpc>
-                <a:spcPct val="110000"/>
-              </a:lnSpc>
-            </a:pPr>
-            <a:r>
-              <a:rPr sz="1200" b="0" i="0">
-                <a:solidFill>
-                  <a:srgbClr val="FFFFFF"/>
-                </a:solidFill>
-                <a:latin typeface="Arial"/>
-              </a:rPr>
-              <a:t>ElevenLabs, Sora</a:t>
-            </a:r>
-          </a:p>
-        </p:txBody>
-      </p:sp>
-      <p:sp>
-        <p:nvSpPr>
-          <p:cNvPr id="70" name="Rounded Rectangle 69"/>
-          <p:cNvSpPr/>
-          <p:nvPr/>
-        </p:nvSpPr>
-        <p:spPr>
-          <a:xfrm>
-            <a:off x="6775703" y="4617720"/>
-            <a:ext cx="1490472" cy="530352"/>
-          </a:xfrm>
-          <a:prstGeom prst="roundRect">
-            <a:avLst>
-              <a:gd name="adj" fmla="val 18000"/>
-            </a:avLst>
-          </a:prstGeom>
-          <a:solidFill>
-            <a:srgbClr val="028090"/>
-          </a:solidFill>
-          <a:ln>
-            <a:noFill/>
-          </a:ln>
-          <a:effectLst/>
-        </p:spPr>
-        <p:style>
-          <a:lnRef idx="1">
-            <a:schemeClr val="accent1"/>
-          </a:lnRef>
-          <a:fillRef idx="3">
-            <a:schemeClr val="accent1"/>
-          </a:fillRef>
-          <a:effectRef idx="2">
-            <a:schemeClr val="accent1"/>
-          </a:effectRef>
-          <a:fontRef idx="minor">
-            <a:schemeClr val="lt1"/>
-          </a:fontRef>
-        </p:style>
-        <p:txBody>
-          <a:bodyPr rtlCol="0" anchor="ctr"/>
-          <a:lstStyle/>
-          <a:p>
-            <a:pPr algn="ctr"/>
-          </a:p>
-        </p:txBody>
-      </p:sp>
-      <p:sp>
-        <p:nvSpPr>
-          <p:cNvPr id="71" name="TextBox 70"/>
-          <p:cNvSpPr txBox="1"/>
-          <p:nvPr/>
-        </p:nvSpPr>
-        <p:spPr>
-          <a:xfrm>
-            <a:off x="6812279" y="4736592"/>
-            <a:ext cx="1417319" cy="310896"/>
-          </a:xfrm>
-          <a:prstGeom prst="rect">
-            <a:avLst/>
-          </a:prstGeom>
-          <a:noFill/>
-        </p:spPr>
-        <p:txBody>
-          <a:bodyPr wrap="square" lIns="0" rIns="0" tIns="0" bIns="0" anchor="ctr">
-            <a:spAutoFit/>
-          </a:bodyPr>
-          <a:lstStyle/>
-          <a:p>
-            <a:pPr algn="ctr">
-              <a:lnSpc>
-                <a:spcPct val="110000"/>
-              </a:lnSpc>
-            </a:pPr>
-            <a:r>
-              <a:rPr sz="1200" b="0" i="0">
-                <a:solidFill>
-                  <a:srgbClr val="FFFFFF"/>
-                </a:solidFill>
-                <a:latin typeface="Arial"/>
-              </a:rPr>
-              <a:t>Codex tab.</a:t>
-            </a:r>
-          </a:p>
-        </p:txBody>
-      </p:sp>
-      <p:sp>
-        <p:nvSpPr>
-          <p:cNvPr id="72" name="Rounded Rectangle 71"/>
-          <p:cNvSpPr/>
-          <p:nvPr/>
-        </p:nvSpPr>
-        <p:spPr>
-          <a:xfrm>
-            <a:off x="6775703" y="5294376"/>
-            <a:ext cx="1490472" cy="530352"/>
-          </a:xfrm>
-          <a:prstGeom prst="roundRect">
-            <a:avLst>
-              <a:gd name="adj" fmla="val 18000"/>
-            </a:avLst>
-          </a:prstGeom>
-          <a:solidFill>
-            <a:srgbClr val="028090"/>
-          </a:solidFill>
-          <a:ln>
-            <a:noFill/>
-          </a:ln>
-          <a:effectLst/>
-        </p:spPr>
-        <p:style>
-          <a:lnRef idx="1">
-            <a:schemeClr val="accent1"/>
-          </a:lnRef>
-          <a:fillRef idx="3">
-            <a:schemeClr val="accent1"/>
-          </a:fillRef>
-          <a:effectRef idx="2">
-            <a:schemeClr val="accent1"/>
-          </a:effectRef>
-          <a:fontRef idx="minor">
-            <a:schemeClr val="lt1"/>
-          </a:fontRef>
-        </p:style>
-        <p:txBody>
-          <a:bodyPr rtlCol="0" anchor="ctr"/>
-          <a:lstStyle/>
-          <a:p>
-            <a:pPr algn="ctr"/>
-          </a:p>
-        </p:txBody>
-      </p:sp>
-      <p:sp>
-        <p:nvSpPr>
-          <p:cNvPr id="73" name="TextBox 72"/>
-          <p:cNvSpPr txBox="1"/>
-          <p:nvPr/>
-        </p:nvSpPr>
-        <p:spPr>
-          <a:xfrm>
-            <a:off x="6812279" y="5413248"/>
-            <a:ext cx="1417319" cy="310896"/>
-          </a:xfrm>
-          <a:prstGeom prst="rect">
-            <a:avLst/>
-          </a:prstGeom>
-          <a:noFill/>
-        </p:spPr>
-        <p:txBody>
-          <a:bodyPr wrap="square" lIns="0" rIns="0" tIns="0" bIns="0" anchor="ctr">
-            <a:spAutoFit/>
-          </a:bodyPr>
-          <a:lstStyle/>
-          <a:p>
-            <a:pPr algn="ctr">
-              <a:lnSpc>
-                <a:spcPct val="110000"/>
-              </a:lnSpc>
-            </a:pPr>
-            <a:r>
-              <a:rPr sz="1200" b="0" i="0">
-                <a:solidFill>
-                  <a:srgbClr val="FFFFFF"/>
-                </a:solidFill>
-                <a:latin typeface="Arial"/>
-              </a:rPr>
-              <a:t>Cursor, Claude Code</a:t>
-            </a:r>
-          </a:p>
-        </p:txBody>
-      </p:sp>
-      <p:sp>
-        <p:nvSpPr>
-          <p:cNvPr id="74" name="TextBox 73"/>
-          <p:cNvSpPr txBox="1"/>
-          <p:nvPr/>
-        </p:nvSpPr>
-        <p:spPr>
-          <a:xfrm>
-            <a:off x="8375904" y="2715768"/>
-            <a:ext cx="1490472" cy="274320"/>
-          </a:xfrm>
-          <a:prstGeom prst="rect">
-            <a:avLst/>
-          </a:prstGeom>
-          <a:noFill/>
-        </p:spPr>
-        <p:txBody>
-          <a:bodyPr wrap="square" lIns="0" rIns="0" tIns="0" bIns="0" anchor="ctr">
-            <a:spAutoFit/>
-          </a:bodyPr>
-          <a:lstStyle/>
-          <a:p>
-            <a:pPr algn="ctr">
-              <a:lnSpc>
-                <a:spcPct val="115000"/>
-              </a:lnSpc>
-            </a:pPr>
-            <a:r>
-              <a:rPr sz="1100" b="0" i="0">
-                <a:solidFill>
-                  <a:srgbClr val="E5EAF0"/>
-                </a:solidFill>
-                <a:latin typeface="Arial"/>
-              </a:rPr>
-              <a:t>—</a:t>
-            </a:r>
-          </a:p>
-        </p:txBody>
-      </p:sp>
-      <p:sp>
-        <p:nvSpPr>
-          <p:cNvPr id="75" name="Rounded Rectangle 74"/>
-          <p:cNvSpPr/>
-          <p:nvPr/>
-        </p:nvSpPr>
-        <p:spPr>
-          <a:xfrm>
-            <a:off x="8375904" y="3264408"/>
-            <a:ext cx="1490472" cy="530352"/>
-          </a:xfrm>
-          <a:prstGeom prst="roundRect">
-            <a:avLst>
-              <a:gd name="adj" fmla="val 18000"/>
-            </a:avLst>
-          </a:prstGeom>
-          <a:solidFill>
-            <a:srgbClr val="1C7293"/>
-          </a:solidFill>
-          <a:ln>
-            <a:noFill/>
-          </a:ln>
-          <a:effectLst/>
-        </p:spPr>
-        <p:style>
-          <a:lnRef idx="1">
-            <a:schemeClr val="accent1"/>
-          </a:lnRef>
-          <a:fillRef idx="3">
-            <a:schemeClr val="accent1"/>
-          </a:fillRef>
-          <a:effectRef idx="2">
-            <a:schemeClr val="accent1"/>
-          </a:effectRef>
-          <a:fontRef idx="minor">
-            <a:schemeClr val="lt1"/>
-          </a:fontRef>
-        </p:style>
-        <p:txBody>
-          <a:bodyPr rtlCol="0" anchor="ctr"/>
-          <a:lstStyle/>
-          <a:p>
-            <a:pPr algn="ctr"/>
-          </a:p>
-        </p:txBody>
-      </p:sp>
-      <p:sp>
-        <p:nvSpPr>
-          <p:cNvPr id="76" name="TextBox 75"/>
-          <p:cNvSpPr txBox="1"/>
-          <p:nvPr/>
-        </p:nvSpPr>
-        <p:spPr>
-          <a:xfrm>
-            <a:off x="8412480" y="3383280"/>
-            <a:ext cx="1417319" cy="310896"/>
-          </a:xfrm>
-          <a:prstGeom prst="rect">
-            <a:avLst/>
-          </a:prstGeom>
-          <a:noFill/>
-        </p:spPr>
-        <p:txBody>
-          <a:bodyPr wrap="square" lIns="0" rIns="0" tIns="0" bIns="0" anchor="ctr">
-            <a:spAutoFit/>
-          </a:bodyPr>
-          <a:lstStyle/>
-          <a:p>
-            <a:pPr algn="ctr">
-              <a:lnSpc>
-                <a:spcPct val="110000"/>
-              </a:lnSpc>
-            </a:pPr>
-            <a:r>
-              <a:rPr sz="1200" b="0" i="0">
-                <a:solidFill>
-                  <a:srgbClr val="FFFFFF"/>
-                </a:solidFill>
-                <a:latin typeface="Arial"/>
-              </a:rPr>
-              <a:t>frame predict</a:t>
-            </a:r>
-          </a:p>
-        </p:txBody>
-      </p:sp>
-      <p:sp>
-        <p:nvSpPr>
-          <p:cNvPr id="77" name="Rounded Rectangle 76"/>
-          <p:cNvSpPr/>
-          <p:nvPr/>
-        </p:nvSpPr>
-        <p:spPr>
-          <a:xfrm>
-            <a:off x="8375904" y="3941064"/>
-            <a:ext cx="1490472" cy="530352"/>
-          </a:xfrm>
-          <a:prstGeom prst="roundRect">
-            <a:avLst>
-              <a:gd name="adj" fmla="val 18000"/>
-            </a:avLst>
-          </a:prstGeom>
-          <a:solidFill>
-            <a:srgbClr val="1C7293"/>
-          </a:solidFill>
-          <a:ln>
-            <a:noFill/>
-          </a:ln>
-          <a:effectLst/>
-        </p:spPr>
-        <p:style>
-          <a:lnRef idx="1">
-            <a:schemeClr val="accent1"/>
-          </a:lnRef>
-          <a:fillRef idx="3">
-            <a:schemeClr val="accent1"/>
-          </a:fillRef>
-          <a:effectRef idx="2">
-            <a:schemeClr val="accent1"/>
-          </a:effectRef>
-          <a:fontRef idx="minor">
-            <a:schemeClr val="lt1"/>
-          </a:fontRef>
-        </p:style>
-        <p:txBody>
-          <a:bodyPr rtlCol="0" anchor="ctr"/>
-          <a:lstStyle/>
-          <a:p>
-            <a:pPr algn="ctr"/>
-          </a:p>
-        </p:txBody>
-      </p:sp>
-      <p:sp>
-        <p:nvSpPr>
-          <p:cNvPr id="78" name="TextBox 77"/>
-          <p:cNvSpPr txBox="1"/>
-          <p:nvPr/>
-        </p:nvSpPr>
-        <p:spPr>
-          <a:xfrm>
-            <a:off x="8412480" y="4059936"/>
-            <a:ext cx="1417319" cy="310896"/>
-          </a:xfrm>
-          <a:prstGeom prst="rect">
-            <a:avLst/>
-          </a:prstGeom>
-          <a:noFill/>
-        </p:spPr>
-        <p:txBody>
-          <a:bodyPr wrap="square" lIns="0" rIns="0" tIns="0" bIns="0" anchor="ctr">
-            <a:spAutoFit/>
-          </a:bodyPr>
-          <a:lstStyle/>
-          <a:p>
-            <a:pPr algn="ctr">
-              <a:lnSpc>
-                <a:spcPct val="110000"/>
-              </a:lnSpc>
-            </a:pPr>
-            <a:r>
-              <a:rPr sz="1200" b="0" i="0">
-                <a:solidFill>
-                  <a:srgbClr val="FFFFFF"/>
-                </a:solidFill>
-                <a:latin typeface="Arial"/>
-              </a:rPr>
-              <a:t>video forecast</a:t>
-            </a:r>
-          </a:p>
-        </p:txBody>
-      </p:sp>
-      <p:sp>
-        <p:nvSpPr>
-          <p:cNvPr id="79" name="Rounded Rectangle 78"/>
-          <p:cNvSpPr/>
-          <p:nvPr/>
-        </p:nvSpPr>
-        <p:spPr>
-          <a:xfrm>
-            <a:off x="8375904" y="4617720"/>
-            <a:ext cx="1490472" cy="530352"/>
-          </a:xfrm>
-          <a:prstGeom prst="roundRect">
-            <a:avLst>
-              <a:gd name="adj" fmla="val 18000"/>
-            </a:avLst>
-          </a:prstGeom>
-          <a:solidFill>
-            <a:srgbClr val="1C7293"/>
-          </a:solidFill>
-          <a:ln>
-            <a:noFill/>
-          </a:ln>
-          <a:effectLst/>
-        </p:spPr>
-        <p:style>
-          <a:lnRef idx="1">
-            <a:schemeClr val="accent1"/>
-          </a:lnRef>
-          <a:fillRef idx="3">
-            <a:schemeClr val="accent1"/>
-          </a:fillRef>
-          <a:effectRef idx="2">
-            <a:schemeClr val="accent1"/>
-          </a:effectRef>
-          <a:fontRef idx="minor">
-            <a:schemeClr val="lt1"/>
-          </a:fontRef>
-        </p:style>
-        <p:txBody>
-          <a:bodyPr rtlCol="0" anchor="ctr"/>
-          <a:lstStyle/>
-          <a:p>
-            <a:pPr algn="ctr"/>
-          </a:p>
-        </p:txBody>
-      </p:sp>
-      <p:sp>
-        <p:nvSpPr>
-          <p:cNvPr id="80" name="TextBox 79"/>
-          <p:cNvSpPr txBox="1"/>
-          <p:nvPr/>
-        </p:nvSpPr>
-        <p:spPr>
-          <a:xfrm>
-            <a:off x="8412480" y="4736592"/>
-            <a:ext cx="1417319" cy="310896"/>
-          </a:xfrm>
-          <a:prstGeom prst="rect">
-            <a:avLst/>
-          </a:prstGeom>
-          <a:noFill/>
-        </p:spPr>
-        <p:txBody>
-          <a:bodyPr wrap="square" lIns="0" rIns="0" tIns="0" bIns="0" anchor="ctr">
-            <a:spAutoFit/>
-          </a:bodyPr>
-          <a:lstStyle/>
-          <a:p>
-            <a:pPr algn="ctr">
-              <a:lnSpc>
-                <a:spcPct val="110000"/>
-              </a:lnSpc>
-            </a:pPr>
-            <a:r>
-              <a:rPr sz="1200" b="0" i="0">
-                <a:solidFill>
-                  <a:srgbClr val="FFFFFF"/>
-                </a:solidFill>
-                <a:latin typeface="Arial"/>
-              </a:rPr>
               <a:t>Prophet, ARIMA</a:t>
             </a:r>
           </a:p>
@@ -17484,425 +17000,7 @@
       </p:sp>
       <p:sp>
         <p:nvSpPr>
-          <p:cNvPr id="81" name="TextBox 80"/>
-          <p:cNvSpPr txBox="1"/>
-          <p:nvPr/>
-        </p:nvSpPr>
-        <p:spPr>
-          <a:xfrm>
-            <a:off x="8375904" y="5422392"/>
-            <a:ext cx="1490472" cy="274320"/>
-          </a:xfrm>
-          <a:prstGeom prst="rect">
-            <a:avLst/>
-          </a:prstGeom>
-          <a:noFill/>
-        </p:spPr>
-        <p:txBody>
-          <a:bodyPr wrap="square" lIns="0" rIns="0" tIns="0" bIns="0" anchor="ctr">
-            <a:spAutoFit/>
-          </a:bodyPr>
-          <a:lstStyle/>
-          <a:p>
-            <a:pPr algn="ctr">
-              <a:lnSpc>
-                <a:spcPct val="115000"/>
-              </a:lnSpc>
-            </a:pPr>
-            <a:r>
-              <a:rPr sz="1100" b="0" i="0">
-                <a:solidFill>
-                  <a:srgbClr val="E5EAF0"/>
-                </a:solidFill>
-                <a:latin typeface="Arial"/>
-              </a:rPr>
-              <a:t>—</a:t>
-            </a:r>
-          </a:p>
-        </p:txBody>
-      </p:sp>
-      <p:sp>
-        <p:nvSpPr>
-          <p:cNvPr id="82" name="Rounded Rectangle 81"/>
-          <p:cNvSpPr/>
-          <p:nvPr/>
-        </p:nvSpPr>
-        <p:spPr>
-          <a:xfrm>
-            <a:off x="9976104" y="2587752"/>
-            <a:ext cx="1490472" cy="530352"/>
-          </a:xfrm>
-          <a:prstGeom prst="roundRect">
-            <a:avLst>
-              <a:gd name="adj" fmla="val 18000"/>
-            </a:avLst>
-          </a:prstGeom>
-          <a:solidFill>
-            <a:srgbClr val="1C7293"/>
-          </a:solidFill>
-          <a:ln>
-            <a:noFill/>
-          </a:ln>
-          <a:effectLst/>
-        </p:spPr>
-        <p:style>
-          <a:lnRef idx="1">
-            <a:schemeClr val="accent1"/>
-          </a:lnRef>
-          <a:fillRef idx="3">
-            <a:schemeClr val="accent1"/>
-          </a:fillRef>
-          <a:effectRef idx="2">
-            <a:schemeClr val="accent1"/>
-          </a:effectRef>
-          <a:fontRef idx="minor">
-            <a:schemeClr val="lt1"/>
-          </a:fontRef>
-        </p:style>
-        <p:txBody>
-          <a:bodyPr rtlCol="0" anchor="ctr"/>
-          <a:lstStyle/>
-          <a:p>
-            <a:pPr algn="ctr"/>
-          </a:p>
-        </p:txBody>
-      </p:sp>
-      <p:sp>
-        <p:nvSpPr>
-          <p:cNvPr id="83" name="TextBox 82"/>
-          <p:cNvSpPr txBox="1"/>
-          <p:nvPr/>
-        </p:nvSpPr>
-        <p:spPr>
-          <a:xfrm>
-            <a:off x="10012680" y="2706624"/>
-            <a:ext cx="1417319" cy="310896"/>
-          </a:xfrm>
-          <a:prstGeom prst="rect">
-            <a:avLst/>
-          </a:prstGeom>
-          <a:noFill/>
-        </p:spPr>
-        <p:txBody>
-          <a:bodyPr wrap="square" lIns="0" rIns="0" tIns="0" bIns="0" anchor="ctr">
-            <a:spAutoFit/>
-          </a:bodyPr>
-          <a:lstStyle/>
-          <a:p>
-            <a:pPr algn="ctr">
-              <a:lnSpc>
-                <a:spcPct val="110000"/>
-              </a:lnSpc>
-            </a:pPr>
-            <a:r>
-              <a:rPr sz="1200" b="0" i="0">
-                <a:solidFill>
-                  <a:srgbClr val="FFFFFF"/>
-                </a:solidFill>
-                <a:latin typeface="Arial"/>
-              </a:rPr>
-              <a:t>ReAct, AutoGPT</a:t>
-            </a:r>
-          </a:p>
-        </p:txBody>
-      </p:sp>
-      <p:sp>
-        <p:nvSpPr>
-          <p:cNvPr id="84" name="Rounded Rectangle 83"/>
-          <p:cNvSpPr/>
-          <p:nvPr/>
-        </p:nvSpPr>
-        <p:spPr>
-          <a:xfrm>
-            <a:off x="9976104" y="3264408"/>
-            <a:ext cx="1490472" cy="530352"/>
-          </a:xfrm>
-          <a:prstGeom prst="roundRect">
-            <a:avLst>
-              <a:gd name="adj" fmla="val 18000"/>
-            </a:avLst>
-          </a:prstGeom>
-          <a:solidFill>
-            <a:srgbClr val="1C7293"/>
-          </a:solidFill>
-          <a:ln>
-            <a:noFill/>
-          </a:ln>
-          <a:effectLst/>
-        </p:spPr>
-        <p:style>
-          <a:lnRef idx="1">
-            <a:schemeClr val="accent1"/>
-          </a:lnRef>
-          <a:fillRef idx="3">
-            <a:schemeClr val="accent1"/>
-          </a:fillRef>
-          <a:effectRef idx="2">
-            <a:schemeClr val="accent1"/>
-          </a:effectRef>
-          <a:fontRef idx="minor">
-            <a:schemeClr val="lt1"/>
-          </a:fontRef>
-        </p:style>
-        <p:txBody>
-          <a:bodyPr rtlCol="0" anchor="ctr"/>
-          <a:lstStyle/>
-          <a:p>
-            <a:pPr algn="ctr"/>
-          </a:p>
-        </p:txBody>
-      </p:sp>
-      <p:sp>
-        <p:nvSpPr>
-          <p:cNvPr id="85" name="TextBox 84"/>
-          <p:cNvSpPr txBox="1"/>
-          <p:nvPr/>
-        </p:nvSpPr>
-        <p:spPr>
-          <a:xfrm>
-            <a:off x="10012680" y="3383280"/>
-            <a:ext cx="1417319" cy="310896"/>
-          </a:xfrm>
-          <a:prstGeom prst="rect">
-            <a:avLst/>
-          </a:prstGeom>
-          <a:noFill/>
-        </p:spPr>
-        <p:txBody>
-          <a:bodyPr wrap="square" lIns="0" rIns="0" tIns="0" bIns="0" anchor="ctr">
-            <a:spAutoFit/>
-          </a:bodyPr>
-          <a:lstStyle/>
-          <a:p>
-            <a:pPr algn="ctr">
-              <a:lnSpc>
-                <a:spcPct val="110000"/>
-              </a:lnSpc>
-            </a:pPr>
-            <a:r>
-              <a:rPr sz="1200" b="0" i="0">
-                <a:solidFill>
-                  <a:srgbClr val="FFFFFF"/>
-                </a:solidFill>
-                <a:latin typeface="Arial"/>
-              </a:rPr>
-              <a:t>visual nav</a:t>
-            </a:r>
-          </a:p>
-        </p:txBody>
-      </p:sp>
-      <p:sp>
-        <p:nvSpPr>
-          <p:cNvPr id="86" name="TextBox 85"/>
-          <p:cNvSpPr txBox="1"/>
-          <p:nvPr/>
-        </p:nvSpPr>
-        <p:spPr>
-          <a:xfrm>
-            <a:off x="9976104" y="4069080"/>
-            <a:ext cx="1490472" cy="274320"/>
-          </a:xfrm>
-          <a:prstGeom prst="rect">
-            <a:avLst/>
-          </a:prstGeom>
-          <a:noFill/>
-        </p:spPr>
-        <p:txBody>
-          <a:bodyPr wrap="square" lIns="0" rIns="0" tIns="0" bIns="0" anchor="ctr">
-            <a:spAutoFit/>
-          </a:bodyPr>
-          <a:lstStyle/>
-          <a:p>
-            <a:pPr algn="ctr">
-              <a:lnSpc>
-                <a:spcPct val="115000"/>
-              </a:lnSpc>
-            </a:pPr>
-            <a:r>
-              <a:rPr sz="1100" b="0" i="0">
-                <a:solidFill>
-                  <a:srgbClr val="E5EAF0"/>
-                </a:solidFill>
-                <a:latin typeface="Arial"/>
-              </a:rPr>
-              <a:t>—</a:t>
-            </a:r>
-          </a:p>
-        </p:txBody>
-      </p:sp>
-      <p:sp>
-        <p:nvSpPr>
-          <p:cNvPr id="87" name="Rounded Rectangle 86"/>
-          <p:cNvSpPr/>
-          <p:nvPr/>
-        </p:nvSpPr>
-        <p:spPr>
-          <a:xfrm>
-            <a:off x="9976104" y="4617720"/>
-            <a:ext cx="1490472" cy="530352"/>
-          </a:xfrm>
-          <a:prstGeom prst="roundRect">
-            <a:avLst>
-              <a:gd name="adj" fmla="val 18000"/>
-            </a:avLst>
-          </a:prstGeom>
-          <a:solidFill>
-            <a:srgbClr val="1C7293"/>
-          </a:solidFill>
-          <a:ln>
-            <a:noFill/>
-          </a:ln>
-          <a:effectLst/>
-        </p:spPr>
-        <p:style>
-          <a:lnRef idx="1">
-            <a:schemeClr val="accent1"/>
-          </a:lnRef>
-          <a:fillRef idx="3">
-            <a:schemeClr val="accent1"/>
-          </a:fillRef>
-          <a:effectRef idx="2">
-            <a:schemeClr val="accent1"/>
-          </a:effectRef>
-          <a:fontRef idx="minor">
-            <a:schemeClr val="lt1"/>
-          </a:fontRef>
-        </p:style>
-        <p:txBody>
-          <a:bodyPr rtlCol="0" anchor="ctr"/>
-          <a:lstStyle/>
-          <a:p>
-            <a:pPr algn="ctr"/>
-          </a:p>
-        </p:txBody>
-      </p:sp>
-      <p:sp>
-        <p:nvSpPr>
-          <p:cNvPr id="88" name="TextBox 87"/>
-          <p:cNvSpPr txBox="1"/>
-          <p:nvPr/>
-        </p:nvSpPr>
-        <p:spPr>
-          <a:xfrm>
-            <a:off x="10012680" y="4736592"/>
-            <a:ext cx="1417319" cy="310896"/>
-          </a:xfrm>
-          <a:prstGeom prst="rect">
-            <a:avLst/>
-          </a:prstGeom>
-          <a:noFill/>
-        </p:spPr>
-        <p:txBody>
-          <a:bodyPr wrap="square" lIns="0" rIns="0" tIns="0" bIns="0" anchor="ctr">
-            <a:spAutoFit/>
-          </a:bodyPr>
-          <a:lstStyle/>
-          <a:p>
-            <a:pPr algn="ctr">
-              <a:lnSpc>
-                <a:spcPct val="110000"/>
-              </a:lnSpc>
-            </a:pPr>
-            <a:r>
-              <a:rPr sz="1200" b="0" i="0">
-                <a:solidFill>
-                  <a:srgbClr val="FFFFFF"/>
-                </a:solidFill>
-                <a:latin typeface="Arial"/>
-              </a:rPr>
-              <a:t>scheduling</a:t>
-            </a:r>
-          </a:p>
-        </p:txBody>
-      </p:sp>
-      <p:sp>
-        <p:nvSpPr>
-          <p:cNvPr id="89" name="Rounded Rectangle 88"/>
-          <p:cNvSpPr/>
-          <p:nvPr/>
-        </p:nvSpPr>
-        <p:spPr>
-          <a:xfrm>
-            <a:off x="9976104" y="5294376"/>
-            <a:ext cx="1490472" cy="530352"/>
-          </a:xfrm>
-          <a:prstGeom prst="roundRect">
-            <a:avLst>
-              <a:gd name="adj" fmla="val 18000"/>
-            </a:avLst>
-          </a:prstGeom>
-          <a:solidFill>
-            <a:srgbClr val="1C7293"/>
-          </a:solidFill>
-          <a:ln>
-            <a:noFill/>
-          </a:ln>
-          <a:effectLst/>
-        </p:spPr>
-        <p:style>
-          <a:lnRef idx="1">
-            <a:schemeClr val="accent1"/>
-          </a:lnRef>
-          <a:fillRef idx="3">
-            <a:schemeClr val="accent1"/>
-          </a:fillRef>
-          <a:effectRef idx="2">
-            <a:schemeClr val="accent1"/>
-          </a:effectRef>
-          <a:fontRef idx="minor">
-            <a:schemeClr val="lt1"/>
-          </a:fontRef>
-        </p:style>
-        <p:txBody>
-          <a:bodyPr rtlCol="0" anchor="ctr"/>
-          <a:lstStyle/>
-          <a:p>
-            <a:pPr algn="ctr"/>
-          </a:p>
-        </p:txBody>
-      </p:sp>
-      <p:sp>
-        <p:nvSpPr>
-          <p:cNvPr id="90" name="TextBox 89"/>
-          <p:cNvSpPr txBox="1"/>
-          <p:nvPr/>
-        </p:nvSpPr>
-        <p:spPr>
-          <a:xfrm>
-            <a:off x="10012680" y="5413248"/>
-            <a:ext cx="1417319" cy="310896"/>
-          </a:xfrm>
-          <a:prstGeom prst="rect">
-            <a:avLst/>
-          </a:prstGeom>
-          <a:noFill/>
-        </p:spPr>
-        <p:txBody>
-          <a:bodyPr wrap="square" lIns="0" rIns="0" tIns="0" bIns="0" anchor="ctr">
-            <a:spAutoFit/>
-          </a:bodyPr>
-          <a:lstStyle/>
-          <a:p>
-            <a:pPr algn="ctr">
-              <a:lnSpc>
-                <a:spcPct val="110000"/>
-              </a:lnSpc>
-            </a:pPr>
-            <a:r>
-              <a:rPr sz="1200" b="0" i="0">
-                <a:solidFill>
-                  <a:srgbClr val="FFFFFF"/>
-                </a:solidFill>
-                <a:latin typeface="Arial"/>
-              </a:rPr>
-              <a:t>Devin, OpenClaw</a:t>
-            </a:r>
-          </a:p>
-        </p:txBody>
-      </p:sp>
-      <p:sp>
-        <p:nvSpPr>
-          <p:cNvPr id="91" name="Rounded Rectangle 90"/>
+          <p:cNvPr id="69" name="Rounded Rectangle 68"/>
           <p:cNvSpPr/>
           <p:nvPr/>
         </p:nvSpPr>
@@ -17950,7 +17048,7 @@
       </p:sp>
       <p:sp>
         <p:nvSpPr>
-          <p:cNvPr id="92" name="TextBox 91"/>
+          <p:cNvPr id="70" name="TextBox 69"/>
           <p:cNvSpPr txBox="1"/>
           <p:nvPr/>
         </p:nvSpPr>
@@ -18228,8 +17326,8 @@
         </p:nvSpPr>
         <p:spPr>
           <a:xfrm>
-            <a:off x="457200" y="1664207"/>
-            <a:ext cx="1234440" cy="274320"/>
+            <a:off x="365759" y="1645919"/>
+            <a:ext cx="1325880" cy="292608"/>
           </a:xfrm>
           <a:prstGeom prst="rect">
             <a:avLst/>
@@ -18248,7 +17346,7 @@
               </a:lnSpc>
             </a:pPr>
             <a:r>
-              <a:rPr sz="1100" b="1" i="1">
+              <a:rPr sz="1400" b="1" i="1">
                 <a:solidFill>
                   <a:srgbClr val="6B7685"/>
                 </a:solidFill>
@@ -18267,8 +17365,8 @@
         </p:nvSpPr>
         <p:spPr>
           <a:xfrm>
-            <a:off x="457200" y="5422392"/>
-            <a:ext cx="1234440" cy="256032"/>
+            <a:off x="365759" y="5404103"/>
+            <a:ext cx="1325880" cy="292608"/>
           </a:xfrm>
           <a:prstGeom prst="rect">
             <a:avLst/>
@@ -18287,7 +17385,7 @@
               </a:lnSpc>
             </a:pPr>
             <a:r>
-              <a:rPr sz="1100" b="1" i="1">
+              <a:rPr sz="1400" b="1" i="1">
                 <a:solidFill>
                   <a:srgbClr val="6B7685"/>
                 </a:solidFill>
@@ -18345,8 +17443,8 @@
         </p:nvSpPr>
         <p:spPr>
           <a:xfrm>
-            <a:off x="1828800" y="5806440"/>
-            <a:ext cx="1097280" cy="256032"/>
+            <a:off x="1828800" y="5788152"/>
+            <a:ext cx="1371600" cy="274320"/>
           </a:xfrm>
           <a:prstGeom prst="rect">
             <a:avLst/>
@@ -18365,7 +17463,7 @@
               </a:lnSpc>
             </a:pPr>
             <a:r>
-              <a:rPr sz="1000" b="1" i="1">
+              <a:rPr sz="1300" b="1" i="1">
                 <a:solidFill>
                   <a:srgbClr val="6B7685"/>
                 </a:solidFill>
@@ -18384,8 +17482,8 @@
         </p:nvSpPr>
         <p:spPr>
           <a:xfrm>
-            <a:off x="7178040" y="5806440"/>
-            <a:ext cx="1097280" cy="256032"/>
+            <a:off x="6903720" y="5788152"/>
+            <a:ext cx="1371600" cy="274320"/>
           </a:xfrm>
           <a:prstGeom prst="rect">
             <a:avLst/>
@@ -18404,7 +17502,7 @@
               </a:lnSpc>
             </a:pPr>
             <a:r>
-              <a:rPr sz="1000" b="1" i="1">
+              <a:rPr sz="1300" b="1" i="1">
                 <a:solidFill>
                   <a:srgbClr val="6B7685"/>
                 </a:solidFill>
@@ -18586,8 +17684,8 @@
         </p:nvSpPr>
         <p:spPr>
           <a:xfrm>
-            <a:off x="2221991" y="4650638"/>
-            <a:ext cx="1737360" cy="502920"/>
+            <a:off x="1536192" y="4650638"/>
+            <a:ext cx="3108960" cy="320040"/>
           </a:xfrm>
           <a:prstGeom prst="rect">
             <a:avLst/>
@@ -18606,14 +17704,13 @@
               </a:lnSpc>
             </a:pPr>
             <a:r>
-              <a:rPr sz="1000" b="0" i="1">
+              <a:rPr sz="850" b="0" i="1">
                 <a:solidFill>
                   <a:srgbClr val="21295C"/>
                 </a:solidFill>
                 <a:latin typeface="Arial"/>
               </a:rPr>
-              <a:t>Сам интегрирует API,
-полный контроль</a:t>
+              <a:t>Сам интегрирует API, полный контроль</a:t>
             </a:r>
           </a:p>
         </p:txBody>
@@ -18711,8 +17808,8 @@
         </p:nvSpPr>
         <p:spPr>
           <a:xfrm>
-            <a:off x="4183380" y="4000500"/>
-            <a:ext cx="1737360" cy="502920"/>
+            <a:off x="3497580" y="4000500"/>
+            <a:ext cx="3108960" cy="320040"/>
           </a:xfrm>
           <a:prstGeom prst="rect">
             <a:avLst/>
@@ -18731,14 +17828,13 @@
               </a:lnSpc>
             </a:pPr>
             <a:r>
-              <a:rPr sz="1000" b="0" i="1">
+              <a:rPr sz="850" b="0" i="1">
                 <a:solidFill>
                   <a:srgbClr val="21295C"/>
                 </a:solidFill>
                 <a:latin typeface="Arial"/>
               </a:rPr>
-              <a:t>Диалог, уточнения
-по ходу</a:t>
+              <a:t>Диалог, уточнения по ходу</a:t>
             </a:r>
           </a:p>
         </p:txBody>
@@ -18836,8 +17932,8 @@
         </p:nvSpPr>
         <p:spPr>
           <a:xfrm>
-            <a:off x="6144768" y="2916936"/>
-            <a:ext cx="1737360" cy="502920"/>
+            <a:off x="5458968" y="2916936"/>
+            <a:ext cx="3108960" cy="320040"/>
           </a:xfrm>
           <a:prstGeom prst="rect">
             <a:avLst/>
@@ -18856,14 +17952,13 @@
               </a:lnSpc>
             </a:pPr>
             <a:r>
-              <a:rPr sz="1000" b="0" i="1">
+              <a:rPr sz="850" b="0" i="1">
                 <a:solidFill>
                   <a:srgbClr val="21295C"/>
                 </a:solidFill>
                 <a:latin typeface="Arial"/>
               </a:rPr>
-              <a:t>Делегирование целиком,
-оркестратор решает</a:t>
+              <a:t>Делегирование целиком, решает оркестратор</a:t>
             </a:r>
           </a:p>
         </p:txBody>
@@ -20406,8 +19501,7 @@
                 </a:solidFill>
                 <a:latin typeface="Arial"/>
               </a:rPr>
-              <a:t>детекция на
-изображениях</a:t>
+              <a:t>детекция на изображениях</a:t>
             </a:r>
           </a:p>
         </p:txBody>
@@ -20533,8 +19627,7 @@
                 </a:solidFill>
                 <a:latin typeface="Arial"/>
               </a:rPr>
-              <a:t>распознавание
-речи</a:t>
+              <a:t>распознавание речи</a:t>
             </a:r>
           </a:p>
         </p:txBody>
@@ -20660,8 +19753,7 @@
                 </a:solidFill>
                 <a:latin typeface="Arial"/>
               </a:rPr>
-              <a:t>генерация
-изображений</a:t>
+              <a:t>генерация изображений</a:t>
             </a:r>
           </a:p>
         </p:txBody>
@@ -20787,8 +19879,7 @@
                 </a:solidFill>
                 <a:latin typeface="Arial"/>
               </a:rPr>
-              <a:t>прогноз структур
-белков</a:t>
+              <a:t>прогноз структур белков</a:t>
             </a:r>
           </a:p>
         </p:txBody>
@@ -34940,8 +34031,8 @@
         </p:nvSpPr>
         <p:spPr>
           <a:xfrm>
-            <a:off x="502920" y="3977639"/>
-            <a:ext cx="5029200" cy="960120"/>
+            <a:off x="1885950" y="3977639"/>
+            <a:ext cx="2263140" cy="960120"/>
           </a:xfrm>
           <a:prstGeom prst="roundRect">
             <a:avLst>
@@ -34986,8 +34077,8 @@
         </p:nvSpPr>
         <p:spPr>
           <a:xfrm>
-            <a:off x="502920" y="4160520"/>
-            <a:ext cx="5029200" cy="594360"/>
+            <a:off x="1885950" y="4105655"/>
+            <a:ext cx="2263140" cy="704088"/>
           </a:xfrm>
           <a:prstGeom prst="rect">
             <a:avLst/>
@@ -35002,17 +34093,18 @@
           <a:p>
             <a:pPr algn="ctr">
               <a:lnSpc>
-                <a:spcPct val="115000"/>
-              </a:lnSpc>
-            </a:pPr>
-            <a:r>
-              <a:rPr sz="2400" b="1" i="0">
+                <a:spcPct val="110000"/>
+              </a:lnSpc>
+            </a:pPr>
+            <a:r>
+              <a:rPr sz="1800" b="1" i="0">
                 <a:solidFill>
                   <a:srgbClr val="21295C"/>
                 </a:solidFill>
                 <a:latin typeface="Arial"/>
               </a:rPr>
-              <a:t>10% доходят до прода</a:t>
+              <a:t>10% доходят
+до прода</a:t>
             </a:r>
           </a:p>
         </p:txBody>

--- a/library/lectures/lec-01/rendered/lec-01.pptx
+++ b/library/lectures/lec-01/rendered/lec-01.pptx
@@ -1189,13 +1189,13 @@
           <a:p/>
           <a:p>
             <a:r>
-              <a:t>Ось «тип задачи» — что система производит на выходе. Классификация — поставить метку из конечного множества: спам или не спам, дефект или не дефект. Распознавание — обнаружить и идентифицировать что-то во входе: лица, речь, символы. Поиск — найти и отранжировать релевантные элементы: по корпоративной базе знаний, по фотографии. Генерация — создать новое содержимое: текст, изображение, аудио, код. Прогноз — предсказать число или последовательность: спрос, отказ оборудования, цену акции. Планирование — построить последовательность действий для достижения цели: маршрут, расписание.</a:t>
+              <a:t>Ось «тип задачи» — что система производит на выходе. Классификация — поставить метку из конечного множества: спам или не спам, дефект или не дефект. Распознавание — обнаружить и идентифицировать что-то во входе: лица, речь, символы. Поиск — найти и отранжировать релевантные элементы: по корпоративной базе знаний, по фотографии. Генерация — создать новое содержимое: текст, изображение, аудио, код. Прогноз — предсказать число или последовательность: спрос, отказ оборудования, цену акции.</a:t>
             </a:r>
           </a:p>
           <a:p/>
           <a:p>
             <a:r>
-              <a:t>Ось «модальность» — с каким типом данных работает система. Текст. Изображение — фотографии, рентгеновские снимки, кадры конвейерной камеры. Звук — речь, музыка, индустриальный шум. Видео — последовательность изображений, часто плюс звук. Структурированные данные — таблицы, временные ряды, графы, базы. Код — частный случай текста, но с особенностями. Мультимодальные комбинации — текст плюс изображение, текст плюс аудио плюс видео.</a:t>
+              <a:t>Ось «модальность» — с каким типом данных работает система. Текст. Изображение — фотографии, рентгеновские снимки, кадры конвейерной камеры. Звук — речь, музыка, индустриальный шум. Видео — последовательность изображений, часто плюс звук. Структурированные данные — таблицы, временные ряды, графы, базы. Мультимодальные комбинации — текст плюс изображение, текст плюс аудио плюс видео.</a:t>
             </a:r>
           </a:p>
           <a:p/>
@@ -22459,7 +22459,7 @@
         </p:nvSpPr>
         <p:spPr>
           <a:xfrm>
-            <a:off x="685800" y="3246120"/>
+            <a:off x="685800" y="2446020"/>
             <a:ext cx="1005840" cy="1005840"/>
           </a:xfrm>
           <a:prstGeom prst="ellipse">
@@ -22505,7 +22505,7 @@
         </p:nvSpPr>
         <p:spPr>
           <a:xfrm>
-            <a:off x="685800" y="3602735"/>
+            <a:off x="685800" y="2802635"/>
             <a:ext cx="1005840" cy="320040"/>
           </a:xfrm>
           <a:prstGeom prst="rect">
@@ -22544,7 +22544,7 @@
         </p:nvSpPr>
         <p:spPr>
           <a:xfrm>
-            <a:off x="365760" y="4306824"/>
+            <a:off x="365760" y="3506724"/>
             <a:ext cx="1645920" cy="274320"/>
           </a:xfrm>
           <a:prstGeom prst="rect">
@@ -23307,8 +23307,8 @@
         </p:nvSpPr>
         <p:spPr>
           <a:xfrm>
-            <a:off x="1188720" y="3977640"/>
-            <a:ext cx="10076688" cy="182880"/>
+            <a:off x="1828800" y="3977640"/>
+            <a:ext cx="9436608" cy="182880"/>
           </a:xfrm>
           <a:prstGeom prst="leftArrow">
             <a:avLst/>
@@ -23345,14 +23345,58 @@
       </p:sp>
       <p:sp>
         <p:nvSpPr>
-          <p:cNvPr id="25" name="TextBox 24"/>
-          <p:cNvSpPr txBox="1"/>
-          <p:nvPr/>
-        </p:nvSpPr>
-        <p:spPr>
-          <a:xfrm>
-            <a:off x="1783080" y="3685032"/>
-            <a:ext cx="8915400" cy="256032"/>
+          <p:cNvPr id="25" name="Up Arrow 24"/>
+          <p:cNvSpPr/>
+          <p:nvPr/>
+        </p:nvSpPr>
+        <p:spPr>
+          <a:xfrm>
+            <a:off x="1737360" y="3451860"/>
+            <a:ext cx="182880" cy="617220"/>
+          </a:xfrm>
+          <a:prstGeom prst="upArrow">
+            <a:avLst/>
+          </a:prstGeom>
+          <a:solidFill>
+            <a:srgbClr val="028090"/>
+          </a:solidFill>
+          <a:ln>
+            <a:noFill/>
+          </a:ln>
+          <a:effectLst/>
+        </p:spPr>
+        <p:style>
+          <a:lnRef idx="1">
+            <a:schemeClr val="accent1"/>
+          </a:lnRef>
+          <a:fillRef idx="3">
+            <a:schemeClr val="accent1"/>
+          </a:fillRef>
+          <a:effectRef idx="2">
+            <a:schemeClr val="accent1"/>
+          </a:effectRef>
+          <a:fontRef idx="minor">
+            <a:schemeClr val="lt1"/>
+          </a:fontRef>
+        </p:style>
+        <p:txBody>
+          <a:bodyPr rtlCol="0" anchor="ctr"/>
+          <a:lstStyle/>
+          <a:p>
+            <a:pPr algn="ctr"/>
+          </a:p>
+        </p:txBody>
+      </p:sp>
+      <p:sp>
+        <p:nvSpPr>
+          <p:cNvPr id="26" name="TextBox 25"/>
+          <p:cNvSpPr txBox="1"/>
+          <p:nvPr/>
+        </p:nvSpPr>
+        <p:spPr>
+          <a:xfrm>
+            <a:off x="2057400" y="3685032"/>
+            <a:ext cx="7726679" cy="256032"/>
           </a:xfrm>
           <a:prstGeom prst="rect">
             <a:avLst/>
@@ -23384,7 +23428,7 @@
       </p:sp>
       <p:sp>
         <p:nvSpPr>
-          <p:cNvPr id="26" name="Rectangle 25"/>
+          <p:cNvPr id="27" name="Rectangle 26"/>
           <p:cNvSpPr/>
           <p:nvPr/>
         </p:nvSpPr>
@@ -23428,7 +23472,7 @@
       </p:sp>
       <p:sp>
         <p:nvSpPr>
-          <p:cNvPr id="27" name="Rectangle 26"/>
+          <p:cNvPr id="28" name="Rectangle 27"/>
           <p:cNvSpPr/>
           <p:nvPr/>
         </p:nvSpPr>
@@ -23472,7 +23516,7 @@
       </p:sp>
       <p:sp>
         <p:nvSpPr>
-          <p:cNvPr id="28" name="Down Arrow 27"/>
+          <p:cNvPr id="29" name="Up Arrow 28"/>
           <p:cNvSpPr/>
           <p:nvPr/>
         </p:nvSpPr>
@@ -23481,7 +23525,7 @@
             <a:off x="10218420" y="1810511"/>
             <a:ext cx="182880" cy="594360"/>
           </a:xfrm>
-          <a:prstGeom prst="downArrow">
+          <a:prstGeom prst="upArrow">
             <a:avLst/>
           </a:prstGeom>
           <a:solidFill>
@@ -23516,7 +23560,7 @@
       </p:sp>
       <p:sp>
         <p:nvSpPr>
-          <p:cNvPr id="29" name="TextBox 28"/>
+          <p:cNvPr id="30" name="TextBox 29"/>
           <p:cNvSpPr txBox="1"/>
           <p:nvPr/>
         </p:nvSpPr>
@@ -23555,7 +23599,7 @@
       </p:sp>
       <p:sp>
         <p:nvSpPr>
-          <p:cNvPr id="30" name="Rounded Rectangle 29"/>
+          <p:cNvPr id="31" name="Rounded Rectangle 30"/>
           <p:cNvSpPr/>
           <p:nvPr/>
         </p:nvSpPr>
@@ -23603,7 +23647,7 @@
       </p:sp>
       <p:sp>
         <p:nvSpPr>
-          <p:cNvPr id="31" name="TextBox 30"/>
+          <p:cNvPr id="32" name="TextBox 31"/>
           <p:cNvSpPr txBox="1"/>
           <p:nvPr/>
         </p:nvSpPr>
@@ -23642,7 +23686,7 @@
       </p:sp>
       <p:sp>
         <p:nvSpPr>
-          <p:cNvPr id="32" name="TextBox 31"/>
+          <p:cNvPr id="33" name="TextBox 32"/>
           <p:cNvSpPr txBox="1"/>
           <p:nvPr/>
         </p:nvSpPr>
@@ -23682,7 +23726,7 @@
       </p:sp>
       <p:sp>
         <p:nvSpPr>
-          <p:cNvPr id="33" name="Rounded Rectangle 32"/>
+          <p:cNvPr id="34" name="Rounded Rectangle 33"/>
           <p:cNvSpPr/>
           <p:nvPr/>
         </p:nvSpPr>
@@ -23730,7 +23774,7 @@
       </p:sp>
       <p:sp>
         <p:nvSpPr>
-          <p:cNvPr id="34" name="TextBox 33"/>
+          <p:cNvPr id="35" name="TextBox 34"/>
           <p:cNvSpPr txBox="1"/>
           <p:nvPr/>
         </p:nvSpPr>
@@ -23769,7 +23813,7 @@
       </p:sp>
       <p:sp>
         <p:nvSpPr>
-          <p:cNvPr id="35" name="TextBox 34"/>
+          <p:cNvPr id="36" name="TextBox 35"/>
           <p:cNvSpPr txBox="1"/>
           <p:nvPr/>
         </p:nvSpPr>
@@ -23809,7 +23853,7 @@
       </p:sp>
       <p:sp>
         <p:nvSpPr>
-          <p:cNvPr id="36" name="Rectangle 35"/>
+          <p:cNvPr id="37" name="Rectangle 36"/>
           <p:cNvSpPr/>
           <p:nvPr/>
         </p:nvSpPr>
@@ -23853,7 +23897,7 @@
       </p:sp>
       <p:sp>
         <p:nvSpPr>
-          <p:cNvPr id="37" name="Rectangle 36"/>
+          <p:cNvPr id="38" name="Rectangle 37"/>
           <p:cNvSpPr/>
           <p:nvPr/>
         </p:nvSpPr>
@@ -23897,7 +23941,7 @@
       </p:sp>
       <p:sp>
         <p:nvSpPr>
-          <p:cNvPr id="38" name="TextBox 37"/>
+          <p:cNvPr id="39" name="TextBox 38"/>
           <p:cNvSpPr txBox="1"/>
           <p:nvPr/>
         </p:nvSpPr>
@@ -23936,7 +23980,7 @@
       </p:sp>
       <p:sp>
         <p:nvSpPr>
-          <p:cNvPr id="39" name="TextBox 38"/>
+          <p:cNvPr id="40" name="TextBox 39"/>
           <p:cNvSpPr txBox="1"/>
           <p:nvPr/>
         </p:nvSpPr>
@@ -23975,7 +24019,7 @@
       </p:sp>
       <p:sp>
         <p:nvSpPr>
-          <p:cNvPr id="40" name="TextBox 39"/>
+          <p:cNvPr id="41" name="TextBox 40"/>
           <p:cNvSpPr txBox="1"/>
           <p:nvPr/>
         </p:nvSpPr>
@@ -26248,7 +26292,7 @@
                 </a:solidFill>
                 <a:latin typeface="Arial"/>
               </a:rPr>
-              <a:t>пользователь на каждом шаге</a:t>
+              <a:t>Пользователь: одобряет каждое действие</a:t>
             </a:r>
           </a:p>
         </p:txBody>
@@ -26411,7 +26455,7 @@
                 </a:solidFill>
                 <a:latin typeface="Arial"/>
               </a:rPr>
-              <a:t>пара, ролями перетекая</a:t>
+              <a:t>Пользователь: работает наравне с агентом</a:t>
             </a:r>
           </a:p>
         </p:txBody>
@@ -26574,7 +26618,7 @@
                 </a:solidFill>
                 <a:latin typeface="Arial"/>
               </a:rPr>
-              <a:t>цель + план + правки</a:t>
+              <a:t>Пользователь: ставит цель, правит план</a:t>
             </a:r>
           </a:p>
         </p:txBody>
@@ -26737,7 +26781,7 @@
                 </a:solidFill>
                 <a:latin typeface="Arial"/>
               </a:rPr>
-              <a:t>агент действует, gate на узлах</a:t>
+              <a:t>Пользователь: утверждает на контрольных точках</a:t>
             </a:r>
           </a:p>
         </p:txBody>
@@ -26902,7 +26946,7 @@
                 </a:solidFill>
                 <a:latin typeface="Arial"/>
               </a:rPr>
-              <a:t>полная автономия</a:t>
+              <a:t>Пользователь: только получает результат</a:t>
             </a:r>
           </a:p>
         </p:txBody>
@@ -27050,11 +27094,11 @@
             </a:avLst>
           </a:prstGeom>
           <a:solidFill>
-            <a:srgbClr val="FFFFFF"/>
+            <a:srgbClr val="FEF5E0"/>
           </a:solidFill>
           <a:ln w="19050">
             <a:solidFill>
-              <a:srgbClr val="1C7293"/>
+              <a:srgbClr val="F0AB00"/>
             </a:solidFill>
           </a:ln>
           <a:effectLst/>
@@ -27111,11 +27155,11 @@
             <a:r>
               <a:rPr sz="1050" b="1" i="0">
                 <a:solidFill>
-                  <a:srgbClr val="1C7293"/>
-                </a:solidFill>
-                <a:latin typeface="Arial"/>
-              </a:rPr>
-              <a:t>Человек в цикле (Human-in-the-loop)</a:t>
+                  <a:srgbClr val="F0AB00"/>
+                </a:solidFill>
+                <a:latin typeface="Arial"/>
+              </a:rPr>
+              <a:t>Человек вне цикла (Human-out-of-the-loop)</a:t>
             </a:r>
           </a:p>
         </p:txBody>
@@ -27154,7 +27198,7 @@
                 </a:solidFill>
                 <a:latin typeface="Arial"/>
               </a:rPr>
-              <a:t>Человек одобряет каждый шаг (≈ ур. 1-2).</a:t>
+              <a:t>Человек только смотрит итог (≈ ур. 5).</a:t>
             </a:r>
           </a:p>
         </p:txBody>
@@ -27302,11 +27346,11 @@
             </a:avLst>
           </a:prstGeom>
           <a:solidFill>
-            <a:srgbClr val="FEF5E0"/>
+            <a:srgbClr val="FFFFFF"/>
           </a:solidFill>
           <a:ln w="19050">
             <a:solidFill>
-              <a:srgbClr val="F0AB00"/>
+              <a:srgbClr val="1C7293"/>
             </a:solidFill>
           </a:ln>
           <a:effectLst/>
@@ -27363,11 +27407,11 @@
             <a:r>
               <a:rPr sz="1050" b="1" i="0">
                 <a:solidFill>
-                  <a:srgbClr val="F0AB00"/>
-                </a:solidFill>
-                <a:latin typeface="Arial"/>
-              </a:rPr>
-              <a:t>Человек вне цикла (Human-out-of-the-loop)</a:t>
+                  <a:srgbClr val="1C7293"/>
+                </a:solidFill>
+                <a:latin typeface="Arial"/>
+              </a:rPr>
+              <a:t>Человек в цикле (Human-in-the-loop)</a:t>
             </a:r>
           </a:p>
         </p:txBody>
@@ -27406,7 +27450,7 @@
                 </a:solidFill>
                 <a:latin typeface="Arial"/>
               </a:rPr>
-              <a:t>Человек только смотрит итог (≈ ур. 5).</a:t>
+              <a:t>Человек одобряет каждый шаг (≈ ур. 1-2).</a:t>
             </a:r>
           </a:p>
         </p:txBody>

--- a/library/lectures/lec-01/rendered/lec-01.pptx
+++ b/library/lectures/lec-01/rendered/lec-01.pptx
@@ -3611,19 +3611,100 @@
           <a:lstStyle/>
           <a:p>
             <a:r>
-              <a:t>Короткое представление. Я — [имя], работаю в области [сфера], и сейчас занимаюсь [актуальная тема]. С AI работаю [сколько лет] — застал и хайповые волны, и зимы, и реальные внедрения, которые работают, и реальные внедрения, которые не работают.</a:t>
+              <a:t>Для начала — коротко о себе. Я архитектор, технический и продуктовый лидер</a:t>
+            </a:r>
+          </a:p>
+          <a:p>
+            <a:r>
+              <a:t>в разработке и внедрении информационных систем, больше двадцати лет в ИТ.</a:t>
+            </a:r>
+          </a:p>
+          <a:p>
+            <a:r>
+              <a:t>За это время под моим руководством было реализовано больше десяти</a:t>
+            </a:r>
+          </a:p>
+          <a:p>
+            <a:r>
+              <a:t>завершённых проектов — от системного анализа и проектирования архитектуры</a:t>
+            </a:r>
+          </a:p>
+          <a:p>
+            <a:r>
+              <a:t>до управления данными, автоматизации бизнес-процессов и запуска продуктов.</a:t>
             </a:r>
           </a:p>
           <a:p/>
           <a:p>
             <a:r>
-              <a:t>Эта лекция и весь курс — попытка дать вам карту, которой у меня самого не было, когда я только начинал. Мы будем разбирать конкретные инженерные решения, не общие декларации, и внимание к границам — там, где AI ломается, — у нас будет таким же подробным, как и к успешным кейсам.</a:t>
+              <a:t>Я работал и как консультант, и как штатный сотрудник — с Яндексом, МТС,</a:t>
+            </a:r>
+          </a:p>
+          <a:p>
+            <a:r>
+              <a:t>Магнитом, Сибуром. Это разные индустрии — технологии, телеком, ритейл,</a:t>
+            </a:r>
+          </a:p>
+          <a:p>
+            <a:r>
+              <a:t>нефтехимия — и в каждой AI применялся по-своему, с разным успехом. Именно</a:t>
+            </a:r>
+          </a:p>
+          <a:p>
+            <a:r>
+              <a:t>поэтому меня интересует не общий разговор про «искусственный интеллект», а</a:t>
+            </a:r>
+          </a:p>
+          <a:p>
+            <a:r>
+              <a:t>конкретная инженерная граница: где AI реально экономит время и деньги, а</a:t>
+            </a:r>
+          </a:p>
+          <a:p>
+            <a:r>
+              <a:t>где — красивая демонстрация, которая разваливается в продакшене.</a:t>
             </a:r>
           </a:p>
           <a:p/>
           <a:p>
             <a:r>
-              <a:t>Если в течение курса у вас возникнут вопросы вне формата лекции — связаться можно по [контакт]. Чем раньше задаёте — тем полезнее ответ. Не копите вопросы до конца семестра.</a:t>
+              <a:t>Этот курс — попытка дать вам карту, которой у меня самого не было, когда я</a:t>
+            </a:r>
+          </a:p>
+          <a:p>
+            <a:r>
+              <a:t>только начинал разбираться с этими инструментами в реальных проектах. Мы</a:t>
+            </a:r>
+          </a:p>
+          <a:p>
+            <a:r>
+              <a:t>будем разбирать конкретные инженерные решения, а не общие декларации, и</a:t>
+            </a:r>
+          </a:p>
+          <a:p>
+            <a:r>
+              <a:t>границам — там, где AI ломается, — будет уделено столько же внимания,</a:t>
+            </a:r>
+          </a:p>
+          <a:p>
+            <a:r>
+              <a:t>сколько успешным кейсам.</a:t>
+            </a:r>
+          </a:p>
+          <a:p/>
+          <a:p>
+            <a:r>
+              <a:t>Если в течение курса возникнут вопросы вне формата лекции — пишите в</a:t>
+            </a:r>
+          </a:p>
+          <a:p>
+            <a:r>
+              <a:t>Telegram (@Maxim_Levko) или на почту (Levko.maxim@gmail.com). Чем раньше</a:t>
+            </a:r>
+          </a:p>
+          <a:p>
+            <a:r>
+              <a:t>задаёте вопрос, тем полезнее будет ответ — не копите их до конца семестра.</a:t>
             </a:r>
           </a:p>
         </p:txBody>
@@ -31092,8 +31173,8 @@
         </p:nvSpPr>
         <p:spPr>
           <a:xfrm>
-            <a:off x="502920" y="365760"/>
-            <a:ext cx="11247120" cy="960120"/>
+            <a:off x="502920" y="320040"/>
+            <a:ext cx="11247120" cy="914400"/>
           </a:xfrm>
           <a:prstGeom prst="rect">
             <a:avLst/>
@@ -31131,8 +31212,8 @@
         </p:nvSpPr>
         <p:spPr>
           <a:xfrm>
-            <a:off x="502920" y="1417320"/>
-            <a:ext cx="11201400" cy="320040"/>
+            <a:off x="502920" y="1280160"/>
+            <a:ext cx="11201400" cy="292608"/>
           </a:xfrm>
           <a:prstGeom prst="rect">
             <a:avLst/>
@@ -31170,12 +31251,60 @@
         </p:nvSpPr>
         <p:spPr>
           <a:xfrm>
-            <a:off x="502920" y="2103120"/>
-            <a:ext cx="5532120" cy="3063240"/>
+            <a:off x="502920" y="1691640"/>
+            <a:ext cx="11185855" cy="4846320"/>
           </a:xfrm>
           <a:prstGeom prst="roundRect">
             <a:avLst>
-              <a:gd name="adj" fmla="val 9950"/>
+              <a:gd name="adj" fmla="val 6289"/>
+            </a:avLst>
+          </a:prstGeom>
+          <a:solidFill>
+            <a:srgbClr val="FFFFFF"/>
+          </a:solidFill>
+          <a:ln w="19050">
+            <a:solidFill>
+              <a:srgbClr val="1C7293"/>
+            </a:solidFill>
+          </a:ln>
+          <a:effectLst/>
+        </p:spPr>
+        <p:style>
+          <a:lnRef idx="1">
+            <a:schemeClr val="accent1"/>
+          </a:lnRef>
+          <a:fillRef idx="3">
+            <a:schemeClr val="accent1"/>
+          </a:fillRef>
+          <a:effectRef idx="2">
+            <a:schemeClr val="accent1"/>
+          </a:effectRef>
+          <a:fontRef idx="minor">
+            <a:schemeClr val="lt1"/>
+          </a:fontRef>
+        </p:style>
+        <p:txBody>
+          <a:bodyPr rtlCol="0" anchor="ctr"/>
+          <a:lstStyle/>
+          <a:p>
+            <a:pPr algn="ctr"/>
+          </a:p>
+        </p:txBody>
+      </p:sp>
+      <p:sp>
+        <p:nvSpPr>
+          <p:cNvPr id="5" name="Rounded Rectangle 4"/>
+          <p:cNvSpPr/>
+          <p:nvPr/>
+        </p:nvSpPr>
+        <p:spPr>
+          <a:xfrm>
+            <a:off x="731520" y="1920240"/>
+            <a:ext cx="5227167" cy="3017520"/>
+          </a:xfrm>
+          <a:prstGeom prst="roundRect">
+            <a:avLst>
+              <a:gd name="adj" fmla="val 10101"/>
             </a:avLst>
           </a:prstGeom>
           <a:solidFill>
@@ -31212,14 +31341,14 @@
       </p:sp>
       <p:sp>
         <p:nvSpPr>
-          <p:cNvPr id="5" name="TextBox 4"/>
-          <p:cNvSpPr txBox="1"/>
-          <p:nvPr/>
-        </p:nvSpPr>
-        <p:spPr>
-          <a:xfrm>
-            <a:off x="731520" y="2286000"/>
-            <a:ext cx="5074920" cy="411480"/>
+          <p:cNvPr id="6" name="TextBox 5"/>
+          <p:cNvSpPr txBox="1"/>
+          <p:nvPr/>
+        </p:nvSpPr>
+        <p:spPr>
+          <a:xfrm>
+            <a:off x="960120" y="2084832"/>
+            <a:ext cx="4769967" cy="365760"/>
           </a:xfrm>
           <a:prstGeom prst="rect">
             <a:avLst/>
@@ -31251,14 +31380,14 @@
       </p:sp>
       <p:sp>
         <p:nvSpPr>
-          <p:cNvPr id="6" name="TextBox 5"/>
-          <p:cNvSpPr txBox="1"/>
-          <p:nvPr/>
-        </p:nvSpPr>
-        <p:spPr>
-          <a:xfrm>
-            <a:off x="731520" y="2697479"/>
-            <a:ext cx="5074920" cy="457200"/>
+          <p:cNvPr id="7" name="TextBox 6"/>
+          <p:cNvSpPr txBox="1"/>
+          <p:nvPr/>
+        </p:nvSpPr>
+        <p:spPr>
+          <a:xfrm>
+            <a:off x="960120" y="2468880"/>
+            <a:ext cx="4769967" cy="411480"/>
           </a:xfrm>
           <a:prstGeom prst="rect">
             <a:avLst/>
@@ -31290,14 +31419,14 @@
       </p:sp>
       <p:sp>
         <p:nvSpPr>
-          <p:cNvPr id="7" name="TextBox 6"/>
-          <p:cNvSpPr txBox="1"/>
-          <p:nvPr/>
-        </p:nvSpPr>
-        <p:spPr>
-          <a:xfrm>
-            <a:off x="777240" y="3383279"/>
-            <a:ext cx="4983480" cy="365760"/>
+          <p:cNvPr id="8" name="TextBox 7"/>
+          <p:cNvSpPr txBox="1"/>
+          <p:nvPr/>
+        </p:nvSpPr>
+        <p:spPr>
+          <a:xfrm>
+            <a:off x="1005840" y="3017520"/>
+            <a:ext cx="4678527" cy="457200"/>
           </a:xfrm>
           <a:prstGeom prst="rect">
             <a:avLst/>
@@ -31312,7 +31441,7 @@
           <a:p>
             <a:pPr algn="l">
               <a:lnSpc>
-                <a:spcPct val="115000"/>
+                <a:spcPct val="112000"/>
               </a:lnSpc>
             </a:pPr>
             <a:r>
@@ -31322,21 +31451,22 @@
                 </a:solidFill>
                 <a:latin typeface="Arial"/>
               </a:rPr>
-              <a:t>•  ChatGPT Free / Plus — обучение по умолчанию</a:t>
-            </a:r>
-          </a:p>
-        </p:txBody>
-      </p:sp>
-      <p:sp>
-        <p:nvSpPr>
-          <p:cNvPr id="8" name="TextBox 7"/>
-          <p:cNvSpPr txBox="1"/>
-          <p:nvPr/>
-        </p:nvSpPr>
-        <p:spPr>
-          <a:xfrm>
-            <a:off x="777240" y="3794759"/>
-            <a:ext cx="4983480" cy="365760"/>
+              <a:t>•  ChatGPT Free / Plus — обучение
+по умолчанию</a:t>
+            </a:r>
+          </a:p>
+        </p:txBody>
+      </p:sp>
+      <p:sp>
+        <p:nvSpPr>
+          <p:cNvPr id="9" name="TextBox 8"/>
+          <p:cNvSpPr txBox="1"/>
+          <p:nvPr/>
+        </p:nvSpPr>
+        <p:spPr>
+          <a:xfrm>
+            <a:off x="1005840" y="3474720"/>
+            <a:ext cx="4678527" cy="457200"/>
           </a:xfrm>
           <a:prstGeom prst="rect">
             <a:avLst/>
@@ -31351,7 +31481,7 @@
           <a:p>
             <a:pPr algn="l">
               <a:lnSpc>
-                <a:spcPct val="115000"/>
+                <a:spcPct val="112000"/>
               </a:lnSpc>
             </a:pPr>
             <a:r>
@@ -31361,21 +31491,22 @@
                 </a:solidFill>
                 <a:latin typeface="Arial"/>
               </a:rPr>
-              <a:t>•  Anthropic Claude (с сент. 2025) — по согласию, 5 лет хранение</a:t>
-            </a:r>
-          </a:p>
-        </p:txBody>
-      </p:sp>
-      <p:sp>
-        <p:nvSpPr>
-          <p:cNvPr id="9" name="TextBox 8"/>
-          <p:cNvSpPr txBox="1"/>
-          <p:nvPr/>
-        </p:nvSpPr>
-        <p:spPr>
-          <a:xfrm>
-            <a:off x="777240" y="4206240"/>
-            <a:ext cx="4983480" cy="365760"/>
+              <a:t>•  Anthropic Claude (с сент. 2025) —
+по согласию, 5 лет хранение</a:t>
+            </a:r>
+          </a:p>
+        </p:txBody>
+      </p:sp>
+      <p:sp>
+        <p:nvSpPr>
+          <p:cNvPr id="10" name="TextBox 9"/>
+          <p:cNvSpPr txBox="1"/>
+          <p:nvPr/>
+        </p:nvSpPr>
+        <p:spPr>
+          <a:xfrm>
+            <a:off x="1005840" y="3931920"/>
+            <a:ext cx="4678527" cy="457200"/>
           </a:xfrm>
           <a:prstGeom prst="rect">
             <a:avLst/>
@@ -31390,7 +31521,7 @@
           <a:p>
             <a:pPr algn="l">
               <a:lnSpc>
-                <a:spcPct val="115000"/>
+                <a:spcPct val="112000"/>
               </a:lnSpc>
             </a:pPr>
             <a:r>
@@ -31400,21 +31531,22 @@
                 </a:solidFill>
                 <a:latin typeface="Arial"/>
               </a:rPr>
-              <a:t>•  Gemini Free — обучение + проверка людьми, 3 года</a:t>
-            </a:r>
-          </a:p>
-        </p:txBody>
-      </p:sp>
-      <p:sp>
-        <p:nvSpPr>
-          <p:cNvPr id="10" name="TextBox 9"/>
-          <p:cNvSpPr txBox="1"/>
-          <p:nvPr/>
-        </p:nvSpPr>
-        <p:spPr>
-          <a:xfrm>
-            <a:off x="777240" y="4617720"/>
-            <a:ext cx="4983480" cy="365760"/>
+              <a:t>•  Gemini Free — обучение +
+проверка людьми, 3 года</a:t>
+            </a:r>
+          </a:p>
+        </p:txBody>
+      </p:sp>
+      <p:sp>
+        <p:nvSpPr>
+          <p:cNvPr id="11" name="TextBox 10"/>
+          <p:cNvSpPr txBox="1"/>
+          <p:nvPr/>
+        </p:nvSpPr>
+        <p:spPr>
+          <a:xfrm>
+            <a:off x="1005840" y="4389120"/>
+            <a:ext cx="4678527" cy="457200"/>
           </a:xfrm>
           <a:prstGeom prst="rect">
             <a:avLst/>
@@ -31429,7 +31561,7 @@
           <a:p>
             <a:pPr algn="l">
               <a:lnSpc>
-                <a:spcPct val="115000"/>
+                <a:spcPct val="112000"/>
               </a:lnSpc>
             </a:pPr>
             <a:r>
@@ -31439,25 +31571,26 @@
                 </a:solidFill>
                 <a:latin typeface="Arial"/>
               </a:rPr>
-              <a:t>•  YandexGPT Free — стандартная политика</a:t>
-            </a:r>
-          </a:p>
-        </p:txBody>
-      </p:sp>
-      <p:sp>
-        <p:nvSpPr>
-          <p:cNvPr id="11" name="Rounded Rectangle 10"/>
+              <a:t>•  YandexGPT Free — стандартная
+политика</a:t>
+            </a:r>
+          </a:p>
+        </p:txBody>
+      </p:sp>
+      <p:sp>
+        <p:nvSpPr>
+          <p:cNvPr id="12" name="Rounded Rectangle 11"/>
           <p:cNvSpPr/>
           <p:nvPr/>
         </p:nvSpPr>
         <p:spPr>
           <a:xfrm>
-            <a:off x="6309359" y="2103120"/>
-            <a:ext cx="5532120" cy="3063240"/>
+            <a:off x="6233007" y="1920240"/>
+            <a:ext cx="5227167" cy="3017520"/>
           </a:xfrm>
           <a:prstGeom prst="roundRect">
             <a:avLst>
-              <a:gd name="adj" fmla="val 9950"/>
+              <a:gd name="adj" fmla="val 10101"/>
             </a:avLst>
           </a:prstGeom>
           <a:solidFill>
@@ -31494,14 +31627,14 @@
       </p:sp>
       <p:sp>
         <p:nvSpPr>
-          <p:cNvPr id="12" name="TextBox 11"/>
-          <p:cNvSpPr txBox="1"/>
-          <p:nvPr/>
-        </p:nvSpPr>
-        <p:spPr>
-          <a:xfrm>
-            <a:off x="6537959" y="2286000"/>
-            <a:ext cx="5074920" cy="411480"/>
+          <p:cNvPr id="13" name="TextBox 12"/>
+          <p:cNvSpPr txBox="1"/>
+          <p:nvPr/>
+        </p:nvSpPr>
+        <p:spPr>
+          <a:xfrm>
+            <a:off x="6461607" y="2084832"/>
+            <a:ext cx="4769967" cy="365760"/>
           </a:xfrm>
           <a:prstGeom prst="rect">
             <a:avLst/>
@@ -31526,21 +31659,21 @@
                 </a:solidFill>
                 <a:latin typeface="Arial"/>
               </a:rPr>
-              <a:t>ENTERPRISE / API</a:t>
-            </a:r>
-          </a:p>
-        </p:txBody>
-      </p:sp>
-      <p:sp>
-        <p:nvSpPr>
-          <p:cNvPr id="13" name="TextBox 12"/>
-          <p:cNvSpPr txBox="1"/>
-          <p:nvPr/>
-        </p:nvSpPr>
-        <p:spPr>
-          <a:xfrm>
-            <a:off x="6537959" y="2697479"/>
-            <a:ext cx="5074920" cy="457200"/>
+              <a:t>КОРПОРАТИВНЫЕ ТАРИФЫ / API</a:t>
+            </a:r>
+          </a:p>
+        </p:txBody>
+      </p:sp>
+      <p:sp>
+        <p:nvSpPr>
+          <p:cNvPr id="14" name="TextBox 13"/>
+          <p:cNvSpPr txBox="1"/>
+          <p:nvPr/>
+        </p:nvSpPr>
+        <p:spPr>
+          <a:xfrm>
+            <a:off x="6461607" y="2468880"/>
+            <a:ext cx="4769967" cy="411480"/>
           </a:xfrm>
           <a:prstGeom prst="rect">
             <a:avLst/>
@@ -31572,14 +31705,14 @@
       </p:sp>
       <p:sp>
         <p:nvSpPr>
-          <p:cNvPr id="14" name="TextBox 13"/>
-          <p:cNvSpPr txBox="1"/>
-          <p:nvPr/>
-        </p:nvSpPr>
-        <p:spPr>
-          <a:xfrm>
-            <a:off x="6583679" y="3383279"/>
-            <a:ext cx="4983480" cy="365760"/>
+          <p:cNvPr id="15" name="TextBox 14"/>
+          <p:cNvSpPr txBox="1"/>
+          <p:nvPr/>
+        </p:nvSpPr>
+        <p:spPr>
+          <a:xfrm>
+            <a:off x="6507327" y="3017520"/>
+            <a:ext cx="4678527" cy="457200"/>
           </a:xfrm>
           <a:prstGeom prst="rect">
             <a:avLst/>
@@ -31594,7 +31727,7 @@
           <a:p>
             <a:pPr algn="l">
               <a:lnSpc>
-                <a:spcPct val="115000"/>
+                <a:spcPct val="112000"/>
               </a:lnSpc>
             </a:pPr>
             <a:r>
@@ -31604,21 +31737,22 @@
                 </a:solidFill>
                 <a:latin typeface="Arial"/>
               </a:rPr>
-              <a:t>•  ChatGPT Enterprise / Business — без обучения на данных</a:t>
-            </a:r>
-          </a:p>
-        </p:txBody>
-      </p:sp>
-      <p:sp>
-        <p:nvSpPr>
-          <p:cNvPr id="15" name="TextBox 14"/>
-          <p:cNvSpPr txBox="1"/>
-          <p:nvPr/>
-        </p:nvSpPr>
-        <p:spPr>
-          <a:xfrm>
-            <a:off x="6583679" y="3794759"/>
-            <a:ext cx="4983480" cy="365760"/>
+              <a:t>•  ChatGPT Enterprise / Business —
+без обучения на данных</a:t>
+            </a:r>
+          </a:p>
+        </p:txBody>
+      </p:sp>
+      <p:sp>
+        <p:nvSpPr>
+          <p:cNvPr id="16" name="TextBox 15"/>
+          <p:cNvSpPr txBox="1"/>
+          <p:nvPr/>
+        </p:nvSpPr>
+        <p:spPr>
+          <a:xfrm>
+            <a:off x="6507327" y="3474720"/>
+            <a:ext cx="4678527" cy="457200"/>
           </a:xfrm>
           <a:prstGeom prst="rect">
             <a:avLst/>
@@ -31633,7 +31767,7 @@
           <a:p>
             <a:pPr algn="l">
               <a:lnSpc>
-                <a:spcPct val="115000"/>
+                <a:spcPct val="112000"/>
               </a:lnSpc>
             </a:pPr>
             <a:r>
@@ -31643,21 +31777,22 @@
                 </a:solidFill>
                 <a:latin typeface="Arial"/>
               </a:rPr>
-              <a:t>•  OpenAI API (с марта 2023) — без обучения на данных</a:t>
-            </a:r>
-          </a:p>
-        </p:txBody>
-      </p:sp>
-      <p:sp>
-        <p:nvSpPr>
-          <p:cNvPr id="16" name="TextBox 15"/>
-          <p:cNvSpPr txBox="1"/>
-          <p:nvPr/>
-        </p:nvSpPr>
-        <p:spPr>
-          <a:xfrm>
-            <a:off x="6583679" y="4206240"/>
-            <a:ext cx="4983480" cy="365760"/>
+              <a:t>•  OpenAI API (с марта 2023) —
+без обучения на данных</a:t>
+            </a:r>
+          </a:p>
+        </p:txBody>
+      </p:sp>
+      <p:sp>
+        <p:nvSpPr>
+          <p:cNvPr id="17" name="TextBox 16"/>
+          <p:cNvSpPr txBox="1"/>
+          <p:nvPr/>
+        </p:nvSpPr>
+        <p:spPr>
+          <a:xfrm>
+            <a:off x="6507327" y="3931920"/>
+            <a:ext cx="4678527" cy="457200"/>
           </a:xfrm>
           <a:prstGeom prst="rect">
             <a:avLst/>
@@ -31672,7 +31807,7 @@
           <a:p>
             <a:pPr algn="l">
               <a:lnSpc>
-                <a:spcPct val="115000"/>
+                <a:spcPct val="112000"/>
               </a:lnSpc>
             </a:pPr>
             <a:r>
@@ -31682,21 +31817,22 @@
                 </a:solidFill>
                 <a:latin typeface="Arial"/>
               </a:rPr>
-              <a:t>•  Anthropic for Business — нулевое хранение данных доступно</a:t>
-            </a:r>
-          </a:p>
-        </p:txBody>
-      </p:sp>
-      <p:sp>
-        <p:nvSpPr>
-          <p:cNvPr id="17" name="TextBox 16"/>
-          <p:cNvSpPr txBox="1"/>
-          <p:nvPr/>
-        </p:nvSpPr>
-        <p:spPr>
-          <a:xfrm>
-            <a:off x="6583679" y="4617720"/>
-            <a:ext cx="4983480" cy="365760"/>
+              <a:t>•  Anthropic for Business —
+нулевое хранение данных доступно</a:t>
+            </a:r>
+          </a:p>
+        </p:txBody>
+      </p:sp>
+      <p:sp>
+        <p:nvSpPr>
+          <p:cNvPr id="18" name="TextBox 17"/>
+          <p:cNvSpPr txBox="1"/>
+          <p:nvPr/>
+        </p:nvSpPr>
+        <p:spPr>
+          <a:xfrm>
+            <a:off x="6507327" y="4389120"/>
+            <a:ext cx="4678527" cy="457200"/>
           </a:xfrm>
           <a:prstGeom prst="rect">
             <a:avLst/>
@@ -31711,7 +31847,7 @@
           <a:p>
             <a:pPr algn="l">
               <a:lnSpc>
-                <a:spcPct val="115000"/>
+                <a:spcPct val="112000"/>
               </a:lnSpc>
             </a:pPr>
             <a:r>
@@ -31721,31 +31857,32 @@
                 </a:solidFill>
                 <a:latin typeface="Arial"/>
               </a:rPr>
-              <a:t>•  Google Workspace / Vertex AI — без обучения на данных</a:t>
-            </a:r>
-          </a:p>
-        </p:txBody>
-      </p:sp>
-      <p:sp>
-        <p:nvSpPr>
-          <p:cNvPr id="18" name="Rounded Rectangle 17"/>
+              <a:t>•  Google Workspace / Vertex AI —
+без обучения на данных</a:t>
+            </a:r>
+          </a:p>
+        </p:txBody>
+      </p:sp>
+      <p:sp>
+        <p:nvSpPr>
+          <p:cNvPr id="19" name="Rounded Rectangle 18"/>
           <p:cNvSpPr/>
           <p:nvPr/>
         </p:nvSpPr>
         <p:spPr>
           <a:xfrm>
-            <a:off x="502920" y="5349240"/>
-            <a:ext cx="6858000" cy="1188720"/>
+            <a:off x="731520" y="5120640"/>
+            <a:ext cx="6651766" cy="1188719"/>
           </a:xfrm>
           <a:prstGeom prst="roundRect">
             <a:avLst>
-              <a:gd name="adj" fmla="val 25000"/>
+              <a:gd name="adj" fmla="val 12000"/>
             </a:avLst>
           </a:prstGeom>
           <a:solidFill>
-            <a:srgbClr val="FFFFFF"/>
+            <a:srgbClr val="FEF5E0"/>
           </a:solidFill>
-          <a:ln w="25400">
+          <a:ln w="19050">
             <a:solidFill>
               <a:srgbClr val="F0AB00"/>
             </a:solidFill>
@@ -31776,14 +31913,14 @@
       </p:sp>
       <p:sp>
         <p:nvSpPr>
-          <p:cNvPr id="19" name="TextBox 18"/>
-          <p:cNvSpPr txBox="1"/>
-          <p:nvPr/>
-        </p:nvSpPr>
-        <p:spPr>
-          <a:xfrm>
-            <a:off x="685800" y="5440680"/>
-            <a:ext cx="6492240" cy="365760"/>
+          <p:cNvPr id="20" name="TextBox 19"/>
+          <p:cNvSpPr txBox="1"/>
+          <p:nvPr/>
+        </p:nvSpPr>
+        <p:spPr>
+          <a:xfrm>
+            <a:off x="914400" y="5212080"/>
+            <a:ext cx="6286006" cy="320040"/>
           </a:xfrm>
           <a:prstGeom prst="rect">
             <a:avLst/>
@@ -31815,14 +31952,14 @@
       </p:sp>
       <p:sp>
         <p:nvSpPr>
-          <p:cNvPr id="20" name="TextBox 19"/>
-          <p:cNvSpPr txBox="1"/>
-          <p:nvPr/>
-        </p:nvSpPr>
-        <p:spPr>
-          <a:xfrm>
-            <a:off x="685800" y="5852160"/>
-            <a:ext cx="6492240" cy="640080"/>
+          <p:cNvPr id="21" name="TextBox 20"/>
+          <p:cNvSpPr txBox="1"/>
+          <p:nvPr/>
+        </p:nvSpPr>
+        <p:spPr>
+          <a:xfrm>
+            <a:off x="914400" y="5559552"/>
+            <a:ext cx="6286006" cy="685799"/>
           </a:xfrm>
           <a:prstGeom prst="rect">
             <a:avLst/>
@@ -31837,7 +31974,7 @@
           <a:p>
             <a:pPr algn="l">
               <a:lnSpc>
-                <a:spcPct val="130000"/>
+                <a:spcPct val="128000"/>
               </a:lnSpc>
             </a:pPr>
             <a:r>
@@ -31854,18 +31991,18 @@
       </p:sp>
       <p:sp>
         <p:nvSpPr>
-          <p:cNvPr id="21" name="Rounded Rectangle 20"/>
+          <p:cNvPr id="22" name="Rounded Rectangle 21"/>
           <p:cNvSpPr/>
           <p:nvPr/>
         </p:nvSpPr>
         <p:spPr>
           <a:xfrm>
-            <a:off x="7635240" y="5349240"/>
-            <a:ext cx="4053535" cy="1188720"/>
+            <a:off x="7611886" y="5120640"/>
+            <a:ext cx="3848288" cy="1188719"/>
           </a:xfrm>
           <a:prstGeom prst="roundRect">
             <a:avLst>
-              <a:gd name="adj" fmla="val 10000"/>
+              <a:gd name="adj" fmla="val 12000"/>
             </a:avLst>
           </a:prstGeom>
           <a:solidFill>
@@ -31900,14 +32037,14 @@
       </p:sp>
       <p:sp>
         <p:nvSpPr>
-          <p:cNvPr id="22" name="TextBox 21"/>
-          <p:cNvSpPr txBox="1"/>
-          <p:nvPr/>
-        </p:nvSpPr>
-        <p:spPr>
-          <a:xfrm>
-            <a:off x="7818120" y="5440680"/>
-            <a:ext cx="3687775" cy="365760"/>
+          <p:cNvPr id="23" name="TextBox 22"/>
+          <p:cNvSpPr txBox="1"/>
+          <p:nvPr/>
+        </p:nvSpPr>
+        <p:spPr>
+          <a:xfrm>
+            <a:off x="7794766" y="5212080"/>
+            <a:ext cx="3482528" cy="320040"/>
           </a:xfrm>
           <a:prstGeom prst="rect">
             <a:avLst/>
@@ -31939,14 +32076,14 @@
       </p:sp>
       <p:sp>
         <p:nvSpPr>
-          <p:cNvPr id="23" name="TextBox 22"/>
-          <p:cNvSpPr txBox="1"/>
-          <p:nvPr/>
-        </p:nvSpPr>
-        <p:spPr>
-          <a:xfrm>
-            <a:off x="7818120" y="5852160"/>
-            <a:ext cx="3687775" cy="320040"/>
+          <p:cNvPr id="24" name="TextBox 23"/>
+          <p:cNvSpPr txBox="1"/>
+          <p:nvPr/>
+        </p:nvSpPr>
+        <p:spPr>
+          <a:xfrm>
+            <a:off x="7794766" y="5559552"/>
+            <a:ext cx="3482528" cy="301752"/>
           </a:xfrm>
           <a:prstGeom prst="rect">
             <a:avLst/>
@@ -31978,14 +32115,14 @@
       </p:sp>
       <p:sp>
         <p:nvSpPr>
-          <p:cNvPr id="24" name="TextBox 23"/>
-          <p:cNvSpPr txBox="1"/>
-          <p:nvPr/>
-        </p:nvSpPr>
-        <p:spPr>
-          <a:xfrm>
-            <a:off x="7818120" y="6172200"/>
-            <a:ext cx="3687775" cy="320040"/>
+          <p:cNvPr id="25" name="TextBox 24"/>
+          <p:cNvSpPr txBox="1"/>
+          <p:nvPr/>
+        </p:nvSpPr>
+        <p:spPr>
+          <a:xfrm>
+            <a:off x="7794766" y="5870448"/>
+            <a:ext cx="3482528" cy="365759"/>
           </a:xfrm>
           <a:prstGeom prst="rect">
             <a:avLst/>
@@ -41345,61 +41482,20 @@
       <p:grpSpPr/>
       <p:sp>
         <p:nvSpPr>
-          <p:cNvPr id="2" name="TextBox 1"/>
-          <p:cNvSpPr txBox="1"/>
-          <p:nvPr/>
-        </p:nvSpPr>
-        <p:spPr>
-          <a:xfrm>
-            <a:off x="502920" y="411480"/>
-            <a:ext cx="11247120" cy="1051560"/>
-          </a:xfrm>
-          <a:prstGeom prst="rect">
-            <a:avLst/>
-          </a:prstGeom>
-          <a:noFill/>
-        </p:spPr>
-        <p:txBody>
-          <a:bodyPr wrap="square" lIns="0" rIns="0" tIns="0" bIns="0" anchor="t">
-            <a:spAutoFit/>
-          </a:bodyPr>
-          <a:lstStyle/>
-          <a:p>
-            <a:pPr algn="l">
-              <a:lnSpc>
-                <a:spcPct val="118000"/>
-              </a:lnSpc>
-            </a:pPr>
-            <a:r>
-              <a:rPr sz="2800" b="1" i="0">
-                <a:solidFill>
-                  <a:srgbClr val="21295C"/>
-                </a:solidFill>
-                <a:latin typeface="Arial"/>
-              </a:rPr>
-              <a:t>Кто я и почему мне это важно.</a:t>
-            </a:r>
-          </a:p>
-        </p:txBody>
-      </p:sp>
-      <p:sp>
-        <p:nvSpPr>
-          <p:cNvPr id="3" name="Rounded Rectangle 2"/>
+          <p:cNvPr id="2" name="Rectangle 1"/>
           <p:cNvSpPr/>
           <p:nvPr/>
         </p:nvSpPr>
         <p:spPr>
           <a:xfrm>
-            <a:off x="914400" y="2011680"/>
-            <a:ext cx="3200400" cy="3200400"/>
-          </a:xfrm>
-          <a:prstGeom prst="roundRect">
-            <a:avLst>
-              <a:gd name="adj" fmla="val 50000"/>
-            </a:avLst>
+            <a:off x="0" y="0"/>
+            <a:ext cx="3429000" cy="6858000"/>
+          </a:xfrm>
+          <a:prstGeom prst="rect">
+            <a:avLst/>
           </a:prstGeom>
           <a:solidFill>
-            <a:srgbClr val="065A82"/>
+            <a:srgbClr val="F4F7FA"/>
           </a:solidFill>
           <a:ln>
             <a:noFill/>
@@ -41430,22 +41526,134 @@
       </p:sp>
       <p:sp>
         <p:nvSpPr>
-          <p:cNvPr id="4" name="TextBox 3"/>
-          <p:cNvSpPr txBox="1"/>
-          <p:nvPr/>
-        </p:nvSpPr>
-        <p:spPr>
-          <a:xfrm>
-            <a:off x="914400" y="2606040"/>
-            <a:ext cx="3200400" cy="2286000"/>
-          </a:xfrm>
-          <a:prstGeom prst="rect">
-            <a:avLst/>
-          </a:prstGeom>
-          <a:noFill/>
-        </p:spPr>
-        <p:txBody>
-          <a:bodyPr wrap="square" lIns="0" rIns="0" tIns="0" bIns="0" anchor="ctr">
+          <p:cNvPr id="3" name="Rectangle 2"/>
+          <p:cNvSpPr/>
+          <p:nvPr/>
+        </p:nvSpPr>
+        <p:spPr>
+          <a:xfrm>
+            <a:off x="3410712" y="0"/>
+            <a:ext cx="18288" cy="6858000"/>
+          </a:xfrm>
+          <a:prstGeom prst="rect">
+            <a:avLst/>
+          </a:prstGeom>
+          <a:solidFill>
+            <a:srgbClr val="1C7293"/>
+          </a:solidFill>
+          <a:ln>
+            <a:noFill/>
+          </a:ln>
+          <a:effectLst/>
+        </p:spPr>
+        <p:style>
+          <a:lnRef idx="1">
+            <a:schemeClr val="accent1"/>
+          </a:lnRef>
+          <a:fillRef idx="3">
+            <a:schemeClr val="accent1"/>
+          </a:fillRef>
+          <a:effectRef idx="2">
+            <a:schemeClr val="accent1"/>
+          </a:effectRef>
+          <a:fontRef idx="minor">
+            <a:schemeClr val="lt1"/>
+          </a:fontRef>
+        </p:style>
+        <p:txBody>
+          <a:bodyPr rtlCol="0" anchor="ctr"/>
+          <a:lstStyle/>
+          <a:p>
+            <a:pPr algn="ctr"/>
+          </a:p>
+        </p:txBody>
+      </p:sp>
+      <p:pic>
+        <p:nvPicPr>
+          <p:cNvPr id="4" name="Picture 3" descr="instructor-photo-crop.png"/>
+          <p:cNvPicPr>
+            <a:picLocks noChangeAspect="1"/>
+          </p:cNvPicPr>
+          <p:nvPr/>
+        </p:nvPicPr>
+        <p:blipFill>
+          <a:blip r:embed="rId2"/>
+          <a:stretch>
+            <a:fillRect/>
+          </a:stretch>
+        </p:blipFill>
+        <p:spPr>
+          <a:xfrm>
+            <a:off x="502920" y="502920"/>
+            <a:ext cx="2423160" cy="3227832"/>
+          </a:xfrm>
+          <a:prstGeom prst="rect">
+            <a:avLst/>
+          </a:prstGeom>
+        </p:spPr>
+      </p:pic>
+      <p:sp>
+        <p:nvSpPr>
+          <p:cNvPr id="5" name="Rectangle 4"/>
+          <p:cNvSpPr/>
+          <p:nvPr/>
+        </p:nvSpPr>
+        <p:spPr>
+          <a:xfrm>
+            <a:off x="502920" y="502920"/>
+            <a:ext cx="2423160" cy="3227832"/>
+          </a:xfrm>
+          <a:prstGeom prst="rect">
+            <a:avLst/>
+          </a:prstGeom>
+          <a:noFill/>
+          <a:ln w="19050">
+            <a:solidFill>
+              <a:srgbClr val="1C7293"/>
+            </a:solidFill>
+          </a:ln>
+          <a:effectLst/>
+        </p:spPr>
+        <p:style>
+          <a:lnRef idx="1">
+            <a:schemeClr val="accent1"/>
+          </a:lnRef>
+          <a:fillRef idx="3">
+            <a:schemeClr val="accent1"/>
+          </a:fillRef>
+          <a:effectRef idx="2">
+            <a:schemeClr val="accent1"/>
+          </a:effectRef>
+          <a:fontRef idx="minor">
+            <a:schemeClr val="lt1"/>
+          </a:fontRef>
+        </p:style>
+        <p:txBody>
+          <a:bodyPr rtlCol="0" anchor="ctr"/>
+          <a:lstStyle/>
+          <a:p>
+            <a:pPr algn="ctr"/>
+          </a:p>
+        </p:txBody>
+      </p:sp>
+      <p:sp>
+        <p:nvSpPr>
+          <p:cNvPr id="6" name="TextBox 5"/>
+          <p:cNvSpPr txBox="1"/>
+          <p:nvPr/>
+        </p:nvSpPr>
+        <p:spPr>
+          <a:xfrm>
+            <a:off x="320040" y="3959352"/>
+            <a:ext cx="2880360" cy="777240"/>
+          </a:xfrm>
+          <a:prstGeom prst="rect">
+            <a:avLst/>
+          </a:prstGeom>
+          <a:noFill/>
+        </p:spPr>
+        <p:txBody>
+          <a:bodyPr wrap="square" lIns="0" rIns="0" tIns="0" bIns="0" anchor="t">
             <a:spAutoFit/>
           </a:bodyPr>
           <a:lstStyle/>
@@ -41456,70 +41664,455 @@
               </a:lnSpc>
             </a:pPr>
             <a:r>
-              <a:rPr sz="12000" b="1" i="0">
-                <a:solidFill>
-                  <a:srgbClr val="FFFFFF"/>
-                </a:solidFill>
-                <a:latin typeface="Arial"/>
-              </a:rPr>
-              <a:t>ИИ</a:t>
-            </a:r>
-          </a:p>
-        </p:txBody>
-      </p:sp>
-      <p:sp>
-        <p:nvSpPr>
-          <p:cNvPr id="5" name="TextBox 4"/>
-          <p:cNvSpPr txBox="1"/>
-          <p:nvPr/>
-        </p:nvSpPr>
-        <p:spPr>
-          <a:xfrm>
-            <a:off x="640080" y="5303520"/>
-            <a:ext cx="3749039" cy="365760"/>
-          </a:xfrm>
-          <a:prstGeom prst="rect">
-            <a:avLst/>
-          </a:prstGeom>
-          <a:noFill/>
-        </p:spPr>
-        <p:txBody>
-          <a:bodyPr wrap="square" lIns="0" rIns="0" tIns="0" bIns="0" anchor="t">
-            <a:spAutoFit/>
-          </a:bodyPr>
-          <a:lstStyle/>
-          <a:p>
-            <a:pPr algn="ctr">
-              <a:lnSpc>
-                <a:spcPct val="115000"/>
-              </a:lnSpc>
-            </a:pPr>
-            <a:r>
-              <a:rPr sz="1100" b="0" i="1">
-                <a:solidFill>
-                  <a:srgbClr val="6B7685"/>
-                </a:solidFill>
-                <a:latin typeface="Arial"/>
-              </a:rPr>
-              <a:t>инициалы лектора</a:t>
-            </a:r>
-          </a:p>
-        </p:txBody>
-      </p:sp>
-      <p:sp>
-        <p:nvSpPr>
-          <p:cNvPr id="6" name="Rounded Rectangle 5"/>
+              <a:rPr sz="2000" b="1" i="0">
+                <a:solidFill>
+                  <a:srgbClr val="21295C"/>
+                </a:solidFill>
+                <a:latin typeface="Arial"/>
+              </a:rPr>
+              <a:t>Левко Максим
+Николаевич</a:t>
+            </a:r>
+          </a:p>
+        </p:txBody>
+      </p:sp>
+      <p:sp>
+        <p:nvSpPr>
+          <p:cNvPr id="7" name="Rectangle 6"/>
           <p:cNvSpPr/>
           <p:nvPr/>
         </p:nvSpPr>
         <p:spPr>
           <a:xfrm>
-            <a:off x="5029200" y="1828800"/>
-            <a:ext cx="6766560" cy="1280160"/>
+            <a:off x="502920" y="4828032"/>
+            <a:ext cx="2423160" cy="18288"/>
+          </a:xfrm>
+          <a:prstGeom prst="rect">
+            <a:avLst/>
+          </a:prstGeom>
+          <a:solidFill>
+            <a:srgbClr val="D9E2EC"/>
+          </a:solidFill>
+          <a:ln>
+            <a:noFill/>
+          </a:ln>
+          <a:effectLst/>
+        </p:spPr>
+        <p:style>
+          <a:lnRef idx="1">
+            <a:schemeClr val="accent1"/>
+          </a:lnRef>
+          <a:fillRef idx="3">
+            <a:schemeClr val="accent1"/>
+          </a:fillRef>
+          <a:effectRef idx="2">
+            <a:schemeClr val="accent1"/>
+          </a:effectRef>
+          <a:fontRef idx="minor">
+            <a:schemeClr val="lt1"/>
+          </a:fontRef>
+        </p:style>
+        <p:txBody>
+          <a:bodyPr rtlCol="0" anchor="ctr"/>
+          <a:lstStyle/>
+          <a:p>
+            <a:pPr algn="ctr"/>
+          </a:p>
+        </p:txBody>
+      </p:sp>
+      <p:sp>
+        <p:nvSpPr>
+          <p:cNvPr id="8" name="Rounded Rectangle 7"/>
+          <p:cNvSpPr/>
+          <p:nvPr/>
+        </p:nvSpPr>
+        <p:spPr>
+          <a:xfrm>
+            <a:off x="502920" y="5102352"/>
+            <a:ext cx="457200" cy="457200"/>
           </a:xfrm>
           <a:prstGeom prst="roundRect">
             <a:avLst>
-              <a:gd name="adj" fmla="val 23809"/>
+              <a:gd name="adj" fmla="val 50000"/>
+            </a:avLst>
+          </a:prstGeom>
+          <a:solidFill>
+            <a:srgbClr val="FFFFFF"/>
+          </a:solidFill>
+          <a:ln w="15240">
+            <a:solidFill>
+              <a:srgbClr val="1C7293"/>
+            </a:solidFill>
+          </a:ln>
+          <a:effectLst/>
+        </p:spPr>
+        <p:style>
+          <a:lnRef idx="1">
+            <a:schemeClr val="accent1"/>
+          </a:lnRef>
+          <a:fillRef idx="3">
+            <a:schemeClr val="accent1"/>
+          </a:fillRef>
+          <a:effectRef idx="2">
+            <a:schemeClr val="accent1"/>
+          </a:effectRef>
+          <a:fontRef idx="minor">
+            <a:schemeClr val="lt1"/>
+          </a:fontRef>
+        </p:style>
+        <p:txBody>
+          <a:bodyPr rtlCol="0" anchor="ctr"/>
+          <a:lstStyle/>
+          <a:p>
+            <a:pPr algn="ctr"/>
+          </a:p>
+        </p:txBody>
+      </p:sp>
+      <p:pic>
+        <p:nvPicPr>
+          <p:cNvPr id="9" name="Picture 8" descr="lucide-send-blue.png"/>
+          <p:cNvPicPr>
+            <a:picLocks noChangeAspect="1"/>
+          </p:cNvPicPr>
+          <p:nvPr/>
+        </p:nvPicPr>
+        <p:blipFill>
+          <a:blip r:embed="rId3"/>
+          <a:stretch>
+            <a:fillRect/>
+          </a:stretch>
+        </p:blipFill>
+        <p:spPr>
+          <a:xfrm>
+            <a:off x="603504" y="5202936"/>
+            <a:ext cx="256032" cy="256032"/>
+          </a:xfrm>
+          <a:prstGeom prst="rect">
+            <a:avLst/>
+          </a:prstGeom>
+        </p:spPr>
+      </p:pic>
+      <p:sp>
+        <p:nvSpPr>
+          <p:cNvPr id="10" name="TextBox 9"/>
+          <p:cNvSpPr txBox="1"/>
+          <p:nvPr/>
+        </p:nvSpPr>
+        <p:spPr>
+          <a:xfrm>
+            <a:off x="1097280" y="5084064"/>
+            <a:ext cx="2194560" cy="256032"/>
+          </a:xfrm>
+          <a:prstGeom prst="rect">
+            <a:avLst/>
+          </a:prstGeom>
+          <a:noFill/>
+        </p:spPr>
+        <p:txBody>
+          <a:bodyPr wrap="square" lIns="0" rIns="0" tIns="0" bIns="0" anchor="t">
+            <a:spAutoFit/>
+          </a:bodyPr>
+          <a:lstStyle/>
+          <a:p>
+            <a:pPr algn="l">
+              <a:lnSpc>
+                <a:spcPct val="115000"/>
+              </a:lnSpc>
+            </a:pPr>
+            <a:r>
+              <a:rPr sz="1100" b="1" i="0">
+                <a:solidFill>
+                  <a:srgbClr val="028090"/>
+                </a:solidFill>
+                <a:latin typeface="Arial"/>
+              </a:rPr>
+              <a:t>Telegram</a:t>
+            </a:r>
+          </a:p>
+        </p:txBody>
+      </p:sp>
+      <p:sp>
+        <p:nvSpPr>
+          <p:cNvPr id="11" name="TextBox 10"/>
+          <p:cNvSpPr txBox="1"/>
+          <p:nvPr/>
+        </p:nvSpPr>
+        <p:spPr>
+          <a:xfrm>
+            <a:off x="1097280" y="5321808"/>
+            <a:ext cx="2194560" cy="274320"/>
+          </a:xfrm>
+          <a:prstGeom prst="rect">
+            <a:avLst/>
+          </a:prstGeom>
+          <a:noFill/>
+        </p:spPr>
+        <p:txBody>
+          <a:bodyPr wrap="square" lIns="0" rIns="0" tIns="0" bIns="0" anchor="t">
+            <a:spAutoFit/>
+          </a:bodyPr>
+          <a:lstStyle/>
+          <a:p>
+            <a:pPr algn="l">
+              <a:lnSpc>
+                <a:spcPct val="115000"/>
+              </a:lnSpc>
+            </a:pPr>
+            <a:r>
+              <a:rPr sz="1150" b="0" i="0">
+                <a:solidFill>
+                  <a:srgbClr val="21295C"/>
+                </a:solidFill>
+                <a:latin typeface="Arial"/>
+              </a:rPr>
+              <a:t>@Maxim_Levko</a:t>
+            </a:r>
+          </a:p>
+        </p:txBody>
+      </p:sp>
+      <p:sp>
+        <p:nvSpPr>
+          <p:cNvPr id="12" name="Rounded Rectangle 11"/>
+          <p:cNvSpPr/>
+          <p:nvPr/>
+        </p:nvSpPr>
+        <p:spPr>
+          <a:xfrm>
+            <a:off x="502920" y="5760720"/>
+            <a:ext cx="457200" cy="457200"/>
+          </a:xfrm>
+          <a:prstGeom prst="roundRect">
+            <a:avLst>
+              <a:gd name="adj" fmla="val 50000"/>
+            </a:avLst>
+          </a:prstGeom>
+          <a:solidFill>
+            <a:srgbClr val="FFFFFF"/>
+          </a:solidFill>
+          <a:ln w="15240">
+            <a:solidFill>
+              <a:srgbClr val="1C7293"/>
+            </a:solidFill>
+          </a:ln>
+          <a:effectLst/>
+        </p:spPr>
+        <p:style>
+          <a:lnRef idx="1">
+            <a:schemeClr val="accent1"/>
+          </a:lnRef>
+          <a:fillRef idx="3">
+            <a:schemeClr val="accent1"/>
+          </a:fillRef>
+          <a:effectRef idx="2">
+            <a:schemeClr val="accent1"/>
+          </a:effectRef>
+          <a:fontRef idx="minor">
+            <a:schemeClr val="lt1"/>
+          </a:fontRef>
+        </p:style>
+        <p:txBody>
+          <a:bodyPr rtlCol="0" anchor="ctr"/>
+          <a:lstStyle/>
+          <a:p>
+            <a:pPr algn="ctr"/>
+          </a:p>
+        </p:txBody>
+      </p:sp>
+      <p:pic>
+        <p:nvPicPr>
+          <p:cNvPr id="13" name="Picture 12" descr="lucide-mail-blue.png"/>
+          <p:cNvPicPr>
+            <a:picLocks noChangeAspect="1"/>
+          </p:cNvPicPr>
+          <p:nvPr/>
+        </p:nvPicPr>
+        <p:blipFill>
+          <a:blip r:embed="rId4"/>
+          <a:stretch>
+            <a:fillRect/>
+          </a:stretch>
+        </p:blipFill>
+        <p:spPr>
+          <a:xfrm>
+            <a:off x="603504" y="5861304"/>
+            <a:ext cx="256032" cy="256032"/>
+          </a:xfrm>
+          <a:prstGeom prst="rect">
+            <a:avLst/>
+          </a:prstGeom>
+        </p:spPr>
+      </p:pic>
+      <p:sp>
+        <p:nvSpPr>
+          <p:cNvPr id="14" name="TextBox 13"/>
+          <p:cNvSpPr txBox="1"/>
+          <p:nvPr/>
+        </p:nvSpPr>
+        <p:spPr>
+          <a:xfrm>
+            <a:off x="1097280" y="5742432"/>
+            <a:ext cx="2194560" cy="256032"/>
+          </a:xfrm>
+          <a:prstGeom prst="rect">
+            <a:avLst/>
+          </a:prstGeom>
+          <a:noFill/>
+        </p:spPr>
+        <p:txBody>
+          <a:bodyPr wrap="square" lIns="0" rIns="0" tIns="0" bIns="0" anchor="t">
+            <a:spAutoFit/>
+          </a:bodyPr>
+          <a:lstStyle/>
+          <a:p>
+            <a:pPr algn="l">
+              <a:lnSpc>
+                <a:spcPct val="115000"/>
+              </a:lnSpc>
+            </a:pPr>
+            <a:r>
+              <a:rPr sz="1100" b="1" i="0">
+                <a:solidFill>
+                  <a:srgbClr val="028090"/>
+                </a:solidFill>
+                <a:latin typeface="Arial"/>
+              </a:rPr>
+              <a:t>Email</a:t>
+            </a:r>
+          </a:p>
+        </p:txBody>
+      </p:sp>
+      <p:sp>
+        <p:nvSpPr>
+          <p:cNvPr id="15" name="TextBox 14"/>
+          <p:cNvSpPr txBox="1"/>
+          <p:nvPr/>
+        </p:nvSpPr>
+        <p:spPr>
+          <a:xfrm>
+            <a:off x="1097280" y="5980176"/>
+            <a:ext cx="2194560" cy="274320"/>
+          </a:xfrm>
+          <a:prstGeom prst="rect">
+            <a:avLst/>
+          </a:prstGeom>
+          <a:noFill/>
+        </p:spPr>
+        <p:txBody>
+          <a:bodyPr wrap="square" lIns="0" rIns="0" tIns="0" bIns="0" anchor="t">
+            <a:spAutoFit/>
+          </a:bodyPr>
+          <a:lstStyle/>
+          <a:p>
+            <a:pPr algn="l">
+              <a:lnSpc>
+                <a:spcPct val="115000"/>
+              </a:lnSpc>
+            </a:pPr>
+            <a:r>
+              <a:rPr sz="1150" b="0" i="0">
+                <a:solidFill>
+                  <a:srgbClr val="21295C"/>
+                </a:solidFill>
+                <a:latin typeface="Arial"/>
+              </a:rPr>
+              <a:t>Levko.maxim@gmail.com</a:t>
+            </a:r>
+          </a:p>
+        </p:txBody>
+      </p:sp>
+      <p:sp>
+        <p:nvSpPr>
+          <p:cNvPr id="16" name="TextBox 15"/>
+          <p:cNvSpPr txBox="1"/>
+          <p:nvPr/>
+        </p:nvSpPr>
+        <p:spPr>
+          <a:xfrm>
+            <a:off x="3840480" y="411480"/>
+            <a:ext cx="7848295" cy="777240"/>
+          </a:xfrm>
+          <a:prstGeom prst="rect">
+            <a:avLst/>
+          </a:prstGeom>
+          <a:noFill/>
+        </p:spPr>
+        <p:txBody>
+          <a:bodyPr wrap="square" lIns="0" rIns="0" tIns="0" bIns="0" anchor="t">
+            <a:spAutoFit/>
+          </a:bodyPr>
+          <a:lstStyle/>
+          <a:p>
+            <a:pPr algn="l">
+              <a:lnSpc>
+                <a:spcPct val="118000"/>
+              </a:lnSpc>
+            </a:pPr>
+            <a:r>
+              <a:rPr sz="2600" b="1" i="0">
+                <a:solidFill>
+                  <a:srgbClr val="21295C"/>
+                </a:solidFill>
+                <a:latin typeface="Arial"/>
+              </a:rPr>
+              <a:t>Кто я и почему мне это важно.</a:t>
+            </a:r>
+          </a:p>
+        </p:txBody>
+      </p:sp>
+      <p:sp>
+        <p:nvSpPr>
+          <p:cNvPr id="17" name="TextBox 16"/>
+          <p:cNvSpPr txBox="1"/>
+          <p:nvPr/>
+        </p:nvSpPr>
+        <p:spPr>
+          <a:xfrm>
+            <a:off x="3840480" y="1188720"/>
+            <a:ext cx="7848295" cy="594360"/>
+          </a:xfrm>
+          <a:prstGeom prst="rect">
+            <a:avLst/>
+          </a:prstGeom>
+          <a:noFill/>
+        </p:spPr>
+        <p:txBody>
+          <a:bodyPr wrap="square" lIns="0" rIns="0" tIns="0" bIns="0" anchor="t">
+            <a:spAutoFit/>
+          </a:bodyPr>
+          <a:lstStyle/>
+          <a:p>
+            <a:pPr algn="l">
+              <a:lnSpc>
+                <a:spcPct val="120000"/>
+              </a:lnSpc>
+            </a:pPr>
+            <a:r>
+              <a:rPr sz="1500" b="1" i="0">
+                <a:solidFill>
+                  <a:srgbClr val="065A82"/>
+                </a:solidFill>
+                <a:latin typeface="Arial"/>
+              </a:rPr>
+              <a:t>Архитектор, технический и продуктовый лидер создания
+и внедрения информационных систем</a:t>
+            </a:r>
+          </a:p>
+        </p:txBody>
+      </p:sp>
+      <p:sp>
+        <p:nvSpPr>
+          <p:cNvPr id="18" name="Rounded Rectangle 17"/>
+          <p:cNvSpPr/>
+          <p:nvPr/>
+        </p:nvSpPr>
+        <p:spPr>
+          <a:xfrm>
+            <a:off x="3840480" y="2148840"/>
+            <a:ext cx="3809847" cy="1965960"/>
+          </a:xfrm>
+          <a:prstGeom prst="roundRect">
+            <a:avLst>
+              <a:gd name="adj" fmla="val 15503"/>
             </a:avLst>
           </a:prstGeom>
           <a:solidFill>
@@ -41556,22 +42149,22 @@
       </p:sp>
       <p:pic>
         <p:nvPicPr>
-          <p:cNvPr id="7" name="Picture 6" descr="lucide-briefcase-blue.png"/>
+          <p:cNvPr id="19" name="Picture 18" descr="lucide-briefcase-blue.png"/>
           <p:cNvPicPr>
             <a:picLocks noChangeAspect="1"/>
           </p:cNvPicPr>
           <p:nvPr/>
         </p:nvPicPr>
         <p:blipFill>
-          <a:blip r:embed="rId2"/>
+          <a:blip r:embed="rId5"/>
           <a:stretch>
             <a:fillRect/>
           </a:stretch>
         </p:blipFill>
         <p:spPr>
           <a:xfrm>
-            <a:off x="5349240" y="2194560"/>
-            <a:ext cx="594360" cy="594360"/>
+            <a:off x="4114800" y="2441448"/>
+            <a:ext cx="502920" cy="502920"/>
           </a:xfrm>
           <a:prstGeom prst="rect">
             <a:avLst/>
@@ -41580,14 +42173,14 @@
       </p:pic>
       <p:sp>
         <p:nvSpPr>
-          <p:cNvPr id="8" name="TextBox 7"/>
-          <p:cNvSpPr txBox="1"/>
-          <p:nvPr/>
-        </p:nvSpPr>
-        <p:spPr>
-          <a:xfrm>
-            <a:off x="6126480" y="2057400"/>
-            <a:ext cx="5486400" cy="365760"/>
+          <p:cNvPr id="20" name="TextBox 19"/>
+          <p:cNvSpPr txBox="1"/>
+          <p:nvPr/>
+        </p:nvSpPr>
+        <p:spPr>
+          <a:xfrm>
+            <a:off x="4114800" y="3081528"/>
+            <a:ext cx="3261207" cy="365760"/>
           </a:xfrm>
           <a:prstGeom prst="rect">
             <a:avLst/>
@@ -41608,25 +42201,34 @@
             <a:r>
               <a:rPr sz="1600" b="1" i="0">
                 <a:solidFill>
-                  <a:srgbClr val="065A82"/>
-                </a:solidFill>
-                <a:latin typeface="Arial"/>
-              </a:rPr>
-              <a:t>Опыт</a:t>
-            </a:r>
-          </a:p>
-        </p:txBody>
-      </p:sp>
-      <p:sp>
-        <p:nvSpPr>
-          <p:cNvPr id="9" name="TextBox 8"/>
-          <p:cNvSpPr txBox="1"/>
-          <p:nvPr/>
-        </p:nvSpPr>
-        <p:spPr>
-          <a:xfrm>
-            <a:off x="6126480" y="2514600"/>
-            <a:ext cx="5486400" cy="502920"/>
+                  <a:srgbClr val="F0AB00"/>
+                </a:solidFill>
+                <a:latin typeface="Arial"/>
+              </a:rPr>
+              <a:t>20+</a:t>
+            </a:r>
+            <a:r>
+              <a:rPr sz="1600" b="1" i="0">
+                <a:solidFill>
+                  <a:srgbClr val="21295C"/>
+                </a:solidFill>
+                <a:latin typeface="Arial"/>
+              </a:rPr>
+              <a:t> лет опыта в ИТ</a:t>
+            </a:r>
+          </a:p>
+        </p:txBody>
+      </p:sp>
+      <p:sp>
+        <p:nvSpPr>
+          <p:cNvPr id="21" name="TextBox 20"/>
+          <p:cNvSpPr txBox="1"/>
+          <p:nvPr/>
+        </p:nvSpPr>
+        <p:spPr>
+          <a:xfrm>
+            <a:off x="4114800" y="3502152"/>
+            <a:ext cx="3261207" cy="502920"/>
           </a:xfrm>
           <a:prstGeom prst="rect">
             <a:avLst/>
@@ -41641,35 +42243,36 @@
           <a:p>
             <a:pPr algn="l">
               <a:lnSpc>
-                <a:spcPct val="130000"/>
-              </a:lnSpc>
-            </a:pPr>
-            <a:r>
-              <a:rPr sz="1300" b="0" i="1">
+                <a:spcPct val="125000"/>
+              </a:lnSpc>
+            </a:pPr>
+            <a:r>
+              <a:rPr sz="1150" b="0" i="1">
                 <a:solidFill>
                   <a:srgbClr val="6B7685"/>
                 </a:solidFill>
                 <a:latin typeface="Arial"/>
               </a:rPr>
-              <a:t>[годы работы с AI; конкретные проекты]</a:t>
-            </a:r>
-          </a:p>
-        </p:txBody>
-      </p:sp>
-      <p:sp>
-        <p:nvSpPr>
-          <p:cNvPr id="10" name="Rounded Rectangle 9"/>
+              <a:t>10+ завершённых проектов
+под руководством</a:t>
+            </a:r>
+          </a:p>
+        </p:txBody>
+      </p:sp>
+      <p:sp>
+        <p:nvSpPr>
+          <p:cNvPr id="22" name="Rounded Rectangle 21"/>
           <p:cNvSpPr/>
           <p:nvPr/>
         </p:nvSpPr>
         <p:spPr>
           <a:xfrm>
-            <a:off x="5029200" y="3246120"/>
-            <a:ext cx="6766560" cy="1280160"/>
+            <a:off x="7878927" y="2148840"/>
+            <a:ext cx="3809847" cy="1965960"/>
           </a:xfrm>
           <a:prstGeom prst="roundRect">
             <a:avLst>
-              <a:gd name="adj" fmla="val 23809"/>
+              <a:gd name="adj" fmla="val 15503"/>
             </a:avLst>
           </a:prstGeom>
           <a:solidFill>
@@ -41706,22 +42309,22 @@
       </p:sp>
       <p:pic>
         <p:nvPicPr>
-          <p:cNvPr id="11" name="Picture 10" descr="lucide-lightbulb-blue.png"/>
+          <p:cNvPr id="23" name="Picture 22" descr="lucide-layers-blue.png"/>
           <p:cNvPicPr>
             <a:picLocks noChangeAspect="1"/>
           </p:cNvPicPr>
           <p:nvPr/>
         </p:nvPicPr>
         <p:blipFill>
-          <a:blip r:embed="rId3"/>
+          <a:blip r:embed="rId6"/>
           <a:stretch>
             <a:fillRect/>
           </a:stretch>
         </p:blipFill>
         <p:spPr>
           <a:xfrm>
-            <a:off x="5349240" y="3611879"/>
-            <a:ext cx="594360" cy="594360"/>
+            <a:off x="8153247" y="2441448"/>
+            <a:ext cx="502920" cy="502920"/>
           </a:xfrm>
           <a:prstGeom prst="rect">
             <a:avLst/>
@@ -41730,14 +42333,14 @@
       </p:pic>
       <p:sp>
         <p:nvSpPr>
-          <p:cNvPr id="12" name="TextBox 11"/>
-          <p:cNvSpPr txBox="1"/>
-          <p:nvPr/>
-        </p:nvSpPr>
-        <p:spPr>
-          <a:xfrm>
-            <a:off x="6126480" y="3474720"/>
-            <a:ext cx="5486400" cy="365760"/>
+          <p:cNvPr id="24" name="TextBox 23"/>
+          <p:cNvSpPr txBox="1"/>
+          <p:nvPr/>
+        </p:nvSpPr>
+        <p:spPr>
+          <a:xfrm>
+            <a:off x="8153247" y="3081528"/>
+            <a:ext cx="3261207" cy="320040"/>
           </a:xfrm>
           <a:prstGeom prst="rect">
             <a:avLst/>
@@ -41758,25 +42361,25 @@
             <a:r>
               <a:rPr sz="1600" b="1" i="0">
                 <a:solidFill>
-                  <a:srgbClr val="065A82"/>
-                </a:solidFill>
-                <a:latin typeface="Arial"/>
-              </a:rPr>
-              <a:t>Зачем мне курс</a:t>
-            </a:r>
-          </a:p>
-        </p:txBody>
-      </p:sp>
-      <p:sp>
-        <p:nvSpPr>
-          <p:cNvPr id="13" name="TextBox 12"/>
-          <p:cNvSpPr txBox="1"/>
-          <p:nvPr/>
-        </p:nvSpPr>
-        <p:spPr>
-          <a:xfrm>
-            <a:off x="6126480" y="3931920"/>
-            <a:ext cx="5486400" cy="502920"/>
+                  <a:srgbClr val="21295C"/>
+                </a:solidFill>
+                <a:latin typeface="Arial"/>
+              </a:rPr>
+              <a:t>Экспертиза</a:t>
+            </a:r>
+          </a:p>
+        </p:txBody>
+      </p:sp>
+      <p:sp>
+        <p:nvSpPr>
+          <p:cNvPr id="25" name="TextBox 24"/>
+          <p:cNvSpPr txBox="1"/>
+          <p:nvPr/>
+        </p:nvSpPr>
+        <p:spPr>
+          <a:xfrm>
+            <a:off x="8153247" y="3447288"/>
+            <a:ext cx="3261207" cy="594360"/>
           </a:xfrm>
           <a:prstGeom prst="rect">
             <a:avLst/>
@@ -41791,35 +42394,35 @@
           <a:p>
             <a:pPr algn="l">
               <a:lnSpc>
-                <a:spcPct val="130000"/>
-              </a:lnSpc>
-            </a:pPr>
-            <a:r>
-              <a:rPr sz="1300" b="0" i="1">
+                <a:spcPct val="125000"/>
+              </a:lnSpc>
+            </a:pPr>
+            <a:r>
+              <a:rPr sz="1000" b="0" i="1">
                 <a:solidFill>
                   <a:srgbClr val="6B7685"/>
                 </a:solidFill>
                 <a:latin typeface="Arial"/>
               </a:rPr>
-              <a:t>[почему важно лично]</a:t>
-            </a:r>
-          </a:p>
-        </p:txBody>
-      </p:sp>
-      <p:sp>
-        <p:nvSpPr>
-          <p:cNvPr id="14" name="Rounded Rectangle 13"/>
+              <a:t>Системный анализ · Проектирование систем · Управление данными · Автоматизация бизнеса · Управление продуктами</a:t>
+            </a:r>
+          </a:p>
+        </p:txBody>
+      </p:sp>
+      <p:sp>
+        <p:nvSpPr>
+          <p:cNvPr id="26" name="Rounded Rectangle 25"/>
           <p:cNvSpPr/>
           <p:nvPr/>
         </p:nvSpPr>
         <p:spPr>
           <a:xfrm>
-            <a:off x="5029200" y="4663440"/>
-            <a:ext cx="6766560" cy="1280160"/>
+            <a:off x="3840480" y="4389120"/>
+            <a:ext cx="7848295" cy="1417320"/>
           </a:xfrm>
           <a:prstGeom prst="roundRect">
             <a:avLst>
-              <a:gd name="adj" fmla="val 23809"/>
+              <a:gd name="adj" fmla="val 21505"/>
             </a:avLst>
           </a:prstGeom>
           <a:solidFill>
@@ -41854,24 +42457,111 @@
           </a:p>
         </p:txBody>
       </p:sp>
+      <p:sp>
+        <p:nvSpPr>
+          <p:cNvPr id="27" name="TextBox 26"/>
+          <p:cNvSpPr txBox="1"/>
+          <p:nvPr/>
+        </p:nvSpPr>
+        <p:spPr>
+          <a:xfrm>
+            <a:off x="4114800" y="4590288"/>
+            <a:ext cx="7299655" cy="320040"/>
+          </a:xfrm>
+          <a:prstGeom prst="rect">
+            <a:avLst/>
+          </a:prstGeom>
+          <a:noFill/>
+        </p:spPr>
+        <p:txBody>
+          <a:bodyPr wrap="square" lIns="0" rIns="0" tIns="0" bIns="0" anchor="t">
+            <a:spAutoFit/>
+          </a:bodyPr>
+          <a:lstStyle/>
+          <a:p>
+            <a:pPr algn="l">
+              <a:lnSpc>
+                <a:spcPct val="115000"/>
+              </a:lnSpc>
+            </a:pPr>
+            <a:r>
+              <a:rPr sz="1600" b="1" i="0">
+                <a:solidFill>
+                  <a:srgbClr val="21295C"/>
+                </a:solidFill>
+                <a:latin typeface="Arial"/>
+              </a:rPr>
+              <a:t>Консалтинг и inhouse</a:t>
+            </a:r>
+          </a:p>
+        </p:txBody>
+      </p:sp>
+      <p:sp>
+        <p:nvSpPr>
+          <p:cNvPr id="28" name="Rounded Rectangle 27"/>
+          <p:cNvSpPr/>
+          <p:nvPr/>
+        </p:nvSpPr>
+        <p:spPr>
+          <a:xfrm>
+            <a:off x="4114800" y="5102352"/>
+            <a:ext cx="1687753" cy="566928"/>
+          </a:xfrm>
+          <a:prstGeom prst="roundRect">
+            <a:avLst>
+              <a:gd name="adj" fmla="val 50000"/>
+            </a:avLst>
+          </a:prstGeom>
+          <a:solidFill>
+            <a:srgbClr val="E6F2F4"/>
+          </a:solidFill>
+          <a:ln w="15240">
+            <a:solidFill>
+              <a:srgbClr val="028090"/>
+            </a:solidFill>
+          </a:ln>
+          <a:effectLst/>
+        </p:spPr>
+        <p:style>
+          <a:lnRef idx="1">
+            <a:schemeClr val="accent1"/>
+          </a:lnRef>
+          <a:fillRef idx="3">
+            <a:schemeClr val="accent1"/>
+          </a:fillRef>
+          <a:effectRef idx="2">
+            <a:schemeClr val="accent1"/>
+          </a:effectRef>
+          <a:fontRef idx="minor">
+            <a:schemeClr val="lt1"/>
+          </a:fontRef>
+        </p:style>
+        <p:txBody>
+          <a:bodyPr rtlCol="0" anchor="ctr"/>
+          <a:lstStyle/>
+          <a:p>
+            <a:pPr algn="ctr"/>
+          </a:p>
+        </p:txBody>
+      </p:sp>
       <p:pic>
         <p:nvPicPr>
-          <p:cNvPr id="15" name="Picture 14" descr="lucide-users-blue.png"/>
+          <p:cNvPr id="29" name="Picture 28" descr="lucide-building-2-blue.png"/>
           <p:cNvPicPr>
             <a:picLocks noChangeAspect="1"/>
           </p:cNvPicPr>
           <p:nvPr/>
         </p:nvPicPr>
         <p:blipFill>
-          <a:blip r:embed="rId4"/>
+          <a:blip r:embed="rId7"/>
           <a:stretch>
             <a:fillRect/>
           </a:stretch>
         </p:blipFill>
         <p:spPr>
           <a:xfrm>
-            <a:off x="5349240" y="5029200"/>
-            <a:ext cx="594360" cy="594360"/>
+            <a:off x="4242816" y="5239512"/>
+            <a:ext cx="292608" cy="292608"/>
           </a:xfrm>
           <a:prstGeom prst="rect">
             <a:avLst/>
@@ -41880,22 +42570,22 @@
       </p:pic>
       <p:sp>
         <p:nvSpPr>
-          <p:cNvPr id="16" name="TextBox 15"/>
-          <p:cNvSpPr txBox="1"/>
-          <p:nvPr/>
-        </p:nvSpPr>
-        <p:spPr>
-          <a:xfrm>
-            <a:off x="6126480" y="4892040"/>
-            <a:ext cx="5486400" cy="365760"/>
-          </a:xfrm>
-          <a:prstGeom prst="rect">
-            <a:avLst/>
-          </a:prstGeom>
-          <a:noFill/>
-        </p:spPr>
-        <p:txBody>
-          <a:bodyPr wrap="square" lIns="0" rIns="0" tIns="0" bIns="0" anchor="t">
+          <p:cNvPr id="30" name="TextBox 29"/>
+          <p:cNvSpPr txBox="1"/>
+          <p:nvPr/>
+        </p:nvSpPr>
+        <p:spPr>
+          <a:xfrm>
+            <a:off x="4590288" y="5102352"/>
+            <a:ext cx="1139113" cy="566928"/>
+          </a:xfrm>
+          <a:prstGeom prst="rect">
+            <a:avLst/>
+          </a:prstGeom>
+          <a:noFill/>
+        </p:spPr>
+        <p:txBody>
+          <a:bodyPr wrap="square" lIns="0" rIns="0" tIns="0" bIns="0" anchor="ctr">
             <a:spAutoFit/>
           </a:bodyPr>
           <a:lstStyle/>
@@ -41906,52 +42596,346 @@
               </a:lnSpc>
             </a:pPr>
             <a:r>
-              <a:rPr sz="1600" b="1" i="0">
-                <a:solidFill>
-                  <a:srgbClr val="065A82"/>
-                </a:solidFill>
-                <a:latin typeface="Arial"/>
-              </a:rPr>
-              <a:t>Связь со студентами</a:t>
-            </a:r>
-          </a:p>
-        </p:txBody>
-      </p:sp>
-      <p:sp>
-        <p:nvSpPr>
-          <p:cNvPr id="17" name="TextBox 16"/>
-          <p:cNvSpPr txBox="1"/>
-          <p:nvPr/>
-        </p:nvSpPr>
-        <p:spPr>
-          <a:xfrm>
-            <a:off x="6126480" y="5349240"/>
-            <a:ext cx="5486400" cy="502920"/>
-          </a:xfrm>
-          <a:prstGeom prst="rect">
-            <a:avLst/>
-          </a:prstGeom>
-          <a:noFill/>
-        </p:spPr>
-        <p:txBody>
-          <a:bodyPr wrap="square" lIns="0" rIns="0" tIns="0" bIns="0" anchor="t">
+              <a:rPr sz="1250" b="1" i="0">
+                <a:solidFill>
+                  <a:srgbClr val="21295C"/>
+                </a:solidFill>
+                <a:latin typeface="Arial"/>
+              </a:rPr>
+              <a:t>Yandex</a:t>
+            </a:r>
+          </a:p>
+        </p:txBody>
+      </p:sp>
+      <p:sp>
+        <p:nvSpPr>
+          <p:cNvPr id="31" name="Rounded Rectangle 30"/>
+          <p:cNvSpPr/>
+          <p:nvPr/>
+        </p:nvSpPr>
+        <p:spPr>
+          <a:xfrm>
+            <a:off x="5985433" y="5102352"/>
+            <a:ext cx="1687753" cy="566928"/>
+          </a:xfrm>
+          <a:prstGeom prst="roundRect">
+            <a:avLst>
+              <a:gd name="adj" fmla="val 50000"/>
+            </a:avLst>
+          </a:prstGeom>
+          <a:solidFill>
+            <a:srgbClr val="E6F2F4"/>
+          </a:solidFill>
+          <a:ln w="15240">
+            <a:solidFill>
+              <a:srgbClr val="028090"/>
+            </a:solidFill>
+          </a:ln>
+          <a:effectLst/>
+        </p:spPr>
+        <p:style>
+          <a:lnRef idx="1">
+            <a:schemeClr val="accent1"/>
+          </a:lnRef>
+          <a:fillRef idx="3">
+            <a:schemeClr val="accent1"/>
+          </a:fillRef>
+          <a:effectRef idx="2">
+            <a:schemeClr val="accent1"/>
+          </a:effectRef>
+          <a:fontRef idx="minor">
+            <a:schemeClr val="lt1"/>
+          </a:fontRef>
+        </p:style>
+        <p:txBody>
+          <a:bodyPr rtlCol="0" anchor="ctr"/>
+          <a:lstStyle/>
+          <a:p>
+            <a:pPr algn="ctr"/>
+          </a:p>
+        </p:txBody>
+      </p:sp>
+      <p:pic>
+        <p:nvPicPr>
+          <p:cNvPr id="32" name="Picture 31" descr="lucide-building-2-blue.png"/>
+          <p:cNvPicPr>
+            <a:picLocks noChangeAspect="1"/>
+          </p:cNvPicPr>
+          <p:nvPr/>
+        </p:nvPicPr>
+        <p:blipFill>
+          <a:blip r:embed="rId7"/>
+          <a:stretch>
+            <a:fillRect/>
+          </a:stretch>
+        </p:blipFill>
+        <p:spPr>
+          <a:xfrm>
+            <a:off x="6113449" y="5239512"/>
+            <a:ext cx="292608" cy="292608"/>
+          </a:xfrm>
+          <a:prstGeom prst="rect">
+            <a:avLst/>
+          </a:prstGeom>
+        </p:spPr>
+      </p:pic>
+      <p:sp>
+        <p:nvSpPr>
+          <p:cNvPr id="33" name="TextBox 32"/>
+          <p:cNvSpPr txBox="1"/>
+          <p:nvPr/>
+        </p:nvSpPr>
+        <p:spPr>
+          <a:xfrm>
+            <a:off x="6460921" y="5102352"/>
+            <a:ext cx="1139113" cy="566928"/>
+          </a:xfrm>
+          <a:prstGeom prst="rect">
+            <a:avLst/>
+          </a:prstGeom>
+          <a:noFill/>
+        </p:spPr>
+        <p:txBody>
+          <a:bodyPr wrap="square" lIns="0" rIns="0" tIns="0" bIns="0" anchor="ctr">
             <a:spAutoFit/>
           </a:bodyPr>
           <a:lstStyle/>
           <a:p>
             <a:pPr algn="l">
               <a:lnSpc>
-                <a:spcPct val="130000"/>
-              </a:lnSpc>
-            </a:pPr>
-            <a:r>
-              <a:rPr sz="1300" b="0" i="1">
-                <a:solidFill>
-                  <a:srgbClr val="6B7685"/>
-                </a:solidFill>
-                <a:latin typeface="Arial"/>
-              </a:rPr>
-              <a:t>[контакт, формат вопросов]</a:t>
+                <a:spcPct val="115000"/>
+              </a:lnSpc>
+            </a:pPr>
+            <a:r>
+              <a:rPr sz="1250" b="1" i="0">
+                <a:solidFill>
+                  <a:srgbClr val="21295C"/>
+                </a:solidFill>
+                <a:latin typeface="Arial"/>
+              </a:rPr>
+              <a:t>МТС</a:t>
+            </a:r>
+          </a:p>
+        </p:txBody>
+      </p:sp>
+      <p:sp>
+        <p:nvSpPr>
+          <p:cNvPr id="34" name="Rounded Rectangle 33"/>
+          <p:cNvSpPr/>
+          <p:nvPr/>
+        </p:nvSpPr>
+        <p:spPr>
+          <a:xfrm>
+            <a:off x="7856067" y="5102352"/>
+            <a:ext cx="1687753" cy="566928"/>
+          </a:xfrm>
+          <a:prstGeom prst="roundRect">
+            <a:avLst>
+              <a:gd name="adj" fmla="val 50000"/>
+            </a:avLst>
+          </a:prstGeom>
+          <a:solidFill>
+            <a:srgbClr val="E6F2F4"/>
+          </a:solidFill>
+          <a:ln w="15240">
+            <a:solidFill>
+              <a:srgbClr val="028090"/>
+            </a:solidFill>
+          </a:ln>
+          <a:effectLst/>
+        </p:spPr>
+        <p:style>
+          <a:lnRef idx="1">
+            <a:schemeClr val="accent1"/>
+          </a:lnRef>
+          <a:fillRef idx="3">
+            <a:schemeClr val="accent1"/>
+          </a:fillRef>
+          <a:effectRef idx="2">
+            <a:schemeClr val="accent1"/>
+          </a:effectRef>
+          <a:fontRef idx="minor">
+            <a:schemeClr val="lt1"/>
+          </a:fontRef>
+        </p:style>
+        <p:txBody>
+          <a:bodyPr rtlCol="0" anchor="ctr"/>
+          <a:lstStyle/>
+          <a:p>
+            <a:pPr algn="ctr"/>
+          </a:p>
+        </p:txBody>
+      </p:sp>
+      <p:pic>
+        <p:nvPicPr>
+          <p:cNvPr id="35" name="Picture 34" descr="lucide-building-2-blue.png"/>
+          <p:cNvPicPr>
+            <a:picLocks noChangeAspect="1"/>
+          </p:cNvPicPr>
+          <p:nvPr/>
+        </p:nvPicPr>
+        <p:blipFill>
+          <a:blip r:embed="rId7"/>
+          <a:stretch>
+            <a:fillRect/>
+          </a:stretch>
+        </p:blipFill>
+        <p:spPr>
+          <a:xfrm>
+            <a:off x="7984083" y="5239512"/>
+            <a:ext cx="292608" cy="292608"/>
+          </a:xfrm>
+          <a:prstGeom prst="rect">
+            <a:avLst/>
+          </a:prstGeom>
+        </p:spPr>
+      </p:pic>
+      <p:sp>
+        <p:nvSpPr>
+          <p:cNvPr id="36" name="TextBox 35"/>
+          <p:cNvSpPr txBox="1"/>
+          <p:nvPr/>
+        </p:nvSpPr>
+        <p:spPr>
+          <a:xfrm>
+            <a:off x="8331555" y="5102352"/>
+            <a:ext cx="1139113" cy="566928"/>
+          </a:xfrm>
+          <a:prstGeom prst="rect">
+            <a:avLst/>
+          </a:prstGeom>
+          <a:noFill/>
+        </p:spPr>
+        <p:txBody>
+          <a:bodyPr wrap="square" lIns="0" rIns="0" tIns="0" bIns="0" anchor="ctr">
+            <a:spAutoFit/>
+          </a:bodyPr>
+          <a:lstStyle/>
+          <a:p>
+            <a:pPr algn="l">
+              <a:lnSpc>
+                <a:spcPct val="115000"/>
+              </a:lnSpc>
+            </a:pPr>
+            <a:r>
+              <a:rPr sz="1250" b="1" i="0">
+                <a:solidFill>
+                  <a:srgbClr val="21295C"/>
+                </a:solidFill>
+                <a:latin typeface="Arial"/>
+              </a:rPr>
+              <a:t>Магнит</a:t>
+            </a:r>
+          </a:p>
+        </p:txBody>
+      </p:sp>
+      <p:sp>
+        <p:nvSpPr>
+          <p:cNvPr id="37" name="Rounded Rectangle 36"/>
+          <p:cNvSpPr/>
+          <p:nvPr/>
+        </p:nvSpPr>
+        <p:spPr>
+          <a:xfrm>
+            <a:off x="9726701" y="5102352"/>
+            <a:ext cx="1687753" cy="566928"/>
+          </a:xfrm>
+          <a:prstGeom prst="roundRect">
+            <a:avLst>
+              <a:gd name="adj" fmla="val 50000"/>
+            </a:avLst>
+          </a:prstGeom>
+          <a:solidFill>
+            <a:srgbClr val="E6F2F4"/>
+          </a:solidFill>
+          <a:ln w="15240">
+            <a:solidFill>
+              <a:srgbClr val="028090"/>
+            </a:solidFill>
+          </a:ln>
+          <a:effectLst/>
+        </p:spPr>
+        <p:style>
+          <a:lnRef idx="1">
+            <a:schemeClr val="accent1"/>
+          </a:lnRef>
+          <a:fillRef idx="3">
+            <a:schemeClr val="accent1"/>
+          </a:fillRef>
+          <a:effectRef idx="2">
+            <a:schemeClr val="accent1"/>
+          </a:effectRef>
+          <a:fontRef idx="minor">
+            <a:schemeClr val="lt1"/>
+          </a:fontRef>
+        </p:style>
+        <p:txBody>
+          <a:bodyPr rtlCol="0" anchor="ctr"/>
+          <a:lstStyle/>
+          <a:p>
+            <a:pPr algn="ctr"/>
+          </a:p>
+        </p:txBody>
+      </p:sp>
+      <p:pic>
+        <p:nvPicPr>
+          <p:cNvPr id="38" name="Picture 37" descr="lucide-building-2-blue.png"/>
+          <p:cNvPicPr>
+            <a:picLocks noChangeAspect="1"/>
+          </p:cNvPicPr>
+          <p:nvPr/>
+        </p:nvPicPr>
+        <p:blipFill>
+          <a:blip r:embed="rId7"/>
+          <a:stretch>
+            <a:fillRect/>
+          </a:stretch>
+        </p:blipFill>
+        <p:spPr>
+          <a:xfrm>
+            <a:off x="9854717" y="5239512"/>
+            <a:ext cx="292608" cy="292608"/>
+          </a:xfrm>
+          <a:prstGeom prst="rect">
+            <a:avLst/>
+          </a:prstGeom>
+        </p:spPr>
+      </p:pic>
+      <p:sp>
+        <p:nvSpPr>
+          <p:cNvPr id="39" name="TextBox 38"/>
+          <p:cNvSpPr txBox="1"/>
+          <p:nvPr/>
+        </p:nvSpPr>
+        <p:spPr>
+          <a:xfrm>
+            <a:off x="10202189" y="5102352"/>
+            <a:ext cx="1139113" cy="566928"/>
+          </a:xfrm>
+          <a:prstGeom prst="rect">
+            <a:avLst/>
+          </a:prstGeom>
+          <a:noFill/>
+        </p:spPr>
+        <p:txBody>
+          <a:bodyPr wrap="square" lIns="0" rIns="0" tIns="0" bIns="0" anchor="ctr">
+            <a:spAutoFit/>
+          </a:bodyPr>
+          <a:lstStyle/>
+          <a:p>
+            <a:pPr algn="l">
+              <a:lnSpc>
+                <a:spcPct val="115000"/>
+              </a:lnSpc>
+            </a:pPr>
+            <a:r>
+              <a:rPr sz="1250" b="1" i="0">
+                <a:solidFill>
+                  <a:srgbClr val="21295C"/>
+                </a:solidFill>
+                <a:latin typeface="Arial"/>
+              </a:rPr>
+              <a:t>Сибур</a:t>
             </a:r>
           </a:p>
         </p:txBody>

--- a/library/lectures/lec-01/rendered/lec-01.pptx
+++ b/library/lectures/lec-01/rendered/lec-01.pptx
@@ -7328,40 +7328,47 @@
       </p:sp>
       <p:sp>
         <p:nvSpPr>
-          <p:cNvPr id="3" name="TextBox 2"/>
-          <p:cNvSpPr txBox="1"/>
-          <p:nvPr/>
-        </p:nvSpPr>
-        <p:spPr>
-          <a:xfrm>
-            <a:off x="502920" y="2011680"/>
-            <a:ext cx="2286000" cy="457200"/>
-          </a:xfrm>
-          <a:prstGeom prst="rect">
-            <a:avLst/>
-          </a:prstGeom>
-          <a:noFill/>
-        </p:spPr>
-        <p:txBody>
-          <a:bodyPr wrap="square" lIns="0" rIns="0" tIns="0" bIns="0" anchor="t">
-            <a:spAutoFit/>
-          </a:bodyPr>
-          <a:lstStyle/>
-          <a:p>
-            <a:pPr algn="l">
-              <a:lnSpc>
-                <a:spcPct val="120000"/>
-              </a:lnSpc>
-            </a:pPr>
-            <a:r>
-              <a:rPr sz="1100" b="1" i="0">
-                <a:solidFill>
-                  <a:srgbClr val="1C7293"/>
-                </a:solidFill>
-                <a:latin typeface="Arial"/>
-              </a:rPr>
-              <a:t>Открытия (1950 — 1980-е)</a:t>
-            </a:r>
+          <p:cNvPr id="3" name="Rounded Rectangle 2"/>
+          <p:cNvSpPr/>
+          <p:nvPr/>
+        </p:nvSpPr>
+        <p:spPr>
+          <a:xfrm>
+            <a:off x="502920" y="1572768"/>
+            <a:ext cx="11201400" cy="1353312"/>
+          </a:xfrm>
+          <a:prstGeom prst="roundRect">
+            <a:avLst>
+              <a:gd name="adj" fmla="val 14000"/>
+            </a:avLst>
+          </a:prstGeom>
+          <a:solidFill>
+            <a:srgbClr val="E8F0F4"/>
+          </a:solidFill>
+          <a:ln>
+            <a:noFill/>
+          </a:ln>
+          <a:effectLst/>
+        </p:spPr>
+        <p:style>
+          <a:lnRef idx="1">
+            <a:schemeClr val="accent1"/>
+          </a:lnRef>
+          <a:fillRef idx="3">
+            <a:schemeClr val="accent1"/>
+          </a:fillRef>
+          <a:effectRef idx="2">
+            <a:schemeClr val="accent1"/>
+          </a:effectRef>
+          <a:fontRef idx="minor">
+            <a:schemeClr val="lt1"/>
+          </a:fontRef>
+        </p:style>
+        <p:txBody>
+          <a:bodyPr rtlCol="0" anchor="ctr"/>
+          <a:lstStyle/>
+          <a:p>
+            <a:pPr algn="ctr"/>
           </a:p>
         </p:txBody>
       </p:sp>
@@ -7373,8 +7380,8 @@
         </p:nvSpPr>
         <p:spPr>
           <a:xfrm>
-            <a:off x="2926080" y="2240280"/>
-            <a:ext cx="8732520" cy="137160"/>
+            <a:off x="822960" y="1399032"/>
+            <a:ext cx="1517904" cy="365760"/>
           </a:xfrm>
           <a:prstGeom prst="roundRect">
             <a:avLst>
@@ -7413,17 +7420,58 @@
       </p:sp>
       <p:sp>
         <p:nvSpPr>
-          <p:cNvPr id="5" name="Rectangle 4"/>
+          <p:cNvPr id="5" name="TextBox 4"/>
+          <p:cNvSpPr txBox="1"/>
+          <p:nvPr/>
+        </p:nvSpPr>
+        <p:spPr>
+          <a:xfrm>
+            <a:off x="822960" y="1399032"/>
+            <a:ext cx="1517904" cy="365760"/>
+          </a:xfrm>
+          <a:prstGeom prst="rect">
+            <a:avLst/>
+          </a:prstGeom>
+          <a:noFill/>
+        </p:spPr>
+        <p:txBody>
+          <a:bodyPr wrap="square" lIns="0" rIns="0" tIns="0" bIns="0" anchor="ctr">
+            <a:spAutoFit/>
+          </a:bodyPr>
+          <a:lstStyle/>
+          <a:p>
+            <a:pPr algn="ctr">
+              <a:lnSpc>
+                <a:spcPct val="115000"/>
+              </a:lnSpc>
+            </a:pPr>
+            <a:r>
+              <a:rPr sz="1300" b="1" i="0">
+                <a:solidFill>
+                  <a:srgbClr val="FFFFFF"/>
+                </a:solidFill>
+                <a:latin typeface="Arial"/>
+              </a:rPr>
+              <a:t>Открытия</a:t>
+            </a:r>
+          </a:p>
+        </p:txBody>
+      </p:sp>
+      <p:sp>
+        <p:nvSpPr>
+          <p:cNvPr id="6" name="Rounded Rectangle 5"/>
           <p:cNvSpPr/>
           <p:nvPr/>
         </p:nvSpPr>
         <p:spPr>
           <a:xfrm>
-            <a:off x="4312920" y="2194560"/>
-            <a:ext cx="91440" cy="228600"/>
-          </a:xfrm>
-          <a:prstGeom prst="rect">
-            <a:avLst/>
+            <a:off x="914400" y="2523744"/>
+            <a:ext cx="10378440" cy="73152"/>
+          </a:xfrm>
+          <a:prstGeom prst="roundRect">
+            <a:avLst>
+              <a:gd name="adj" fmla="val 50000"/>
+            </a:avLst>
           </a:prstGeom>
           <a:solidFill>
             <a:srgbClr val="1C7293"/>
@@ -7457,92 +7505,14 @@
       </p:sp>
       <p:sp>
         <p:nvSpPr>
-          <p:cNvPr id="6" name="TextBox 5"/>
-          <p:cNvSpPr txBox="1"/>
-          <p:nvPr/>
-        </p:nvSpPr>
-        <p:spPr>
-          <a:xfrm>
-            <a:off x="2971800" y="1600200"/>
-            <a:ext cx="2773680" cy="502920"/>
-          </a:xfrm>
-          <a:prstGeom prst="rect">
-            <a:avLst/>
-          </a:prstGeom>
-          <a:noFill/>
-        </p:spPr>
-        <p:txBody>
-          <a:bodyPr wrap="square" lIns="0" rIns="0" tIns="0" bIns="0" anchor="t">
-            <a:spAutoFit/>
-          </a:bodyPr>
-          <a:lstStyle/>
-          <a:p>
-            <a:pPr algn="ctr">
-              <a:lnSpc>
-                <a:spcPct val="120000"/>
-              </a:lnSpc>
-            </a:pPr>
-            <a:r>
-              <a:rPr sz="1200" b="0" i="0">
-                <a:solidFill>
-                  <a:srgbClr val="21295C"/>
-                </a:solidFill>
-                <a:latin typeface="Arial"/>
-              </a:rPr>
-              <a:t>Turing — Imitation Game</a:t>
-            </a:r>
-          </a:p>
-        </p:txBody>
-      </p:sp>
-      <p:sp>
-        <p:nvSpPr>
-          <p:cNvPr id="7" name="TextBox 6"/>
-          <p:cNvSpPr txBox="1"/>
-          <p:nvPr/>
-        </p:nvSpPr>
-        <p:spPr>
-          <a:xfrm>
-            <a:off x="2971800" y="2468880"/>
-            <a:ext cx="2773680" cy="329184"/>
-          </a:xfrm>
-          <a:prstGeom prst="rect">
-            <a:avLst/>
-          </a:prstGeom>
-          <a:noFill/>
-        </p:spPr>
-        <p:txBody>
-          <a:bodyPr wrap="square" lIns="0" rIns="0" tIns="0" bIns="0" anchor="t">
-            <a:spAutoFit/>
-          </a:bodyPr>
-          <a:lstStyle/>
-          <a:p>
-            <a:pPr algn="ctr">
-              <a:lnSpc>
-                <a:spcPct val="115000"/>
-              </a:lnSpc>
-            </a:pPr>
-            <a:r>
-              <a:rPr sz="1400" b="1" i="0">
-                <a:solidFill>
-                  <a:srgbClr val="1C7293"/>
-                </a:solidFill>
-                <a:latin typeface="Arial"/>
-              </a:rPr>
-              <a:t>1950</a:t>
-            </a:r>
-          </a:p>
-        </p:txBody>
-      </p:sp>
-      <p:sp>
-        <p:nvSpPr>
-          <p:cNvPr id="8" name="Rectangle 7"/>
+          <p:cNvPr id="7" name="Rectangle 6"/>
           <p:cNvSpPr/>
           <p:nvPr/>
         </p:nvSpPr>
         <p:spPr>
           <a:xfrm>
-            <a:off x="7223760" y="2194560"/>
-            <a:ext cx="91440" cy="228600"/>
+            <a:off x="2607564" y="2459736"/>
+            <a:ext cx="73152" cy="201168"/>
           </a:xfrm>
           <a:prstGeom prst="rect">
             <a:avLst/>
@@ -7579,14 +7549,53 @@
       </p:sp>
       <p:sp>
         <p:nvSpPr>
+          <p:cNvPr id="8" name="TextBox 7"/>
+          <p:cNvSpPr txBox="1"/>
+          <p:nvPr/>
+        </p:nvSpPr>
+        <p:spPr>
+          <a:xfrm>
+            <a:off x="914400" y="1874519"/>
+            <a:ext cx="3459480" cy="384048"/>
+          </a:xfrm>
+          <a:prstGeom prst="rect">
+            <a:avLst/>
+          </a:prstGeom>
+          <a:noFill/>
+        </p:spPr>
+        <p:txBody>
+          <a:bodyPr wrap="square" lIns="0" rIns="0" tIns="0" bIns="0" anchor="t">
+            <a:spAutoFit/>
+          </a:bodyPr>
+          <a:lstStyle/>
+          <a:p>
+            <a:pPr algn="ctr">
+              <a:lnSpc>
+                <a:spcPct val="105000"/>
+              </a:lnSpc>
+            </a:pPr>
+            <a:r>
+              <a:rPr sz="1250" b="0" i="0">
+                <a:solidFill>
+                  <a:srgbClr val="21295C"/>
+                </a:solidFill>
+                <a:latin typeface="Arial"/>
+              </a:rPr>
+              <a:t>Тьюринг — тест на мышление</a:t>
+            </a:r>
+          </a:p>
+        </p:txBody>
+      </p:sp>
+      <p:sp>
+        <p:nvSpPr>
           <p:cNvPr id="9" name="TextBox 8"/>
           <p:cNvSpPr txBox="1"/>
           <p:nvPr/>
         </p:nvSpPr>
         <p:spPr>
           <a:xfrm>
-            <a:off x="5882640" y="1600200"/>
-            <a:ext cx="2773680" cy="502920"/>
+            <a:off x="914400" y="2606040"/>
+            <a:ext cx="3459480" cy="292608"/>
           </a:xfrm>
           <a:prstGeom prst="rect">
             <a:avLst/>
@@ -7601,70 +7610,31 @@
           <a:p>
             <a:pPr algn="ctr">
               <a:lnSpc>
-                <a:spcPct val="120000"/>
-              </a:lnSpc>
-            </a:pPr>
-            <a:r>
-              <a:rPr sz="1200" b="0" i="0">
-                <a:solidFill>
-                  <a:srgbClr val="21295C"/>
-                </a:solidFill>
-                <a:latin typeface="Arial"/>
-              </a:rPr>
-              <a:t>ELIZA — Weizenbaum</a:t>
-            </a:r>
-          </a:p>
-        </p:txBody>
-      </p:sp>
-      <p:sp>
-        <p:nvSpPr>
-          <p:cNvPr id="10" name="TextBox 9"/>
-          <p:cNvSpPr txBox="1"/>
-          <p:nvPr/>
-        </p:nvSpPr>
-        <p:spPr>
-          <a:xfrm>
-            <a:off x="5882640" y="2468880"/>
-            <a:ext cx="2773680" cy="329184"/>
-          </a:xfrm>
-          <a:prstGeom prst="rect">
-            <a:avLst/>
-          </a:prstGeom>
-          <a:noFill/>
-        </p:spPr>
-        <p:txBody>
-          <a:bodyPr wrap="square" lIns="0" rIns="0" tIns="0" bIns="0" anchor="t">
-            <a:spAutoFit/>
-          </a:bodyPr>
-          <a:lstStyle/>
-          <a:p>
-            <a:pPr algn="ctr">
-              <a:lnSpc>
                 <a:spcPct val="115000"/>
               </a:lnSpc>
             </a:pPr>
             <a:r>
-              <a:rPr sz="1400" b="1" i="0">
+              <a:rPr sz="1450" b="1" i="0">
                 <a:solidFill>
                   <a:srgbClr val="1C7293"/>
                 </a:solidFill>
                 <a:latin typeface="Arial"/>
               </a:rPr>
-              <a:t>1966</a:t>
-            </a:r>
-          </a:p>
-        </p:txBody>
-      </p:sp>
-      <p:sp>
-        <p:nvSpPr>
-          <p:cNvPr id="11" name="Rectangle 10"/>
+              <a:t>1950</a:t>
+            </a:r>
+          </a:p>
+        </p:txBody>
+      </p:sp>
+      <p:sp>
+        <p:nvSpPr>
+          <p:cNvPr id="10" name="Rectangle 9"/>
           <p:cNvSpPr/>
           <p:nvPr/>
         </p:nvSpPr>
         <p:spPr>
           <a:xfrm>
-            <a:off x="10134600" y="2194560"/>
-            <a:ext cx="91440" cy="228600"/>
+            <a:off x="6067044" y="2459736"/>
+            <a:ext cx="73152" cy="201168"/>
           </a:xfrm>
           <a:prstGeom prst="rect">
             <a:avLst/>
@@ -7701,14 +7671,53 @@
       </p:sp>
       <p:sp>
         <p:nvSpPr>
+          <p:cNvPr id="11" name="TextBox 10"/>
+          <p:cNvSpPr txBox="1"/>
+          <p:nvPr/>
+        </p:nvSpPr>
+        <p:spPr>
+          <a:xfrm>
+            <a:off x="4373880" y="1874519"/>
+            <a:ext cx="3459480" cy="384048"/>
+          </a:xfrm>
+          <a:prstGeom prst="rect">
+            <a:avLst/>
+          </a:prstGeom>
+          <a:noFill/>
+        </p:spPr>
+        <p:txBody>
+          <a:bodyPr wrap="square" lIns="0" rIns="0" tIns="0" bIns="0" anchor="t">
+            <a:spAutoFit/>
+          </a:bodyPr>
+          <a:lstStyle/>
+          <a:p>
+            <a:pPr algn="ctr">
+              <a:lnSpc>
+                <a:spcPct val="105000"/>
+              </a:lnSpc>
+            </a:pPr>
+            <a:r>
+              <a:rPr sz="1250" b="0" i="0">
+                <a:solidFill>
+                  <a:srgbClr val="21295C"/>
+                </a:solidFill>
+                <a:latin typeface="Arial"/>
+              </a:rPr>
+              <a:t>ELIZA — Вайценбаум</a:t>
+            </a:r>
+          </a:p>
+        </p:txBody>
+      </p:sp>
+      <p:sp>
+        <p:nvSpPr>
           <p:cNvPr id="12" name="TextBox 11"/>
           <p:cNvSpPr txBox="1"/>
           <p:nvPr/>
         </p:nvSpPr>
         <p:spPr>
           <a:xfrm>
-            <a:off x="8793480" y="1600200"/>
-            <a:ext cx="2773680" cy="502920"/>
+            <a:off x="4373880" y="2606040"/>
+            <a:ext cx="3459480" cy="292608"/>
           </a:xfrm>
           <a:prstGeom prst="rect">
             <a:avLst/>
@@ -7723,11 +7732,94 @@
           <a:p>
             <a:pPr algn="ctr">
               <a:lnSpc>
-                <a:spcPct val="120000"/>
-              </a:lnSpc>
-            </a:pPr>
-            <a:r>
-              <a:rPr sz="1200" b="0" i="0">
+                <a:spcPct val="115000"/>
+              </a:lnSpc>
+            </a:pPr>
+            <a:r>
+              <a:rPr sz="1450" b="1" i="0">
+                <a:solidFill>
+                  <a:srgbClr val="1C7293"/>
+                </a:solidFill>
+                <a:latin typeface="Arial"/>
+              </a:rPr>
+              <a:t>1966</a:t>
+            </a:r>
+          </a:p>
+        </p:txBody>
+      </p:sp>
+      <p:sp>
+        <p:nvSpPr>
+          <p:cNvPr id="13" name="Rectangle 12"/>
+          <p:cNvSpPr/>
+          <p:nvPr/>
+        </p:nvSpPr>
+        <p:spPr>
+          <a:xfrm>
+            <a:off x="9526523" y="2459736"/>
+            <a:ext cx="73152" cy="201168"/>
+          </a:xfrm>
+          <a:prstGeom prst="rect">
+            <a:avLst/>
+          </a:prstGeom>
+          <a:solidFill>
+            <a:srgbClr val="1C7293"/>
+          </a:solidFill>
+          <a:ln>
+            <a:noFill/>
+          </a:ln>
+          <a:effectLst/>
+        </p:spPr>
+        <p:style>
+          <a:lnRef idx="1">
+            <a:schemeClr val="accent1"/>
+          </a:lnRef>
+          <a:fillRef idx="3">
+            <a:schemeClr val="accent1"/>
+          </a:fillRef>
+          <a:effectRef idx="2">
+            <a:schemeClr val="accent1"/>
+          </a:effectRef>
+          <a:fontRef idx="minor">
+            <a:schemeClr val="lt1"/>
+          </a:fontRef>
+        </p:style>
+        <p:txBody>
+          <a:bodyPr rtlCol="0" anchor="ctr"/>
+          <a:lstStyle/>
+          <a:p>
+            <a:pPr algn="ctr"/>
+          </a:p>
+        </p:txBody>
+      </p:sp>
+      <p:sp>
+        <p:nvSpPr>
+          <p:cNvPr id="14" name="TextBox 13"/>
+          <p:cNvSpPr txBox="1"/>
+          <p:nvPr/>
+        </p:nvSpPr>
+        <p:spPr>
+          <a:xfrm>
+            <a:off x="7833360" y="1874519"/>
+            <a:ext cx="3459480" cy="384048"/>
+          </a:xfrm>
+          <a:prstGeom prst="rect">
+            <a:avLst/>
+          </a:prstGeom>
+          <a:noFill/>
+        </p:spPr>
+        <p:txBody>
+          <a:bodyPr wrap="square" lIns="0" rIns="0" tIns="0" bIns="0" anchor="t">
+            <a:spAutoFit/>
+          </a:bodyPr>
+          <a:lstStyle/>
+          <a:p>
+            <a:pPr algn="ctr">
+              <a:lnSpc>
+                <a:spcPct val="105000"/>
+              </a:lnSpc>
+            </a:pPr>
+            <a:r>
+              <a:rPr sz="1250" b="0" i="0">
                 <a:solidFill>
                   <a:srgbClr val="21295C"/>
                 </a:solidFill>
@@ -7740,14 +7832,14 @@
       </p:sp>
       <p:sp>
         <p:nvSpPr>
-          <p:cNvPr id="13" name="TextBox 12"/>
-          <p:cNvSpPr txBox="1"/>
-          <p:nvPr/>
-        </p:nvSpPr>
-        <p:spPr>
-          <a:xfrm>
-            <a:off x="8793480" y="2468880"/>
-            <a:ext cx="2773680" cy="329184"/>
+          <p:cNvPr id="15" name="TextBox 14"/>
+          <p:cNvSpPr txBox="1"/>
+          <p:nvPr/>
+        </p:nvSpPr>
+        <p:spPr>
+          <a:xfrm>
+            <a:off x="7833360" y="2606040"/>
+            <a:ext cx="3459480" cy="292608"/>
           </a:xfrm>
           <a:prstGeom prst="rect">
             <a:avLst/>
@@ -7766,7 +7858,7 @@
               </a:lnSpc>
             </a:pPr>
             <a:r>
-              <a:rPr sz="1400" b="1" i="0">
+              <a:rPr sz="1450" b="1" i="0">
                 <a:solidFill>
                   <a:srgbClr val="1C7293"/>
                 </a:solidFill>
@@ -7779,53 +7871,60 @@
       </p:sp>
       <p:sp>
         <p:nvSpPr>
-          <p:cNvPr id="14" name="TextBox 13"/>
-          <p:cNvSpPr txBox="1"/>
-          <p:nvPr/>
-        </p:nvSpPr>
-        <p:spPr>
-          <a:xfrm>
-            <a:off x="502920" y="3383280"/>
-            <a:ext cx="2286000" cy="457200"/>
-          </a:xfrm>
-          <a:prstGeom prst="rect">
-            <a:avLst/>
-          </a:prstGeom>
-          <a:noFill/>
-        </p:spPr>
-        <p:txBody>
-          <a:bodyPr wrap="square" lIns="0" rIns="0" tIns="0" bIns="0" anchor="t">
-            <a:spAutoFit/>
-          </a:bodyPr>
-          <a:lstStyle/>
-          <a:p>
-            <a:pPr algn="l">
-              <a:lnSpc>
-                <a:spcPct val="120000"/>
-              </a:lnSpc>
-            </a:pPr>
-            <a:r>
-              <a:rPr sz="1100" b="1" i="0">
-                <a:solidFill>
-                  <a:srgbClr val="065A82"/>
-                </a:solidFill>
-                <a:latin typeface="Arial"/>
-              </a:rPr>
-              <a:t>Зимы и прорывы (1973 — 2012)</a:t>
-            </a:r>
-          </a:p>
-        </p:txBody>
-      </p:sp>
-      <p:sp>
-        <p:nvSpPr>
-          <p:cNvPr id="15" name="Rounded Rectangle 14"/>
+          <p:cNvPr id="16" name="Rounded Rectangle 15"/>
           <p:cNvSpPr/>
           <p:nvPr/>
         </p:nvSpPr>
         <p:spPr>
           <a:xfrm>
-            <a:off x="2926080" y="3611880"/>
-            <a:ext cx="8732520" cy="137160"/>
+            <a:off x="502920" y="3063239"/>
+            <a:ext cx="11201400" cy="1353312"/>
+          </a:xfrm>
+          <a:prstGeom prst="roundRect">
+            <a:avLst>
+              <a:gd name="adj" fmla="val 14000"/>
+            </a:avLst>
+          </a:prstGeom>
+          <a:solidFill>
+            <a:srgbClr val="E6EEF2"/>
+          </a:solidFill>
+          <a:ln>
+            <a:noFill/>
+          </a:ln>
+          <a:effectLst/>
+        </p:spPr>
+        <p:style>
+          <a:lnRef idx="1">
+            <a:schemeClr val="accent1"/>
+          </a:lnRef>
+          <a:fillRef idx="3">
+            <a:schemeClr val="accent1"/>
+          </a:fillRef>
+          <a:effectRef idx="2">
+            <a:schemeClr val="accent1"/>
+          </a:effectRef>
+          <a:fontRef idx="minor">
+            <a:schemeClr val="lt1"/>
+          </a:fontRef>
+        </p:style>
+        <p:txBody>
+          <a:bodyPr rtlCol="0" anchor="ctr"/>
+          <a:lstStyle/>
+          <a:p>
+            <a:pPr algn="ctr"/>
+          </a:p>
+        </p:txBody>
+      </p:sp>
+      <p:sp>
+        <p:nvSpPr>
+          <p:cNvPr id="17" name="Rounded Rectangle 16"/>
+          <p:cNvSpPr/>
+          <p:nvPr/>
+        </p:nvSpPr>
+        <p:spPr>
+          <a:xfrm>
+            <a:off x="822960" y="2889503"/>
+            <a:ext cx="2368296" cy="365760"/>
           </a:xfrm>
           <a:prstGeom prst="roundRect">
             <a:avLst>
@@ -7864,17 +7963,58 @@
       </p:sp>
       <p:sp>
         <p:nvSpPr>
-          <p:cNvPr id="16" name="Rectangle 15"/>
+          <p:cNvPr id="18" name="TextBox 17"/>
+          <p:cNvSpPr txBox="1"/>
+          <p:nvPr/>
+        </p:nvSpPr>
+        <p:spPr>
+          <a:xfrm>
+            <a:off x="822960" y="2889503"/>
+            <a:ext cx="2368296" cy="365760"/>
+          </a:xfrm>
+          <a:prstGeom prst="rect">
+            <a:avLst/>
+          </a:prstGeom>
+          <a:noFill/>
+        </p:spPr>
+        <p:txBody>
+          <a:bodyPr wrap="square" lIns="0" rIns="0" tIns="0" bIns="0" anchor="ctr">
+            <a:spAutoFit/>
+          </a:bodyPr>
+          <a:lstStyle/>
+          <a:p>
+            <a:pPr algn="ctr">
+              <a:lnSpc>
+                <a:spcPct val="115000"/>
+              </a:lnSpc>
+            </a:pPr>
+            <a:r>
+              <a:rPr sz="1300" b="1" i="0">
+                <a:solidFill>
+                  <a:srgbClr val="FFFFFF"/>
+                </a:solidFill>
+                <a:latin typeface="Arial"/>
+              </a:rPr>
+              <a:t>Зимы и прорывы</a:t>
+            </a:r>
+          </a:p>
+        </p:txBody>
+      </p:sp>
+      <p:sp>
+        <p:nvSpPr>
+          <p:cNvPr id="19" name="Rounded Rectangle 18"/>
           <p:cNvSpPr/>
           <p:nvPr/>
         </p:nvSpPr>
         <p:spPr>
           <a:xfrm>
-            <a:off x="4312920" y="3566160"/>
-            <a:ext cx="91440" cy="228600"/>
-          </a:xfrm>
-          <a:prstGeom prst="rect">
-            <a:avLst/>
+            <a:off x="914400" y="4014215"/>
+            <a:ext cx="10378440" cy="73152"/>
+          </a:xfrm>
+          <a:prstGeom prst="roundRect">
+            <a:avLst>
+              <a:gd name="adj" fmla="val 50000"/>
+            </a:avLst>
           </a:prstGeom>
           <a:solidFill>
             <a:srgbClr val="065A82"/>
@@ -7908,92 +8048,14 @@
       </p:sp>
       <p:sp>
         <p:nvSpPr>
-          <p:cNvPr id="17" name="TextBox 16"/>
-          <p:cNvSpPr txBox="1"/>
-          <p:nvPr/>
-        </p:nvSpPr>
-        <p:spPr>
-          <a:xfrm>
-            <a:off x="2971800" y="2971800"/>
-            <a:ext cx="2773680" cy="502920"/>
-          </a:xfrm>
-          <a:prstGeom prst="rect">
-            <a:avLst/>
-          </a:prstGeom>
-          <a:noFill/>
-        </p:spPr>
-        <p:txBody>
-          <a:bodyPr wrap="square" lIns="0" rIns="0" tIns="0" bIns="0" anchor="t">
-            <a:spAutoFit/>
-          </a:bodyPr>
-          <a:lstStyle/>
-          <a:p>
-            <a:pPr algn="ctr">
-              <a:lnSpc>
-                <a:spcPct val="120000"/>
-              </a:lnSpc>
-            </a:pPr>
-            <a:r>
-              <a:rPr sz="1200" b="0" i="0">
-                <a:solidFill>
-                  <a:srgbClr val="21295C"/>
-                </a:solidFill>
-                <a:latin typeface="Arial"/>
-              </a:rPr>
-              <a:t>1-я зима — Lighthill</a:t>
-            </a:r>
-          </a:p>
-        </p:txBody>
-      </p:sp>
-      <p:sp>
-        <p:nvSpPr>
-          <p:cNvPr id="18" name="TextBox 17"/>
-          <p:cNvSpPr txBox="1"/>
-          <p:nvPr/>
-        </p:nvSpPr>
-        <p:spPr>
-          <a:xfrm>
-            <a:off x="2971800" y="3840480"/>
-            <a:ext cx="2773680" cy="329184"/>
-          </a:xfrm>
-          <a:prstGeom prst="rect">
-            <a:avLst/>
-          </a:prstGeom>
-          <a:noFill/>
-        </p:spPr>
-        <p:txBody>
-          <a:bodyPr wrap="square" lIns="0" rIns="0" tIns="0" bIns="0" anchor="t">
-            <a:spAutoFit/>
-          </a:bodyPr>
-          <a:lstStyle/>
-          <a:p>
-            <a:pPr algn="ctr">
-              <a:lnSpc>
-                <a:spcPct val="115000"/>
-              </a:lnSpc>
-            </a:pPr>
-            <a:r>
-              <a:rPr sz="1400" b="1" i="0">
-                <a:solidFill>
-                  <a:srgbClr val="065A82"/>
-                </a:solidFill>
-                <a:latin typeface="Arial"/>
-              </a:rPr>
-              <a:t>1974</a:t>
-            </a:r>
-          </a:p>
-        </p:txBody>
-      </p:sp>
-      <p:sp>
-        <p:nvSpPr>
-          <p:cNvPr id="19" name="Rectangle 18"/>
+          <p:cNvPr id="20" name="Rectangle 19"/>
           <p:cNvSpPr/>
           <p:nvPr/>
         </p:nvSpPr>
         <p:spPr>
           <a:xfrm>
-            <a:off x="7223760" y="3566160"/>
-            <a:ext cx="91440" cy="228600"/>
+            <a:off x="2607564" y="3950207"/>
+            <a:ext cx="73152" cy="201168"/>
           </a:xfrm>
           <a:prstGeom prst="rect">
             <a:avLst/>
@@ -8030,14 +8092,14 @@
       </p:sp>
       <p:sp>
         <p:nvSpPr>
-          <p:cNvPr id="20" name="TextBox 19"/>
-          <p:cNvSpPr txBox="1"/>
-          <p:nvPr/>
-        </p:nvSpPr>
-        <p:spPr>
-          <a:xfrm>
-            <a:off x="5882640" y="2971800"/>
-            <a:ext cx="2773680" cy="502920"/>
+          <p:cNvPr id="21" name="TextBox 20"/>
+          <p:cNvSpPr txBox="1"/>
+          <p:nvPr/>
+        </p:nvSpPr>
+        <p:spPr>
+          <a:xfrm>
+            <a:off x="914400" y="3364991"/>
+            <a:ext cx="3459480" cy="384048"/>
           </a:xfrm>
           <a:prstGeom prst="rect">
             <a:avLst/>
@@ -8052,31 +8114,31 @@
           <a:p>
             <a:pPr algn="ctr">
               <a:lnSpc>
-                <a:spcPct val="120000"/>
-              </a:lnSpc>
-            </a:pPr>
-            <a:r>
-              <a:rPr sz="1200" b="0" i="0">
+                <a:spcPct val="105000"/>
+              </a:lnSpc>
+            </a:pPr>
+            <a:r>
+              <a:rPr sz="1250" b="0" i="0">
                 <a:solidFill>
                   <a:srgbClr val="21295C"/>
                 </a:solidFill>
                 <a:latin typeface="Arial"/>
               </a:rPr>
-              <a:t>Deep Blue — 200M поз/сек</a:t>
-            </a:r>
-          </a:p>
-        </p:txBody>
-      </p:sp>
-      <p:sp>
-        <p:nvSpPr>
-          <p:cNvPr id="21" name="TextBox 20"/>
-          <p:cNvSpPr txBox="1"/>
-          <p:nvPr/>
-        </p:nvSpPr>
-        <p:spPr>
-          <a:xfrm>
-            <a:off x="5882640" y="3840480"/>
-            <a:ext cx="2773680" cy="329184"/>
+              <a:t>1-я зима — доклад Лайтхилла</a:t>
+            </a:r>
+          </a:p>
+        </p:txBody>
+      </p:sp>
+      <p:sp>
+        <p:nvSpPr>
+          <p:cNvPr id="22" name="TextBox 21"/>
+          <p:cNvSpPr txBox="1"/>
+          <p:nvPr/>
+        </p:nvSpPr>
+        <p:spPr>
+          <a:xfrm>
+            <a:off x="914400" y="4096512"/>
+            <a:ext cx="3459480" cy="292608"/>
           </a:xfrm>
           <a:prstGeom prst="rect">
             <a:avLst/>
@@ -8095,27 +8157,27 @@
               </a:lnSpc>
             </a:pPr>
             <a:r>
-              <a:rPr sz="1400" b="1" i="0">
+              <a:rPr sz="1450" b="1" i="0">
                 <a:solidFill>
                   <a:srgbClr val="065A82"/>
                 </a:solidFill>
                 <a:latin typeface="Arial"/>
               </a:rPr>
-              <a:t>1997</a:t>
-            </a:r>
-          </a:p>
-        </p:txBody>
-      </p:sp>
-      <p:sp>
-        <p:nvSpPr>
-          <p:cNvPr id="22" name="Rectangle 21"/>
+              <a:t>1974</a:t>
+            </a:r>
+          </a:p>
+        </p:txBody>
+      </p:sp>
+      <p:sp>
+        <p:nvSpPr>
+          <p:cNvPr id="23" name="Rectangle 22"/>
           <p:cNvSpPr/>
           <p:nvPr/>
         </p:nvSpPr>
         <p:spPr>
           <a:xfrm>
-            <a:off x="10134600" y="3566160"/>
-            <a:ext cx="91440" cy="228600"/>
+            <a:off x="6067044" y="3950207"/>
+            <a:ext cx="73152" cy="201168"/>
           </a:xfrm>
           <a:prstGeom prst="rect">
             <a:avLst/>
@@ -8152,14 +8214,14 @@
       </p:sp>
       <p:sp>
         <p:nvSpPr>
-          <p:cNvPr id="23" name="TextBox 22"/>
-          <p:cNvSpPr txBox="1"/>
-          <p:nvPr/>
-        </p:nvSpPr>
-        <p:spPr>
-          <a:xfrm>
-            <a:off x="8793480" y="2971800"/>
-            <a:ext cx="2773680" cy="502920"/>
+          <p:cNvPr id="24" name="TextBox 23"/>
+          <p:cNvSpPr txBox="1"/>
+          <p:nvPr/>
+        </p:nvSpPr>
+        <p:spPr>
+          <a:xfrm>
+            <a:off x="4373880" y="3364991"/>
+            <a:ext cx="3459480" cy="384048"/>
           </a:xfrm>
           <a:prstGeom prst="rect">
             <a:avLst/>
@@ -8174,16 +8236,138 @@
           <a:p>
             <a:pPr algn="ctr">
               <a:lnSpc>
-                <a:spcPct val="120000"/>
-              </a:lnSpc>
-            </a:pPr>
-            <a:r>
-              <a:rPr sz="1200" b="0" i="0">
+                <a:spcPct val="105000"/>
+              </a:lnSpc>
+            </a:pPr>
+            <a:r>
+              <a:rPr sz="1250" b="0" i="0">
                 <a:solidFill>
                   <a:srgbClr val="21295C"/>
                 </a:solidFill>
                 <a:latin typeface="Arial"/>
               </a:rPr>
+              <a:t>Deep Blue — 200M поз/сек</a:t>
+            </a:r>
+          </a:p>
+        </p:txBody>
+      </p:sp>
+      <p:sp>
+        <p:nvSpPr>
+          <p:cNvPr id="25" name="TextBox 24"/>
+          <p:cNvSpPr txBox="1"/>
+          <p:nvPr/>
+        </p:nvSpPr>
+        <p:spPr>
+          <a:xfrm>
+            <a:off x="4373880" y="4096512"/>
+            <a:ext cx="3459480" cy="292608"/>
+          </a:xfrm>
+          <a:prstGeom prst="rect">
+            <a:avLst/>
+          </a:prstGeom>
+          <a:noFill/>
+        </p:spPr>
+        <p:txBody>
+          <a:bodyPr wrap="square" lIns="0" rIns="0" tIns="0" bIns="0" anchor="t">
+            <a:spAutoFit/>
+          </a:bodyPr>
+          <a:lstStyle/>
+          <a:p>
+            <a:pPr algn="ctr">
+              <a:lnSpc>
+                <a:spcPct val="115000"/>
+              </a:lnSpc>
+            </a:pPr>
+            <a:r>
+              <a:rPr sz="1450" b="1" i="0">
+                <a:solidFill>
+                  <a:srgbClr val="065A82"/>
+                </a:solidFill>
+                <a:latin typeface="Arial"/>
+              </a:rPr>
+              <a:t>1997</a:t>
+            </a:r>
+          </a:p>
+        </p:txBody>
+      </p:sp>
+      <p:sp>
+        <p:nvSpPr>
+          <p:cNvPr id="26" name="Rectangle 25"/>
+          <p:cNvSpPr/>
+          <p:nvPr/>
+        </p:nvSpPr>
+        <p:spPr>
+          <a:xfrm>
+            <a:off x="9526523" y="3950207"/>
+            <a:ext cx="73152" cy="201168"/>
+          </a:xfrm>
+          <a:prstGeom prst="rect">
+            <a:avLst/>
+          </a:prstGeom>
+          <a:solidFill>
+            <a:srgbClr val="065A82"/>
+          </a:solidFill>
+          <a:ln>
+            <a:noFill/>
+          </a:ln>
+          <a:effectLst/>
+        </p:spPr>
+        <p:style>
+          <a:lnRef idx="1">
+            <a:schemeClr val="accent1"/>
+          </a:lnRef>
+          <a:fillRef idx="3">
+            <a:schemeClr val="accent1"/>
+          </a:fillRef>
+          <a:effectRef idx="2">
+            <a:schemeClr val="accent1"/>
+          </a:effectRef>
+          <a:fontRef idx="minor">
+            <a:schemeClr val="lt1"/>
+          </a:fontRef>
+        </p:style>
+        <p:txBody>
+          <a:bodyPr rtlCol="0" anchor="ctr"/>
+          <a:lstStyle/>
+          <a:p>
+            <a:pPr algn="ctr"/>
+          </a:p>
+        </p:txBody>
+      </p:sp>
+      <p:sp>
+        <p:nvSpPr>
+          <p:cNvPr id="27" name="TextBox 26"/>
+          <p:cNvSpPr txBox="1"/>
+          <p:nvPr/>
+        </p:nvSpPr>
+        <p:spPr>
+          <a:xfrm>
+            <a:off x="7833360" y="3364991"/>
+            <a:ext cx="3459480" cy="384048"/>
+          </a:xfrm>
+          <a:prstGeom prst="rect">
+            <a:avLst/>
+          </a:prstGeom>
+          <a:noFill/>
+        </p:spPr>
+        <p:txBody>
+          <a:bodyPr wrap="square" lIns="0" rIns="0" tIns="0" bIns="0" anchor="t">
+            <a:spAutoFit/>
+          </a:bodyPr>
+          <a:lstStyle/>
+          <a:p>
+            <a:pPr algn="ctr">
+              <a:lnSpc>
+                <a:spcPct val="105000"/>
+              </a:lnSpc>
+            </a:pPr>
+            <a:r>
+              <a:rPr sz="1250" b="0" i="0">
+                <a:solidFill>
+                  <a:srgbClr val="21295C"/>
+                </a:solidFill>
+                <a:latin typeface="Arial"/>
+              </a:rPr>
               <a:t>AlexNet — GPU + DL</a:t>
             </a:r>
           </a:p>
@@ -8191,14 +8375,14 @@
       </p:sp>
       <p:sp>
         <p:nvSpPr>
-          <p:cNvPr id="24" name="TextBox 23"/>
-          <p:cNvSpPr txBox="1"/>
-          <p:nvPr/>
-        </p:nvSpPr>
-        <p:spPr>
-          <a:xfrm>
-            <a:off x="8793480" y="3840480"/>
-            <a:ext cx="2773680" cy="329184"/>
+          <p:cNvPr id="28" name="TextBox 27"/>
+          <p:cNvSpPr txBox="1"/>
+          <p:nvPr/>
+        </p:nvSpPr>
+        <p:spPr>
+          <a:xfrm>
+            <a:off x="7833360" y="4096512"/>
+            <a:ext cx="3459480" cy="292608"/>
           </a:xfrm>
           <a:prstGeom prst="rect">
             <a:avLst/>
@@ -8217,7 +8401,7 @@
               </a:lnSpc>
             </a:pPr>
             <a:r>
-              <a:rPr sz="1400" b="1" i="0">
+              <a:rPr sz="1450" b="1" i="0">
                 <a:solidFill>
                   <a:srgbClr val="065A82"/>
                 </a:solidFill>
@@ -8230,53 +8414,60 @@
       </p:sp>
       <p:sp>
         <p:nvSpPr>
-          <p:cNvPr id="25" name="TextBox 24"/>
-          <p:cNvSpPr txBox="1"/>
-          <p:nvPr/>
-        </p:nvSpPr>
-        <p:spPr>
-          <a:xfrm>
-            <a:off x="502920" y="4754880"/>
-            <a:ext cx="2286000" cy="457200"/>
-          </a:xfrm>
-          <a:prstGeom prst="rect">
-            <a:avLst/>
-          </a:prstGeom>
-          <a:noFill/>
-        </p:spPr>
-        <p:txBody>
-          <a:bodyPr wrap="square" lIns="0" rIns="0" tIns="0" bIns="0" anchor="t">
-            <a:spAutoFit/>
-          </a:bodyPr>
-          <a:lstStyle/>
-          <a:p>
-            <a:pPr algn="l">
-              <a:lnSpc>
-                <a:spcPct val="120000"/>
-              </a:lnSpc>
-            </a:pPr>
-            <a:r>
-              <a:rPr sz="1100" b="1" i="0">
-                <a:solidFill>
-                  <a:srgbClr val="21295C"/>
-                </a:solidFill>
-                <a:latin typeface="Arial"/>
-              </a:rPr>
-              <a:t>Перелом и взрыв (2012 — 2026)</a:t>
-            </a:r>
-          </a:p>
-        </p:txBody>
-      </p:sp>
-      <p:sp>
-        <p:nvSpPr>
-          <p:cNvPr id="26" name="Rounded Rectangle 25"/>
+          <p:cNvPr id="29" name="Rounded Rectangle 28"/>
           <p:cNvSpPr/>
           <p:nvPr/>
         </p:nvSpPr>
         <p:spPr>
           <a:xfrm>
-            <a:off x="2926080" y="4983480"/>
-            <a:ext cx="8732520" cy="137160"/>
+            <a:off x="502920" y="4553712"/>
+            <a:ext cx="11201400" cy="1353312"/>
+          </a:xfrm>
+          <a:prstGeom prst="roundRect">
+            <a:avLst>
+              <a:gd name="adj" fmla="val 14000"/>
+            </a:avLst>
+          </a:prstGeom>
+          <a:solidFill>
+            <a:srgbClr val="E8E9EE"/>
+          </a:solidFill>
+          <a:ln>
+            <a:noFill/>
+          </a:ln>
+          <a:effectLst/>
+        </p:spPr>
+        <p:style>
+          <a:lnRef idx="1">
+            <a:schemeClr val="accent1"/>
+          </a:lnRef>
+          <a:fillRef idx="3">
+            <a:schemeClr val="accent1"/>
+          </a:fillRef>
+          <a:effectRef idx="2">
+            <a:schemeClr val="accent1"/>
+          </a:effectRef>
+          <a:fontRef idx="minor">
+            <a:schemeClr val="lt1"/>
+          </a:fontRef>
+        </p:style>
+        <p:txBody>
+          <a:bodyPr rtlCol="0" anchor="ctr"/>
+          <a:lstStyle/>
+          <a:p>
+            <a:pPr algn="ctr"/>
+          </a:p>
+        </p:txBody>
+      </p:sp>
+      <p:sp>
+        <p:nvSpPr>
+          <p:cNvPr id="30" name="Rounded Rectangle 29"/>
+          <p:cNvSpPr/>
+          <p:nvPr/>
+        </p:nvSpPr>
+        <p:spPr>
+          <a:xfrm>
+            <a:off x="822960" y="4379975"/>
+            <a:ext cx="2510028" cy="365760"/>
           </a:xfrm>
           <a:prstGeom prst="roundRect">
             <a:avLst>
@@ -8315,141 +8506,58 @@
       </p:sp>
       <p:sp>
         <p:nvSpPr>
-          <p:cNvPr id="27" name="Oval 26"/>
+          <p:cNvPr id="31" name="TextBox 30"/>
+          <p:cNvSpPr txBox="1"/>
+          <p:nvPr/>
+        </p:nvSpPr>
+        <p:spPr>
+          <a:xfrm>
+            <a:off x="822960" y="4379975"/>
+            <a:ext cx="2510028" cy="365760"/>
+          </a:xfrm>
+          <a:prstGeom prst="rect">
+            <a:avLst/>
+          </a:prstGeom>
+          <a:noFill/>
+        </p:spPr>
+        <p:txBody>
+          <a:bodyPr wrap="square" lIns="0" rIns="0" tIns="0" bIns="0" anchor="ctr">
+            <a:spAutoFit/>
+          </a:bodyPr>
+          <a:lstStyle/>
+          <a:p>
+            <a:pPr algn="ctr">
+              <a:lnSpc>
+                <a:spcPct val="115000"/>
+              </a:lnSpc>
+            </a:pPr>
+            <a:r>
+              <a:rPr sz="1300" b="1" i="0">
+                <a:solidFill>
+                  <a:srgbClr val="FFFFFF"/>
+                </a:solidFill>
+                <a:latin typeface="Arial"/>
+              </a:rPr>
+              <a:t>Перелом и взрыв</a:t>
+            </a:r>
+          </a:p>
+        </p:txBody>
+      </p:sp>
+      <p:sp>
+        <p:nvSpPr>
+          <p:cNvPr id="32" name="Rounded Rectangle 31"/>
           <p:cNvSpPr/>
           <p:nvPr/>
         </p:nvSpPr>
         <p:spPr>
           <a:xfrm>
-            <a:off x="4175760" y="4892040"/>
-            <a:ext cx="384048" cy="384048"/>
-          </a:xfrm>
-          <a:prstGeom prst="ellipse">
-            <a:avLst/>
-          </a:prstGeom>
-          <a:solidFill>
-            <a:srgbClr val="F0AB00"/>
-          </a:solidFill>
-          <a:ln w="25400">
-            <a:solidFill>
-              <a:srgbClr val="21295C"/>
-            </a:solidFill>
-          </a:ln>
-          <a:effectLst/>
-        </p:spPr>
-        <p:style>
-          <a:lnRef idx="1">
-            <a:schemeClr val="accent1"/>
-          </a:lnRef>
-          <a:fillRef idx="3">
-            <a:schemeClr val="accent1"/>
-          </a:fillRef>
-          <a:effectRef idx="2">
-            <a:schemeClr val="accent1"/>
-          </a:effectRef>
-          <a:fontRef idx="minor">
-            <a:schemeClr val="lt1"/>
-          </a:fontRef>
-        </p:style>
-        <p:txBody>
-          <a:bodyPr rtlCol="0" anchor="ctr"/>
-          <a:lstStyle/>
-          <a:p>
-            <a:pPr algn="ctr"/>
-          </a:p>
-        </p:txBody>
-      </p:sp>
-      <p:sp>
-        <p:nvSpPr>
-          <p:cNvPr id="28" name="TextBox 27"/>
-          <p:cNvSpPr txBox="1"/>
-          <p:nvPr/>
-        </p:nvSpPr>
-        <p:spPr>
-          <a:xfrm>
-            <a:off x="2971800" y="4343400"/>
-            <a:ext cx="2773680" cy="502920"/>
-          </a:xfrm>
-          <a:prstGeom prst="rect">
-            <a:avLst/>
-          </a:prstGeom>
-          <a:noFill/>
-        </p:spPr>
-        <p:txBody>
-          <a:bodyPr wrap="square" lIns="0" rIns="0" tIns="0" bIns="0" anchor="t">
-            <a:spAutoFit/>
-          </a:bodyPr>
-          <a:lstStyle/>
-          <a:p>
-            <a:pPr algn="ctr">
-              <a:lnSpc>
-                <a:spcPct val="120000"/>
-              </a:lnSpc>
-            </a:pPr>
-            <a:r>
-              <a:rPr sz="1200" b="1" i="0">
-                <a:solidFill>
-                  <a:srgbClr val="F0AB00"/>
-                </a:solidFill>
-                <a:latin typeface="Arial"/>
-              </a:rPr>
-              <a:t>«Attention Is All You Need»  ★</a:t>
-            </a:r>
-          </a:p>
-        </p:txBody>
-      </p:sp>
-      <p:sp>
-        <p:nvSpPr>
-          <p:cNvPr id="29" name="TextBox 28"/>
-          <p:cNvSpPr txBox="1"/>
-          <p:nvPr/>
-        </p:nvSpPr>
-        <p:spPr>
-          <a:xfrm>
-            <a:off x="2971800" y="5257800"/>
-            <a:ext cx="2773680" cy="329184"/>
-          </a:xfrm>
-          <a:prstGeom prst="rect">
-            <a:avLst/>
-          </a:prstGeom>
-          <a:noFill/>
-        </p:spPr>
-        <p:txBody>
-          <a:bodyPr wrap="square" lIns="0" rIns="0" tIns="0" bIns="0" anchor="t">
-            <a:spAutoFit/>
-          </a:bodyPr>
-          <a:lstStyle/>
-          <a:p>
-            <a:pPr algn="ctr">
-              <a:lnSpc>
-                <a:spcPct val="115000"/>
-              </a:lnSpc>
-            </a:pPr>
-            <a:r>
-              <a:rPr sz="2200" b="1" i="0">
-                <a:solidFill>
-                  <a:srgbClr val="F0AB00"/>
-                </a:solidFill>
-                <a:latin typeface="Arial"/>
-              </a:rPr>
-              <a:t>2017</a:t>
-            </a:r>
-          </a:p>
-        </p:txBody>
-      </p:sp>
-      <p:sp>
-        <p:nvSpPr>
-          <p:cNvPr id="30" name="Rectangle 29"/>
-          <p:cNvSpPr/>
-          <p:nvPr/>
-        </p:nvSpPr>
-        <p:spPr>
-          <a:xfrm>
-            <a:off x="7223760" y="4937760"/>
-            <a:ext cx="91440" cy="228600"/>
-          </a:xfrm>
-          <a:prstGeom prst="rect">
-            <a:avLst/>
+            <a:off x="914400" y="5504687"/>
+            <a:ext cx="10378440" cy="73152"/>
+          </a:xfrm>
+          <a:prstGeom prst="roundRect">
+            <a:avLst>
+              <a:gd name="adj" fmla="val 50000"/>
+            </a:avLst>
           </a:prstGeom>
           <a:solidFill>
             <a:srgbClr val="21295C"/>
@@ -8483,14 +8591,60 @@
       </p:sp>
       <p:sp>
         <p:nvSpPr>
-          <p:cNvPr id="31" name="TextBox 30"/>
-          <p:cNvSpPr txBox="1"/>
-          <p:nvPr/>
-        </p:nvSpPr>
-        <p:spPr>
-          <a:xfrm>
-            <a:off x="5882640" y="4343400"/>
-            <a:ext cx="2773680" cy="502920"/>
+          <p:cNvPr id="33" name="Oval 32"/>
+          <p:cNvSpPr/>
+          <p:nvPr/>
+        </p:nvSpPr>
+        <p:spPr>
+          <a:xfrm>
+            <a:off x="2470404" y="5385815"/>
+            <a:ext cx="310896" cy="310896"/>
+          </a:xfrm>
+          <a:prstGeom prst="ellipse">
+            <a:avLst/>
+          </a:prstGeom>
+          <a:solidFill>
+            <a:srgbClr val="F0AB00"/>
+          </a:solidFill>
+          <a:ln w="22225">
+            <a:solidFill>
+              <a:srgbClr val="21295C"/>
+            </a:solidFill>
+          </a:ln>
+          <a:effectLst/>
+        </p:spPr>
+        <p:style>
+          <a:lnRef idx="1">
+            <a:schemeClr val="accent1"/>
+          </a:lnRef>
+          <a:fillRef idx="3">
+            <a:schemeClr val="accent1"/>
+          </a:fillRef>
+          <a:effectRef idx="2">
+            <a:schemeClr val="accent1"/>
+          </a:effectRef>
+          <a:fontRef idx="minor">
+            <a:schemeClr val="lt1"/>
+          </a:fontRef>
+        </p:style>
+        <p:txBody>
+          <a:bodyPr rtlCol="0" anchor="ctr"/>
+          <a:lstStyle/>
+          <a:p>
+            <a:pPr algn="ctr"/>
+          </a:p>
+        </p:txBody>
+      </p:sp>
+      <p:sp>
+        <p:nvSpPr>
+          <p:cNvPr id="34" name="TextBox 33"/>
+          <p:cNvSpPr txBox="1"/>
+          <p:nvPr/>
+        </p:nvSpPr>
+        <p:spPr>
+          <a:xfrm>
+            <a:off x="914400" y="4855464"/>
+            <a:ext cx="3459480" cy="384048"/>
           </a:xfrm>
           <a:prstGeom prst="rect">
             <a:avLst/>
@@ -8505,31 +8659,77 @@
           <a:p>
             <a:pPr algn="ctr">
               <a:lnSpc>
-                <a:spcPct val="120000"/>
-              </a:lnSpc>
-            </a:pPr>
-            <a:r>
-              <a:rPr sz="1200" b="0" i="0">
+                <a:spcPct val="105000"/>
+              </a:lnSpc>
+            </a:pPr>
+            <a:r>
+              <a:rPr sz="1250" b="1" i="0">
                 <a:solidFill>
                   <a:srgbClr val="21295C"/>
                 </a:solidFill>
                 <a:latin typeface="Arial"/>
               </a:rPr>
-              <a:t>ChatGPT — 1M за 5 дней</a:t>
-            </a:r>
-          </a:p>
-        </p:txBody>
-      </p:sp>
-      <p:sp>
-        <p:nvSpPr>
-          <p:cNvPr id="32" name="TextBox 31"/>
-          <p:cNvSpPr txBox="1"/>
-          <p:nvPr/>
-        </p:nvSpPr>
-        <p:spPr>
-          <a:xfrm>
-            <a:off x="5882640" y="5212080"/>
-            <a:ext cx="2773680" cy="329184"/>
+              <a:t>«Attention Is All You Need»  ★</a:t>
+            </a:r>
+          </a:p>
+        </p:txBody>
+      </p:sp>
+      <p:sp>
+        <p:nvSpPr>
+          <p:cNvPr id="35" name="Rounded Rectangle 34"/>
+          <p:cNvSpPr/>
+          <p:nvPr/>
+        </p:nvSpPr>
+        <p:spPr>
+          <a:xfrm>
+            <a:off x="2026920" y="5486399"/>
+            <a:ext cx="1234440" cy="402336"/>
+          </a:xfrm>
+          <a:prstGeom prst="roundRect">
+            <a:avLst>
+              <a:gd name="adj" fmla="val 50000"/>
+            </a:avLst>
+          </a:prstGeom>
+          <a:solidFill>
+            <a:srgbClr val="F0AB00"/>
+          </a:solidFill>
+          <a:ln>
+            <a:noFill/>
+          </a:ln>
+          <a:effectLst/>
+        </p:spPr>
+        <p:style>
+          <a:lnRef idx="1">
+            <a:schemeClr val="accent1"/>
+          </a:lnRef>
+          <a:fillRef idx="3">
+            <a:schemeClr val="accent1"/>
+          </a:fillRef>
+          <a:effectRef idx="2">
+            <a:schemeClr val="accent1"/>
+          </a:effectRef>
+          <a:fontRef idx="minor">
+            <a:schemeClr val="lt1"/>
+          </a:fontRef>
+        </p:style>
+        <p:txBody>
+          <a:bodyPr rtlCol="0" anchor="ctr"/>
+          <a:lstStyle/>
+          <a:p>
+            <a:pPr algn="ctr"/>
+          </a:p>
+        </p:txBody>
+      </p:sp>
+      <p:sp>
+        <p:nvSpPr>
+          <p:cNvPr id="36" name="TextBox 35"/>
+          <p:cNvSpPr txBox="1"/>
+          <p:nvPr/>
+        </p:nvSpPr>
+        <p:spPr>
+          <a:xfrm>
+            <a:off x="914400" y="5495543"/>
+            <a:ext cx="3459480" cy="365760"/>
           </a:xfrm>
           <a:prstGeom prst="rect">
             <a:avLst/>
@@ -8548,27 +8748,27 @@
               </a:lnSpc>
             </a:pPr>
             <a:r>
-              <a:rPr sz="1400" b="1" i="0">
+              <a:rPr sz="2200" b="1" i="0">
                 <a:solidFill>
                   <a:srgbClr val="21295C"/>
                 </a:solidFill>
                 <a:latin typeface="Arial"/>
               </a:rPr>
-              <a:t>2022</a:t>
-            </a:r>
-          </a:p>
-        </p:txBody>
-      </p:sp>
-      <p:sp>
-        <p:nvSpPr>
-          <p:cNvPr id="33" name="Rectangle 32"/>
+              <a:t>2017</a:t>
+            </a:r>
+          </a:p>
+        </p:txBody>
+      </p:sp>
+      <p:sp>
+        <p:nvSpPr>
+          <p:cNvPr id="37" name="Rectangle 36"/>
           <p:cNvSpPr/>
           <p:nvPr/>
         </p:nvSpPr>
         <p:spPr>
           <a:xfrm>
-            <a:off x="10134600" y="4937760"/>
-            <a:ext cx="91440" cy="228600"/>
+            <a:off x="6067044" y="5440679"/>
+            <a:ext cx="73152" cy="201168"/>
           </a:xfrm>
           <a:prstGeom prst="rect">
             <a:avLst/>
@@ -8605,14 +8805,14 @@
       </p:sp>
       <p:sp>
         <p:nvSpPr>
-          <p:cNvPr id="34" name="TextBox 33"/>
-          <p:cNvSpPr txBox="1"/>
-          <p:nvPr/>
-        </p:nvSpPr>
-        <p:spPr>
-          <a:xfrm>
-            <a:off x="8793480" y="4343400"/>
-            <a:ext cx="2773680" cy="502920"/>
+          <p:cNvPr id="38" name="TextBox 37"/>
+          <p:cNvSpPr txBox="1"/>
+          <p:nvPr/>
+        </p:nvSpPr>
+        <p:spPr>
+          <a:xfrm>
+            <a:off x="4373880" y="4855464"/>
+            <a:ext cx="3459480" cy="384048"/>
           </a:xfrm>
           <a:prstGeom prst="rect">
             <a:avLst/>
@@ -8627,16 +8827,138 @@
           <a:p>
             <a:pPr algn="ctr">
               <a:lnSpc>
-                <a:spcPct val="120000"/>
-              </a:lnSpc>
-            </a:pPr>
-            <a:r>
-              <a:rPr sz="1200" b="0" i="0">
+                <a:spcPct val="105000"/>
+              </a:lnSpc>
+            </a:pPr>
+            <a:r>
+              <a:rPr sz="1250" b="0" i="0">
                 <a:solidFill>
                   <a:srgbClr val="21295C"/>
                 </a:solidFill>
                 <a:latin typeface="Arial"/>
               </a:rPr>
+              <a:t>ChatGPT — 1M за 5 дней</a:t>
+            </a:r>
+          </a:p>
+        </p:txBody>
+      </p:sp>
+      <p:sp>
+        <p:nvSpPr>
+          <p:cNvPr id="39" name="TextBox 38"/>
+          <p:cNvSpPr txBox="1"/>
+          <p:nvPr/>
+        </p:nvSpPr>
+        <p:spPr>
+          <a:xfrm>
+            <a:off x="4373880" y="5586983"/>
+            <a:ext cx="3459480" cy="292608"/>
+          </a:xfrm>
+          <a:prstGeom prst="rect">
+            <a:avLst/>
+          </a:prstGeom>
+          <a:noFill/>
+        </p:spPr>
+        <p:txBody>
+          <a:bodyPr wrap="square" lIns="0" rIns="0" tIns="0" bIns="0" anchor="t">
+            <a:spAutoFit/>
+          </a:bodyPr>
+          <a:lstStyle/>
+          <a:p>
+            <a:pPr algn="ctr">
+              <a:lnSpc>
+                <a:spcPct val="115000"/>
+              </a:lnSpc>
+            </a:pPr>
+            <a:r>
+              <a:rPr sz="1450" b="1" i="0">
+                <a:solidFill>
+                  <a:srgbClr val="21295C"/>
+                </a:solidFill>
+                <a:latin typeface="Arial"/>
+              </a:rPr>
+              <a:t>2022</a:t>
+            </a:r>
+          </a:p>
+        </p:txBody>
+      </p:sp>
+      <p:sp>
+        <p:nvSpPr>
+          <p:cNvPr id="40" name="Rectangle 39"/>
+          <p:cNvSpPr/>
+          <p:nvPr/>
+        </p:nvSpPr>
+        <p:spPr>
+          <a:xfrm>
+            <a:off x="9526523" y="5440679"/>
+            <a:ext cx="73152" cy="201168"/>
+          </a:xfrm>
+          <a:prstGeom prst="rect">
+            <a:avLst/>
+          </a:prstGeom>
+          <a:solidFill>
+            <a:srgbClr val="21295C"/>
+          </a:solidFill>
+          <a:ln>
+            <a:noFill/>
+          </a:ln>
+          <a:effectLst/>
+        </p:spPr>
+        <p:style>
+          <a:lnRef idx="1">
+            <a:schemeClr val="accent1"/>
+          </a:lnRef>
+          <a:fillRef idx="3">
+            <a:schemeClr val="accent1"/>
+          </a:fillRef>
+          <a:effectRef idx="2">
+            <a:schemeClr val="accent1"/>
+          </a:effectRef>
+          <a:fontRef idx="minor">
+            <a:schemeClr val="lt1"/>
+          </a:fontRef>
+        </p:style>
+        <p:txBody>
+          <a:bodyPr rtlCol="0" anchor="ctr"/>
+          <a:lstStyle/>
+          <a:p>
+            <a:pPr algn="ctr"/>
+          </a:p>
+        </p:txBody>
+      </p:sp>
+      <p:sp>
+        <p:nvSpPr>
+          <p:cNvPr id="41" name="TextBox 40"/>
+          <p:cNvSpPr txBox="1"/>
+          <p:nvPr/>
+        </p:nvSpPr>
+        <p:spPr>
+          <a:xfrm>
+            <a:off x="7833360" y="4855464"/>
+            <a:ext cx="3459480" cy="384048"/>
+          </a:xfrm>
+          <a:prstGeom prst="rect">
+            <a:avLst/>
+          </a:prstGeom>
+          <a:noFill/>
+        </p:spPr>
+        <p:txBody>
+          <a:bodyPr wrap="square" lIns="0" rIns="0" tIns="0" bIns="0" anchor="t">
+            <a:spAutoFit/>
+          </a:bodyPr>
+          <a:lstStyle/>
+          <a:p>
+            <a:pPr algn="ctr">
+              <a:lnSpc>
+                <a:spcPct val="105000"/>
+              </a:lnSpc>
+            </a:pPr>
+            <a:r>
+              <a:rPr sz="1250" b="0" i="0">
+                <a:solidFill>
+                  <a:srgbClr val="21295C"/>
+                </a:solidFill>
+                <a:latin typeface="Arial"/>
+              </a:rPr>
               <a:t>DeepSeek R1, Claude Code</a:t>
             </a:r>
           </a:p>
@@ -8644,14 +8966,14 @@
       </p:sp>
       <p:sp>
         <p:nvSpPr>
-          <p:cNvPr id="35" name="TextBox 34"/>
-          <p:cNvSpPr txBox="1"/>
-          <p:nvPr/>
-        </p:nvSpPr>
-        <p:spPr>
-          <a:xfrm>
-            <a:off x="8793480" y="5212080"/>
-            <a:ext cx="2773680" cy="329184"/>
+          <p:cNvPr id="42" name="TextBox 41"/>
+          <p:cNvSpPr txBox="1"/>
+          <p:nvPr/>
+        </p:nvSpPr>
+        <p:spPr>
+          <a:xfrm>
+            <a:off x="7833360" y="5586983"/>
+            <a:ext cx="3459480" cy="292608"/>
           </a:xfrm>
           <a:prstGeom prst="rect">
             <a:avLst/>
@@ -8670,7 +8992,7 @@
               </a:lnSpc>
             </a:pPr>
             <a:r>
-              <a:rPr sz="1400" b="1" i="0">
+              <a:rPr sz="1450" b="1" i="0">
                 <a:solidFill>
                   <a:srgbClr val="21295C"/>
                 </a:solidFill>
@@ -8683,14 +9005,14 @@
       </p:sp>
       <p:sp>
         <p:nvSpPr>
-          <p:cNvPr id="36" name="Rounded Rectangle 35"/>
+          <p:cNvPr id="43" name="Rounded Rectangle 42"/>
           <p:cNvSpPr/>
           <p:nvPr/>
         </p:nvSpPr>
         <p:spPr>
           <a:xfrm>
-            <a:off x="502920" y="5760720"/>
-            <a:ext cx="11201400" cy="960120"/>
+            <a:off x="502920" y="6089904"/>
+            <a:ext cx="11201400" cy="658368"/>
           </a:xfrm>
           <a:prstGeom prst="roundRect">
             <a:avLst>
@@ -8731,14 +9053,14 @@
       </p:sp>
       <p:sp>
         <p:nvSpPr>
-          <p:cNvPr id="37" name="TextBox 36"/>
-          <p:cNvSpPr txBox="1"/>
-          <p:nvPr/>
-        </p:nvSpPr>
-        <p:spPr>
-          <a:xfrm>
-            <a:off x="685800" y="5833872"/>
-            <a:ext cx="10835640" cy="813816"/>
+          <p:cNvPr id="44" name="TextBox 43"/>
+          <p:cNvSpPr txBox="1"/>
+          <p:nvPr/>
+        </p:nvSpPr>
+        <p:spPr>
+          <a:xfrm>
+            <a:off x="685800" y="6163056"/>
+            <a:ext cx="10835640" cy="512063"/>
           </a:xfrm>
           <a:prstGeom prst="rect">
             <a:avLst/>
@@ -8757,7 +9079,7 @@
               </a:lnSpc>
             </a:pPr>
             <a:r>
-              <a:rPr sz="1300" b="1" i="0">
+              <a:rPr sz="1250" b="1" i="0">
                 <a:solidFill>
                   <a:srgbClr val="21295C"/>
                 </a:solidFill>

--- a/library/lectures/lec-01/rendered/lec-01.pptx
+++ b/library/lectures/lec-01/rendered/lec-01.pptx
@@ -1195,7 +1195,7 @@
           <a:p/>
           <a:p>
             <a:r>
-              <a:t>Ось «модальность» — с каким типом данных работает система. Текст. Изображение — фотографии, рентгеновские снимки, кадры конвейерной камеры. Звук — речь, музыка, индустриальный шум. Видео — последовательность изображений, часто плюс звук. Структурированные данные — таблицы, временные ряды, графы, базы. Мультимодальные комбинации — текст плюс изображение, текст плюс аудио плюс видео.</a:t>
+              <a:t>Ось «модальность» — с каким типом данных работает система. Текст. Изображение — фотографии, рентгеновские снимки, кадры конвейерной камеры. Звук — речь, музыка, индустриальный шум. Видео — последовательность изображений, часто плюс звук. Структурированные данные — таблицы, временные ряды, графы, базы. В ячейке «Поиск × Структурированные данные» стоит vector DB — база данных для поиска по смысловой похожести, подробнее разберём на слайде про агента. Мультимодальные комбинации — текст плюс изображение, текст плюс аудио плюс видео.</a:t>
             </a:r>
           </a:p>
           <a:p/>
@@ -2283,31 +2283,13 @@
           <a:lstStyle/>
           <a:p>
             <a:r>
-              <a:t>Раздел четыре посвящён тому, где AI ломается, ошибается и опасен. Это не глава ужасов — это инвентаризация классов проблем, которые систематически возникают в AI-системах и которые инженер должен уметь предвидеть.</a:t>
+              <a:t>Раздел четыре посвящён тому, где AI ломается, ошибается и опасен. Это не глава ужасов — это инвентаризация классов проблем, которые систематически возникают в AI-системах и которые инженер должен уметь предвидеть. Тема — ваша зона ответственности, а не отдельный вопрос для специалистов по AI safety: вы уже приняли решение встроить AI, и отвечать за инцидент — утечку данных, неправильное решение по клиенту, ошибочный автоматический вердикт — будете вы и ваша команда, а не «модель».</a:t>
             </a:r>
           </a:p>
           <a:p/>
           <a:p>
             <a:r>
-              <a:t>Три причины, по которым эта тема — ваша зона ответственности, а не отдельный вопрос для специалистов по AI safety.</a:t>
-            </a:r>
-          </a:p>
-          <a:p/>
-          <a:p>
-            <a:r>
-              <a:t>Первая. Вы уже приняли решение встроить AI — теперь отвечаете за последствия. Если в результате внедрения возникнет инцидент — утечка данных, неправильное решение по клиенту, ошибочный приговор автомата, — отвечать будете не «модель», а вы и ваша команда.</a:t>
-            </a:r>
-          </a:p>
-          <a:p/>
-          <a:p>
-            <a:r>
-              <a:t>Вторая. AI ошибается системно, и эти ошибки предсказуемы. Большинство известных классов проблем — bias, галлюцинации, sycophancy, distribution shift — повторяются от системы к системе. Они не случайные баги, а свойства технологии. Инженер, который не знает этого набора, будет наступать на каждый из них в первый раз.</a:t>
-            </a:r>
-          </a:p>
-          <a:p/>
-          <a:p>
-            <a:r>
-              <a:t>Третья. Граница «что AI не умеет» — ваша зона ответственности. За пределами этой границы — необходимость человеческого решения, дополнительной верификации, запасного сценария. Если вы её не понимаете, систему нельзя считать спроектированной.</a:t>
+              <a:t>К тому же AI ошибается системно и предсказуемо: bias, галлюцинации, sycophancy, distribution shift повторяются от системы к системе, это не случайные баги, а свойства технологии. И, наконец, граница «что AI не умеет» — тоже ваша зона ответственности: за её пределами нужны человеческое решение, верификация, запасной сценарий, и без понимания этой границы систему нельзя считать спроектированной.</a:t>
             </a:r>
           </a:p>
           <a:p/>
@@ -3429,7 +3411,7 @@
           <a:p/>
           <a:p>
             <a:r>
-              <a:t>Лекция называется «AI вокруг нас» — потому что к 2026 году AI перестал быть отдельным продуктом и стал инфраструктурным слоем, который незаметно работает в десятках сервисов, которыми вы пользуетесь каждый день. Голосовой ввод в смартфоне, навигация по пробкам, разблокировка лица, фильтр спама в почте, рекомендации в музыкальном сервисе, автодополнение в браузере — всё это AI, который большинство пользователей перестали воспринимать как AI.</a:t>
+              <a:t>К 2026 году AI перестал быть отдельным продуктом и стал инфраструктурным слоем, который незаметно работает в десятках сервисов, которыми вы пользуетесь каждый день. Голосовой ввод в смартфоне, навигация по пробкам, разблокировка лица, фильтр спама в почте, рекомендации в музыкальном сервисе, автодополнение в браузере — всё это AI, который большинство пользователей перестали воспринимать как AI.</a:t>
             </a:r>
           </a:p>
           <a:p/>
@@ -8002,7 +7984,46 @@
       </p:sp>
       <p:sp>
         <p:nvSpPr>
-          <p:cNvPr id="19" name="Rounded Rectangle 18"/>
+          <p:cNvPr id="19" name="TextBox 18"/>
+          <p:cNvSpPr txBox="1"/>
+          <p:nvPr/>
+        </p:nvSpPr>
+        <p:spPr>
+          <a:xfrm>
+            <a:off x="3374136" y="2889503"/>
+            <a:ext cx="8055863" cy="365760"/>
+          </a:xfrm>
+          <a:prstGeom prst="rect">
+            <a:avLst/>
+          </a:prstGeom>
+          <a:noFill/>
+        </p:spPr>
+        <p:txBody>
+          <a:bodyPr wrap="square" lIns="0" rIns="0" tIns="0" bIns="0" anchor="ctr">
+            <a:spAutoFit/>
+          </a:bodyPr>
+          <a:lstStyle/>
+          <a:p>
+            <a:pPr algn="l">
+              <a:lnSpc>
+                <a:spcPct val="115000"/>
+              </a:lnSpc>
+            </a:pPr>
+            <a:r>
+              <a:rPr sz="1050" b="0" i="1">
+                <a:solidFill>
+                  <a:srgbClr val="21295C"/>
+                </a:solidFill>
+                <a:latin typeface="Arial"/>
+              </a:rPr>
+              <a:t>ресурсы уходят, когда обещания не сбываются</a:t>
+            </a:r>
+          </a:p>
+        </p:txBody>
+      </p:sp>
+      <p:sp>
+        <p:nvSpPr>
+          <p:cNvPr id="20" name="Rounded Rectangle 19"/>
           <p:cNvSpPr/>
           <p:nvPr/>
         </p:nvSpPr>
@@ -8048,7 +8069,7 @@
       </p:sp>
       <p:sp>
         <p:nvSpPr>
-          <p:cNvPr id="20" name="Rectangle 19"/>
+          <p:cNvPr id="21" name="Rectangle 20"/>
           <p:cNvSpPr/>
           <p:nvPr/>
         </p:nvSpPr>
@@ -8092,7 +8113,7 @@
       </p:sp>
       <p:sp>
         <p:nvSpPr>
-          <p:cNvPr id="21" name="TextBox 20"/>
+          <p:cNvPr id="22" name="TextBox 21"/>
           <p:cNvSpPr txBox="1"/>
           <p:nvPr/>
         </p:nvSpPr>
@@ -8131,7 +8152,7 @@
       </p:sp>
       <p:sp>
         <p:nvSpPr>
-          <p:cNvPr id="22" name="TextBox 21"/>
+          <p:cNvPr id="23" name="TextBox 22"/>
           <p:cNvSpPr txBox="1"/>
           <p:nvPr/>
         </p:nvSpPr>
@@ -8170,7 +8191,7 @@
       </p:sp>
       <p:sp>
         <p:nvSpPr>
-          <p:cNvPr id="23" name="Rectangle 22"/>
+          <p:cNvPr id="24" name="Rectangle 23"/>
           <p:cNvSpPr/>
           <p:nvPr/>
         </p:nvSpPr>
@@ -8214,7 +8235,7 @@
       </p:sp>
       <p:sp>
         <p:nvSpPr>
-          <p:cNvPr id="24" name="TextBox 23"/>
+          <p:cNvPr id="25" name="TextBox 24"/>
           <p:cNvSpPr txBox="1"/>
           <p:nvPr/>
         </p:nvSpPr>
@@ -8253,7 +8274,7 @@
       </p:sp>
       <p:sp>
         <p:nvSpPr>
-          <p:cNvPr id="25" name="TextBox 24"/>
+          <p:cNvPr id="26" name="TextBox 25"/>
           <p:cNvSpPr txBox="1"/>
           <p:nvPr/>
         </p:nvSpPr>
@@ -8292,7 +8313,7 @@
       </p:sp>
       <p:sp>
         <p:nvSpPr>
-          <p:cNvPr id="26" name="Rectangle 25"/>
+          <p:cNvPr id="27" name="Rectangle 26"/>
           <p:cNvSpPr/>
           <p:nvPr/>
         </p:nvSpPr>
@@ -8336,7 +8357,7 @@
       </p:sp>
       <p:sp>
         <p:nvSpPr>
-          <p:cNvPr id="27" name="TextBox 26"/>
+          <p:cNvPr id="28" name="TextBox 27"/>
           <p:cNvSpPr txBox="1"/>
           <p:nvPr/>
         </p:nvSpPr>
@@ -8375,7 +8396,7 @@
       </p:sp>
       <p:sp>
         <p:nvSpPr>
-          <p:cNvPr id="28" name="TextBox 27"/>
+          <p:cNvPr id="29" name="TextBox 28"/>
           <p:cNvSpPr txBox="1"/>
           <p:nvPr/>
         </p:nvSpPr>
@@ -8414,7 +8435,7 @@
       </p:sp>
       <p:sp>
         <p:nvSpPr>
-          <p:cNvPr id="29" name="Rounded Rectangle 28"/>
+          <p:cNvPr id="30" name="Rounded Rectangle 29"/>
           <p:cNvSpPr/>
           <p:nvPr/>
         </p:nvSpPr>
@@ -8460,7 +8481,7 @@
       </p:sp>
       <p:sp>
         <p:nvSpPr>
-          <p:cNvPr id="30" name="Rounded Rectangle 29"/>
+          <p:cNvPr id="31" name="Rounded Rectangle 30"/>
           <p:cNvSpPr/>
           <p:nvPr/>
         </p:nvSpPr>
@@ -8506,7 +8527,7 @@
       </p:sp>
       <p:sp>
         <p:nvSpPr>
-          <p:cNvPr id="31" name="TextBox 30"/>
+          <p:cNvPr id="32" name="TextBox 31"/>
           <p:cNvSpPr txBox="1"/>
           <p:nvPr/>
         </p:nvSpPr>
@@ -8545,7 +8566,7 @@
       </p:sp>
       <p:sp>
         <p:nvSpPr>
-          <p:cNvPr id="32" name="Rounded Rectangle 31"/>
+          <p:cNvPr id="33" name="Rounded Rectangle 32"/>
           <p:cNvSpPr/>
           <p:nvPr/>
         </p:nvSpPr>
@@ -8591,13 +8612,13 @@
       </p:sp>
       <p:sp>
         <p:nvSpPr>
-          <p:cNvPr id="33" name="Oval 32"/>
+          <p:cNvPr id="34" name="Oval 33"/>
           <p:cNvSpPr/>
           <p:nvPr/>
         </p:nvSpPr>
         <p:spPr>
           <a:xfrm>
-            <a:off x="2470404" y="5385815"/>
+            <a:off x="2470404" y="5138927"/>
             <a:ext cx="310896" cy="310896"/>
           </a:xfrm>
           <a:prstGeom prst="ellipse">
@@ -8637,7 +8658,7 @@
       </p:sp>
       <p:sp>
         <p:nvSpPr>
-          <p:cNvPr id="34" name="TextBox 33"/>
+          <p:cNvPr id="35" name="TextBox 34"/>
           <p:cNvSpPr txBox="1"/>
           <p:nvPr/>
         </p:nvSpPr>
@@ -8676,7 +8697,7 @@
       </p:sp>
       <p:sp>
         <p:nvSpPr>
-          <p:cNvPr id="35" name="Rounded Rectangle 34"/>
+          <p:cNvPr id="36" name="Rounded Rectangle 35"/>
           <p:cNvSpPr/>
           <p:nvPr/>
         </p:nvSpPr>
@@ -8722,7 +8743,7 @@
       </p:sp>
       <p:sp>
         <p:nvSpPr>
-          <p:cNvPr id="36" name="TextBox 35"/>
+          <p:cNvPr id="37" name="TextBox 36"/>
           <p:cNvSpPr txBox="1"/>
           <p:nvPr/>
         </p:nvSpPr>
@@ -8761,7 +8782,7 @@
       </p:sp>
       <p:sp>
         <p:nvSpPr>
-          <p:cNvPr id="37" name="Rectangle 36"/>
+          <p:cNvPr id="38" name="Rectangle 37"/>
           <p:cNvSpPr/>
           <p:nvPr/>
         </p:nvSpPr>
@@ -8805,7 +8826,7 @@
       </p:sp>
       <p:sp>
         <p:nvSpPr>
-          <p:cNvPr id="38" name="TextBox 37"/>
+          <p:cNvPr id="39" name="TextBox 38"/>
           <p:cNvSpPr txBox="1"/>
           <p:nvPr/>
         </p:nvSpPr>
@@ -8844,7 +8865,7 @@
       </p:sp>
       <p:sp>
         <p:nvSpPr>
-          <p:cNvPr id="39" name="TextBox 38"/>
+          <p:cNvPr id="40" name="TextBox 39"/>
           <p:cNvSpPr txBox="1"/>
           <p:nvPr/>
         </p:nvSpPr>
@@ -8883,7 +8904,7 @@
       </p:sp>
       <p:sp>
         <p:nvSpPr>
-          <p:cNvPr id="40" name="Rectangle 39"/>
+          <p:cNvPr id="41" name="Rectangle 40"/>
           <p:cNvSpPr/>
           <p:nvPr/>
         </p:nvSpPr>
@@ -8927,7 +8948,7 @@
       </p:sp>
       <p:sp>
         <p:nvSpPr>
-          <p:cNvPr id="41" name="TextBox 40"/>
+          <p:cNvPr id="42" name="TextBox 41"/>
           <p:cNvSpPr txBox="1"/>
           <p:nvPr/>
         </p:nvSpPr>
@@ -8966,7 +8987,7 @@
       </p:sp>
       <p:sp>
         <p:nvSpPr>
-          <p:cNvPr id="42" name="TextBox 41"/>
+          <p:cNvPr id="43" name="TextBox 42"/>
           <p:cNvSpPr txBox="1"/>
           <p:nvPr/>
         </p:nvSpPr>
@@ -9005,7 +9026,7 @@
       </p:sp>
       <p:sp>
         <p:nvSpPr>
-          <p:cNvPr id="43" name="Rounded Rectangle 42"/>
+          <p:cNvPr id="44" name="Rounded Rectangle 43"/>
           <p:cNvSpPr/>
           <p:nvPr/>
         </p:nvSpPr>
@@ -9053,7 +9074,7 @@
       </p:sp>
       <p:sp>
         <p:nvSpPr>
-          <p:cNvPr id="44" name="TextBox 43"/>
+          <p:cNvPr id="45" name="TextBox 44"/>
           <p:cNvSpPr txBox="1"/>
           <p:nvPr/>
         </p:nvSpPr>
@@ -14302,7 +14323,7 @@
             <a:r>
               <a:rPr sz="1800" b="1" i="0">
                 <a:solidFill>
-                  <a:srgbClr val="F0AB00"/>
+                  <a:srgbClr val="21295C"/>
                 </a:solidFill>
                 <a:latin typeface="Arial"/>
               </a:rPr>
@@ -14401,210 +14422,6 @@
       <p:sp>
         <p:nvSpPr>
           <p:cNvPr id="23" name="TextBox 22"/>
-          <p:cNvSpPr txBox="1"/>
-          <p:nvPr/>
-        </p:nvSpPr>
-        <p:spPr>
-          <a:xfrm>
-            <a:off x="685800" y="5650992"/>
-            <a:ext cx="3840479" cy="630936"/>
-          </a:xfrm>
-          <a:prstGeom prst="rect">
-            <a:avLst/>
-          </a:prstGeom>
-          <a:noFill/>
-        </p:spPr>
-        <p:txBody>
-          <a:bodyPr wrap="square" lIns="0" rIns="0" tIns="0" bIns="0" anchor="ctr">
-            <a:spAutoFit/>
-          </a:bodyPr>
-          <a:lstStyle/>
-          <a:p>
-            <a:pPr algn="l">
-              <a:lnSpc>
-                <a:spcPct val="125000"/>
-              </a:lnSpc>
-            </a:pPr>
-            <a:r>
-              <a:rPr sz="1200" b="1" i="0">
-                <a:solidFill>
-                  <a:srgbClr val="21295C"/>
-                </a:solidFill>
-                <a:latin typeface="Arial"/>
-              </a:rPr>
-              <a:t>Выбор слоя — инженерное решение, не альтернатива.</a:t>
-            </a:r>
-          </a:p>
-        </p:txBody>
-      </p:sp>
-      <p:sp>
-        <p:nvSpPr>
-          <p:cNvPr id="24" name="TextBox 23"/>
-          <p:cNvSpPr txBox="1"/>
-          <p:nvPr/>
-        </p:nvSpPr>
-        <p:spPr>
-          <a:xfrm>
-            <a:off x="502920" y="1828800"/>
-            <a:ext cx="4206240" cy="502920"/>
-          </a:xfrm>
-          <a:prstGeom prst="rect">
-            <a:avLst/>
-          </a:prstGeom>
-          <a:noFill/>
-        </p:spPr>
-        <p:txBody>
-          <a:bodyPr wrap="square" lIns="0" rIns="0" tIns="0" bIns="0" anchor="t">
-            <a:spAutoFit/>
-          </a:bodyPr>
-          <a:lstStyle/>
-          <a:p>
-            <a:pPr algn="l">
-              <a:lnSpc>
-                <a:spcPct val="115000"/>
-              </a:lnSpc>
-            </a:pPr>
-            <a:r>
-              <a:rPr sz="1800" b="1" i="0">
-                <a:solidFill>
-                  <a:srgbClr val="21295C"/>
-                </a:solidFill>
-                <a:latin typeface="Arial"/>
-              </a:rPr>
-              <a:t>Каждый следующий слой</a:t>
-            </a:r>
-          </a:p>
-        </p:txBody>
-      </p:sp>
-      <p:sp>
-        <p:nvSpPr>
-          <p:cNvPr id="25" name="TextBox 24"/>
-          <p:cNvSpPr txBox="1"/>
-          <p:nvPr/>
-        </p:nvSpPr>
-        <p:spPr>
-          <a:xfrm>
-            <a:off x="502920" y="2331720"/>
-            <a:ext cx="4206240" cy="502920"/>
-          </a:xfrm>
-          <a:prstGeom prst="rect">
-            <a:avLst/>
-          </a:prstGeom>
-          <a:noFill/>
-        </p:spPr>
-        <p:txBody>
-          <a:bodyPr wrap="square" lIns="0" rIns="0" tIns="0" bIns="0" anchor="t">
-            <a:spAutoFit/>
-          </a:bodyPr>
-          <a:lstStyle/>
-          <a:p>
-            <a:pPr algn="l">
-              <a:lnSpc>
-                <a:spcPct val="115000"/>
-              </a:lnSpc>
-            </a:pPr>
-            <a:r>
-              <a:rPr sz="1800" b="1" i="0">
-                <a:solidFill>
-                  <a:srgbClr val="F0AB00"/>
-                </a:solidFill>
-                <a:latin typeface="Arial"/>
-              </a:rPr>
-              <a:t>включает предыдущий</a:t>
-            </a:r>
-          </a:p>
-        </p:txBody>
-      </p:sp>
-      <p:sp>
-        <p:nvSpPr>
-          <p:cNvPr id="26" name="TextBox 25"/>
-          <p:cNvSpPr txBox="1"/>
-          <p:nvPr/>
-        </p:nvSpPr>
-        <p:spPr>
-          <a:xfrm>
-            <a:off x="502920" y="3108960"/>
-            <a:ext cx="4206240" cy="2377440"/>
-          </a:xfrm>
-          <a:prstGeom prst="rect">
-            <a:avLst/>
-          </a:prstGeom>
-          <a:noFill/>
-        </p:spPr>
-        <p:txBody>
-          <a:bodyPr wrap="square" lIns="0" rIns="0" tIns="0" bIns="0" anchor="t">
-            <a:spAutoFit/>
-          </a:bodyPr>
-          <a:lstStyle/>
-          <a:p>
-            <a:pPr algn="l">
-              <a:lnSpc>
-                <a:spcPct val="140000"/>
-              </a:lnSpc>
-            </a:pPr>
-            <a:r>
-              <a:rPr sz="1300" b="0" i="0">
-                <a:solidFill>
-                  <a:srgbClr val="21295C"/>
-                </a:solidFill>
-                <a:latin typeface="Arial"/>
-              </a:rPr>
-              <a:t>Не четыре альтернативные технологии, а четыре способа реализации одной задачи. Каждое следующее обёртывание добавляет способности — и сложность, стоимость, потенциал ошибок.</a:t>
-            </a:r>
-          </a:p>
-        </p:txBody>
-      </p:sp>
-      <p:sp>
-        <p:nvSpPr>
-          <p:cNvPr id="27" name="Rounded Rectangle 26"/>
-          <p:cNvSpPr/>
-          <p:nvPr/>
-        </p:nvSpPr>
-        <p:spPr>
-          <a:xfrm>
-            <a:off x="502920" y="5577840"/>
-            <a:ext cx="4206240" cy="777240"/>
-          </a:xfrm>
-          <a:prstGeom prst="roundRect">
-            <a:avLst>
-              <a:gd name="adj" fmla="val 12000"/>
-            </a:avLst>
-          </a:prstGeom>
-          <a:solidFill>
-            <a:srgbClr val="FEF5E0"/>
-          </a:solidFill>
-          <a:ln w="15240">
-            <a:solidFill>
-              <a:srgbClr val="F0AB00"/>
-            </a:solidFill>
-          </a:ln>
-          <a:effectLst/>
-        </p:spPr>
-        <p:style>
-          <a:lnRef idx="1">
-            <a:schemeClr val="accent1"/>
-          </a:lnRef>
-          <a:fillRef idx="3">
-            <a:schemeClr val="accent1"/>
-          </a:fillRef>
-          <a:effectRef idx="2">
-            <a:schemeClr val="accent1"/>
-          </a:effectRef>
-          <a:fontRef idx="minor">
-            <a:schemeClr val="lt1"/>
-          </a:fontRef>
-        </p:style>
-        <p:txBody>
-          <a:bodyPr rtlCol="0" anchor="ctr"/>
-          <a:lstStyle/>
-          <a:p>
-            <a:pPr algn="ctr"/>
-          </a:p>
-        </p:txBody>
-      </p:sp>
-      <p:sp>
-        <p:nvSpPr>
-          <p:cNvPr id="28" name="TextBox 27"/>
           <p:cNvSpPr txBox="1"/>
           <p:nvPr/>
         </p:nvSpPr>
@@ -17226,7 +17043,7 @@
                 </a:solidFill>
                 <a:latin typeface="Arial"/>
               </a:rPr>
-              <a:t>frame predict</a:t>
+              <a:t>прогноз кадра</a:t>
             </a:r>
           </a:p>
         </p:txBody>
@@ -17311,7 +17128,7 @@
                 </a:solidFill>
                 <a:latin typeface="Arial"/>
               </a:rPr>
-              <a:t>video forecast</a:t>
+              <a:t>прогноз видео</a:t>
             </a:r>
           </a:p>
         </p:txBody>
@@ -18691,7 +18508,7 @@
                 </a:solidFill>
                 <a:latin typeface="Arial"/>
               </a:rPr>
-              <a:t>Модель — компонент, не система. Inference: вход → препроцессинг → модель → постпроцессинг → выход.</a:t>
+              <a:t>Модель — компонент, не система. Инференс: вход → препроцессинг → модель → постпроцессинг → выход.</a:t>
             </a:r>
           </a:p>
         </p:txBody>
@@ -18774,7 +18591,7 @@
             <a:r>
               <a:rPr sz="1300" b="1" i="0">
                 <a:solidFill>
-                  <a:srgbClr val="F0AB00"/>
+                  <a:srgbClr val="21295C"/>
                 </a:solidFill>
                 <a:latin typeface="Arial"/>
               </a:rPr>
@@ -20730,7 +20547,7 @@
             <a:r>
               <a:rPr sz="1200" b="1" i="0">
                 <a:solidFill>
-                  <a:srgbClr val="F0AB00"/>
+                  <a:srgbClr val="21295C"/>
                 </a:solidFill>
                 <a:latin typeface="Arial"/>
               </a:rPr>
@@ -22567,7 +22384,7 @@
             <a:r>
               <a:rPr sz="1400" b="1" i="0">
                 <a:solidFill>
-                  <a:srgbClr val="F0AB00"/>
+                  <a:srgbClr val="21295C"/>
                 </a:solidFill>
                 <a:latin typeface="Arial"/>
               </a:rPr>
@@ -23991,7 +23808,7 @@
             <a:r>
               <a:rPr sz="1100" b="1" i="0">
                 <a:solidFill>
-                  <a:srgbClr val="F0AB00"/>
+                  <a:srgbClr val="21295C"/>
                 </a:solidFill>
                 <a:latin typeface="Arial"/>
               </a:rPr>
@@ -24350,21 +24167,21 @@
         </p:nvSpPr>
         <p:spPr>
           <a:xfrm>
-            <a:off x="4251960" y="3886200"/>
-            <a:ext cx="2606039" cy="201168"/>
-          </a:xfrm>
-          <a:prstGeom prst="rect">
-            <a:avLst/>
-          </a:prstGeom>
-          <a:noFill/>
-        </p:spPr>
-        <p:txBody>
-          <a:bodyPr wrap="square" lIns="0" rIns="0" tIns="0" bIns="0" anchor="t">
-            <a:spAutoFit/>
-          </a:bodyPr>
-          <a:lstStyle/>
-          <a:p>
-            <a:pPr algn="ctr">
+            <a:off x="5682996" y="4187952"/>
+            <a:ext cx="982980" cy="182880"/>
+          </a:xfrm>
+          <a:prstGeom prst="rect">
+            <a:avLst/>
+          </a:prstGeom>
+          <a:noFill/>
+        </p:spPr>
+        <p:txBody>
+          <a:bodyPr wrap="square" lIns="0" rIns="0" tIns="0" bIns="0" anchor="t">
+            <a:spAutoFit/>
+          </a:bodyPr>
+          <a:lstStyle/>
+          <a:p>
+            <a:pPr algn="l">
               <a:lnSpc>
                 <a:spcPct val="115000"/>
               </a:lnSpc>
@@ -24389,21 +24206,21 @@
         </p:nvSpPr>
         <p:spPr>
           <a:xfrm>
-            <a:off x="6629400" y="3886200"/>
-            <a:ext cx="2606039" cy="201168"/>
-          </a:xfrm>
-          <a:prstGeom prst="rect">
-            <a:avLst/>
-          </a:prstGeom>
-          <a:noFill/>
-        </p:spPr>
-        <p:txBody>
-          <a:bodyPr wrap="square" lIns="0" rIns="0" tIns="0" bIns="0" anchor="t">
-            <a:spAutoFit/>
-          </a:bodyPr>
-          <a:lstStyle/>
-          <a:p>
-            <a:pPr algn="ctr">
+            <a:off x="8060436" y="4187952"/>
+            <a:ext cx="982980" cy="182880"/>
+          </a:xfrm>
+          <a:prstGeom prst="rect">
+            <a:avLst/>
+          </a:prstGeom>
+          <a:noFill/>
+        </p:spPr>
+        <p:txBody>
+          <a:bodyPr wrap="square" lIns="0" rIns="0" tIns="0" bIns="0" anchor="t">
+            <a:spAutoFit/>
+          </a:bodyPr>
+          <a:lstStyle/>
+          <a:p>
+            <a:pPr algn="l">
               <a:lnSpc>
                 <a:spcPct val="115000"/>
               </a:lnSpc>
@@ -29704,7 +29521,7 @@
             <a:r>
               <a:rPr sz="1200" b="1" i="0">
                 <a:solidFill>
-                  <a:srgbClr val="F0AB00"/>
+                  <a:srgbClr val="21295C"/>
                 </a:solidFill>
                 <a:latin typeface="Arial"/>
               </a:rPr>
@@ -29956,7 +29773,7 @@
             <a:r>
               <a:rPr sz="1200" b="1" i="0">
                 <a:solidFill>
-                  <a:srgbClr val="F0AB00"/>
+                  <a:srgbClr val="21295C"/>
                 </a:solidFill>
                 <a:latin typeface="Arial"/>
               </a:rPr>
@@ -31691,7 +31508,7 @@
             <a:r>
               <a:rPr sz="1400" b="1" i="0">
                 <a:solidFill>
-                  <a:srgbClr val="F0AB00"/>
+                  <a:srgbClr val="21295C"/>
                 </a:solidFill>
                 <a:latin typeface="Arial"/>
               </a:rPr>
@@ -32263,7 +32080,7 @@
             <a:r>
               <a:rPr sz="1300" b="1" i="0">
                 <a:solidFill>
-                  <a:srgbClr val="F0AB00"/>
+                  <a:srgbClr val="21295C"/>
                 </a:solidFill>
                 <a:latin typeface="Arial"/>
               </a:rPr>
@@ -32735,7 +32552,7 @@
             <a:r>
               <a:rPr sz="1300" b="1" i="0">
                 <a:solidFill>
-                  <a:srgbClr val="F0AB00"/>
+                  <a:srgbClr val="21295C"/>
                 </a:solidFill>
                 <a:latin typeface="Arial"/>
               </a:rPr>
@@ -32852,7 +32669,7 @@
             <a:r>
               <a:rPr sz="1000" b="1" i="0">
                 <a:solidFill>
-                  <a:srgbClr val="F0AB00"/>
+                  <a:srgbClr val="21295C"/>
                 </a:solidFill>
                 <a:latin typeface="Arial"/>
               </a:rPr>
@@ -32969,7 +32786,7 @@
             <a:r>
               <a:rPr sz="1000" b="1" i="0">
                 <a:solidFill>
-                  <a:srgbClr val="F0AB00"/>
+                  <a:srgbClr val="21295C"/>
                 </a:solidFill>
                 <a:latin typeface="Arial"/>
               </a:rPr>
@@ -33086,7 +32903,7 @@
             <a:r>
               <a:rPr sz="1000" b="1" i="0">
                 <a:solidFill>
-                  <a:srgbClr val="F0AB00"/>
+                  <a:srgbClr val="21295C"/>
                 </a:solidFill>
                 <a:latin typeface="Arial"/>
               </a:rPr>
@@ -33329,7 +33146,7 @@
             <a:r>
               <a:rPr sz="2400" b="1" i="0">
                 <a:solidFill>
-                  <a:srgbClr val="F0AB00"/>
+                  <a:srgbClr val="21295C"/>
                 </a:solidFill>
                 <a:latin typeface="Arial"/>
               </a:rPr>
@@ -34167,7 +33984,7 @@
             <a:r>
               <a:rPr sz="1300" b="1" i="0">
                 <a:solidFill>
-                  <a:srgbClr val="F0AB00"/>
+                  <a:srgbClr val="21295C"/>
                 </a:solidFill>
                 <a:latin typeface="Arial"/>
               </a:rPr>
@@ -34809,7 +34626,7 @@
             <a:r>
               <a:rPr sz="1400" b="1" i="0">
                 <a:solidFill>
-                  <a:srgbClr val="F0AB00"/>
+                  <a:srgbClr val="21295C"/>
                 </a:solidFill>
                 <a:latin typeface="Arial"/>
               </a:rPr>
@@ -37789,7 +37606,7 @@
           </a:xfrm>
           <a:prstGeom prst="roundRect">
             <a:avLst>
-              <a:gd name="adj" fmla="val 10000"/>
+              <a:gd name="adj" fmla="val 35000"/>
             </a:avLst>
           </a:prstGeom>
           <a:solidFill>
@@ -37931,7 +37748,7 @@
             <a:r>
               <a:rPr sz="1100" b="1" i="0">
                 <a:solidFill>
-                  <a:srgbClr val="F0AB00"/>
+                  <a:srgbClr val="21295C"/>
                 </a:solidFill>
                 <a:latin typeface="Arial"/>
               </a:rPr>
@@ -37968,7 +37785,7 @@
               </a:lnSpc>
             </a:pPr>
             <a:r>
-              <a:rPr sz="1000" b="0" i="0">
+              <a:rPr sz="1000" b="1" i="0">
                 <a:solidFill>
                   <a:srgbClr val="21295C"/>
                 </a:solidFill>
@@ -38007,7 +37824,7 @@
               </a:lnSpc>
             </a:pPr>
             <a:r>
-              <a:rPr sz="1000" b="0" i="0">
+              <a:rPr sz="1000" b="1" i="0">
                 <a:solidFill>
                   <a:srgbClr val="21295C"/>
                 </a:solidFill>
@@ -38046,7 +37863,7 @@
               </a:lnSpc>
             </a:pPr>
             <a:r>
-              <a:rPr sz="1000" b="0" i="0">
+              <a:rPr sz="1000" b="1" i="0">
                 <a:solidFill>
                   <a:srgbClr val="21295C"/>
                 </a:solidFill>
@@ -38085,7 +37902,7 @@
               </a:lnSpc>
             </a:pPr>
             <a:r>
-              <a:rPr sz="1000" b="0" i="0">
+              <a:rPr sz="1000" b="1" i="0">
                 <a:solidFill>
                   <a:srgbClr val="21295C"/>
                 </a:solidFill>
@@ -38124,7 +37941,7 @@
               </a:lnSpc>
             </a:pPr>
             <a:r>
-              <a:rPr sz="1000" b="0" i="0">
+              <a:rPr sz="1000" b="1" i="0">
                 <a:solidFill>
                   <a:srgbClr val="21295C"/>
                 </a:solidFill>
@@ -38196,7 +38013,7 @@
           </a:xfrm>
           <a:prstGeom prst="roundRect">
             <a:avLst>
-              <a:gd name="adj" fmla="val 10000"/>
+              <a:gd name="adj" fmla="val 35000"/>
             </a:avLst>
           </a:prstGeom>
           <a:solidFill>
@@ -38336,7 +38153,7 @@
               </a:lnSpc>
             </a:pPr>
             <a:r>
-              <a:rPr sz="1000" b="0" i="0">
+              <a:rPr sz="1000" b="1" i="0">
                 <a:solidFill>
                   <a:srgbClr val="21295C"/>
                 </a:solidFill>
@@ -38375,7 +38192,7 @@
               </a:lnSpc>
             </a:pPr>
             <a:r>
-              <a:rPr sz="1000" b="0" i="0">
+              <a:rPr sz="1000" b="1" i="0">
                 <a:solidFill>
                   <a:srgbClr val="21295C"/>
                 </a:solidFill>
@@ -38414,7 +38231,7 @@
               </a:lnSpc>
             </a:pPr>
             <a:r>
-              <a:rPr sz="1000" b="0" i="0">
+              <a:rPr sz="1000" b="1" i="0">
                 <a:solidFill>
                   <a:srgbClr val="21295C"/>
                 </a:solidFill>
@@ -38453,7 +38270,7 @@
               </a:lnSpc>
             </a:pPr>
             <a:r>
-              <a:rPr sz="1000" b="0" i="0">
+              <a:rPr sz="1000" b="1" i="0">
                 <a:solidFill>
                   <a:srgbClr val="21295C"/>
                 </a:solidFill>
@@ -38492,7 +38309,7 @@
               </a:lnSpc>
             </a:pPr>
             <a:r>
-              <a:rPr sz="1000" b="0" i="0">
+              <a:rPr sz="1000" b="1" i="0">
                 <a:solidFill>
                   <a:srgbClr val="21295C"/>
                 </a:solidFill>
@@ -38564,7 +38381,7 @@
           </a:xfrm>
           <a:prstGeom prst="roundRect">
             <a:avLst>
-              <a:gd name="adj" fmla="val 10000"/>
+              <a:gd name="adj" fmla="val 35000"/>
             </a:avLst>
           </a:prstGeom>
           <a:solidFill>
@@ -38704,7 +38521,7 @@
               </a:lnSpc>
             </a:pPr>
             <a:r>
-              <a:rPr sz="1000" b="0" i="0">
+              <a:rPr sz="1000" b="1" i="0">
                 <a:solidFill>
                   <a:srgbClr val="21295C"/>
                 </a:solidFill>
@@ -38743,7 +38560,7 @@
               </a:lnSpc>
             </a:pPr>
             <a:r>
-              <a:rPr sz="1000" b="0" i="0">
+              <a:rPr sz="1000" b="1" i="0">
                 <a:solidFill>
                   <a:srgbClr val="21295C"/>
                 </a:solidFill>
@@ -38782,7 +38599,7 @@
               </a:lnSpc>
             </a:pPr>
             <a:r>
-              <a:rPr sz="1000" b="0" i="0">
+              <a:rPr sz="1000" b="1" i="0">
                 <a:solidFill>
                   <a:srgbClr val="21295C"/>
                 </a:solidFill>
@@ -38821,7 +38638,7 @@
               </a:lnSpc>
             </a:pPr>
             <a:r>
-              <a:rPr sz="1000" b="0" i="0">
+              <a:rPr sz="1000" b="1" i="0">
                 <a:solidFill>
                   <a:srgbClr val="21295C"/>
                 </a:solidFill>
@@ -38860,7 +38677,7 @@
               </a:lnSpc>
             </a:pPr>
             <a:r>
-              <a:rPr sz="1000" b="0" i="0">
+              <a:rPr sz="1000" b="1" i="0">
                 <a:solidFill>
                   <a:srgbClr val="21295C"/>
                 </a:solidFill>
@@ -38899,7 +38716,7 @@
               </a:lnSpc>
             </a:pPr>
             <a:r>
-              <a:rPr sz="1000" b="0" i="0">
+              <a:rPr sz="1000" b="1" i="0">
                 <a:solidFill>
                   <a:srgbClr val="21295C"/>
                 </a:solidFill>
@@ -38971,7 +38788,7 @@
           </a:xfrm>
           <a:prstGeom prst="roundRect">
             <a:avLst>
-              <a:gd name="adj" fmla="val 10000"/>
+              <a:gd name="adj" fmla="val 35000"/>
             </a:avLst>
           </a:prstGeom>
           <a:solidFill>
@@ -39111,7 +38928,7 @@
               </a:lnSpc>
             </a:pPr>
             <a:r>
-              <a:rPr sz="1000" b="0" i="0">
+              <a:rPr sz="1000" b="1" i="0">
                 <a:solidFill>
                   <a:srgbClr val="21295C"/>
                 </a:solidFill>
@@ -40572,7 +40389,7 @@
           </a:xfrm>
           <a:prstGeom prst="roundRect">
             <a:avLst>
-              <a:gd name="adj" fmla="val 10000"/>
+              <a:gd name="adj" fmla="val 33333"/>
             </a:avLst>
           </a:prstGeom>
           <a:solidFill>
@@ -40784,7 +40601,7 @@
           </a:xfrm>
           <a:prstGeom prst="roundRect">
             <a:avLst>
-              <a:gd name="adj" fmla="val 10000"/>
+              <a:gd name="adj" fmla="val 33333"/>
             </a:avLst>
           </a:prstGeom>
           <a:solidFill>
@@ -40996,7 +40813,7 @@
           </a:xfrm>
           <a:prstGeom prst="roundRect">
             <a:avLst>
-              <a:gd name="adj" fmla="val 10000"/>
+              <a:gd name="adj" fmla="val 33333"/>
             </a:avLst>
           </a:prstGeom>
           <a:solidFill>
@@ -41208,7 +41025,7 @@
           </a:xfrm>
           <a:prstGeom prst="roundRect">
             <a:avLst>
-              <a:gd name="adj" fmla="val 10000"/>
+              <a:gd name="adj" fmla="val 33333"/>
             </a:avLst>
           </a:prstGeom>
           <a:solidFill>
@@ -41420,7 +41237,7 @@
           </a:xfrm>
           <a:prstGeom prst="roundRect">
             <a:avLst>
-              <a:gd name="adj" fmla="val 10000"/>
+              <a:gd name="adj" fmla="val 33333"/>
             </a:avLst>
           </a:prstGeom>
           <a:solidFill>
@@ -41633,7 +41450,7 @@
           </a:xfrm>
           <a:prstGeom prst="roundRect">
             <a:avLst>
-              <a:gd name="adj" fmla="val 10000"/>
+              <a:gd name="adj" fmla="val 33333"/>
             </a:avLst>
           </a:prstGeom>
           <a:solidFill>
@@ -45557,7 +45374,7 @@
             <a:r>
               <a:rPr sz="2800" b="1" i="0">
                 <a:solidFill>
-                  <a:srgbClr val="F0AB00"/>
+                  <a:srgbClr val="21295C"/>
                 </a:solidFill>
                 <a:latin typeface="Arial"/>
               </a:rPr>

--- a/library/lectures/lec-01/rendered/lec-01.pptx
+++ b/library/lectures/lec-01/rendered/lec-01.pptx
@@ -45032,7 +45032,7 @@
               </a:lnSpc>
             </a:pPr>
             <a:r>
-              <a:rPr sz="2400" b="1" i="0">
+              <a:rPr sz="2300" b="1" i="0">
                 <a:solidFill>
                   <a:srgbClr val="21295C"/>
                 </a:solidFill>
@@ -45043,16 +45043,123 @@
           </a:p>
         </p:txBody>
       </p:sp>
-      <p:sp>
-        <p:nvSpPr>
-          <p:cNvPr id="3" name="Rounded Rectangle 2"/>
+      <p:pic>
+        <p:nvPicPr>
+          <p:cNvPr id="3" name="Picture 2" descr="lettvin-pitts-1959-crop.jpg"/>
+          <p:cNvPicPr>
+            <a:picLocks noChangeAspect="1"/>
+          </p:cNvPicPr>
+          <p:nvPr/>
+        </p:nvPicPr>
+        <p:blipFill>
+          <a:blip r:embed="rId2"/>
+          <a:stretch>
+            <a:fillRect/>
+          </a:stretch>
+        </p:blipFill>
+        <p:spPr>
+          <a:xfrm>
+            <a:off x="9877652" y="2148840"/>
+            <a:ext cx="1811122" cy="2103120"/>
+          </a:xfrm>
+          <a:prstGeom prst="rect">
+            <a:avLst/>
+          </a:prstGeom>
+        </p:spPr>
+      </p:pic>
+      <p:sp>
+        <p:nvSpPr>
+          <p:cNvPr id="4" name="Rectangle 3"/>
           <p:cNvSpPr/>
           <p:nvPr/>
         </p:nvSpPr>
         <p:spPr>
           <a:xfrm>
-            <a:off x="1005840" y="2286000"/>
-            <a:ext cx="3383280" cy="2148840"/>
+            <a:off x="9877652" y="2148840"/>
+            <a:ext cx="1811122" cy="2103120"/>
+          </a:xfrm>
+          <a:prstGeom prst="rect">
+            <a:avLst/>
+          </a:prstGeom>
+          <a:noFill/>
+          <a:ln w="19050">
+            <a:solidFill>
+              <a:srgbClr val="1C7293"/>
+            </a:solidFill>
+          </a:ln>
+          <a:effectLst/>
+        </p:spPr>
+        <p:style>
+          <a:lnRef idx="1">
+            <a:schemeClr val="accent1"/>
+          </a:lnRef>
+          <a:fillRef idx="3">
+            <a:schemeClr val="accent1"/>
+          </a:fillRef>
+          <a:effectRef idx="2">
+            <a:schemeClr val="accent1"/>
+          </a:effectRef>
+          <a:fontRef idx="minor">
+            <a:schemeClr val="lt1"/>
+          </a:fontRef>
+        </p:style>
+        <p:txBody>
+          <a:bodyPr rtlCol="0" anchor="ctr"/>
+          <a:lstStyle/>
+          <a:p>
+            <a:pPr algn="ctr"/>
+          </a:p>
+        </p:txBody>
+      </p:sp>
+      <p:sp>
+        <p:nvSpPr>
+          <p:cNvPr id="5" name="TextBox 4"/>
+          <p:cNvSpPr txBox="1"/>
+          <p:nvPr/>
+        </p:nvSpPr>
+        <p:spPr>
+          <a:xfrm>
+            <a:off x="9740492" y="4315968"/>
+            <a:ext cx="2085442" cy="594360"/>
+          </a:xfrm>
+          <a:prstGeom prst="rect">
+            <a:avLst/>
+          </a:prstGeom>
+          <a:noFill/>
+        </p:spPr>
+        <p:txBody>
+          <a:bodyPr wrap="square" lIns="0" rIns="0" tIns="0" bIns="0" anchor="t">
+            <a:spAutoFit/>
+          </a:bodyPr>
+          <a:lstStyle/>
+          <a:p>
+            <a:pPr algn="l">
+              <a:lnSpc>
+                <a:spcPct val="110000"/>
+              </a:lnSpc>
+            </a:pPr>
+            <a:r>
+              <a:rPr sz="780" b="0" i="1">
+                <a:solidFill>
+                  <a:srgbClr val="6B7685"/>
+                </a:solidFill>
+                <a:latin typeface="Arial"/>
+              </a:rPr>
+              <a:t>Питтс (справа) и Леттвин, 1959 — опыт с лягушкой в MIT (это НЕ фото 1943 г.). Wikimedia Commons, CC BY-SA 3.0.</a:t>
+            </a:r>
+          </a:p>
+        </p:txBody>
+      </p:sp>
+      <p:sp>
+        <p:nvSpPr>
+          <p:cNvPr id="6" name="Rounded Rectangle 5"/>
+          <p:cNvSpPr/>
+          <p:nvPr/>
+        </p:nvSpPr>
+        <p:spPr>
+          <a:xfrm>
+            <a:off x="502920" y="2148840"/>
+            <a:ext cx="3841546" cy="2148840"/>
           </a:xfrm>
           <a:prstGeom prst="roundRect">
             <a:avLst>
@@ -45093,14 +45200,14 @@
       </p:sp>
       <p:sp>
         <p:nvSpPr>
-          <p:cNvPr id="4" name="TextBox 3"/>
-          <p:cNvSpPr txBox="1"/>
-          <p:nvPr/>
-        </p:nvSpPr>
-        <p:spPr>
-          <a:xfrm>
-            <a:off x="1005840" y="2542032"/>
-            <a:ext cx="3383280" cy="822960"/>
+          <p:cNvPr id="7" name="TextBox 6"/>
+          <p:cNvSpPr txBox="1"/>
+          <p:nvPr/>
+        </p:nvSpPr>
+        <p:spPr>
+          <a:xfrm>
+            <a:off x="502920" y="2404872"/>
+            <a:ext cx="3841546" cy="822960"/>
           </a:xfrm>
           <a:prstGeom prst="rect">
             <a:avLst/>
@@ -45119,7 +45226,7 @@
               </a:lnSpc>
             </a:pPr>
             <a:r>
-              <a:rPr sz="5200" b="1" i="0">
+              <a:rPr sz="4600" b="1" i="0">
                 <a:solidFill>
                   <a:srgbClr val="1C7293"/>
                 </a:solidFill>
@@ -45132,14 +45239,14 @@
       </p:sp>
       <p:sp>
         <p:nvSpPr>
-          <p:cNvPr id="5" name="TextBox 4"/>
-          <p:cNvSpPr txBox="1"/>
-          <p:nvPr/>
-        </p:nvSpPr>
-        <p:spPr>
-          <a:xfrm>
-            <a:off x="1280160" y="3474720"/>
-            <a:ext cx="2834640" cy="822960"/>
+          <p:cNvPr id="8" name="TextBox 7"/>
+          <p:cNvSpPr txBox="1"/>
+          <p:nvPr/>
+        </p:nvSpPr>
+        <p:spPr>
+          <a:xfrm>
+            <a:off x="722376" y="3319272"/>
+            <a:ext cx="3402634" cy="868680"/>
           </a:xfrm>
           <a:prstGeom prst="rect">
             <a:avLst/>
@@ -45154,11 +45261,11 @@
           <a:p>
             <a:pPr algn="ctr">
               <a:lnSpc>
-                <a:spcPct val="125000"/>
-              </a:lnSpc>
-            </a:pPr>
-            <a:r>
-              <a:rPr sz="1200" b="0" i="1">
+                <a:spcPct val="122000"/>
+              </a:lnSpc>
+            </a:pPr>
+            <a:r>
+              <a:rPr sz="1150" b="0" i="1">
                 <a:solidFill>
                   <a:srgbClr val="21295C"/>
                 </a:solidFill>
@@ -45173,14 +45280,14 @@
       </p:sp>
       <p:sp>
         <p:nvSpPr>
-          <p:cNvPr id="6" name="Rounded Rectangle 5"/>
+          <p:cNvPr id="9" name="Rounded Rectangle 8"/>
           <p:cNvSpPr/>
           <p:nvPr/>
         </p:nvSpPr>
         <p:spPr>
           <a:xfrm>
-            <a:off x="7802575" y="2286000"/>
-            <a:ext cx="3383280" cy="2148840"/>
+            <a:off x="5533186" y="2148840"/>
+            <a:ext cx="3841546" cy="2148840"/>
           </a:xfrm>
           <a:prstGeom prst="roundRect">
             <a:avLst>
@@ -45221,14 +45328,14 @@
       </p:sp>
       <p:sp>
         <p:nvSpPr>
-          <p:cNvPr id="7" name="TextBox 6"/>
-          <p:cNvSpPr txBox="1"/>
-          <p:nvPr/>
-        </p:nvSpPr>
-        <p:spPr>
-          <a:xfrm>
-            <a:off x="7802575" y="2542032"/>
-            <a:ext cx="3383280" cy="822960"/>
+          <p:cNvPr id="10" name="TextBox 9"/>
+          <p:cNvSpPr txBox="1"/>
+          <p:nvPr/>
+        </p:nvSpPr>
+        <p:spPr>
+          <a:xfrm>
+            <a:off x="5533186" y="2404872"/>
+            <a:ext cx="3841546" cy="822960"/>
           </a:xfrm>
           <a:prstGeom prst="rect">
             <a:avLst/>
@@ -45247,7 +45354,7 @@
               </a:lnSpc>
             </a:pPr>
             <a:r>
-              <a:rPr sz="5200" b="1" i="0">
+              <a:rPr sz="4600" b="1" i="0">
                 <a:solidFill>
                   <a:srgbClr val="065A82"/>
                 </a:solidFill>
@@ -45260,14 +45367,14 @@
       </p:sp>
       <p:sp>
         <p:nvSpPr>
-          <p:cNvPr id="8" name="TextBox 7"/>
-          <p:cNvSpPr txBox="1"/>
-          <p:nvPr/>
-        </p:nvSpPr>
-        <p:spPr>
-          <a:xfrm>
-            <a:off x="8076895" y="3474720"/>
-            <a:ext cx="2834640" cy="822960"/>
+          <p:cNvPr id="11" name="TextBox 10"/>
+          <p:cNvSpPr txBox="1"/>
+          <p:nvPr/>
+        </p:nvSpPr>
+        <p:spPr>
+          <a:xfrm>
+            <a:off x="5752642" y="3319272"/>
+            <a:ext cx="3402634" cy="868680"/>
           </a:xfrm>
           <a:prstGeom prst="rect">
             <a:avLst/>
@@ -45282,11 +45389,11 @@
           <a:p>
             <a:pPr algn="ctr">
               <a:lnSpc>
-                <a:spcPct val="125000"/>
-              </a:lnSpc>
-            </a:pPr>
-            <a:r>
-              <a:rPr sz="1200" b="0" i="1">
+                <a:spcPct val="122000"/>
+              </a:lnSpc>
+            </a:pPr>
+            <a:r>
+              <a:rPr sz="1150" b="0" i="1">
                 <a:solidFill>
                   <a:srgbClr val="21295C"/>
                 </a:solidFill>
@@ -45300,14 +45407,14 @@
       </p:sp>
       <p:sp>
         <p:nvSpPr>
-          <p:cNvPr id="9" name="Rounded Rectangle 8"/>
+          <p:cNvPr id="12" name="Rounded Rectangle 11"/>
           <p:cNvSpPr/>
           <p:nvPr/>
         </p:nvSpPr>
         <p:spPr>
           <a:xfrm>
-            <a:off x="4526280" y="2788920"/>
-            <a:ext cx="3139135" cy="182880"/>
+            <a:off x="4481626" y="2651760"/>
+            <a:ext cx="914399" cy="182880"/>
           </a:xfrm>
           <a:prstGeom prst="roundRect">
             <a:avLst>
@@ -45346,14 +45453,14 @@
       </p:sp>
       <p:sp>
         <p:nvSpPr>
-          <p:cNvPr id="10" name="TextBox 9"/>
-          <p:cNvSpPr txBox="1"/>
-          <p:nvPr/>
-        </p:nvSpPr>
-        <p:spPr>
-          <a:xfrm>
-            <a:off x="4526280" y="2240280"/>
-            <a:ext cx="3139135" cy="457200"/>
+          <p:cNvPr id="13" name="TextBox 12"/>
+          <p:cNvSpPr txBox="1"/>
+          <p:nvPr/>
+        </p:nvSpPr>
+        <p:spPr>
+          <a:xfrm>
+            <a:off x="4253026" y="2103120"/>
+            <a:ext cx="1371599" cy="457200"/>
           </a:xfrm>
           <a:prstGeom prst="rect">
             <a:avLst/>
@@ -45372,7 +45479,7 @@
               </a:lnSpc>
             </a:pPr>
             <a:r>
-              <a:rPr sz="2800" b="1" i="0">
+              <a:rPr sz="2000" b="1" i="0">
                 <a:solidFill>
                   <a:srgbClr val="21295C"/>
                 </a:solidFill>
@@ -45385,7 +45492,7 @@
       </p:sp>
       <p:sp>
         <p:nvSpPr>
-          <p:cNvPr id="11" name="Rounded Rectangle 10"/>
+          <p:cNvPr id="14" name="Rounded Rectangle 13"/>
           <p:cNvSpPr/>
           <p:nvPr/>
         </p:nvSpPr>
@@ -45433,7 +45540,7 @@
       </p:sp>
       <p:sp>
         <p:nvSpPr>
-          <p:cNvPr id="12" name="TextBox 11"/>
+          <p:cNvPr id="15" name="TextBox 14"/>
           <p:cNvSpPr txBox="1"/>
           <p:nvPr/>
         </p:nvSpPr>
@@ -45472,7 +45579,7 @@
       </p:sp>
       <p:sp>
         <p:nvSpPr>
-          <p:cNvPr id="13" name="TextBox 12"/>
+          <p:cNvPr id="16" name="TextBox 15"/>
           <p:cNvSpPr txBox="1"/>
           <p:nvPr/>
         </p:nvSpPr>

--- a/library/lectures/lec-01/rendered/lec-01.pptx
+++ b/library/lectures/lec-01/rendered/lec-01.pptx
@@ -11,6 +11,9 @@
     <p:sldId id="259" r:id="rId11"/>
     <p:sldId id="260" r:id="rId12"/>
     <p:sldId id="261" r:id="rId13"/>
+    <p:sldId id="288" r:id="rId40"/>
+    <p:sldId id="289" r:id="rId41"/>
+    <p:sldId id="292" r:id="rId44"/>
     <p:sldId id="262" r:id="rId14"/>
     <p:sldId id="263" r:id="rId15"/>
     <p:sldId id="264" r:id="rId16"/>
@@ -19,12 +22,11 @@
     <p:sldId id="267" r:id="rId19"/>
     <p:sldId id="268" r:id="rId20"/>
     <p:sldId id="269" r:id="rId21"/>
+    <p:sldId id="271" r:id="rId23"/>
     <p:sldId id="270" r:id="rId22"/>
-    <p:sldId id="271" r:id="rId23"/>
     <p:sldId id="272" r:id="rId24"/>
     <p:sldId id="273" r:id="rId25"/>
     <p:sldId id="274" r:id="rId26"/>
-    <p:sldId id="275" r:id="rId27"/>
     <p:sldId id="276" r:id="rId28"/>
     <p:sldId id="277" r:id="rId29"/>
     <p:sldId id="278" r:id="rId30"/>
@@ -37,8 +39,6 @@
     <p:sldId id="285" r:id="rId37"/>
     <p:sldId id="286" r:id="rId38"/>
     <p:sldId id="287" r:id="rId39"/>
-    <p:sldId id="288" r:id="rId40"/>
-    <p:sldId id="289" r:id="rId41"/>
     <p:sldId id="290" r:id="rId42"/>
     <p:sldId id="291" r:id="rId43"/>
   </p:sldIdLst>
@@ -1620,100 +1620,6 @@
 </p:notes>
 </file>
 
-<file path=ppt/notesSlides/notesSlide20.xml><?xml version="1.0" encoding="utf-8"?>
-<p:notes xmlns:a="http://schemas.openxmlformats.org/drawingml/2006/main" xmlns:p="http://schemas.openxmlformats.org/presentationml/2006/main" xmlns:r="http://schemas.openxmlformats.org/officeDocument/2006/relationships">
-  <p:cSld>
-    <p:spTree>
-      <p:nvGrpSpPr>
-        <p:cNvPr id="1" name=""/>
-        <p:cNvGrpSpPr/>
-        <p:nvPr/>
-      </p:nvGrpSpPr>
-      <p:grpSpPr>
-        <a:xfrm>
-          <a:off x="0" y="0"/>
-          <a:ext cx="0" cy="0"/>
-          <a:chOff x="0" y="0"/>
-          <a:chExt cx="0" cy="0"/>
-        </a:xfrm>
-      </p:grpSpPr>
-      <p:sp>
-        <p:nvSpPr>
-          <p:cNvPr id="2" name="Slide Image Placeholder 1"/>
-          <p:cNvSpPr>
-            <a:spLocks noGrp="1"/>
-          </p:cNvSpPr>
-          <p:nvPr>
-            <p:ph type="sldImg" idx="2"/>
-          </p:nvPr>
-        </p:nvSpPr>
-        <p:spPr/>
-      </p:sp>
-      <p:sp>
-        <p:nvSpPr>
-          <p:cNvPr id="3" name="Notes Placeholder 2"/>
-          <p:cNvSpPr>
-            <a:spLocks noGrp="1"/>
-          </p:cNvSpPr>
-          <p:nvPr>
-            <p:ph type="body" idx="3" sz="quarter"/>
-          </p:nvPr>
-        </p:nvSpPr>
-        <p:spPr/>
-        <p:txBody>
-          <a:bodyPr/>
-          <a:lstStyle/>
-          <a:p>
-            <a:r>
-              <a:t>Чат — это модель, обёрнутая в текстовый интерфейс с памятью диалога в пределах сессии. Пользователь пишет сообщение, модель отвечает, история обоих сообщений включается в контекст следующего обращения. Это даёт ощущение разговора и позволяет уточнять задачу пошагово, что радикально меняет паттерн использования.</a:t>
-            </a:r>
-          </a:p>
-          <a:p/>
-          <a:p>
-            <a:r>
-              <a:t>Современные чаты — это в первую очередь LLM-чаты, хотя бывают и мультимодальные: с возможностью передавать изображения, аудио, файлы. Канонические продукты вы знаете: ChatGPT, Claude, Gemini, DeepSeek Chat, GigaChat, YandexGPT, Mistral Le Chat. Между ними различия в качестве для разных задач, в длине контекстного окна, в стоимости, в доступности модальностей — но базовый паттерн взаимодействия один.</a:t>
-            </a:r>
-          </a:p>
-          <a:p/>
-          <a:p>
-            <a:r>
-              <a:t>Возьмём конкретный пример. Инженер получает непонятный нормативный документ — скажем, ТЗ от смежного отдела с массой ссылок на стандарты и сложными формулировками. Задача — разобраться и составить чек-лист для собственной работы. Это типовой кейс для чата: разовая задача, требующая диалога, с уточнениями по ходу. Здесь не нужна отдельная специализированная модель, потому что нет потока однотипных задач. Не нужен агент, потому что не требуется автоматически открывать файлы и API. И нет специализированного приложения. Чат — оптимальный инструмент.</a:t>
-            </a:r>
-          </a:p>
-          <a:p/>
-          <a:p>
-            <a:r>
-              <a:t>Важная оговорка для промышленных систем. Чистые чаты в том виде, как они есть «из коробки» — то есть просто LLM плюс UI плюс короткая память сессии — в корпоративной среде почти не встречаются. Почти везде, где речь идёт о реальном внедрении, чат расширен до агента: хотя бы для того, чтобы хранить долгосрочную память между сессиями, или для того, чтобы искать ответ в корпоративной базе знаний через RAG (retrieval-augmented generation). Архитектуру агента — что именно добавляется к чату — разберём на следующем слайде.</a:t>
-            </a:r>
-          </a:p>
-          <a:p/>
-          <a:p>
-            <a:r>
-              <a:t>Выбор чата — это инженерное решение о точке на шкале взаимодействия: где правильно выбран тип взаимодействия с AI, там система работает предсказуемо.</a:t>
-            </a:r>
-          </a:p>
-        </p:txBody>
-      </p:sp>
-      <p:sp>
-        <p:nvSpPr>
-          <p:cNvPr id="4" name="Slide Number Placeholder 3"/>
-          <p:cNvSpPr>
-            <a:spLocks noGrp="1"/>
-          </p:cNvSpPr>
-          <p:nvPr>
-            <p:ph type="sldNum" idx="5" sz="quarter"/>
-          </p:nvPr>
-        </p:nvSpPr>
-        <p:spPr/>
-      </p:sp>
-    </p:spTree>
-  </p:cSld>
-  <p:clrMapOvr>
-    <a:masterClrMapping/>
-  </p:clrMapOvr>
-</p:notes>
-</file>
-
 <file path=ppt/notesSlides/notesSlide21.xml><?xml version="1.0" encoding="utf-8"?>
 <p:notes xmlns:a="http://schemas.openxmlformats.org/drawingml/2006/main" xmlns:p="http://schemas.openxmlformats.org/presentationml/2006/main" xmlns:r="http://schemas.openxmlformats.org/officeDocument/2006/relationships">
   <p:cSld>
@@ -3336,6 +3242,88 @@
           <a:p>
             <a:r>
               <a:t>Если вопросов нет — не страшно. До встречи на следующей лекции.</a:t>
+            </a:r>
+          </a:p>
+        </p:txBody>
+      </p:sp>
+      <p:sp>
+        <p:nvSpPr>
+          <p:cNvPr id="4" name="Slide Number Placeholder 3"/>
+          <p:cNvSpPr>
+            <a:spLocks noGrp="1"/>
+          </p:cNvSpPr>
+          <p:nvPr>
+            <p:ph type="sldNum" idx="5" sz="quarter"/>
+          </p:nvPr>
+        </p:nvSpPr>
+        <p:spPr/>
+      </p:sp>
+    </p:spTree>
+  </p:cSld>
+  <p:clrMapOvr>
+    <a:masterClrMapping/>
+  </p:clrMapOvr>
+</p:notes>
+</file>
+
+<file path=ppt/notesSlides/notesSlide37.xml><?xml version="1.0" encoding="utf-8"?>
+<p:notes xmlns:a="http://schemas.openxmlformats.org/drawingml/2006/main" xmlns:p="http://schemas.openxmlformats.org/presentationml/2006/main" xmlns:r="http://schemas.openxmlformats.org/officeDocument/2006/relationships">
+  <p:cSld>
+    <p:spTree>
+      <p:nvGrpSpPr>
+        <p:cNvPr id="1" name=""/>
+        <p:cNvGrpSpPr/>
+        <p:nvPr/>
+      </p:nvGrpSpPr>
+      <p:grpSpPr>
+        <a:xfrm>
+          <a:off x="0" y="0"/>
+          <a:ext cx="0" cy="0"/>
+          <a:chOff x="0" y="0"/>
+          <a:chExt cx="0" cy="0"/>
+        </a:xfrm>
+      </p:grpSpPr>
+      <p:sp>
+        <p:nvSpPr>
+          <p:cNvPr id="2" name="Slide Image Placeholder 1"/>
+          <p:cNvSpPr>
+            <a:spLocks noGrp="1"/>
+          </p:cNvSpPr>
+          <p:nvPr>
+            <p:ph type="sldImg" idx="2"/>
+          </p:nvPr>
+        </p:nvSpPr>
+        <p:spPr/>
+      </p:sp>
+      <p:sp>
+        <p:nvSpPr>
+          <p:cNvPr id="3" name="Notes Placeholder 2"/>
+          <p:cNvSpPr>
+            <a:spLocks noGrp="1"/>
+          </p:cNvSpPr>
+          <p:nvPr>
+            <p:ph type="body" idx="3" sz="quarter"/>
+          </p:nvPr>
+        </p:nvSpPr>
+        <p:spPr/>
+        <p:txBody>
+          <a:bodyPr/>
+          <a:lstStyle/>
+          <a:p>
+            <a:r>
+              <a:t>Всё общение по курсу — в чате в мессенджере MAX. Отсканируйте QR-код камерой телефона или перейдите по ссылке max.ru/join/sHoHlhI4jvW_swcq5ZLowvz6G94m0IMhAwngxuxsEpI и вступите в чат до первой лекции.</a:t>
+            </a:r>
+          </a:p>
+          <a:p/>
+          <a:p>
+            <a:r>
+              <a:t>Что там будет. Во-первых, объявления: расписание, любые изменения, важные новости — всё публикуется в чате, отдельно письма ждать не нужно. Во-вторых, материалы: слайды лекций и семинаров я выкладываю туда по мере проведения занятий, так что всё собрано в одном месте. В-третьих, вопросы: если что-то непонятно между парами — спрашивайте в чате, не обязательно копить до семинара.</a:t>
+            </a:r>
+          </a:p>
+          <a:p/>
+          <a:p>
+            <a:r>
+              <a:t>Пожалуйста, вступите сегодня — так вы точно не пропустите первое объявление.</a:t>
             </a:r>
           </a:p>
         </p:txBody>
@@ -7493,7 +7481,7 @@
         </p:nvSpPr>
         <p:spPr>
           <a:xfrm>
-            <a:off x="2607564" y="2459736"/>
+            <a:off x="2121408" y="2459736"/>
             <a:ext cx="73152" cy="201168"/>
           </a:xfrm>
           <a:prstGeom prst="rect">
@@ -7538,7 +7526,7 @@
         <p:spPr>
           <a:xfrm>
             <a:off x="914400" y="1874519"/>
-            <a:ext cx="3459480" cy="384048"/>
+            <a:ext cx="2487168" cy="658368"/>
           </a:xfrm>
           <a:prstGeom prst="rect">
             <a:avLst/>
@@ -7557,7 +7545,7 @@
               </a:lnSpc>
             </a:pPr>
             <a:r>
-              <a:rPr sz="1250" b="0" i="0">
+              <a:rPr sz="1100" b="0" i="0">
                 <a:solidFill>
                   <a:srgbClr val="21295C"/>
                 </a:solidFill>
@@ -7577,7 +7565,7 @@
         <p:spPr>
           <a:xfrm>
             <a:off x="914400" y="2606040"/>
-            <a:ext cx="3459480" cy="292608"/>
+            <a:ext cx="2487168" cy="292608"/>
           </a:xfrm>
           <a:prstGeom prst="rect">
             <a:avLst/>
@@ -7615,7 +7603,7 @@
         </p:nvSpPr>
         <p:spPr>
           <a:xfrm>
-            <a:off x="6067044" y="2459736"/>
+            <a:off x="7333488" y="2459736"/>
             <a:ext cx="73152" cy="201168"/>
           </a:xfrm>
           <a:prstGeom prst="rect">
@@ -7659,8 +7647,8 @@
         </p:nvSpPr>
         <p:spPr>
           <a:xfrm>
-            <a:off x="4373880" y="1874519"/>
-            <a:ext cx="3459480" cy="384048"/>
+            <a:off x="6126480" y="1874519"/>
+            <a:ext cx="2487168" cy="658368"/>
           </a:xfrm>
           <a:prstGeom prst="rect">
             <a:avLst/>
@@ -7679,7 +7667,7 @@
               </a:lnSpc>
             </a:pPr>
             <a:r>
-              <a:rPr sz="1250" b="0" i="0">
+              <a:rPr sz="1100" b="0" i="0">
                 <a:solidFill>
                   <a:srgbClr val="21295C"/>
                 </a:solidFill>
@@ -7698,8 +7686,8 @@
         </p:nvSpPr>
         <p:spPr>
           <a:xfrm>
-            <a:off x="4373880" y="2606040"/>
-            <a:ext cx="3459480" cy="292608"/>
+            <a:off x="6126480" y="2606040"/>
+            <a:ext cx="2487168" cy="292608"/>
           </a:xfrm>
           <a:prstGeom prst="rect">
             <a:avLst/>
@@ -7737,7 +7725,7 @@
         </p:nvSpPr>
         <p:spPr>
           <a:xfrm>
-            <a:off x="9526523" y="2459736"/>
+            <a:off x="9939528" y="2459736"/>
             <a:ext cx="73152" cy="201168"/>
           </a:xfrm>
           <a:prstGeom prst="rect">
@@ -7781,8 +7769,8 @@
         </p:nvSpPr>
         <p:spPr>
           <a:xfrm>
-            <a:off x="7833360" y="1874519"/>
-            <a:ext cx="3459480" cy="384048"/>
+            <a:off x="8732520" y="1874519"/>
+            <a:ext cx="2487168" cy="658368"/>
           </a:xfrm>
           <a:prstGeom prst="rect">
             <a:avLst/>
@@ -7801,7 +7789,7 @@
               </a:lnSpc>
             </a:pPr>
             <a:r>
-              <a:rPr sz="1250" b="0" i="0">
+              <a:rPr sz="1100" b="0" i="0">
                 <a:solidFill>
                   <a:srgbClr val="21295C"/>
                 </a:solidFill>
@@ -7820,8 +7808,8 @@
         </p:nvSpPr>
         <p:spPr>
           <a:xfrm>
-            <a:off x="7833360" y="2606040"/>
-            <a:ext cx="3459480" cy="292608"/>
+            <a:off x="8732520" y="2606040"/>
+            <a:ext cx="2487168" cy="292608"/>
           </a:xfrm>
           <a:prstGeom prst="rect">
             <a:avLst/>
@@ -9108,6 +9096,128 @@
               </a:rPr>
               <a:t>★ 2017 — Vaswani и 7 соавторов (Shazeer, Parmar, Uszkoreit, Jones, Gomez, Kaiser, Polosukhin) вводят механизм self-attention — основу всех современных LLM. На май 2026 у статьи свыше 160 000 цитирований.</a:t>
             </a:r>
+          </a:p>
+        </p:txBody>
+      </p:sp>
+      <p:sp>
+        <p:nvSpPr>
+          <p:cNvPr id="8" name="TextBox 7"/>
+          <p:cNvSpPr txBox="1"/>
+          <p:nvPr/>
+        </p:nvSpPr>
+        <p:spPr>
+          <a:xfrm>
+            <a:off x="3520440" y="1874519"/>
+            <a:ext cx="2487168" cy="658368"/>
+          </a:xfrm>
+          <a:prstGeom prst="rect">
+            <a:avLst/>
+          </a:prstGeom>
+          <a:noFill/>
+        </p:spPr>
+        <p:txBody>
+          <a:bodyPr wrap="square" lIns="0" rIns="0" tIns="0" bIns="0" anchor="t">
+            <a:spAutoFit/>
+          </a:bodyPr>
+          <a:lstStyle/>
+          <a:p>
+            <a:pPr algn="ctr">
+              <a:lnSpc>
+                <a:spcPct val="105000"/>
+              </a:lnSpc>
+            </a:pPr>
+            <a:r>
+              <a:rPr sz="1100" b="0" i="0">
+                <a:solidFill>
+                  <a:srgbClr val="21295C"/>
+                </a:solidFill>
+                <a:latin typeface="Arial"/>
+              </a:rPr>
+              <a:t>Дартмутский семинар — рождение термина «AI»</a:t>
+            </a:r>
+          </a:p>
+        </p:txBody>
+      </p:sp>
+      <p:sp>
+        <p:nvSpPr>
+          <p:cNvPr id="9" name="TextBox 8"/>
+          <p:cNvSpPr txBox="1"/>
+          <p:nvPr/>
+        </p:nvSpPr>
+        <p:spPr>
+          <a:xfrm>
+            <a:off x="3520440" y="2606040"/>
+            <a:ext cx="2487168" cy="292608"/>
+          </a:xfrm>
+          <a:prstGeom prst="rect">
+            <a:avLst/>
+          </a:prstGeom>
+          <a:noFill/>
+        </p:spPr>
+        <p:txBody>
+          <a:bodyPr wrap="square" lIns="0" rIns="0" tIns="0" bIns="0" anchor="t">
+            <a:spAutoFit/>
+          </a:bodyPr>
+          <a:lstStyle/>
+          <a:p>
+            <a:pPr algn="ctr">
+              <a:lnSpc>
+                <a:spcPct val="115000"/>
+              </a:lnSpc>
+            </a:pPr>
+            <a:r>
+              <a:rPr sz="1450" b="1" i="0">
+                <a:solidFill>
+                  <a:srgbClr val="1C7293"/>
+                </a:solidFill>
+                <a:latin typeface="Arial"/>
+              </a:rPr>
+              <a:t>1956</a:t>
+            </a:r>
+          </a:p>
+        </p:txBody>
+      </p:sp>
+      <p:sp>
+        <p:nvSpPr>
+          <p:cNvPr id="7" name="Rectangle 6"/>
+          <p:cNvSpPr/>
+          <p:nvPr/>
+        </p:nvSpPr>
+        <p:spPr>
+          <a:xfrm>
+            <a:off x="4727448" y="2459736"/>
+            <a:ext cx="73152" cy="201168"/>
+          </a:xfrm>
+          <a:prstGeom prst="rect">
+            <a:avLst/>
+          </a:prstGeom>
+          <a:solidFill>
+            <a:srgbClr val="1C7293"/>
+          </a:solidFill>
+          <a:ln>
+            <a:noFill/>
+          </a:ln>
+          <a:effectLst/>
+        </p:spPr>
+        <p:style>
+          <a:lnRef idx="1">
+            <a:schemeClr val="accent1"/>
+          </a:lnRef>
+          <a:fillRef idx="3">
+            <a:schemeClr val="accent1"/>
+          </a:fillRef>
+          <a:effectRef idx="2">
+            <a:schemeClr val="accent1"/>
+          </a:effectRef>
+          <a:fontRef idx="minor">
+            <a:schemeClr val="lt1"/>
+          </a:fontRef>
+        </p:style>
+        <p:txBody>
+          <a:bodyPr rtlCol="0" anchor="ctr"/>
+          <a:lstStyle/>
+          <a:p>
+            <a:pPr algn="ctr"/>
           </a:p>
         </p:txBody>
       </p:sp>
@@ -10266,7 +10376,7 @@
                 </a:solidFill>
                 <a:latin typeface="Arial"/>
               </a:rPr>
-              <a:t>AI стал инфраструктурой за 3 года: 900M пользователей, 51% разработчиков ежедневно, 46% Copilot-кода.</a:t>
+              <a:t>AI стал инфраструктурой за 3 года: ~1 млрд пользователей, 51% разработчиков ежедневно, 46% Copilot-кода.</a:t>
             </a:r>
           </a:p>
         </p:txBody>
@@ -10377,7 +10487,7 @@
                 </a:solidFill>
                 <a:latin typeface="Arial"/>
               </a:rPr>
-              <a:t>900M</a:t>
+              <a:t>1B</a:t>
             </a:r>
           </a:p>
         </p:txBody>
@@ -10455,7 +10565,7 @@
                 </a:solidFill>
                 <a:latin typeface="Arial"/>
               </a:rPr>
-              <a:t>ChatGPT, февраль 2026</a:t>
+              <a:t>ChatGPT, август 2026</a:t>
             </a:r>
           </a:p>
         </p:txBody>
@@ -21866,707 +21976,6 @@
 </p:sld>
 </file>
 
-<file path=ppt/slides/slide20.xml><?xml version="1.0" encoding="utf-8"?>
-<p:sld xmlns:a="http://schemas.openxmlformats.org/drawingml/2006/main" xmlns:p="http://schemas.openxmlformats.org/presentationml/2006/main" xmlns:r="http://schemas.openxmlformats.org/officeDocument/2006/relationships">
-  <p:cSld>
-    <p:spTree>
-      <p:nvGrpSpPr>
-        <p:cNvPr id="1" name=""/>
-        <p:cNvGrpSpPr/>
-        <p:nvPr/>
-      </p:nvGrpSpPr>
-      <p:grpSpPr/>
-      <p:sp>
-        <p:nvSpPr>
-          <p:cNvPr id="2" name="Rounded Rectangle 1"/>
-          <p:cNvSpPr/>
-          <p:nvPr/>
-        </p:nvSpPr>
-        <p:spPr>
-          <a:xfrm>
-            <a:off x="502920" y="320040"/>
-            <a:ext cx="758952" cy="384048"/>
-          </a:xfrm>
-          <a:prstGeom prst="roundRect">
-            <a:avLst>
-              <a:gd name="adj" fmla="val 50000"/>
-            </a:avLst>
-          </a:prstGeom>
-          <a:solidFill>
-            <a:srgbClr val="21295C"/>
-          </a:solidFill>
-          <a:ln>
-            <a:noFill/>
-          </a:ln>
-          <a:effectLst/>
-        </p:spPr>
-        <p:style>
-          <a:lnRef idx="1">
-            <a:schemeClr val="accent1"/>
-          </a:lnRef>
-          <a:fillRef idx="3">
-            <a:schemeClr val="accent1"/>
-          </a:fillRef>
-          <a:effectRef idx="2">
-            <a:schemeClr val="accent1"/>
-          </a:effectRef>
-          <a:fontRef idx="minor">
-            <a:schemeClr val="lt1"/>
-          </a:fontRef>
-        </p:style>
-        <p:txBody>
-          <a:bodyPr rtlCol="0" anchor="ctr" lIns="45720" rIns="45720" tIns="36576" bIns="36576" wrap="none"/>
-          <a:lstStyle/>
-          <a:p>
-            <a:pPr algn="ctr"/>
-            <a:r>
-              <a:rPr sz="1300" b="1">
-                <a:solidFill>
-                  <a:srgbClr val="FFFFFF"/>
-                </a:solidFill>
-                <a:latin typeface="Arial"/>
-              </a:rPr>
-              <a:t>ЧАТ</a:t>
-            </a:r>
-          </a:p>
-        </p:txBody>
-      </p:sp>
-      <p:sp>
-        <p:nvSpPr>
-          <p:cNvPr id="3" name="TextBox 2"/>
-          <p:cNvSpPr txBox="1"/>
-          <p:nvPr/>
-        </p:nvSpPr>
-        <p:spPr>
-          <a:xfrm>
-            <a:off x="502920" y="777240"/>
-            <a:ext cx="11247120" cy="1051560"/>
-          </a:xfrm>
-          <a:prstGeom prst="rect">
-            <a:avLst/>
-          </a:prstGeom>
-          <a:noFill/>
-        </p:spPr>
-        <p:txBody>
-          <a:bodyPr wrap="square" lIns="0" rIns="0" tIns="0" bIns="0" anchor="t">
-            <a:spAutoFit/>
-          </a:bodyPr>
-          <a:lstStyle/>
-          <a:p>
-            <a:pPr algn="l">
-              <a:lnSpc>
-                <a:spcPct val="118000"/>
-              </a:lnSpc>
-            </a:pPr>
-            <a:r>
-              <a:rPr sz="2800" b="1" i="0">
-                <a:solidFill>
-                  <a:srgbClr val="21295C"/>
-                </a:solidFill>
-                <a:latin typeface="Arial"/>
-              </a:rPr>
-              <a:t>Чат = модель + интерфейс + память диалога.</a:t>
-            </a:r>
-          </a:p>
-        </p:txBody>
-      </p:sp>
-      <p:sp>
-        <p:nvSpPr>
-          <p:cNvPr id="4" name="Rounded Rectangle 3"/>
-          <p:cNvSpPr/>
-          <p:nvPr/>
-        </p:nvSpPr>
-        <p:spPr>
-          <a:xfrm>
-            <a:off x="502920" y="1965960"/>
-            <a:ext cx="5943600" cy="4114800"/>
-          </a:xfrm>
-          <a:prstGeom prst="roundRect">
-            <a:avLst>
-              <a:gd name="adj" fmla="val 7407"/>
-            </a:avLst>
-          </a:prstGeom>
-          <a:solidFill>
-            <a:srgbClr val="F4F7FA"/>
-          </a:solidFill>
-          <a:ln w="19050">
-            <a:solidFill>
-              <a:srgbClr val="1C7293"/>
-            </a:solidFill>
-          </a:ln>
-          <a:effectLst/>
-        </p:spPr>
-        <p:style>
-          <a:lnRef idx="1">
-            <a:schemeClr val="accent1"/>
-          </a:lnRef>
-          <a:fillRef idx="3">
-            <a:schemeClr val="accent1"/>
-          </a:fillRef>
-          <a:effectRef idx="2">
-            <a:schemeClr val="accent1"/>
-          </a:effectRef>
-          <a:fontRef idx="minor">
-            <a:schemeClr val="lt1"/>
-          </a:fontRef>
-        </p:style>
-        <p:txBody>
-          <a:bodyPr rtlCol="0" anchor="ctr"/>
-          <a:lstStyle/>
-          <a:p>
-            <a:pPr algn="ctr"/>
-          </a:p>
-        </p:txBody>
-      </p:sp>
-      <p:sp>
-        <p:nvSpPr>
-          <p:cNvPr id="5" name="TextBox 4"/>
-          <p:cNvSpPr txBox="1"/>
-          <p:nvPr/>
-        </p:nvSpPr>
-        <p:spPr>
-          <a:xfrm>
-            <a:off x="777240" y="2194560"/>
-            <a:ext cx="5394960" cy="365760"/>
-          </a:xfrm>
-          <a:prstGeom prst="rect">
-            <a:avLst/>
-          </a:prstGeom>
-          <a:noFill/>
-        </p:spPr>
-        <p:txBody>
-          <a:bodyPr wrap="square" lIns="0" rIns="0" tIns="0" bIns="0" anchor="t">
-            <a:spAutoFit/>
-          </a:bodyPr>
-          <a:lstStyle/>
-          <a:p>
-            <a:pPr algn="l">
-              <a:lnSpc>
-                <a:spcPct val="115000"/>
-              </a:lnSpc>
-            </a:pPr>
-            <a:r>
-              <a:rPr sz="1400" b="1" i="0">
-                <a:solidFill>
-                  <a:srgbClr val="028090"/>
-                </a:solidFill>
-                <a:latin typeface="Arial"/>
-              </a:rPr>
-              <a:t>Кейс — типовой для чата</a:t>
-            </a:r>
-          </a:p>
-        </p:txBody>
-      </p:sp>
-      <p:sp>
-        <p:nvSpPr>
-          <p:cNvPr id="6" name="TextBox 5"/>
-          <p:cNvSpPr txBox="1"/>
-          <p:nvPr/>
-        </p:nvSpPr>
-        <p:spPr>
-          <a:xfrm>
-            <a:off x="777240" y="2606039"/>
-            <a:ext cx="5394960" cy="868680"/>
-          </a:xfrm>
-          <a:prstGeom prst="rect">
-            <a:avLst/>
-          </a:prstGeom>
-          <a:noFill/>
-        </p:spPr>
-        <p:txBody>
-          <a:bodyPr wrap="square" lIns="0" rIns="0" tIns="0" bIns="0" anchor="t">
-            <a:spAutoFit/>
-          </a:bodyPr>
-          <a:lstStyle/>
-          <a:p>
-            <a:pPr algn="l">
-              <a:lnSpc>
-                <a:spcPct val="130000"/>
-              </a:lnSpc>
-            </a:pPr>
-            <a:r>
-              <a:rPr sz="1500" b="0" i="0">
-                <a:solidFill>
-                  <a:srgbClr val="21295C"/>
-                </a:solidFill>
-                <a:latin typeface="Arial"/>
-              </a:rPr>
-              <a:t>Инженер получил непонятное ТЗ от смежного отдела, нужно составить чек-лист своей работы.</a:t>
-            </a:r>
-          </a:p>
-        </p:txBody>
-      </p:sp>
-      <p:sp>
-        <p:nvSpPr>
-          <p:cNvPr id="7" name="Rounded Rectangle 6"/>
-          <p:cNvSpPr/>
-          <p:nvPr/>
-        </p:nvSpPr>
-        <p:spPr>
-          <a:xfrm>
-            <a:off x="868680" y="3657600"/>
-            <a:ext cx="5212080" cy="1828800"/>
-          </a:xfrm>
-          <a:prstGeom prst="roundRect">
-            <a:avLst>
-              <a:gd name="adj" fmla="val 8000"/>
-            </a:avLst>
-          </a:prstGeom>
-          <a:solidFill>
-            <a:srgbClr val="FFFFFF"/>
-          </a:solidFill>
-          <a:ln w="12700">
-            <a:solidFill>
-              <a:srgbClr val="E5EAF0"/>
-            </a:solidFill>
-          </a:ln>
-          <a:effectLst/>
-        </p:spPr>
-        <p:style>
-          <a:lnRef idx="1">
-            <a:schemeClr val="accent1"/>
-          </a:lnRef>
-          <a:fillRef idx="3">
-            <a:schemeClr val="accent1"/>
-          </a:fillRef>
-          <a:effectRef idx="2">
-            <a:schemeClr val="accent1"/>
-          </a:effectRef>
-          <a:fontRef idx="minor">
-            <a:schemeClr val="lt1"/>
-          </a:fontRef>
-        </p:style>
-        <p:txBody>
-          <a:bodyPr rtlCol="0" anchor="ctr"/>
-          <a:lstStyle/>
-          <a:p>
-            <a:pPr algn="ctr"/>
-          </a:p>
-        </p:txBody>
-      </p:sp>
-      <p:sp>
-        <p:nvSpPr>
-          <p:cNvPr id="8" name="TextBox 7"/>
-          <p:cNvSpPr txBox="1"/>
-          <p:nvPr/>
-        </p:nvSpPr>
-        <p:spPr>
-          <a:xfrm>
-            <a:off x="1051560" y="3794760"/>
-            <a:ext cx="4846320" cy="1554480"/>
-          </a:xfrm>
-          <a:prstGeom prst="rect">
-            <a:avLst/>
-          </a:prstGeom>
-          <a:noFill/>
-        </p:spPr>
-        <p:txBody>
-          <a:bodyPr wrap="square" lIns="0" rIns="0" tIns="0" bIns="0" anchor="t">
-            <a:spAutoFit/>
-          </a:bodyPr>
-          <a:lstStyle/>
-          <a:p>
-            <a:pPr algn="l">
-              <a:lnSpc>
-                <a:spcPct val="145000"/>
-              </a:lnSpc>
-            </a:pPr>
-            <a:r>
-              <a:rPr sz="1200" b="1" i="0">
-                <a:solidFill>
-                  <a:srgbClr val="065A82"/>
-                </a:solidFill>
-                <a:latin typeface="Arial"/>
-              </a:rPr>
-              <a:t>Вы:  </a:t>
-            </a:r>
-            <a:r>
-              <a:rPr sz="1200" b="0" i="0">
-                <a:solidFill>
-                  <a:srgbClr val="21295C"/>
-                </a:solidFill>
-                <a:latin typeface="Arial"/>
-              </a:rPr>
-              <a:t>Объясни пункт 4.2 ТЗ простыми словами.</a:t>
-            </a:r>
-          </a:p>
-          <a:p>
-            <a:pPr algn="l">
-              <a:lnSpc>
-                <a:spcPct val="145000"/>
-              </a:lnSpc>
-            </a:pPr>
-            <a:r>
-              <a:rPr sz="1200" b="1" i="0">
-                <a:solidFill>
-                  <a:srgbClr val="028090"/>
-                </a:solidFill>
-                <a:latin typeface="Arial"/>
-              </a:rPr>
-              <a:t>Чат:  </a:t>
-            </a:r>
-            <a:r>
-              <a:rPr sz="1200" b="0" i="0">
-                <a:solidFill>
-                  <a:srgbClr val="21295C"/>
-                </a:solidFill>
-                <a:latin typeface="Arial"/>
-              </a:rPr>
-              <a:t>Это требование к…</a:t>
-            </a:r>
-          </a:p>
-          <a:p>
-            <a:pPr algn="l">
-              <a:lnSpc>
-                <a:spcPct val="145000"/>
-              </a:lnSpc>
-            </a:pPr>
-            <a:r>
-              <a:rPr sz="1200" b="1" i="0">
-                <a:solidFill>
-                  <a:srgbClr val="065A82"/>
-                </a:solidFill>
-                <a:latin typeface="Arial"/>
-              </a:rPr>
-              <a:t>Вы:  </a:t>
-            </a:r>
-            <a:r>
-              <a:rPr sz="1200" b="0" i="0">
-                <a:solidFill>
-                  <a:srgbClr val="21295C"/>
-                </a:solidFill>
-                <a:latin typeface="Arial"/>
-              </a:rPr>
-              <a:t>Составь чек-лист на 5 пунктов.</a:t>
-            </a:r>
-          </a:p>
-          <a:p>
-            <a:pPr algn="l">
-              <a:lnSpc>
-                <a:spcPct val="145000"/>
-              </a:lnSpc>
-            </a:pPr>
-            <a:r>
-              <a:rPr sz="1200" b="1" i="0">
-                <a:solidFill>
-                  <a:srgbClr val="028090"/>
-                </a:solidFill>
-                <a:latin typeface="Arial"/>
-              </a:rPr>
-              <a:t>Чат:  </a:t>
-            </a:r>
-            <a:r>
-              <a:rPr sz="1200" b="0" i="0">
-                <a:solidFill>
-                  <a:srgbClr val="21295C"/>
-                </a:solidFill>
-                <a:latin typeface="Arial"/>
-              </a:rPr>
-              <a:t>1. Проверить…  2. Согласовать…  3. …</a:t>
-            </a:r>
-          </a:p>
-        </p:txBody>
-      </p:sp>
-      <p:sp>
-        <p:nvSpPr>
-          <p:cNvPr id="9" name="TextBox 8"/>
-          <p:cNvSpPr txBox="1"/>
-          <p:nvPr/>
-        </p:nvSpPr>
-        <p:spPr>
-          <a:xfrm>
-            <a:off x="777240" y="5623560"/>
-            <a:ext cx="5394960" cy="320040"/>
-          </a:xfrm>
-          <a:prstGeom prst="rect">
-            <a:avLst/>
-          </a:prstGeom>
-          <a:noFill/>
-        </p:spPr>
-        <p:txBody>
-          <a:bodyPr wrap="square" lIns="0" rIns="0" tIns="0" bIns="0" anchor="t">
-            <a:spAutoFit/>
-          </a:bodyPr>
-          <a:lstStyle/>
-          <a:p>
-            <a:pPr algn="l">
-              <a:lnSpc>
-                <a:spcPct val="130000"/>
-              </a:lnSpc>
-            </a:pPr>
-            <a:r>
-              <a:rPr sz="1100" b="0" i="1">
-                <a:solidFill>
-                  <a:srgbClr val="1C7293"/>
-                </a:solidFill>
-                <a:latin typeface="Arial"/>
-              </a:rPr>
-              <a:t>Разовая задача с уточнениями — оптимально для чата. Не модель, не агент, не приложение.</a:t>
-            </a:r>
-          </a:p>
-        </p:txBody>
-      </p:sp>
-      <p:sp>
-        <p:nvSpPr>
-          <p:cNvPr id="10" name="Rounded Rectangle 9"/>
-          <p:cNvSpPr/>
-          <p:nvPr/>
-        </p:nvSpPr>
-        <p:spPr>
-          <a:xfrm>
-            <a:off x="6766559" y="1965960"/>
-            <a:ext cx="4937760" cy="4114800"/>
-          </a:xfrm>
-          <a:prstGeom prst="roundRect">
-            <a:avLst>
-              <a:gd name="adj" fmla="val 7407"/>
-            </a:avLst>
-          </a:prstGeom>
-          <a:solidFill>
-            <a:srgbClr val="FEF5E0"/>
-          </a:solidFill>
-          <a:ln w="19050">
-            <a:solidFill>
-              <a:srgbClr val="F0AB00"/>
-            </a:solidFill>
-          </a:ln>
-          <a:effectLst/>
-        </p:spPr>
-        <p:style>
-          <a:lnRef idx="1">
-            <a:schemeClr val="accent1"/>
-          </a:lnRef>
-          <a:fillRef idx="3">
-            <a:schemeClr val="accent1"/>
-          </a:fillRef>
-          <a:effectRef idx="2">
-            <a:schemeClr val="accent1"/>
-          </a:effectRef>
-          <a:fontRef idx="minor">
-            <a:schemeClr val="lt1"/>
-          </a:fontRef>
-        </p:style>
-        <p:txBody>
-          <a:bodyPr rtlCol="0" anchor="ctr"/>
-          <a:lstStyle/>
-          <a:p>
-            <a:pPr algn="ctr"/>
-          </a:p>
-        </p:txBody>
-      </p:sp>
-      <p:sp>
-        <p:nvSpPr>
-          <p:cNvPr id="11" name="TextBox 10"/>
-          <p:cNvSpPr txBox="1"/>
-          <p:nvPr/>
-        </p:nvSpPr>
-        <p:spPr>
-          <a:xfrm>
-            <a:off x="7040879" y="2194560"/>
-            <a:ext cx="4389120" cy="365760"/>
-          </a:xfrm>
-          <a:prstGeom prst="rect">
-            <a:avLst/>
-          </a:prstGeom>
-          <a:noFill/>
-        </p:spPr>
-        <p:txBody>
-          <a:bodyPr wrap="square" lIns="0" rIns="0" tIns="0" bIns="0" anchor="t">
-            <a:spAutoFit/>
-          </a:bodyPr>
-          <a:lstStyle/>
-          <a:p>
-            <a:pPr algn="l">
-              <a:lnSpc>
-                <a:spcPct val="115000"/>
-              </a:lnSpc>
-            </a:pPr>
-            <a:r>
-              <a:rPr sz="1400" b="1" i="0">
-                <a:solidFill>
-                  <a:srgbClr val="21295C"/>
-                </a:solidFill>
-                <a:latin typeface="Arial"/>
-              </a:rPr>
-              <a:t>Оговорка для промышленных систем</a:t>
-            </a:r>
-          </a:p>
-        </p:txBody>
-      </p:sp>
-      <p:sp>
-        <p:nvSpPr>
-          <p:cNvPr id="12" name="TextBox 11"/>
-          <p:cNvSpPr txBox="1"/>
-          <p:nvPr/>
-        </p:nvSpPr>
-        <p:spPr>
-          <a:xfrm>
-            <a:off x="7040879" y="2743200"/>
-            <a:ext cx="4389120" cy="1280160"/>
-          </a:xfrm>
-          <a:prstGeom prst="rect">
-            <a:avLst/>
-          </a:prstGeom>
-          <a:noFill/>
-        </p:spPr>
-        <p:txBody>
-          <a:bodyPr wrap="square" lIns="0" rIns="0" tIns="0" bIns="0" anchor="t">
-            <a:spAutoFit/>
-          </a:bodyPr>
-          <a:lstStyle/>
-          <a:p>
-            <a:pPr algn="l">
-              <a:lnSpc>
-                <a:spcPct val="125000"/>
-              </a:lnSpc>
-            </a:pPr>
-            <a:r>
-              <a:rPr sz="1600" b="1" i="0">
-                <a:solidFill>
-                  <a:srgbClr val="21295C"/>
-                </a:solidFill>
-                <a:latin typeface="Arial"/>
-              </a:rPr>
-              <a:t>Чистые чаты почти не используются в промышленной эксплуатации.</a:t>
-            </a:r>
-          </a:p>
-        </p:txBody>
-      </p:sp>
-      <p:sp>
-        <p:nvSpPr>
-          <p:cNvPr id="13" name="TextBox 12"/>
-          <p:cNvSpPr txBox="1"/>
-          <p:nvPr/>
-        </p:nvSpPr>
-        <p:spPr>
-          <a:xfrm>
-            <a:off x="7040879" y="4114800"/>
-            <a:ext cx="4389120" cy="1828800"/>
-          </a:xfrm>
-          <a:prstGeom prst="rect">
-            <a:avLst/>
-          </a:prstGeom>
-          <a:noFill/>
-        </p:spPr>
-        <p:txBody>
-          <a:bodyPr wrap="square" lIns="0" rIns="0" tIns="0" bIns="0" anchor="t">
-            <a:spAutoFit/>
-          </a:bodyPr>
-          <a:lstStyle/>
-          <a:p>
-            <a:pPr algn="l">
-              <a:lnSpc>
-                <a:spcPct val="140000"/>
-              </a:lnSpc>
-            </a:pPr>
-            <a:r>
-              <a:rPr sz="1200" b="0" i="0">
-                <a:solidFill>
-                  <a:srgbClr val="21295C"/>
-                </a:solidFill>
-                <a:latin typeface="Arial"/>
-              </a:rPr>
-              <a:t>Почти везде они расширены до агентов — хотя бы для долгосрочной памяти и поиска по корпоративной базе (RAG).
-Архитектуру агента разберём на следующем слайде.</a:t>
-            </a:r>
-          </a:p>
-        </p:txBody>
-      </p:sp>
-      <p:sp>
-        <p:nvSpPr>
-          <p:cNvPr id="14" name="Rounded Rectangle 13"/>
-          <p:cNvSpPr/>
-          <p:nvPr/>
-        </p:nvSpPr>
-        <p:spPr>
-          <a:xfrm>
-            <a:off x="502920" y="6172200"/>
-            <a:ext cx="11201400" cy="457200"/>
-          </a:xfrm>
-          <a:prstGeom prst="roundRect">
-            <a:avLst>
-              <a:gd name="adj" fmla="val 12000"/>
-            </a:avLst>
-          </a:prstGeom>
-          <a:solidFill>
-            <a:srgbClr val="FEF5E0"/>
-          </a:solidFill>
-          <a:ln w="15240">
-            <a:solidFill>
-              <a:srgbClr val="F0AB00"/>
-            </a:solidFill>
-          </a:ln>
-          <a:effectLst/>
-        </p:spPr>
-        <p:style>
-          <a:lnRef idx="1">
-            <a:schemeClr val="accent1"/>
-          </a:lnRef>
-          <a:fillRef idx="3">
-            <a:schemeClr val="accent1"/>
-          </a:fillRef>
-          <a:effectRef idx="2">
-            <a:schemeClr val="accent1"/>
-          </a:effectRef>
-          <a:fontRef idx="minor">
-            <a:schemeClr val="lt1"/>
-          </a:fontRef>
-        </p:style>
-        <p:txBody>
-          <a:bodyPr rtlCol="0" anchor="ctr"/>
-          <a:lstStyle/>
-          <a:p>
-            <a:pPr algn="ctr"/>
-          </a:p>
-        </p:txBody>
-      </p:sp>
-      <p:sp>
-        <p:nvSpPr>
-          <p:cNvPr id="15" name="TextBox 14"/>
-          <p:cNvSpPr txBox="1"/>
-          <p:nvPr/>
-        </p:nvSpPr>
-        <p:spPr>
-          <a:xfrm>
-            <a:off x="685800" y="6245352"/>
-            <a:ext cx="10835640" cy="310896"/>
-          </a:xfrm>
-          <a:prstGeom prst="rect">
-            <a:avLst/>
-          </a:prstGeom>
-          <a:noFill/>
-        </p:spPr>
-        <p:txBody>
-          <a:bodyPr wrap="square" lIns="0" rIns="0" tIns="0" bIns="0" anchor="ctr">
-            <a:spAutoFit/>
-          </a:bodyPr>
-          <a:lstStyle/>
-          <a:p>
-            <a:pPr algn="l">
-              <a:lnSpc>
-                <a:spcPct val="125000"/>
-              </a:lnSpc>
-            </a:pPr>
-            <a:r>
-              <a:rPr sz="1300" b="1" i="0">
-                <a:solidFill>
-                  <a:srgbClr val="21295C"/>
-                </a:solidFill>
-                <a:latin typeface="Arial"/>
-              </a:rPr>
-              <a:t>Выбор чата — точка на шкале взаимодействия, не единственно верный вариант.</a:t>
-            </a:r>
-          </a:p>
-        </p:txBody>
-      </p:sp>
-    </p:spTree>
-  </p:cSld>
-  <p:clrMapOvr>
-    <a:masterClrMapping/>
-  </p:clrMapOvr>
-</p:sld>
-</file>
-
 <file path=ppt/slides/slide21.xml><?xml version="1.0" encoding="utf-8"?>
 <p:sld xmlns:a="http://schemas.openxmlformats.org/drawingml/2006/main" xmlns:p="http://schemas.openxmlformats.org/presentationml/2006/main" xmlns:r="http://schemas.openxmlformats.org/officeDocument/2006/relationships">
   <p:cSld>
@@ -26190,6 +25599,274 @@
                 <a:latin typeface="Arial"/>
               </a:rPr>
               <a:t>Агент = последовательность вызовов инструментов, оркестрируемая LLM.</a:t>
+            </a:r>
+          </a:p>
+        </p:txBody>
+      </p:sp>
+      <p:sp>
+        <p:nvSpPr>
+          <p:cNvPr id="47" name="Rounded Rectangle 46"/>
+          <p:cNvSpPr/>
+          <p:nvPr/>
+        </p:nvSpPr>
+        <p:spPr>
+          <a:xfrm>
+            <a:off x="4599432" y="2788920"/>
+            <a:ext cx="7004304" cy="2606040"/>
+          </a:xfrm>
+          <a:prstGeom prst="roundRect">
+            <a:avLst>
+              <a:gd name="adj" fmla="val 5000"/>
+            </a:avLst>
+          </a:prstGeom>
+          <a:noFill/>
+          <a:ln w="20320">
+            <a:solidFill>
+              <a:srgbClr val="028090"/>
+            </a:solidFill>
+            <a:prstDash val="dash"/>
+          </a:ln>
+          <a:effectLst/>
+        </p:spPr>
+        <p:style>
+          <a:lnRef idx="1">
+            <a:schemeClr val="accent1"/>
+          </a:lnRef>
+          <a:fillRef idx="3">
+            <a:schemeClr val="accent1"/>
+          </a:fillRef>
+          <a:effectRef idx="2">
+            <a:schemeClr val="accent1"/>
+          </a:effectRef>
+          <a:fontRef idx="minor">
+            <a:schemeClr val="lt1"/>
+          </a:fontRef>
+        </p:style>
+        <p:txBody>
+          <a:bodyPr rtlCol="0" anchor="ctr"/>
+          <a:lstStyle/>
+          <a:p>
+            <a:pPr algn="ctr"/>
+          </a:p>
+        </p:txBody>
+      </p:sp>
+      <p:sp>
+        <p:nvSpPr>
+          <p:cNvPr id="48" name="TextBox 47"/>
+          <p:cNvSpPr txBox="1"/>
+          <p:nvPr/>
+        </p:nvSpPr>
+        <p:spPr>
+          <a:xfrm rot="16200000">
+            <a:off x="10744200" y="3611880"/>
+            <a:ext cx="2377440" cy="365760"/>
+          </a:xfrm>
+          <a:prstGeom prst="rect">
+            <a:avLst/>
+          </a:prstGeom>
+          <a:noFill/>
+        </p:spPr>
+        <p:txBody>
+          <a:bodyPr wrap="none">
+            <a:spAutoFit/>
+          </a:bodyPr>
+          <a:lstStyle/>
+          <a:p>
+            <a:pPr algn="ctr"/>
+            <a:r>
+              <a:rPr sz="1100" b="1">
+                <a:solidFill>
+                  <a:srgbClr val="028090"/>
+                </a:solidFill>
+              </a:rPr>
+              <a:t>цикл: обработка одного файла</a:t>
+            </a:r>
+          </a:p>
+        </p:txBody>
+      </p:sp>
+      <p:sp>
+        <p:nvSpPr>
+          <p:cNvPr id="49" name="Rectangle 48"/>
+          <p:cNvSpPr/>
+          <p:nvPr/>
+        </p:nvSpPr>
+        <p:spPr>
+          <a:xfrm>
+            <a:off x="4539996" y="3017520"/>
+            <a:ext cx="50292" cy="2743200"/>
+          </a:xfrm>
+          <a:prstGeom prst="rect">
+            <a:avLst/>
+          </a:prstGeom>
+          <a:solidFill>
+            <a:srgbClr val="028090"/>
+          </a:solidFill>
+          <a:ln>
+            <a:noFill/>
+          </a:ln>
+          <a:effectLst/>
+        </p:spPr>
+        <p:style>
+          <a:lnRef idx="1">
+            <a:schemeClr val="accent1"/>
+          </a:lnRef>
+          <a:fillRef idx="3">
+            <a:schemeClr val="accent1"/>
+          </a:fillRef>
+          <a:effectRef idx="2">
+            <a:schemeClr val="accent1"/>
+          </a:effectRef>
+          <a:fontRef idx="minor">
+            <a:schemeClr val="lt1"/>
+          </a:fontRef>
+        </p:style>
+        <p:txBody>
+          <a:bodyPr rtlCol="0" anchor="ctr"/>
+          <a:lstStyle/>
+          <a:p>
+            <a:pPr algn="ctr"/>
+          </a:p>
+        </p:txBody>
+      </p:sp>
+      <p:sp>
+        <p:nvSpPr>
+          <p:cNvPr id="50" name="Rectangle 49"/>
+          <p:cNvSpPr/>
+          <p:nvPr/>
+        </p:nvSpPr>
+        <p:spPr>
+          <a:xfrm>
+            <a:off x="4539996" y="5715000"/>
+            <a:ext cx="274320" cy="50292"/>
+          </a:xfrm>
+          <a:prstGeom prst="rect">
+            <a:avLst/>
+          </a:prstGeom>
+          <a:solidFill>
+            <a:srgbClr val="028090"/>
+          </a:solidFill>
+          <a:ln>
+            <a:noFill/>
+          </a:ln>
+          <a:effectLst/>
+        </p:spPr>
+        <p:style>
+          <a:lnRef idx="1">
+            <a:schemeClr val="accent1"/>
+          </a:lnRef>
+          <a:fillRef idx="3">
+            <a:schemeClr val="accent1"/>
+          </a:fillRef>
+          <a:effectRef idx="2">
+            <a:schemeClr val="accent1"/>
+          </a:effectRef>
+          <a:fontRef idx="minor">
+            <a:schemeClr val="lt1"/>
+          </a:fontRef>
+        </p:style>
+        <p:txBody>
+          <a:bodyPr rtlCol="0" anchor="ctr"/>
+          <a:lstStyle/>
+          <a:p>
+            <a:pPr algn="ctr"/>
+          </a:p>
+        </p:txBody>
+      </p:sp>
+      <p:sp>
+        <p:nvSpPr>
+          <p:cNvPr id="51" name="Isosceles Triangle 50"/>
+          <p:cNvSpPr/>
+          <p:nvPr/>
+        </p:nvSpPr>
+        <p:spPr>
+          <a:xfrm>
+            <a:off x="4485132" y="2834640"/>
+            <a:ext cx="164592" cy="201168"/>
+          </a:xfrm>
+          <a:prstGeom prst="triangle">
+            <a:avLst/>
+          </a:prstGeom>
+          <a:solidFill>
+            <a:srgbClr val="028090"/>
+          </a:solidFill>
+          <a:ln>
+            <a:noFill/>
+          </a:ln>
+          <a:effectLst/>
+        </p:spPr>
+        <p:style>
+          <a:lnRef idx="1">
+            <a:schemeClr val="accent1"/>
+          </a:lnRef>
+          <a:fillRef idx="3">
+            <a:schemeClr val="accent1"/>
+          </a:fillRef>
+          <a:effectRef idx="2">
+            <a:schemeClr val="accent1"/>
+          </a:effectRef>
+          <a:fontRef idx="minor">
+            <a:schemeClr val="lt1"/>
+          </a:fontRef>
+        </p:style>
+        <p:txBody>
+          <a:bodyPr rtlCol="0" anchor="ctr"/>
+          <a:lstStyle/>
+          <a:p>
+            <a:pPr algn="ctr"/>
+          </a:p>
+        </p:txBody>
+      </p:sp>
+      <p:sp>
+        <p:nvSpPr>
+          <p:cNvPr id="52" name="Rounded Rectangle 51"/>
+          <p:cNvSpPr/>
+          <p:nvPr/>
+        </p:nvSpPr>
+        <p:spPr>
+          <a:xfrm>
+            <a:off x="4754880" y="5907024"/>
+            <a:ext cx="2331720" cy="292608"/>
+          </a:xfrm>
+          <a:prstGeom prst="roundRect">
+            <a:avLst>
+              <a:gd name="adj" fmla="val 50000"/>
+            </a:avLst>
+          </a:prstGeom>
+          <a:solidFill>
+            <a:srgbClr val="F0AB00"/>
+          </a:solidFill>
+          <a:ln>
+            <a:noFill/>
+          </a:ln>
+          <a:effectLst/>
+        </p:spPr>
+        <p:style>
+          <a:lnRef idx="1">
+            <a:schemeClr val="accent1"/>
+          </a:lnRef>
+          <a:fillRef idx="3">
+            <a:schemeClr val="accent1"/>
+          </a:fillRef>
+          <a:effectRef idx="2">
+            <a:schemeClr val="accent1"/>
+          </a:effectRef>
+          <a:fontRef idx="minor">
+            <a:schemeClr val="lt1"/>
+          </a:fontRef>
+        </p:style>
+        <p:txBody>
+          <a:bodyPr rtlCol="0" anchor="ctr" lIns="45720" rIns="45720" tIns="36576" bIns="36576" wrap="none"/>
+          <a:lstStyle/>
+          <a:p>
+            <a:pPr algn="ctr"/>
+            <a:r>
+              <a:rPr sz="1100" b="1">
+                <a:solidFill>
+                  <a:srgbClr val="21295C"/>
+                </a:solidFill>
+                <a:latin typeface="Arial"/>
+              </a:rPr>
+              <a:t>↻  повторить × 200 файлов</a:t>
             </a:r>
           </a:p>
         </p:txBody>
@@ -39086,7 +38763,7 @@
                 </a:solidFill>
                 <a:latin typeface="Arial"/>
               </a:rPr>
-              <a:t>  =  10 </a:t>
+              <a:t>  =  40 </a:t>
             </a:r>
             <a:r>
               <a:rPr sz="1400" b="0" i="1">
@@ -39095,7 +38772,7 @@
                 </a:solidFill>
                 <a:latin typeface="Arial"/>
               </a:rPr>
-              <a:t>(посещаемость)</a:t>
+              <a:t>(экзамен)</a:t>
             </a:r>
             <a:r>
               <a:rPr sz="3000" b="1" i="0">
@@ -39104,7 +38781,7 @@
                 </a:solidFill>
                 <a:latin typeface="Arial"/>
               </a:rPr>
-              <a:t>  +  30 </a:t>
+              <a:t/>
             </a:r>
             <a:r>
               <a:rPr sz="1400" b="0" i="1">
@@ -39113,7 +38790,7 @@
                 </a:solidFill>
                 <a:latin typeface="Arial"/>
               </a:rPr>
-              <a:t>(экзамен)</a:t>
+              <a:t/>
             </a:r>
             <a:r>
               <a:rPr sz="3000" b="1" i="0">
@@ -39971,6 +39648,1015 @@
                 <a:latin typeface="Arial"/>
               </a:rPr>
               <a:t>Спасибо</a:t>
+            </a:r>
+          </a:p>
+        </p:txBody>
+      </p:sp>
+      <p:sp>
+        <p:nvSpPr>
+          <p:cNvPr id="4" name="Rounded Rectangle 3"/>
+          <p:cNvSpPr/>
+          <p:nvPr/>
+        </p:nvSpPr>
+        <p:spPr>
+          <a:xfrm>
+            <a:off x="8869680" y="4160520"/>
+            <a:ext cx="2834640" cy="2377440"/>
+          </a:xfrm>
+          <a:prstGeom prst="roundRect">
+            <a:avLst>
+              <a:gd name="adj" fmla="val 12820"/>
+            </a:avLst>
+          </a:prstGeom>
+          <a:solidFill>
+            <a:srgbClr val="FFFFFF"/>
+          </a:solidFill>
+          <a:ln w="20320">
+            <a:solidFill>
+              <a:srgbClr val="1C7293"/>
+            </a:solidFill>
+          </a:ln>
+          <a:effectLst/>
+        </p:spPr>
+        <p:style>
+          <a:lnRef idx="1">
+            <a:schemeClr val="accent1"/>
+          </a:lnRef>
+          <a:fillRef idx="3">
+            <a:schemeClr val="accent1"/>
+          </a:fillRef>
+          <a:effectRef idx="2">
+            <a:schemeClr val="accent1"/>
+          </a:effectRef>
+          <a:fontRef idx="minor">
+            <a:schemeClr val="lt1"/>
+          </a:fontRef>
+        </p:style>
+        <p:txBody>
+          <a:bodyPr rtlCol="0" anchor="ctr"/>
+          <a:lstStyle/>
+          <a:p>
+            <a:pPr algn="ctr"/>
+          </a:p>
+        </p:txBody>
+      </p:sp>
+      <p:pic>
+        <p:nvPicPr>
+          <p:cNvPr id="5" name="Picture 4" descr="max-qr.png"/>
+          <p:cNvPicPr>
+            <a:picLocks noChangeAspect="1"/>
+          </p:cNvPicPr>
+          <p:nvPr/>
+        </p:nvPicPr>
+        <p:blipFill>
+          <a:blip r:embed="rId3"/>
+          <a:stretch>
+            <a:fillRect/>
+          </a:stretch>
+        </p:blipFill>
+        <p:spPr>
+          <a:xfrm>
+            <a:off x="9578340" y="4361688"/>
+            <a:ext cx="1417320" cy="1417320"/>
+          </a:xfrm>
+          <a:prstGeom prst="rect">
+            <a:avLst/>
+          </a:prstGeom>
+        </p:spPr>
+      </p:pic>
+      <p:sp>
+        <p:nvSpPr>
+          <p:cNvPr id="6" name="TextBox 5"/>
+          <p:cNvSpPr txBox="1"/>
+          <p:nvPr/>
+        </p:nvSpPr>
+        <p:spPr>
+          <a:xfrm>
+            <a:off x="9006840" y="5861304"/>
+            <a:ext cx="2560320" cy="292608"/>
+          </a:xfrm>
+          <a:prstGeom prst="rect">
+            <a:avLst/>
+          </a:prstGeom>
+          <a:noFill/>
+        </p:spPr>
+        <p:txBody>
+          <a:bodyPr wrap="square" lIns="0" rIns="0" tIns="0" bIns="0" anchor="t">
+            <a:spAutoFit/>
+          </a:bodyPr>
+          <a:lstStyle/>
+          <a:p>
+            <a:pPr algn="ctr">
+              <a:lnSpc>
+                <a:spcPct val="115000"/>
+              </a:lnSpc>
+            </a:pPr>
+            <a:r>
+              <a:rPr sz="1300" b="1" i="0">
+                <a:solidFill>
+                  <a:srgbClr val="21295C"/>
+                </a:solidFill>
+                <a:latin typeface="Arial"/>
+              </a:rPr>
+              <a:t>Чат курса в MAX</a:t>
+            </a:r>
+          </a:p>
+        </p:txBody>
+      </p:sp>
+      <p:sp>
+        <p:nvSpPr>
+          <p:cNvPr id="7" name="TextBox 6"/>
+          <p:cNvSpPr txBox="1"/>
+          <p:nvPr/>
+        </p:nvSpPr>
+        <p:spPr>
+          <a:xfrm>
+            <a:off x="8979407" y="6135624"/>
+            <a:ext cx="2615184" cy="365760"/>
+          </a:xfrm>
+          <a:prstGeom prst="rect">
+            <a:avLst/>
+          </a:prstGeom>
+          <a:noFill/>
+        </p:spPr>
+        <p:txBody>
+          <a:bodyPr wrap="square" lIns="0" rIns="0" tIns="0" bIns="0" anchor="t">
+            <a:spAutoFit/>
+          </a:bodyPr>
+          <a:lstStyle/>
+          <a:p>
+            <a:pPr algn="ctr">
+              <a:lnSpc>
+                <a:spcPct val="115000"/>
+              </a:lnSpc>
+            </a:pPr>
+            <a:r>
+              <a:rPr sz="950" b="0" i="0">
+                <a:solidFill>
+                  <a:srgbClr val="065A82"/>
+                </a:solidFill>
+                <a:latin typeface="Arial"/>
+              </a:rPr>
+              <a:t>max.ru/join/sHoHlhI4jvW…</a:t>
+            </a:r>
+          </a:p>
+        </p:txBody>
+      </p:sp>
+    </p:spTree>
+  </p:cSld>
+  <p:clrMapOvr>
+    <a:masterClrMapping/>
+  </p:clrMapOvr>
+</p:sld>
+</file>
+
+<file path=ppt/slides/slide37.xml><?xml version="1.0" encoding="utf-8"?>
+<p:sld xmlns:a="http://schemas.openxmlformats.org/drawingml/2006/main" xmlns:p="http://schemas.openxmlformats.org/presentationml/2006/main" xmlns:r="http://schemas.openxmlformats.org/officeDocument/2006/relationships">
+  <p:cSld>
+    <p:bg>
+      <p:bgPr>
+        <a:solidFill>
+          <a:srgbClr val="FFFFFF"/>
+        </a:solidFill>
+        <a:effectLst/>
+      </p:bgPr>
+    </p:bg>
+    <p:spTree>
+      <p:nvGrpSpPr>
+        <p:cNvPr id="1" name=""/>
+        <p:cNvGrpSpPr/>
+        <p:nvPr/>
+      </p:nvGrpSpPr>
+      <p:grpSpPr/>
+      <p:sp>
+        <p:nvSpPr>
+          <p:cNvPr id="2" name="Title 1"/>
+          <p:cNvSpPr>
+            <a:spLocks noGrp="1"/>
+          </p:cNvSpPr>
+          <p:nvPr>
+            <p:ph type="title"/>
+          </p:nvPr>
+        </p:nvSpPr>
+        <p:spPr/>
+        <p:txBody>
+          <a:bodyPr/>
+          <a:lstStyle/>
+          <a:p/>
+        </p:txBody>
+      </p:sp>
+      <p:sp>
+        <p:nvSpPr>
+          <p:cNvPr id="3" name="TextBox 2"/>
+          <p:cNvSpPr txBox="1"/>
+          <p:nvPr/>
+        </p:nvSpPr>
+        <p:spPr>
+          <a:xfrm>
+            <a:off x="502920" y="411480"/>
+            <a:ext cx="11247120" cy="731520"/>
+          </a:xfrm>
+          <a:prstGeom prst="rect">
+            <a:avLst/>
+          </a:prstGeom>
+          <a:noFill/>
+        </p:spPr>
+        <p:txBody>
+          <a:bodyPr wrap="square" lIns="0" rIns="0" tIns="0" bIns="0" anchor="t">
+            <a:spAutoFit/>
+          </a:bodyPr>
+          <a:lstStyle/>
+          <a:p>
+            <a:pPr algn="l">
+              <a:lnSpc>
+                <a:spcPct val="115000"/>
+              </a:lnSpc>
+            </a:pPr>
+            <a:r>
+              <a:rPr sz="2800" b="1" i="0">
+                <a:solidFill>
+                  <a:srgbClr val="21295C"/>
+                </a:solidFill>
+                <a:latin typeface="Arial"/>
+              </a:rPr>
+              <a:t>Чат курса в MAX — всё важное в одном месте</a:t>
+            </a:r>
+          </a:p>
+        </p:txBody>
+      </p:sp>
+      <p:sp>
+        <p:nvSpPr>
+          <p:cNvPr id="4" name="TextBox 3"/>
+          <p:cNvSpPr txBox="1"/>
+          <p:nvPr/>
+        </p:nvSpPr>
+        <p:spPr>
+          <a:xfrm>
+            <a:off x="502920" y="1188720"/>
+            <a:ext cx="11247120" cy="457200"/>
+          </a:xfrm>
+          <a:prstGeom prst="rect">
+            <a:avLst/>
+          </a:prstGeom>
+          <a:noFill/>
+        </p:spPr>
+        <p:txBody>
+          <a:bodyPr wrap="square" lIns="0" rIns="0" tIns="0" bIns="0" anchor="t">
+            <a:spAutoFit/>
+          </a:bodyPr>
+          <a:lstStyle/>
+          <a:p>
+            <a:pPr algn="l">
+              <a:lnSpc>
+                <a:spcPct val="115000"/>
+              </a:lnSpc>
+            </a:pPr>
+            <a:r>
+              <a:rPr sz="1700" b="1" i="0">
+                <a:solidFill>
+                  <a:srgbClr val="028090"/>
+                </a:solidFill>
+                <a:latin typeface="Arial"/>
+              </a:rPr>
+              <a:t>Чат группы: «Отраслевое использование ИИ 2026»</a:t>
+            </a:r>
+          </a:p>
+        </p:txBody>
+      </p:sp>
+      <p:sp>
+        <p:nvSpPr>
+          <p:cNvPr id="5" name="Rounded Rectangle 4"/>
+          <p:cNvSpPr/>
+          <p:nvPr/>
+        </p:nvSpPr>
+        <p:spPr>
+          <a:xfrm>
+            <a:off x="822960" y="1783080"/>
+            <a:ext cx="3657600" cy="3977639"/>
+          </a:xfrm>
+          <a:prstGeom prst="roundRect">
+            <a:avLst>
+              <a:gd name="adj" fmla="val 8333"/>
+            </a:avLst>
+          </a:prstGeom>
+          <a:solidFill>
+            <a:srgbClr val="FFFFFF"/>
+          </a:solidFill>
+          <a:ln w="22860">
+            <a:solidFill>
+              <a:srgbClr val="1C7293"/>
+            </a:solidFill>
+          </a:ln>
+          <a:effectLst/>
+        </p:spPr>
+        <p:style>
+          <a:lnRef idx="1">
+            <a:schemeClr val="accent1"/>
+          </a:lnRef>
+          <a:fillRef idx="3">
+            <a:schemeClr val="accent1"/>
+          </a:fillRef>
+          <a:effectRef idx="2">
+            <a:schemeClr val="accent1"/>
+          </a:effectRef>
+          <a:fontRef idx="minor">
+            <a:schemeClr val="lt1"/>
+          </a:fontRef>
+        </p:style>
+        <p:txBody>
+          <a:bodyPr rtlCol="0" anchor="ctr"/>
+          <a:lstStyle/>
+          <a:p>
+            <a:pPr algn="ctr"/>
+          </a:p>
+        </p:txBody>
+      </p:sp>
+      <p:pic>
+        <p:nvPicPr>
+          <p:cNvPr id="6" name="Picture 5" descr="s04b-max-qr.png"/>
+          <p:cNvPicPr>
+            <a:picLocks noChangeAspect="1"/>
+          </p:cNvPicPr>
+          <p:nvPr/>
+        </p:nvPicPr>
+        <p:blipFill>
+          <a:blip r:embed="rId2"/>
+          <a:stretch>
+            <a:fillRect/>
+          </a:stretch>
+        </p:blipFill>
+        <p:spPr>
+          <a:xfrm>
+            <a:off x="1485900" y="2039112"/>
+            <a:ext cx="2331720" cy="2331720"/>
+          </a:xfrm>
+          <a:prstGeom prst="rect">
+            <a:avLst/>
+          </a:prstGeom>
+        </p:spPr>
+      </p:pic>
+      <p:sp>
+        <p:nvSpPr>
+          <p:cNvPr id="7" name="TextBox 6"/>
+          <p:cNvSpPr txBox="1"/>
+          <p:nvPr/>
+        </p:nvSpPr>
+        <p:spPr>
+          <a:xfrm>
+            <a:off x="1005840" y="4507992"/>
+            <a:ext cx="3291840" cy="365760"/>
+          </a:xfrm>
+          <a:prstGeom prst="rect">
+            <a:avLst/>
+          </a:prstGeom>
+          <a:noFill/>
+        </p:spPr>
+        <p:txBody>
+          <a:bodyPr wrap="square" lIns="0" rIns="0" tIns="0" bIns="0" anchor="t">
+            <a:spAutoFit/>
+          </a:bodyPr>
+          <a:lstStyle/>
+          <a:p>
+            <a:pPr algn="ctr">
+              <a:lnSpc>
+                <a:spcPct val="115000"/>
+              </a:lnSpc>
+            </a:pPr>
+            <a:r>
+              <a:rPr sz="1400" b="1" i="0">
+                <a:solidFill>
+                  <a:srgbClr val="21295C"/>
+                </a:solidFill>
+                <a:latin typeface="Arial"/>
+              </a:rPr>
+              <a:t>Отсканируйте камерой телефона</a:t>
+            </a:r>
+          </a:p>
+        </p:txBody>
+      </p:sp>
+      <p:sp>
+        <p:nvSpPr>
+          <p:cNvPr id="8" name="TextBox 7"/>
+          <p:cNvSpPr txBox="1"/>
+          <p:nvPr/>
+        </p:nvSpPr>
+        <p:spPr>
+          <a:xfrm>
+            <a:off x="960120" y="4928616"/>
+            <a:ext cx="3383280" cy="731520"/>
+          </a:xfrm>
+          <a:prstGeom prst="rect">
+            <a:avLst/>
+          </a:prstGeom>
+          <a:noFill/>
+        </p:spPr>
+        <p:txBody>
+          <a:bodyPr wrap="square" lIns="0" rIns="0" tIns="0" bIns="0" anchor="t">
+            <a:spAutoFit/>
+          </a:bodyPr>
+          <a:lstStyle/>
+          <a:p>
+            <a:pPr algn="ctr">
+              <a:lnSpc>
+                <a:spcPct val="112000"/>
+              </a:lnSpc>
+            </a:pPr>
+            <a:r>
+              <a:rPr sz="1000" b="0" i="0">
+                <a:solidFill>
+                  <a:srgbClr val="065A82"/>
+                </a:solidFill>
+                <a:latin typeface="Arial"/>
+              </a:rPr>
+              <a:t>max.ru/join/sHoHlhI4jvW_swcq5ZLowvz6G94m0IMhAwngxuxsEpI</a:t>
+            </a:r>
+          </a:p>
+        </p:txBody>
+      </p:sp>
+      <p:sp>
+        <p:nvSpPr>
+          <p:cNvPr id="9" name="Rounded Rectangle 8"/>
+          <p:cNvSpPr/>
+          <p:nvPr/>
+        </p:nvSpPr>
+        <p:spPr>
+          <a:xfrm>
+            <a:off x="4937760" y="1783080"/>
+            <a:ext cx="6766560" cy="1234440"/>
+          </a:xfrm>
+          <a:prstGeom prst="roundRect">
+            <a:avLst>
+              <a:gd name="adj" fmla="val 24691"/>
+            </a:avLst>
+          </a:prstGeom>
+          <a:solidFill>
+            <a:srgbClr val="F4F7FA"/>
+          </a:solidFill>
+          <a:ln w="19050">
+            <a:solidFill>
+              <a:srgbClr val="1C7293"/>
+            </a:solidFill>
+          </a:ln>
+          <a:effectLst/>
+        </p:spPr>
+        <p:style>
+          <a:lnRef idx="1">
+            <a:schemeClr val="accent1"/>
+          </a:lnRef>
+          <a:fillRef idx="3">
+            <a:schemeClr val="accent1"/>
+          </a:fillRef>
+          <a:effectRef idx="2">
+            <a:schemeClr val="accent1"/>
+          </a:effectRef>
+          <a:fontRef idx="minor">
+            <a:schemeClr val="lt1"/>
+          </a:fontRef>
+        </p:style>
+        <p:txBody>
+          <a:bodyPr rtlCol="0" anchor="ctr"/>
+          <a:lstStyle/>
+          <a:p>
+            <a:pPr algn="ctr"/>
+          </a:p>
+        </p:txBody>
+      </p:sp>
+      <p:sp>
+        <p:nvSpPr>
+          <p:cNvPr id="10" name="Rounded Rectangle 9"/>
+          <p:cNvSpPr/>
+          <p:nvPr/>
+        </p:nvSpPr>
+        <p:spPr>
+          <a:xfrm>
+            <a:off x="5157216" y="2057400"/>
+            <a:ext cx="566928" cy="566928"/>
+          </a:xfrm>
+          <a:prstGeom prst="roundRect">
+            <a:avLst>
+              <a:gd name="adj" fmla="val 26000"/>
+            </a:avLst>
+          </a:prstGeom>
+          <a:solidFill>
+            <a:srgbClr val="028090"/>
+          </a:solidFill>
+          <a:ln>
+            <a:noFill/>
+          </a:ln>
+          <a:effectLst/>
+        </p:spPr>
+        <p:style>
+          <a:lnRef idx="1">
+            <a:schemeClr val="accent1"/>
+          </a:lnRef>
+          <a:fillRef idx="3">
+            <a:schemeClr val="accent1"/>
+          </a:fillRef>
+          <a:effectRef idx="2">
+            <a:schemeClr val="accent1"/>
+          </a:effectRef>
+          <a:fontRef idx="minor">
+            <a:schemeClr val="lt1"/>
+          </a:fontRef>
+        </p:style>
+        <p:txBody>
+          <a:bodyPr rtlCol="0" anchor="ctr"/>
+          <a:lstStyle/>
+          <a:p>
+            <a:pPr algn="ctr"/>
+          </a:p>
+        </p:txBody>
+      </p:sp>
+      <p:pic>
+        <p:nvPicPr>
+          <p:cNvPr id="11" name="Picture 10" descr="bell-FFFFFF-64.png"/>
+          <p:cNvPicPr>
+            <a:picLocks noChangeAspect="1"/>
+          </p:cNvPicPr>
+          <p:nvPr/>
+        </p:nvPicPr>
+        <p:blipFill>
+          <a:blip r:embed="rId3"/>
+          <a:stretch>
+            <a:fillRect/>
+          </a:stretch>
+        </p:blipFill>
+        <p:spPr>
+          <a:xfrm>
+            <a:off x="5259263" y="2159447"/>
+            <a:ext cx="351495" cy="351495"/>
+          </a:xfrm>
+          <a:prstGeom prst="rect">
+            <a:avLst/>
+          </a:prstGeom>
+        </p:spPr>
+      </p:pic>
+      <p:sp>
+        <p:nvSpPr>
+          <p:cNvPr id="12" name="TextBox 11"/>
+          <p:cNvSpPr txBox="1"/>
+          <p:nvPr/>
+        </p:nvSpPr>
+        <p:spPr>
+          <a:xfrm>
+            <a:off x="5989320" y="2002536"/>
+            <a:ext cx="5486400" cy="365760"/>
+          </a:xfrm>
+          <a:prstGeom prst="rect">
+            <a:avLst/>
+          </a:prstGeom>
+          <a:noFill/>
+        </p:spPr>
+        <p:txBody>
+          <a:bodyPr wrap="square" lIns="0" rIns="0" tIns="0" bIns="0" anchor="t">
+            <a:spAutoFit/>
+          </a:bodyPr>
+          <a:lstStyle/>
+          <a:p>
+            <a:pPr algn="l">
+              <a:lnSpc>
+                <a:spcPct val="115000"/>
+              </a:lnSpc>
+            </a:pPr>
+            <a:r>
+              <a:rPr sz="1600" b="1" i="0">
+                <a:solidFill>
+                  <a:srgbClr val="21295C"/>
+                </a:solidFill>
+                <a:latin typeface="Arial"/>
+              </a:rPr>
+              <a:t>Объявления</a:t>
+            </a:r>
+          </a:p>
+        </p:txBody>
+      </p:sp>
+      <p:sp>
+        <p:nvSpPr>
+          <p:cNvPr id="13" name="TextBox 12"/>
+          <p:cNvSpPr txBox="1"/>
+          <p:nvPr/>
+        </p:nvSpPr>
+        <p:spPr>
+          <a:xfrm>
+            <a:off x="5989320" y="2404872"/>
+            <a:ext cx="5486400" cy="502920"/>
+          </a:xfrm>
+          <a:prstGeom prst="rect">
+            <a:avLst/>
+          </a:prstGeom>
+          <a:noFill/>
+        </p:spPr>
+        <p:txBody>
+          <a:bodyPr wrap="square" lIns="0" rIns="0" tIns="0" bIns="0" anchor="t">
+            <a:spAutoFit/>
+          </a:bodyPr>
+          <a:lstStyle/>
+          <a:p>
+            <a:pPr algn="l">
+              <a:lnSpc>
+                <a:spcPct val="112000"/>
+              </a:lnSpc>
+            </a:pPr>
+            <a:r>
+              <a:rPr sz="1250" b="0" i="0">
+                <a:solidFill>
+                  <a:srgbClr val="6B7685"/>
+                </a:solidFill>
+                <a:latin typeface="Arial"/>
+              </a:rPr>
+              <a:t>Расписание, изменения, важные новости курса — в одном месте.</a:t>
+            </a:r>
+          </a:p>
+        </p:txBody>
+      </p:sp>
+      <p:sp>
+        <p:nvSpPr>
+          <p:cNvPr id="14" name="Rounded Rectangle 13"/>
+          <p:cNvSpPr/>
+          <p:nvPr/>
+        </p:nvSpPr>
+        <p:spPr>
+          <a:xfrm>
+            <a:off x="4937760" y="3154680"/>
+            <a:ext cx="6766560" cy="1234440"/>
+          </a:xfrm>
+          <a:prstGeom prst="roundRect">
+            <a:avLst>
+              <a:gd name="adj" fmla="val 24691"/>
+            </a:avLst>
+          </a:prstGeom>
+          <a:solidFill>
+            <a:srgbClr val="F4F7FA"/>
+          </a:solidFill>
+          <a:ln w="19050">
+            <a:solidFill>
+              <a:srgbClr val="1C7293"/>
+            </a:solidFill>
+          </a:ln>
+          <a:effectLst/>
+        </p:spPr>
+        <p:style>
+          <a:lnRef idx="1">
+            <a:schemeClr val="accent1"/>
+          </a:lnRef>
+          <a:fillRef idx="3">
+            <a:schemeClr val="accent1"/>
+          </a:fillRef>
+          <a:effectRef idx="2">
+            <a:schemeClr val="accent1"/>
+          </a:effectRef>
+          <a:fontRef idx="minor">
+            <a:schemeClr val="lt1"/>
+          </a:fontRef>
+        </p:style>
+        <p:txBody>
+          <a:bodyPr rtlCol="0" anchor="ctr"/>
+          <a:lstStyle/>
+          <a:p>
+            <a:pPr algn="ctr"/>
+          </a:p>
+        </p:txBody>
+      </p:sp>
+      <p:sp>
+        <p:nvSpPr>
+          <p:cNvPr id="15" name="Rounded Rectangle 14"/>
+          <p:cNvSpPr/>
+          <p:nvPr/>
+        </p:nvSpPr>
+        <p:spPr>
+          <a:xfrm>
+            <a:off x="5157216" y="3429000"/>
+            <a:ext cx="566928" cy="566928"/>
+          </a:xfrm>
+          <a:prstGeom prst="roundRect">
+            <a:avLst>
+              <a:gd name="adj" fmla="val 26000"/>
+            </a:avLst>
+          </a:prstGeom>
+          <a:solidFill>
+            <a:srgbClr val="028090"/>
+          </a:solidFill>
+          <a:ln>
+            <a:noFill/>
+          </a:ln>
+          <a:effectLst/>
+        </p:spPr>
+        <p:style>
+          <a:lnRef idx="1">
+            <a:schemeClr val="accent1"/>
+          </a:lnRef>
+          <a:fillRef idx="3">
+            <a:schemeClr val="accent1"/>
+          </a:fillRef>
+          <a:effectRef idx="2">
+            <a:schemeClr val="accent1"/>
+          </a:effectRef>
+          <a:fontRef idx="minor">
+            <a:schemeClr val="lt1"/>
+          </a:fontRef>
+        </p:style>
+        <p:txBody>
+          <a:bodyPr rtlCol="0" anchor="ctr"/>
+          <a:lstStyle/>
+          <a:p>
+            <a:pPr algn="ctr"/>
+          </a:p>
+        </p:txBody>
+      </p:sp>
+      <p:pic>
+        <p:nvPicPr>
+          <p:cNvPr id="16" name="Picture 15" descr="book-open-FFFFFF-64.png"/>
+          <p:cNvPicPr>
+            <a:picLocks noChangeAspect="1"/>
+          </p:cNvPicPr>
+          <p:nvPr/>
+        </p:nvPicPr>
+        <p:blipFill>
+          <a:blip r:embed="rId4"/>
+          <a:stretch>
+            <a:fillRect/>
+          </a:stretch>
+        </p:blipFill>
+        <p:spPr>
+          <a:xfrm>
+            <a:off x="5259263" y="3531047"/>
+            <a:ext cx="351495" cy="351495"/>
+          </a:xfrm>
+          <a:prstGeom prst="rect">
+            <a:avLst/>
+          </a:prstGeom>
+        </p:spPr>
+      </p:pic>
+      <p:sp>
+        <p:nvSpPr>
+          <p:cNvPr id="17" name="TextBox 16"/>
+          <p:cNvSpPr txBox="1"/>
+          <p:nvPr/>
+        </p:nvSpPr>
+        <p:spPr>
+          <a:xfrm>
+            <a:off x="5989320" y="3374136"/>
+            <a:ext cx="5486400" cy="365760"/>
+          </a:xfrm>
+          <a:prstGeom prst="rect">
+            <a:avLst/>
+          </a:prstGeom>
+          <a:noFill/>
+        </p:spPr>
+        <p:txBody>
+          <a:bodyPr wrap="square" lIns="0" rIns="0" tIns="0" bIns="0" anchor="t">
+            <a:spAutoFit/>
+          </a:bodyPr>
+          <a:lstStyle/>
+          <a:p>
+            <a:pPr algn="l">
+              <a:lnSpc>
+                <a:spcPct val="115000"/>
+              </a:lnSpc>
+            </a:pPr>
+            <a:r>
+              <a:rPr sz="1600" b="1" i="0">
+                <a:solidFill>
+                  <a:srgbClr val="21295C"/>
+                </a:solidFill>
+                <a:latin typeface="Arial"/>
+              </a:rPr>
+              <a:t>Материалы лекций и семинаров</a:t>
+            </a:r>
+          </a:p>
+        </p:txBody>
+      </p:sp>
+      <p:sp>
+        <p:nvSpPr>
+          <p:cNvPr id="18" name="TextBox 17"/>
+          <p:cNvSpPr txBox="1"/>
+          <p:nvPr/>
+        </p:nvSpPr>
+        <p:spPr>
+          <a:xfrm>
+            <a:off x="5989320" y="3776472"/>
+            <a:ext cx="5486400" cy="502920"/>
+          </a:xfrm>
+          <a:prstGeom prst="rect">
+            <a:avLst/>
+          </a:prstGeom>
+          <a:noFill/>
+        </p:spPr>
+        <p:txBody>
+          <a:bodyPr wrap="square" lIns="0" rIns="0" tIns="0" bIns="0" anchor="t">
+            <a:spAutoFit/>
+          </a:bodyPr>
+          <a:lstStyle/>
+          <a:p>
+            <a:pPr algn="l">
+              <a:lnSpc>
+                <a:spcPct val="112000"/>
+              </a:lnSpc>
+            </a:pPr>
+            <a:r>
+              <a:rPr sz="1250" b="0" i="0">
+                <a:solidFill>
+                  <a:srgbClr val="6B7685"/>
+                </a:solidFill>
+                <a:latin typeface="Arial"/>
+              </a:rPr>
+              <a:t>Слайды и материалы появляются в чате по мере проведения занятий.</a:t>
+            </a:r>
+          </a:p>
+        </p:txBody>
+      </p:sp>
+      <p:sp>
+        <p:nvSpPr>
+          <p:cNvPr id="19" name="Rounded Rectangle 18"/>
+          <p:cNvSpPr/>
+          <p:nvPr/>
+        </p:nvSpPr>
+        <p:spPr>
+          <a:xfrm>
+            <a:off x="4937760" y="4526280"/>
+            <a:ext cx="6766560" cy="1234440"/>
+          </a:xfrm>
+          <a:prstGeom prst="roundRect">
+            <a:avLst>
+              <a:gd name="adj" fmla="val 24691"/>
+            </a:avLst>
+          </a:prstGeom>
+          <a:solidFill>
+            <a:srgbClr val="F4F7FA"/>
+          </a:solidFill>
+          <a:ln w="19050">
+            <a:solidFill>
+              <a:srgbClr val="1C7293"/>
+            </a:solidFill>
+          </a:ln>
+          <a:effectLst/>
+        </p:spPr>
+        <p:style>
+          <a:lnRef idx="1">
+            <a:schemeClr val="accent1"/>
+          </a:lnRef>
+          <a:fillRef idx="3">
+            <a:schemeClr val="accent1"/>
+          </a:fillRef>
+          <a:effectRef idx="2">
+            <a:schemeClr val="accent1"/>
+          </a:effectRef>
+          <a:fontRef idx="minor">
+            <a:schemeClr val="lt1"/>
+          </a:fontRef>
+        </p:style>
+        <p:txBody>
+          <a:bodyPr rtlCol="0" anchor="ctr"/>
+          <a:lstStyle/>
+          <a:p>
+            <a:pPr algn="ctr"/>
+          </a:p>
+        </p:txBody>
+      </p:sp>
+      <p:sp>
+        <p:nvSpPr>
+          <p:cNvPr id="20" name="Rounded Rectangle 19"/>
+          <p:cNvSpPr/>
+          <p:nvPr/>
+        </p:nvSpPr>
+        <p:spPr>
+          <a:xfrm>
+            <a:off x="5157216" y="4800600"/>
+            <a:ext cx="566928" cy="566928"/>
+          </a:xfrm>
+          <a:prstGeom prst="roundRect">
+            <a:avLst>
+              <a:gd name="adj" fmla="val 26000"/>
+            </a:avLst>
+          </a:prstGeom>
+          <a:solidFill>
+            <a:srgbClr val="028090"/>
+          </a:solidFill>
+          <a:ln>
+            <a:noFill/>
+          </a:ln>
+          <a:effectLst/>
+        </p:spPr>
+        <p:style>
+          <a:lnRef idx="1">
+            <a:schemeClr val="accent1"/>
+          </a:lnRef>
+          <a:fillRef idx="3">
+            <a:schemeClr val="accent1"/>
+          </a:fillRef>
+          <a:effectRef idx="2">
+            <a:schemeClr val="accent1"/>
+          </a:effectRef>
+          <a:fontRef idx="minor">
+            <a:schemeClr val="lt1"/>
+          </a:fontRef>
+        </p:style>
+        <p:txBody>
+          <a:bodyPr rtlCol="0" anchor="ctr"/>
+          <a:lstStyle/>
+          <a:p>
+            <a:pPr algn="ctr"/>
+          </a:p>
+        </p:txBody>
+      </p:sp>
+      <p:pic>
+        <p:nvPicPr>
+          <p:cNvPr id="21" name="Picture 20" descr="message-square-quote-FFFFFF-64.png"/>
+          <p:cNvPicPr>
+            <a:picLocks noChangeAspect="1"/>
+          </p:cNvPicPr>
+          <p:nvPr/>
+        </p:nvPicPr>
+        <p:blipFill>
+          <a:blip r:embed="rId5"/>
+          <a:stretch>
+            <a:fillRect/>
+          </a:stretch>
+        </p:blipFill>
+        <p:spPr>
+          <a:xfrm>
+            <a:off x="5259263" y="4902647"/>
+            <a:ext cx="351495" cy="351495"/>
+          </a:xfrm>
+          <a:prstGeom prst="rect">
+            <a:avLst/>
+          </a:prstGeom>
+        </p:spPr>
+      </p:pic>
+      <p:sp>
+        <p:nvSpPr>
+          <p:cNvPr id="22" name="TextBox 21"/>
+          <p:cNvSpPr txBox="1"/>
+          <p:nvPr/>
+        </p:nvSpPr>
+        <p:spPr>
+          <a:xfrm>
+            <a:off x="5989320" y="4745736"/>
+            <a:ext cx="5486400" cy="365760"/>
+          </a:xfrm>
+          <a:prstGeom prst="rect">
+            <a:avLst/>
+          </a:prstGeom>
+          <a:noFill/>
+        </p:spPr>
+        <p:txBody>
+          <a:bodyPr wrap="square" lIns="0" rIns="0" tIns="0" bIns="0" anchor="t">
+            <a:spAutoFit/>
+          </a:bodyPr>
+          <a:lstStyle/>
+          <a:p>
+            <a:pPr algn="l">
+              <a:lnSpc>
+                <a:spcPct val="115000"/>
+              </a:lnSpc>
+            </a:pPr>
+            <a:r>
+              <a:rPr sz="1600" b="1" i="0">
+                <a:solidFill>
+                  <a:srgbClr val="21295C"/>
+                </a:solidFill>
+                <a:latin typeface="Arial"/>
+              </a:rPr>
+              <a:t>Вопросы между занятиями</a:t>
+            </a:r>
+          </a:p>
+        </p:txBody>
+      </p:sp>
+      <p:sp>
+        <p:nvSpPr>
+          <p:cNvPr id="23" name="TextBox 22"/>
+          <p:cNvSpPr txBox="1"/>
+          <p:nvPr/>
+        </p:nvSpPr>
+        <p:spPr>
+          <a:xfrm>
+            <a:off x="5989320" y="5148072"/>
+            <a:ext cx="5486400" cy="502920"/>
+          </a:xfrm>
+          <a:prstGeom prst="rect">
+            <a:avLst/>
+          </a:prstGeom>
+          <a:noFill/>
+        </p:spPr>
+        <p:txBody>
+          <a:bodyPr wrap="square" lIns="0" rIns="0" tIns="0" bIns="0" anchor="t">
+            <a:spAutoFit/>
+          </a:bodyPr>
+          <a:lstStyle/>
+          <a:p>
+            <a:pPr algn="l">
+              <a:lnSpc>
+                <a:spcPct val="112000"/>
+              </a:lnSpc>
+            </a:pPr>
+            <a:r>
+              <a:rPr sz="1250" b="0" i="0">
+                <a:solidFill>
+                  <a:srgbClr val="6B7685"/>
+                </a:solidFill>
+                <a:latin typeface="Arial"/>
+              </a:rPr>
+              <a:t>Можно задать вопрос по курсу и получить ответ, не дожидаясь пары.</a:t>
             </a:r>
           </a:p>
         </p:txBody>

--- a/library/lectures/lec-01/rendered/lec-01.pptx
+++ b/library/lectures/lec-01/rendered/lec-01.pptx
@@ -11,9 +11,6 @@
     <p:sldId id="259" r:id="rId11"/>
     <p:sldId id="260" r:id="rId12"/>
     <p:sldId id="261" r:id="rId13"/>
-    <p:sldId id="288" r:id="rId40"/>
-    <p:sldId id="289" r:id="rId41"/>
-    <p:sldId id="292" r:id="rId44"/>
     <p:sldId id="262" r:id="rId14"/>
     <p:sldId id="263" r:id="rId15"/>
     <p:sldId id="264" r:id="rId16"/>
@@ -22,11 +19,12 @@
     <p:sldId id="267" r:id="rId19"/>
     <p:sldId id="268" r:id="rId20"/>
     <p:sldId id="269" r:id="rId21"/>
+    <p:sldId id="270" r:id="rId22"/>
     <p:sldId id="271" r:id="rId23"/>
-    <p:sldId id="270" r:id="rId22"/>
     <p:sldId id="272" r:id="rId24"/>
     <p:sldId id="273" r:id="rId25"/>
     <p:sldId id="274" r:id="rId26"/>
+    <p:sldId id="275" r:id="rId27"/>
     <p:sldId id="276" r:id="rId28"/>
     <p:sldId id="277" r:id="rId29"/>
     <p:sldId id="278" r:id="rId30"/>
@@ -39,6 +37,8 @@
     <p:sldId id="285" r:id="rId37"/>
     <p:sldId id="286" r:id="rId38"/>
     <p:sldId id="287" r:id="rId39"/>
+    <p:sldId id="288" r:id="rId40"/>
+    <p:sldId id="289" r:id="rId41"/>
     <p:sldId id="290" r:id="rId42"/>
     <p:sldId id="291" r:id="rId43"/>
   </p:sldIdLst>
@@ -537,19 +537,32 @@
           <a:lstStyle/>
           <a:p>
             <a:r>
-              <a:t>Сейчас вы видите простой эксперимент: ноутбук с веб-камерой через проектор показывает изображение зала, а небольшая программа в реальном времени обводит каждого присутствующего рамкой и считает людей в кадре. Под капотом — модель YOLOv8 от Ultralytics, опубликованная в 2023 году. Она обучена на стандартном датасете COCO и распознаёт 80 классов объектов; для нас сейчас важен только класс «person».</a:t>
-            </a:r>
-          </a:p>
-          <a:p/>
+              <a:t>Сейчас вы видите простой эксперимент: ноутбук с веб-камерой через проектор показывает изображение зала, а небольшая программа в реальном времени обводит каждого присутствующего рамкой и считает людей в кадре. Под капотом — модель YOLOv8 [1] от Ultralytics, опубликованная в 2023 году. Она обучена на стандартном датасете COCO и распознаёт 80 классов объектов; для нас сейчас важен только класс «person».</a:t>
+            </a:r>
+          </a:p>
           <a:p>
             <a:r>
               <a:t>У этой демонстрации три значимых свойства, которые формируют один из главных тезисов лекции. Во-первых, модель работает локально — на CPU обычного ноутбука, без видеокарты и без обращения к облачным серверам. Во-вторых, скорость составляет около 30 кадров в секунду, что достаточно для реального времени на видеопотоке. В-третьих, никакого интернета: камера, модель и проектор — три компонента в одной комнате, никакие изображения никуда не передаются.</a:t>
             </a:r>
           </a:p>
-          <a:p/>
           <a:p>
             <a:r>
               <a:t>Это пример того, что в литературе называют narrow AI — система, обученная на одной чётко поставленной задаче и больше ничего не умеющая. Та же модель не сможет вести с вами беседу, не напишет код, не предложит маркетинговую стратегию. Зато на своей единственной задаче она работает быстро и предсказуемо. Сегодня мы увидим, что таких систем в инженерной практике большинство, и что выбирать тип AI под задачу — отдельный навык, который мы будем тренировать весь курс.</a:t>
+            </a:r>
+          </a:p>
+          <a:p>
+            <a:r>
+              <a:t>Источники:</a:t>
+            </a:r>
+          </a:p>
+          <a:p>
+            <a:r>
+              <a:t>[1] Ultralytics — YOLOv8 (2023) — narrow-модель детекции; локальный inference ~30 fps на CPU без интернета. https://docs.ultralytics.com/models/yolov8/</a:t>
+            </a:r>
+          </a:p>
+          <a:p>
+            <a:r>
+              <a:t>[2] Google — MediaPipe — on-device real-time ML pipelines — класс локальных narrow-решений. https://ai.google.dev/edge/mediapipe/solutions/guide</a:t>
             </a:r>
           </a:p>
         </p:txBody>
@@ -622,28 +635,44 @@
               <a:t>История AI как инженерной дисциплины — около семидесяти лет. Чтобы двадцать фактоидов не сливались, разделим хронологию на три тематические группы.</a:t>
             </a:r>
           </a:p>
-          <a:p/>
           <a:p>
             <a:r>
               <a:t>Первая группа — открытия и первая практика, с пятидесятых до восьмидесятых. В пятидесятом году Тьюринг публикует «Imitation Game». В пятьдесят шестом — Дартмутская конференция, где Маккарти, Мински, Рочестер и Шеннон вводят сам термин «artificial intelligence». В шестьдесят шестом — Вайценбаум создаёт ELIZA, простую программу-психотерапевта, и обнаруживает, что пользователи приписывают ей понимание. В восьмидесятые — коммерческий бум экспертных систем: рулбейзед-системы XCON, MYCIN, японский проект «Пятого поколения».</a:t>
             </a:r>
           </a:p>
-          <a:p/>
           <a:p>
             <a:r>
               <a:t>Вторая группа — зимы и прорывы, с семидесятых до начала десятых. Первая зима после доклада Лайтхилла британскому правительству и сокращения финансирования DARPA. Вторая — обрушение рынка специализированных AI-машин Symbolics в конце восьмидесятых. И прорывы между зимами: в девяносто седьмом Deep Blue от IBM побеждает Каспарова, оценивая двести миллионов позиций в секунду. В двенадцатом — AlexNet выигрывает ImageNet, доказывая, что глубокие свёрточные сети, обученные на GPU, бьют ручные признаки.</a:t>
             </a:r>
           </a:p>
-          <a:p/>
-          <a:p>
-            <a:r>
-              <a:t>Третья группа — точка перелома и взрыв. В семнадцатом году Васвани и семь соавторов публикуют «Attention Is All You Need», вводя архитектуру Трансформера. На май две тысячи двадцать шестого статья имеет более ста шестидесяти тысяч цитирований Google Scholar. В двадцать втором — OpenAI запускает ChatGPT; миллион пользователей за пять дней. В двадцать четвёртом — двадцать шестом — взрывной рост reasoning-моделей и агентских систем.</a:t>
-            </a:r>
-          </a:p>
-          <a:p/>
+          <a:p>
+            <a:r>
+              <a:t>Третья группа — точка перелома и взрыв. В семнадцатом году Васвани и семь соавторов публикуют «Attention Is All You Need», вводя архитектуру Трансформер [1]а. На май две тысячи двадцать шестого статья имеет более ста шестидесяти тысяч цитирований Google Scholar. В двадцать втором — OpenAI запускает ChatGPT; миллион пользователей за пять дней. В двадцать четвёртом — двадцать шестом — взрывной рост reasoning-моделей и агентских систем.</a:t>
+            </a:r>
+          </a:p>
           <a:p>
             <a:r>
               <a:t>Две зимы важны как методологический урок. Когда обещания массово не сбываются, поле теряет ресурсы. Сегодняшняя волна — четвёртая в истории AI. Пока избегает зимы за счёт того, что часть обещаний действительно сбывается. Но история учит: не все сбудутся, и инженер должен уметь различать то, что работает уже сейчас, от того, что обещано на тридцатый год.</a:t>
+            </a:r>
+          </a:p>
+          <a:p>
+            <a:r>
+              <a:t>Источники:</a:t>
+            </a:r>
+          </a:p>
+          <a:p>
+            <a:r>
+              <a:t>[1] Vaswani et al. — Attention Is All You Need (2017) — Трансформер + self-attention; &gt;160K цитирований (май 2026) — точка перелома. https://arxiv.org/abs/1706.03762 [VFY-day-of]</a:t>
+            </a:r>
+          </a:p>
+          <a:p>
+            <a:r>
+              <a:t>[2] McCorduck — Machines Who Think (2004) — AI Effect через исторические примеры остывания задач до «просто функции». https://www.google.com/books/edition/Machines_Who_Think/dPGij4vsHKgC</a:t>
+            </a:r>
+          </a:p>
+          <a:p>
+            <a:r>
+              <a:t>[3] Dhar — Paradigm Shifts in AI, CACM (2024) — смена парадигм AI как рамка для чтения таймлайна. https://doi.org/10.1145/3664804</a:t>
             </a:r>
           </a:p>
         </p:txBody>
@@ -716,13 +745,11 @@
               <a:t>Мы разобрались, что такое AI и откуда он взялся. Дальше — короткий раздел про настоящее: где AI находится прямо сейчас, в 2026 году.</a:t>
             </a:r>
           </a:p>
-          <a:p/>
           <a:p>
             <a:r>
               <a:t>Сначала — масштаб в цифрах: сколько людей и компаний уже используют AI ежедневно, и почему это одновременно уживается с массовым провалом пилотных проектов. Затем — обзор прорывов 2023–2026 годов от команд, которые не были очевидными фаворитами рынка: это открывает пространство для того, что дальше в курсе будем разбирать вы сами.</a:t>
             </a:r>
           </a:p>
-          <a:p/>
           <a:p>
             <a:r>
               <a:t>Раздел короткий — шесть минут, — но именно он задаёт масштаб: AI одновременно везде и почти нигде не доведён до конца. Это напряжение — центральная тема всего курса.</a:t>
@@ -798,34 +825,64 @@
               <a:t>К двадцать шестому году AI перестал быть отдельным продуктом и стал инфраструктурным слоем, на котором работают другие продукты. Несколько показательных цифр.</a:t>
             </a:r>
           </a:p>
-          <a:p/>
-          <a:p>
-            <a:r>
-              <a:t>ChatGPT по состоянию на февраль 2026 имеет около девятисот миллионов еженедельно активных пользователей. Это weekly active users, не monthly: цифры месячной активности существенно выше. GitHub Copilot имеет более двадцати миллионов пользователей; у тех, кто им регулярно пользуется, до сорока шести процентов кода написано AI, для языка Java — шестьдесят один процент.</a:t>
-            </a:r>
-          </a:p>
-          <a:p/>
-          <a:p>
-            <a:r>
-              <a:t>Stack Overflow Developer Survey 2025, выборка сорок девять тысяч с лишним респондентов из ста семидесяти семи стран, показывает: восемьдесят четыре процента разработчиков используют или планируют использовать AI-инструменты в работе. Пятьдесят один процент профессиональных разработчиков работают с AI ежедневно. И одновременно сорок шесть процентов не доверяют точности AI-ответов на вопросы по коду — против тридцати одного процента годом ранее.</a:t>
-            </a:r>
-          </a:p>
-          <a:p/>
+          <a:p>
+            <a:r>
+              <a:t>ChatGPT по состоянию на февраль 2026 имеет около девятисот миллионов еженедельно активных пользователей [2]. Это weekly active users, не monthly: цифры месячной активности существенно выше. GitHub Copilot имеет более двадцати миллионов пользователей; у тех, кто им регулярно пользуется, до сорока шести процентов кода написано AI [3] [VFY], для языка Java — шестьдесят один процент.</a:t>
+            </a:r>
+          </a:p>
+          <a:p>
+            <a:r>
+              <a:t>Stack Overflow Developer Survey 2025 [1], выборка сорок девять тысяч с лишним респондентов из ста семидесяти семи стран, показывает: восемьдесят четыре процента разработчиков используют или планируют использовать AI-инструменты в работе. Пятьдесят один процент профессиональных разработчиков работают с AI ежедневно. И одновременно сорок шесть процентов не доверяют точности AI-ответов на вопросы по коду — против тридцати одного процента годом ранее.</a:t>
+            </a:r>
+          </a:p>
           <a:p>
             <a:r>
               <a:t>Важная оговорка про доверие. Эти две цифры — пятьдесят один процент ежедневных пользователей и сорок шесть процентов недоверчивых — на первый взгляд кажутся противоречивыми. На самом деле они согласованы: общий тренд — рост проникновения, а точечная оценка точности кода стала критичнее, потому что разработчики накопили опыт работы с AI и научились видеть, где он ошибается. Это не «доверие падает», это «доверие становится более нюансированным». Дисциплина проверки — желательное поведение.</a:t>
             </a:r>
           </a:p>
-          <a:p/>
-          <a:p>
-            <a:r>
-              <a:t>Объём рынка — триста девяносто целых девять десятых миллиарда долларов в 2025 году с прогнозом роста до пятисот тридцати девяти с половиной миллиардов в 2026 (Grand View Research, 2026). По другим методологиям — например, узкому software-only определению Statista — оценки за 2025 год ниже, около 244–260 миллиардов. Разброс отражает то, что считать AI-рынком: продажи моделей, инфраструктуру, embedded-AI, услуги интеграции.</a:t>
-            </a:r>
-          </a:p>
-          <a:p/>
-          <a:p>
-            <a:r>
-              <a:t>И параллельно — контр-факт. По сводным данным деловых изданий, около девяноста процентов AI-пилотов в России не доходят до полноценного промышленного развёртывания. Источник оценки — исследование консалтинговой компании Intellectual Analytics (декабрь 2025 — февраль 2026, опубликовано Vedomosti в марте), выборка из пятидесяти крупнейших организаций в IT, промышленности, финансах, госсекторе и транспорте/логистике. Это не репрезентативная выборка по всей экономике; это срез по крупным игрокам, где AI-пилоты лучше всего задокументированы. Тем не менее, сочетание массового внедрения и массового провала формирует центральную инженерную задачу курса.</a:t>
+          <a:p>
+            <a:r>
+              <a:t>Объём рынка — триста девяносто целых девять десятых миллиарда долларов в 2025 году с прогнозом роста до пятисот тридцати девяти с половиной миллиардов в 2026 (Grand View Research, 2026 [4]). По другим методологиям — например, узкому software-only определению Statista — оценки за 2025 год ниже, около 244–260 миллиардов. Разброс отражает то, что считать AI-рынком: продажи моделей, инфраструктуру, embedded-AI, услуги интеграции.</a:t>
+            </a:r>
+          </a:p>
+          <a:p>
+            <a:r>
+              <a:t>И параллельно — контр-факт. По сводным данным деловых изданий, около девяноста процентов AI-пилотов в России не доходят до полноценного промышленного развёртывания. Источник оценки — исследование консалтинговой компании Intellectual Analytics [5] (декабрь 2025 — февраль 2026, опубликовано Vedomosti в марте), выборка из пятидесяти крупнейших организаций в IT, промышленности, финансах, госсекторе и транспорте/логистике. Это не репрезентативная выборка по всей экономике; это срез по крупным игрокам, где AI-пилоты лучше всего задокументированы. Тем не менее, сочетание массового внедрения и массового провала формирует центральную инженерную задачу курса.</a:t>
+            </a:r>
+          </a:p>
+          <a:p>
+            <a:r>
+              <a:t>Источники:</a:t>
+            </a:r>
+          </a:p>
+          <a:p>
+            <a:r>
+              <a:t>[1] Stack Overflow — Developer Survey 2025 — n=49k+/177 стран; 51% профи ежедневно, 84% используют/планируют, 46% не доверяют коду. https://survey.stackoverflow.co/2025</a:t>
+            </a:r>
+          </a:p>
+          <a:p>
+            <a:r>
+              <a:t>[2] OpenAI — ChatGPT WAU (фев 2026) — ~900M weekly active users — AI как инфраструктура. https://techcrunch.com/2026/02/27/chatgpt-reaches-900m-weekly-active-users/ [VFY-day-of]</a:t>
+            </a:r>
+          </a:p>
+          <a:p>
+            <a:r>
+              <a:t>[3] GitHub — Octoverse 2025 — adoption Copilot; ВНИМАНИЕ: «46% кода» этим отчётом НЕ подтверждается [VFY]. https://github.blog/news-insights/octoverse/octoverse-a-new-developer-joins-github-every-second-as-ai-leads-typescript-to-1/ [VFY-day-of]</a:t>
+            </a:r>
+          </a:p>
+          <a:p>
+            <a:r>
+              <a:t>[4] Grand View Research (2026) — AI-рынок $390.9B (2025) → $539.5B (2026), CAGR 30.6%. https://www.grandviewresearch.com/industry-analysis/artificial-intelligence-ai-market [VFY-day-of]</a:t>
+            </a:r>
+          </a:p>
+          <a:p>
+            <a:r>
+              <a:t>[5] Vedomosti / Intellectual Analytics (мар 2026) — контр-факт: ~9 из 10 пилотов РФ не доходят до прода (n=50). https://www.vedomosti.ru/technology/articles/2026/03/24/1184974-biznes-svernul-ili-otlozhil-9-iz-10-proektov-po-vnedreniyu-generativnogo-ii [VFY-day-of]</a:t>
+            </a:r>
+          </a:p>
+          <a:p>
+            <a:r>
+              <a:t>[6] Gartner — пресс-релиз (окт 2024) — 80% инженеров осваивают GenAI к 2027. https://www.gartner.com/en/newsroom/press-releases/2024-10-03-gartner-says-generative-ai-will-require-80-percent-of-engineering-workforce-to-upskill-through-2027 [VFY-day-of]</a:t>
             </a:r>
           </a:p>
         </p:txBody>
@@ -898,34 +955,64 @@
               <a:t>Глядя на цифры из предыдущего слайда, легко решить, что всё уже сделано: лидируют OpenAI, Google, Anthropic — крупнейшие игроки с многомиллиардными бюджетами. Это впечатление обманчиво. За последние три года в поле AI было несколько громких событий, каждое из которых показывает: пространство возможностей открыто, и серьёзные прорывы делают не только первые игроки.</a:t>
             </a:r>
           </a:p>
-          <a:p/>
-          <a:p>
-            <a:r>
-              <a:t>Урок: небольшая европейская команда может выпустить модель уровня крупных игроков за несколько месяцев от основания компании. Эпизод первый — Mistral 7B, сентябрь двадцать третьего года. Французская лаборатория Mistral AI, основанная в начале того же года выходцами из Meta и Google DeepMind, выпустила модель под лицензией Apache 2.0 — без ограничений на коммерческое использование. По бенчмаркам Mistral 7B превзошёл Llama-2 13B, модель почти вдвое большего размера.</a:t>
-            </a:r>
-          </a:p>
-          <a:p/>
-          <a:p>
-            <a:r>
-              <a:t>Урок: даже спорная методология подсчёта себестоимости может вызвать реальный, измеримый шок на глобальном рынке — проверяйте заявленные цифры, но не игнорируйте их эффект. Эпизод второй — DeepSeek R1, январь двадцать пятого. Китайская лаборатория выпустила reasoning-модель уровня OpenAI o1: девяносто семь и три процента на бенчмарке MATH-500 против девяносто шести и четырёх у o1. Опубликованная стоимость одного финального тренировочного прогона V3 — около пяти и шести миллионов долларов, на порядки меньше западных оценок. Полная стоимость инфраструктуры по оценке SemiAnalysis — один и три–один и шесть миллиарда. Это разные числа: стоимость одного тренировочного прогона и полная инфраструктура. Двадцать седьмого января рынок отреагировал — капитализация Nvidia упала на пятьсот восемьдесят девять миллиардов долларов за один день, крупнейшая однодневная потеря капитализации в истории.</a:t>
-            </a:r>
-          </a:p>
-          <a:p/>
-          <a:p>
-            <a:r>
-              <a:t>Урок: один человек с правильным концептом может выпустить агент или продукт, меняющий рынок за недели. Эпизод третий — OpenClaw, ноябрь двадцать пятого. Питер Стейнбергер, известный по Mac-разработке, в одиночку запустил open-source автономного AI-агента. Проект сменил несколько имён — Clawdbot, Moltbot — и закрепился как OpenClaw. К началу двадцать шестого года проект собрал больше ста тысяч звёзд на GitHub (из них шестьдесят тысяч за первые семьдесят два часа).</a:t>
-            </a:r>
-          </a:p>
-          <a:p/>
-          <a:p>
-            <a:r>
-              <a:t>Урок: один человек с правильным концептом может построить инфраструктурный слой, на который опираются тысячи — не продукт для конечного пользователя, а фундамент, на котором работает вся открытая экосистема. Эпизод четвёртый — llama.cpp и ggml.ai, история Георгия Герганова. Проект начался как сольная инициатива Герганова — автора whisper.cpp — и вырос в маленькую независимую команду ggml.ai. Двадцатого февраля двадцать шестого года команда, вместо привлечения венчурного финансирования, присоединилась к Hugging Face за инфраструктурную поддержку, сохранив полную автономию и техническое лидерство: проект остался «на сто процентов open-source, community-driven, как и сейчас». В марте двадцать шестого llama.cpp пересёк сто тысяч звёзд на GitHub — быстрее, чем PyTorch или TensorFlow. К середине года — около ста семнадцати тысяч звёзд, около двадцати тысяч форков, вклад более семисот разработчиков.</a:t>
-            </a:r>
-          </a:p>
-          <a:p/>
+          <a:p>
+            <a:r>
+              <a:t>Урок: небольшая европейская команда может выпустить модель уровня крупных игроков за несколько месяцев от основания компании. Эпизод первый — Mistral 7B, сентябрь двадцать третьего года. Французская лаборатория Mistral AI, основанная в начале того же года выходцами из Meta и Google DeepMind, выпустила модель под лицензией Apache 2.0 — без ограничений на коммерческое использование. По бенчмаркам Mistral 7B превзошёл Llama-2 13B [1], модель почти вдвое большего размера.</a:t>
+            </a:r>
+          </a:p>
+          <a:p>
+            <a:r>
+              <a:t>Урок: даже спорная методология подсчёта себестоимости может вызвать реальный, измеримый шок на глобальном рынке — проверяйте заявленные цифры, но не игнорируйте их эффект. Эпизод второй — DeepSeek R1, январь двадцать пятого. Китайская лаборатория выпустила reasoning-модель уровня OpenAI o1: девяносто семь и три процента на бенчмарке MATH-500 [2] против девяносто шести и четырёх у o1. Опубликованная стоимость одного финального тренировочного прогона V3 — около пяти и шести миллионов долларов, на порядки меньше западных оценок. Полная стоимость инфраструктуры по оценке SemiAnalysis [3] — один и три–один и шесть миллиарда. Это разные числа: стоимость одного тренировочного прогона и полная инфраструктура. Двадцать седьмого января рынок отреагировал — капитализация Nvidia упала на пятьсот восемьдесят девять миллиардов [4] долларов за один день, крупнейшая однодневная потеря капитализации в истории.</a:t>
+            </a:r>
+          </a:p>
+          <a:p>
+            <a:r>
+              <a:t>Урок: один человек с правильным концептом может выпустить агент или продукт, меняющий рынок за недели. Эпизод третий — OpenClaw [5], ноябрь двадцать пятого. Питер Стейнбергер, известный по Mac-разработке, в одиночку запустил open-source автономного AI-агента. Проект сменил несколько имён — Clawdbot, Moltbot — и закрепился как OpenClaw. К началу двадцать шестого года проект собрал больше ста тысяч звёзд на GitHub (из них шестьдесят тысяч за первые семьдесят два часа).</a:t>
+            </a:r>
+          </a:p>
+          <a:p>
+            <a:r>
+              <a:t>Урок: один человек с правильным концептом может построить инфраструктурный слой, на который опираются тысячи — не продукт для конечного пользователя, а фундамент, на котором работает вся открытая экосистема. Эпизод четвёртый — llama.cpp [6] и ggml.ai, история Георгия Герганова. Проект начался как сольная инициатива Герганова — автора whisper.cpp — и вырос в маленькую независимую команду ggml.ai. Двадцатого февраля двадцать шестого года команда, вместо привлечения венчурного финансирования, присоединилась к Hugging Face за инфраструктурную поддержку, сохранив полную автономию и техническое лидерство: проект остался «на сто процентов open-source, community-driven, как и сейчас». В марте двадцать шестого llama.cpp пересёк сто тысяч звёзд на GitHub — быстрее, чем PyTorch или TensorFlow. К середине года — около ста семнадцати тысяч звёзд, около двадцати тысяч форков, вклад более семисот разработчиков.</a:t>
+            </a:r>
+          </a:p>
           <a:p>
             <a:r>
               <a:t>Не отчаивайтесь. Курс готовит вас к работе с устойчивыми инженерными концептами, которые переживают смену поколений моделей.</a:t>
+            </a:r>
+          </a:p>
+          <a:p>
+            <a:r>
+              <a:t>Источники:</a:t>
+            </a:r>
+          </a:p>
+          <a:p>
+            <a:r>
+              <a:t>[1] Mistral AI — Announcing Mistral 7B (сен 2023) — Apache 2.0, обходит Llama-2 13B — малая команда уровня лидеров. https://mistral.ai/news/announcing-mistral-7b</a:t>
+            </a:r>
+          </a:p>
+          <a:p>
+            <a:r>
+              <a:t>[2] DeepSeek-R1 — тех.отчёт (янв 2025) — reasoning уровня o1; 97.3% MATH-500; спорная себестоимость. https://arxiv.org/abs/2501.12948</a:t>
+            </a:r>
+          </a:p>
+          <a:p>
+            <a:r>
+              <a:t>[3] SemiAnalysis — DeepSeek cost analysis (2025) — полная инфра $1.3–1.6B vs marginal train run V3 $5.6M — разные числа. https://semianalysis.com/2025/01/31/deepseek-debates/ [VFY-day-of]</a:t>
+            </a:r>
+          </a:p>
+          <a:p>
+            <a:r>
+              <a:t>[4] Bloomberg — Nvidia $589B drop (27 янв 2025) — крупнейшая однодневная потеря капитализации в истории. https://www.bloomberg.com/news/articles/2025-01-27/asml-sinks-as-china-ai-startup-triggers-panic-in-tech-stocks [VFY-day-of]</a:t>
+            </a:r>
+          </a:p>
+          <a:p>
+            <a:r>
+              <a:t>[5] Steinberger — OpenClaw (GitHub) — соло open-source агент, 100K★ за квартал; rename-churn. https://github.com/openclaw/openclaw [VFY-day-of]</a:t>
+            </a:r>
+          </a:p>
+          <a:p>
+            <a:r>
+              <a:t>[6] Gerganov — llama.cpp / ggml.ai — соло→HF (фев 2026), 100K+★ быстрее PyTorch/TensorFlow. https://github.com/ggml-org/llama.cpp [VFY-day-of]</a:t>
             </a:r>
           </a:p>
         </p:txBody>
@@ -998,13 +1085,11 @@
               <a:t>Мы разобрались, что такое AI и где мы сейчас. Дальше — самый большой раздел лекции, двадцать три минуты. Четыре способа реализации систем с AI: модель, чат, агент, приложение.</a:t>
             </a:r>
           </a:p>
-          <a:p/>
           <a:p>
             <a:r>
               <a:t>Структура раздела: сначала общая слоистая модель и классификатор «задача × модальность». Затем сравнение трёх способов через квадрант контроля. Затем — детальный разбор каждого типа со схемой и примером. И в финале — практический инструмент: два диагностических вопроса плюс квадрант, который вы будете применять на семинаре.</a:t>
             </a:r>
           </a:p>
-          <a:p/>
           <a:p>
             <a:r>
               <a:t>Главная идея, которую держим в голове весь раздел: эти четыре типа — не альтернативы, а слои. Каждый следующий включает предыдущий и добавляет новые компоненты.</a:t>
@@ -1077,43 +1162,52 @@
           <a:lstStyle/>
           <a:p>
             <a:r>
-              <a:t>Прежде чем разбирать каждый из четырёх типов реализаций, важно зафиксировать ключевую идею: это не четыре альтернативные технологии, а четыре способа реализации одной и той же задачи со слоистой структурой. Каждый следующий уровень включает предыдущий и добавляет новые компоненты.</a:t>
-            </a:r>
-          </a:p>
-          <a:p/>
+              <a:t>Прежде чем разбирать каждый из четырёх типов реализаций, важно зафиксировать ключевую идею: это не четыре альтернативные технологии, а четыре способа реализации одной и той же задачи со слоист [1]ой структурой. Каждый следующий уровень включает предыдущий и добавляет новые компоненты.</a:t>
+            </a:r>
+          </a:p>
           <a:p>
             <a:r>
               <a:t>Модель — самый базовый слой. Stateless-инференс на одной задаче. На вход данные, на выход предсказание. Без интерфейса, без памяти, без инструментов.</a:t>
             </a:r>
           </a:p>
-          <a:p/>
           <a:p>
             <a:r>
               <a:t>Чат — следующий слой. Та же модель, но обёрнутая в текстовый интерфейс с памятью диалога в пределах сессии. Пользователь пишет сообщение, история обоих сообщений включается в контекст следующего обращения.</a:t>
             </a:r>
           </a:p>
-          <a:p/>
           <a:p>
             <a:r>
               <a:t>Агент — ещё один слой. К чату добавляется возможность вызывать внешние инструменты — поиск, файловую систему, API, выполнение кода — и логика планирования последовательности действий.</a:t>
             </a:r>
           </a:p>
-          <a:p/>
           <a:p>
             <a:r>
               <a:t>Приложение — внешний слой. Снаружи это обычный продукт со своими формами, кнопками, интеграциями. AI работает внутри как один из компонентов. Пользователь не пишет промпты, не общается с моделью напрямую.</a:t>
             </a:r>
           </a:p>
-          <a:p/>
           <a:p>
             <a:r>
               <a:t>Эта вложенность важна потому, что многие практические недоразумения возникают из попытки выбрать между уровнями, как будто это альтернативы. На самом деле каждое следующее обёртывание — это инженерное решение, добавляющее способности и одновременно сложность, стоимость, потенциал ошибок. Чем выше уровень обвязки, тем больше места для багов между AI-компонентом и его окружением.</a:t>
             </a:r>
           </a:p>
-          <a:p/>
           <a:p>
             <a:r>
               <a:t>В курсе мы будем многократно возвращаться к этой слоистой модели. Когда мы разбираем YOLO-детектор на конвейере, мы остаёмся на уровне модели. Когда мы используем ChatGPT для аналитики — на уровне чата. Когда строим агента, читающего двести PDF — на уровне агента. Когда говорим про Notion AI или YandexGPT в Поиске — про приложения, в которых AI лишь один из компонентов.</a:t>
+            </a:r>
+          </a:p>
+          <a:p>
+            <a:r>
+              <a:t>Источники:</a:t>
+            </a:r>
+          </a:p>
+          <a:p>
+            <a:r>
+              <a:t>[1] Anthropic — Building Effective Agents (2024) — слоистая эскалация: простейшее решение → наращивать при необходимости. https://www.anthropic.com/research/building-effective-agents</a:t>
+            </a:r>
+          </a:p>
+          <a:p>
+            <a:r>
+              <a:t>[2] Weng — LLM Powered Autonomous Agents (2023) — Agent = LLM + Memory + Planning + Tool Use — верх слоистой модели. https://lilianweng.github.io/posts/2023-06-23-agent/</a:t>
             </a:r>
           </a:p>
         </p:txBody>
@@ -1183,31 +1277,42 @@
           <a:lstStyle/>
           <a:p>
             <a:r>
-              <a:t>Чтобы говорить о конкретных AI-инструментах общим языком, нам нужна простая классификация. В курсе мы используем две оси: тип задачи и модальность. Этих двух осей достаточно, чтобы расположить любой AI-инструмент, с которым мы будем работать в дальнейших лекциях. Более глубокая техническая классификация — по подходу к обучению и архитектуре нейросети — для нашего курса не основная цель этой лекции; глубже мы возвращаемся к этим темам на лекции 2.</a:t>
-            </a:r>
-          </a:p>
-          <a:p/>
+              <a:t>Чтобы говорить о конкретных AI-инструментах общим языком, нам нужна простая классификаци [1]я. В курсе мы используем две оси: тип задачи и модальность. Этих двух осей достаточно, чтобы расположить любой AI-инструмент, с которым мы будем работать в дальнейших лекциях. Более глубокая техническая классификация — по подходу к обучению и архитектуре нейросети — для нашего курса не основная цель этой лекции; глубже мы возвращаемся к этим темам на лекции 2.</a:t>
+            </a:r>
+          </a:p>
           <a:p>
             <a:r>
               <a:t>Ось «тип задачи» — что система производит на выходе. Классификация — поставить метку из конечного множества: спам или не спам, дефект или не дефект. Распознавание — обнаружить и идентифицировать что-то во входе: лица, речь, символы. Поиск — найти и отранжировать релевантные элементы: по корпоративной базе знаний, по фотографии. Генерация — создать новое содержимое: текст, изображение, аудио, код. Прогноз — предсказать число или последовательность: спрос, отказ оборудования, цену акции.</a:t>
             </a:r>
           </a:p>
-          <a:p/>
           <a:p>
             <a:r>
               <a:t>Ось «модальность» — с каким типом данных работает система. Текст. Изображение — фотографии, рентгеновские снимки, кадры конвейерной камеры. Звук — речь, музыка, индустриальный шум. Видео — последовательность изображений, часто плюс звук. Структурированные данные — таблицы, временные ряды, графы, базы. В ячейке «Поиск × Структурированные данные» стоит vector DB — база данных для поиска по смысловой похожести, подробнее разберём на слайде про агента. Мультимодальные комбинации — текст плюс изображение, текст плюс аудио плюс видео.</a:t>
             </a:r>
           </a:p>
-          <a:p/>
           <a:p>
             <a:r>
               <a:t>Возьмём три примера, чтобы зафиксировать. Google Translate — задача генерация, модальность текст. AlphaFold — задача прогноз, модальность структурированные данные. YOLO, который вы видели в начале лекции — задача распознавание, модальность изображение.</a:t>
             </a:r>
           </a:p>
-          <a:p/>
           <a:p>
             <a:r>
               <a:t>Эта простая таблица предотвращает смешение разных по природе систем под общим маркетинговым ярлыком «AI». Когда дальше в разделе мы будем разбирать типы реализаций, мы будем спрашивать: какая задача и какая модальность.</a:t>
+            </a:r>
+          </a:p>
+          <a:p>
+            <a:r>
+              <a:t>Источники:</a:t>
+            </a:r>
+          </a:p>
+          <a:p>
+            <a:r>
+              <a:t>[1] Russell &amp; Norvig — AIMA (2021) — классификация AI-систем как рабочий язык курса. https://aima.cs.berkeley.edu/</a:t>
+            </a:r>
+          </a:p>
+          <a:p>
+            <a:r>
+              <a:t>[2] Goodfellow, Bengio, Courville — Deep Learning (2016) — модальности и типы задач в терминах DL. https://www.deeplearningbook.org/</a:t>
             </a:r>
           </a:p>
         </p:txBody>
@@ -1277,43 +1382,47 @@
           <a:lstStyle/>
           <a:p>
             <a:r>
-              <a:t>Одну и ту же задачу можно решить тремя разными способами реализации, и каждый из них по-разному распределяет контроль между разработчиком и пользователем. Чем больше пользователь делегирует AI решение задачи, тем больше нужен жёсткий каркас от разработчика — поэтому Агент окажется в правом верхнем углу квадранта.</a:t>
-            </a:r>
-          </a:p>
-          <a:p/>
+              <a:t>Одну и ту же задачу можно решить тремя разными способами реализации, и каждый из них по-разному распределяет контрол [1]ь между разработчиком и пользователем. Чем больше пользователь делегирует AI решение задачи, тем больше нужен жёсткий каркас от разработчика — поэтому Агент окажется в правом верхнем углу квадранта.</a:t>
+            </a:r>
+          </a:p>
           <a:p>
             <a:r>
               <a:t>Возьмём задачу: извлечь поля из входящего PDF-договора и положить в таблицу. Дата подписания, контрагент, сумма, срок действия. Пять-шесть полей.</a:t>
             </a:r>
           </a:p>
-          <a:p/>
           <a:p>
             <a:r>
               <a:t>Способ первый — модель. Берёте предобученную или тонко настроенную модель извлечения структурированных полей из документов, например DocVQA или специализированную nougat-style модель. Пользователь сам интегрирует API: сам передаёт PDF, сам получает JSON, сам кладёт в свою таблицу. Делегирование от пользователя низкое — он сам контролирует каждый шаг. Контроль разработчика тоже низкий — модель это сырой inference-эндпоинт без оркестрации, без guard rails, без инструментов. Это левый нижний угол квадранта: низкое делегирование по горизонтали, низкий контроль разработчика по вертикали.</a:t>
             </a:r>
           </a:p>
-          <a:p/>
           <a:p>
             <a:r>
               <a:t>Способ второй — чат. Открываете ChatGPT или YandexGPT, прикладываете PDF, пишете «извлеки следующие поля и верни в виде таблицы». Пользователь делегирует задачу словами и может уточнять, но он работает в рамках продукта — средняя степень делегирования. Разработчик задал системный промпт, базовые ограничения, контекстное окно — средний контроль с его стороны. Это центр квадранта.</a:t>
             </a:r>
           </a:p>
-          <a:p/>
           <a:p>
             <a:r>
               <a:t>Способ третий — агент. Пользователь говорит «сделай эту задачу» и одобряет ключевые узлы — высокая степень делегирования, пользователь не управляет промежуточными шагами. Разработчик собрал агента: оркестратор планирует шаги, инструменты — открыть PDF, прогнать OCR, выделить поля, записать в таблицу, у агента есть память между шагами и возможность делать несколько вызовов. Высокий контроль разработчика — он спроектировал весь decision loop, список tools, guard rails и system prompt. Это правый верхний угол квадранта: высокое делегирование по горизонтали, высокий контроль разработчика по вертикали.</a:t>
             </a:r>
           </a:p>
-          <a:p/>
           <a:p>
             <a:r>
               <a:t>Два пустых угла объясняют, почему расположение неслучайно. Левый верхний (высокий контроль разработчика, но пользователь не делегирует) — нет смысла: зачем строить оркестратор, если пользователь сам всё решает по шагам. Правый нижний (полное делегирование без guard rails) — опасная зона: пользователь отдал задачу AI, а разработчик не предусмотрел рамок. Поэтому диагональ снизу-слева вверх-направо — естественная траектория: больше делегирования требует больше каркаса.</a:t>
             </a:r>
           </a:p>
-          <a:p/>
           <a:p>
             <a:r>
               <a:t>Это распределение контроля — не достоинство одного способа над другим. Это инженерное решение: где должен лежать контроль для конкретного сценария. Если важна гибкость пользователя — модель. Если задача типовая, но требует уточнений — чат. Если поток большой и нужна автоматизация — агент. На семинаре будем тренировать этот выбор.</a:t>
+            </a:r>
+          </a:p>
+          <a:p>
+            <a:r>
+              <a:t>Источники:</a:t>
+            </a:r>
+          </a:p>
+          <a:p>
+            <a:r>
+              <a:t>[1] Anthropic — Building Effective Agents (2024) — распределение контроля разработчик↔пользователь по мере делегирования. https://www.anthropic.com/research/building-effective-agents</a:t>
             </a:r>
           </a:p>
         </p:txBody>
@@ -1386,28 +1495,39 @@
               <a:t>Модель в нашей терминологии — это обученная нейросеть или другой ML-алгоритм, которая принимает вход определённого типа и возвращает выход. У неё нет ни состояния между вызовами, ни доступа к внешним инструментам, ни диалога с пользователем. С точки зрения инженерной интеграции это самый простой компонент: вызов модели — это функция, и она ведёт себя как функция.</a:t>
             </a:r>
           </a:p>
-          <a:p/>
           <a:p>
             <a:r>
               <a:t>Очень важная деталь, которую часто упускают: модель — это не самостоятельная система, а компонент. На production вокруг модели всегда стоит обвязка из препроцессинга и постпроцессинга. Схематично: сырой вход — например, кадр с камеры, текст или аудио — проходит через препроцессинг (ресайз, нормализацию, токенизацию), затем через инференс модели, затем через постпроцессинг (фильтрация, форматирование, упаковка bounding box, softmax), и только тогда получается выход для приложения.</a:t>
             </a:r>
           </a:p>
-          <a:p/>
           <a:p>
             <a:r>
               <a:t>За препроцессинг и постпроцессинг отвечает разработчик системы, не сама модель. Это не оговорка — это критически важно для оценки бюджета и сложности AI-проекта. YOLO-детектор сам по себе занимает условные пятьдесят строк кода, но рабочая система с YOLO внутри содержит сотни строк: считывание видеопотока, ресайз кадров, нормализация, NMS-фильтрация после инференса, упаковка результата в формат, который ожидает MES-система завода. Оценка проекта «вкатать YOLO на линию» по объёму работы модели даёт заниженную оценку в десятки раз.</a:t>
             </a:r>
           </a:p>
-          <a:p/>
-          <a:p>
-            <a:r>
-              <a:t>Канонические примеры моделей. YOLO — детекция объектов на изображениях, тот самый, что был в начале лекции. Whisper от OpenAI — распознавание речи. Stable Diffusion — генерация изображений из текста. BERT — векторные представления текста. AlphaFold — предсказание трёхмерной структуры белка по аминокислотной последовательности; за неё Хассабис и Джампер получили Нобелевскую премию по химии 2024 года. Segment Anything от Meta — универсальная сегментация изображений.</a:t>
-            </a:r>
-          </a:p>
-          <a:p/>
+          <a:p>
+            <a:r>
+              <a:t>Канонические примеры моделей. YOLO — детекция объектов на изображениях, тот самый, что был в начале лекции. Whisper от OpenAI — распознавание речи. Stable Diffusion — генерация изображений из текста. BERT — векторные представления текста. AlphaFold [2] — предсказание трёхмерной структуры белка по аминокислотной последовательности; за неё Хассабис и Джампер получили Нобелевскую премию по химии 2024 года. Segment Anything от Meta — универсальная сегментация изображений.</a:t>
+            </a:r>
+          </a:p>
           <a:p>
             <a:r>
               <a:t>Когда модель — правильный выбор. Высокая нагрузка, например обработка видеопотока тридцать кадров в секунду — невозможно для чат-интерфейса. Одна чётко определённая задача со стабильной формой входа и выхода. Требование детерминированности или предсказуемости. Edge-развёртывание без интернета. Встраивание AI как функциональной единицы внутрь большего продукта.</a:t>
+            </a:r>
+          </a:p>
+          <a:p>
+            <a:r>
+              <a:t>Источники:</a:t>
+            </a:r>
+          </a:p>
+          <a:p>
+            <a:r>
+              <a:t>[1] Kreuzberger et al. — MLOps (2023) — pre/post-processing вокруг модели — ответственность разработчика. https://arxiv.org/abs/2205.02302</a:t>
+            </a:r>
+          </a:p>
+          <a:p>
+            <a:r>
+              <a:t>[2] Jumper et al. — AlphaFold, Nature (2021) — канонический пример модели-прогноза; Нобель по химии 2024. https://doi.org/10.1038/s41586-021-03819-2</a:t>
             </a:r>
           </a:p>
         </p:txBody>
@@ -1477,55 +1597,57 @@
           <a:lstStyle/>
           <a:p>
             <a:r>
-              <a:t>Чат удобно обсуждать на бытовом уровне: задал вопрос — получил ответ. Но за этим простым опытом стоит вполне конкретный технический цикл. Понимание этого цикла снимает магию и даёт два практических навыка: как контролировать чат через системный промпт и как объяснить, почему чат «забывает» старые сообщения.</a:t>
-            </a:r>
-          </a:p>
-          <a:p/>
+              <a:t>Чат удобно обсуждать на бытовом уровне: задал вопрос — получил ответ. Но за этим простым опытом стоит вполне конкретный технический цикл. Понимание этого цикла снимает магию и даёт два практических навыка: как контролировать чат через системный промпт [1] и как объяснить, почему чат «забывает» старые сообщения.</a:t>
+            </a:r>
+          </a:p>
           <a:p>
             <a:r>
               <a:t>Шесть шагов цикла. Первый — пользователь вводит текст в окно чата: вопрос, инструкцию, фрагмент данных.</a:t>
             </a:r>
           </a:p>
-          <a:p/>
           <a:p>
             <a:r>
               <a:t>Второй — система берёт введённый текст и присоединяет его к системному промпту. Системный промпт — это заранее заданные разработчиком инструкции: «Ты корпоративный ассистент компании X. Отвечай на русском. Не давай юридических советов. Если не знаешь — скажи "не знаю"». Дополнительно подмешивается вся текущая история чата с начала сессии.</a:t>
             </a:r>
           </a:p>
-          <a:p/>
           <a:p>
             <a:r>
               <a:t>Третий — полный собранный пакет, то есть системный промпт плюс история плюс новое сообщение, отправляется в LLM как один большой текст. Модель не «помнит» прошлый разговор — она каждый раз получает его заново как часть входа.</a:t>
             </a:r>
           </a:p>
-          <a:p/>
           <a:p>
             <a:r>
               <a:t>Четвёртый — модель генерирует ответ токен за токеном на основе вероятностного распределения следующего токена при заданном контексте.</a:t>
             </a:r>
           </a:p>
-          <a:p/>
           <a:p>
             <a:r>
               <a:t>Пятый — ответ модели дописывается в историю чата на стороне системы. С этого момента он часть контекста для всех следующих обращений в этой же сессии.</a:t>
             </a:r>
           </a:p>
-          <a:p/>
           <a:p>
             <a:r>
               <a:t>Шестой — ответ показывается в интерфейсе чата. Пользователь читает, отвечает, и цикл повторяется с шага один. Но теперь история уже больше, и LLM при следующем обращении получит весь набор: системный промпт плюс предыдущие пары вопрос-ответ плюс новое сообщение.</a:t>
             </a:r>
           </a:p>
-          <a:p/>
           <a:p>
             <a:r>
               <a:t>Из этого цикла два практических следствия. Первое — системный промпт это инженерный рычаг. Через него разработчик задаёт рамки чата: тон, роль, ограничения, обязательные форматы ответа. Один и тот же ChatGPT в роли корпоративного ассистента и в роли обычного помощника ведёт себя по-разному именно из-за системного промпта.</a:t>
             </a:r>
           </a:p>
-          <a:p/>
           <a:p>
             <a:r>
               <a:t>Второе — у каждой модели есть контекстное окно: максимальное число токенов за один запрос. Для современных моделей это десятки и сотни тысяч токенов. Когда история чата перестаёт помещаться в окно, старые сообщения выпадают. Поэтому чат «забывает» детали из начала длинного разговора.</a:t>
+            </a:r>
+          </a:p>
+          <a:p>
+            <a:r>
+              <a:t>Источники:</a:t>
+            </a:r>
+          </a:p>
+          <a:p>
+            <a:r>
+              <a:t>[1] Anthropic — Building Effective Agents (2024) — системный промпт как инженерный рычаг; контекст собирается заново каждый шаг. https://www.anthropic.com/research/building-effective-agents</a:t>
             </a:r>
           </a:p>
         </p:txBody>
@@ -1620,6 +1742,111 @@
 </p:notes>
 </file>
 
+<file path=ppt/notesSlides/notesSlide20.xml><?xml version="1.0" encoding="utf-8"?>
+<p:notes xmlns:a="http://schemas.openxmlformats.org/drawingml/2006/main" xmlns:p="http://schemas.openxmlformats.org/presentationml/2006/main" xmlns:r="http://schemas.openxmlformats.org/officeDocument/2006/relationships">
+  <p:cSld>
+    <p:spTree>
+      <p:nvGrpSpPr>
+        <p:cNvPr id="1" name=""/>
+        <p:cNvGrpSpPr/>
+        <p:nvPr/>
+      </p:nvGrpSpPr>
+      <p:grpSpPr>
+        <a:xfrm>
+          <a:off x="0" y="0"/>
+          <a:ext cx="0" cy="0"/>
+          <a:chOff x="0" y="0"/>
+          <a:chExt cx="0" cy="0"/>
+        </a:xfrm>
+      </p:grpSpPr>
+      <p:sp>
+        <p:nvSpPr>
+          <p:cNvPr id="2" name="Slide Image Placeholder 1"/>
+          <p:cNvSpPr>
+            <a:spLocks noGrp="1"/>
+          </p:cNvSpPr>
+          <p:nvPr>
+            <p:ph type="sldImg" idx="2"/>
+          </p:nvPr>
+        </p:nvSpPr>
+        <p:spPr/>
+      </p:sp>
+      <p:sp>
+        <p:nvSpPr>
+          <p:cNvPr id="3" name="Notes Placeholder 2"/>
+          <p:cNvSpPr>
+            <a:spLocks noGrp="1"/>
+          </p:cNvSpPr>
+          <p:nvPr>
+            <p:ph type="body" idx="3" sz="quarter"/>
+          </p:nvPr>
+        </p:nvSpPr>
+        <p:spPr/>
+        <p:txBody>
+          <a:bodyPr/>
+          <a:lstStyle/>
+          <a:p>
+            <a:r>
+              <a:t>Чат — это модель, обёрнутая в текстовый интерфейс с памятью диалога в пределах сессии. Пользователь пишет сообщение, модель отвечает, история обоих сообщений включается в контекст следующего обращения. Это даёт ощущение разговора и позволяет уточнять задачу пошагово, что радикально меняет паттерн использования.</a:t>
+            </a:r>
+          </a:p>
+          <a:p>
+            <a:r>
+              <a:t>Современные чаты — это в первую очередь LLM-чаты, хотя бывают и мультимодальные: с возможностью передавать изображения, аудио, файлы. Канонические продукты вы знаете: ChatGPT, Claude, Gemini, DeepSeek Chat, GigaChat, YandexGPT, Mistral Le Chat. Между ними различия в качестве для разных задач, в длине контекстного окна, в стоимости, в доступности модальностей — но базовый паттерн взаимодействия один.</a:t>
+            </a:r>
+          </a:p>
+          <a:p>
+            <a:r>
+              <a:t>Возьмём конкретный пример. Инженер получает непонятный нормативный документ — скажем, ТЗ от смежного отдела с массой ссылок на стандарты и сложными формулировками. Задача — разобраться и составить чек-лист для собственной работы. Это типовой кейс для чата: разовая задача, требующая диалога, с уточнениями по ходу. Здесь не нужна отдельная специализированная модель, потому что нет потока однотипных задач. Не нужен агент, потому что не требуется автоматически открывать файлы и API. И нет специализированного приложения. Чат — оптимальный инструмент.</a:t>
+            </a:r>
+          </a:p>
+          <a:p>
+            <a:r>
+              <a:t>Важная оговорка для промышленных систем. Чистые чаты в том виде, как они есть «из коробки» — то есть просто LLM плюс UI плюс короткая память сессии — в корпоративной среде почти не встречаются. Почти везде, где речь идёт о реальном внедрении, чат расширен до агента [2]: хотя бы для того, чтобы хранить долгосрочную память между сессиями, или для того, чтобы искать ответ в корпоративной базе знаний через RAG (retrieval-augmented generation). Архитектуру агента — что именно добавляется к чату — разберём на следующем слайде.</a:t>
+            </a:r>
+          </a:p>
+          <a:p>
+            <a:r>
+              <a:t>Выбор чата — это инженерное решение о точке на шкале взаимодействия: где правильно выбран тип взаимодействия с AI, там система работает предсказуемо.</a:t>
+            </a:r>
+          </a:p>
+          <a:p>
+            <a:r>
+              <a:t>Источники:</a:t>
+            </a:r>
+          </a:p>
+          <a:p>
+            <a:r>
+              <a:t>[1] ВЦИОМ — «Нейросети в жизни россиян» (окт 2025) — проникновение AI-чатов в РФ; 51% пользуются раз в неделю+. https://wciom.ru/analytical-reviews/analiticheskii-obzor/neiroseti-v-nashei-zhizni [VFY-day-of]</a:t>
+            </a:r>
+          </a:p>
+          <a:p>
+            <a:r>
+              <a:t>[2] Dam et al. — Survey on LLM-based AI Chatbots (2024) — таксономия LLM-чатов; чистые чаты редки в проде (расширены до агентов). https://arxiv.org/abs/2406.16937</a:t>
+            </a:r>
+          </a:p>
+        </p:txBody>
+      </p:sp>
+      <p:sp>
+        <p:nvSpPr>
+          <p:cNvPr id="4" name="Slide Number Placeholder 3"/>
+          <p:cNvSpPr>
+            <a:spLocks noGrp="1"/>
+          </p:cNvSpPr>
+          <p:nvPr>
+            <p:ph type="sldNum" idx="5" sz="quarter"/>
+          </p:nvPr>
+        </p:nvSpPr>
+        <p:spPr/>
+      </p:sp>
+    </p:spTree>
+  </p:cSld>
+  <p:clrMapOvr>
+    <a:masterClrMapping/>
+  </p:clrMapOvr>
+</p:notes>
+</file>
+
 <file path=ppt/notesSlides/notesSlide21.xml><?xml version="1.0" encoding="utf-8"?>
 <p:notes xmlns:a="http://schemas.openxmlformats.org/drawingml/2006/main" xmlns:p="http://schemas.openxmlformats.org/presentationml/2006/main" xmlns:r="http://schemas.openxmlformats.org/officeDocument/2006/relationships">
   <p:cSld>
@@ -1668,34 +1895,49 @@
               <a:t>Агент — следующий слой после чата. По сравнению с чатом у агента появляется три дополнительных компонента, которых у чата не было.</a:t>
             </a:r>
           </a:p>
-          <a:p/>
-          <a:p>
-            <a:r>
-              <a:t>Первый компонент — оркестратор. Логика управления: план, decision loop, критика. Оркестратор смотрит на цель пользователя, разбивает её на шаги, выбирает, какой инструмент применить на каждом шаге, и решает, когда остановиться.</a:t>
-            </a:r>
-          </a:p>
-          <a:p/>
+          <a:p>
+            <a:r>
+              <a:t>Первый компонент — оркестратор [2]. Логика управления: план, decision loop, критика. Оркестратор смотрит на цель пользователя, разбивает её на шаги, выбирает, какой инструмент применить на каждом шаге, и решает, когда остановиться.</a:t>
+            </a:r>
+          </a:p>
           <a:p>
             <a:r>
               <a:t>Второй — внешняя память. В отличие от чата, у агента есть память за пределами одной сессии: vector database (база данных, оптимизированная для поиска по сходству эмбеддингов; подробнее — позже в курсе), файловая система с промежуточными результатами, лог собственных предыдущих действий.</a:t>
             </a:r>
           </a:p>
-          <a:p/>
           <a:p>
             <a:r>
               <a:t>Третий — инструменты. Возможность вызывать внешние API, читать и писать файлы, выполнять код, делать веб-поиск. Каждый инструмент — это функция с описанием: что делает, какие параметры принимает, что возвращает. Оркестратор выбирает, какой инструмент применить на каждом шаге.</a:t>
             </a:r>
           </a:p>
-          <a:p/>
           <a:p>
             <a:r>
               <a:t>Цикл работы агента, базовая модель ReAct — Reasoning plus Acting. Шаг план: оркестратор и LLM формулируют план действий. Шаг act: выбирается и вызывается инструмент с конкретными параметрами. Шаг observe: результат инструмента наблюдается, записывается в память, передаётся обратно в LLM. Шаг reflect: LLM обдумывает результат — цель достигнута или нет, нужен ли следующий шаг. Если цель достигнута или итераций было слишком много — остановка. Иначе — следующий шаг.</a:t>
             </a:r>
           </a:p>
-          <a:p/>
           <a:p>
             <a:r>
               <a:t>Каноническая формулировка из работы Лилианы Венг: Agent равен LLM плюс Memory плюс Planning плюс Tool Use. Канонические продукты-агенты: Claude Code от Anthropic — агент в терминале для разработки. Devin от Cognition Labs — облачный коддинг-агент. OpenAI Operator — агент для веб-задач. AutoGPT — open-source автономный агент.</a:t>
+            </a:r>
+          </a:p>
+          <a:p>
+            <a:r>
+              <a:t>Источники:</a:t>
+            </a:r>
+          </a:p>
+          <a:p>
+            <a:r>
+              <a:t>[1] Weng — LLM Powered Autonomous Agents (2023) — Agent = LLM + Memory + Planning + Tool Use. https://lilianweng.github.io/posts/2023-06-23-agent/</a:t>
+            </a:r>
+          </a:p>
+          <a:p>
+            <a:r>
+              <a:t>[2] Anthropic — Building Effective Agents (2024) — оркестратор + инструменты + внешняя память как слой над чатом. https://www.anthropic.com/research/building-effective-agents</a:t>
+            </a:r>
+          </a:p>
+          <a:p>
+            <a:r>
+              <a:t>[3] Anthropic — Model Context Protocol (2024) — стандарт подключения инструментов/данных к агенту. https://www.anthropic.com/news/model-context-protocol</a:t>
             </a:r>
           </a:p>
         </p:txBody>
@@ -1768,22 +2010,29 @@
               <a:t>Кейс, на котором естественно появляется агент. У вас есть двести PDF-отчётов, и нужно из каждого извлечь определённые поля — дату, контрагента, сумму договора, — а потом собрать сводную таблицу. Это многошаговая задача с инструментами: открыть файл, прочитать, извлечь, сложить в таблицу. Она плохо подходит ни для модели — нет специализированной модели «возьми двести произвольных PDF и сделай таблицу». Ни для чата — некомфортно копировать двести файлов в окно. Агент — естественный выбор.</a:t>
             </a:r>
           </a:p>
-          <a:p/>
           <a:p>
             <a:r>
               <a:t>Посмотрите на правую половину слайда. Я разбил работу агента на семь шагов, и для каждого явно показан инструмент, который агент использует. Это важно — агент не «думает» весь путь сам, он на каждом шаге решает: какой инструмент сейчас нужен, какие параметры в него передать, как обработать результат.</a:t>
             </a:r>
           </a:p>
-          <a:p/>
           <a:p>
             <a:r>
               <a:t>Шаг один — получить список файлов. Инструмент: файловая система. Шаг два — открыть очередной PDF. Инструмент: PDF reader. Шаг три — извлечь текст. Инструмент: text extraction, через OCR если PDF сканированный, или через парсер если структурный. Шаг четыре — сделать сводку и положить эмбеддинг в vector DB. Шаг пять — найти ключевые поля по запросу: «найди дату подписания», «найди контрагента», «найди сумму». Это комбинация поиска и извлечения через LLM. Шаг шесть — записать строку в сводную таблицу через Sheets API или просто в CSV. Шаг семь — повторить для всех двухсот файлов; здесь работает оркестратор, который держит индекс текущего файла и общее состояние.</a:t>
             </a:r>
           </a:p>
-          <a:p/>
-          <a:p>
-            <a:r>
-              <a:t>Главное — агент это последовательность вызовов конкретных инструментов, оркестрируемая LLM. Не «AI разобрался сам», а «AI вызвал нужные инструменты в правильном порядке».</a:t>
+          <a:p>
+            <a:r>
+              <a:t>Главное — агент это последовательность вызов [1]ов конкретных инструментов, оркестрируемая LLM. Не «AI разобрался сам», а «AI вызвал нужные инструменты в правильном порядке».</a:t>
+            </a:r>
+          </a:p>
+          <a:p>
+            <a:r>
+              <a:t>Источники:</a:t>
+            </a:r>
+          </a:p>
+          <a:p>
+            <a:r>
+              <a:t>[1] Yao et al. — ReAct (2022) — Reasoning+Acting: план→действие→наблюдение→рефлексия с явным инструментом на шаге. https://arxiv.org/abs/2210.03629</a:t>
             </a:r>
           </a:p>
         </p:txBody>
@@ -1853,49 +2102,52 @@
           <a:lstStyle/>
           <a:p>
             <a:r>
-              <a:t>Важная концепция, к которой мы будем возвращаться весь курс: уровни автономии агента. Фэн, Макдональд и Чжан в работе двадцать пятого года предлагают пять уровней, характеризуемых ролью пользователя. Не сложностью модели — именно ролью пользователя.</a:t>
-            </a:r>
-          </a:p>
-          <a:p/>
+              <a:t>Важная концепция, к которой мы будем возвращаться весь курс: уровни автономии агента. Фэн, Макдональд и Чжан [1] в работе двадцать пятого года предлагают пять уровней, характеризуемых ролью пользователя. Не сложностью модели — именно ролью пользователя.</a:t>
+            </a:r>
+          </a:p>
           <a:p>
             <a:r>
               <a:t>Уровень один — Operator. Пользователь активно управляет каждым шагом, агент исполняет под одобрение. Пример: Claude Code в режиме «approve each command» — вы видите команду перед запуском и каждый раз нажимаете Enter.</a:t>
             </a:r>
           </a:p>
-          <a:p/>
           <a:p>
             <a:r>
               <a:t>Уровень два — Collaborator. Пользователь и агент работают совместно, перетекая ролями. Пример: парное программирование с Cursor, где вы и AI пишете в одном файле и редактируете предложения друг друга.</a:t>
             </a:r>
           </a:p>
-          <a:p/>
           <a:p>
             <a:r>
               <a:t>Уровень три — Consultant. Пользователь ставит цель, агент предлагает план и ведёт по шагам, пользователь корректирует. Пример: Devin получает тикет «исправь баг X», предлагает декомпозицию, вы поправляете один шаг, дальше Devin продолжает сам.</a:t>
             </a:r>
           </a:p>
-          <a:p/>
           <a:p>
             <a:r>
               <a:t>Уровень четыре — Approver. Агент действует автономно, пользователь утверждает ключевые узлы. Пример: агент собирает PR, открывает его, ждёт вашего ревью; merge только после approve.</a:t>
             </a:r>
           </a:p>
-          <a:p/>
           <a:p>
             <a:r>
               <a:t>Уровень пять — Observer. Агент работает полностью автономно, пользователь только наблюдает итог. Пример: AutoGPT запущен на ночь с заданием «собери конкурентный анализ» — вы возвращаетесь утром и читаете отчёт.</a:t>
             </a:r>
           </a:p>
-          <a:p/>
           <a:p>
             <a:r>
               <a:t>Параллельно с этой пятёркой существует более старая и широко принятая в инженерии безопасности рамка: где находится человек по отношению к циклу. Human-in-the-loop — человек одобряет каждый шаг, это уровни один-два. Human-on-the-loop — человек наблюдает в реальном времени и прерывает при отклонении, это примерно уровни три-четыре. Human-out-of-the-loop — человек только читает итог, это уровень пять. И отдельно — override modes: на любом уровне можно сохранить возможность ручного перехвата по тревожным сигналам.</a:t>
             </a:r>
           </a:p>
-          <a:p/>
           <a:p>
             <a:r>
               <a:t>Главная мысль слайда: уровень автономии — это дизайн-решение, а не свойство модели. Один и тот же агент в режиме Operator и в режиме Observer — это разные продукты с разными требованиями к надёжности, объяснимости и интерфейсу. На семинарах будем возвращаться к этой шкале при выборе уровня под конкретный риск.</a:t>
+            </a:r>
+          </a:p>
+          <a:p>
+            <a:r>
+              <a:t>Источники:</a:t>
+            </a:r>
+          </a:p>
+          <a:p>
+            <a:r>
+              <a:t>[1] Feng, McDonald, Zhang — Levels of Autonomy (2025) — 5 уровней по роли пользователя: operator→collaborator→consultant→approver→observer. https://arxiv.org/abs/2506.12469</a:t>
             </a:r>
           </a:p>
         </p:txBody>
@@ -1968,46 +2220,54 @@
               <a:t>Приложение — это полноценный продукт для конечного пользователя, в котором AI лишь один из внутренних компонентов. Пользователь не пишет промпты; он нажимает кнопки, заполняет формы, говорит голосом. AI работает «под капотом», и от пользователя редко требуется понимать, что внутри.</a:t>
             </a:r>
           </a:p>
-          <a:p/>
           <a:p>
             <a:r>
               <a:t>Базовая характеристика — AI как функция, а не продукт. Приложение решает доменную задачу, и AI обеспечивает соответствующую функциональность. У хорошего приложения детерминированный пользовательский интерфейс — то же действие пользователя даёт ту же реакцию, даже если AI-выход внутренне варьируется. Приложение добавляет вокруг AI ограничители, запасные сценарии, кэширование, ревью ошибок.</a:t>
             </a:r>
           </a:p>
-          <a:p/>
-          <a:p>
-            <a:r>
-              <a:t>Канонические примеры однозначных приложений. Google Translate — внутри нейронная машинная трансляция; пользователь видит окно ввода и перевод. На двадцать шестой год — более одного миллиарда уникальных пользователей в месяц, около одного триллиона переведённых слов в месяц. Этот триллион считается across Google Translate, Search, Google Lens и Circle to Search, не только в самом приложении Translate.</a:t>
-            </a:r>
-          </a:p>
-          <a:p/>
+          <a:p>
+            <a:r>
+              <a:t>Канонические примеры однозначных приложений. Google [1] Translate — внутри нейронная машинная трансляция; пользователь видит окно ввода и перевод. На двадцать шестой год — более одного миллиарда уникальных пользователей в месяц, около одного триллиона переведённых слов в месяц. Этот триллион считается across Google Translate, Search, Google Lens и Circle to Search, не только в самом приложении Translate.</a:t>
+            </a:r>
+          </a:p>
           <a:p>
             <a:r>
               <a:t>Notion AI — внутри GPT-4 или Claude; пользователь видит кнопки «Summarize», «Improve writing», «Continue writing» прямо в интерфейсе своего рабочего пространства. AI здесь не отдельный чат, а функциональная кнопка рядом с каждым блоком текста.</a:t>
             </a:r>
           </a:p>
-          <a:p/>
           <a:p>
             <a:r>
               <a:t>YandexGPT в Яндекс.Поиске — внутри собственная LLM Яндекса; пользователь видит сгенерированный краткий ответ над списком обычных поисковых результатов. Это типичное «AI как функция»: для пользователя это просто улучшенный поиск, не «чат с AI».</a:t>
             </a:r>
           </a:p>
-          <a:p/>
           <a:p>
             <a:r>
               <a:t>Grammarly — NLP-модели плюс LLM; пользователь видит подчёркивания и подсказки в любом текстовом поле. Яндекс Навигатор и Карты — ML-модели для маршрутизации, ETA-прогнозов, обнаружения пробок. Adobe Firefly — диффузионные модели, кнопка «Generate» в Photoshop.</a:t>
             </a:r>
           </a:p>
-          <a:p/>
           <a:p>
             <a:r>
               <a:t>Кейс, для которого приложение — оптимальный выбор: вам раз в неделю нужно перевести небольшой блок техдокументации с английского на русский. Не нужна standalone-модель — объём не оправдывает развёртывания. Не нужен чат — пользоваться чатом для перевода громоздко. Не нужен агент — задача однашаговая. Google Translate или ЯндексGPT в Поиске — готовые приложения, оптимизированные под именно этот тип использования. Переплачивать сложностью — анти-паттерн.</a:t>
             </a:r>
           </a:p>
-          <a:p/>
           <a:p>
             <a:r>
               <a:t>Важное уточнение перед следующим слайдом. Приложения бывают двух типов. Первый — с пользовательским интерфейсом, как все шесть примеров на этом слайде: пользователь видит UI и взаимодействует с ним. Второй тип — автоматизированные приложения без интерфейса в момент исполнения: ETL-pipeline с AI-классификатором, бэкенд-сервис, который сам забирает данные и складывает результат в таблицу. На следующем слайде, когда мы соберём чек-лист в квадрант, эти два типа окажутся в разных углах.</a:t>
+            </a:r>
+          </a:p>
+          <a:p>
+            <a:r>
+              <a:t>Источники:</a:t>
+            </a:r>
+          </a:p>
+          <a:p>
+            <a:r>
+              <a:t>[1] Google — Translate at 20 (2026) — 1B+ польз./мес, ~1T слов/мес across Translate/Search/Lens — AI как функция. https://blog.google/products-and-platforms/products/translate/fun-facts-google-translate-20-years/ [VFY-day-of]</a:t>
+            </a:r>
+          </a:p>
+          <a:p>
+            <a:r>
+              <a:t>[2] Anthropic — Building Effective Agents (2024) — приложение как внешний слой: промпты скрыты, детерминированный UI. https://www.anthropic.com/research/building-effective-agents</a:t>
             </a:r>
           </a:p>
         </p:txBody>
@@ -2077,49 +2337,62 @@
           <a:lstStyle/>
           <a:p>
             <a:r>
-              <a:t>Кульминация раздела 3 — практический инструмент. Два диагностических вопроса, ответы на которые однозначно определяют один из четырёх типов реализации.</a:t>
-            </a:r>
-          </a:p>
-          <a:p/>
+              <a:t>Кульминация раздела 3 — практический инструмент. Два диагностических вопроса [1] [2] [3], ответы на которые однозначно определяют один из четырёх типов реализации.</a:t>
+            </a:r>
+          </a:p>
           <a:p>
             <a:r>
               <a:t>Вопрос первый: нужно ли взаимодействие с пользователем? Если да — система должна общаться с человеком, принимать его уточнения, отвечать в реальном времени — это семейство чат и агент. Если нет — система работает автономно по триггеру или потоку данных — это модель и приложение в режиме автоматизации.</a:t>
             </a:r>
           </a:p>
-          <a:p/>
           <a:p>
             <a:r>
               <a:t>Вопрос второй: нужна ли самостоятельная работа решения с инструментами? Если да — система должна вызывать API, читать файлы, выполнять код, искать в интернете — это агент и приложение в режиме автоматизации. Если нет — системе достаточно одного шага «вход → выход» — это чат и модель.</a:t>
             </a:r>
           </a:p>
-          <a:p/>
           <a:p>
             <a:r>
               <a:t>Соединяем в квадрант. Нет взаимодействия плюс нет инструментов — модель. Да взаимодействие плюс нет инструментов — чат. Да взаимодействие плюс да инструменты — агент. Нет взаимодействия плюс да инструменты — приложение в режиме автоматизации.</a:t>
             </a:r>
           </a:p>
-          <a:p/>
           <a:p>
             <a:r>
               <a:t>Здесь важная оговорка про «приложение». Приложения, как мы видели на предыдущем слайде, бывают двух типов. Первый — приложения с пользовательским интерфейсом: Notion AI, Translate, Grammarly. У них есть UI, и они попадают в верхние углы квадранта — либо в «Модель» (если пользователь нажимает кнопку и получает результат за один шаг, без диалога), либо в «Чат» (если внутри есть диалог). Второй тип — автоматизированные приложения без пользовательского интерфейса в момент исполнения: ETL-pipeline с AI-классификатором, бэкенд-сервис, который раз в час забирает новые данные и складывает в таблицу. Это и есть правый нижний угол квадранта — «приложение в режиме автоматизации». Не агент — нет диалога с пользователем и нет планирования decision loop. Не модель — есть инструменты, многошаговая логика и оркестрация.</a:t>
             </a:r>
           </a:p>
-          <a:p/>
           <a:p>
             <a:r>
               <a:t>Прогоним три кейса. Конвейерный детектор дефектов: взаимодействие — нет, инструменты — нет, модель. Корпоративный чат для разбора нормативного документа: взаимодействие — да, инструменты — нет, чат. Двести PDF плюс таблица: взаимодействие — да, инструменты — да, агент. Четвёртый угол — приложение в режиме автоматизации — на примере ETL-pipeline с AI-классификатором.</a:t>
             </a:r>
           </a:p>
-          <a:p/>
           <a:p>
             <a:r>
               <a:t>Возвращаясь к центральному вопросу лекции: AI работает там, где задача и тип реализации совпали. Большинство откатившихся пилотов не задавали этих двух вопросов до внедрения; вместо этого выбирали инструмент по моде. Два вопроса плюс квадрант — простая, но дисциплинирующая практика, радикально снижающая риск такого несовпадения.</a:t>
             </a:r>
           </a:p>
-          <a:p/>
           <a:p>
             <a:r>
               <a:t>На семинаре первой недели студенты будут применять этот квадрант к собственным кейсам. Сейчас короткое упражнение: думаем тридцать секунд про инструмент, которым пользуетесь регулярно, и определяем угол квадранта.</a:t>
+            </a:r>
+          </a:p>
+          <a:p>
+            <a:r>
+              <a:t>Источники:</a:t>
+            </a:r>
+          </a:p>
+          <a:p>
+            <a:r>
+              <a:t>[1] Anthropic — Building Effective Agents (2024) — выбор типа реализации по 2 осям: взаимодействие × инструменты. https://www.anthropic.com/research/building-effective-agents</a:t>
+            </a:r>
+          </a:p>
+          <a:p>
+            <a:r>
+              <a:t>[2] Google — AI Agents Whitepaper (2024) — Model + Tools + Orchestration Layer — рамка квадранта. https://www.kaggle.com/whitepaper-agents</a:t>
+            </a:r>
+          </a:p>
+          <a:p>
+            <a:r>
+              <a:t>[3] Ng — Four Agentic Design Patterns (2024) — паттерны Reflection/Tool Use/Planning/Multi-Agent — когда нужен агент. https://www.deeplearning.ai/the-batch/how-agents-can-improve-llm-performance/</a:t>
             </a:r>
           </a:p>
         </p:txBody>
@@ -2192,16 +2465,34 @@
               <a:t>Раздел четыре посвящён тому, где AI ломается, ошибается и опасен. Это не глава ужасов — это инвентаризация классов проблем, которые систематически возникают в AI-системах и которые инженер должен уметь предвидеть. Тема — ваша зона ответственности, а не отдельный вопрос для специалистов по AI safety: вы уже приняли решение встроить AI, и отвечать за инцидент — утечку данных, неправильное решение по клиенту, ошибочный автоматический вердикт — будете вы и ваша команда, а не «модель».</a:t>
             </a:r>
           </a:p>
-          <a:p/>
-          <a:p>
-            <a:r>
-              <a:t>К тому же AI ошибается системно и предсказуемо: bias, галлюцинации, sycophancy, distribution shift повторяются от системы к системе, это не случайные баги, а свойства технологии. И, наконец, граница «что AI не умеет» — тоже ваша зона ответственности: за её пределами нужны человеческое решение, верификация, запасной сценарий, и без понимания этой границы систему нельзя считать спроектированной.</a:t>
-            </a:r>
-          </a:p>
-          <a:p/>
+          <a:p>
+            <a:r>
+              <a:t>К тому же AI ошибается системно и предсказуемо: bias, галлюцинации, sycophancy, distribution shift повторяются от системы к системе, это не случайные баги, а свойства технологии. И, наконец, границ [1] [2] [3]а «что AI не умеет» — тоже ваша зона ответственности: за её пределами нужны человеческое решение, верификация, запасной сценарий, и без понимания этой границы систему нельзя считать спроектированной.</a:t>
+            </a:r>
+          </a:p>
           <a:p>
             <a:r>
               <a:t>Раздел проходит по семи темам, выстроенным от практической инженерной безопасности — что можно сломать или потерять прямо сейчас — к концептуальным границам AI как класса технологий — что AI в принципе не умеет.</a:t>
+            </a:r>
+          </a:p>
+          <a:p>
+            <a:r>
+              <a:t>Источники:</a:t>
+            </a:r>
+          </a:p>
+          <a:p>
+            <a:r>
+              <a:t>[1] NIST — AI RMF 1.0 (2023) — рамка управления рисками AI — граница ответственности инженера. https://www.nist.gov/itl/ai-risk-management-framework</a:t>
+            </a:r>
+          </a:p>
+          <a:p>
+            <a:r>
+              <a:t>[2] NIST — Generative AI Profile 600-1 (2024) — профиль рисков GenAI. https://nvlpubs.nist.gov/nistpubs/ai/NIST.AI.600-1.pdf</a:t>
+            </a:r>
+          </a:p>
+          <a:p>
+            <a:r>
+              <a:t>[3] EU AI Act — Reg. (EU) 2024/1689 — регуляторная рамка; штрафы до 35M€/7%. https://eur-lex.europa.eu/eli/reg/2024/1689/oj/eng</a:t>
             </a:r>
           </a:p>
         </p:txBody>
@@ -2274,40 +2565,54 @@
               <a:t>Раздел четыре мы открыли с общей рамки — границы AI как ваша зона ответственности. Первый конкретный вопрос в этой зоне — куда физически уходят ваши данные, когда вы пишете запрос в облачный AI-сервис.</a:t>
             </a:r>
           </a:p>
-          <a:p/>
           <a:p>
             <a:r>
               <a:t>Ваш текст — а часто и приложенные файлы, изображения, голосовые сообщения — отправляется на серверы провайдера. Что с ними происходит дальше, зависит от тарифа.</a:t>
             </a:r>
           </a:p>
-          <a:p/>
           <a:p>
             <a:r>
               <a:t>Потребительские тарифы — бесплатные и стандартные платные. OpenAI ChatGPT Free и Plus используют пользовательские данные для дообучения моделей по умолчанию; пользователь может отключить это в настройках, но опция требует осознанного действия. Anthropic Claude с сентября двадцать пятого года спрашивает пользователя, согласен ли он делиться данными для обучения; при согласии срок хранения увеличивается до пяти лет. Google Gemini в потребительских тарифах использует данные для обучения по умолчанию; часть переписки выборочно ревьюируется людьми и хранится до трёх лет с обезличиванием.</a:t>
             </a:r>
           </a:p>
-          <a:p/>
-          <a:p>
-            <a:r>
-              <a:t>Enterprise- и API-тарифы. OpenAI Enterprise, ChatGPT Business, OpenAI API с марта двадцать третьего года, Anthropic для бизнеса, Google Workspace, Google Cloud Vertex AI — данные не используются для обучения базовых моделей. Доступны соглашения Zero Data Retention — провайдер вообще не сохраняет промпты и ответы. Стандартом становится SOC 2 compliance, шифрование at rest и in transit.</a:t>
-            </a:r>
-          </a:p>
-          <a:p/>
-          <a:p>
-            <a:r>
-              <a:t>Канонический инцидент. Март-апрель двадцать третьего года, Samsung. Инженеры полупроводникового подразделения в трёх отдельных эпизодах загрузили в потребительский ChatGPT проприетарный код базы данных, транскрипт корпоративного совещания и тестовые последовательности для отладки чипов. Поскольку потребительский ChatGPT на тот момент использовал данные для обучения по умолчанию, корпоративные секреты Samsung фактически попали в датасет OpenAI. Samsung в ответ запретила сотрудникам использование внешних генеративных AI-сервисов и временно ввела лимит в 1024 байта на промпт.</a:t>
-            </a:r>
-          </a:p>
-          <a:p/>
-          <a:p>
-            <a:r>
-              <a:t>Регуляторика. В Европейском Союзе действует EU AI Act, постепенно вводимый в силу с двадцать четвёртого года. Стандартный tier штрафов — до пятнадцати миллионов евро или трёх процентов мирового годового оборота. Верхний tier за prohibited practices — до тридцати пяти миллионов или семи процентов. NIST AI RMF и NIST AI 600-1 — добровольные, но влиятельные стандарты США. Российское регулирование AI на двадцать шестой год в стадии формирования.</a:t>
-            </a:r>
-          </a:p>
-          <a:p/>
+          <a:p>
+            <a:r>
+              <a:t>Enterprise [2]- и API-тарифы. OpenAI Enterprise, ChatGPT Business, OpenAI API с марта двадцать третьего года, Anthropic для бизнеса, Google Workspace, Google Cloud Vertex AI — данные не используются для обучения базовых моделей. Доступны соглашения Zero Data Retention — провайдер вообще не сохраняет промпты и ответы. Стандартом становится SOC 2 compliance, шифрование at rest и in transit.</a:t>
+            </a:r>
+          </a:p>
+          <a:p>
+            <a:r>
+              <a:t>Канонический инцидент. Март-апрель двадцать третьего года, Samsung [1]. Инженеры полупроводникового подразделения в трёх отдельных эпизодах загрузили в потребительский ChatGPT проприетарный код базы данных, транскрипт корпоративного совещания и тестовые последовательности для отладки чипов. Поскольку потребительский ChatGPT на тот момент использовал данные для обучения по умолчанию, корпоративные секреты Samsung фактически попали в датасет OpenAI. Samsung в ответ запретила сотрудникам использование внешних генеративных AI-сервисов и временно ввела лимит в 1024 байта на промпт.</a:t>
+            </a:r>
+          </a:p>
+          <a:p>
+            <a:r>
+              <a:t>Регуляторика. В Европейском Союзе действует EU AI Act [3], постепенно вводимый в силу с двадцать четвёртого года. Стандартный tier штрафов — до пятнадцати миллионов евро или трёх процентов мирового годового оборота. Верхний tier за prohibited practices — до тридцати пяти миллионов или семи процентов. NIST AI RMF и NIST AI 600-1 — добровольные, но влиятельные стандарты США. Российское регулирование AI на двадцать шестой год в стадии формирования.</a:t>
+            </a:r>
+          </a:p>
           <a:p>
             <a:r>
               <a:t>Практический вывод для инженера: никогда не загружайте конфиденциальные данные в потребительские AI-сервисы без явной проверки политики использования данных конкретного тарифа на момент использования. Это правило простое, но систематически нарушается.</a:t>
+            </a:r>
+          </a:p>
+          <a:p>
+            <a:r>
+              <a:t>Источники:</a:t>
+            </a:r>
+          </a:p>
+          <a:p>
+            <a:r>
+              <a:t>[1] Bloomberg — Samsung bans ChatGPT (май 2023) — 3 утечки за месяц → запрет внешнего GenAI; данные в consumer-датасете. https://www.bloomberg.com/news/articles/2023-05-02/samsung-bans-chatgpt-and-other-generative-ai-use-by-staff-after-leak</a:t>
+            </a:r>
+          </a:p>
+          <a:p>
+            <a:r>
+              <a:t>[2] OpenAI — Enterprise Privacy / data usage (2025) — consumer = обучение по умолчанию; API с мар 2023 не обучается на данных. https://openai.com/enterprise-privacy/</a:t>
+            </a:r>
+          </a:p>
+          <a:p>
+            <a:r>
+              <a:t>[3] EU AI Act — Reg. (EU) 2024/1689 — штрафы: стандарт до 15M€/3%, верх до 35M€/7%. https://eur-lex.europa.eu/eli/reg/2024/1689/oj/eng</a:t>
             </a:r>
           </a:p>
         </p:txBody>
@@ -2380,34 +2685,54 @@
               <a:t>Галлюцинация в контексте LLM — это уверенное порождение фактически неверной информации в форме, неотличимой от верной. Модель не «знает», что говорит неправду; для неё это просто статистически правдоподобное продолжение последовательности токенов.</a:t>
             </a:r>
           </a:p>
-          <a:p/>
           <a:p>
             <a:r>
               <a:t>Простой эксперимент. Попросите чат «назови три научные статьи по теме [узкая тема] с авторами и DOI». С существенной вероятностью вы получите три убедительно выглядящие ссылки, в которых имена авторов могут быть смешаны или сочинены, журналы — настоящие, но статьи в них нет, DOI — синтаксически правильные, но не разрешаются. Проверка занимает минуту через doi.org, но без неё ссылки выглядят достоверно.</a:t>
             </a:r>
           </a:p>
-          <a:p/>
-          <a:p>
-            <a:r>
-              <a:t>Уровень галлюцинаций сильно зависит от задачи. По бенчмарку Vectara Hughes Hallucination Evaluation Model диапазон актуальных моделей очень широкий: от менее одного процента на стандартной задаче суммаризации, например Gemini 2.0 Flash, до десяти-пятнадцати процентов на reasoning-моделях, требующих многошагового рассуждения. Это означает, что говорить про «процент галлюцинаций LLM» в общем некорректно: цифра сильно зависит от задачи и бенчмарка.</a:t>
-            </a:r>
-          </a:p>
-          <a:p/>
-          <a:p>
-            <a:r>
-              <a:t>Сопутствующие данные о поведении пользователей. По отчёту CybSafe двадцать четвёртого года, опрос семь тысяч человек в семи странах: около тридцати восьми процентов сотрудников делятся в AI-инструментах конфиденциальной рабочей информацией без ведома работодателя. Это не про галлюцинации напрямую, но указывает на масштаб проблемы доверия: пользователи передают AI-системам информацию в объёме, который не оправдывается реальной надёжностью.</a:t>
-            </a:r>
-          </a:p>
-          <a:p/>
+          <a:p>
+            <a:r>
+              <a:t>Уровень галлюцинаций сильно зависит от задачи. По бенчмарку Vectara Hughes Hallucination Evaluation Model [3] диапазон актуальных моделей очень широкий: от менее одного процента на стандартной задаче суммаризации, например Gemini 2.0 Flash, до десяти-пятнадцати процентов на reasoning-моделях, требующих многошагового рассуждения. Это означает, что говорить про «процент галлюцинаций LLM» в общем некорректно: цифра сильно зависит от задачи и бенчмарка.</a:t>
+            </a:r>
+          </a:p>
+          <a:p>
+            <a:r>
+              <a:t>Сопутствующие данные о поведении пользователей. По отчёту CybSafe [4] двадцать четвёртого года, опрос семь тысяч человек в семи странах: около тридцати восьми процентов сотрудников делятся в AI-инструментах конфиденциальной рабочей информацией без ведома работодателя. Это не про галлюцинации напрямую, но указывает на масштаб проблемы доверия: пользователи передают AI-системам информацию в объёме, который не оправдывается реальной надёжностью.</a:t>
+            </a:r>
+          </a:p>
           <a:p>
             <a:r>
               <a:t>Анти-паттерн «AI знает всё». Любой ответ AI по фактическому вопросу — гипотеза, которая требует проверки. Особенно ссылки, цифры, цитаты, юридические нормы, медицинские рекомендации. Это не означает «не пользоваться AI для фактов»; это означает «проверять то, что AI выдаёт как факт». Critical reading attitude — не дополнительная предосторожность, а часть стандартного рабочего процесса.</a:t>
             </a:r>
           </a:p>
-          <a:p/>
           <a:p>
             <a:r>
               <a:t>Сейчас короткое упражнение. Я покажу два коротких AI-ответа на один и тот же вопрос. В каждом одна правильная и одна подложенная деталь. Обсудите за тридцать секунд в парах: какая часть подделка, и что вы проверяли первым.</a:t>
+            </a:r>
+          </a:p>
+          <a:p>
+            <a:r>
+              <a:t>Источники:</a:t>
+            </a:r>
+          </a:p>
+          <a:p>
+            <a:r>
+              <a:t>[1] Huang et al. — Survey on Hallucination in LLMs (2023) — галлюцинация = уверенное порождение неверного, неотличимого от верного. https://arxiv.org/abs/2311.05232</a:t>
+            </a:r>
+          </a:p>
+          <a:p>
+            <a:r>
+              <a:t>[2] Ji et al. — Survey of Hallucination in NLG (2023) — таксономия галлюцинаций в генерации. https://doi.org/10.1145/3571730</a:t>
+            </a:r>
+          </a:p>
+          <a:p>
+            <a:r>
+              <a:t>[3] Vectara — HHEM Leaderboard — диапазон &lt;1% (суммаризация) → 10–15% (reasoning) — цифра зависит от задачи. https://github.com/vectara/hallucination-leaderboard [VFY-day-of]</a:t>
+            </a:r>
+          </a:p>
+          <a:p>
+            <a:r>
+              <a:t>[4] CybSafe / NCA — Oh Behave! (2024–25) — n=7000/7 стран: ~38% делятся конфиденциальным без ведома работодателя. https://www.staysafeonline.org/articles/oh-behave-the-annual-cybersecurity-attitudes-and-behaviors-report-2025</a:t>
             </a:r>
           </a:p>
         </p:txBody>
@@ -2480,40 +2805,49 @@
               <a:t>Три проблемы, объединённые общей природой: модель — отражение данных, на которых её обучили, а не независимый источник истины. Они проявляются по-разному, но имеют общую причину, и это полезно держать в голове как одно связное явление.</a:t>
             </a:r>
           </a:p>
-          <a:p/>
           <a:p>
             <a:r>
               <a:t>Смещение, по-английски bias. Модель повторяет перекосы датасета. Канонический пример: модель скрининга резюме, обученная на исторических данных компании, в которой исторически принимали меньше женщин на технические позиции, будет дискриминировать женские кандидатуры — не «решая», что они хуже, а статистически предсказывая, что «такие профили обычно отказывали». Смещение — самая трудно исправляемая категория, потому что данные часто фиксируют структурные неравенства реального мира.</a:t>
             </a:r>
           </a:p>
-          <a:p/>
           <a:p>
             <a:r>
               <a:t>Лесть, по-английски sycophancy, иногда переводят как «подлизы». Сначала определение ключевого термина. RLHF — Reinforcement Learning from Human Feedback, обучение с подкреплением на основе обратной связи человека — техника обучения, при которой человек ранжирует ответы модели по качеству, и эти ранжирования служат сигналом награды для дополнительного дообучения. RLHF — стандартный шаг при превращении базовой языковой модели в чат-ассистента. Обратная сторона: люди-разметчики в среднем выше оценивают приятные ответы. Модель учится соглашаться с пользователем, повторять его формулировки, поддакивать.</a:t>
             </a:r>
           </a:p>
-          <a:p/>
           <a:p>
             <a:r>
               <a:t>Канонический инцидент. Двадцать пятого апреля двадцать пятого года OpenAI выкатила обновление GPT-4o, которое сделало модель навязчиво-лестящей: модель соглашалась с явно неверными утверждениями, чрезмерно хвалила пользователя, поддерживала спорные тезисы. Двадцать восьмого апреля начался откат обновления — Альтман в социальной сети тем же вечером написал, что откат уже начали. Двадцать девятого апреля опубликован разбор причин. Лесть — самая незаметная категория: пользователь, получая комплименты, легко не замечает, что модель потеряла критическое отношение к его словам.</a:t>
             </a:r>
           </a:p>
-          <a:p/>
           <a:p>
             <a:r>
               <a:t>Дрейф распределения, по-английски distribution shift. Модель, обученная на данных одного периода, ведёт себя плохо за пределами этого распределения. Концептуальный пример: модель, обученная на коде двадцать третьего года, в двадцать шестом уверенно предложит устаревшую библиотеку, неактуальную практику, не учтёт изменений API. Дрейф распределения — самая частая категория в долгоживущих системах, и её особенность в том, что качество модели «тихо» деградирует со временем без явных сбоев.</a:t>
             </a:r>
           </a:p>
-          <a:p/>
-          <a:p>
-            <a:r>
-              <a:t>Связное послание. Все три — проявления одной природы: модель не «знает» истины; она воспроизводит закономерности данных, на которых её обучили. Смещение — закономерности из исторических данных. Лесть — закономерности из разметки обратной связи. Дрейф распределения — отсутствие закономерностей нового периода.</a:t>
-            </a:r>
-          </a:p>
-          <a:p/>
+          <a:p>
+            <a:r>
+              <a:t>Связное послание. Все три — проявления одной природы: модель не «знает» истины; она воспроизводит закономерности данных, на которых её обучили. Смещение — закономерности из исторических данных. Лесть — закономерности из разметк [2]и обратной связи. Дрейф распределения — отсутствие закономерностей нового периода.</a:t>
+            </a:r>
+          </a:p>
           <a:p>
             <a:r>
               <a:t>Короткое упражнение: подумайте тридцать секунд, что опаснее в вашей будущей профессиональной области.</a:t>
+            </a:r>
+          </a:p>
+          <a:p>
+            <a:r>
+              <a:t>Источники:</a:t>
+            </a:r>
+          </a:p>
+          <a:p>
+            <a:r>
+              <a:t>[1] OpenAI — Sycophancy in GPT-4o postmortem (2025) — релиз 25 апр → откат 28 апр → разбор 29 апр; RLHF-переоценка приятных ответов. https://openai.com/index/sycophancy-in-gpt-4o/</a:t>
+            </a:r>
+          </a:p>
+          <a:p>
+            <a:r>
+              <a:t>[2] Pan et al. — Reward Misspecification (2022) — reward hacking — общая природа: модель отражает данные/разметку. https://arxiv.org/abs/2201.03544</a:t>
             </a:r>
           </a:p>
         </p:txBody>
@@ -2586,22 +2920,34 @@
               <a:t>Вопрос «можно ли AI» в 2026 году уже неинтересен — можно. Девятьсот миллионов человек пользуются ChatGPT каждую неделю, половина разработчиков — каждый день. Это уже не «надо ли начинать», это уже инфраструктура, на которой работают другие продукты.</a:t>
             </a:r>
           </a:p>
-          <a:p/>
-          <a:p>
-            <a:r>
-              <a:t>А вот вопрос «нужно ли и где» — открытый. По сводным данным деловых изданий, около девяноста процентов корпоративных AI-пилотов в России не доходят до полноценного промышленного развёртывания: тридцать-сорок процентов закрываются без эффекта, лишь семь-десять процентов доходят до production. Это не уникальная для России проблема — McKinsey и Gartner регулярно публикуют похожие цифры по другим рынкам. Корпоративные AI-проекты повсеместно сталкиваются с разрывом между демонстрационной готовностью и продакшн-надёжностью.</a:t>
-            </a:r>
-          </a:p>
-          <a:p/>
+          <a:p>
+            <a:r>
+              <a:t>А вот вопрос «нужно ли и где» — открытый. По сводным данным деловых изданий, около девяноста процентов корпоративных AI-пилот [2]ов в России не доходят до полноценного промышленного развёртывания: тридцать-сорок процентов закрываются без эффекта, лишь семь-десять процентов доходят до production. Это не уникальная для России проблема — McKinsey и Gartner [1] регулярно публикуют похожие цифры по другим рынкам. Корпоративные AI-проекты повсеместно сталкиваются с разрывом между демонстрационной готовностью и продакшн-надёжностью.</a:t>
+            </a:r>
+          </a:p>
           <a:p>
             <a:r>
               <a:t>Это сочетание — массовое распространение и массовый провал — формирует центральную инженерную задачу курса. Главный вопрос звучит так: где AI работает, где не работает, и как заранее это понять. Это диагностический вопрос, не триумфальный. Курс не обещает рецепт успеха; он даёт способ отличать применения, в которых AI уместен, от применений, в которых он создаёт иллюзию решения. От этого различения зависят бюджет, время, надёжность системы и иногда — безопасность людей.</a:t>
             </a:r>
           </a:p>
-          <a:p/>
           <a:p>
             <a:r>
               <a:t>К этому центральному вопросу мы будем возвращаться каждую лекцию курса.</a:t>
+            </a:r>
+          </a:p>
+          <a:p>
+            <a:r>
+              <a:t>Источники:</a:t>
+            </a:r>
+          </a:p>
+          <a:p>
+            <a:r>
+              <a:t>[1] Gartner — пресс-релиз (окт 2024) — 80% инженерных работников должны осваивать GenAI к 2027. https://www.gartner.com/en/newsroom/press-releases/2024-10-03-gartner-says-generative-ai-will-require-80-percent-of-engineering-workforce-to-upskill-through-2027 [VFY-day-of]</a:t>
+            </a:r>
+          </a:p>
+          <a:p>
+            <a:r>
+              <a:t>[2] Vedomosti / Intellectual Analytics (мар 2026) — 9 из 10 корпоративных GenAI-пилотов в РФ свёрнуты/отложены (n=50 крупных орг.). https://www.vedomosti.ru/technology/articles/2026/03/24/1184974-biznes-svernul-ili-otlozhil-9-iz-10-proektov-po-vnedreniyu-generativnogo-ii [VFY-day-of]</a:t>
             </a:r>
           </a:p>
         </p:txBody>
@@ -2671,43 +3017,52 @@
           <a:lstStyle/>
           <a:p>
             <a:r>
-              <a:t>Все существующие производственные AI-системы — narrow AI: они оптимизированы под конкретные задачи или узкие домены. AGI — Artificial General Intelligence — гипотетический AI с человеческим уровнем когнитивных способностей в широком спектре областей. Это открытый вопрос, который активно обсуждается в публичном пространстве с взаимоисключающими прогнозами.</a:t>
-            </a:r>
-          </a:p>
-          <a:p/>
+              <a:t>Все существующие производственные AI-системы — narrow AI [1]: они оптимизированы под конкретные задачи или узкие домены. AGI — Artificial General Intelligence — гипотетический AI с человеческим уровнем когнитивных способностей в широком спектре областей. Это открытый вопрос, который активно обсуждается в публичном пространстве с взаимоисключающими прогнозами.</a:t>
+            </a:r>
+          </a:p>
           <a:p>
             <a:r>
               <a:t>Когда вы видите конкретный AGI-прогноз, спрашивайте, какой у спикера материальный интерес в этом прогнозе. Чем выше уверенность в скором AGI, тем чаще нужно проверять, кто и что хочет получить от рынка после такого высказывания. Это не означает, что спикеры неискренни — это означает, что прогнозы AGI делаются в публичном пространстве, в котором каждый лидер одновременно строит компанию и формирует ожидания инвесторов.</a:t>
             </a:r>
           </a:p>
-          <a:p/>
           <a:p>
             <a:r>
               <a:t>Сводка по четырём публичным фигурам. Сэм Альтман, CEO OpenAI: «знаем, как построить AGI; начало перехода к superintelligence», январь двадцать шестого. Материальный интерес — стомиллиардные раунды финансирования, контекст IPO; высокая AGI-уверенность поддерживает оценку компании.</a:t>
             </a:r>
           </a:p>
-          <a:p/>
-          <a:p>
-            <a:r>
-              <a:t>Дарио Амодей, CEO Anthropic: «AGI через 2-3 года; AI заменит разработчиков ПО за год; нобелевский уровень за два года», Давос двадцать шестого. Материальный интерес — конкурентное давление со стороны OpenAI; собственный раунд финансирования двадцать шестого года.</a:t>
-            </a:r>
-          </a:p>
-          <a:p/>
+          <a:p>
+            <a:r>
+              <a:t>Дарио Амодей, CEO Anthropic [2]: «AGI через 2-3 года; AI заменит разработчиков ПО за год; нобелевский уровень за два года», Давос двадцать шестого. Материальный интерес — конкурентное давление со стороны OpenAI; собственный раунд финансирования двадцать шестого года.</a:t>
+            </a:r>
+          </a:p>
           <a:p>
             <a:r>
               <a:t>Демис Хассабис, CEO Google DeepMind: «AGI к 2029–2030, три-четыре года; окно сузилось за 2026 год», Axios и Google I/O, май двадцать шестого — тема развита в эссе «A Framework for Frontier AI» от 14 июля 2026. Материальный интерес — лидер в research community; больше доверия при осторожной позиции; Google не нуждается в AGI-хайпе для основного бизнеса.</a:t>
             </a:r>
           </a:p>
-          <a:p/>
           <a:p>
             <a:r>
               <a:t>Янн ЛеКун, основатель AMI Labs, экс-Chief AI Scientist Meta: «LLM-парадигма не приведёт к AGI; нужна новая архитектура, world models, JEPA», постоянно. Материальный интерес — раунд около миллиарда долларов в марте двадцать шестого на альтернативный путь; контр-консенсусная позиция выгодна для дифференциации стартапа.</a:t>
             </a:r>
           </a:p>
-          <a:p/>
           <a:p>
             <a:r>
               <a:t>Заметьте паттерн — ни один из четырёх спикеров не занимает нейтрально-научной позиции. Каждый прогноз отражает либо коммерческий интерес, либо рыночное позиционирование. Полезное упражнение при чтении любого публичного интервью топ-менеджера AI-компании: задавать себе вопрос — какое решение он хотел бы, чтобы рынок принял на основе этого высказывания.</a:t>
+            </a:r>
+          </a:p>
+          <a:p>
+            <a:r>
+              <a:t>Источники:</a:t>
+            </a:r>
+          </a:p>
+          <a:p>
+            <a:r>
+              <a:t>[1] Searle — Minds, Brains, and Programs (1980) — Chinese Room: бенчмарк-эквивалентность ≠ понимание; narrow vs general. https://doi.org/10.1017/S0140525X00005756</a:t>
+            </a:r>
+          </a:p>
+          <a:p>
+            <a:r>
+              <a:t>[2] Bostrom — Superintelligence (2014) — рамка долгосрочных AGI/ASI-сценариев для критического чтения прогнозов. https://global.oup.com/academic/product/superintelligence-9780199678112</a:t>
             </a:r>
           </a:p>
         </p:txBody>
@@ -2780,13 +3135,11 @@
               <a:t>Мы прошли четыре содержательных раздела. В первом договорились про определения AI и почему их много. Во втором посмотрели, где мы сейчас — массовое внедрение и одновременно массовый провал. В третьем разобрали четыре способа реализации и получили практический инструмент — два диагностических вопроса плюс квадрант. В четвёртом — границы AI: куда уходят данные, где галлюцинирует, как смещается, как читать прогнозы AGI.</a:t>
             </a:r>
           </a:p>
-          <a:p/>
           <a:p>
             <a:r>
               <a:t>Финальный, пятый раздел — что со всем этим делать. Шесть с половиной минут. Сначала короткое резюме лекции — три главных вывода, которые стоит унести домой. Потом — карта всего семестра, чтобы сегодняшняя лекция встала в контекст следующих шестнадцати. И в финале — тизер лекции два, с возвратом к YOLO-демо из самого начала. После этого — Q&amp;A.</a:t>
             </a:r>
           </a:p>
-          <a:p/>
           <a:p>
             <a:r>
               <a:t>Главная функция раздела — закрепление. Через две недели вы вряд ли вспомните каждую цифру или каждое название. Но три вывода и один практический инструмент — должны остаться.</a:t>
@@ -2862,31 +3215,26 @@
               <a:t>Лекция один покрыла четыре содержательных темы и вышла к одному практическому инструменту. Если что-то одно стоит унести из лекции — главный вопрос: где AI работает, где не работает, и как это понять.</a:t>
             </a:r>
           </a:p>
-          <a:p/>
           <a:p>
             <a:r>
               <a:t>Три главных вывода.</a:t>
             </a:r>
           </a:p>
-          <a:p/>
           <a:p>
             <a:r>
               <a:t>Первый. AI — спектр технологий, не монолит. Конкретный AI-инструмент имеет координаты по двум осям — тип задачи и модальность — и относится к одному из четырёх типов реализации: модель, чат, агент, приложение. Грамотное обсуждение AI в инженерном контексте начинается с явной классификации.</a:t>
             </a:r>
           </a:p>
-          <a:p/>
           <a:p>
             <a:r>
               <a:t>Второй. Выбор типа AI — инженерный навык, и у вас есть инструмент. Два диагностических вопроса и квадрант 2×2 — простой, но систематически нарушаемый. Большинство откатившихся корпоративных пилотов не задавали этих вопросов до внедрения; мода и удобство выбирали тип инструмента вместо инженерного анализа задачи.</a:t>
             </a:r>
           </a:p>
-          <a:p/>
           <a:p>
             <a:r>
               <a:t>Третий. AI усиливает человека, но целеполагание, критическое суждение и ответственность остаются нашими. Все категории ошибок, которые мы разобрали — галлюцинации, bias, sycophancy, distribution shift, утечки данных, — требуют человеческого контура верификации.</a:t>
             </a:r>
           </a:p>
-          <a:p/>
           <a:p>
             <a:r>
               <a:t>Это и есть главный вопрос лекции в развёрнутом виде: где AI работает, где — нет, и как это понять.</a:t>
@@ -2962,25 +3310,21 @@
               <a:t>Курс состоит из семнадцати лекций, разбитых на три содержательных модуля, плюс завершающий модуль экзамена. Сегодня мы на первом занятии первого модуля.</a:t>
             </a:r>
           </a:p>
-          <a:p/>
           <a:p>
             <a:r>
               <a:t>Модуль один — теоретико-методологический фундамент и индустрии, ближе всего связанные с повседневной инженерной и продуктовой практикой: введение, которое проходит прямо сейчас; архитектура AI от машинного обучения до трансформеров; архитектуры AI-систем — агенты, RAG, API; AI в разработке программного обеспечения; AI в финансовом секторе и ритейле; AI в креативных индустриях и медиа. Шесть лекций, рубежный контроль один — по завершении модуля.</a:t>
             </a:r>
           </a:p>
-          <a:p/>
           <a:p>
             <a:r>
               <a:t>Модуль два — отрасли, в которых AI работает на стыке физического и цифрового мира: инженерное проектирование и CAD/CAM, авиакосмическая отрасль и оборонный комплекс, дискретное и процессное производство, автоматизация производства и цифровые двойники, сельское хозяйство. Пять лекций, рубежный контроль два — по завершении модуля.</a:t>
             </a:r>
           </a:p>
-          <a:p/>
           <a:p>
             <a:r>
               <a:t>Модуль три — инфраструктурные, научные и ресурсодобывающие отрасли, плюс заключительный синтез: логистика и транспорт, телекоммуникации и кибербезопасность, научные исследования, нефтегазовая отрасль, медицина и фармацевтика, и завершающая систематизация знаний и навыков — сквозные паттерны AI в индустриях. Шесть лекций, рубежный контроль три — итоговый, по завершении модуля.</a:t>
             </a:r>
           </a:p>
-          <a:p/>
           <a:p>
             <a:r>
               <a:t>Модуль четыре — экзамен.</a:t>
@@ -3056,7 +3400,6 @@
               <a:t>Итоговая оценка складывается постепенно, а не только на экзамене. Сто баллов — это десять за посещаемость, тридцать за итоговый экзамен и трижды по двадцать за три рубежных контроля.</a:t>
             </a:r>
           </a:p>
-          <a:p/>
           <a:p>
             <a:r>
               <a:t>Рубежные контроли приходятся на завершение каждого из первых трёх модулей курса — то есть оценка формируется на протяжении всего семестра, а не только в конце. Это значит, что регулярная работа на семинарах и лекциях в течение семестра напрямую влияет на итоговый балл.</a:t>
@@ -3132,37 +3475,31 @@
               <a:t>На следующей лекции мы посмотрим, как устроены большие языковые модели изнутри. Не для того, чтобы сделать из вас ML-инженеров — а чтобы вы понимали, почему модель ведёт себя так, как ведёт.</a:t>
             </a:r>
           </a:p>
-          <a:p/>
           <a:p>
             <a:r>
               <a:t>Четыре ключевых концепта, которые разберём на лекции два. Все на русском, с английскими терминами в скобках при первом упоминании.</a:t>
             </a:r>
           </a:p>
-          <a:p/>
           <a:p>
             <a:r>
               <a:t>Токены — единицы, на которые модель разрезает текст или другой вход. Это не буквы и не слова в обычном смысле; это статистически выученные подпоследовательности символов.</a:t>
             </a:r>
           </a:p>
-          <a:p/>
           <a:p>
             <a:r>
               <a:t>Эмбеддинги, или векторные представления — числовые «адреса» токенов в многомерном смысловом пространстве. Они позволяют модели работать с похожестью: близкие по смыслу слова имеют близкие векторы.</a:t>
             </a:r>
           </a:p>
-          <a:p/>
           <a:p>
             <a:r>
               <a:t>Механизм внимания (attention) — как модель решает, на какие части входа смотреть в каждый момент генерации. Это и есть тот self-attention, на который ссылается название статьи «Attention Is All You Need».</a:t>
             </a:r>
           </a:p>
-          <a:p/>
           <a:p>
             <a:r>
               <a:t>Температура — параметр, контролирующий, насколько случайно модель выбирает следующий токен. При нулевой температуре модель детерминирована; при высокой — генерирует более разнообразные ответы.</a:t>
             </a:r>
           </a:p>
-          <a:p/>
           <a:p>
             <a:r>
               <a:t>После лекции два вы поймёте, почему промпт с ролью работает лучше пустого, почему AI плохо считает буквы в слове, и почему один и тот же запрос к LLM даёт разные ответы в разные моменты. Эти знания — фундамент для всех следующих лекций курса.</a:t>
@@ -3238,92 +3575,9 @@
               <a:t>Спасибо за внимание. Сейчас открытое время для вопросов. Нет глупых вопросов, нет «слишком базовых» — если что-то неясно, лучше спросить сейчас. Если время на занятии закончится, а вопросы остались — пишите по контактам, которые показывал на слайде с визиткой.</a:t>
             </a:r>
           </a:p>
-          <a:p/>
           <a:p>
             <a:r>
               <a:t>Если вопросов нет — не страшно. До встречи на следующей лекции.</a:t>
-            </a:r>
-          </a:p>
-        </p:txBody>
-      </p:sp>
-      <p:sp>
-        <p:nvSpPr>
-          <p:cNvPr id="4" name="Slide Number Placeholder 3"/>
-          <p:cNvSpPr>
-            <a:spLocks noGrp="1"/>
-          </p:cNvSpPr>
-          <p:nvPr>
-            <p:ph type="sldNum" idx="5" sz="quarter"/>
-          </p:nvPr>
-        </p:nvSpPr>
-        <p:spPr/>
-      </p:sp>
-    </p:spTree>
-  </p:cSld>
-  <p:clrMapOvr>
-    <a:masterClrMapping/>
-  </p:clrMapOvr>
-</p:notes>
-</file>
-
-<file path=ppt/notesSlides/notesSlide37.xml><?xml version="1.0" encoding="utf-8"?>
-<p:notes xmlns:a="http://schemas.openxmlformats.org/drawingml/2006/main" xmlns:p="http://schemas.openxmlformats.org/presentationml/2006/main" xmlns:r="http://schemas.openxmlformats.org/officeDocument/2006/relationships">
-  <p:cSld>
-    <p:spTree>
-      <p:nvGrpSpPr>
-        <p:cNvPr id="1" name=""/>
-        <p:cNvGrpSpPr/>
-        <p:nvPr/>
-      </p:nvGrpSpPr>
-      <p:grpSpPr>
-        <a:xfrm>
-          <a:off x="0" y="0"/>
-          <a:ext cx="0" cy="0"/>
-          <a:chOff x="0" y="0"/>
-          <a:chExt cx="0" cy="0"/>
-        </a:xfrm>
-      </p:grpSpPr>
-      <p:sp>
-        <p:nvSpPr>
-          <p:cNvPr id="2" name="Slide Image Placeholder 1"/>
-          <p:cNvSpPr>
-            <a:spLocks noGrp="1"/>
-          </p:cNvSpPr>
-          <p:nvPr>
-            <p:ph type="sldImg" idx="2"/>
-          </p:nvPr>
-        </p:nvSpPr>
-        <p:spPr/>
-      </p:sp>
-      <p:sp>
-        <p:nvSpPr>
-          <p:cNvPr id="3" name="Notes Placeholder 2"/>
-          <p:cNvSpPr>
-            <a:spLocks noGrp="1"/>
-          </p:cNvSpPr>
-          <p:nvPr>
-            <p:ph type="body" idx="3" sz="quarter"/>
-          </p:nvPr>
-        </p:nvSpPr>
-        <p:spPr/>
-        <p:txBody>
-          <a:bodyPr/>
-          <a:lstStyle/>
-          <a:p>
-            <a:r>
-              <a:t>Всё общение по курсу — в чате в мессенджере MAX. Отсканируйте QR-код камерой телефона или перейдите по ссылке max.ru/join/sHoHlhI4jvW_swcq5ZLowvz6G94m0IMhAwngxuxsEpI и вступите в чат до первой лекции.</a:t>
-            </a:r>
-          </a:p>
-          <a:p/>
-          <a:p>
-            <a:r>
-              <a:t>Что там будет. Во-первых, объявления: расписание, любые изменения, важные новости — всё публикуется в чате, отдельно письма ждать не нужно. Во-вторых, материалы: слайды лекций и семинаров я выкладываю туда по мере проведения занятий, так что всё собрано в одном месте. В-третьих, вопросы: если что-то непонятно между парами — спрашивайте в чате, не обязательно копить до семинара.</a:t>
-            </a:r>
-          </a:p>
-          <a:p/>
-          <a:p>
-            <a:r>
-              <a:t>Пожалуйста, вступите сегодня — так вы точно не пропустите первое объявление.</a:t>
             </a:r>
           </a:p>
         </p:txBody>
@@ -3396,13 +3650,11 @@
               <a:t>Это вводная лекция курса «AI в разных отраслях». Мы построим общую карту: что такое AI как класс технологий, в каком состоянии он находится в 2026 году, какие способы реализации систем с AI существуют в инженерной практике, и где у этих систем границы.</a:t>
             </a:r>
           </a:p>
-          <a:p/>
           <a:p>
             <a:r>
               <a:t>К 2026 году AI перестал быть отдельным продуктом и стал инфраструктурным слоем, который незаметно работает в десятках сервисов, которыми вы пользуетесь каждый день. Голосовой ввод в смартфоне, навигация по пробкам, разблокировка лица, фильтр спама в почте, рекомендации в музыкальном сервисе, автодополнение в браузере — всё это AI, который большинство пользователей перестали воспринимать как AI.</a:t>
             </a:r>
           </a:p>
-          <a:p/>
           <a:p>
             <a:r>
               <a:t>Цель лекции — не познакомить вас со всеми возможными AI-инструментами (это технически невозможно, рынок меняется быстрее, чем выходят учебники), а дать рабочий язык: чем модель отличается от чата, чем чат — от агента, и как за тридцать секунд понять, какой тип AI подходит под конкретную задачу. К концу лекции у вас будет простой инструмент — два диагностических вопроса плюс квадрант — который мы дальше будем применять во всех остальных лекциях курса.</a:t>
@@ -3478,37 +3730,31 @@
               <a:t>Прежде чем двигаться дальше — короткая навигация. Лекция состоит из пяти разделов, последовательно отвечающих на пять разных вопросов.</a:t>
             </a:r>
           </a:p>
-          <a:p/>
           <a:p>
             <a:r>
               <a:t>Раздел 0, в котором мы сейчас, — открытие: короткая демонстрация, представление преподавателя и центральный вопрос курса.</a:t>
             </a:r>
           </a:p>
-          <a:p/>
           <a:p>
             <a:r>
               <a:t>Раздел 1 — что такое AI и почему определений много. Здесь же пройдёмся по семидесятилетней истории дисциплины, включая предысторию до появления самого термина, и зафиксируем ключевую точку перелома 2017 года.</a:t>
             </a:r>
           </a:p>
-          <a:p/>
           <a:p>
             <a:r>
               <a:t>Раздел 2 — где мы сейчас, в 2022–2026 годах. Цифры проникновения AI в мире и в России, и обзор прорывов от не-первых игроков.</a:t>
             </a:r>
           </a:p>
-          <a:p/>
           <a:p>
             <a:r>
               <a:t>Раздел 3 — самый большой раздел лекции. Четыре способа реализации систем с AI: модель, чат, агент, приложение. Разберём каждый со схемой и примером, а в финале раздела получим практический инструмент выбора типа AI.</a:t>
             </a:r>
           </a:p>
-          <a:p/>
           <a:p>
             <a:r>
               <a:t>Раздел 4 — границы и безопасность. Куда уходят данные, что такое галлюцинации, три проявления подстраивания модели под данные, и концептуальные границы AI как класса технологий.</a:t>
             </a:r>
           </a:p>
-          <a:p/>
           <a:p>
             <a:r>
               <a:t>Раздел 5 — заключение, карта семестра и анонс лекции 2.</a:t>
@@ -3581,100 +3827,22 @@
           <a:lstStyle/>
           <a:p>
             <a:r>
-              <a:t>Для начала — коротко о себе. Я архитектор, технический и продуктовый лидер</a:t>
-            </a:r>
-          </a:p>
-          <a:p>
-            <a:r>
-              <a:t>в разработке и внедрении информационных систем, больше двадцати лет в ИТ.</a:t>
-            </a:r>
-          </a:p>
-          <a:p>
-            <a:r>
-              <a:t>За это время под моим руководством было реализовано больше десяти</a:t>
-            </a:r>
-          </a:p>
-          <a:p>
-            <a:r>
-              <a:t>завершённых проектов — от системного анализа и проектирования архитектуры</a:t>
-            </a:r>
-          </a:p>
-          <a:p>
-            <a:r>
-              <a:t>до управления данными, автоматизации бизнес-процессов и запуска продуктов.</a:t>
-            </a:r>
-          </a:p>
-          <a:p/>
-          <a:p>
-            <a:r>
-              <a:t>Я работал и как консультант, и как штатный сотрудник — с Яндексом, МТС,</a:t>
-            </a:r>
-          </a:p>
-          <a:p>
-            <a:r>
-              <a:t>Магнитом, Сибуром. Это разные индустрии — технологии, телеком, ритейл,</a:t>
-            </a:r>
-          </a:p>
-          <a:p>
-            <a:r>
-              <a:t>нефтехимия — и в каждой AI применялся по-своему, с разным успехом. Именно</a:t>
-            </a:r>
-          </a:p>
-          <a:p>
-            <a:r>
-              <a:t>поэтому меня интересует не общий разговор про «искусственный интеллект», а</a:t>
-            </a:r>
-          </a:p>
-          <a:p>
-            <a:r>
-              <a:t>конкретная инженерная граница: где AI реально экономит время и деньги, а</a:t>
-            </a:r>
-          </a:p>
-          <a:p>
-            <a:r>
-              <a:t>где — красивая демонстрация, которая разваливается в продакшене.</a:t>
-            </a:r>
-          </a:p>
-          <a:p/>
-          <a:p>
-            <a:r>
-              <a:t>Этот курс — попытка дать вам карту, которой у меня самого не было, когда я</a:t>
-            </a:r>
-          </a:p>
-          <a:p>
-            <a:r>
-              <a:t>только начинал разбираться с этими инструментами в реальных проектах. Мы</a:t>
-            </a:r>
-          </a:p>
-          <a:p>
-            <a:r>
-              <a:t>будем разбирать конкретные инженерные решения, а не общие декларации, и</a:t>
-            </a:r>
-          </a:p>
-          <a:p>
-            <a:r>
-              <a:t>границам — там, где AI ломается, — будет уделено столько же внимания,</a:t>
-            </a:r>
-          </a:p>
-          <a:p>
-            <a:r>
-              <a:t>сколько успешным кейсам.</a:t>
-            </a:r>
-          </a:p>
-          <a:p/>
-          <a:p>
-            <a:r>
-              <a:t>Если в течение курса возникнут вопросы вне формата лекции — пишите в</a:t>
-            </a:r>
-          </a:p>
-          <a:p>
-            <a:r>
-              <a:t>Telegram (@Maxim_Levko) или на почту (Levko.maxim@gmail.com). Чем раньше</a:t>
-            </a:r>
-          </a:p>
-          <a:p>
-            <a:r>
-              <a:t>задаёте вопрос, тем полезнее будет ответ — не копите их до конца семестра.</a:t>
+              <a:t>Для начала — коротко о себе. Я архитектор, технический и продуктовый лидер в разработке и внедрении информационных систем, больше двадцати лет в ИТ. За это время под моим руководством было реализовано больше десяти завершённых проектов — от системного анализа и проектирования архитектуры до управления данными, автоматизации бизнес-процессов и запуска продуктов.</a:t>
+            </a:r>
+          </a:p>
+          <a:p>
+            <a:r>
+              <a:t>Я работал и как консультант, и как штатный сотрудник — с Яндексом, МТС, Магнитом, Сибуром. Это разные индустрии — технологии, телеком, ритейл, нефтехимия — и в каждой AI применялся по-своему, с разным успехом. Именно поэтому меня интересует не общий разговор про «искусственный интеллект», а конкретная инженерная граница: где AI реально экономит время и деньги, а где — красивая демонстрация, которая разваливается в продакшене.</a:t>
+            </a:r>
+          </a:p>
+          <a:p>
+            <a:r>
+              <a:t>Этот курс — попытка дать вам карту, которой у меня самого не было, когда я только начинал разбираться с этими инструментами в реальных проектах. Мы будем разбирать конкретные инженерные решения, а не общие декларации, и границам — там, где AI ломается, — будет уделено столько же внимания, сколько успешным кейсам.</a:t>
+            </a:r>
+          </a:p>
+          <a:p>
+            <a:r>
+              <a:t>Если в течение курса возникнут вопросы вне формата лекции — пишите в Telegram (@Maxim_Levko) или на почту (Levko.maxim@gmail.com). Чем раньше задаёте вопрос, тем полезнее будет ответ — не копите их до конца семестра.</a:t>
             </a:r>
           </a:p>
         </p:txBody>
@@ -3747,13 +3915,11 @@
               <a:t>Мы познакомились и обозначили главный вопрос курса. Дальше — первый содержательный раздел: что такое AI.</a:t>
             </a:r>
           </a:p>
-          <a:p/>
           <a:p>
             <a:r>
               <a:t>Структура раздела короткая, но плотная. Сначала — почему определений AI много и откуда берётся эффект движущейся цели. Затем — факт-мостик: идея формального нейрона старше самого термина «искусственный интеллект». И в финале раздела — сжатый семидесятилетний таймлайн дисциплины с чёткой точкой перелома в 2017 году.</a:t>
             </a:r>
           </a:p>
-          <a:p/>
           <a:p>
             <a:r>
               <a:t>К концу раздела у вас будет общий язык для разговора об AI: откуда взялись разные определения, почему они не противоречат друг другу, и в какой момент истории AI стал тем, чем является сейчас.</a:t>
@@ -3829,40 +3995,59 @@
               <a:t>Любой студент, начавший читать литературу по AI, быстро обнаруживает, что одного канонического определения у предмета нет. Это не недоработка авторов учебников и не пробел в стандартизации — это отражение природы предмета. Прежде чем переходить к практическим типам систем, важно зафиксировать, какие определения сосуществуют в литературе и почему они не противоречат, а дополняют друг друга.</a:t>
             </a:r>
           </a:p>
-          <a:p/>
           <a:p>
             <a:r>
               <a:t>Подход первый — Russell и Norvig в каноническом учебнике AIMA предлагают разложить определения AI по матрице: думание против действия, человекоподобно против рационально. Сами авторы склоняются к четвёртой клетке — «действующий рационально», потому что она не требует решать философский вопрос, что такое мышление.</a:t>
             </a:r>
           </a:p>
-          <a:p/>
-          <a:p>
-            <a:r>
-              <a:t>Подход второй — международный стандарт ISO/IEC 22989, на который опирается европейская регуляторика. Определение через возможности и через источник целей: AI-система генерирует выходы для целей, заданных человеком.</a:t>
-            </a:r>
-          </a:p>
-          <a:p/>
+          <a:p>
+            <a:r>
+              <a:t>Подход второй — международный стандарт ISO/IEC 22989 [2], на который опирается европейская регуляторика. Определение через возможности и через источник целей: AI-система генерирует выходы для целей, заданных человеком.</a:t>
+            </a:r>
+          </a:p>
           <a:p>
             <a:r>
               <a:t>Подход третий — функциональный, через обучение. Программа улучшает поведение на задаче с метрикой за счёт опыта. Это инженерный критерий: если поведение системы можно полностью описать правилами «если — то», это не AI; если поведение возникает из обученной модели — это AI, даже если модель проста.</a:t>
             </a:r>
           </a:p>
-          <a:p/>
-          <a:p>
-            <a:r>
-              <a:t>Подход четвёртый — через сравнение с человеком и через бенчмарки. Породил линию тестов от шахмат до ARC-AGI. Классическое возражение — Chinese Room Сёрла: бенчмарк-эквивалентность не означает понимания.</a:t>
-            </a:r>
-          </a:p>
-          <a:p/>
+          <a:p>
+            <a:r>
+              <a:t>Подход четвёртый — через сравнение с человеком и через бенчмарки. Породил линию тестов от шахмат до ARC-AGI. Классическое возражение — Chinese Room Сёрла [4]: бенчмарк-эквивалентность не означает понимания.</a:t>
+            </a:r>
+          </a:p>
           <a:p>
             <a:r>
               <a:t>И главное — AI Effect, описанный Памелой Маккордак: как только техника начинает работать, её перестают называть AI. Распознавание речи, навигация по пробкам, разблокировка лица — всё это в момент появления было AI, а сейчас называется просто функцией приложения. Поэтому определение AI всё время сдвигается: как только задача решена и встроена в продукт, она остывает до уровня обыденной техники.</a:t>
             </a:r>
           </a:p>
-          <a:p/>
           <a:p>
             <a:r>
               <a:t>В курсе мы будем явно называть, какое из четырёх определений работает в каждой ситуации. Главное — не выбирать одно как «правильное».</a:t>
+            </a:r>
+          </a:p>
+          <a:p>
+            <a:r>
+              <a:t>Источники:</a:t>
+            </a:r>
+          </a:p>
+          <a:p>
+            <a:r>
+              <a:t>[1] Russell &amp; Norvig — AIMA, 4-е изд. (2021) — 4 определения по 2 осям (думать/действовать × человекоподобно/рационально). https://aima.cs.berkeley.edu/</a:t>
+            </a:r>
+          </a:p>
+          <a:p>
+            <a:r>
+              <a:t>[2] ISO/IEC 22989:2022 — AI-система = engineered system для человеко-заданных целей; опора EU AI Act. https://www.iso.org/standard/74296.html</a:t>
+            </a:r>
+          </a:p>
+          <a:p>
+            <a:r>
+              <a:t>[3] Mitchell — Machine Learning (1997) — функциональное определение: поведение из обученной модели = AI. https://www.cs.cmu.edu/~tom/mlbook.html</a:t>
+            </a:r>
+          </a:p>
+          <a:p>
+            <a:r>
+              <a:t>[4] Searle — Chinese Room (1980) / Turing (1950) — AI Effect + возражение Сёрла: поведение на бенчмарке ≠ понимание. https://doi.org/10.1017/S0140525X00005756</a:t>
             </a:r>
           </a:p>
         </p:txBody>
@@ -3932,19 +4117,27 @@
           <a:lstStyle/>
           <a:p>
             <a:r>
-              <a:t>Ещё до того, как появился сам термин «искусственный интеллект», нейрофизиолог Уоррен Мак-Каллок и логик Уолтер Питтс опубликовали работу, формализующую нейрон как логический элемент: сеть таких простых бинарных элементов теоретически способна вычислить любую функцию, выразимую в терминах логики. Статья вышла в 1943 году — на 13 лет раньше Дартмутской конференции 1956 года, где термин «AI» появится впервые.</a:t>
-            </a:r>
-          </a:p>
-          <a:p/>
+              <a:t>Ещё до того, как появился сам термин «искусственный интеллект», нейрофизиолог Уоррен Мак-Каллок и логик Уолтер Питтс [1] опубликовали работу, формализующую нейрон как логический элемент: сеть таких простых бинарных элементов теоретически способна вычислить любую функцию, выразимую в терминах логики. Статья вышла в 1943 году — на 13 лет раньше Дартмутской конференции 1956 года, где термин «AI» появится впервые.</a:t>
+            </a:r>
+          </a:p>
           <a:p>
             <a:r>
               <a:t>Формальный нейрон Мак-Каллока — Питтса не был инженерной системой в современном смысле и не решал прикладных задач, но он предвосхитил коннекционистскую традицию — линию мысли, из которой десятилетия спустя вырастут искусственные нейронные сети и, в конечном счёте, архитектуры вроде Трансформера.</a:t>
             </a:r>
           </a:p>
-          <a:p/>
           <a:p>
             <a:r>
               <a:t>Полезно держать в голове эту дату как напоминание: идея «нейросети» на теоретическом уровне старше самого термина «искусственный интеллект». Дальше мы посмотрим на историю уже с 1956 года — с момента, когда термин появился официально.</a:t>
+            </a:r>
+          </a:p>
+          <a:p>
+            <a:r>
+              <a:t>Источники:</a:t>
+            </a:r>
+          </a:p>
+          <a:p>
+            <a:r>
+              <a:t>[1] McCulloch &amp; Pitts (1943) — формальный нейрон как логический элемент — на 13 лет раньше термина «AI». https://doi.org/10.1007/BF02478259</a:t>
             </a:r>
           </a:p>
         </p:txBody>
@@ -7125,6 +7318,26 @@
               </a:rPr>
               <a:t>  ·  обучена в 2023.</a:t>
             </a:r>
+            <a:r>
+              <a:rPr sz="1500" b="0" i="0">
+                <a:solidFill>
+                  <a:srgbClr val="21295C"/>
+                </a:solidFill>
+                <a:latin typeface="Arial"/>
+              </a:rPr>
+              <a:t> </a:t>
+            </a:r>
+            <a:r>
+              <a:rPr sz="780" baseline="30000" b="0" i="1">
+                <a:latin typeface="Arial"/>
+                <a:cs typeface="Arial"/>
+                <a:ea typeface="Arial"/>
+                <a:solidFill>
+                  <a:srgbClr val="1C7293"/>
+                </a:solidFill>
+              </a:rPr>
+              <a:t>[2]</a:t>
+            </a:r>
           </a:p>
         </p:txBody>
       </p:sp>
@@ -7234,7 +7447,134 @@
                 </a:solidFill>
                 <a:latin typeface="Arial"/>
               </a:rPr>
-              <a:t>Кадр модели в момент демо: 2 человека в боксах. YOLOv8 (Ultralytics, 2023).</a:t>
+              <a:t>Кадр модели в момент демо: 2 человека в боксах. YOLOv8 (Ultralytics, 2023). </a:t>
+            </a:r>
+            <a:r>
+              <a:rPr sz="572" baseline="30000" b="0" i="1">
+                <a:latin typeface="Arial"/>
+                <a:cs typeface="Arial"/>
+                <a:ea typeface="Arial"/>
+                <a:solidFill>
+                  <a:srgbClr val="1C7293"/>
+                </a:solidFill>
+              </a:rPr>
+              <a:t>[1]</a:t>
+            </a:r>
+          </a:p>
+        </p:txBody>
+      </p:sp>
+      <p:sp>
+        <p:nvSpPr>
+          <p:cNvPr id="8" name="TextBox 7"/>
+          <p:cNvSpPr txBox="1"/>
+          <p:nvPr/>
+        </p:nvSpPr>
+        <p:spPr>
+          <a:xfrm>
+            <a:off x="502920" y="6455664"/>
+            <a:ext cx="11201400" cy="292608"/>
+          </a:xfrm>
+          <a:prstGeom prst="rect">
+            <a:avLst/>
+          </a:prstGeom>
+          <a:noFill/>
+        </p:spPr>
+        <p:txBody>
+          <a:bodyPr wrap="square" lIns="0" rIns="0" tIns="0" bIns="0" anchor="t">
+            <a:spAutoFit/>
+          </a:bodyPr>
+          <a:lstStyle/>
+          <a:p>
+            <a:pPr algn="l">
+              <a:lnSpc>
+                <a:spcPct val="102000"/>
+              </a:lnSpc>
+            </a:pPr>
+            <a:r>
+              <a:rPr sz="850" b="1" i="1">
+                <a:solidFill>
+                  <a:srgbClr val="065A82"/>
+                </a:solidFill>
+                <a:latin typeface="Arial"/>
+              </a:rPr>
+              <a:t>[1] </a:t>
+            </a:r>
+            <a:r>
+              <a:rPr sz="850" i="1">
+                <a:solidFill>
+                  <a:srgbClr val="1C7293"/>
+                </a:solidFill>
+                <a:latin typeface="Arial"/>
+                <a:hlinkClick r:id="rId3"/>
+              </a:rPr>
+              <a:t>Ultralytics — YOLOv8 (2023)</a:t>
+            </a:r>
+            <a:r>
+              <a:rPr sz="850" i="1">
+                <a:solidFill>
+                  <a:srgbClr val="1C7293"/>
+                </a:solidFill>
+                <a:latin typeface="Arial"/>
+              </a:rPr>
+              <a:t>   ·   </a:t>
+            </a:r>
+            <a:r>
+              <a:rPr sz="850" b="1" i="1">
+                <a:solidFill>
+                  <a:srgbClr val="065A82"/>
+                </a:solidFill>
+                <a:latin typeface="Arial"/>
+              </a:rPr>
+              <a:t>[2] </a:t>
+            </a:r>
+            <a:r>
+              <a:rPr sz="850" i="1">
+                <a:solidFill>
+                  <a:srgbClr val="1C7293"/>
+                </a:solidFill>
+                <a:latin typeface="Arial"/>
+                <a:hlinkClick r:id="rId4"/>
+              </a:rPr>
+              <a:t>Google — MediaPipe</a:t>
+            </a:r>
+          </a:p>
+        </p:txBody>
+      </p:sp>
+      <p:sp>
+        <p:nvSpPr>
+          <p:cNvPr id="9" name="TextBox 8"/>
+          <p:cNvSpPr txBox="1"/>
+          <p:nvPr/>
+        </p:nvSpPr>
+        <p:spPr>
+          <a:xfrm>
+            <a:off x="11274552" y="6547104"/>
+            <a:ext cx="868680" cy="256032"/>
+          </a:xfrm>
+          <a:prstGeom prst="rect">
+            <a:avLst/>
+          </a:prstGeom>
+          <a:noFill/>
+        </p:spPr>
+        <p:txBody>
+          <a:bodyPr wrap="none" lIns="0" rIns="0" tIns="0" bIns="0">
+            <a:spAutoFit/>
+          </a:bodyPr>
+          <a:lstStyle/>
+          <a:p>
+            <a:pPr algn="r">
+              <a:lnSpc>
+                <a:spcPct val="100000"/>
+              </a:lnSpc>
+            </a:pPr>
+            <a:r>
+              <a:rPr sz="1000" i="1">
+                <a:solidFill>
+                  <a:srgbClr val="6B7685"/>
+                </a:solidFill>
+                <a:latin typeface="Arial"/>
+              </a:rPr>
+              <a:t>1 / 36</a:t>
             </a:r>
           </a:p>
         </p:txBody>
@@ -7291,7 +7631,40 @@
                 </a:solidFill>
                 <a:latin typeface="Arial"/>
               </a:rPr>
-              <a:t>70 лет AI: открытия, зимы, точка перелома 2017.</a:t>
+              <a:t>70 лет AI: открытия, зимы, точка перелома 2017. </a:t>
+            </a:r>
+            <a:r>
+              <a:rPr sz="1456" baseline="30000" b="0" i="1">
+                <a:latin typeface="Arial"/>
+                <a:cs typeface="Arial"/>
+                <a:ea typeface="Arial"/>
+                <a:solidFill>
+                  <a:srgbClr val="1C7293"/>
+                </a:solidFill>
+              </a:rPr>
+              <a:t>[2]</a:t>
+            </a:r>
+            <a:r>
+              <a:rPr sz="2800" b="1" i="0">
+                <a:latin typeface="Arial"/>
+                <a:cs typeface="Arial"/>
+                <a:ea typeface="Arial"/>
+                <a:solidFill>
+                  <a:srgbClr val="21295C"/>
+                </a:solidFill>
+              </a:rPr>
+              <a:t> </a:t>
+            </a:r>
+            <a:r>
+              <a:rPr sz="1456" baseline="30000" b="0" i="1">
+                <a:latin typeface="Arial"/>
+                <a:cs typeface="Arial"/>
+                <a:ea typeface="Arial"/>
+                <a:solidFill>
+                  <a:srgbClr val="1C7293"/>
+                </a:solidFill>
+              </a:rPr>
+              <a:t>[3]</a:t>
             </a:r>
           </a:p>
         </p:txBody>
@@ -7481,7 +7854,7 @@
         </p:nvSpPr>
         <p:spPr>
           <a:xfrm>
-            <a:off x="2121408" y="2459736"/>
+            <a:off x="2607564" y="2459736"/>
             <a:ext cx="73152" cy="201168"/>
           </a:xfrm>
           <a:prstGeom prst="rect">
@@ -7526,7 +7899,7 @@
         <p:spPr>
           <a:xfrm>
             <a:off x="914400" y="1874519"/>
-            <a:ext cx="2487168" cy="658368"/>
+            <a:ext cx="3459480" cy="384048"/>
           </a:xfrm>
           <a:prstGeom prst="rect">
             <a:avLst/>
@@ -7545,7 +7918,7 @@
               </a:lnSpc>
             </a:pPr>
             <a:r>
-              <a:rPr sz="1100" b="0" i="0">
+              <a:rPr sz="1250" b="0" i="0">
                 <a:solidFill>
                   <a:srgbClr val="21295C"/>
                 </a:solidFill>
@@ -7565,7 +7938,7 @@
         <p:spPr>
           <a:xfrm>
             <a:off x="914400" y="2606040"/>
-            <a:ext cx="2487168" cy="292608"/>
+            <a:ext cx="3459480" cy="292608"/>
           </a:xfrm>
           <a:prstGeom prst="rect">
             <a:avLst/>
@@ -7603,7 +7976,7 @@
         </p:nvSpPr>
         <p:spPr>
           <a:xfrm>
-            <a:off x="7333488" y="2459736"/>
+            <a:off x="6067044" y="2459736"/>
             <a:ext cx="73152" cy="201168"/>
           </a:xfrm>
           <a:prstGeom prst="rect">
@@ -7647,8 +8020,8 @@
         </p:nvSpPr>
         <p:spPr>
           <a:xfrm>
-            <a:off x="6126480" y="1874519"/>
-            <a:ext cx="2487168" cy="658368"/>
+            <a:off x="4373880" y="1874519"/>
+            <a:ext cx="3459480" cy="384048"/>
           </a:xfrm>
           <a:prstGeom prst="rect">
             <a:avLst/>
@@ -7667,7 +8040,7 @@
               </a:lnSpc>
             </a:pPr>
             <a:r>
-              <a:rPr sz="1100" b="0" i="0">
+              <a:rPr sz="1250" b="0" i="0">
                 <a:solidFill>
                   <a:srgbClr val="21295C"/>
                 </a:solidFill>
@@ -7686,8 +8059,8 @@
         </p:nvSpPr>
         <p:spPr>
           <a:xfrm>
-            <a:off x="6126480" y="2606040"/>
-            <a:ext cx="2487168" cy="292608"/>
+            <a:off x="4373880" y="2606040"/>
+            <a:ext cx="3459480" cy="292608"/>
           </a:xfrm>
           <a:prstGeom prst="rect">
             <a:avLst/>
@@ -7725,7 +8098,7 @@
         </p:nvSpPr>
         <p:spPr>
           <a:xfrm>
-            <a:off x="9939528" y="2459736"/>
+            <a:off x="9526523" y="2459736"/>
             <a:ext cx="73152" cy="201168"/>
           </a:xfrm>
           <a:prstGeom prst="rect">
@@ -7769,8 +8142,8 @@
         </p:nvSpPr>
         <p:spPr>
           <a:xfrm>
-            <a:off x="8732520" y="1874519"/>
-            <a:ext cx="2487168" cy="658368"/>
+            <a:off x="7833360" y="1874519"/>
+            <a:ext cx="3459480" cy="384048"/>
           </a:xfrm>
           <a:prstGeom prst="rect">
             <a:avLst/>
@@ -7789,7 +8162,7 @@
               </a:lnSpc>
             </a:pPr>
             <a:r>
-              <a:rPr sz="1100" b="0" i="0">
+              <a:rPr sz="1250" b="0" i="0">
                 <a:solidFill>
                   <a:srgbClr val="21295C"/>
                 </a:solidFill>
@@ -7808,8 +8181,8 @@
         </p:nvSpPr>
         <p:spPr>
           <a:xfrm>
-            <a:off x="8732520" y="2606040"/>
-            <a:ext cx="2487168" cy="292608"/>
+            <a:off x="7833360" y="2606040"/>
+            <a:ext cx="3459480" cy="292608"/>
           </a:xfrm>
           <a:prstGeom prst="rect">
             <a:avLst/>
@@ -9020,7 +9393,7 @@
         </p:nvSpPr>
         <p:spPr>
           <a:xfrm>
-            <a:off x="502920" y="6089904"/>
+            <a:off x="502920" y="5724144"/>
             <a:ext cx="11201400" cy="658368"/>
           </a:xfrm>
           <a:prstGeom prst="roundRect">
@@ -9068,7 +9441,7 @@
         </p:nvSpPr>
         <p:spPr>
           <a:xfrm>
-            <a:off x="685800" y="6163056"/>
+            <a:off x="685800" y="5797296"/>
             <a:ext cx="10835640" cy="512063"/>
           </a:xfrm>
           <a:prstGeom prst="rect">
@@ -9094,21 +9467,32 @@
                 </a:solidFill>
                 <a:latin typeface="Arial"/>
               </a:rPr>
-              <a:t>★ 2017 — Vaswani и 7 соавторов (Shazeer, Parmar, Uszkoreit, Jones, Gomez, Kaiser, Polosukhin) вводят механизм self-attention — основу всех современных LLM. На май 2026 у статьи свыше 160 000 цитирований.</a:t>
-            </a:r>
-          </a:p>
-        </p:txBody>
-      </p:sp>
-      <p:sp>
-        <p:nvSpPr>
-          <p:cNvPr id="8" name="TextBox 7"/>
-          <p:cNvSpPr txBox="1"/>
-          <p:nvPr/>
-        </p:nvSpPr>
-        <p:spPr>
-          <a:xfrm>
-            <a:off x="3520440" y="1874519"/>
-            <a:ext cx="2487168" cy="658368"/>
+              <a:t>★ 2017 — Vaswani и 7 соавторов (Shazeer, Parmar, Uszkoreit, Jones, Gomez, Kaiser, Polosukhin) вводят механизм self-attention — основу всех современных LLM. На май 2026 у статьи свыше 160 000 цитирований. </a:t>
+            </a:r>
+            <a:r>
+              <a:rPr sz="650" baseline="30000" b="0" i="1">
+                <a:latin typeface="Arial"/>
+                <a:cs typeface="Arial"/>
+                <a:ea typeface="Arial"/>
+                <a:solidFill>
+                  <a:srgbClr val="1C7293"/>
+                </a:solidFill>
+              </a:rPr>
+              <a:t>[1]</a:t>
+            </a:r>
+          </a:p>
+        </p:txBody>
+      </p:sp>
+      <p:sp>
+        <p:nvSpPr>
+          <p:cNvPr id="46" name="TextBox 45"/>
+          <p:cNvSpPr txBox="1"/>
+          <p:nvPr/>
+        </p:nvSpPr>
+        <p:spPr>
+          <a:xfrm>
+            <a:off x="502920" y="6455664"/>
+            <a:ext cx="11201400" cy="292608"/>
           </a:xfrm>
           <a:prstGeom prst="rect">
             <a:avLst/>
@@ -9121,103 +9505,125 @@
           </a:bodyPr>
           <a:lstStyle/>
           <a:p>
-            <a:pPr algn="ctr">
-              <a:lnSpc>
-                <a:spcPct val="105000"/>
-              </a:lnSpc>
-            </a:pPr>
-            <a:r>
-              <a:rPr sz="1100" b="0" i="0">
-                <a:solidFill>
-                  <a:srgbClr val="21295C"/>
-                </a:solidFill>
-                <a:latin typeface="Arial"/>
-              </a:rPr>
-              <a:t>Дартмутский семинар — рождение термина «AI»</a:t>
-            </a:r>
-          </a:p>
-        </p:txBody>
-      </p:sp>
-      <p:sp>
-        <p:nvSpPr>
-          <p:cNvPr id="9" name="TextBox 8"/>
-          <p:cNvSpPr txBox="1"/>
-          <p:nvPr/>
-        </p:nvSpPr>
-        <p:spPr>
-          <a:xfrm>
-            <a:off x="3520440" y="2606040"/>
-            <a:ext cx="2487168" cy="292608"/>
-          </a:xfrm>
-          <a:prstGeom prst="rect">
-            <a:avLst/>
-          </a:prstGeom>
-          <a:noFill/>
-        </p:spPr>
-        <p:txBody>
-          <a:bodyPr wrap="square" lIns="0" rIns="0" tIns="0" bIns="0" anchor="t">
-            <a:spAutoFit/>
-          </a:bodyPr>
-          <a:lstStyle/>
-          <a:p>
-            <a:pPr algn="ctr">
-              <a:lnSpc>
-                <a:spcPct val="115000"/>
-              </a:lnSpc>
-            </a:pPr>
-            <a:r>
-              <a:rPr sz="1450" b="1" i="0">
+            <a:pPr algn="l">
+              <a:lnSpc>
+                <a:spcPct val="102000"/>
+              </a:lnSpc>
+            </a:pPr>
+            <a:r>
+              <a:rPr sz="850" b="1" i="1">
+                <a:solidFill>
+                  <a:srgbClr val="065A82"/>
+                </a:solidFill>
+                <a:latin typeface="Arial"/>
+              </a:rPr>
+              <a:t>[1] </a:t>
+            </a:r>
+            <a:r>
+              <a:rPr sz="850" i="1">
                 <a:solidFill>
                   <a:srgbClr val="1C7293"/>
                 </a:solidFill>
                 <a:latin typeface="Arial"/>
-              </a:rPr>
-              <a:t>1956</a:t>
-            </a:r>
-          </a:p>
-        </p:txBody>
-      </p:sp>
-      <p:sp>
-        <p:nvSpPr>
-          <p:cNvPr id="7" name="Rectangle 6"/>
-          <p:cNvSpPr/>
-          <p:nvPr/>
-        </p:nvSpPr>
-        <p:spPr>
-          <a:xfrm>
-            <a:off x="4727448" y="2459736"/>
-            <a:ext cx="73152" cy="201168"/>
-          </a:xfrm>
-          <a:prstGeom prst="rect">
-            <a:avLst/>
-          </a:prstGeom>
-          <a:solidFill>
-            <a:srgbClr val="1C7293"/>
-          </a:solidFill>
-          <a:ln>
-            <a:noFill/>
-          </a:ln>
-          <a:effectLst/>
-        </p:spPr>
-        <p:style>
-          <a:lnRef idx="1">
-            <a:schemeClr val="accent1"/>
-          </a:lnRef>
-          <a:fillRef idx="3">
-            <a:schemeClr val="accent1"/>
-          </a:fillRef>
-          <a:effectRef idx="2">
-            <a:schemeClr val="accent1"/>
-          </a:effectRef>
-          <a:fontRef idx="minor">
-            <a:schemeClr val="lt1"/>
-          </a:fontRef>
-        </p:style>
-        <p:txBody>
-          <a:bodyPr rtlCol="0" anchor="ctr"/>
-          <a:lstStyle/>
-          <a:p>
-            <a:pPr algn="ctr"/>
+                <a:hlinkClick r:id="rId2"/>
+              </a:rPr>
+              <a:t>Vaswani et al. — Attention Is All You Need (2017)</a:t>
+            </a:r>
+            <a:r>
+              <a:rPr sz="850" i="1">
+                <a:solidFill>
+                  <a:srgbClr val="1C7293"/>
+                </a:solidFill>
+                <a:latin typeface="Arial"/>
+              </a:rPr>
+              <a:t>   ·   </a:t>
+            </a:r>
+            <a:r>
+              <a:rPr sz="850" b="1" i="1">
+                <a:solidFill>
+                  <a:srgbClr val="065A82"/>
+                </a:solidFill>
+                <a:latin typeface="Arial"/>
+              </a:rPr>
+              <a:t>[2] </a:t>
+            </a:r>
+            <a:r>
+              <a:rPr sz="850" i="1">
+                <a:solidFill>
+                  <a:srgbClr val="1C7293"/>
+                </a:solidFill>
+                <a:latin typeface="Arial"/>
+                <a:hlinkClick r:id="rId3"/>
+              </a:rPr>
+              <a:t>McCorduck — Machines Who Think (2004)</a:t>
+            </a:r>
+            <a:r>
+              <a:rPr sz="850" i="1">
+                <a:solidFill>
+                  <a:srgbClr val="1C7293"/>
+                </a:solidFill>
+                <a:latin typeface="Arial"/>
+              </a:rPr>
+              <a:t>   ·   </a:t>
+            </a:r>
+            <a:r>
+              <a:rPr sz="850" b="1" i="1">
+                <a:solidFill>
+                  <a:srgbClr val="065A82"/>
+                </a:solidFill>
+                <a:latin typeface="Arial"/>
+              </a:rPr>
+              <a:t>[3] </a:t>
+            </a:r>
+            <a:r>
+              <a:rPr sz="850" i="1">
+                <a:solidFill>
+                  <a:srgbClr val="1C7293"/>
+                </a:solidFill>
+                <a:latin typeface="Arial"/>
+                <a:hlinkClick r:id="rId4"/>
+              </a:rPr>
+              <a:t>Dhar — Paradigm Shifts in AI, CACM (2024)</a:t>
+            </a:r>
+          </a:p>
+        </p:txBody>
+      </p:sp>
+      <p:sp>
+        <p:nvSpPr>
+          <p:cNvPr id="47" name="TextBox 46"/>
+          <p:cNvSpPr txBox="1"/>
+          <p:nvPr/>
+        </p:nvSpPr>
+        <p:spPr>
+          <a:xfrm>
+            <a:off x="11274552" y="6547104"/>
+            <a:ext cx="868680" cy="256032"/>
+          </a:xfrm>
+          <a:prstGeom prst="rect">
+            <a:avLst/>
+          </a:prstGeom>
+          <a:noFill/>
+        </p:spPr>
+        <p:txBody>
+          <a:bodyPr wrap="none" lIns="0" rIns="0" tIns="0" bIns="0">
+            <a:spAutoFit/>
+          </a:bodyPr>
+          <a:lstStyle/>
+          <a:p>
+            <a:pPr algn="r">
+              <a:lnSpc>
+                <a:spcPct val="100000"/>
+              </a:lnSpc>
+            </a:pPr>
+            <a:r>
+              <a:rPr sz="1000" i="1">
+                <a:solidFill>
+                  <a:srgbClr val="6B7685"/>
+                </a:solidFill>
+                <a:latin typeface="Arial"/>
+              </a:rPr>
+              <a:t>10 / 36</a:t>
+            </a:r>
           </a:p>
         </p:txBody>
       </p:sp>
@@ -10324,6 +10730,45 @@
           </a:p>
         </p:txBody>
       </p:sp>
+      <p:sp>
+        <p:nvSpPr>
+          <p:cNvPr id="28" name="TextBox 27"/>
+          <p:cNvSpPr txBox="1"/>
+          <p:nvPr/>
+        </p:nvSpPr>
+        <p:spPr>
+          <a:xfrm>
+            <a:off x="11274552" y="6547104"/>
+            <a:ext cx="868680" cy="256032"/>
+          </a:xfrm>
+          <a:prstGeom prst="rect">
+            <a:avLst/>
+          </a:prstGeom>
+          <a:noFill/>
+        </p:spPr>
+        <p:txBody>
+          <a:bodyPr wrap="none" lIns="0" rIns="0" tIns="0" bIns="0">
+            <a:spAutoFit/>
+          </a:bodyPr>
+          <a:lstStyle/>
+          <a:p>
+            <a:pPr algn="r">
+              <a:lnSpc>
+                <a:spcPct val="100000"/>
+              </a:lnSpc>
+            </a:pPr>
+            <a:r>
+              <a:rPr sz="1000" i="1">
+                <a:solidFill>
+                  <a:srgbClr val="6B7685"/>
+                </a:solidFill>
+                <a:latin typeface="Arial"/>
+              </a:rPr>
+              <a:t>11 / 36</a:t>
+            </a:r>
+          </a:p>
+        </p:txBody>
+      </p:sp>
     </p:spTree>
   </p:cSld>
   <p:clrMapOvr>
@@ -10376,7 +10821,7 @@
                 </a:solidFill>
                 <a:latin typeface="Arial"/>
               </a:rPr>
-              <a:t>AI стал инфраструктурой за 3 года: ~1 млрд пользователей, 51% разработчиков ежедневно, 46% Copilot-кода.</a:t>
+              <a:t>AI стал инфраструктурой за 3 года: 900M пользователей, 51% разработчиков ежедневно, 46% Copilot-кода.</a:t>
             </a:r>
           </a:p>
         </p:txBody>
@@ -10487,7 +10932,7 @@
                 </a:solidFill>
                 <a:latin typeface="Arial"/>
               </a:rPr>
-              <a:t>1B</a:t>
+              <a:t>900M</a:t>
             </a:r>
           </a:p>
         </p:txBody>
@@ -10565,7 +11010,18 @@
                 </a:solidFill>
                 <a:latin typeface="Arial"/>
               </a:rPr>
-              <a:t>ChatGPT, август 2026</a:t>
+              <a:t>ChatGPT, февраль 2026 </a:t>
+            </a:r>
+            <a:r>
+              <a:rPr sz="520" baseline="30000" b="0" i="1">
+                <a:latin typeface="Arial"/>
+                <a:cs typeface="Arial"/>
+                <a:ea typeface="Arial"/>
+                <a:solidFill>
+                  <a:srgbClr val="1C7293"/>
+                </a:solidFill>
+              </a:rPr>
+              <a:t>[2]</a:t>
             </a:r>
           </a:p>
         </p:txBody>
@@ -10793,7 +11249,18 @@
                 </a:solidFill>
                 <a:latin typeface="Arial"/>
               </a:rPr>
-              <a:t>Stack Overflow Dev Survey 2025</a:t>
+              <a:t>Stack Overflow Dev Survey 2025 </a:t>
+            </a:r>
+            <a:r>
+              <a:rPr sz="520" baseline="30000" b="0" i="1">
+                <a:latin typeface="Arial"/>
+                <a:cs typeface="Arial"/>
+                <a:ea typeface="Arial"/>
+                <a:solidFill>
+                  <a:srgbClr val="1C7293"/>
+                </a:solidFill>
+              </a:rPr>
+              <a:t>[1]</a:t>
             </a:r>
           </a:p>
         </p:txBody>
@@ -10997,7 +11464,18 @@
                 </a:solidFill>
                 <a:latin typeface="Arial"/>
               </a:rPr>
-              <a:t>GitHub Octoverse 2025</a:t>
+              <a:t>GitHub Octoverse 2025 </a:t>
+            </a:r>
+            <a:r>
+              <a:rPr sz="520" baseline="30000" b="0" i="1">
+                <a:latin typeface="Arial"/>
+                <a:cs typeface="Arial"/>
+                <a:ea typeface="Arial"/>
+                <a:solidFill>
+                  <a:srgbClr val="1C7293"/>
+                </a:solidFill>
+              </a:rPr>
+              <a:t>[3]</a:t>
             </a:r>
           </a:p>
         </p:txBody>
@@ -11225,7 +11703,18 @@
                 </a:solidFill>
                 <a:latin typeface="Arial"/>
               </a:rPr>
-              <a:t>Grand View Research, 2026</a:t>
+              <a:t>Grand View Research, 2026 </a:t>
+            </a:r>
+            <a:r>
+              <a:rPr sz="520" baseline="30000" b="0" i="1">
+                <a:latin typeface="Arial"/>
+                <a:cs typeface="Arial"/>
+                <a:ea typeface="Arial"/>
+                <a:solidFill>
+                  <a:srgbClr val="1C7293"/>
+                </a:solidFill>
+              </a:rPr>
+              <a:t>[4]</a:t>
             </a:r>
           </a:p>
         </p:txBody>
@@ -11351,7 +11840,246 @@
                 </a:solidFill>
                 <a:latin typeface="Arial"/>
               </a:rPr>
-              <a:t>Контр-факт: ~90% AI-пилотов в РФ не доходят до прода. CNews / Vedomosti / Intellectual Analytics, март 2026.</a:t>
+              <a:t>Контр-факт: ~90% AI-пилотов в РФ не доходят до прода. CNews / Vedomosti / Intellectual Analytics, март 2026. </a:t>
+            </a:r>
+            <a:r>
+              <a:rPr sz="728" baseline="30000" b="0" i="1">
+                <a:latin typeface="Arial"/>
+                <a:cs typeface="Arial"/>
+                <a:ea typeface="Arial"/>
+                <a:solidFill>
+                  <a:srgbClr val="1C7293"/>
+                </a:solidFill>
+              </a:rPr>
+              <a:t>[5]</a:t>
+            </a:r>
+          </a:p>
+        </p:txBody>
+      </p:sp>
+      <p:sp>
+        <p:nvSpPr>
+          <p:cNvPr id="28" name="TextBox 27"/>
+          <p:cNvSpPr txBox="1"/>
+          <p:nvPr/>
+        </p:nvSpPr>
+        <p:spPr>
+          <a:xfrm>
+            <a:off x="502920" y="6455664"/>
+            <a:ext cx="11201400" cy="292608"/>
+          </a:xfrm>
+          <a:prstGeom prst="rect">
+            <a:avLst/>
+          </a:prstGeom>
+          <a:noFill/>
+        </p:spPr>
+        <p:txBody>
+          <a:bodyPr wrap="square" lIns="0" rIns="0" tIns="0" bIns="0" anchor="t">
+            <a:spAutoFit/>
+          </a:bodyPr>
+          <a:lstStyle/>
+          <a:p>
+            <a:pPr algn="l">
+              <a:lnSpc>
+                <a:spcPct val="102000"/>
+              </a:lnSpc>
+            </a:pPr>
+            <a:r>
+              <a:rPr sz="760" b="1" i="1">
+                <a:solidFill>
+                  <a:srgbClr val="065A82"/>
+                </a:solidFill>
+                <a:latin typeface="Arial"/>
+              </a:rPr>
+              <a:t>[1] </a:t>
+            </a:r>
+            <a:r>
+              <a:rPr sz="760" i="1">
+                <a:solidFill>
+                  <a:srgbClr val="1C7293"/>
+                </a:solidFill>
+                <a:latin typeface="Arial"/>
+                <a:hlinkClick r:id="rId5"/>
+              </a:rPr>
+              <a:t>Stack Overflow — Developer Survey 2025</a:t>
+            </a:r>
+            <a:r>
+              <a:rPr sz="760" i="1">
+                <a:solidFill>
+                  <a:srgbClr val="1C7293"/>
+                </a:solidFill>
+                <a:latin typeface="Arial"/>
+              </a:rPr>
+              <a:t>   ·   </a:t>
+            </a:r>
+            <a:r>
+              <a:rPr sz="760" b="1" i="1">
+                <a:solidFill>
+                  <a:srgbClr val="065A82"/>
+                </a:solidFill>
+                <a:latin typeface="Arial"/>
+              </a:rPr>
+              <a:t>[2] </a:t>
+            </a:r>
+            <a:r>
+              <a:rPr sz="760" i="1">
+                <a:solidFill>
+                  <a:srgbClr val="1C7293"/>
+                </a:solidFill>
+                <a:latin typeface="Arial"/>
+                <a:hlinkClick r:id="rId6"/>
+              </a:rPr>
+              <a:t>OpenAI — ChatGPT WAU (фев 2026)</a:t>
+            </a:r>
+            <a:r>
+              <a:rPr sz="760" i="1">
+                <a:solidFill>
+                  <a:srgbClr val="1C7293"/>
+                </a:solidFill>
+                <a:latin typeface="Arial"/>
+              </a:rPr>
+              <a:t>   ·   </a:t>
+            </a:r>
+            <a:r>
+              <a:rPr sz="760" b="1" i="1">
+                <a:solidFill>
+                  <a:srgbClr val="065A82"/>
+                </a:solidFill>
+                <a:latin typeface="Arial"/>
+              </a:rPr>
+              <a:t>[3] </a:t>
+            </a:r>
+            <a:r>
+              <a:rPr sz="760" i="1">
+                <a:solidFill>
+                  <a:srgbClr val="1C7293"/>
+                </a:solidFill>
+                <a:latin typeface="Arial"/>
+                <a:hlinkClick r:id="rId7"/>
+              </a:rPr>
+              <a:t>GitHub — Octoverse 2025</a:t>
+            </a:r>
+            <a:r>
+              <a:rPr sz="760" i="1">
+                <a:solidFill>
+                  <a:srgbClr val="1C7293"/>
+                </a:solidFill>
+                <a:latin typeface="Arial"/>
+              </a:rPr>
+              <a:t>   ·   </a:t>
+            </a:r>
+            <a:r>
+              <a:rPr sz="760" b="1" i="1">
+                <a:solidFill>
+                  <a:srgbClr val="065A82"/>
+                </a:solidFill>
+                <a:latin typeface="Arial"/>
+              </a:rPr>
+              <a:t>[4] </a:t>
+            </a:r>
+            <a:r>
+              <a:rPr sz="760" i="1">
+                <a:solidFill>
+                  <a:srgbClr val="1C7293"/>
+                </a:solidFill>
+                <a:latin typeface="Arial"/>
+                <a:hlinkClick r:id="rId8"/>
+              </a:rPr>
+              <a:t>Grand View Research (2026)</a:t>
+            </a:r>
+            <a:r>
+              <a:rPr sz="760" i="1">
+                <a:solidFill>
+                  <a:srgbClr val="1C7293"/>
+                </a:solidFill>
+                <a:latin typeface="Arial"/>
+              </a:rPr>
+              <a:t>   ·   </a:t>
+            </a:r>
+            <a:r>
+              <a:rPr sz="760" b="1" i="1">
+                <a:solidFill>
+                  <a:srgbClr val="065A82"/>
+                </a:solidFill>
+                <a:latin typeface="Arial"/>
+              </a:rPr>
+              <a:t>[5] </a:t>
+            </a:r>
+            <a:r>
+              <a:rPr sz="760" i="1">
+                <a:solidFill>
+                  <a:srgbClr val="1C7293"/>
+                </a:solidFill>
+                <a:latin typeface="Arial"/>
+                <a:hlinkClick r:id="rId9"/>
+              </a:rPr>
+              <a:t>Vedomosti / Intellectual Analytics (мар 2026)</a:t>
+            </a:r>
+            <a:r>
+              <a:rPr sz="760" i="1">
+                <a:solidFill>
+                  <a:srgbClr val="1C7293"/>
+                </a:solidFill>
+                <a:latin typeface="Arial"/>
+              </a:rPr>
+              <a:t>   ·   </a:t>
+            </a:r>
+            <a:r>
+              <a:rPr sz="760" b="1" i="1">
+                <a:solidFill>
+                  <a:srgbClr val="065A82"/>
+                </a:solidFill>
+                <a:latin typeface="Arial"/>
+              </a:rPr>
+              <a:t>[6] </a:t>
+            </a:r>
+            <a:r>
+              <a:rPr sz="760" i="1">
+                <a:solidFill>
+                  <a:srgbClr val="1C7293"/>
+                </a:solidFill>
+                <a:latin typeface="Arial"/>
+                <a:hlinkClick r:id="rId10"/>
+              </a:rPr>
+              <a:t>Gartner — пресс-релиз (окт 2024)</a:t>
+            </a:r>
+          </a:p>
+        </p:txBody>
+      </p:sp>
+      <p:sp>
+        <p:nvSpPr>
+          <p:cNvPr id="29" name="TextBox 28"/>
+          <p:cNvSpPr txBox="1"/>
+          <p:nvPr/>
+        </p:nvSpPr>
+        <p:spPr>
+          <a:xfrm>
+            <a:off x="11274552" y="6547104"/>
+            <a:ext cx="868680" cy="256032"/>
+          </a:xfrm>
+          <a:prstGeom prst="rect">
+            <a:avLst/>
+          </a:prstGeom>
+          <a:noFill/>
+        </p:spPr>
+        <p:txBody>
+          <a:bodyPr wrap="none" lIns="0" rIns="0" tIns="0" bIns="0">
+            <a:spAutoFit/>
+          </a:bodyPr>
+          <a:lstStyle/>
+          <a:p>
+            <a:pPr algn="r">
+              <a:lnSpc>
+                <a:spcPct val="100000"/>
+              </a:lnSpc>
+            </a:pPr>
+            <a:r>
+              <a:rPr sz="1000" i="1">
+                <a:solidFill>
+                  <a:srgbClr val="6B7685"/>
+                </a:solidFill>
+                <a:latin typeface="Arial"/>
+              </a:rPr>
+              <a:t>12 / 36</a:t>
             </a:r>
           </a:p>
         </p:txBody>
@@ -11660,7 +12388,18 @@
                 </a:solidFill>
                 <a:latin typeface="Arial"/>
               </a:rPr>
-              <a:t>Mistral AI (FR)</a:t>
+              <a:t>Mistral AI (FR) </a:t>
+            </a:r>
+            <a:r>
+              <a:rPr sz="624" baseline="30000" b="0" i="1">
+                <a:latin typeface="Arial"/>
+                <a:cs typeface="Arial"/>
+                <a:ea typeface="Arial"/>
+                <a:solidFill>
+                  <a:srgbClr val="1C7293"/>
+                </a:solidFill>
+              </a:rPr>
+              <a:t>[1]</a:t>
             </a:r>
           </a:p>
         </p:txBody>
@@ -11912,7 +12651,18 @@
                 </a:solidFill>
                 <a:latin typeface="Arial"/>
               </a:rPr>
-              <a:t>DeepSeek (CN)</a:t>
+              <a:t>DeepSeek (CN) </a:t>
+            </a:r>
+            <a:r>
+              <a:rPr sz="624" baseline="30000" b="0" i="1">
+                <a:latin typeface="Arial"/>
+                <a:cs typeface="Arial"/>
+                <a:ea typeface="Arial"/>
+                <a:solidFill>
+                  <a:srgbClr val="1C7293"/>
+                </a:solidFill>
+              </a:rPr>
+              <a:t>[2, 3, 4]</a:t>
             </a:r>
           </a:p>
         </p:txBody>
@@ -12164,7 +12914,18 @@
                 </a:solidFill>
                 <a:latin typeface="Arial"/>
               </a:rPr>
-              <a:t>P. Steinberger</a:t>
+              <a:t>P. Steinberger </a:t>
+            </a:r>
+            <a:r>
+              <a:rPr sz="624" baseline="30000" b="0" i="1">
+                <a:latin typeface="Arial"/>
+                <a:cs typeface="Arial"/>
+                <a:ea typeface="Arial"/>
+                <a:solidFill>
+                  <a:srgbClr val="1C7293"/>
+                </a:solidFill>
+              </a:rPr>
+              <a:t>[5]</a:t>
             </a:r>
           </a:p>
         </p:txBody>
@@ -12416,7 +13177,18 @@
                 </a:solidFill>
                 <a:latin typeface="Arial"/>
               </a:rPr>
-              <a:t>G. Gerganov / ggml.ai</a:t>
+              <a:t>G. Gerganov / ggml.ai </a:t>
+            </a:r>
+            <a:r>
+              <a:rPr sz="624" baseline="30000" b="0" i="1">
+                <a:latin typeface="Arial"/>
+                <a:cs typeface="Arial"/>
+                <a:ea typeface="Arial"/>
+                <a:solidFill>
+                  <a:srgbClr val="1C7293"/>
+                </a:solidFill>
+              </a:rPr>
+              <a:t>[6]</a:t>
             </a:r>
           </a:p>
         </p:txBody>
@@ -12429,7 +13201,7 @@
         </p:nvSpPr>
         <p:spPr>
           <a:xfrm>
-            <a:off x="502920" y="5943600"/>
+            <a:off x="502920" y="5870448"/>
             <a:ext cx="11201400" cy="502920"/>
           </a:xfrm>
           <a:prstGeom prst="roundRect">
@@ -12477,7 +13249,7 @@
         </p:nvSpPr>
         <p:spPr>
           <a:xfrm>
-            <a:off x="685800" y="6016752"/>
+            <a:off x="685800" y="5943600"/>
             <a:ext cx="10835640" cy="356616"/>
           </a:xfrm>
           <a:prstGeom prst="rect">
@@ -12504,6 +13276,234 @@
                 <a:latin typeface="Arial"/>
               </a:rPr>
               <a:t>Не отчаивайтесь: серьёзные прорывы делают разные команды. Курс — про устойчивые концепты, переживающие смену поколений моделей.</a:t>
+            </a:r>
+          </a:p>
+        </p:txBody>
+      </p:sp>
+      <p:sp>
+        <p:nvSpPr>
+          <p:cNvPr id="29" name="TextBox 28"/>
+          <p:cNvSpPr txBox="1"/>
+          <p:nvPr/>
+        </p:nvSpPr>
+        <p:spPr>
+          <a:xfrm>
+            <a:off x="502920" y="6455664"/>
+            <a:ext cx="11201400" cy="292608"/>
+          </a:xfrm>
+          <a:prstGeom prst="rect">
+            <a:avLst/>
+          </a:prstGeom>
+          <a:noFill/>
+        </p:spPr>
+        <p:txBody>
+          <a:bodyPr wrap="square" lIns="0" rIns="0" tIns="0" bIns="0" anchor="t">
+            <a:spAutoFit/>
+          </a:bodyPr>
+          <a:lstStyle/>
+          <a:p>
+            <a:pPr algn="l">
+              <a:lnSpc>
+                <a:spcPct val="102000"/>
+              </a:lnSpc>
+            </a:pPr>
+            <a:r>
+              <a:rPr sz="760" b="1" i="1">
+                <a:solidFill>
+                  <a:srgbClr val="065A82"/>
+                </a:solidFill>
+                <a:latin typeface="Arial"/>
+              </a:rPr>
+              <a:t>[1] </a:t>
+            </a:r>
+            <a:r>
+              <a:rPr sz="760" i="1">
+                <a:solidFill>
+                  <a:srgbClr val="1C7293"/>
+                </a:solidFill>
+                <a:latin typeface="Arial"/>
+                <a:hlinkClick r:id="rId2"/>
+              </a:rPr>
+              <a:t>Mistral AI — Announcing Mistral 7B (сен 2023)</a:t>
+            </a:r>
+            <a:r>
+              <a:rPr sz="760" i="1">
+                <a:solidFill>
+                  <a:srgbClr val="1C7293"/>
+                </a:solidFill>
+                <a:latin typeface="Arial"/>
+              </a:rPr>
+              <a:t>   ·   </a:t>
+            </a:r>
+            <a:r>
+              <a:rPr sz="760" b="1" i="1">
+                <a:solidFill>
+                  <a:srgbClr val="065A82"/>
+                </a:solidFill>
+                <a:latin typeface="Arial"/>
+              </a:rPr>
+              <a:t>[2] </a:t>
+            </a:r>
+            <a:r>
+              <a:rPr sz="760" i="1">
+                <a:solidFill>
+                  <a:srgbClr val="1C7293"/>
+                </a:solidFill>
+                <a:latin typeface="Arial"/>
+                <a:hlinkClick r:id="rId3"/>
+              </a:rPr>
+              <a:t>DeepSeek-R1 — тех.отчёт (янв 2025)</a:t>
+            </a:r>
+            <a:r>
+              <a:rPr sz="760" i="1">
+                <a:solidFill>
+                  <a:srgbClr val="1C7293"/>
+                </a:solidFill>
+                <a:latin typeface="Arial"/>
+              </a:rPr>
+              <a:t>   ·   </a:t>
+            </a:r>
+            <a:r>
+              <a:rPr sz="760" b="1" i="1">
+                <a:solidFill>
+                  <a:srgbClr val="065A82"/>
+                </a:solidFill>
+                <a:latin typeface="Arial"/>
+              </a:rPr>
+              <a:t>[3] </a:t>
+            </a:r>
+            <a:r>
+              <a:rPr sz="760" i="1">
+                <a:solidFill>
+                  <a:srgbClr val="1C7293"/>
+                </a:solidFill>
+                <a:latin typeface="Arial"/>
+                <a:hlinkClick r:id="rId4"/>
+              </a:rPr>
+              <a:t>SemiAnalysis — DeepSeek cost analysis (2025)</a:t>
+            </a:r>
+            <a:r>
+              <a:rPr sz="760" i="1">
+                <a:solidFill>
+                  <a:srgbClr val="1C7293"/>
+                </a:solidFill>
+                <a:latin typeface="Arial"/>
+              </a:rPr>
+              <a:t>   ·   </a:t>
+            </a:r>
+            <a:r>
+              <a:rPr sz="760" b="1" i="1">
+                <a:solidFill>
+                  <a:srgbClr val="065A82"/>
+                </a:solidFill>
+                <a:latin typeface="Arial"/>
+              </a:rPr>
+              <a:t>[4] </a:t>
+            </a:r>
+            <a:r>
+              <a:rPr sz="760" i="1">
+                <a:solidFill>
+                  <a:srgbClr val="1C7293"/>
+                </a:solidFill>
+                <a:latin typeface="Arial"/>
+                <a:hlinkClick r:id="rId5"/>
+              </a:rPr>
+              <a:t>Bloomberg — Nvidia $589B drop (27 янв 2025)</a:t>
+            </a:r>
+            <a:r>
+              <a:rPr sz="760" i="1">
+                <a:solidFill>
+                  <a:srgbClr val="1C7293"/>
+                </a:solidFill>
+                <a:latin typeface="Arial"/>
+              </a:rPr>
+              <a:t>   ·   </a:t>
+            </a:r>
+            <a:r>
+              <a:rPr sz="760" b="1" i="1">
+                <a:solidFill>
+                  <a:srgbClr val="065A82"/>
+                </a:solidFill>
+                <a:latin typeface="Arial"/>
+              </a:rPr>
+              <a:t>[5] </a:t>
+            </a:r>
+            <a:r>
+              <a:rPr sz="760" i="1">
+                <a:solidFill>
+                  <a:srgbClr val="1C7293"/>
+                </a:solidFill>
+                <a:latin typeface="Arial"/>
+                <a:hlinkClick r:id="rId6"/>
+              </a:rPr>
+              <a:t>Steinberger — OpenClaw (GitHub)</a:t>
+            </a:r>
+            <a:r>
+              <a:rPr sz="760" i="1">
+                <a:solidFill>
+                  <a:srgbClr val="1C7293"/>
+                </a:solidFill>
+                <a:latin typeface="Arial"/>
+              </a:rPr>
+              <a:t>   ·   </a:t>
+            </a:r>
+            <a:r>
+              <a:rPr sz="760" b="1" i="1">
+                <a:solidFill>
+                  <a:srgbClr val="065A82"/>
+                </a:solidFill>
+                <a:latin typeface="Arial"/>
+              </a:rPr>
+              <a:t>[6] </a:t>
+            </a:r>
+            <a:r>
+              <a:rPr sz="760" i="1">
+                <a:solidFill>
+                  <a:srgbClr val="1C7293"/>
+                </a:solidFill>
+                <a:latin typeface="Arial"/>
+                <a:hlinkClick r:id="rId7"/>
+              </a:rPr>
+              <a:t>Gerganov — llama.cpp / ggml.ai</a:t>
+            </a:r>
+          </a:p>
+        </p:txBody>
+      </p:sp>
+      <p:sp>
+        <p:nvSpPr>
+          <p:cNvPr id="30" name="TextBox 29"/>
+          <p:cNvSpPr txBox="1"/>
+          <p:nvPr/>
+        </p:nvSpPr>
+        <p:spPr>
+          <a:xfrm>
+            <a:off x="11274552" y="6547104"/>
+            <a:ext cx="868680" cy="256032"/>
+          </a:xfrm>
+          <a:prstGeom prst="rect">
+            <a:avLst/>
+          </a:prstGeom>
+          <a:noFill/>
+        </p:spPr>
+        <p:txBody>
+          <a:bodyPr wrap="none" lIns="0" rIns="0" tIns="0" bIns="0">
+            <a:spAutoFit/>
+          </a:bodyPr>
+          <a:lstStyle/>
+          <a:p>
+            <a:pPr algn="r">
+              <a:lnSpc>
+                <a:spcPct val="100000"/>
+              </a:lnSpc>
+            </a:pPr>
+            <a:r>
+              <a:rPr sz="1000" i="1">
+                <a:solidFill>
+                  <a:srgbClr val="6B7685"/>
+                </a:solidFill>
+                <a:latin typeface="Arial"/>
+              </a:rPr>
+              <a:t>13 / 36</a:t>
             </a:r>
           </a:p>
         </p:txBody>
@@ -13611,6 +14611,45 @@
           </a:p>
         </p:txBody>
       </p:sp>
+      <p:sp>
+        <p:nvSpPr>
+          <p:cNvPr id="28" name="TextBox 27"/>
+          <p:cNvSpPr txBox="1"/>
+          <p:nvPr/>
+        </p:nvSpPr>
+        <p:spPr>
+          <a:xfrm>
+            <a:off x="11274552" y="6547104"/>
+            <a:ext cx="868680" cy="256032"/>
+          </a:xfrm>
+          <a:prstGeom prst="rect">
+            <a:avLst/>
+          </a:prstGeom>
+          <a:noFill/>
+        </p:spPr>
+        <p:txBody>
+          <a:bodyPr wrap="none" lIns="0" rIns="0" tIns="0" bIns="0">
+            <a:spAutoFit/>
+          </a:bodyPr>
+          <a:lstStyle/>
+          <a:p>
+            <a:pPr algn="r">
+              <a:lnSpc>
+                <a:spcPct val="100000"/>
+              </a:lnSpc>
+            </a:pPr>
+            <a:r>
+              <a:rPr sz="1000" i="1">
+                <a:solidFill>
+                  <a:srgbClr val="6B7685"/>
+                </a:solidFill>
+                <a:latin typeface="Arial"/>
+              </a:rPr>
+              <a:t>14 / 36</a:t>
+            </a:r>
+          </a:p>
+        </p:txBody>
+      </p:sp>
     </p:spTree>
   </p:cSld>
   <p:clrMapOvr>
@@ -14476,7 +15515,40 @@
                 </a:solidFill>
                 <a:latin typeface="Arial"/>
               </a:rPr>
-              <a:t>Не четыре альтернативные технологии, а четыре способа реализации одной задачи. Каждое следующее обёртывание добавляет способности — и сложность, стоимость, потенциал ошибок.</a:t>
+              <a:t>Не четыре альтернативные технологии, а четыре способа реализации одной задачи. </a:t>
+            </a:r>
+            <a:r>
+              <a:rPr sz="676" baseline="30000" b="0" i="1">
+                <a:latin typeface="Arial"/>
+                <a:cs typeface="Arial"/>
+                <a:ea typeface="Arial"/>
+                <a:solidFill>
+                  <a:srgbClr val="1C7293"/>
+                </a:solidFill>
+              </a:rPr>
+              <a:t>[1]</a:t>
+            </a:r>
+            <a:r>
+              <a:rPr sz="1300" b="0" i="0">
+                <a:latin typeface="Arial"/>
+                <a:cs typeface="Arial"/>
+                <a:ea typeface="Arial"/>
+                <a:solidFill>
+                  <a:srgbClr val="21295C"/>
+                </a:solidFill>
+              </a:rPr>
+              <a:t> Каждое следующее обёртывание добавляет способности — и сложность, стоимость, потенциал ошибок. </a:t>
+            </a:r>
+            <a:r>
+              <a:rPr sz="676" baseline="30000" b="0" i="1">
+                <a:latin typeface="Arial"/>
+                <a:cs typeface="Arial"/>
+                <a:ea typeface="Arial"/>
+                <a:solidFill>
+                  <a:srgbClr val="1C7293"/>
+                </a:solidFill>
+              </a:rPr>
+              <a:t>[2]</a:t>
             </a:r>
           </a:p>
         </p:txBody>
@@ -14564,6 +15636,122 @@
                 <a:latin typeface="Arial"/>
               </a:rPr>
               <a:t>Выбор слоя — инженерное решение, не альтернатива.</a:t>
+            </a:r>
+          </a:p>
+        </p:txBody>
+      </p:sp>
+      <p:sp>
+        <p:nvSpPr>
+          <p:cNvPr id="24" name="TextBox 23"/>
+          <p:cNvSpPr txBox="1"/>
+          <p:nvPr/>
+        </p:nvSpPr>
+        <p:spPr>
+          <a:xfrm>
+            <a:off x="502920" y="6455664"/>
+            <a:ext cx="11201400" cy="292608"/>
+          </a:xfrm>
+          <a:prstGeom prst="rect">
+            <a:avLst/>
+          </a:prstGeom>
+          <a:noFill/>
+        </p:spPr>
+        <p:txBody>
+          <a:bodyPr wrap="square" lIns="0" rIns="0" tIns="0" bIns="0" anchor="t">
+            <a:spAutoFit/>
+          </a:bodyPr>
+          <a:lstStyle/>
+          <a:p>
+            <a:pPr algn="l">
+              <a:lnSpc>
+                <a:spcPct val="102000"/>
+              </a:lnSpc>
+            </a:pPr>
+            <a:r>
+              <a:rPr sz="850" b="1" i="1">
+                <a:solidFill>
+                  <a:srgbClr val="065A82"/>
+                </a:solidFill>
+                <a:latin typeface="Arial"/>
+              </a:rPr>
+              <a:t>[1] </a:t>
+            </a:r>
+            <a:r>
+              <a:rPr sz="850" i="1">
+                <a:solidFill>
+                  <a:srgbClr val="1C7293"/>
+                </a:solidFill>
+                <a:latin typeface="Arial"/>
+                <a:hlinkClick r:id="rId2"/>
+              </a:rPr>
+              <a:t>Anthropic — Building Effective Agents (2024)</a:t>
+            </a:r>
+            <a:r>
+              <a:rPr sz="850" i="1">
+                <a:solidFill>
+                  <a:srgbClr val="1C7293"/>
+                </a:solidFill>
+                <a:latin typeface="Arial"/>
+              </a:rPr>
+              <a:t>   ·   </a:t>
+            </a:r>
+            <a:r>
+              <a:rPr sz="850" b="1" i="1">
+                <a:solidFill>
+                  <a:srgbClr val="065A82"/>
+                </a:solidFill>
+                <a:latin typeface="Arial"/>
+              </a:rPr>
+              <a:t>[2] </a:t>
+            </a:r>
+            <a:r>
+              <a:rPr sz="850" i="1">
+                <a:solidFill>
+                  <a:srgbClr val="1C7293"/>
+                </a:solidFill>
+                <a:latin typeface="Arial"/>
+                <a:hlinkClick r:id="rId3"/>
+              </a:rPr>
+              <a:t>Weng — LLM Powered Autonomous Agents (2023)</a:t>
+            </a:r>
+          </a:p>
+        </p:txBody>
+      </p:sp>
+      <p:sp>
+        <p:nvSpPr>
+          <p:cNvPr id="25" name="TextBox 24"/>
+          <p:cNvSpPr txBox="1"/>
+          <p:nvPr/>
+        </p:nvSpPr>
+        <p:spPr>
+          <a:xfrm>
+            <a:off x="11274552" y="6547104"/>
+            <a:ext cx="868680" cy="256032"/>
+          </a:xfrm>
+          <a:prstGeom prst="rect">
+            <a:avLst/>
+          </a:prstGeom>
+          <a:noFill/>
+        </p:spPr>
+        <p:txBody>
+          <a:bodyPr wrap="none" lIns="0" rIns="0" tIns="0" bIns="0">
+            <a:spAutoFit/>
+          </a:bodyPr>
+          <a:lstStyle/>
+          <a:p>
+            <a:pPr algn="r">
+              <a:lnSpc>
+                <a:spcPct val="100000"/>
+              </a:lnSpc>
+            </a:pPr>
+            <a:r>
+              <a:rPr sz="1000" i="1">
+                <a:solidFill>
+                  <a:srgbClr val="6B7685"/>
+                </a:solidFill>
+                <a:latin typeface="Arial"/>
+              </a:rPr>
+              <a:t>15 / 36</a:t>
             </a:r>
           </a:p>
         </p:txBody>
@@ -14620,7 +15808,40 @@
                 </a:solidFill>
                 <a:latin typeface="Arial"/>
               </a:rPr>
-              <a:t>Классификация AI-систем — две оси: тип задачи × модальность.</a:t>
+              <a:t>Классификация AI-систем </a:t>
+            </a:r>
+            <a:r>
+              <a:rPr sz="1352" baseline="30000" b="0" i="1">
+                <a:latin typeface="Arial"/>
+                <a:cs typeface="Arial"/>
+                <a:ea typeface="Arial"/>
+                <a:solidFill>
+                  <a:srgbClr val="1C7293"/>
+                </a:solidFill>
+              </a:rPr>
+              <a:t>[1]</a:t>
+            </a:r>
+            <a:r>
+              <a:rPr sz="2600" b="1" i="0">
+                <a:latin typeface="Arial"/>
+                <a:cs typeface="Arial"/>
+                <a:ea typeface="Arial"/>
+                <a:solidFill>
+                  <a:srgbClr val="21295C"/>
+                </a:solidFill>
+              </a:rPr>
+              <a:t> — две оси: тип задачи × модальность. </a:t>
+            </a:r>
+            <a:r>
+              <a:rPr sz="1352" baseline="30000" b="0" i="1">
+                <a:latin typeface="Arial"/>
+                <a:cs typeface="Arial"/>
+                <a:ea typeface="Arial"/>
+                <a:solidFill>
+                  <a:srgbClr val="1C7293"/>
+                </a:solidFill>
+              </a:rPr>
+              <a:t>[2]</a:t>
             </a:r>
           </a:p>
         </p:txBody>
@@ -17336,7 +18557,7 @@
         </p:nvSpPr>
         <p:spPr>
           <a:xfrm>
-            <a:off x="502920" y="6263640"/>
+            <a:off x="502920" y="5916168"/>
             <a:ext cx="11201400" cy="457200"/>
           </a:xfrm>
           <a:prstGeom prst="roundRect">
@@ -17384,7 +18605,7 @@
         </p:nvSpPr>
         <p:spPr>
           <a:xfrm>
-            <a:off x="685800" y="6336792"/>
+            <a:off x="685800" y="5989320"/>
             <a:ext cx="10835640" cy="310896"/>
           </a:xfrm>
           <a:prstGeom prst="rect">
@@ -17411,6 +18632,122 @@
                 <a:latin typeface="Arial"/>
               </a:rPr>
               <a:t>YOLO — детекция объектов из демо в начале лекции. Подход к обучению и архитектура — позже в курсе.</a:t>
+            </a:r>
+          </a:p>
+        </p:txBody>
+      </p:sp>
+      <p:sp>
+        <p:nvSpPr>
+          <p:cNvPr id="71" name="TextBox 70"/>
+          <p:cNvSpPr txBox="1"/>
+          <p:nvPr/>
+        </p:nvSpPr>
+        <p:spPr>
+          <a:xfrm>
+            <a:off x="502920" y="6455664"/>
+            <a:ext cx="11201400" cy="292608"/>
+          </a:xfrm>
+          <a:prstGeom prst="rect">
+            <a:avLst/>
+          </a:prstGeom>
+          <a:noFill/>
+        </p:spPr>
+        <p:txBody>
+          <a:bodyPr wrap="square" lIns="0" rIns="0" tIns="0" bIns="0" anchor="t">
+            <a:spAutoFit/>
+          </a:bodyPr>
+          <a:lstStyle/>
+          <a:p>
+            <a:pPr algn="l">
+              <a:lnSpc>
+                <a:spcPct val="102000"/>
+              </a:lnSpc>
+            </a:pPr>
+            <a:r>
+              <a:rPr sz="850" b="1" i="1">
+                <a:solidFill>
+                  <a:srgbClr val="065A82"/>
+                </a:solidFill>
+                <a:latin typeface="Arial"/>
+              </a:rPr>
+              <a:t>[1] </a:t>
+            </a:r>
+            <a:r>
+              <a:rPr sz="850" i="1">
+                <a:solidFill>
+                  <a:srgbClr val="1C7293"/>
+                </a:solidFill>
+                <a:latin typeface="Arial"/>
+                <a:hlinkClick r:id="rId7"/>
+              </a:rPr>
+              <a:t>Russell &amp; Norvig — AIMA (2021)</a:t>
+            </a:r>
+            <a:r>
+              <a:rPr sz="850" i="1">
+                <a:solidFill>
+                  <a:srgbClr val="1C7293"/>
+                </a:solidFill>
+                <a:latin typeface="Arial"/>
+              </a:rPr>
+              <a:t>   ·   </a:t>
+            </a:r>
+            <a:r>
+              <a:rPr sz="850" b="1" i="1">
+                <a:solidFill>
+                  <a:srgbClr val="065A82"/>
+                </a:solidFill>
+                <a:latin typeface="Arial"/>
+              </a:rPr>
+              <a:t>[2] </a:t>
+            </a:r>
+            <a:r>
+              <a:rPr sz="850" i="1">
+                <a:solidFill>
+                  <a:srgbClr val="1C7293"/>
+                </a:solidFill>
+                <a:latin typeface="Arial"/>
+                <a:hlinkClick r:id="rId8"/>
+              </a:rPr>
+              <a:t>Goodfellow, Bengio, Courville — Deep Learning (2016)</a:t>
+            </a:r>
+          </a:p>
+        </p:txBody>
+      </p:sp>
+      <p:sp>
+        <p:nvSpPr>
+          <p:cNvPr id="72" name="TextBox 71"/>
+          <p:cNvSpPr txBox="1"/>
+          <p:nvPr/>
+        </p:nvSpPr>
+        <p:spPr>
+          <a:xfrm>
+            <a:off x="11274552" y="6547104"/>
+            <a:ext cx="868680" cy="256032"/>
+          </a:xfrm>
+          <a:prstGeom prst="rect">
+            <a:avLst/>
+          </a:prstGeom>
+          <a:noFill/>
+        </p:spPr>
+        <p:txBody>
+          <a:bodyPr wrap="none" lIns="0" rIns="0" tIns="0" bIns="0">
+            <a:spAutoFit/>
+          </a:bodyPr>
+          <a:lstStyle/>
+          <a:p>
+            <a:pPr algn="r">
+              <a:lnSpc>
+                <a:spcPct val="100000"/>
+              </a:lnSpc>
+            </a:pPr>
+            <a:r>
+              <a:rPr sz="1000" i="1">
+                <a:solidFill>
+                  <a:srgbClr val="6B7685"/>
+                </a:solidFill>
+                <a:latin typeface="Arial"/>
+              </a:rPr>
+              <a:t>16 / 36</a:t>
             </a:r>
           </a:p>
         </p:txBody>
@@ -18432,7 +19769,7 @@
         </p:nvSpPr>
         <p:spPr>
           <a:xfrm>
-            <a:off x="502920" y="5989320"/>
+            <a:off x="502920" y="5870448"/>
             <a:ext cx="11201400" cy="502920"/>
           </a:xfrm>
           <a:prstGeom prst="roundRect">
@@ -18480,7 +19817,7 @@
         </p:nvSpPr>
         <p:spPr>
           <a:xfrm>
-            <a:off x="685800" y="6062472"/>
+            <a:off x="685800" y="5943600"/>
             <a:ext cx="10835640" cy="356616"/>
           </a:xfrm>
           <a:prstGeom prst="rect">
@@ -18506,7 +19843,106 @@
                 </a:solidFill>
                 <a:latin typeface="Arial"/>
               </a:rPr>
-              <a:t>Распределение контроля — инженерное решение, а не достоинство одного способа над другим.</a:t>
+              <a:t>Распределение контроля — инженерное решение, а не достоинство одного способа над другим. </a:t>
+            </a:r>
+            <a:r>
+              <a:rPr sz="676" baseline="30000" b="0" i="1">
+                <a:latin typeface="Arial"/>
+                <a:cs typeface="Arial"/>
+                <a:ea typeface="Arial"/>
+                <a:solidFill>
+                  <a:srgbClr val="1C7293"/>
+                </a:solidFill>
+              </a:rPr>
+              <a:t>[1]</a:t>
+            </a:r>
+          </a:p>
+        </p:txBody>
+      </p:sp>
+      <p:sp>
+        <p:nvSpPr>
+          <p:cNvPr id="28" name="TextBox 27"/>
+          <p:cNvSpPr txBox="1"/>
+          <p:nvPr/>
+        </p:nvSpPr>
+        <p:spPr>
+          <a:xfrm>
+            <a:off x="502920" y="6455664"/>
+            <a:ext cx="11201400" cy="292608"/>
+          </a:xfrm>
+          <a:prstGeom prst="rect">
+            <a:avLst/>
+          </a:prstGeom>
+          <a:noFill/>
+        </p:spPr>
+        <p:txBody>
+          <a:bodyPr wrap="square" lIns="0" rIns="0" tIns="0" bIns="0" anchor="t">
+            <a:spAutoFit/>
+          </a:bodyPr>
+          <a:lstStyle/>
+          <a:p>
+            <a:pPr algn="l">
+              <a:lnSpc>
+                <a:spcPct val="102000"/>
+              </a:lnSpc>
+            </a:pPr>
+            <a:r>
+              <a:rPr sz="850" b="1" i="1">
+                <a:solidFill>
+                  <a:srgbClr val="065A82"/>
+                </a:solidFill>
+                <a:latin typeface="Arial"/>
+              </a:rPr>
+              <a:t>[1] </a:t>
+            </a:r>
+            <a:r>
+              <a:rPr sz="850" i="1">
+                <a:solidFill>
+                  <a:srgbClr val="1C7293"/>
+                </a:solidFill>
+                <a:latin typeface="Arial"/>
+                <a:hlinkClick r:id="rId2"/>
+              </a:rPr>
+              <a:t>Anthropic — Building Effective Agents (2024)</a:t>
+            </a:r>
+          </a:p>
+        </p:txBody>
+      </p:sp>
+      <p:sp>
+        <p:nvSpPr>
+          <p:cNvPr id="29" name="TextBox 28"/>
+          <p:cNvSpPr txBox="1"/>
+          <p:nvPr/>
+        </p:nvSpPr>
+        <p:spPr>
+          <a:xfrm>
+            <a:off x="11274552" y="6547104"/>
+            <a:ext cx="868680" cy="256032"/>
+          </a:xfrm>
+          <a:prstGeom prst="rect">
+            <a:avLst/>
+          </a:prstGeom>
+          <a:noFill/>
+        </p:spPr>
+        <p:txBody>
+          <a:bodyPr wrap="none" lIns="0" rIns="0" tIns="0" bIns="0">
+            <a:spAutoFit/>
+          </a:bodyPr>
+          <a:lstStyle/>
+          <a:p>
+            <a:pPr algn="r">
+              <a:lnSpc>
+                <a:spcPct val="100000"/>
+              </a:lnSpc>
+            </a:pPr>
+            <a:r>
+              <a:rPr sz="1000" i="1">
+                <a:solidFill>
+                  <a:srgbClr val="6B7685"/>
+                </a:solidFill>
+                <a:latin typeface="Arial"/>
+              </a:rPr>
+              <a:t>17 / 36</a:t>
             </a:r>
           </a:p>
         </p:txBody>
@@ -20209,7 +21645,18 @@
                 </a:solidFill>
                 <a:latin typeface="Arial"/>
               </a:rPr>
-              <a:t>прогноз структур белков</a:t>
+              <a:t>прогноз структур белков </a:t>
+            </a:r>
+            <a:r>
+              <a:rPr sz="572" baseline="30000" b="0" i="1">
+                <a:latin typeface="Arial"/>
+                <a:cs typeface="Arial"/>
+                <a:ea typeface="Arial"/>
+                <a:solidFill>
+                  <a:srgbClr val="1C7293"/>
+                </a:solidFill>
+              </a:rPr>
+              <a:t>[2]</a:t>
             </a:r>
           </a:p>
         </p:txBody>
@@ -20222,7 +21669,7 @@
         </p:nvSpPr>
         <p:spPr>
           <a:xfrm>
-            <a:off x="502920" y="5989320"/>
+            <a:off x="502920" y="5870448"/>
             <a:ext cx="11201400" cy="502920"/>
           </a:xfrm>
           <a:prstGeom prst="roundRect">
@@ -20270,7 +21717,7 @@
         </p:nvSpPr>
         <p:spPr>
           <a:xfrm>
-            <a:off x="685800" y="6062472"/>
+            <a:off x="685800" y="5943600"/>
             <a:ext cx="10835640" cy="356616"/>
           </a:xfrm>
           <a:prstGeom prst="rect">
@@ -20296,7 +21743,145 @@
                 </a:solidFill>
                 <a:latin typeface="Arial"/>
               </a:rPr>
-              <a:t>Препроцессинг и постпроцессинг — ответственность разработчика. YOLO = 50 строк; рабочая система с YOLO = сотни строк.</a:t>
+              <a:t>Препроцессинг и постпроцессинг — ответственность разработчика. </a:t>
+            </a:r>
+            <a:r>
+              <a:rPr sz="624" baseline="30000" b="0" i="1">
+                <a:latin typeface="Arial"/>
+                <a:cs typeface="Arial"/>
+                <a:ea typeface="Arial"/>
+                <a:solidFill>
+                  <a:srgbClr val="1C7293"/>
+                </a:solidFill>
+              </a:rPr>
+              <a:t>[1]</a:t>
+            </a:r>
+            <a:r>
+              <a:rPr sz="1200" b="1" i="0">
+                <a:latin typeface="Arial"/>
+                <a:cs typeface="Arial"/>
+                <a:ea typeface="Arial"/>
+                <a:solidFill>
+                  <a:srgbClr val="21295C"/>
+                </a:solidFill>
+              </a:rPr>
+              <a:t> YOLO = 50 строк; рабочая система с YOLO = сотни строк.</a:t>
+            </a:r>
+          </a:p>
+        </p:txBody>
+      </p:sp>
+      <p:sp>
+        <p:nvSpPr>
+          <p:cNvPr id="44" name="TextBox 43"/>
+          <p:cNvSpPr txBox="1"/>
+          <p:nvPr/>
+        </p:nvSpPr>
+        <p:spPr>
+          <a:xfrm>
+            <a:off x="502920" y="6455664"/>
+            <a:ext cx="11201400" cy="292608"/>
+          </a:xfrm>
+          <a:prstGeom prst="rect">
+            <a:avLst/>
+          </a:prstGeom>
+          <a:noFill/>
+        </p:spPr>
+        <p:txBody>
+          <a:bodyPr wrap="square" lIns="0" rIns="0" tIns="0" bIns="0" anchor="t">
+            <a:spAutoFit/>
+          </a:bodyPr>
+          <a:lstStyle/>
+          <a:p>
+            <a:pPr algn="l">
+              <a:lnSpc>
+                <a:spcPct val="102000"/>
+              </a:lnSpc>
+            </a:pPr>
+            <a:r>
+              <a:rPr sz="850" b="1" i="1">
+                <a:solidFill>
+                  <a:srgbClr val="065A82"/>
+                </a:solidFill>
+                <a:latin typeface="Arial"/>
+              </a:rPr>
+              <a:t>[1] </a:t>
+            </a:r>
+            <a:r>
+              <a:rPr sz="850" i="1">
+                <a:solidFill>
+                  <a:srgbClr val="1C7293"/>
+                </a:solidFill>
+                <a:latin typeface="Arial"/>
+                <a:hlinkClick r:id="rId2"/>
+              </a:rPr>
+              <a:t>Kreuzberger et al. — MLOps (2023)</a:t>
+            </a:r>
+            <a:r>
+              <a:rPr sz="850" i="1">
+                <a:solidFill>
+                  <a:srgbClr val="1C7293"/>
+                </a:solidFill>
+                <a:latin typeface="Arial"/>
+              </a:rPr>
+              <a:t>   ·   </a:t>
+            </a:r>
+            <a:r>
+              <a:rPr sz="850" b="1" i="1">
+                <a:solidFill>
+                  <a:srgbClr val="065A82"/>
+                </a:solidFill>
+                <a:latin typeface="Arial"/>
+              </a:rPr>
+              <a:t>[2] </a:t>
+            </a:r>
+            <a:r>
+              <a:rPr sz="850" i="1">
+                <a:solidFill>
+                  <a:srgbClr val="1C7293"/>
+                </a:solidFill>
+                <a:latin typeface="Arial"/>
+                <a:hlinkClick r:id="rId3"/>
+              </a:rPr>
+              <a:t>Jumper et al. — AlphaFold, Nature (2021)</a:t>
+            </a:r>
+          </a:p>
+        </p:txBody>
+      </p:sp>
+      <p:sp>
+        <p:nvSpPr>
+          <p:cNvPr id="45" name="TextBox 44"/>
+          <p:cNvSpPr txBox="1"/>
+          <p:nvPr/>
+        </p:nvSpPr>
+        <p:spPr>
+          <a:xfrm>
+            <a:off x="11274552" y="6547104"/>
+            <a:ext cx="868680" cy="256032"/>
+          </a:xfrm>
+          <a:prstGeom prst="rect">
+            <a:avLst/>
+          </a:prstGeom>
+          <a:noFill/>
+        </p:spPr>
+        <p:txBody>
+          <a:bodyPr wrap="none" lIns="0" rIns="0" tIns="0" bIns="0">
+            <a:spAutoFit/>
+          </a:bodyPr>
+          <a:lstStyle/>
+          <a:p>
+            <a:pPr algn="r">
+              <a:lnSpc>
+                <a:spcPct val="100000"/>
+              </a:lnSpc>
+            </a:pPr>
+            <a:r>
+              <a:rPr sz="1000" i="1">
+                <a:solidFill>
+                  <a:srgbClr val="6B7685"/>
+                </a:solidFill>
+                <a:latin typeface="Arial"/>
+              </a:rPr>
+              <a:t>18 / 36</a:t>
             </a:r>
           </a:p>
         </p:txBody>
@@ -21648,7 +23233,18 @@
                 <a:latin typeface="Arial"/>
               </a:rPr>
               <a:t>Контроль через системный промпт.
-Промпт задаёт роль, ограничения, формат. Один и тот же чат настраивается под разные сценарии — это инженерный рычаг разработчика.</a:t>
+Промпт задаёт роль, ограничения, формат. Один и тот же чат настраивается под разные сценарии — это инженерный рычаг разработчика. </a:t>
+            </a:r>
+            <a:r>
+              <a:rPr sz="624" baseline="30000" b="0" i="1">
+                <a:latin typeface="Arial"/>
+                <a:cs typeface="Arial"/>
+                <a:ea typeface="Arial"/>
+                <a:solidFill>
+                  <a:srgbClr val="1C7293"/>
+                </a:solidFill>
+              </a:rPr>
+              <a:t>[1]</a:t>
             </a:r>
           </a:p>
         </p:txBody>
@@ -21749,7 +23345,7 @@
         </p:nvSpPr>
         <p:spPr>
           <a:xfrm>
-            <a:off x="502920" y="6446520"/>
+            <a:off x="502920" y="6053328"/>
             <a:ext cx="11201400" cy="320040"/>
           </a:xfrm>
           <a:prstGeom prst="rect">
@@ -21776,6 +23372,94 @@
                 <a:latin typeface="Arial"/>
               </a:rPr>
               <a:t>Чат — это конвейер «собрать → подать → дописать → показать».</a:t>
+            </a:r>
+          </a:p>
+        </p:txBody>
+      </p:sp>
+      <p:sp>
+        <p:nvSpPr>
+          <p:cNvPr id="36" name="TextBox 35"/>
+          <p:cNvSpPr txBox="1"/>
+          <p:nvPr/>
+        </p:nvSpPr>
+        <p:spPr>
+          <a:xfrm>
+            <a:off x="502920" y="6455664"/>
+            <a:ext cx="11201400" cy="292608"/>
+          </a:xfrm>
+          <a:prstGeom prst="rect">
+            <a:avLst/>
+          </a:prstGeom>
+          <a:noFill/>
+        </p:spPr>
+        <p:txBody>
+          <a:bodyPr wrap="square" lIns="0" rIns="0" tIns="0" bIns="0" anchor="t">
+            <a:spAutoFit/>
+          </a:bodyPr>
+          <a:lstStyle/>
+          <a:p>
+            <a:pPr algn="l">
+              <a:lnSpc>
+                <a:spcPct val="102000"/>
+              </a:lnSpc>
+            </a:pPr>
+            <a:r>
+              <a:rPr sz="850" b="1" i="1">
+                <a:solidFill>
+                  <a:srgbClr val="065A82"/>
+                </a:solidFill>
+                <a:latin typeface="Arial"/>
+              </a:rPr>
+              <a:t>[1] </a:t>
+            </a:r>
+            <a:r>
+              <a:rPr sz="850" i="1">
+                <a:solidFill>
+                  <a:srgbClr val="1C7293"/>
+                </a:solidFill>
+                <a:latin typeface="Arial"/>
+                <a:hlinkClick r:id="rId2"/>
+              </a:rPr>
+              <a:t>Anthropic — Building Effective Agents (2024)</a:t>
+            </a:r>
+          </a:p>
+        </p:txBody>
+      </p:sp>
+      <p:sp>
+        <p:nvSpPr>
+          <p:cNvPr id="37" name="TextBox 36"/>
+          <p:cNvSpPr txBox="1"/>
+          <p:nvPr/>
+        </p:nvSpPr>
+        <p:spPr>
+          <a:xfrm>
+            <a:off x="11274552" y="6547104"/>
+            <a:ext cx="868680" cy="256032"/>
+          </a:xfrm>
+          <a:prstGeom prst="rect">
+            <a:avLst/>
+          </a:prstGeom>
+          <a:noFill/>
+        </p:spPr>
+        <p:txBody>
+          <a:bodyPr wrap="none" lIns="0" rIns="0" tIns="0" bIns="0">
+            <a:spAutoFit/>
+          </a:bodyPr>
+          <a:lstStyle/>
+          <a:p>
+            <a:pPr algn="r">
+              <a:lnSpc>
+                <a:spcPct val="100000"/>
+              </a:lnSpc>
+            </a:pPr>
+            <a:r>
+              <a:rPr sz="1000" i="1">
+                <a:solidFill>
+                  <a:srgbClr val="6B7685"/>
+                </a:solidFill>
+                <a:latin typeface="Arial"/>
+              </a:rPr>
+              <a:t>19 / 36</a:t>
             </a:r>
           </a:p>
         </p:txBody>
@@ -21968,6 +23652,906 @@
           </a:p>
         </p:txBody>
       </p:sp>
+      <p:sp>
+        <p:nvSpPr>
+          <p:cNvPr id="6" name="TextBox 5"/>
+          <p:cNvSpPr txBox="1"/>
+          <p:nvPr/>
+        </p:nvSpPr>
+        <p:spPr>
+          <a:xfrm>
+            <a:off x="11274552" y="6547104"/>
+            <a:ext cx="868680" cy="256032"/>
+          </a:xfrm>
+          <a:prstGeom prst="rect">
+            <a:avLst/>
+          </a:prstGeom>
+          <a:noFill/>
+        </p:spPr>
+        <p:txBody>
+          <a:bodyPr wrap="none" lIns="0" rIns="0" tIns="0" bIns="0">
+            <a:spAutoFit/>
+          </a:bodyPr>
+          <a:lstStyle/>
+          <a:p>
+            <a:pPr algn="r">
+              <a:lnSpc>
+                <a:spcPct val="100000"/>
+              </a:lnSpc>
+            </a:pPr>
+            <a:r>
+              <a:rPr sz="1000" i="1">
+                <a:solidFill>
+                  <a:srgbClr val="6B7685"/>
+                </a:solidFill>
+                <a:latin typeface="Arial"/>
+              </a:rPr>
+              <a:t>2 / 36</a:t>
+            </a:r>
+          </a:p>
+        </p:txBody>
+      </p:sp>
+    </p:spTree>
+  </p:cSld>
+  <p:clrMapOvr>
+    <a:masterClrMapping/>
+  </p:clrMapOvr>
+</p:sld>
+</file>
+
+<file path=ppt/slides/slide20.xml><?xml version="1.0" encoding="utf-8"?>
+<p:sld xmlns:a="http://schemas.openxmlformats.org/drawingml/2006/main" xmlns:p="http://schemas.openxmlformats.org/presentationml/2006/main" xmlns:r="http://schemas.openxmlformats.org/officeDocument/2006/relationships">
+  <p:cSld>
+    <p:spTree>
+      <p:nvGrpSpPr>
+        <p:cNvPr id="1" name=""/>
+        <p:cNvGrpSpPr/>
+        <p:nvPr/>
+      </p:nvGrpSpPr>
+      <p:grpSpPr/>
+      <p:sp>
+        <p:nvSpPr>
+          <p:cNvPr id="2" name="Rounded Rectangle 1"/>
+          <p:cNvSpPr/>
+          <p:nvPr/>
+        </p:nvSpPr>
+        <p:spPr>
+          <a:xfrm>
+            <a:off x="502920" y="320040"/>
+            <a:ext cx="758952" cy="384048"/>
+          </a:xfrm>
+          <a:prstGeom prst="roundRect">
+            <a:avLst>
+              <a:gd name="adj" fmla="val 50000"/>
+            </a:avLst>
+          </a:prstGeom>
+          <a:solidFill>
+            <a:srgbClr val="21295C"/>
+          </a:solidFill>
+          <a:ln>
+            <a:noFill/>
+          </a:ln>
+          <a:effectLst/>
+        </p:spPr>
+        <p:style>
+          <a:lnRef idx="1">
+            <a:schemeClr val="accent1"/>
+          </a:lnRef>
+          <a:fillRef idx="3">
+            <a:schemeClr val="accent1"/>
+          </a:fillRef>
+          <a:effectRef idx="2">
+            <a:schemeClr val="accent1"/>
+          </a:effectRef>
+          <a:fontRef idx="minor">
+            <a:schemeClr val="lt1"/>
+          </a:fontRef>
+        </p:style>
+        <p:txBody>
+          <a:bodyPr rtlCol="0" anchor="ctr" lIns="45720" rIns="45720" tIns="36576" bIns="36576" wrap="none"/>
+          <a:lstStyle/>
+          <a:p>
+            <a:pPr algn="ctr"/>
+            <a:r>
+              <a:rPr sz="1300" b="1">
+                <a:solidFill>
+                  <a:srgbClr val="FFFFFF"/>
+                </a:solidFill>
+                <a:latin typeface="Arial"/>
+              </a:rPr>
+              <a:t>ЧАТ</a:t>
+            </a:r>
+          </a:p>
+        </p:txBody>
+      </p:sp>
+      <p:sp>
+        <p:nvSpPr>
+          <p:cNvPr id="3" name="TextBox 2"/>
+          <p:cNvSpPr txBox="1"/>
+          <p:nvPr/>
+        </p:nvSpPr>
+        <p:spPr>
+          <a:xfrm>
+            <a:off x="502920" y="777240"/>
+            <a:ext cx="11247120" cy="1051560"/>
+          </a:xfrm>
+          <a:prstGeom prst="rect">
+            <a:avLst/>
+          </a:prstGeom>
+          <a:noFill/>
+        </p:spPr>
+        <p:txBody>
+          <a:bodyPr wrap="square" lIns="0" rIns="0" tIns="0" bIns="0" anchor="t">
+            <a:spAutoFit/>
+          </a:bodyPr>
+          <a:lstStyle/>
+          <a:p>
+            <a:pPr algn="l">
+              <a:lnSpc>
+                <a:spcPct val="118000"/>
+              </a:lnSpc>
+            </a:pPr>
+            <a:r>
+              <a:rPr sz="2800" b="1" i="0">
+                <a:solidFill>
+                  <a:srgbClr val="21295C"/>
+                </a:solidFill>
+                <a:latin typeface="Arial"/>
+              </a:rPr>
+              <a:t>Чат = модель + интерфейс + память диалога.</a:t>
+            </a:r>
+          </a:p>
+        </p:txBody>
+      </p:sp>
+      <p:sp>
+        <p:nvSpPr>
+          <p:cNvPr id="4" name="Rounded Rectangle 3"/>
+          <p:cNvSpPr/>
+          <p:nvPr/>
+        </p:nvSpPr>
+        <p:spPr>
+          <a:xfrm>
+            <a:off x="502920" y="1965960"/>
+            <a:ext cx="5943600" cy="4114800"/>
+          </a:xfrm>
+          <a:prstGeom prst="roundRect">
+            <a:avLst>
+              <a:gd name="adj" fmla="val 7407"/>
+            </a:avLst>
+          </a:prstGeom>
+          <a:solidFill>
+            <a:srgbClr val="F4F7FA"/>
+          </a:solidFill>
+          <a:ln w="19050">
+            <a:solidFill>
+              <a:srgbClr val="1C7293"/>
+            </a:solidFill>
+          </a:ln>
+          <a:effectLst/>
+        </p:spPr>
+        <p:style>
+          <a:lnRef idx="1">
+            <a:schemeClr val="accent1"/>
+          </a:lnRef>
+          <a:fillRef idx="3">
+            <a:schemeClr val="accent1"/>
+          </a:fillRef>
+          <a:effectRef idx="2">
+            <a:schemeClr val="accent1"/>
+          </a:effectRef>
+          <a:fontRef idx="minor">
+            <a:schemeClr val="lt1"/>
+          </a:fontRef>
+        </p:style>
+        <p:txBody>
+          <a:bodyPr rtlCol="0" anchor="ctr"/>
+          <a:lstStyle/>
+          <a:p>
+            <a:pPr algn="ctr"/>
+          </a:p>
+        </p:txBody>
+      </p:sp>
+      <p:sp>
+        <p:nvSpPr>
+          <p:cNvPr id="5" name="TextBox 4"/>
+          <p:cNvSpPr txBox="1"/>
+          <p:nvPr/>
+        </p:nvSpPr>
+        <p:spPr>
+          <a:xfrm>
+            <a:off x="777240" y="2194560"/>
+            <a:ext cx="5394960" cy="365760"/>
+          </a:xfrm>
+          <a:prstGeom prst="rect">
+            <a:avLst/>
+          </a:prstGeom>
+          <a:noFill/>
+        </p:spPr>
+        <p:txBody>
+          <a:bodyPr wrap="square" lIns="0" rIns="0" tIns="0" bIns="0" anchor="t">
+            <a:spAutoFit/>
+          </a:bodyPr>
+          <a:lstStyle/>
+          <a:p>
+            <a:pPr algn="l">
+              <a:lnSpc>
+                <a:spcPct val="115000"/>
+              </a:lnSpc>
+            </a:pPr>
+            <a:r>
+              <a:rPr sz="1400" b="1" i="0">
+                <a:solidFill>
+                  <a:srgbClr val="028090"/>
+                </a:solidFill>
+                <a:latin typeface="Arial"/>
+              </a:rPr>
+              <a:t>Кейс — типовой для чата</a:t>
+            </a:r>
+          </a:p>
+        </p:txBody>
+      </p:sp>
+      <p:sp>
+        <p:nvSpPr>
+          <p:cNvPr id="6" name="TextBox 5"/>
+          <p:cNvSpPr txBox="1"/>
+          <p:nvPr/>
+        </p:nvSpPr>
+        <p:spPr>
+          <a:xfrm>
+            <a:off x="777240" y="2606039"/>
+            <a:ext cx="5394960" cy="868680"/>
+          </a:xfrm>
+          <a:prstGeom prst="rect">
+            <a:avLst/>
+          </a:prstGeom>
+          <a:noFill/>
+        </p:spPr>
+        <p:txBody>
+          <a:bodyPr wrap="square" lIns="0" rIns="0" tIns="0" bIns="0" anchor="t">
+            <a:spAutoFit/>
+          </a:bodyPr>
+          <a:lstStyle/>
+          <a:p>
+            <a:pPr algn="l">
+              <a:lnSpc>
+                <a:spcPct val="130000"/>
+              </a:lnSpc>
+            </a:pPr>
+            <a:r>
+              <a:rPr sz="1500" b="0" i="0">
+                <a:solidFill>
+                  <a:srgbClr val="21295C"/>
+                </a:solidFill>
+                <a:latin typeface="Arial"/>
+              </a:rPr>
+              <a:t>Инженер получил непонятное ТЗ от смежного отдела, нужно составить чек-лист своей работы.</a:t>
+            </a:r>
+          </a:p>
+        </p:txBody>
+      </p:sp>
+      <p:sp>
+        <p:nvSpPr>
+          <p:cNvPr id="7" name="Rounded Rectangle 6"/>
+          <p:cNvSpPr/>
+          <p:nvPr/>
+        </p:nvSpPr>
+        <p:spPr>
+          <a:xfrm>
+            <a:off x="868680" y="3657600"/>
+            <a:ext cx="5212080" cy="1828800"/>
+          </a:xfrm>
+          <a:prstGeom prst="roundRect">
+            <a:avLst>
+              <a:gd name="adj" fmla="val 8000"/>
+            </a:avLst>
+          </a:prstGeom>
+          <a:solidFill>
+            <a:srgbClr val="FFFFFF"/>
+          </a:solidFill>
+          <a:ln w="12700">
+            <a:solidFill>
+              <a:srgbClr val="E5EAF0"/>
+            </a:solidFill>
+          </a:ln>
+          <a:effectLst/>
+        </p:spPr>
+        <p:style>
+          <a:lnRef idx="1">
+            <a:schemeClr val="accent1"/>
+          </a:lnRef>
+          <a:fillRef idx="3">
+            <a:schemeClr val="accent1"/>
+          </a:fillRef>
+          <a:effectRef idx="2">
+            <a:schemeClr val="accent1"/>
+          </a:effectRef>
+          <a:fontRef idx="minor">
+            <a:schemeClr val="lt1"/>
+          </a:fontRef>
+        </p:style>
+        <p:txBody>
+          <a:bodyPr rtlCol="0" anchor="ctr"/>
+          <a:lstStyle/>
+          <a:p>
+            <a:pPr algn="ctr"/>
+          </a:p>
+        </p:txBody>
+      </p:sp>
+      <p:sp>
+        <p:nvSpPr>
+          <p:cNvPr id="8" name="TextBox 7"/>
+          <p:cNvSpPr txBox="1"/>
+          <p:nvPr/>
+        </p:nvSpPr>
+        <p:spPr>
+          <a:xfrm>
+            <a:off x="1051560" y="3794760"/>
+            <a:ext cx="4846320" cy="1554480"/>
+          </a:xfrm>
+          <a:prstGeom prst="rect">
+            <a:avLst/>
+          </a:prstGeom>
+          <a:noFill/>
+        </p:spPr>
+        <p:txBody>
+          <a:bodyPr wrap="square" lIns="0" rIns="0" tIns="0" bIns="0" anchor="t">
+            <a:spAutoFit/>
+          </a:bodyPr>
+          <a:lstStyle/>
+          <a:p>
+            <a:pPr algn="l">
+              <a:lnSpc>
+                <a:spcPct val="145000"/>
+              </a:lnSpc>
+            </a:pPr>
+            <a:r>
+              <a:rPr sz="1200" b="1" i="0">
+                <a:solidFill>
+                  <a:srgbClr val="065A82"/>
+                </a:solidFill>
+                <a:latin typeface="Arial"/>
+              </a:rPr>
+              <a:t>Вы:  </a:t>
+            </a:r>
+            <a:r>
+              <a:rPr sz="1200" b="0" i="0">
+                <a:solidFill>
+                  <a:srgbClr val="21295C"/>
+                </a:solidFill>
+                <a:latin typeface="Arial"/>
+              </a:rPr>
+              <a:t>Объясни пункт 4.2 ТЗ простыми словами.</a:t>
+            </a:r>
+          </a:p>
+          <a:p>
+            <a:pPr algn="l">
+              <a:lnSpc>
+                <a:spcPct val="145000"/>
+              </a:lnSpc>
+            </a:pPr>
+            <a:r>
+              <a:rPr sz="1200" b="1" i="0">
+                <a:solidFill>
+                  <a:srgbClr val="028090"/>
+                </a:solidFill>
+                <a:latin typeface="Arial"/>
+              </a:rPr>
+              <a:t>Чат:  </a:t>
+            </a:r>
+            <a:r>
+              <a:rPr sz="1200" b="0" i="0">
+                <a:solidFill>
+                  <a:srgbClr val="21295C"/>
+                </a:solidFill>
+                <a:latin typeface="Arial"/>
+              </a:rPr>
+              <a:t>Это требование к…</a:t>
+            </a:r>
+          </a:p>
+          <a:p>
+            <a:pPr algn="l">
+              <a:lnSpc>
+                <a:spcPct val="145000"/>
+              </a:lnSpc>
+            </a:pPr>
+            <a:r>
+              <a:rPr sz="1200" b="1" i="0">
+                <a:solidFill>
+                  <a:srgbClr val="065A82"/>
+                </a:solidFill>
+                <a:latin typeface="Arial"/>
+              </a:rPr>
+              <a:t>Вы:  </a:t>
+            </a:r>
+            <a:r>
+              <a:rPr sz="1200" b="0" i="0">
+                <a:solidFill>
+                  <a:srgbClr val="21295C"/>
+                </a:solidFill>
+                <a:latin typeface="Arial"/>
+              </a:rPr>
+              <a:t>Составь чек-лист на 5 пунктов.</a:t>
+            </a:r>
+          </a:p>
+          <a:p>
+            <a:pPr algn="l">
+              <a:lnSpc>
+                <a:spcPct val="145000"/>
+              </a:lnSpc>
+            </a:pPr>
+            <a:r>
+              <a:rPr sz="1200" b="1" i="0">
+                <a:solidFill>
+                  <a:srgbClr val="028090"/>
+                </a:solidFill>
+                <a:latin typeface="Arial"/>
+              </a:rPr>
+              <a:t>Чат:  </a:t>
+            </a:r>
+            <a:r>
+              <a:rPr sz="1200" b="0" i="0">
+                <a:solidFill>
+                  <a:srgbClr val="21295C"/>
+                </a:solidFill>
+                <a:latin typeface="Arial"/>
+              </a:rPr>
+              <a:t>1. Проверить…  2. Согласовать…  3. …</a:t>
+            </a:r>
+          </a:p>
+        </p:txBody>
+      </p:sp>
+      <p:sp>
+        <p:nvSpPr>
+          <p:cNvPr id="9" name="TextBox 8"/>
+          <p:cNvSpPr txBox="1"/>
+          <p:nvPr/>
+        </p:nvSpPr>
+        <p:spPr>
+          <a:xfrm>
+            <a:off x="777240" y="5623560"/>
+            <a:ext cx="5394960" cy="320040"/>
+          </a:xfrm>
+          <a:prstGeom prst="rect">
+            <a:avLst/>
+          </a:prstGeom>
+          <a:noFill/>
+        </p:spPr>
+        <p:txBody>
+          <a:bodyPr wrap="square" lIns="0" rIns="0" tIns="0" bIns="0" anchor="t">
+            <a:spAutoFit/>
+          </a:bodyPr>
+          <a:lstStyle/>
+          <a:p>
+            <a:pPr algn="l">
+              <a:lnSpc>
+                <a:spcPct val="130000"/>
+              </a:lnSpc>
+            </a:pPr>
+            <a:r>
+              <a:rPr sz="1100" b="0" i="1">
+                <a:solidFill>
+                  <a:srgbClr val="1C7293"/>
+                </a:solidFill>
+                <a:latin typeface="Arial"/>
+              </a:rPr>
+              <a:t>Разовая задача с уточнениями — оптимально для чата. Не модель, не агент, не приложение.</a:t>
+            </a:r>
+          </a:p>
+        </p:txBody>
+      </p:sp>
+      <p:sp>
+        <p:nvSpPr>
+          <p:cNvPr id="10" name="Rounded Rectangle 9"/>
+          <p:cNvSpPr/>
+          <p:nvPr/>
+        </p:nvSpPr>
+        <p:spPr>
+          <a:xfrm>
+            <a:off x="6766559" y="1965960"/>
+            <a:ext cx="4937760" cy="4114800"/>
+          </a:xfrm>
+          <a:prstGeom prst="roundRect">
+            <a:avLst>
+              <a:gd name="adj" fmla="val 7407"/>
+            </a:avLst>
+          </a:prstGeom>
+          <a:solidFill>
+            <a:srgbClr val="FEF5E0"/>
+          </a:solidFill>
+          <a:ln w="19050">
+            <a:solidFill>
+              <a:srgbClr val="F0AB00"/>
+            </a:solidFill>
+          </a:ln>
+          <a:effectLst/>
+        </p:spPr>
+        <p:style>
+          <a:lnRef idx="1">
+            <a:schemeClr val="accent1"/>
+          </a:lnRef>
+          <a:fillRef idx="3">
+            <a:schemeClr val="accent1"/>
+          </a:fillRef>
+          <a:effectRef idx="2">
+            <a:schemeClr val="accent1"/>
+          </a:effectRef>
+          <a:fontRef idx="minor">
+            <a:schemeClr val="lt1"/>
+          </a:fontRef>
+        </p:style>
+        <p:txBody>
+          <a:bodyPr rtlCol="0" anchor="ctr"/>
+          <a:lstStyle/>
+          <a:p>
+            <a:pPr algn="ctr"/>
+          </a:p>
+        </p:txBody>
+      </p:sp>
+      <p:sp>
+        <p:nvSpPr>
+          <p:cNvPr id="11" name="TextBox 10"/>
+          <p:cNvSpPr txBox="1"/>
+          <p:nvPr/>
+        </p:nvSpPr>
+        <p:spPr>
+          <a:xfrm>
+            <a:off x="7040879" y="2194560"/>
+            <a:ext cx="4389120" cy="365760"/>
+          </a:xfrm>
+          <a:prstGeom prst="rect">
+            <a:avLst/>
+          </a:prstGeom>
+          <a:noFill/>
+        </p:spPr>
+        <p:txBody>
+          <a:bodyPr wrap="square" lIns="0" rIns="0" tIns="0" bIns="0" anchor="t">
+            <a:spAutoFit/>
+          </a:bodyPr>
+          <a:lstStyle/>
+          <a:p>
+            <a:pPr algn="l">
+              <a:lnSpc>
+                <a:spcPct val="115000"/>
+              </a:lnSpc>
+            </a:pPr>
+            <a:r>
+              <a:rPr sz="1400" b="1" i="0">
+                <a:solidFill>
+                  <a:srgbClr val="21295C"/>
+                </a:solidFill>
+                <a:latin typeface="Arial"/>
+              </a:rPr>
+              <a:t>Оговорка для промышленных систем</a:t>
+            </a:r>
+          </a:p>
+        </p:txBody>
+      </p:sp>
+      <p:sp>
+        <p:nvSpPr>
+          <p:cNvPr id="12" name="TextBox 11"/>
+          <p:cNvSpPr txBox="1"/>
+          <p:nvPr/>
+        </p:nvSpPr>
+        <p:spPr>
+          <a:xfrm>
+            <a:off x="7040879" y="2743200"/>
+            <a:ext cx="4389120" cy="1280160"/>
+          </a:xfrm>
+          <a:prstGeom prst="rect">
+            <a:avLst/>
+          </a:prstGeom>
+          <a:noFill/>
+        </p:spPr>
+        <p:txBody>
+          <a:bodyPr wrap="square" lIns="0" rIns="0" tIns="0" bIns="0" anchor="t">
+            <a:spAutoFit/>
+          </a:bodyPr>
+          <a:lstStyle/>
+          <a:p>
+            <a:pPr algn="l">
+              <a:lnSpc>
+                <a:spcPct val="125000"/>
+              </a:lnSpc>
+            </a:pPr>
+            <a:r>
+              <a:rPr sz="1600" b="1" i="0">
+                <a:solidFill>
+                  <a:srgbClr val="21295C"/>
+                </a:solidFill>
+                <a:latin typeface="Arial"/>
+              </a:rPr>
+              <a:t>Чистые чаты почти не используются в промышленной эксплуатации.</a:t>
+            </a:r>
+          </a:p>
+        </p:txBody>
+      </p:sp>
+      <p:sp>
+        <p:nvSpPr>
+          <p:cNvPr id="13" name="TextBox 12"/>
+          <p:cNvSpPr txBox="1"/>
+          <p:nvPr/>
+        </p:nvSpPr>
+        <p:spPr>
+          <a:xfrm>
+            <a:off x="7040879" y="4114800"/>
+            <a:ext cx="4389120" cy="1828800"/>
+          </a:xfrm>
+          <a:prstGeom prst="rect">
+            <a:avLst/>
+          </a:prstGeom>
+          <a:noFill/>
+        </p:spPr>
+        <p:txBody>
+          <a:bodyPr wrap="square" lIns="0" rIns="0" tIns="0" bIns="0" anchor="t">
+            <a:spAutoFit/>
+          </a:bodyPr>
+          <a:lstStyle/>
+          <a:p>
+            <a:pPr algn="l">
+              <a:lnSpc>
+                <a:spcPct val="140000"/>
+              </a:lnSpc>
+            </a:pPr>
+            <a:r>
+              <a:rPr sz="1200" b="0" i="0">
+                <a:solidFill>
+                  <a:srgbClr val="21295C"/>
+                </a:solidFill>
+                <a:latin typeface="Arial"/>
+              </a:rPr>
+              <a:t>Почти везде они расширены до агентов </a:t>
+            </a:r>
+            <a:r>
+              <a:rPr sz="624" baseline="30000" b="0" i="1">
+                <a:latin typeface="Arial"/>
+                <a:cs typeface="Arial"/>
+                <a:ea typeface="Arial"/>
+                <a:solidFill>
+                  <a:srgbClr val="1C7293"/>
+                </a:solidFill>
+              </a:rPr>
+              <a:t>[1]</a:t>
+            </a:r>
+            <a:r>
+              <a:rPr sz="1200" b="0" i="0">
+                <a:latin typeface="Arial"/>
+                <a:cs typeface="Arial"/>
+                <a:ea typeface="Arial"/>
+                <a:solidFill>
+                  <a:srgbClr val="21295C"/>
+                </a:solidFill>
+              </a:rPr>
+              <a:t> </a:t>
+            </a:r>
+            <a:r>
+              <a:rPr sz="624" baseline="30000" b="0" i="1">
+                <a:latin typeface="Arial"/>
+                <a:cs typeface="Arial"/>
+                <a:ea typeface="Arial"/>
+                <a:solidFill>
+                  <a:srgbClr val="1C7293"/>
+                </a:solidFill>
+              </a:rPr>
+              <a:t>[2]</a:t>
+            </a:r>
+            <a:r>
+              <a:rPr sz="1200" b="0" i="0">
+                <a:latin typeface="Arial"/>
+                <a:cs typeface="Arial"/>
+                <a:ea typeface="Arial"/>
+                <a:solidFill>
+                  <a:srgbClr val="21295C"/>
+                </a:solidFill>
+              </a:rPr>
+              <a:t> — хотя бы для долгосрочной памяти и поиска по корпоративной базе (RAG).
+Архитектуру агента разберём на следующем слайде.</a:t>
+            </a:r>
+          </a:p>
+        </p:txBody>
+      </p:sp>
+      <p:sp>
+        <p:nvSpPr>
+          <p:cNvPr id="14" name="Rounded Rectangle 13"/>
+          <p:cNvSpPr/>
+          <p:nvPr/>
+        </p:nvSpPr>
+        <p:spPr>
+          <a:xfrm>
+            <a:off x="502920" y="5916168"/>
+            <a:ext cx="11201400" cy="457200"/>
+          </a:xfrm>
+          <a:prstGeom prst="roundRect">
+            <a:avLst>
+              <a:gd name="adj" fmla="val 12000"/>
+            </a:avLst>
+          </a:prstGeom>
+          <a:solidFill>
+            <a:srgbClr val="FEF5E0"/>
+          </a:solidFill>
+          <a:ln w="15240">
+            <a:solidFill>
+              <a:srgbClr val="F0AB00"/>
+            </a:solidFill>
+          </a:ln>
+          <a:effectLst/>
+        </p:spPr>
+        <p:style>
+          <a:lnRef idx="1">
+            <a:schemeClr val="accent1"/>
+          </a:lnRef>
+          <a:fillRef idx="3">
+            <a:schemeClr val="accent1"/>
+          </a:fillRef>
+          <a:effectRef idx="2">
+            <a:schemeClr val="accent1"/>
+          </a:effectRef>
+          <a:fontRef idx="minor">
+            <a:schemeClr val="lt1"/>
+          </a:fontRef>
+        </p:style>
+        <p:txBody>
+          <a:bodyPr rtlCol="0" anchor="ctr"/>
+          <a:lstStyle/>
+          <a:p>
+            <a:pPr algn="ctr"/>
+          </a:p>
+        </p:txBody>
+      </p:sp>
+      <p:sp>
+        <p:nvSpPr>
+          <p:cNvPr id="15" name="TextBox 14"/>
+          <p:cNvSpPr txBox="1"/>
+          <p:nvPr/>
+        </p:nvSpPr>
+        <p:spPr>
+          <a:xfrm>
+            <a:off x="685800" y="5989320"/>
+            <a:ext cx="10835640" cy="310896"/>
+          </a:xfrm>
+          <a:prstGeom prst="rect">
+            <a:avLst/>
+          </a:prstGeom>
+          <a:noFill/>
+        </p:spPr>
+        <p:txBody>
+          <a:bodyPr wrap="square" lIns="0" rIns="0" tIns="0" bIns="0" anchor="ctr">
+            <a:spAutoFit/>
+          </a:bodyPr>
+          <a:lstStyle/>
+          <a:p>
+            <a:pPr algn="l">
+              <a:lnSpc>
+                <a:spcPct val="125000"/>
+              </a:lnSpc>
+            </a:pPr>
+            <a:r>
+              <a:rPr sz="1300" b="1" i="0">
+                <a:solidFill>
+                  <a:srgbClr val="21295C"/>
+                </a:solidFill>
+                <a:latin typeface="Arial"/>
+              </a:rPr>
+              <a:t>Выбор чата — точка на шкале взаимодействия, не единственно верный вариант.</a:t>
+            </a:r>
+          </a:p>
+        </p:txBody>
+      </p:sp>
+      <p:sp>
+        <p:nvSpPr>
+          <p:cNvPr id="16" name="TextBox 15"/>
+          <p:cNvSpPr txBox="1"/>
+          <p:nvPr/>
+        </p:nvSpPr>
+        <p:spPr>
+          <a:xfrm>
+            <a:off x="502920" y="6455664"/>
+            <a:ext cx="11201400" cy="292608"/>
+          </a:xfrm>
+          <a:prstGeom prst="rect">
+            <a:avLst/>
+          </a:prstGeom>
+          <a:noFill/>
+        </p:spPr>
+        <p:txBody>
+          <a:bodyPr wrap="square" lIns="0" rIns="0" tIns="0" bIns="0" anchor="t">
+            <a:spAutoFit/>
+          </a:bodyPr>
+          <a:lstStyle/>
+          <a:p>
+            <a:pPr algn="l">
+              <a:lnSpc>
+                <a:spcPct val="102000"/>
+              </a:lnSpc>
+            </a:pPr>
+            <a:r>
+              <a:rPr sz="850" b="1" i="1">
+                <a:solidFill>
+                  <a:srgbClr val="065A82"/>
+                </a:solidFill>
+                <a:latin typeface="Arial"/>
+              </a:rPr>
+              <a:t>[1] </a:t>
+            </a:r>
+            <a:r>
+              <a:rPr sz="850" i="1">
+                <a:solidFill>
+                  <a:srgbClr val="1C7293"/>
+                </a:solidFill>
+                <a:latin typeface="Arial"/>
+                <a:hlinkClick r:id="rId2"/>
+              </a:rPr>
+              <a:t>ВЦИОМ — «Нейросети в жизни россиян» (окт 2025)</a:t>
+            </a:r>
+            <a:r>
+              <a:rPr sz="850" i="1">
+                <a:solidFill>
+                  <a:srgbClr val="1C7293"/>
+                </a:solidFill>
+                <a:latin typeface="Arial"/>
+              </a:rPr>
+              <a:t>   ·   </a:t>
+            </a:r>
+            <a:r>
+              <a:rPr sz="850" b="1" i="1">
+                <a:solidFill>
+                  <a:srgbClr val="065A82"/>
+                </a:solidFill>
+                <a:latin typeface="Arial"/>
+              </a:rPr>
+              <a:t>[2] </a:t>
+            </a:r>
+            <a:r>
+              <a:rPr sz="850" i="1">
+                <a:solidFill>
+                  <a:srgbClr val="1C7293"/>
+                </a:solidFill>
+                <a:latin typeface="Arial"/>
+                <a:hlinkClick r:id="rId3"/>
+              </a:rPr>
+              <a:t>Dam et al. — Survey on LLM-based AI Chatbots (2024)</a:t>
+            </a:r>
+          </a:p>
+        </p:txBody>
+      </p:sp>
+      <p:sp>
+        <p:nvSpPr>
+          <p:cNvPr id="17" name="TextBox 16"/>
+          <p:cNvSpPr txBox="1"/>
+          <p:nvPr/>
+        </p:nvSpPr>
+        <p:spPr>
+          <a:xfrm>
+            <a:off x="11274552" y="6547104"/>
+            <a:ext cx="868680" cy="256032"/>
+          </a:xfrm>
+          <a:prstGeom prst="rect">
+            <a:avLst/>
+          </a:prstGeom>
+          <a:noFill/>
+        </p:spPr>
+        <p:txBody>
+          <a:bodyPr wrap="none" lIns="0" rIns="0" tIns="0" bIns="0">
+            <a:spAutoFit/>
+          </a:bodyPr>
+          <a:lstStyle/>
+          <a:p>
+            <a:pPr algn="r">
+              <a:lnSpc>
+                <a:spcPct val="100000"/>
+              </a:lnSpc>
+            </a:pPr>
+            <a:r>
+              <a:rPr sz="1000" i="1">
+                <a:solidFill>
+                  <a:srgbClr val="6B7685"/>
+                </a:solidFill>
+                <a:latin typeface="Arial"/>
+              </a:rPr>
+              <a:t>20 / 36</a:t>
+            </a:r>
+          </a:p>
+        </p:txBody>
+      </p:sp>
     </p:spTree>
   </p:cSld>
   <p:clrMapOvr>
@@ -22075,7 +24659,62 @@
                 </a:solidFill>
                 <a:latin typeface="Arial"/>
               </a:rPr>
-              <a:t>Агент = чат + оркестратор + внешняя память + инструменты.</a:t>
+              <a:t>Агент = чат + оркестратор + внешняя память + инструменты. </a:t>
+            </a:r>
+            <a:r>
+              <a:rPr sz="1352" baseline="30000" b="0" i="1">
+                <a:latin typeface="Arial"/>
+                <a:cs typeface="Arial"/>
+                <a:ea typeface="Arial"/>
+                <a:solidFill>
+                  <a:srgbClr val="1C7293"/>
+                </a:solidFill>
+              </a:rPr>
+              <a:t>[1]</a:t>
+            </a:r>
+            <a:r>
+              <a:rPr sz="2600" b="1" i="0">
+                <a:latin typeface="Arial"/>
+                <a:cs typeface="Arial"/>
+                <a:ea typeface="Arial"/>
+                <a:solidFill>
+                  <a:srgbClr val="21295C"/>
+                </a:solidFill>
+              </a:rPr>
+              <a:t> </a:t>
+            </a:r>
+            <a:r>
+              <a:rPr sz="1352" baseline="30000" b="0" i="1">
+                <a:latin typeface="Arial"/>
+                <a:cs typeface="Arial"/>
+                <a:ea typeface="Arial"/>
+                <a:solidFill>
+                  <a:srgbClr val="1C7293"/>
+                </a:solidFill>
+              </a:rPr>
+              <a:t>[2]</a:t>
+            </a:r>
+            <a:r>
+              <a:rPr sz="2600" b="1" i="0">
+                <a:latin typeface="Arial"/>
+                <a:cs typeface="Arial"/>
+                <a:ea typeface="Arial"/>
+                <a:solidFill>
+                  <a:srgbClr val="21295C"/>
+                </a:solidFill>
+              </a:rPr>
+              <a:t> </a:t>
+            </a:r>
+            <a:r>
+              <a:rPr sz="1352" baseline="30000" b="0" i="1">
+                <a:latin typeface="Arial"/>
+                <a:cs typeface="Arial"/>
+                <a:ea typeface="Arial"/>
+                <a:solidFill>
+                  <a:srgbClr val="1C7293"/>
+                </a:solidFill>
+              </a:rPr>
+              <a:t>[3]</a:t>
             </a:r>
           </a:p>
         </p:txBody>
@@ -23654,7 +26293,7 @@
         </p:nvSpPr>
         <p:spPr>
           <a:xfrm>
-            <a:off x="502920" y="6446520"/>
+            <a:off x="502920" y="6053328"/>
             <a:ext cx="11201400" cy="320040"/>
           </a:xfrm>
           <a:prstGeom prst="rect">
@@ -23681,6 +26320,150 @@
                 <a:latin typeface="Arial"/>
               </a:rPr>
               <a:t>ReAct (Reasoning + Acting) — Yao et al. 2022 (arXiv:2210.03629)</a:t>
+            </a:r>
+          </a:p>
+        </p:txBody>
+      </p:sp>
+      <p:sp>
+        <p:nvSpPr>
+          <p:cNvPr id="42" name="TextBox 41"/>
+          <p:cNvSpPr txBox="1"/>
+          <p:nvPr/>
+        </p:nvSpPr>
+        <p:spPr>
+          <a:xfrm>
+            <a:off x="502920" y="6455664"/>
+            <a:ext cx="11201400" cy="292608"/>
+          </a:xfrm>
+          <a:prstGeom prst="rect">
+            <a:avLst/>
+          </a:prstGeom>
+          <a:noFill/>
+        </p:spPr>
+        <p:txBody>
+          <a:bodyPr wrap="square" lIns="0" rIns="0" tIns="0" bIns="0" anchor="t">
+            <a:spAutoFit/>
+          </a:bodyPr>
+          <a:lstStyle/>
+          <a:p>
+            <a:pPr algn="l">
+              <a:lnSpc>
+                <a:spcPct val="102000"/>
+              </a:lnSpc>
+            </a:pPr>
+            <a:r>
+              <a:rPr sz="850" b="1" i="1">
+                <a:solidFill>
+                  <a:srgbClr val="065A82"/>
+                </a:solidFill>
+                <a:latin typeface="Arial"/>
+              </a:rPr>
+              <a:t>[1] </a:t>
+            </a:r>
+            <a:r>
+              <a:rPr sz="850" i="1">
+                <a:solidFill>
+                  <a:srgbClr val="1C7293"/>
+                </a:solidFill>
+                <a:latin typeface="Arial"/>
+                <a:hlinkClick r:id="rId2"/>
+              </a:rPr>
+              <a:t>Weng — LLM Powered Autonomous Agents (2023)</a:t>
+            </a:r>
+            <a:r>
+              <a:rPr sz="850" i="1">
+                <a:solidFill>
+                  <a:srgbClr val="1C7293"/>
+                </a:solidFill>
+                <a:latin typeface="Arial"/>
+              </a:rPr>
+              <a:t>   ·   </a:t>
+            </a:r>
+            <a:r>
+              <a:rPr sz="850" b="1" i="1">
+                <a:solidFill>
+                  <a:srgbClr val="065A82"/>
+                </a:solidFill>
+                <a:latin typeface="Arial"/>
+              </a:rPr>
+              <a:t>[2] </a:t>
+            </a:r>
+            <a:r>
+              <a:rPr sz="850" i="1">
+                <a:solidFill>
+                  <a:srgbClr val="1C7293"/>
+                </a:solidFill>
+                <a:latin typeface="Arial"/>
+                <a:hlinkClick r:id="rId3"/>
+              </a:rPr>
+              <a:t>Anthropic — Building Effective Agents (2024)</a:t>
+            </a:r>
+            <a:r>
+              <a:rPr sz="850" i="1">
+                <a:solidFill>
+                  <a:srgbClr val="1C7293"/>
+                </a:solidFill>
+                <a:latin typeface="Arial"/>
+              </a:rPr>
+              <a:t>   ·   </a:t>
+            </a:r>
+            <a:r>
+              <a:rPr sz="850" b="1" i="1">
+                <a:solidFill>
+                  <a:srgbClr val="065A82"/>
+                </a:solidFill>
+                <a:latin typeface="Arial"/>
+              </a:rPr>
+              <a:t>[3] </a:t>
+            </a:r>
+            <a:r>
+              <a:rPr sz="850" i="1">
+                <a:solidFill>
+                  <a:srgbClr val="1C7293"/>
+                </a:solidFill>
+                <a:latin typeface="Arial"/>
+                <a:hlinkClick r:id="rId4"/>
+              </a:rPr>
+              <a:t>Anthropic — Model Context Protocol (2024)</a:t>
+            </a:r>
+          </a:p>
+        </p:txBody>
+      </p:sp>
+      <p:sp>
+        <p:nvSpPr>
+          <p:cNvPr id="43" name="TextBox 42"/>
+          <p:cNvSpPr txBox="1"/>
+          <p:nvPr/>
+        </p:nvSpPr>
+        <p:spPr>
+          <a:xfrm>
+            <a:off x="11274552" y="6547104"/>
+            <a:ext cx="868680" cy="256032"/>
+          </a:xfrm>
+          <a:prstGeom prst="rect">
+            <a:avLst/>
+          </a:prstGeom>
+          <a:noFill/>
+        </p:spPr>
+        <p:txBody>
+          <a:bodyPr wrap="none" lIns="0" rIns="0" tIns="0" bIns="0">
+            <a:spAutoFit/>
+          </a:bodyPr>
+          <a:lstStyle/>
+          <a:p>
+            <a:pPr algn="r">
+              <a:lnSpc>
+                <a:spcPct val="100000"/>
+              </a:lnSpc>
+            </a:pPr>
+            <a:r>
+              <a:rPr sz="1000" i="1">
+                <a:solidFill>
+                  <a:srgbClr val="6B7685"/>
+                </a:solidFill>
+                <a:latin typeface="Arial"/>
+              </a:rPr>
+              <a:t>21 / 36</a:t>
             </a:r>
           </a:p>
         </p:txBody>
@@ -25524,7 +28307,7 @@
         </p:nvSpPr>
         <p:spPr>
           <a:xfrm>
-            <a:off x="502920" y="6217920"/>
+            <a:off x="502920" y="5870448"/>
             <a:ext cx="11201400" cy="502920"/>
           </a:xfrm>
           <a:prstGeom prst="roundRect">
@@ -25572,7 +28355,7 @@
         </p:nvSpPr>
         <p:spPr>
           <a:xfrm>
-            <a:off x="685800" y="6291072"/>
+            <a:off x="685800" y="5943600"/>
             <a:ext cx="10835640" cy="356616"/>
           </a:xfrm>
           <a:prstGeom prst="rect">
@@ -25598,55 +28381,68 @@
                 </a:solidFill>
                 <a:latin typeface="Arial"/>
               </a:rPr>
-              <a:t>Агент = последовательность вызовов инструментов, оркестрируемая LLM.</a:t>
-            </a:r>
-          </a:p>
-        </p:txBody>
-      </p:sp>
-      <p:sp>
-        <p:nvSpPr>
-          <p:cNvPr id="47" name="Rounded Rectangle 46"/>
-          <p:cNvSpPr/>
-          <p:nvPr/>
-        </p:nvSpPr>
-        <p:spPr>
-          <a:xfrm>
-            <a:off x="4599432" y="2788920"/>
-            <a:ext cx="7004304" cy="2606040"/>
-          </a:xfrm>
-          <a:prstGeom prst="roundRect">
-            <a:avLst>
-              <a:gd name="adj" fmla="val 5000"/>
-            </a:avLst>
-          </a:prstGeom>
-          <a:noFill/>
-          <a:ln w="20320">
-            <a:solidFill>
-              <a:srgbClr val="028090"/>
-            </a:solidFill>
-            <a:prstDash val="dash"/>
-          </a:ln>
-          <a:effectLst/>
-        </p:spPr>
-        <p:style>
-          <a:lnRef idx="1">
-            <a:schemeClr val="accent1"/>
-          </a:lnRef>
-          <a:fillRef idx="3">
-            <a:schemeClr val="accent1"/>
-          </a:fillRef>
-          <a:effectRef idx="2">
-            <a:schemeClr val="accent1"/>
-          </a:effectRef>
-          <a:fontRef idx="minor">
-            <a:schemeClr val="lt1"/>
-          </a:fontRef>
-        </p:style>
-        <p:txBody>
-          <a:bodyPr rtlCol="0" anchor="ctr"/>
-          <a:lstStyle/>
-          <a:p>
-            <a:pPr algn="ctr"/>
+              <a:t>Агент = последовательность вызовов инструментов, оркестрируемая LLM. </a:t>
+            </a:r>
+            <a:r>
+              <a:rPr sz="676" baseline="30000" b="0" i="1">
+                <a:latin typeface="Arial"/>
+                <a:cs typeface="Arial"/>
+                <a:ea typeface="Arial"/>
+                <a:solidFill>
+                  <a:srgbClr val="1C7293"/>
+                </a:solidFill>
+              </a:rPr>
+              <a:t>[1]</a:t>
+            </a:r>
+          </a:p>
+        </p:txBody>
+      </p:sp>
+      <p:sp>
+        <p:nvSpPr>
+          <p:cNvPr id="47" name="TextBox 46"/>
+          <p:cNvSpPr txBox="1"/>
+          <p:nvPr/>
+        </p:nvSpPr>
+        <p:spPr>
+          <a:xfrm>
+            <a:off x="502920" y="6455664"/>
+            <a:ext cx="11201400" cy="292608"/>
+          </a:xfrm>
+          <a:prstGeom prst="rect">
+            <a:avLst/>
+          </a:prstGeom>
+          <a:noFill/>
+        </p:spPr>
+        <p:txBody>
+          <a:bodyPr wrap="square" lIns="0" rIns="0" tIns="0" bIns="0" anchor="t">
+            <a:spAutoFit/>
+          </a:bodyPr>
+          <a:lstStyle/>
+          <a:p>
+            <a:pPr algn="l">
+              <a:lnSpc>
+                <a:spcPct val="102000"/>
+              </a:lnSpc>
+            </a:pPr>
+            <a:r>
+              <a:rPr sz="850" b="1" i="1">
+                <a:solidFill>
+                  <a:srgbClr val="065A82"/>
+                </a:solidFill>
+                <a:latin typeface="Arial"/>
+              </a:rPr>
+              <a:t>[1] </a:t>
+            </a:r>
+            <a:r>
+              <a:rPr sz="850" i="1">
+                <a:solidFill>
+                  <a:srgbClr val="1C7293"/>
+                </a:solidFill>
+                <a:latin typeface="Arial"/>
+                <a:hlinkClick r:id="rId2"/>
+              </a:rPr>
+              <a:t>Yao et al. — ReAct (2022)</a:t>
+            </a:r>
           </a:p>
         </p:txBody>
       </p:sp>
@@ -25657,216 +28453,34 @@
           <p:nvPr/>
         </p:nvSpPr>
         <p:spPr>
-          <a:xfrm rot="16200000">
-            <a:off x="10744200" y="3611880"/>
-            <a:ext cx="2377440" cy="365760"/>
-          </a:xfrm>
-          <a:prstGeom prst="rect">
-            <a:avLst/>
-          </a:prstGeom>
-          <a:noFill/>
-        </p:spPr>
-        <p:txBody>
-          <a:bodyPr wrap="none">
-            <a:spAutoFit/>
-          </a:bodyPr>
-          <a:lstStyle/>
-          <a:p>
-            <a:pPr algn="ctr"/>
-            <a:r>
-              <a:rPr sz="1100" b="1">
-                <a:solidFill>
-                  <a:srgbClr val="028090"/>
-                </a:solidFill>
-              </a:rPr>
-              <a:t>цикл: обработка одного файла</a:t>
-            </a:r>
-          </a:p>
-        </p:txBody>
-      </p:sp>
-      <p:sp>
-        <p:nvSpPr>
-          <p:cNvPr id="49" name="Rectangle 48"/>
-          <p:cNvSpPr/>
-          <p:nvPr/>
-        </p:nvSpPr>
-        <p:spPr>
-          <a:xfrm>
-            <a:off x="4539996" y="3017520"/>
-            <a:ext cx="50292" cy="2743200"/>
-          </a:xfrm>
-          <a:prstGeom prst="rect">
-            <a:avLst/>
-          </a:prstGeom>
-          <a:solidFill>
-            <a:srgbClr val="028090"/>
-          </a:solidFill>
-          <a:ln>
-            <a:noFill/>
-          </a:ln>
-          <a:effectLst/>
-        </p:spPr>
-        <p:style>
-          <a:lnRef idx="1">
-            <a:schemeClr val="accent1"/>
-          </a:lnRef>
-          <a:fillRef idx="3">
-            <a:schemeClr val="accent1"/>
-          </a:fillRef>
-          <a:effectRef idx="2">
-            <a:schemeClr val="accent1"/>
-          </a:effectRef>
-          <a:fontRef idx="minor">
-            <a:schemeClr val="lt1"/>
-          </a:fontRef>
-        </p:style>
-        <p:txBody>
-          <a:bodyPr rtlCol="0" anchor="ctr"/>
-          <a:lstStyle/>
-          <a:p>
-            <a:pPr algn="ctr"/>
-          </a:p>
-        </p:txBody>
-      </p:sp>
-      <p:sp>
-        <p:nvSpPr>
-          <p:cNvPr id="50" name="Rectangle 49"/>
-          <p:cNvSpPr/>
-          <p:nvPr/>
-        </p:nvSpPr>
-        <p:spPr>
-          <a:xfrm>
-            <a:off x="4539996" y="5715000"/>
-            <a:ext cx="274320" cy="50292"/>
-          </a:xfrm>
-          <a:prstGeom prst="rect">
-            <a:avLst/>
-          </a:prstGeom>
-          <a:solidFill>
-            <a:srgbClr val="028090"/>
-          </a:solidFill>
-          <a:ln>
-            <a:noFill/>
-          </a:ln>
-          <a:effectLst/>
-        </p:spPr>
-        <p:style>
-          <a:lnRef idx="1">
-            <a:schemeClr val="accent1"/>
-          </a:lnRef>
-          <a:fillRef idx="3">
-            <a:schemeClr val="accent1"/>
-          </a:fillRef>
-          <a:effectRef idx="2">
-            <a:schemeClr val="accent1"/>
-          </a:effectRef>
-          <a:fontRef idx="minor">
-            <a:schemeClr val="lt1"/>
-          </a:fontRef>
-        </p:style>
-        <p:txBody>
-          <a:bodyPr rtlCol="0" anchor="ctr"/>
-          <a:lstStyle/>
-          <a:p>
-            <a:pPr algn="ctr"/>
-          </a:p>
-        </p:txBody>
-      </p:sp>
-      <p:sp>
-        <p:nvSpPr>
-          <p:cNvPr id="51" name="Isosceles Triangle 50"/>
-          <p:cNvSpPr/>
-          <p:nvPr/>
-        </p:nvSpPr>
-        <p:spPr>
-          <a:xfrm>
-            <a:off x="4485132" y="2834640"/>
-            <a:ext cx="164592" cy="201168"/>
-          </a:xfrm>
-          <a:prstGeom prst="triangle">
-            <a:avLst/>
-          </a:prstGeom>
-          <a:solidFill>
-            <a:srgbClr val="028090"/>
-          </a:solidFill>
-          <a:ln>
-            <a:noFill/>
-          </a:ln>
-          <a:effectLst/>
-        </p:spPr>
-        <p:style>
-          <a:lnRef idx="1">
-            <a:schemeClr val="accent1"/>
-          </a:lnRef>
-          <a:fillRef idx="3">
-            <a:schemeClr val="accent1"/>
-          </a:fillRef>
-          <a:effectRef idx="2">
-            <a:schemeClr val="accent1"/>
-          </a:effectRef>
-          <a:fontRef idx="minor">
-            <a:schemeClr val="lt1"/>
-          </a:fontRef>
-        </p:style>
-        <p:txBody>
-          <a:bodyPr rtlCol="0" anchor="ctr"/>
-          <a:lstStyle/>
-          <a:p>
-            <a:pPr algn="ctr"/>
-          </a:p>
-        </p:txBody>
-      </p:sp>
-      <p:sp>
-        <p:nvSpPr>
-          <p:cNvPr id="52" name="Rounded Rectangle 51"/>
-          <p:cNvSpPr/>
-          <p:nvPr/>
-        </p:nvSpPr>
-        <p:spPr>
-          <a:xfrm>
-            <a:off x="4754880" y="5907024"/>
-            <a:ext cx="2331720" cy="292608"/>
-          </a:xfrm>
-          <a:prstGeom prst="roundRect">
-            <a:avLst>
-              <a:gd name="adj" fmla="val 50000"/>
-            </a:avLst>
-          </a:prstGeom>
-          <a:solidFill>
-            <a:srgbClr val="F0AB00"/>
-          </a:solidFill>
-          <a:ln>
-            <a:noFill/>
-          </a:ln>
-          <a:effectLst/>
-        </p:spPr>
-        <p:style>
-          <a:lnRef idx="1">
-            <a:schemeClr val="accent1"/>
-          </a:lnRef>
-          <a:fillRef idx="3">
-            <a:schemeClr val="accent1"/>
-          </a:fillRef>
-          <a:effectRef idx="2">
-            <a:schemeClr val="accent1"/>
-          </a:effectRef>
-          <a:fontRef idx="minor">
-            <a:schemeClr val="lt1"/>
-          </a:fontRef>
-        </p:style>
-        <p:txBody>
-          <a:bodyPr rtlCol="0" anchor="ctr" lIns="45720" rIns="45720" tIns="36576" bIns="36576" wrap="none"/>
-          <a:lstStyle/>
-          <a:p>
-            <a:pPr algn="ctr"/>
-            <a:r>
-              <a:rPr sz="1100" b="1">
-                <a:solidFill>
-                  <a:srgbClr val="21295C"/>
-                </a:solidFill>
-                <a:latin typeface="Arial"/>
-              </a:rPr>
-              <a:t>↻  повторить × 200 файлов</a:t>
+          <a:xfrm>
+            <a:off x="11274552" y="6547104"/>
+            <a:ext cx="868680" cy="256032"/>
+          </a:xfrm>
+          <a:prstGeom prst="rect">
+            <a:avLst/>
+          </a:prstGeom>
+          <a:noFill/>
+        </p:spPr>
+        <p:txBody>
+          <a:bodyPr wrap="none" lIns="0" rIns="0" tIns="0" bIns="0">
+            <a:spAutoFit/>
+          </a:bodyPr>
+          <a:lstStyle/>
+          <a:p>
+            <a:pPr algn="r">
+              <a:lnSpc>
+                <a:spcPct val="100000"/>
+              </a:lnSpc>
+            </a:pPr>
+            <a:r>
+              <a:rPr sz="1000" i="1">
+                <a:solidFill>
+                  <a:srgbClr val="6B7685"/>
+                </a:solidFill>
+                <a:latin typeface="Arial"/>
+              </a:rPr>
+              <a:t>22 / 36</a:t>
             </a:r>
           </a:p>
         </p:txBody>
@@ -26065,7 +28679,18 @@
                 </a:solidFill>
                 <a:latin typeface="Arial"/>
               </a:rPr>
-              <a:t>5 уровней автономии (Feng / McDonald / Zhang, 2025)</a:t>
+              <a:t>5 уровней автономии (Feng / McDonald / Zhang, 2025) </a:t>
+            </a:r>
+            <a:r>
+              <a:rPr sz="676" baseline="30000" b="0" i="1">
+                <a:latin typeface="Arial"/>
+                <a:cs typeface="Arial"/>
+                <a:ea typeface="Arial"/>
+                <a:solidFill>
+                  <a:srgbClr val="1C7293"/>
+                </a:solidFill>
+              </a:rPr>
+              <a:t>[1]</a:t>
             </a:r>
           </a:p>
         </p:txBody>
@@ -27486,7 +30111,7 @@
         </p:nvSpPr>
         <p:spPr>
           <a:xfrm>
-            <a:off x="502920" y="6217920"/>
+            <a:off x="502920" y="5870448"/>
             <a:ext cx="11201400" cy="502920"/>
           </a:xfrm>
           <a:prstGeom prst="roundRect">
@@ -27534,7 +30159,7 @@
         </p:nvSpPr>
         <p:spPr>
           <a:xfrm>
-            <a:off x="685800" y="6291072"/>
+            <a:off x="685800" y="5943600"/>
             <a:ext cx="10835640" cy="356616"/>
           </a:xfrm>
           <a:prstGeom prst="rect">
@@ -27561,6 +30186,94 @@
                 <a:latin typeface="Arial"/>
               </a:rPr>
               <a:t>Уровень автономии — выбор продукта, не свойство модели. На семинарах будем выбирать осознанно.</a:t>
+            </a:r>
+          </a:p>
+        </p:txBody>
+      </p:sp>
+      <p:sp>
+        <p:nvSpPr>
+          <p:cNvPr id="42" name="TextBox 41"/>
+          <p:cNvSpPr txBox="1"/>
+          <p:nvPr/>
+        </p:nvSpPr>
+        <p:spPr>
+          <a:xfrm>
+            <a:off x="502920" y="6455664"/>
+            <a:ext cx="11201400" cy="292608"/>
+          </a:xfrm>
+          <a:prstGeom prst="rect">
+            <a:avLst/>
+          </a:prstGeom>
+          <a:noFill/>
+        </p:spPr>
+        <p:txBody>
+          <a:bodyPr wrap="square" lIns="0" rIns="0" tIns="0" bIns="0" anchor="t">
+            <a:spAutoFit/>
+          </a:bodyPr>
+          <a:lstStyle/>
+          <a:p>
+            <a:pPr algn="l">
+              <a:lnSpc>
+                <a:spcPct val="102000"/>
+              </a:lnSpc>
+            </a:pPr>
+            <a:r>
+              <a:rPr sz="850" b="1" i="1">
+                <a:solidFill>
+                  <a:srgbClr val="065A82"/>
+                </a:solidFill>
+                <a:latin typeface="Arial"/>
+              </a:rPr>
+              <a:t>[1] </a:t>
+            </a:r>
+            <a:r>
+              <a:rPr sz="850" i="1">
+                <a:solidFill>
+                  <a:srgbClr val="1C7293"/>
+                </a:solidFill>
+                <a:latin typeface="Arial"/>
+                <a:hlinkClick r:id="rId2"/>
+              </a:rPr>
+              <a:t>Feng, McDonald, Zhang — Levels of Autonomy (2025)</a:t>
+            </a:r>
+          </a:p>
+        </p:txBody>
+      </p:sp>
+      <p:sp>
+        <p:nvSpPr>
+          <p:cNvPr id="43" name="TextBox 42"/>
+          <p:cNvSpPr txBox="1"/>
+          <p:nvPr/>
+        </p:nvSpPr>
+        <p:spPr>
+          <a:xfrm>
+            <a:off x="11274552" y="6547104"/>
+            <a:ext cx="868680" cy="256032"/>
+          </a:xfrm>
+          <a:prstGeom prst="rect">
+            <a:avLst/>
+          </a:prstGeom>
+          <a:noFill/>
+        </p:spPr>
+        <p:txBody>
+          <a:bodyPr wrap="none" lIns="0" rIns="0" tIns="0" bIns="0">
+            <a:spAutoFit/>
+          </a:bodyPr>
+          <a:lstStyle/>
+          <a:p>
+            <a:pPr algn="r">
+              <a:lnSpc>
+                <a:spcPct val="100000"/>
+              </a:lnSpc>
+            </a:pPr>
+            <a:r>
+              <a:rPr sz="1000" i="1">
+                <a:solidFill>
+                  <a:srgbClr val="6B7685"/>
+                </a:solidFill>
+                <a:latin typeface="Arial"/>
+              </a:rPr>
+              <a:t>23 / 36</a:t>
             </a:r>
           </a:p>
         </p:txBody>
@@ -27809,7 +30522,18 @@
                 </a:solidFill>
                 <a:latin typeface="Arial"/>
               </a:rPr>
-              <a:t>в Google Translate, Search, Lens и Circle to Search (Google Blog, апрель 2026)</a:t>
+              <a:t>в Google Translate, Search, Lens и Circle to Search (Google Blog, апрель 2026) </a:t>
+            </a:r>
+            <a:r>
+              <a:rPr sz="520" baseline="30000" b="0" i="1">
+                <a:latin typeface="Arial"/>
+                <a:cs typeface="Arial"/>
+                <a:ea typeface="Arial"/>
+                <a:solidFill>
+                  <a:srgbClr val="1C7293"/>
+                </a:solidFill>
+              </a:rPr>
+              <a:t>[1]</a:t>
             </a:r>
           </a:p>
         </p:txBody>
@@ -28722,7 +31446,7 @@
         </p:nvSpPr>
         <p:spPr>
           <a:xfrm>
-            <a:off x="502920" y="5989320"/>
+            <a:off x="502920" y="5916168"/>
             <a:ext cx="11201400" cy="457200"/>
           </a:xfrm>
           <a:prstGeom prst="roundRect">
@@ -28770,7 +31494,7 @@
         </p:nvSpPr>
         <p:spPr>
           <a:xfrm>
-            <a:off x="685800" y="6062472"/>
+            <a:off x="685800" y="5989320"/>
             <a:ext cx="10835640" cy="310896"/>
           </a:xfrm>
           <a:prstGeom prst="rect">
@@ -28796,7 +31520,134 @@
                 </a:solidFill>
                 <a:latin typeface="Arial"/>
               </a:rPr>
-              <a:t>AI как функция, а не продукт. Большинство студентов уже ежедневно пользуются всеми шестью.</a:t>
+              <a:t>AI как функция, а не продукт. Большинство студентов уже ежедневно пользуются всеми шестью. </a:t>
+            </a:r>
+            <a:r>
+              <a:rPr sz="624" baseline="30000" b="0" i="1">
+                <a:latin typeface="Arial"/>
+                <a:cs typeface="Arial"/>
+                <a:ea typeface="Arial"/>
+                <a:solidFill>
+                  <a:srgbClr val="1C7293"/>
+                </a:solidFill>
+              </a:rPr>
+              <a:t>[2]</a:t>
+            </a:r>
+          </a:p>
+        </p:txBody>
+      </p:sp>
+      <p:sp>
+        <p:nvSpPr>
+          <p:cNvPr id="33" name="TextBox 32"/>
+          <p:cNvSpPr txBox="1"/>
+          <p:nvPr/>
+        </p:nvSpPr>
+        <p:spPr>
+          <a:xfrm>
+            <a:off x="502920" y="6455664"/>
+            <a:ext cx="11201400" cy="292608"/>
+          </a:xfrm>
+          <a:prstGeom prst="rect">
+            <a:avLst/>
+          </a:prstGeom>
+          <a:noFill/>
+        </p:spPr>
+        <p:txBody>
+          <a:bodyPr wrap="square" lIns="0" rIns="0" tIns="0" bIns="0" anchor="t">
+            <a:spAutoFit/>
+          </a:bodyPr>
+          <a:lstStyle/>
+          <a:p>
+            <a:pPr algn="l">
+              <a:lnSpc>
+                <a:spcPct val="102000"/>
+              </a:lnSpc>
+            </a:pPr>
+            <a:r>
+              <a:rPr sz="850" b="1" i="1">
+                <a:solidFill>
+                  <a:srgbClr val="065A82"/>
+                </a:solidFill>
+                <a:latin typeface="Arial"/>
+              </a:rPr>
+              <a:t>[1] </a:t>
+            </a:r>
+            <a:r>
+              <a:rPr sz="850" i="1">
+                <a:solidFill>
+                  <a:srgbClr val="1C7293"/>
+                </a:solidFill>
+                <a:latin typeface="Arial"/>
+                <a:hlinkClick r:id="rId7"/>
+              </a:rPr>
+              <a:t>Google — Translate at 20 (2026)</a:t>
+            </a:r>
+            <a:r>
+              <a:rPr sz="850" i="1">
+                <a:solidFill>
+                  <a:srgbClr val="1C7293"/>
+                </a:solidFill>
+                <a:latin typeface="Arial"/>
+              </a:rPr>
+              <a:t>   ·   </a:t>
+            </a:r>
+            <a:r>
+              <a:rPr sz="850" b="1" i="1">
+                <a:solidFill>
+                  <a:srgbClr val="065A82"/>
+                </a:solidFill>
+                <a:latin typeface="Arial"/>
+              </a:rPr>
+              <a:t>[2] </a:t>
+            </a:r>
+            <a:r>
+              <a:rPr sz="850" i="1">
+                <a:solidFill>
+                  <a:srgbClr val="1C7293"/>
+                </a:solidFill>
+                <a:latin typeface="Arial"/>
+                <a:hlinkClick r:id="rId8"/>
+              </a:rPr>
+              <a:t>Anthropic — Building Effective Agents (2024)</a:t>
+            </a:r>
+          </a:p>
+        </p:txBody>
+      </p:sp>
+      <p:sp>
+        <p:nvSpPr>
+          <p:cNvPr id="34" name="TextBox 33"/>
+          <p:cNvSpPr txBox="1"/>
+          <p:nvPr/>
+        </p:nvSpPr>
+        <p:spPr>
+          <a:xfrm>
+            <a:off x="11274552" y="6547104"/>
+            <a:ext cx="868680" cy="256032"/>
+          </a:xfrm>
+          <a:prstGeom prst="rect">
+            <a:avLst/>
+          </a:prstGeom>
+          <a:noFill/>
+        </p:spPr>
+        <p:txBody>
+          <a:bodyPr wrap="none" lIns="0" rIns="0" tIns="0" bIns="0">
+            <a:spAutoFit/>
+          </a:bodyPr>
+          <a:lstStyle/>
+          <a:p>
+            <a:pPr algn="r">
+              <a:lnSpc>
+                <a:spcPct val="100000"/>
+              </a:lnSpc>
+            </a:pPr>
+            <a:r>
+              <a:rPr sz="1000" i="1">
+                <a:solidFill>
+                  <a:srgbClr val="6B7685"/>
+                </a:solidFill>
+                <a:latin typeface="Arial"/>
+              </a:rPr>
+              <a:t>24 / 36</a:t>
             </a:r>
           </a:p>
         </p:txBody>
@@ -28853,7 +31704,62 @@
                 </a:solidFill>
                 <a:latin typeface="Arial"/>
               </a:rPr>
-              <a:t>Чек-лист «Какой тип AI выбрать»: 2 вопроса + квадрант 2×2.</a:t>
+              <a:t>Чек-лист «Какой тип AI выбрать»: 2 вопроса + квадрант 2×2. </a:t>
+            </a:r>
+            <a:r>
+              <a:rPr sz="1248" baseline="30000" b="0" i="1">
+                <a:latin typeface="Arial"/>
+                <a:cs typeface="Arial"/>
+                <a:ea typeface="Arial"/>
+                <a:solidFill>
+                  <a:srgbClr val="1C7293"/>
+                </a:solidFill>
+              </a:rPr>
+              <a:t>[1]</a:t>
+            </a:r>
+            <a:r>
+              <a:rPr sz="2400" b="1" i="0">
+                <a:latin typeface="Arial"/>
+                <a:cs typeface="Arial"/>
+                <a:ea typeface="Arial"/>
+                <a:solidFill>
+                  <a:srgbClr val="21295C"/>
+                </a:solidFill>
+              </a:rPr>
+              <a:t> </a:t>
+            </a:r>
+            <a:r>
+              <a:rPr sz="1248" baseline="30000" b="0" i="1">
+                <a:latin typeface="Arial"/>
+                <a:cs typeface="Arial"/>
+                <a:ea typeface="Arial"/>
+                <a:solidFill>
+                  <a:srgbClr val="1C7293"/>
+                </a:solidFill>
+              </a:rPr>
+              <a:t>[2]</a:t>
+            </a:r>
+            <a:r>
+              <a:rPr sz="2400" b="1" i="0">
+                <a:latin typeface="Arial"/>
+                <a:cs typeface="Arial"/>
+                <a:ea typeface="Arial"/>
+                <a:solidFill>
+                  <a:srgbClr val="21295C"/>
+                </a:solidFill>
+              </a:rPr>
+              <a:t> </a:t>
+            </a:r>
+            <a:r>
+              <a:rPr sz="1248" baseline="30000" b="0" i="1">
+                <a:latin typeface="Arial"/>
+                <a:cs typeface="Arial"/>
+                <a:ea typeface="Arial"/>
+                <a:solidFill>
+                  <a:srgbClr val="1C7293"/>
+                </a:solidFill>
+              </a:rPr>
+              <a:t>[3]</a:t>
             </a:r>
           </a:p>
         </p:txBody>
@@ -29856,6 +32762,150 @@
               </a:rPr>
               <a:t>ETL с AI-классификатором
 (автоматизация)</a:t>
+            </a:r>
+          </a:p>
+        </p:txBody>
+      </p:sp>
+      <p:sp>
+        <p:nvSpPr>
+          <p:cNvPr id="27" name="TextBox 26"/>
+          <p:cNvSpPr txBox="1"/>
+          <p:nvPr/>
+        </p:nvSpPr>
+        <p:spPr>
+          <a:xfrm>
+            <a:off x="502920" y="6455664"/>
+            <a:ext cx="11201400" cy="292608"/>
+          </a:xfrm>
+          <a:prstGeom prst="rect">
+            <a:avLst/>
+          </a:prstGeom>
+          <a:noFill/>
+        </p:spPr>
+        <p:txBody>
+          <a:bodyPr wrap="square" lIns="0" rIns="0" tIns="0" bIns="0" anchor="t">
+            <a:spAutoFit/>
+          </a:bodyPr>
+          <a:lstStyle/>
+          <a:p>
+            <a:pPr algn="l">
+              <a:lnSpc>
+                <a:spcPct val="102000"/>
+              </a:lnSpc>
+            </a:pPr>
+            <a:r>
+              <a:rPr sz="850" b="1" i="1">
+                <a:solidFill>
+                  <a:srgbClr val="065A82"/>
+                </a:solidFill>
+                <a:latin typeface="Arial"/>
+              </a:rPr>
+              <a:t>[1] </a:t>
+            </a:r>
+            <a:r>
+              <a:rPr sz="850" i="1">
+                <a:solidFill>
+                  <a:srgbClr val="1C7293"/>
+                </a:solidFill>
+                <a:latin typeface="Arial"/>
+                <a:hlinkClick r:id="rId2"/>
+              </a:rPr>
+              <a:t>Anthropic — Building Effective Agents (2024)</a:t>
+            </a:r>
+            <a:r>
+              <a:rPr sz="850" i="1">
+                <a:solidFill>
+                  <a:srgbClr val="1C7293"/>
+                </a:solidFill>
+                <a:latin typeface="Arial"/>
+              </a:rPr>
+              <a:t>   ·   </a:t>
+            </a:r>
+            <a:r>
+              <a:rPr sz="850" b="1" i="1">
+                <a:solidFill>
+                  <a:srgbClr val="065A82"/>
+                </a:solidFill>
+                <a:latin typeface="Arial"/>
+              </a:rPr>
+              <a:t>[2] </a:t>
+            </a:r>
+            <a:r>
+              <a:rPr sz="850" i="1">
+                <a:solidFill>
+                  <a:srgbClr val="1C7293"/>
+                </a:solidFill>
+                <a:latin typeface="Arial"/>
+                <a:hlinkClick r:id="rId3"/>
+              </a:rPr>
+              <a:t>Google — AI Agents Whitepaper (2024)</a:t>
+            </a:r>
+            <a:r>
+              <a:rPr sz="850" i="1">
+                <a:solidFill>
+                  <a:srgbClr val="1C7293"/>
+                </a:solidFill>
+                <a:latin typeface="Arial"/>
+              </a:rPr>
+              <a:t>   ·   </a:t>
+            </a:r>
+            <a:r>
+              <a:rPr sz="850" b="1" i="1">
+                <a:solidFill>
+                  <a:srgbClr val="065A82"/>
+                </a:solidFill>
+                <a:latin typeface="Arial"/>
+              </a:rPr>
+              <a:t>[3] </a:t>
+            </a:r>
+            <a:r>
+              <a:rPr sz="850" i="1">
+                <a:solidFill>
+                  <a:srgbClr val="1C7293"/>
+                </a:solidFill>
+                <a:latin typeface="Arial"/>
+                <a:hlinkClick r:id="rId4"/>
+              </a:rPr>
+              <a:t>Ng — Four Agentic Design Patterns (2024)</a:t>
+            </a:r>
+          </a:p>
+        </p:txBody>
+      </p:sp>
+      <p:sp>
+        <p:nvSpPr>
+          <p:cNvPr id="28" name="TextBox 27"/>
+          <p:cNvSpPr txBox="1"/>
+          <p:nvPr/>
+        </p:nvSpPr>
+        <p:spPr>
+          <a:xfrm>
+            <a:off x="11274552" y="6547104"/>
+            <a:ext cx="868680" cy="256032"/>
+          </a:xfrm>
+          <a:prstGeom prst="rect">
+            <a:avLst/>
+          </a:prstGeom>
+          <a:noFill/>
+        </p:spPr>
+        <p:txBody>
+          <a:bodyPr wrap="none" lIns="0" rIns="0" tIns="0" bIns="0">
+            <a:spAutoFit/>
+          </a:bodyPr>
+          <a:lstStyle/>
+          <a:p>
+            <a:pPr algn="r">
+              <a:lnSpc>
+                <a:spcPct val="100000"/>
+              </a:lnSpc>
+            </a:pPr>
+            <a:r>
+              <a:rPr sz="1000" i="1">
+                <a:solidFill>
+                  <a:srgbClr val="6B7685"/>
+                </a:solidFill>
+                <a:latin typeface="Arial"/>
+              </a:rPr>
+              <a:t>25 / 36</a:t>
             </a:r>
           </a:p>
         </p:txBody>
@@ -29959,7 +33009,62 @@
                 </a:solidFill>
                 <a:latin typeface="Arial"/>
               </a:rPr>
-              <a:t>Куда уходят данные · ошибки AI · «не умеет» — тоже ваше.</a:t>
+              <a:t>Куда уходят данные · ошибки AI · «не умеет» — тоже ваше. </a:t>
+            </a:r>
+            <a:r>
+              <a:rPr sz="936" baseline="30000" b="0" i="1">
+                <a:latin typeface="Arial"/>
+                <a:cs typeface="Arial"/>
+                <a:ea typeface="Arial"/>
+                <a:solidFill>
+                  <a:srgbClr val="1C7293"/>
+                </a:solidFill>
+              </a:rPr>
+              <a:t>[1]</a:t>
+            </a:r>
+            <a:r>
+              <a:rPr sz="1800" b="0" i="1">
+                <a:latin typeface="Arial"/>
+                <a:cs typeface="Arial"/>
+                <a:ea typeface="Arial"/>
+                <a:solidFill>
+                  <a:srgbClr val="065A82"/>
+                </a:solidFill>
+              </a:rPr>
+              <a:t> </a:t>
+            </a:r>
+            <a:r>
+              <a:rPr sz="936" baseline="30000" b="0" i="1">
+                <a:latin typeface="Arial"/>
+                <a:cs typeface="Arial"/>
+                <a:ea typeface="Arial"/>
+                <a:solidFill>
+                  <a:srgbClr val="1C7293"/>
+                </a:solidFill>
+              </a:rPr>
+              <a:t>[2]</a:t>
+            </a:r>
+            <a:r>
+              <a:rPr sz="1800" b="0" i="1">
+                <a:latin typeface="Arial"/>
+                <a:cs typeface="Arial"/>
+                <a:ea typeface="Arial"/>
+                <a:solidFill>
+                  <a:srgbClr val="065A82"/>
+                </a:solidFill>
+              </a:rPr>
+              <a:t> </a:t>
+            </a:r>
+            <a:r>
+              <a:rPr sz="936" baseline="30000" b="0" i="1">
+                <a:latin typeface="Arial"/>
+                <a:cs typeface="Arial"/>
+                <a:ea typeface="Arial"/>
+                <a:solidFill>
+                  <a:srgbClr val="1C7293"/>
+                </a:solidFill>
+              </a:rPr>
+              <a:t>[3]</a:t>
             </a:r>
           </a:p>
         </p:txBody>
@@ -30959,6 +34064,150 @@
               </a:rPr>
               <a:t>Резюме ·
 карта семестра</a:t>
+            </a:r>
+          </a:p>
+        </p:txBody>
+      </p:sp>
+      <p:sp>
+        <p:nvSpPr>
+          <p:cNvPr id="28" name="TextBox 27"/>
+          <p:cNvSpPr txBox="1"/>
+          <p:nvPr/>
+        </p:nvSpPr>
+        <p:spPr>
+          <a:xfrm>
+            <a:off x="502920" y="6455664"/>
+            <a:ext cx="11201400" cy="292608"/>
+          </a:xfrm>
+          <a:prstGeom prst="rect">
+            <a:avLst/>
+          </a:prstGeom>
+          <a:noFill/>
+        </p:spPr>
+        <p:txBody>
+          <a:bodyPr wrap="square" lIns="0" rIns="0" tIns="0" bIns="0" anchor="t">
+            <a:spAutoFit/>
+          </a:bodyPr>
+          <a:lstStyle/>
+          <a:p>
+            <a:pPr algn="l">
+              <a:lnSpc>
+                <a:spcPct val="102000"/>
+              </a:lnSpc>
+            </a:pPr>
+            <a:r>
+              <a:rPr sz="850" b="1" i="1">
+                <a:solidFill>
+                  <a:srgbClr val="065A82"/>
+                </a:solidFill>
+                <a:latin typeface="Arial"/>
+              </a:rPr>
+              <a:t>[1] </a:t>
+            </a:r>
+            <a:r>
+              <a:rPr sz="850" i="1">
+                <a:solidFill>
+                  <a:srgbClr val="1C7293"/>
+                </a:solidFill>
+                <a:latin typeface="Arial"/>
+                <a:hlinkClick r:id="rId2"/>
+              </a:rPr>
+              <a:t>NIST — AI RMF 1.0 (2023)</a:t>
+            </a:r>
+            <a:r>
+              <a:rPr sz="850" i="1">
+                <a:solidFill>
+                  <a:srgbClr val="1C7293"/>
+                </a:solidFill>
+                <a:latin typeface="Arial"/>
+              </a:rPr>
+              <a:t>   ·   </a:t>
+            </a:r>
+            <a:r>
+              <a:rPr sz="850" b="1" i="1">
+                <a:solidFill>
+                  <a:srgbClr val="065A82"/>
+                </a:solidFill>
+                <a:latin typeface="Arial"/>
+              </a:rPr>
+              <a:t>[2] </a:t>
+            </a:r>
+            <a:r>
+              <a:rPr sz="850" i="1">
+                <a:solidFill>
+                  <a:srgbClr val="1C7293"/>
+                </a:solidFill>
+                <a:latin typeface="Arial"/>
+                <a:hlinkClick r:id="rId3"/>
+              </a:rPr>
+              <a:t>NIST — Generative AI Profile 600-1 (2024)</a:t>
+            </a:r>
+            <a:r>
+              <a:rPr sz="850" i="1">
+                <a:solidFill>
+                  <a:srgbClr val="1C7293"/>
+                </a:solidFill>
+                <a:latin typeface="Arial"/>
+              </a:rPr>
+              <a:t>   ·   </a:t>
+            </a:r>
+            <a:r>
+              <a:rPr sz="850" b="1" i="1">
+                <a:solidFill>
+                  <a:srgbClr val="065A82"/>
+                </a:solidFill>
+                <a:latin typeface="Arial"/>
+              </a:rPr>
+              <a:t>[3] </a:t>
+            </a:r>
+            <a:r>
+              <a:rPr sz="850" i="1">
+                <a:solidFill>
+                  <a:srgbClr val="1C7293"/>
+                </a:solidFill>
+                <a:latin typeface="Arial"/>
+                <a:hlinkClick r:id="rId4"/>
+              </a:rPr>
+              <a:t>EU AI Act — Reg. (EU) 2024/1689</a:t>
+            </a:r>
+          </a:p>
+        </p:txBody>
+      </p:sp>
+      <p:sp>
+        <p:nvSpPr>
+          <p:cNvPr id="29" name="TextBox 28"/>
+          <p:cNvSpPr txBox="1"/>
+          <p:nvPr/>
+        </p:nvSpPr>
+        <p:spPr>
+          <a:xfrm>
+            <a:off x="11274552" y="6547104"/>
+            <a:ext cx="868680" cy="256032"/>
+          </a:xfrm>
+          <a:prstGeom prst="rect">
+            <a:avLst/>
+          </a:prstGeom>
+          <a:noFill/>
+        </p:spPr>
+        <p:txBody>
+          <a:bodyPr wrap="none" lIns="0" rIns="0" tIns="0" bIns="0">
+            <a:spAutoFit/>
+          </a:bodyPr>
+          <a:lstStyle/>
+          <a:p>
+            <a:pPr algn="r">
+              <a:lnSpc>
+                <a:spcPct val="100000"/>
+              </a:lnSpc>
+            </a:pPr>
+            <a:r>
+              <a:rPr sz="1000" i="1">
+                <a:solidFill>
+                  <a:srgbClr val="6B7685"/>
+                </a:solidFill>
+                <a:latin typeface="Arial"/>
+              </a:rPr>
+              <a:t>26 / 36</a:t>
             </a:r>
           </a:p>
         </p:txBody>
@@ -31068,11 +34317,11 @@
         <p:spPr>
           <a:xfrm>
             <a:off x="502920" y="1691640"/>
-            <a:ext cx="11185855" cy="4846320"/>
+            <a:ext cx="11185855" cy="4617720"/>
           </a:xfrm>
           <a:prstGeom prst="roundRect">
             <a:avLst>
-              <a:gd name="adj" fmla="val 6289"/>
+              <a:gd name="adj" fmla="val 6600"/>
             </a:avLst>
           </a:prstGeom>
           <a:solidFill>
@@ -31475,7 +34724,18 @@
                 </a:solidFill>
                 <a:latin typeface="Arial"/>
               </a:rPr>
-              <a:t>КОРПОРАТИВНЫЕ ТАРИФЫ / API</a:t>
+              <a:t>КОРПОРАТИВНЫЕ ТАРИФЫ / API </a:t>
+            </a:r>
+            <a:r>
+              <a:rPr sz="728" baseline="30000" b="0" i="1">
+                <a:latin typeface="Arial"/>
+                <a:cs typeface="Arial"/>
+                <a:ea typeface="Arial"/>
+                <a:solidFill>
+                  <a:srgbClr val="1C7293"/>
+                </a:solidFill>
+              </a:rPr>
+              <a:t>[2]</a:t>
             </a:r>
           </a:p>
         </p:txBody>
@@ -31688,7 +34948,7 @@
         <p:spPr>
           <a:xfrm>
             <a:off x="731520" y="5120640"/>
-            <a:ext cx="6651766" cy="1188719"/>
+            <a:ext cx="6651766" cy="960119"/>
           </a:xfrm>
           <a:prstGeom prst="roundRect">
             <a:avLst>
@@ -31761,7 +35021,18 @@
                 </a:solidFill>
                 <a:latin typeface="Arial"/>
               </a:rPr>
-              <a:t>Samsung 2023 — канонический инцидент</a:t>
+              <a:t>Samsung 2023 — канонический инцидент </a:t>
+            </a:r>
+            <a:r>
+              <a:rPr sz="676" baseline="30000" b="0" i="1">
+                <a:latin typeface="Arial"/>
+                <a:cs typeface="Arial"/>
+                <a:ea typeface="Arial"/>
+                <a:solidFill>
+                  <a:srgbClr val="1C7293"/>
+                </a:solidFill>
+              </a:rPr>
+              <a:t>[1]</a:t>
             </a:r>
           </a:p>
         </p:txBody>
@@ -31775,7 +35046,7 @@
         <p:spPr>
           <a:xfrm>
             <a:off x="914400" y="5559552"/>
-            <a:ext cx="6286006" cy="685799"/>
+            <a:ext cx="6286006" cy="457199"/>
           </a:xfrm>
           <a:prstGeom prst="rect">
             <a:avLst/>
@@ -31814,7 +35085,7 @@
         <p:spPr>
           <a:xfrm>
             <a:off x="7611886" y="5120640"/>
-            <a:ext cx="3848288" cy="1188719"/>
+            <a:ext cx="3848288" cy="960119"/>
           </a:xfrm>
           <a:prstGeom prst="roundRect">
             <a:avLst>
@@ -31885,7 +35156,18 @@
                 </a:solidFill>
                 <a:latin typeface="Arial"/>
               </a:rPr>
-              <a:t>EU AI Act — штрафы</a:t>
+              <a:t>EU AI Act — штрафы </a:t>
+            </a:r>
+            <a:r>
+              <a:rPr sz="676" baseline="30000" b="0" i="1">
+                <a:latin typeface="Arial"/>
+                <a:cs typeface="Arial"/>
+                <a:ea typeface="Arial"/>
+                <a:solidFill>
+                  <a:srgbClr val="1C7293"/>
+                </a:solidFill>
+              </a:rPr>
+              <a:t>[3]</a:t>
             </a:r>
           </a:p>
         </p:txBody>
@@ -31938,7 +35220,7 @@
         <p:spPr>
           <a:xfrm>
             <a:off x="7794766" y="5870448"/>
-            <a:ext cx="3482528" cy="365759"/>
+            <a:ext cx="3482528" cy="137159"/>
           </a:xfrm>
           <a:prstGeom prst="rect">
             <a:avLst/>
@@ -31964,6 +35246,150 @@
                 <a:latin typeface="Arial"/>
               </a:rPr>
               <a:t>до 35M € / 7% — за запрещённые практики</a:t>
+            </a:r>
+          </a:p>
+        </p:txBody>
+      </p:sp>
+      <p:sp>
+        <p:nvSpPr>
+          <p:cNvPr id="26" name="TextBox 25"/>
+          <p:cNvSpPr txBox="1"/>
+          <p:nvPr/>
+        </p:nvSpPr>
+        <p:spPr>
+          <a:xfrm>
+            <a:off x="502920" y="6455664"/>
+            <a:ext cx="11201400" cy="292608"/>
+          </a:xfrm>
+          <a:prstGeom prst="rect">
+            <a:avLst/>
+          </a:prstGeom>
+          <a:noFill/>
+        </p:spPr>
+        <p:txBody>
+          <a:bodyPr wrap="square" lIns="0" rIns="0" tIns="0" bIns="0" anchor="t">
+            <a:spAutoFit/>
+          </a:bodyPr>
+          <a:lstStyle/>
+          <a:p>
+            <a:pPr algn="l">
+              <a:lnSpc>
+                <a:spcPct val="102000"/>
+              </a:lnSpc>
+            </a:pPr>
+            <a:r>
+              <a:rPr sz="850" b="1" i="1">
+                <a:solidFill>
+                  <a:srgbClr val="065A82"/>
+                </a:solidFill>
+                <a:latin typeface="Arial"/>
+              </a:rPr>
+              <a:t>[1] </a:t>
+            </a:r>
+            <a:r>
+              <a:rPr sz="850" i="1">
+                <a:solidFill>
+                  <a:srgbClr val="1C7293"/>
+                </a:solidFill>
+                <a:latin typeface="Arial"/>
+                <a:hlinkClick r:id="rId2"/>
+              </a:rPr>
+              <a:t>Bloomberg — Samsung bans ChatGPT (май 2023)</a:t>
+            </a:r>
+            <a:r>
+              <a:rPr sz="850" i="1">
+                <a:solidFill>
+                  <a:srgbClr val="1C7293"/>
+                </a:solidFill>
+                <a:latin typeface="Arial"/>
+              </a:rPr>
+              <a:t>   ·   </a:t>
+            </a:r>
+            <a:r>
+              <a:rPr sz="850" b="1" i="1">
+                <a:solidFill>
+                  <a:srgbClr val="065A82"/>
+                </a:solidFill>
+                <a:latin typeface="Arial"/>
+              </a:rPr>
+              <a:t>[2] </a:t>
+            </a:r>
+            <a:r>
+              <a:rPr sz="850" i="1">
+                <a:solidFill>
+                  <a:srgbClr val="1C7293"/>
+                </a:solidFill>
+                <a:latin typeface="Arial"/>
+                <a:hlinkClick r:id="rId3"/>
+              </a:rPr>
+              <a:t>OpenAI — Enterprise Privacy / data usage (2025)</a:t>
+            </a:r>
+            <a:r>
+              <a:rPr sz="850" i="1">
+                <a:solidFill>
+                  <a:srgbClr val="1C7293"/>
+                </a:solidFill>
+                <a:latin typeface="Arial"/>
+              </a:rPr>
+              <a:t>   ·   </a:t>
+            </a:r>
+            <a:r>
+              <a:rPr sz="850" b="1" i="1">
+                <a:solidFill>
+                  <a:srgbClr val="065A82"/>
+                </a:solidFill>
+                <a:latin typeface="Arial"/>
+              </a:rPr>
+              <a:t>[3] </a:t>
+            </a:r>
+            <a:r>
+              <a:rPr sz="850" i="1">
+                <a:solidFill>
+                  <a:srgbClr val="1C7293"/>
+                </a:solidFill>
+                <a:latin typeface="Arial"/>
+                <a:hlinkClick r:id="rId4"/>
+              </a:rPr>
+              <a:t>EU AI Act — Reg. (EU) 2024/1689</a:t>
+            </a:r>
+          </a:p>
+        </p:txBody>
+      </p:sp>
+      <p:sp>
+        <p:nvSpPr>
+          <p:cNvPr id="27" name="TextBox 26"/>
+          <p:cNvSpPr txBox="1"/>
+          <p:nvPr/>
+        </p:nvSpPr>
+        <p:spPr>
+          <a:xfrm>
+            <a:off x="11274552" y="6547104"/>
+            <a:ext cx="868680" cy="256032"/>
+          </a:xfrm>
+          <a:prstGeom prst="rect">
+            <a:avLst/>
+          </a:prstGeom>
+          <a:noFill/>
+        </p:spPr>
+        <p:txBody>
+          <a:bodyPr wrap="none" lIns="0" rIns="0" tIns="0" bIns="0">
+            <a:spAutoFit/>
+          </a:bodyPr>
+          <a:lstStyle/>
+          <a:p>
+            <a:pPr algn="r">
+              <a:lnSpc>
+                <a:spcPct val="100000"/>
+              </a:lnSpc>
+            </a:pPr>
+            <a:r>
+              <a:rPr sz="1000" i="1">
+                <a:solidFill>
+                  <a:srgbClr val="6B7685"/>
+                </a:solidFill>
+                <a:latin typeface="Arial"/>
+              </a:rPr>
+              <a:t>27 / 36</a:t>
             </a:r>
           </a:p>
         </p:txBody>
@@ -32020,7 +35446,40 @@
                 </a:solidFill>
                 <a:latin typeface="Arial"/>
               </a:rPr>
-              <a:t>Галлюцинации — неотъемлемое свойство AI.</a:t>
+              <a:t>Галлюцинации — неотъемлемое свойство AI. </a:t>
+            </a:r>
+            <a:r>
+              <a:rPr sz="1456" baseline="30000" b="0" i="1">
+                <a:latin typeface="Arial"/>
+                <a:cs typeface="Arial"/>
+                <a:ea typeface="Arial"/>
+                <a:solidFill>
+                  <a:srgbClr val="1C7293"/>
+                </a:solidFill>
+              </a:rPr>
+              <a:t>[1]</a:t>
+            </a:r>
+            <a:r>
+              <a:rPr sz="2800" b="1" i="0">
+                <a:latin typeface="Arial"/>
+                <a:cs typeface="Arial"/>
+                <a:ea typeface="Arial"/>
+                <a:solidFill>
+                  <a:srgbClr val="21295C"/>
+                </a:solidFill>
+              </a:rPr>
+              <a:t> </a:t>
+            </a:r>
+            <a:r>
+              <a:rPr sz="1456" baseline="30000" b="0" i="1">
+                <a:latin typeface="Arial"/>
+                <a:cs typeface="Arial"/>
+                <a:ea typeface="Arial"/>
+                <a:solidFill>
+                  <a:srgbClr val="1C7293"/>
+                </a:solidFill>
+              </a:rPr>
+              <a:t>[2]</a:t>
             </a:r>
           </a:p>
         </p:txBody>
@@ -32671,7 +36130,18 @@
                 </a:solidFill>
                 <a:latin typeface="Arial"/>
               </a:rPr>
-              <a:t>Vectara HHEM (2025-26)</a:t>
+              <a:t>Vectara HHEM (2025-26) </a:t>
+            </a:r>
+            <a:r>
+              <a:rPr sz="676" baseline="30000" b="0" i="1">
+                <a:latin typeface="Arial"/>
+                <a:cs typeface="Arial"/>
+                <a:ea typeface="Arial"/>
+                <a:solidFill>
+                  <a:srgbClr val="1C7293"/>
+                </a:solidFill>
+              </a:rPr>
+              <a:t>[3]</a:t>
             </a:r>
           </a:p>
         </p:txBody>
@@ -32953,7 +36423,190 @@
                 </a:solidFill>
                 <a:latin typeface="Arial"/>
               </a:rPr>
-              <a:t>Анти-паттерн: «AI знает всё». Любой ответ AI по фактическому вопросу — гипотеза для проверки.</a:t>
+              <a:t>Анти-паттерн: «AI знает всё». Любой ответ AI по фактическому вопросу — гипотеза для проверки. </a:t>
+            </a:r>
+            <a:r>
+              <a:rPr sz="624" baseline="30000" b="0" i="1">
+                <a:latin typeface="Arial"/>
+                <a:cs typeface="Arial"/>
+                <a:ea typeface="Arial"/>
+                <a:solidFill>
+                  <a:srgbClr val="1C7293"/>
+                </a:solidFill>
+              </a:rPr>
+              <a:t>[4]</a:t>
+            </a:r>
+          </a:p>
+        </p:txBody>
+      </p:sp>
+      <p:sp>
+        <p:nvSpPr>
+          <p:cNvPr id="26" name="TextBox 25"/>
+          <p:cNvSpPr txBox="1"/>
+          <p:nvPr/>
+        </p:nvSpPr>
+        <p:spPr>
+          <a:xfrm>
+            <a:off x="502920" y="6455664"/>
+            <a:ext cx="11201400" cy="292608"/>
+          </a:xfrm>
+          <a:prstGeom prst="rect">
+            <a:avLst/>
+          </a:prstGeom>
+          <a:noFill/>
+        </p:spPr>
+        <p:txBody>
+          <a:bodyPr wrap="square" lIns="0" rIns="0" tIns="0" bIns="0" anchor="t">
+            <a:spAutoFit/>
+          </a:bodyPr>
+          <a:lstStyle/>
+          <a:p>
+            <a:pPr algn="l">
+              <a:lnSpc>
+                <a:spcPct val="102000"/>
+              </a:lnSpc>
+            </a:pPr>
+            <a:r>
+              <a:rPr sz="850" b="1" i="1">
+                <a:solidFill>
+                  <a:srgbClr val="065A82"/>
+                </a:solidFill>
+                <a:latin typeface="Arial"/>
+              </a:rPr>
+              <a:t>[1] </a:t>
+            </a:r>
+            <a:r>
+              <a:rPr sz="850" i="1">
+                <a:solidFill>
+                  <a:srgbClr val="1C7293"/>
+                </a:solidFill>
+                <a:latin typeface="Arial"/>
+                <a:hlinkClick r:id="rId2"/>
+              </a:rPr>
+              <a:t>Huang et al. — Survey on Hallucination in LLMs (2023)</a:t>
+            </a:r>
+            <a:r>
+              <a:rPr sz="850" i="1">
+                <a:solidFill>
+                  <a:srgbClr val="1C7293"/>
+                </a:solidFill>
+                <a:latin typeface="Arial"/>
+              </a:rPr>
+              <a:t>   ·   </a:t>
+            </a:r>
+            <a:r>
+              <a:rPr sz="850" b="1" i="1">
+                <a:solidFill>
+                  <a:srgbClr val="065A82"/>
+                </a:solidFill>
+                <a:latin typeface="Arial"/>
+              </a:rPr>
+              <a:t>[2] </a:t>
+            </a:r>
+            <a:r>
+              <a:rPr sz="850" i="1">
+                <a:solidFill>
+                  <a:srgbClr val="1C7293"/>
+                </a:solidFill>
+                <a:latin typeface="Arial"/>
+                <a:hlinkClick r:id="rId3"/>
+              </a:rPr>
+              <a:t>Ji et al. — Survey of Hallucination in NLG (2023)</a:t>
+            </a:r>
+            <a:r>
+              <a:rPr sz="850" i="1">
+                <a:solidFill>
+                  <a:srgbClr val="1C7293"/>
+                </a:solidFill>
+                <a:latin typeface="Arial"/>
+              </a:rPr>
+              <a:t>   ·   </a:t>
+            </a:r>
+            <a:r>
+              <a:rPr sz="850" b="1" i="1">
+                <a:solidFill>
+                  <a:srgbClr val="065A82"/>
+                </a:solidFill>
+                <a:latin typeface="Arial"/>
+              </a:rPr>
+              <a:t>[3] </a:t>
+            </a:r>
+            <a:r>
+              <a:rPr sz="850" i="1">
+                <a:solidFill>
+                  <a:srgbClr val="1C7293"/>
+                </a:solidFill>
+                <a:latin typeface="Arial"/>
+                <a:hlinkClick r:id="rId4"/>
+              </a:rPr>
+              <a:t>Vectara — HHEM Leaderboard</a:t>
+            </a:r>
+            <a:r>
+              <a:rPr sz="850" i="1">
+                <a:solidFill>
+                  <a:srgbClr val="1C7293"/>
+                </a:solidFill>
+                <a:latin typeface="Arial"/>
+              </a:rPr>
+              <a:t>   ·   </a:t>
+            </a:r>
+            <a:r>
+              <a:rPr sz="850" b="1" i="1">
+                <a:solidFill>
+                  <a:srgbClr val="065A82"/>
+                </a:solidFill>
+                <a:latin typeface="Arial"/>
+              </a:rPr>
+              <a:t>[4] </a:t>
+            </a:r>
+            <a:r>
+              <a:rPr sz="850" i="1">
+                <a:solidFill>
+                  <a:srgbClr val="1C7293"/>
+                </a:solidFill>
+                <a:latin typeface="Arial"/>
+                <a:hlinkClick r:id="rId5"/>
+              </a:rPr>
+              <a:t>CybSafe / NCA — Oh Behave! (2024–25)</a:t>
+            </a:r>
+          </a:p>
+        </p:txBody>
+      </p:sp>
+      <p:sp>
+        <p:nvSpPr>
+          <p:cNvPr id="27" name="TextBox 26"/>
+          <p:cNvSpPr txBox="1"/>
+          <p:nvPr/>
+        </p:nvSpPr>
+        <p:spPr>
+          <a:xfrm>
+            <a:off x="11274552" y="6547104"/>
+            <a:ext cx="868680" cy="256032"/>
+          </a:xfrm>
+          <a:prstGeom prst="rect">
+            <a:avLst/>
+          </a:prstGeom>
+          <a:noFill/>
+        </p:spPr>
+        <p:txBody>
+          <a:bodyPr wrap="none" lIns="0" rIns="0" tIns="0" bIns="0">
+            <a:spAutoFit/>
+          </a:bodyPr>
+          <a:lstStyle/>
+          <a:p>
+            <a:pPr algn="r">
+              <a:lnSpc>
+                <a:spcPct val="100000"/>
+              </a:lnSpc>
+            </a:pPr>
+            <a:r>
+              <a:rPr sz="1000" i="1">
+                <a:solidFill>
+                  <a:srgbClr val="6B7685"/>
+                </a:solidFill>
+                <a:latin typeface="Arial"/>
+              </a:rPr>
+              <a:t>28 / 36</a:t>
             </a:r>
           </a:p>
         </p:txBody>
@@ -33665,7 +37318,18 @@
                 </a:solidFill>
                 <a:latin typeface="Arial"/>
               </a:rPr>
-              <a:t>GPT-4o: лесть (sycophancy) — апрель 2025</a:t>
+              <a:t>GPT-4o: лесть (sycophancy) — апрель 2025 </a:t>
+            </a:r>
+            <a:r>
+              <a:rPr sz="676" baseline="30000" b="0" i="1">
+                <a:latin typeface="Arial"/>
+                <a:cs typeface="Arial"/>
+                <a:ea typeface="Arial"/>
+                <a:solidFill>
+                  <a:srgbClr val="1C7293"/>
+                </a:solidFill>
+              </a:rPr>
+              <a:t>[1]</a:t>
             </a:r>
           </a:p>
         </p:txBody>
@@ -33762,7 +37426,7 @@
         </p:nvSpPr>
         <p:spPr>
           <a:xfrm>
-            <a:off x="502920" y="6080760"/>
+            <a:off x="502920" y="6007608"/>
             <a:ext cx="11201400" cy="365760"/>
           </a:xfrm>
           <a:prstGeom prst="rect">
@@ -33788,7 +37452,134 @@
                 </a:solidFill>
                 <a:latin typeface="Arial"/>
               </a:rPr>
-              <a:t>Общая причина: модель отражает данные, на которых обучена.</a:t>
+              <a:t>Общая причина: модель отражает данные, на которых обучена. </a:t>
+            </a:r>
+            <a:r>
+              <a:rPr sz="676" baseline="30000" b="0" i="1">
+                <a:latin typeface="Arial"/>
+                <a:cs typeface="Arial"/>
+                <a:ea typeface="Arial"/>
+                <a:solidFill>
+                  <a:srgbClr val="1C7293"/>
+                </a:solidFill>
+              </a:rPr>
+              <a:t>[2]</a:t>
+            </a:r>
+          </a:p>
+        </p:txBody>
+      </p:sp>
+      <p:sp>
+        <p:nvSpPr>
+          <p:cNvPr id="22" name="TextBox 21"/>
+          <p:cNvSpPr txBox="1"/>
+          <p:nvPr/>
+        </p:nvSpPr>
+        <p:spPr>
+          <a:xfrm>
+            <a:off x="502920" y="6455664"/>
+            <a:ext cx="11201400" cy="292608"/>
+          </a:xfrm>
+          <a:prstGeom prst="rect">
+            <a:avLst/>
+          </a:prstGeom>
+          <a:noFill/>
+        </p:spPr>
+        <p:txBody>
+          <a:bodyPr wrap="square" lIns="0" rIns="0" tIns="0" bIns="0" anchor="t">
+            <a:spAutoFit/>
+          </a:bodyPr>
+          <a:lstStyle/>
+          <a:p>
+            <a:pPr algn="l">
+              <a:lnSpc>
+                <a:spcPct val="102000"/>
+              </a:lnSpc>
+            </a:pPr>
+            <a:r>
+              <a:rPr sz="850" b="1" i="1">
+                <a:solidFill>
+                  <a:srgbClr val="065A82"/>
+                </a:solidFill>
+                <a:latin typeface="Arial"/>
+              </a:rPr>
+              <a:t>[1] </a:t>
+            </a:r>
+            <a:r>
+              <a:rPr sz="850" i="1">
+                <a:solidFill>
+                  <a:srgbClr val="1C7293"/>
+                </a:solidFill>
+                <a:latin typeface="Arial"/>
+                <a:hlinkClick r:id="rId5"/>
+              </a:rPr>
+              <a:t>OpenAI — Sycophancy in GPT-4o postmortem (2025)</a:t>
+            </a:r>
+            <a:r>
+              <a:rPr sz="850" i="1">
+                <a:solidFill>
+                  <a:srgbClr val="1C7293"/>
+                </a:solidFill>
+                <a:latin typeface="Arial"/>
+              </a:rPr>
+              <a:t>   ·   </a:t>
+            </a:r>
+            <a:r>
+              <a:rPr sz="850" b="1" i="1">
+                <a:solidFill>
+                  <a:srgbClr val="065A82"/>
+                </a:solidFill>
+                <a:latin typeface="Arial"/>
+              </a:rPr>
+              <a:t>[2] </a:t>
+            </a:r>
+            <a:r>
+              <a:rPr sz="850" i="1">
+                <a:solidFill>
+                  <a:srgbClr val="1C7293"/>
+                </a:solidFill>
+                <a:latin typeface="Arial"/>
+                <a:hlinkClick r:id="rId6"/>
+              </a:rPr>
+              <a:t>Pan et al. — Reward Misspecification (2022)</a:t>
+            </a:r>
+          </a:p>
+        </p:txBody>
+      </p:sp>
+      <p:sp>
+        <p:nvSpPr>
+          <p:cNvPr id="23" name="TextBox 22"/>
+          <p:cNvSpPr txBox="1"/>
+          <p:nvPr/>
+        </p:nvSpPr>
+        <p:spPr>
+          <a:xfrm>
+            <a:off x="11274552" y="6547104"/>
+            <a:ext cx="868680" cy="256032"/>
+          </a:xfrm>
+          <a:prstGeom prst="rect">
+            <a:avLst/>
+          </a:prstGeom>
+          <a:noFill/>
+        </p:spPr>
+        <p:txBody>
+          <a:bodyPr wrap="none" lIns="0" rIns="0" tIns="0" bIns="0">
+            <a:spAutoFit/>
+          </a:bodyPr>
+          <a:lstStyle/>
+          <a:p>
+            <a:pPr algn="r">
+              <a:lnSpc>
+                <a:spcPct val="100000"/>
+              </a:lnSpc>
+            </a:pPr>
+            <a:r>
+              <a:rPr sz="1000" i="1">
+                <a:solidFill>
+                  <a:srgbClr val="6B7685"/>
+                </a:solidFill>
+                <a:latin typeface="Arial"/>
+              </a:rPr>
+              <a:t>29 / 36</a:t>
             </a:r>
           </a:p>
         </p:txBody>
@@ -34140,7 +37931,18 @@
                 </a:solidFill>
                 <a:latin typeface="Arial"/>
               </a:rPr>
-              <a:t>Иллюстрация принципа (Gartner, McKinsey подтверждают похожие цифры).</a:t>
+              <a:t>Иллюстрация принципа (Gartner, McKinsey подтверждают похожие цифры). </a:t>
+            </a:r>
+            <a:r>
+              <a:rPr sz="572" baseline="30000" b="0" i="1">
+                <a:latin typeface="Arial"/>
+                <a:cs typeface="Arial"/>
+                <a:ea typeface="Arial"/>
+                <a:solidFill>
+                  <a:srgbClr val="1C7293"/>
+                </a:solidFill>
+              </a:rPr>
+              <a:t>[1]</a:t>
             </a:r>
           </a:p>
         </p:txBody>
@@ -34268,7 +38070,18 @@
               </a:rPr>
               <a:t>Завтра — почти везде.
 Сегодня — почти никто.
-Курс — про этот разрыв.</a:t>
+Курс — про этот разрыв. </a:t>
+            </a:r>
+            <a:r>
+              <a:rPr sz="1144" baseline="30000" b="0" i="1">
+                <a:latin typeface="Arial"/>
+                <a:cs typeface="Arial"/>
+                <a:ea typeface="Arial"/>
+                <a:solidFill>
+                  <a:srgbClr val="1C7293"/>
+                </a:solidFill>
+              </a:rPr>
+              <a:t>[2]</a:t>
             </a:r>
           </a:p>
         </p:txBody>
@@ -34349,6 +38162,122 @@
               <a:t>Где AI работает,
 где — нет,
 и как это понять?</a:t>
+            </a:r>
+          </a:p>
+        </p:txBody>
+      </p:sp>
+      <p:sp>
+        <p:nvSpPr>
+          <p:cNvPr id="15" name="TextBox 14"/>
+          <p:cNvSpPr txBox="1"/>
+          <p:nvPr/>
+        </p:nvSpPr>
+        <p:spPr>
+          <a:xfrm>
+            <a:off x="502920" y="6455664"/>
+            <a:ext cx="11201400" cy="292608"/>
+          </a:xfrm>
+          <a:prstGeom prst="rect">
+            <a:avLst/>
+          </a:prstGeom>
+          <a:noFill/>
+        </p:spPr>
+        <p:txBody>
+          <a:bodyPr wrap="square" lIns="0" rIns="0" tIns="0" bIns="0" anchor="t">
+            <a:spAutoFit/>
+          </a:bodyPr>
+          <a:lstStyle/>
+          <a:p>
+            <a:pPr algn="l">
+              <a:lnSpc>
+                <a:spcPct val="102000"/>
+              </a:lnSpc>
+            </a:pPr>
+            <a:r>
+              <a:rPr sz="850" b="1" i="1">
+                <a:solidFill>
+                  <a:srgbClr val="065A82"/>
+                </a:solidFill>
+                <a:latin typeface="Arial"/>
+              </a:rPr>
+              <a:t>[1] </a:t>
+            </a:r>
+            <a:r>
+              <a:rPr sz="850" i="1">
+                <a:solidFill>
+                  <a:srgbClr val="1C7293"/>
+                </a:solidFill>
+                <a:latin typeface="Arial"/>
+                <a:hlinkClick r:id="rId2"/>
+              </a:rPr>
+              <a:t>Gartner — пресс-релиз (окт 2024)</a:t>
+            </a:r>
+            <a:r>
+              <a:rPr sz="850" i="1">
+                <a:solidFill>
+                  <a:srgbClr val="1C7293"/>
+                </a:solidFill>
+                <a:latin typeface="Arial"/>
+              </a:rPr>
+              <a:t>   ·   </a:t>
+            </a:r>
+            <a:r>
+              <a:rPr sz="850" b="1" i="1">
+                <a:solidFill>
+                  <a:srgbClr val="065A82"/>
+                </a:solidFill>
+                <a:latin typeface="Arial"/>
+              </a:rPr>
+              <a:t>[2] </a:t>
+            </a:r>
+            <a:r>
+              <a:rPr sz="850" i="1">
+                <a:solidFill>
+                  <a:srgbClr val="1C7293"/>
+                </a:solidFill>
+                <a:latin typeface="Arial"/>
+                <a:hlinkClick r:id="rId3"/>
+              </a:rPr>
+              <a:t>Vedomosti / Intellectual Analytics (мар 2026)</a:t>
+            </a:r>
+          </a:p>
+        </p:txBody>
+      </p:sp>
+      <p:sp>
+        <p:nvSpPr>
+          <p:cNvPr id="16" name="TextBox 15"/>
+          <p:cNvSpPr txBox="1"/>
+          <p:nvPr/>
+        </p:nvSpPr>
+        <p:spPr>
+          <a:xfrm>
+            <a:off x="11274552" y="6547104"/>
+            <a:ext cx="868680" cy="256032"/>
+          </a:xfrm>
+          <a:prstGeom prst="rect">
+            <a:avLst/>
+          </a:prstGeom>
+          <a:noFill/>
+        </p:spPr>
+        <p:txBody>
+          <a:bodyPr wrap="none" lIns="0" rIns="0" tIns="0" bIns="0">
+            <a:spAutoFit/>
+          </a:bodyPr>
+          <a:lstStyle/>
+          <a:p>
+            <a:pPr algn="r">
+              <a:lnSpc>
+                <a:spcPct val="100000"/>
+              </a:lnSpc>
+            </a:pPr>
+            <a:r>
+              <a:rPr sz="1000" i="1">
+                <a:solidFill>
+                  <a:srgbClr val="6B7685"/>
+                </a:solidFill>
+                <a:latin typeface="Arial"/>
+              </a:rPr>
+              <a:t>3 / 36</a:t>
             </a:r>
           </a:p>
         </p:txBody>
@@ -34405,7 +38334,40 @@
                 </a:solidFill>
                 <a:latin typeface="Arial"/>
               </a:rPr>
-              <a:t>Прогнозы AGI — 4 спикера, 4 разных стимула.</a:t>
+              <a:t>Прогнозы AGI — 4 спикера, 4 разных стимула. </a:t>
+            </a:r>
+            <a:r>
+              <a:rPr sz="1352" baseline="30000" b="0" i="1">
+                <a:latin typeface="Arial"/>
+                <a:cs typeface="Arial"/>
+                <a:ea typeface="Arial"/>
+                <a:solidFill>
+                  <a:srgbClr val="1C7293"/>
+                </a:solidFill>
+              </a:rPr>
+              <a:t>[1]</a:t>
+            </a:r>
+            <a:r>
+              <a:rPr sz="2600" b="1" i="0">
+                <a:latin typeface="Arial"/>
+                <a:cs typeface="Arial"/>
+                <a:ea typeface="Arial"/>
+                <a:solidFill>
+                  <a:srgbClr val="21295C"/>
+                </a:solidFill>
+              </a:rPr>
+              <a:t> </a:t>
+            </a:r>
+            <a:r>
+              <a:rPr sz="1352" baseline="30000" b="0" i="1">
+                <a:latin typeface="Arial"/>
+                <a:cs typeface="Arial"/>
+                <a:ea typeface="Arial"/>
+                <a:solidFill>
+                  <a:srgbClr val="1C7293"/>
+                </a:solidFill>
+              </a:rPr>
+              <a:t>[2]</a:t>
             </a:r>
           </a:p>
         </p:txBody>
@@ -35416,6 +39378,122 @@
                 <a:latin typeface="Arial"/>
               </a:rPr>
               <a:t>Раунд $1B (март 2026) на альтернативный путь</a:t>
+            </a:r>
+          </a:p>
+        </p:txBody>
+      </p:sp>
+      <p:sp>
+        <p:nvSpPr>
+          <p:cNvPr id="28" name="TextBox 27"/>
+          <p:cNvSpPr txBox="1"/>
+          <p:nvPr/>
+        </p:nvSpPr>
+        <p:spPr>
+          <a:xfrm>
+            <a:off x="502920" y="6455664"/>
+            <a:ext cx="11201400" cy="292608"/>
+          </a:xfrm>
+          <a:prstGeom prst="rect">
+            <a:avLst/>
+          </a:prstGeom>
+          <a:noFill/>
+        </p:spPr>
+        <p:txBody>
+          <a:bodyPr wrap="square" lIns="0" rIns="0" tIns="0" bIns="0" anchor="t">
+            <a:spAutoFit/>
+          </a:bodyPr>
+          <a:lstStyle/>
+          <a:p>
+            <a:pPr algn="l">
+              <a:lnSpc>
+                <a:spcPct val="102000"/>
+              </a:lnSpc>
+            </a:pPr>
+            <a:r>
+              <a:rPr sz="850" b="1" i="1">
+                <a:solidFill>
+                  <a:srgbClr val="065A82"/>
+                </a:solidFill>
+                <a:latin typeface="Arial"/>
+              </a:rPr>
+              <a:t>[1] </a:t>
+            </a:r>
+            <a:r>
+              <a:rPr sz="850" i="1">
+                <a:solidFill>
+                  <a:srgbClr val="1C7293"/>
+                </a:solidFill>
+                <a:latin typeface="Arial"/>
+                <a:hlinkClick r:id="rId2"/>
+              </a:rPr>
+              <a:t>Searle — Minds, Brains, and Programs (1980)</a:t>
+            </a:r>
+            <a:r>
+              <a:rPr sz="850" i="1">
+                <a:solidFill>
+                  <a:srgbClr val="1C7293"/>
+                </a:solidFill>
+                <a:latin typeface="Arial"/>
+              </a:rPr>
+              <a:t>   ·   </a:t>
+            </a:r>
+            <a:r>
+              <a:rPr sz="850" b="1" i="1">
+                <a:solidFill>
+                  <a:srgbClr val="065A82"/>
+                </a:solidFill>
+                <a:latin typeface="Arial"/>
+              </a:rPr>
+              <a:t>[2] </a:t>
+            </a:r>
+            <a:r>
+              <a:rPr sz="850" i="1">
+                <a:solidFill>
+                  <a:srgbClr val="1C7293"/>
+                </a:solidFill>
+                <a:latin typeface="Arial"/>
+                <a:hlinkClick r:id="rId3"/>
+              </a:rPr>
+              <a:t>Bostrom — Superintelligence (2014)</a:t>
+            </a:r>
+          </a:p>
+        </p:txBody>
+      </p:sp>
+      <p:sp>
+        <p:nvSpPr>
+          <p:cNvPr id="29" name="TextBox 28"/>
+          <p:cNvSpPr txBox="1"/>
+          <p:nvPr/>
+        </p:nvSpPr>
+        <p:spPr>
+          <a:xfrm>
+            <a:off x="11274552" y="6547104"/>
+            <a:ext cx="868680" cy="256032"/>
+          </a:xfrm>
+          <a:prstGeom prst="rect">
+            <a:avLst/>
+          </a:prstGeom>
+          <a:noFill/>
+        </p:spPr>
+        <p:txBody>
+          <a:bodyPr wrap="none" lIns="0" rIns="0" tIns="0" bIns="0">
+            <a:spAutoFit/>
+          </a:bodyPr>
+          <a:lstStyle/>
+          <a:p>
+            <a:pPr algn="r">
+              <a:lnSpc>
+                <a:spcPct val="100000"/>
+              </a:lnSpc>
+            </a:pPr>
+            <a:r>
+              <a:rPr sz="1000" i="1">
+                <a:solidFill>
+                  <a:srgbClr val="6B7685"/>
+                </a:solidFill>
+                <a:latin typeface="Arial"/>
+              </a:rPr>
+              <a:t>30 / 36</a:t>
             </a:r>
           </a:p>
         </p:txBody>
@@ -36523,6 +40601,45 @@
           </a:p>
         </p:txBody>
       </p:sp>
+      <p:sp>
+        <p:nvSpPr>
+          <p:cNvPr id="28" name="TextBox 27"/>
+          <p:cNvSpPr txBox="1"/>
+          <p:nvPr/>
+        </p:nvSpPr>
+        <p:spPr>
+          <a:xfrm>
+            <a:off x="11274552" y="6547104"/>
+            <a:ext cx="868680" cy="256032"/>
+          </a:xfrm>
+          <a:prstGeom prst="rect">
+            <a:avLst/>
+          </a:prstGeom>
+          <a:noFill/>
+        </p:spPr>
+        <p:txBody>
+          <a:bodyPr wrap="none" lIns="0" rIns="0" tIns="0" bIns="0">
+            <a:spAutoFit/>
+          </a:bodyPr>
+          <a:lstStyle/>
+          <a:p>
+            <a:pPr algn="r">
+              <a:lnSpc>
+                <a:spcPct val="100000"/>
+              </a:lnSpc>
+            </a:pPr>
+            <a:r>
+              <a:rPr sz="1000" i="1">
+                <a:solidFill>
+                  <a:srgbClr val="6B7685"/>
+                </a:solidFill>
+                <a:latin typeface="Arial"/>
+              </a:rPr>
+              <a:t>31 / 36</a:t>
+            </a:r>
+          </a:p>
+        </p:txBody>
+      </p:sp>
     </p:spTree>
   </p:cSld>
   <p:clrMapOvr>
@@ -37165,6 +41282,45 @@
           </a:p>
         </p:txBody>
       </p:sp>
+      <p:sp>
+        <p:nvSpPr>
+          <p:cNvPr id="17" name="TextBox 16"/>
+          <p:cNvSpPr txBox="1"/>
+          <p:nvPr/>
+        </p:nvSpPr>
+        <p:spPr>
+          <a:xfrm>
+            <a:off x="11274552" y="6547104"/>
+            <a:ext cx="868680" cy="256032"/>
+          </a:xfrm>
+          <a:prstGeom prst="rect">
+            <a:avLst/>
+          </a:prstGeom>
+          <a:noFill/>
+        </p:spPr>
+        <p:txBody>
+          <a:bodyPr wrap="none" lIns="0" rIns="0" tIns="0" bIns="0">
+            <a:spAutoFit/>
+          </a:bodyPr>
+          <a:lstStyle/>
+          <a:p>
+            <a:pPr algn="r">
+              <a:lnSpc>
+                <a:spcPct val="100000"/>
+              </a:lnSpc>
+            </a:pPr>
+            <a:r>
+              <a:rPr sz="1000" i="1">
+                <a:solidFill>
+                  <a:srgbClr val="6B7685"/>
+                </a:solidFill>
+                <a:latin typeface="Arial"/>
+              </a:rPr>
+              <a:t>32 / 36</a:t>
+            </a:r>
+          </a:p>
+        </p:txBody>
+      </p:sp>
     </p:spTree>
   </p:cSld>
   <p:clrMapOvr>
@@ -38651,6 +42807,45 @@
                 <a:latin typeface="Arial"/>
               </a:rPr>
               <a:t>◆ — рубежные контроли РК1/РК2/РК3, по завершении каждого из первых трёх модулей.</a:t>
+            </a:r>
+          </a:p>
+        </p:txBody>
+      </p:sp>
+      <p:sp>
+        <p:nvSpPr>
+          <p:cNvPr id="38" name="TextBox 37"/>
+          <p:cNvSpPr txBox="1"/>
+          <p:nvPr/>
+        </p:nvSpPr>
+        <p:spPr>
+          <a:xfrm>
+            <a:off x="11274552" y="6547104"/>
+            <a:ext cx="868680" cy="256032"/>
+          </a:xfrm>
+          <a:prstGeom prst="rect">
+            <a:avLst/>
+          </a:prstGeom>
+          <a:noFill/>
+        </p:spPr>
+        <p:txBody>
+          <a:bodyPr wrap="none" lIns="0" rIns="0" tIns="0" bIns="0">
+            <a:spAutoFit/>
+          </a:bodyPr>
+          <a:lstStyle/>
+          <a:p>
+            <a:pPr algn="r">
+              <a:lnSpc>
+                <a:spcPct val="100000"/>
+              </a:lnSpc>
+            </a:pPr>
+            <a:r>
+              <a:rPr sz="1000" i="1">
+                <a:solidFill>
+                  <a:srgbClr val="6B7685"/>
+                </a:solidFill>
+                <a:latin typeface="Arial"/>
+              </a:rPr>
+              <a:t>33 / 36</a:t>
             </a:r>
           </a:p>
         </p:txBody>
@@ -38763,7 +42958,7 @@
                 </a:solidFill>
                 <a:latin typeface="Arial"/>
               </a:rPr>
-              <a:t>  =  40 </a:t>
+              <a:t>  =  10 </a:t>
             </a:r>
             <a:r>
               <a:rPr sz="1400" b="0" i="1">
@@ -38772,25 +42967,25 @@
                 </a:solidFill>
                 <a:latin typeface="Arial"/>
               </a:rPr>
+              <a:t>(посещаемость)</a:t>
+            </a:r>
+            <a:r>
+              <a:rPr sz="3000" b="1" i="0">
+                <a:solidFill>
+                  <a:srgbClr val="21295C"/>
+                </a:solidFill>
+                <a:latin typeface="Arial"/>
+              </a:rPr>
+              <a:t>  +  30 </a:t>
+            </a:r>
+            <a:r>
+              <a:rPr sz="1400" b="0" i="1">
+                <a:solidFill>
+                  <a:srgbClr val="6B7685"/>
+                </a:solidFill>
+                <a:latin typeface="Arial"/>
+              </a:rPr>
               <a:t>(экзамен)</a:t>
-            </a:r>
-            <a:r>
-              <a:rPr sz="3000" b="1" i="0">
-                <a:solidFill>
-                  <a:srgbClr val="21295C"/>
-                </a:solidFill>
-                <a:latin typeface="Arial"/>
-              </a:rPr>
-              <a:t/>
-            </a:r>
-            <a:r>
-              <a:rPr sz="1400" b="0" i="1">
-                <a:solidFill>
-                  <a:srgbClr val="6B7685"/>
-                </a:solidFill>
-                <a:latin typeface="Arial"/>
-              </a:rPr>
-              <a:t/>
             </a:r>
             <a:r>
               <a:rPr sz="3000" b="1" i="0">
@@ -38848,6 +43043,45 @@
                 <a:latin typeface="Arial"/>
               </a:rPr>
               <a:t>Рубежные контроли — по завершении каждого из первых трёх модулей.</a:t>
+            </a:r>
+          </a:p>
+        </p:txBody>
+      </p:sp>
+      <p:sp>
+        <p:nvSpPr>
+          <p:cNvPr id="5" name="TextBox 4"/>
+          <p:cNvSpPr txBox="1"/>
+          <p:nvPr/>
+        </p:nvSpPr>
+        <p:spPr>
+          <a:xfrm>
+            <a:off x="11274552" y="6547104"/>
+            <a:ext cx="868680" cy="256032"/>
+          </a:xfrm>
+          <a:prstGeom prst="rect">
+            <a:avLst/>
+          </a:prstGeom>
+          <a:noFill/>
+        </p:spPr>
+        <p:txBody>
+          <a:bodyPr wrap="none" lIns="0" rIns="0" tIns="0" bIns="0">
+            <a:spAutoFit/>
+          </a:bodyPr>
+          <a:lstStyle/>
+          <a:p>
+            <a:pPr algn="r">
+              <a:lnSpc>
+                <a:spcPct val="100000"/>
+              </a:lnSpc>
+            </a:pPr>
+            <a:r>
+              <a:rPr sz="1000" i="1">
+                <a:solidFill>
+                  <a:srgbClr val="6B7685"/>
+                </a:solidFill>
+                <a:latin typeface="Arial"/>
+              </a:rPr>
+              <a:t>34 / 36</a:t>
             </a:r>
           </a:p>
         </p:txBody>
@@ -39544,6 +43778,45 @@
                 <a:latin typeface="Arial"/>
               </a:rPr>
               <a:t>Эти 4 концепта объясняют поведение всех современных LLM — от ChatGPT до DeepSeek.</a:t>
+            </a:r>
+          </a:p>
+        </p:txBody>
+      </p:sp>
+      <p:sp>
+        <p:nvSpPr>
+          <p:cNvPr id="20" name="TextBox 19"/>
+          <p:cNvSpPr txBox="1"/>
+          <p:nvPr/>
+        </p:nvSpPr>
+        <p:spPr>
+          <a:xfrm>
+            <a:off x="11274552" y="6547104"/>
+            <a:ext cx="868680" cy="256032"/>
+          </a:xfrm>
+          <a:prstGeom prst="rect">
+            <a:avLst/>
+          </a:prstGeom>
+          <a:noFill/>
+        </p:spPr>
+        <p:txBody>
+          <a:bodyPr wrap="none" lIns="0" rIns="0" tIns="0" bIns="0">
+            <a:spAutoFit/>
+          </a:bodyPr>
+          <a:lstStyle/>
+          <a:p>
+            <a:pPr algn="r">
+              <a:lnSpc>
+                <a:spcPct val="100000"/>
+              </a:lnSpc>
+            </a:pPr>
+            <a:r>
+              <a:rPr sz="1000" i="1">
+                <a:solidFill>
+                  <a:srgbClr val="6B7685"/>
+                </a:solidFill>
+                <a:latin typeface="Arial"/>
+              </a:rPr>
+              <a:t>35 / 36</a:t>
             </a:r>
           </a:p>
         </p:txBody>
@@ -39654,1009 +43927,39 @@
       </p:sp>
       <p:sp>
         <p:nvSpPr>
-          <p:cNvPr id="4" name="Rounded Rectangle 3"/>
-          <p:cNvSpPr/>
-          <p:nvPr/>
-        </p:nvSpPr>
-        <p:spPr>
-          <a:xfrm>
-            <a:off x="8869680" y="4160520"/>
-            <a:ext cx="2834640" cy="2377440"/>
-          </a:xfrm>
-          <a:prstGeom prst="roundRect">
-            <a:avLst>
-              <a:gd name="adj" fmla="val 12820"/>
-            </a:avLst>
-          </a:prstGeom>
-          <a:solidFill>
-            <a:srgbClr val="FFFFFF"/>
-          </a:solidFill>
-          <a:ln w="20320">
-            <a:solidFill>
-              <a:srgbClr val="1C7293"/>
-            </a:solidFill>
-          </a:ln>
-          <a:effectLst/>
-        </p:spPr>
-        <p:style>
-          <a:lnRef idx="1">
-            <a:schemeClr val="accent1"/>
-          </a:lnRef>
-          <a:fillRef idx="3">
-            <a:schemeClr val="accent1"/>
-          </a:fillRef>
-          <a:effectRef idx="2">
-            <a:schemeClr val="accent1"/>
-          </a:effectRef>
-          <a:fontRef idx="minor">
-            <a:schemeClr val="lt1"/>
-          </a:fontRef>
-        </p:style>
-        <p:txBody>
-          <a:bodyPr rtlCol="0" anchor="ctr"/>
-          <a:lstStyle/>
-          <a:p>
-            <a:pPr algn="ctr"/>
-          </a:p>
-        </p:txBody>
-      </p:sp>
-      <p:pic>
-        <p:nvPicPr>
-          <p:cNvPr id="5" name="Picture 4" descr="max-qr.png"/>
-          <p:cNvPicPr>
-            <a:picLocks noChangeAspect="1"/>
-          </p:cNvPicPr>
-          <p:nvPr/>
-        </p:nvPicPr>
-        <p:blipFill>
-          <a:blip r:embed="rId3"/>
-          <a:stretch>
-            <a:fillRect/>
-          </a:stretch>
-        </p:blipFill>
-        <p:spPr>
-          <a:xfrm>
-            <a:off x="9578340" y="4361688"/>
-            <a:ext cx="1417320" cy="1417320"/>
-          </a:xfrm>
-          <a:prstGeom prst="rect">
-            <a:avLst/>
-          </a:prstGeom>
-        </p:spPr>
-      </p:pic>
-      <p:sp>
-        <p:nvSpPr>
-          <p:cNvPr id="6" name="TextBox 5"/>
-          <p:cNvSpPr txBox="1"/>
-          <p:nvPr/>
-        </p:nvSpPr>
-        <p:spPr>
-          <a:xfrm>
-            <a:off x="9006840" y="5861304"/>
-            <a:ext cx="2560320" cy="292608"/>
-          </a:xfrm>
-          <a:prstGeom prst="rect">
-            <a:avLst/>
-          </a:prstGeom>
-          <a:noFill/>
-        </p:spPr>
-        <p:txBody>
-          <a:bodyPr wrap="square" lIns="0" rIns="0" tIns="0" bIns="0" anchor="t">
-            <a:spAutoFit/>
-          </a:bodyPr>
-          <a:lstStyle/>
-          <a:p>
-            <a:pPr algn="ctr">
-              <a:lnSpc>
-                <a:spcPct val="115000"/>
-              </a:lnSpc>
-            </a:pPr>
-            <a:r>
-              <a:rPr sz="1300" b="1" i="0">
-                <a:solidFill>
-                  <a:srgbClr val="21295C"/>
-                </a:solidFill>
-                <a:latin typeface="Arial"/>
-              </a:rPr>
-              <a:t>Чат курса в MAX</a:t>
-            </a:r>
-          </a:p>
-        </p:txBody>
-      </p:sp>
-      <p:sp>
-        <p:nvSpPr>
-          <p:cNvPr id="7" name="TextBox 6"/>
-          <p:cNvSpPr txBox="1"/>
-          <p:nvPr/>
-        </p:nvSpPr>
-        <p:spPr>
-          <a:xfrm>
-            <a:off x="8979407" y="6135624"/>
-            <a:ext cx="2615184" cy="365760"/>
-          </a:xfrm>
-          <a:prstGeom prst="rect">
-            <a:avLst/>
-          </a:prstGeom>
-          <a:noFill/>
-        </p:spPr>
-        <p:txBody>
-          <a:bodyPr wrap="square" lIns="0" rIns="0" tIns="0" bIns="0" anchor="t">
-            <a:spAutoFit/>
-          </a:bodyPr>
-          <a:lstStyle/>
-          <a:p>
-            <a:pPr algn="ctr">
-              <a:lnSpc>
-                <a:spcPct val="115000"/>
-              </a:lnSpc>
-            </a:pPr>
-            <a:r>
-              <a:rPr sz="950" b="0" i="0">
-                <a:solidFill>
-                  <a:srgbClr val="065A82"/>
-                </a:solidFill>
-                <a:latin typeface="Arial"/>
-              </a:rPr>
-              <a:t>max.ru/join/sHoHlhI4jvW…</a:t>
-            </a:r>
-          </a:p>
-        </p:txBody>
-      </p:sp>
-    </p:spTree>
-  </p:cSld>
-  <p:clrMapOvr>
-    <a:masterClrMapping/>
-  </p:clrMapOvr>
-</p:sld>
-</file>
-
-<file path=ppt/slides/slide37.xml><?xml version="1.0" encoding="utf-8"?>
-<p:sld xmlns:a="http://schemas.openxmlformats.org/drawingml/2006/main" xmlns:p="http://schemas.openxmlformats.org/presentationml/2006/main" xmlns:r="http://schemas.openxmlformats.org/officeDocument/2006/relationships">
-  <p:cSld>
-    <p:bg>
-      <p:bgPr>
-        <a:solidFill>
-          <a:srgbClr val="FFFFFF"/>
-        </a:solidFill>
-        <a:effectLst/>
-      </p:bgPr>
-    </p:bg>
-    <p:spTree>
-      <p:nvGrpSpPr>
-        <p:cNvPr id="1" name=""/>
-        <p:cNvGrpSpPr/>
-        <p:nvPr/>
-      </p:nvGrpSpPr>
-      <p:grpSpPr/>
-      <p:sp>
-        <p:nvSpPr>
-          <p:cNvPr id="2" name="Title 1"/>
-          <p:cNvSpPr>
-            <a:spLocks noGrp="1"/>
-          </p:cNvSpPr>
-          <p:nvPr>
-            <p:ph type="title"/>
-          </p:nvPr>
-        </p:nvSpPr>
-        <p:spPr/>
-        <p:txBody>
-          <a:bodyPr/>
-          <a:lstStyle/>
-          <a:p/>
-        </p:txBody>
-      </p:sp>
-      <p:sp>
-        <p:nvSpPr>
-          <p:cNvPr id="3" name="TextBox 2"/>
-          <p:cNvSpPr txBox="1"/>
-          <p:nvPr/>
-        </p:nvSpPr>
-        <p:spPr>
-          <a:xfrm>
-            <a:off x="502920" y="411480"/>
-            <a:ext cx="11247120" cy="731520"/>
-          </a:xfrm>
-          <a:prstGeom prst="rect">
-            <a:avLst/>
-          </a:prstGeom>
-          <a:noFill/>
-        </p:spPr>
-        <p:txBody>
-          <a:bodyPr wrap="square" lIns="0" rIns="0" tIns="0" bIns="0" anchor="t">
-            <a:spAutoFit/>
-          </a:bodyPr>
-          <a:lstStyle/>
-          <a:p>
-            <a:pPr algn="l">
-              <a:lnSpc>
-                <a:spcPct val="115000"/>
-              </a:lnSpc>
-            </a:pPr>
-            <a:r>
-              <a:rPr sz="2800" b="1" i="0">
-                <a:solidFill>
-                  <a:srgbClr val="21295C"/>
-                </a:solidFill>
-                <a:latin typeface="Arial"/>
-              </a:rPr>
-              <a:t>Чат курса в MAX — всё важное в одном месте</a:t>
-            </a:r>
-          </a:p>
-        </p:txBody>
-      </p:sp>
-      <p:sp>
-        <p:nvSpPr>
           <p:cNvPr id="4" name="TextBox 3"/>
           <p:cNvSpPr txBox="1"/>
           <p:nvPr/>
         </p:nvSpPr>
         <p:spPr>
           <a:xfrm>
-            <a:off x="502920" y="1188720"/>
-            <a:ext cx="11247120" cy="457200"/>
-          </a:xfrm>
-          <a:prstGeom prst="rect">
-            <a:avLst/>
-          </a:prstGeom>
-          <a:noFill/>
-        </p:spPr>
-        <p:txBody>
-          <a:bodyPr wrap="square" lIns="0" rIns="0" tIns="0" bIns="0" anchor="t">
-            <a:spAutoFit/>
-          </a:bodyPr>
-          <a:lstStyle/>
-          <a:p>
-            <a:pPr algn="l">
-              <a:lnSpc>
-                <a:spcPct val="115000"/>
-              </a:lnSpc>
-            </a:pPr>
-            <a:r>
-              <a:rPr sz="1700" b="1" i="0">
-                <a:solidFill>
-                  <a:srgbClr val="028090"/>
-                </a:solidFill>
-                <a:latin typeface="Arial"/>
-              </a:rPr>
-              <a:t>Чат группы: «Отраслевое использование ИИ 2026»</a:t>
-            </a:r>
-          </a:p>
-        </p:txBody>
-      </p:sp>
-      <p:sp>
-        <p:nvSpPr>
-          <p:cNvPr id="5" name="Rounded Rectangle 4"/>
-          <p:cNvSpPr/>
-          <p:nvPr/>
-        </p:nvSpPr>
-        <p:spPr>
-          <a:xfrm>
-            <a:off x="822960" y="1783080"/>
-            <a:ext cx="3657600" cy="3977639"/>
-          </a:xfrm>
-          <a:prstGeom prst="roundRect">
-            <a:avLst>
-              <a:gd name="adj" fmla="val 8333"/>
-            </a:avLst>
-          </a:prstGeom>
-          <a:solidFill>
-            <a:srgbClr val="FFFFFF"/>
-          </a:solidFill>
-          <a:ln w="22860">
-            <a:solidFill>
-              <a:srgbClr val="1C7293"/>
-            </a:solidFill>
-          </a:ln>
-          <a:effectLst/>
-        </p:spPr>
-        <p:style>
-          <a:lnRef idx="1">
-            <a:schemeClr val="accent1"/>
-          </a:lnRef>
-          <a:fillRef idx="3">
-            <a:schemeClr val="accent1"/>
-          </a:fillRef>
-          <a:effectRef idx="2">
-            <a:schemeClr val="accent1"/>
-          </a:effectRef>
-          <a:fontRef idx="minor">
-            <a:schemeClr val="lt1"/>
-          </a:fontRef>
-        </p:style>
-        <p:txBody>
-          <a:bodyPr rtlCol="0" anchor="ctr"/>
-          <a:lstStyle/>
-          <a:p>
-            <a:pPr algn="ctr"/>
-          </a:p>
-        </p:txBody>
-      </p:sp>
-      <p:pic>
-        <p:nvPicPr>
-          <p:cNvPr id="6" name="Picture 5" descr="s04b-max-qr.png"/>
-          <p:cNvPicPr>
-            <a:picLocks noChangeAspect="1"/>
-          </p:cNvPicPr>
-          <p:nvPr/>
-        </p:nvPicPr>
-        <p:blipFill>
-          <a:blip r:embed="rId2"/>
-          <a:stretch>
-            <a:fillRect/>
-          </a:stretch>
-        </p:blipFill>
-        <p:spPr>
-          <a:xfrm>
-            <a:off x="1485900" y="2039112"/>
-            <a:ext cx="2331720" cy="2331720"/>
-          </a:xfrm>
-          <a:prstGeom prst="rect">
-            <a:avLst/>
-          </a:prstGeom>
-        </p:spPr>
-      </p:pic>
-      <p:sp>
-        <p:nvSpPr>
-          <p:cNvPr id="7" name="TextBox 6"/>
-          <p:cNvSpPr txBox="1"/>
-          <p:nvPr/>
-        </p:nvSpPr>
-        <p:spPr>
-          <a:xfrm>
-            <a:off x="1005840" y="4507992"/>
-            <a:ext cx="3291840" cy="365760"/>
-          </a:xfrm>
-          <a:prstGeom prst="rect">
-            <a:avLst/>
-          </a:prstGeom>
-          <a:noFill/>
-        </p:spPr>
-        <p:txBody>
-          <a:bodyPr wrap="square" lIns="0" rIns="0" tIns="0" bIns="0" anchor="t">
-            <a:spAutoFit/>
-          </a:bodyPr>
-          <a:lstStyle/>
-          <a:p>
-            <a:pPr algn="ctr">
-              <a:lnSpc>
-                <a:spcPct val="115000"/>
-              </a:lnSpc>
-            </a:pPr>
-            <a:r>
-              <a:rPr sz="1400" b="1" i="0">
-                <a:solidFill>
-                  <a:srgbClr val="21295C"/>
-                </a:solidFill>
-                <a:latin typeface="Arial"/>
-              </a:rPr>
-              <a:t>Отсканируйте камерой телефона</a:t>
-            </a:r>
-          </a:p>
-        </p:txBody>
-      </p:sp>
-      <p:sp>
-        <p:nvSpPr>
-          <p:cNvPr id="8" name="TextBox 7"/>
-          <p:cNvSpPr txBox="1"/>
-          <p:nvPr/>
-        </p:nvSpPr>
-        <p:spPr>
-          <a:xfrm>
-            <a:off x="960120" y="4928616"/>
-            <a:ext cx="3383280" cy="731520"/>
-          </a:xfrm>
-          <a:prstGeom prst="rect">
-            <a:avLst/>
-          </a:prstGeom>
-          <a:noFill/>
-        </p:spPr>
-        <p:txBody>
-          <a:bodyPr wrap="square" lIns="0" rIns="0" tIns="0" bIns="0" anchor="t">
-            <a:spAutoFit/>
-          </a:bodyPr>
-          <a:lstStyle/>
-          <a:p>
-            <a:pPr algn="ctr">
-              <a:lnSpc>
-                <a:spcPct val="112000"/>
-              </a:lnSpc>
-            </a:pPr>
-            <a:r>
-              <a:rPr sz="1000" b="0" i="0">
-                <a:solidFill>
-                  <a:srgbClr val="065A82"/>
-                </a:solidFill>
-                <a:latin typeface="Arial"/>
-              </a:rPr>
-              <a:t>max.ru/join/sHoHlhI4jvW_swcq5ZLowvz6G94m0IMhAwngxuxsEpI</a:t>
-            </a:r>
-          </a:p>
-        </p:txBody>
-      </p:sp>
-      <p:sp>
-        <p:nvSpPr>
-          <p:cNvPr id="9" name="Rounded Rectangle 8"/>
-          <p:cNvSpPr/>
-          <p:nvPr/>
-        </p:nvSpPr>
-        <p:spPr>
-          <a:xfrm>
-            <a:off x="4937760" y="1783080"/>
-            <a:ext cx="6766560" cy="1234440"/>
-          </a:xfrm>
-          <a:prstGeom prst="roundRect">
-            <a:avLst>
-              <a:gd name="adj" fmla="val 24691"/>
-            </a:avLst>
-          </a:prstGeom>
-          <a:solidFill>
-            <a:srgbClr val="F4F7FA"/>
-          </a:solidFill>
-          <a:ln w="19050">
-            <a:solidFill>
-              <a:srgbClr val="1C7293"/>
-            </a:solidFill>
-          </a:ln>
-          <a:effectLst/>
-        </p:spPr>
-        <p:style>
-          <a:lnRef idx="1">
-            <a:schemeClr val="accent1"/>
-          </a:lnRef>
-          <a:fillRef idx="3">
-            <a:schemeClr val="accent1"/>
-          </a:fillRef>
-          <a:effectRef idx="2">
-            <a:schemeClr val="accent1"/>
-          </a:effectRef>
-          <a:fontRef idx="minor">
-            <a:schemeClr val="lt1"/>
-          </a:fontRef>
-        </p:style>
-        <p:txBody>
-          <a:bodyPr rtlCol="0" anchor="ctr"/>
-          <a:lstStyle/>
-          <a:p>
-            <a:pPr algn="ctr"/>
-          </a:p>
-        </p:txBody>
-      </p:sp>
-      <p:sp>
-        <p:nvSpPr>
-          <p:cNvPr id="10" name="Rounded Rectangle 9"/>
-          <p:cNvSpPr/>
-          <p:nvPr/>
-        </p:nvSpPr>
-        <p:spPr>
-          <a:xfrm>
-            <a:off x="5157216" y="2057400"/>
-            <a:ext cx="566928" cy="566928"/>
-          </a:xfrm>
-          <a:prstGeom prst="roundRect">
-            <a:avLst>
-              <a:gd name="adj" fmla="val 26000"/>
-            </a:avLst>
-          </a:prstGeom>
-          <a:solidFill>
-            <a:srgbClr val="028090"/>
-          </a:solidFill>
-          <a:ln>
-            <a:noFill/>
-          </a:ln>
-          <a:effectLst/>
-        </p:spPr>
-        <p:style>
-          <a:lnRef idx="1">
-            <a:schemeClr val="accent1"/>
-          </a:lnRef>
-          <a:fillRef idx="3">
-            <a:schemeClr val="accent1"/>
-          </a:fillRef>
-          <a:effectRef idx="2">
-            <a:schemeClr val="accent1"/>
-          </a:effectRef>
-          <a:fontRef idx="minor">
-            <a:schemeClr val="lt1"/>
-          </a:fontRef>
-        </p:style>
-        <p:txBody>
-          <a:bodyPr rtlCol="0" anchor="ctr"/>
-          <a:lstStyle/>
-          <a:p>
-            <a:pPr algn="ctr"/>
-          </a:p>
-        </p:txBody>
-      </p:sp>
-      <p:pic>
-        <p:nvPicPr>
-          <p:cNvPr id="11" name="Picture 10" descr="bell-FFFFFF-64.png"/>
-          <p:cNvPicPr>
-            <a:picLocks noChangeAspect="1"/>
-          </p:cNvPicPr>
-          <p:nvPr/>
-        </p:nvPicPr>
-        <p:blipFill>
-          <a:blip r:embed="rId3"/>
-          <a:stretch>
-            <a:fillRect/>
-          </a:stretch>
-        </p:blipFill>
-        <p:spPr>
-          <a:xfrm>
-            <a:off x="5259263" y="2159447"/>
-            <a:ext cx="351495" cy="351495"/>
-          </a:xfrm>
-          <a:prstGeom prst="rect">
-            <a:avLst/>
-          </a:prstGeom>
-        </p:spPr>
-      </p:pic>
-      <p:sp>
-        <p:nvSpPr>
-          <p:cNvPr id="12" name="TextBox 11"/>
-          <p:cNvSpPr txBox="1"/>
-          <p:nvPr/>
-        </p:nvSpPr>
-        <p:spPr>
-          <a:xfrm>
-            <a:off x="5989320" y="2002536"/>
-            <a:ext cx="5486400" cy="365760"/>
-          </a:xfrm>
-          <a:prstGeom prst="rect">
-            <a:avLst/>
-          </a:prstGeom>
-          <a:noFill/>
-        </p:spPr>
-        <p:txBody>
-          <a:bodyPr wrap="square" lIns="0" rIns="0" tIns="0" bIns="0" anchor="t">
-            <a:spAutoFit/>
-          </a:bodyPr>
-          <a:lstStyle/>
-          <a:p>
-            <a:pPr algn="l">
-              <a:lnSpc>
-                <a:spcPct val="115000"/>
-              </a:lnSpc>
-            </a:pPr>
-            <a:r>
-              <a:rPr sz="1600" b="1" i="0">
-                <a:solidFill>
-                  <a:srgbClr val="21295C"/>
-                </a:solidFill>
-                <a:latin typeface="Arial"/>
-              </a:rPr>
-              <a:t>Объявления</a:t>
-            </a:r>
-          </a:p>
-        </p:txBody>
-      </p:sp>
-      <p:sp>
-        <p:nvSpPr>
-          <p:cNvPr id="13" name="TextBox 12"/>
-          <p:cNvSpPr txBox="1"/>
-          <p:nvPr/>
-        </p:nvSpPr>
-        <p:spPr>
-          <a:xfrm>
-            <a:off x="5989320" y="2404872"/>
-            <a:ext cx="5486400" cy="502920"/>
-          </a:xfrm>
-          <a:prstGeom prst="rect">
-            <a:avLst/>
-          </a:prstGeom>
-          <a:noFill/>
-        </p:spPr>
-        <p:txBody>
-          <a:bodyPr wrap="square" lIns="0" rIns="0" tIns="0" bIns="0" anchor="t">
-            <a:spAutoFit/>
-          </a:bodyPr>
-          <a:lstStyle/>
-          <a:p>
-            <a:pPr algn="l">
-              <a:lnSpc>
-                <a:spcPct val="112000"/>
-              </a:lnSpc>
-            </a:pPr>
-            <a:r>
-              <a:rPr sz="1250" b="0" i="0">
+            <a:off x="11274552" y="6547104"/>
+            <a:ext cx="868680" cy="256032"/>
+          </a:xfrm>
+          <a:prstGeom prst="rect">
+            <a:avLst/>
+          </a:prstGeom>
+          <a:noFill/>
+        </p:spPr>
+        <p:txBody>
+          <a:bodyPr wrap="none" lIns="0" rIns="0" tIns="0" bIns="0">
+            <a:spAutoFit/>
+          </a:bodyPr>
+          <a:lstStyle/>
+          <a:p>
+            <a:pPr algn="r">
+              <a:lnSpc>
+                <a:spcPct val="100000"/>
+              </a:lnSpc>
+            </a:pPr>
+            <a:r>
+              <a:rPr sz="1000" i="1">
                 <a:solidFill>
                   <a:srgbClr val="6B7685"/>
                 </a:solidFill>
                 <a:latin typeface="Arial"/>
               </a:rPr>
-              <a:t>Расписание, изменения, важные новости курса — в одном месте.</a:t>
-            </a:r>
-          </a:p>
-        </p:txBody>
-      </p:sp>
-      <p:sp>
-        <p:nvSpPr>
-          <p:cNvPr id="14" name="Rounded Rectangle 13"/>
-          <p:cNvSpPr/>
-          <p:nvPr/>
-        </p:nvSpPr>
-        <p:spPr>
-          <a:xfrm>
-            <a:off x="4937760" y="3154680"/>
-            <a:ext cx="6766560" cy="1234440"/>
-          </a:xfrm>
-          <a:prstGeom prst="roundRect">
-            <a:avLst>
-              <a:gd name="adj" fmla="val 24691"/>
-            </a:avLst>
-          </a:prstGeom>
-          <a:solidFill>
-            <a:srgbClr val="F4F7FA"/>
-          </a:solidFill>
-          <a:ln w="19050">
-            <a:solidFill>
-              <a:srgbClr val="1C7293"/>
-            </a:solidFill>
-          </a:ln>
-          <a:effectLst/>
-        </p:spPr>
-        <p:style>
-          <a:lnRef idx="1">
-            <a:schemeClr val="accent1"/>
-          </a:lnRef>
-          <a:fillRef idx="3">
-            <a:schemeClr val="accent1"/>
-          </a:fillRef>
-          <a:effectRef idx="2">
-            <a:schemeClr val="accent1"/>
-          </a:effectRef>
-          <a:fontRef idx="minor">
-            <a:schemeClr val="lt1"/>
-          </a:fontRef>
-        </p:style>
-        <p:txBody>
-          <a:bodyPr rtlCol="0" anchor="ctr"/>
-          <a:lstStyle/>
-          <a:p>
-            <a:pPr algn="ctr"/>
-          </a:p>
-        </p:txBody>
-      </p:sp>
-      <p:sp>
-        <p:nvSpPr>
-          <p:cNvPr id="15" name="Rounded Rectangle 14"/>
-          <p:cNvSpPr/>
-          <p:nvPr/>
-        </p:nvSpPr>
-        <p:spPr>
-          <a:xfrm>
-            <a:off x="5157216" y="3429000"/>
-            <a:ext cx="566928" cy="566928"/>
-          </a:xfrm>
-          <a:prstGeom prst="roundRect">
-            <a:avLst>
-              <a:gd name="adj" fmla="val 26000"/>
-            </a:avLst>
-          </a:prstGeom>
-          <a:solidFill>
-            <a:srgbClr val="028090"/>
-          </a:solidFill>
-          <a:ln>
-            <a:noFill/>
-          </a:ln>
-          <a:effectLst/>
-        </p:spPr>
-        <p:style>
-          <a:lnRef idx="1">
-            <a:schemeClr val="accent1"/>
-          </a:lnRef>
-          <a:fillRef idx="3">
-            <a:schemeClr val="accent1"/>
-          </a:fillRef>
-          <a:effectRef idx="2">
-            <a:schemeClr val="accent1"/>
-          </a:effectRef>
-          <a:fontRef idx="minor">
-            <a:schemeClr val="lt1"/>
-          </a:fontRef>
-        </p:style>
-        <p:txBody>
-          <a:bodyPr rtlCol="0" anchor="ctr"/>
-          <a:lstStyle/>
-          <a:p>
-            <a:pPr algn="ctr"/>
-          </a:p>
-        </p:txBody>
-      </p:sp>
-      <p:pic>
-        <p:nvPicPr>
-          <p:cNvPr id="16" name="Picture 15" descr="book-open-FFFFFF-64.png"/>
-          <p:cNvPicPr>
-            <a:picLocks noChangeAspect="1"/>
-          </p:cNvPicPr>
-          <p:nvPr/>
-        </p:nvPicPr>
-        <p:blipFill>
-          <a:blip r:embed="rId4"/>
-          <a:stretch>
-            <a:fillRect/>
-          </a:stretch>
-        </p:blipFill>
-        <p:spPr>
-          <a:xfrm>
-            <a:off x="5259263" y="3531047"/>
-            <a:ext cx="351495" cy="351495"/>
-          </a:xfrm>
-          <a:prstGeom prst="rect">
-            <a:avLst/>
-          </a:prstGeom>
-        </p:spPr>
-      </p:pic>
-      <p:sp>
-        <p:nvSpPr>
-          <p:cNvPr id="17" name="TextBox 16"/>
-          <p:cNvSpPr txBox="1"/>
-          <p:nvPr/>
-        </p:nvSpPr>
-        <p:spPr>
-          <a:xfrm>
-            <a:off x="5989320" y="3374136"/>
-            <a:ext cx="5486400" cy="365760"/>
-          </a:xfrm>
-          <a:prstGeom prst="rect">
-            <a:avLst/>
-          </a:prstGeom>
-          <a:noFill/>
-        </p:spPr>
-        <p:txBody>
-          <a:bodyPr wrap="square" lIns="0" rIns="0" tIns="0" bIns="0" anchor="t">
-            <a:spAutoFit/>
-          </a:bodyPr>
-          <a:lstStyle/>
-          <a:p>
-            <a:pPr algn="l">
-              <a:lnSpc>
-                <a:spcPct val="115000"/>
-              </a:lnSpc>
-            </a:pPr>
-            <a:r>
-              <a:rPr sz="1600" b="1" i="0">
-                <a:solidFill>
-                  <a:srgbClr val="21295C"/>
-                </a:solidFill>
-                <a:latin typeface="Arial"/>
-              </a:rPr>
-              <a:t>Материалы лекций и семинаров</a:t>
-            </a:r>
-          </a:p>
-        </p:txBody>
-      </p:sp>
-      <p:sp>
-        <p:nvSpPr>
-          <p:cNvPr id="18" name="TextBox 17"/>
-          <p:cNvSpPr txBox="1"/>
-          <p:nvPr/>
-        </p:nvSpPr>
-        <p:spPr>
-          <a:xfrm>
-            <a:off x="5989320" y="3776472"/>
-            <a:ext cx="5486400" cy="502920"/>
-          </a:xfrm>
-          <a:prstGeom prst="rect">
-            <a:avLst/>
-          </a:prstGeom>
-          <a:noFill/>
-        </p:spPr>
-        <p:txBody>
-          <a:bodyPr wrap="square" lIns="0" rIns="0" tIns="0" bIns="0" anchor="t">
-            <a:spAutoFit/>
-          </a:bodyPr>
-          <a:lstStyle/>
-          <a:p>
-            <a:pPr algn="l">
-              <a:lnSpc>
-                <a:spcPct val="112000"/>
-              </a:lnSpc>
-            </a:pPr>
-            <a:r>
-              <a:rPr sz="1250" b="0" i="0">
-                <a:solidFill>
-                  <a:srgbClr val="6B7685"/>
-                </a:solidFill>
-                <a:latin typeface="Arial"/>
-              </a:rPr>
-              <a:t>Слайды и материалы появляются в чате по мере проведения занятий.</a:t>
-            </a:r>
-          </a:p>
-        </p:txBody>
-      </p:sp>
-      <p:sp>
-        <p:nvSpPr>
-          <p:cNvPr id="19" name="Rounded Rectangle 18"/>
-          <p:cNvSpPr/>
-          <p:nvPr/>
-        </p:nvSpPr>
-        <p:spPr>
-          <a:xfrm>
-            <a:off x="4937760" y="4526280"/>
-            <a:ext cx="6766560" cy="1234440"/>
-          </a:xfrm>
-          <a:prstGeom prst="roundRect">
-            <a:avLst>
-              <a:gd name="adj" fmla="val 24691"/>
-            </a:avLst>
-          </a:prstGeom>
-          <a:solidFill>
-            <a:srgbClr val="F4F7FA"/>
-          </a:solidFill>
-          <a:ln w="19050">
-            <a:solidFill>
-              <a:srgbClr val="1C7293"/>
-            </a:solidFill>
-          </a:ln>
-          <a:effectLst/>
-        </p:spPr>
-        <p:style>
-          <a:lnRef idx="1">
-            <a:schemeClr val="accent1"/>
-          </a:lnRef>
-          <a:fillRef idx="3">
-            <a:schemeClr val="accent1"/>
-          </a:fillRef>
-          <a:effectRef idx="2">
-            <a:schemeClr val="accent1"/>
-          </a:effectRef>
-          <a:fontRef idx="minor">
-            <a:schemeClr val="lt1"/>
-          </a:fontRef>
-        </p:style>
-        <p:txBody>
-          <a:bodyPr rtlCol="0" anchor="ctr"/>
-          <a:lstStyle/>
-          <a:p>
-            <a:pPr algn="ctr"/>
-          </a:p>
-        </p:txBody>
-      </p:sp>
-      <p:sp>
-        <p:nvSpPr>
-          <p:cNvPr id="20" name="Rounded Rectangle 19"/>
-          <p:cNvSpPr/>
-          <p:nvPr/>
-        </p:nvSpPr>
-        <p:spPr>
-          <a:xfrm>
-            <a:off x="5157216" y="4800600"/>
-            <a:ext cx="566928" cy="566928"/>
-          </a:xfrm>
-          <a:prstGeom prst="roundRect">
-            <a:avLst>
-              <a:gd name="adj" fmla="val 26000"/>
-            </a:avLst>
-          </a:prstGeom>
-          <a:solidFill>
-            <a:srgbClr val="028090"/>
-          </a:solidFill>
-          <a:ln>
-            <a:noFill/>
-          </a:ln>
-          <a:effectLst/>
-        </p:spPr>
-        <p:style>
-          <a:lnRef idx="1">
-            <a:schemeClr val="accent1"/>
-          </a:lnRef>
-          <a:fillRef idx="3">
-            <a:schemeClr val="accent1"/>
-          </a:fillRef>
-          <a:effectRef idx="2">
-            <a:schemeClr val="accent1"/>
-          </a:effectRef>
-          <a:fontRef idx="minor">
-            <a:schemeClr val="lt1"/>
-          </a:fontRef>
-        </p:style>
-        <p:txBody>
-          <a:bodyPr rtlCol="0" anchor="ctr"/>
-          <a:lstStyle/>
-          <a:p>
-            <a:pPr algn="ctr"/>
-          </a:p>
-        </p:txBody>
-      </p:sp>
-      <p:pic>
-        <p:nvPicPr>
-          <p:cNvPr id="21" name="Picture 20" descr="message-square-quote-FFFFFF-64.png"/>
-          <p:cNvPicPr>
-            <a:picLocks noChangeAspect="1"/>
-          </p:cNvPicPr>
-          <p:nvPr/>
-        </p:nvPicPr>
-        <p:blipFill>
-          <a:blip r:embed="rId5"/>
-          <a:stretch>
-            <a:fillRect/>
-          </a:stretch>
-        </p:blipFill>
-        <p:spPr>
-          <a:xfrm>
-            <a:off x="5259263" y="4902647"/>
-            <a:ext cx="351495" cy="351495"/>
-          </a:xfrm>
-          <a:prstGeom prst="rect">
-            <a:avLst/>
-          </a:prstGeom>
-        </p:spPr>
-      </p:pic>
-      <p:sp>
-        <p:nvSpPr>
-          <p:cNvPr id="22" name="TextBox 21"/>
-          <p:cNvSpPr txBox="1"/>
-          <p:nvPr/>
-        </p:nvSpPr>
-        <p:spPr>
-          <a:xfrm>
-            <a:off x="5989320" y="4745736"/>
-            <a:ext cx="5486400" cy="365760"/>
-          </a:xfrm>
-          <a:prstGeom prst="rect">
-            <a:avLst/>
-          </a:prstGeom>
-          <a:noFill/>
-        </p:spPr>
-        <p:txBody>
-          <a:bodyPr wrap="square" lIns="0" rIns="0" tIns="0" bIns="0" anchor="t">
-            <a:spAutoFit/>
-          </a:bodyPr>
-          <a:lstStyle/>
-          <a:p>
-            <a:pPr algn="l">
-              <a:lnSpc>
-                <a:spcPct val="115000"/>
-              </a:lnSpc>
-            </a:pPr>
-            <a:r>
-              <a:rPr sz="1600" b="1" i="0">
-                <a:solidFill>
-                  <a:srgbClr val="21295C"/>
-                </a:solidFill>
-                <a:latin typeface="Arial"/>
-              </a:rPr>
-              <a:t>Вопросы между занятиями</a:t>
-            </a:r>
-          </a:p>
-        </p:txBody>
-      </p:sp>
-      <p:sp>
-        <p:nvSpPr>
-          <p:cNvPr id="23" name="TextBox 22"/>
-          <p:cNvSpPr txBox="1"/>
-          <p:nvPr/>
-        </p:nvSpPr>
-        <p:spPr>
-          <a:xfrm>
-            <a:off x="5989320" y="5148072"/>
-            <a:ext cx="5486400" cy="502920"/>
-          </a:xfrm>
-          <a:prstGeom prst="rect">
-            <a:avLst/>
-          </a:prstGeom>
-          <a:noFill/>
-        </p:spPr>
-        <p:txBody>
-          <a:bodyPr wrap="square" lIns="0" rIns="0" tIns="0" bIns="0" anchor="t">
-            <a:spAutoFit/>
-          </a:bodyPr>
-          <a:lstStyle/>
-          <a:p>
-            <a:pPr algn="l">
-              <a:lnSpc>
-                <a:spcPct val="112000"/>
-              </a:lnSpc>
-            </a:pPr>
-            <a:r>
-              <a:rPr sz="1250" b="0" i="0">
-                <a:solidFill>
-                  <a:srgbClr val="6B7685"/>
-                </a:solidFill>
-                <a:latin typeface="Arial"/>
-              </a:rPr>
-              <a:t>Можно задать вопрос по курсу и получить ответ, не дожидаясь пары.</a:t>
+              <a:t>36 / 36</a:t>
             </a:r>
           </a:p>
         </p:txBody>
@@ -40957,6 +44260,45 @@
           </a:p>
         </p:txBody>
       </p:sp>
+      <p:sp>
+        <p:nvSpPr>
+          <p:cNvPr id="9" name="TextBox 8"/>
+          <p:cNvSpPr txBox="1"/>
+          <p:nvPr/>
+        </p:nvSpPr>
+        <p:spPr>
+          <a:xfrm>
+            <a:off x="11274552" y="6547104"/>
+            <a:ext cx="868680" cy="256032"/>
+          </a:xfrm>
+          <a:prstGeom prst="rect">
+            <a:avLst/>
+          </a:prstGeom>
+          <a:noFill/>
+        </p:spPr>
+        <p:txBody>
+          <a:bodyPr wrap="none" lIns="0" rIns="0" tIns="0" bIns="0">
+            <a:spAutoFit/>
+          </a:bodyPr>
+          <a:lstStyle/>
+          <a:p>
+            <a:pPr algn="r">
+              <a:lnSpc>
+                <a:spcPct val="100000"/>
+              </a:lnSpc>
+            </a:pPr>
+            <a:r>
+              <a:rPr sz="1000" i="1">
+                <a:solidFill>
+                  <a:srgbClr val="6B7685"/>
+                </a:solidFill>
+                <a:latin typeface="Arial"/>
+              </a:rPr>
+              <a:t>4 / 36</a:t>
+            </a:r>
+          </a:p>
+        </p:txBody>
+      </p:sp>
     </p:spTree>
   </p:cSld>
   <p:clrMapOvr>
@@ -42287,6 +45629,45 @@
           </a:p>
         </p:txBody>
       </p:sp>
+      <p:sp>
+        <p:nvSpPr>
+          <p:cNvPr id="33" name="TextBox 32"/>
+          <p:cNvSpPr txBox="1"/>
+          <p:nvPr/>
+        </p:nvSpPr>
+        <p:spPr>
+          <a:xfrm>
+            <a:off x="11274552" y="6547104"/>
+            <a:ext cx="868680" cy="256032"/>
+          </a:xfrm>
+          <a:prstGeom prst="rect">
+            <a:avLst/>
+          </a:prstGeom>
+          <a:noFill/>
+        </p:spPr>
+        <p:txBody>
+          <a:bodyPr wrap="none" lIns="0" rIns="0" tIns="0" bIns="0">
+            <a:spAutoFit/>
+          </a:bodyPr>
+          <a:lstStyle/>
+          <a:p>
+            <a:pPr algn="r">
+              <a:lnSpc>
+                <a:spcPct val="100000"/>
+              </a:lnSpc>
+            </a:pPr>
+            <a:r>
+              <a:rPr sz="1000" i="1">
+                <a:solidFill>
+                  <a:srgbClr val="6B7685"/>
+                </a:solidFill>
+                <a:latin typeface="Arial"/>
+              </a:rPr>
+              <a:t>5 / 36</a:t>
+            </a:r>
+          </a:p>
+        </p:txBody>
+      </p:sp>
     </p:spTree>
   </p:cSld>
   <p:clrMapOvr>
@@ -43761,6 +47142,45 @@
                 <a:latin typeface="Arial"/>
               </a:rPr>
               <a:t>Сибур</a:t>
+            </a:r>
+          </a:p>
+        </p:txBody>
+      </p:sp>
+      <p:sp>
+        <p:nvSpPr>
+          <p:cNvPr id="40" name="TextBox 39"/>
+          <p:cNvSpPr txBox="1"/>
+          <p:nvPr/>
+        </p:nvSpPr>
+        <p:spPr>
+          <a:xfrm>
+            <a:off x="11274552" y="6547104"/>
+            <a:ext cx="868680" cy="256032"/>
+          </a:xfrm>
+          <a:prstGeom prst="rect">
+            <a:avLst/>
+          </a:prstGeom>
+          <a:noFill/>
+        </p:spPr>
+        <p:txBody>
+          <a:bodyPr wrap="none" lIns="0" rIns="0" tIns="0" bIns="0">
+            <a:spAutoFit/>
+          </a:bodyPr>
+          <a:lstStyle/>
+          <a:p>
+            <a:pPr algn="r">
+              <a:lnSpc>
+                <a:spcPct val="100000"/>
+              </a:lnSpc>
+            </a:pPr>
+            <a:r>
+              <a:rPr sz="1000" i="1">
+                <a:solidFill>
+                  <a:srgbClr val="6B7685"/>
+                </a:solidFill>
+                <a:latin typeface="Arial"/>
+              </a:rPr>
+              <a:t>6 / 36</a:t>
             </a:r>
           </a:p>
         </p:txBody>
@@ -44868,6 +48288,45 @@
           </a:p>
         </p:txBody>
       </p:sp>
+      <p:sp>
+        <p:nvSpPr>
+          <p:cNvPr id="28" name="TextBox 27"/>
+          <p:cNvSpPr txBox="1"/>
+          <p:nvPr/>
+        </p:nvSpPr>
+        <p:spPr>
+          <a:xfrm>
+            <a:off x="11274552" y="6547104"/>
+            <a:ext cx="868680" cy="256032"/>
+          </a:xfrm>
+          <a:prstGeom prst="rect">
+            <a:avLst/>
+          </a:prstGeom>
+          <a:noFill/>
+        </p:spPr>
+        <p:txBody>
+          <a:bodyPr wrap="none" lIns="0" rIns="0" tIns="0" bIns="0">
+            <a:spAutoFit/>
+          </a:bodyPr>
+          <a:lstStyle/>
+          <a:p>
+            <a:pPr algn="r">
+              <a:lnSpc>
+                <a:spcPct val="100000"/>
+              </a:lnSpc>
+            </a:pPr>
+            <a:r>
+              <a:rPr sz="1000" i="1">
+                <a:solidFill>
+                  <a:srgbClr val="6B7685"/>
+                </a:solidFill>
+                <a:latin typeface="Arial"/>
+              </a:rPr>
+              <a:t>7 / 36</a:t>
+            </a:r>
+          </a:p>
+        </p:txBody>
+      </p:sp>
     </p:spTree>
   </p:cSld>
   <p:clrMapOvr>
@@ -45085,7 +48544,18 @@
                 </a:solidFill>
                 <a:latin typeface="Arial"/>
               </a:rPr>
-              <a:t>Russell &amp; Norvig, AIMA, 4-е изд., 2021</a:t>
+              <a:t>Russell &amp; Norvig, AIMA, 4-е изд., 2021 </a:t>
+            </a:r>
+            <a:r>
+              <a:rPr sz="572" baseline="30000" b="0" i="1">
+                <a:latin typeface="Arial"/>
+                <a:cs typeface="Arial"/>
+                <a:ea typeface="Arial"/>
+                <a:solidFill>
+                  <a:srgbClr val="1C7293"/>
+                </a:solidFill>
+              </a:rPr>
+              <a:t>[1]</a:t>
             </a:r>
           </a:p>
         </p:txBody>
@@ -45250,7 +48720,18 @@
                 </a:solidFill>
                 <a:latin typeface="Arial"/>
               </a:rPr>
-              <a:t>Международный стандарт ISO/IEC 22989:2022 — опора EU AI Act</a:t>
+              <a:t>Международный стандарт ISO/IEC 22989:2022 — опора EU AI Act </a:t>
+            </a:r>
+            <a:r>
+              <a:rPr sz="572" baseline="30000" b="0" i="1">
+                <a:latin typeface="Arial"/>
+                <a:cs typeface="Arial"/>
+                <a:ea typeface="Arial"/>
+                <a:solidFill>
+                  <a:srgbClr val="1C7293"/>
+                </a:solidFill>
+              </a:rPr>
+              <a:t>[2]</a:t>
             </a:r>
           </a:p>
         </p:txBody>
@@ -45415,7 +48896,18 @@
                 </a:solidFill>
                 <a:latin typeface="Arial"/>
               </a:rPr>
-              <a:t>Mitchell, Machine Learning, 1997</a:t>
+              <a:t>Mitchell, Machine Learning, 1997 </a:t>
+            </a:r>
+            <a:r>
+              <a:rPr sz="572" baseline="30000" b="0" i="1">
+                <a:latin typeface="Arial"/>
+                <a:cs typeface="Arial"/>
+                <a:ea typeface="Arial"/>
+                <a:solidFill>
+                  <a:srgbClr val="1C7293"/>
+                </a:solidFill>
+              </a:rPr>
+              <a:t>[3]</a:t>
             </a:r>
           </a:p>
         </p:txBody>
@@ -45580,7 +49072,18 @@
                 </a:solidFill>
                 <a:latin typeface="Arial"/>
               </a:rPr>
-              <a:t>Тьюринг 1950 / Searle 1980 — Chinese Room</a:t>
+              <a:t>Тьюринг 1950 / Searle 1980 — Chinese Room </a:t>
+            </a:r>
+            <a:r>
+              <a:rPr sz="572" baseline="30000" b="0" i="1">
+                <a:latin typeface="Arial"/>
+                <a:cs typeface="Arial"/>
+                <a:ea typeface="Arial"/>
+                <a:solidFill>
+                  <a:srgbClr val="1C7293"/>
+                </a:solidFill>
+              </a:rPr>
+              <a:t>[4]</a:t>
             </a:r>
           </a:p>
         </p:txBody>
@@ -45593,7 +49096,7 @@
         </p:nvSpPr>
         <p:spPr>
           <a:xfrm>
-            <a:off x="502920" y="6263640"/>
+            <a:off x="502920" y="5870448"/>
             <a:ext cx="11201400" cy="502920"/>
           </a:xfrm>
           <a:prstGeom prst="roundRect">
@@ -45641,7 +49144,7 @@
         </p:nvSpPr>
         <p:spPr>
           <a:xfrm>
-            <a:off x="685800" y="6336792"/>
+            <a:off x="685800" y="5943600"/>
             <a:ext cx="10835640" cy="356616"/>
           </a:xfrm>
           <a:prstGeom prst="rect">
@@ -45668,6 +49171,178 @@
                 <a:latin typeface="Arial"/>
               </a:rPr>
               <a:t>AI Effect (Tesler):  «AI is whatever hasn't been done yet».  Как только техника начинает работать, её перестают называть AI.</a:t>
+            </a:r>
+          </a:p>
+        </p:txBody>
+      </p:sp>
+      <p:sp>
+        <p:nvSpPr>
+          <p:cNvPr id="21" name="TextBox 20"/>
+          <p:cNvSpPr txBox="1"/>
+          <p:nvPr/>
+        </p:nvSpPr>
+        <p:spPr>
+          <a:xfrm>
+            <a:off x="502920" y="6455664"/>
+            <a:ext cx="11201400" cy="292608"/>
+          </a:xfrm>
+          <a:prstGeom prst="rect">
+            <a:avLst/>
+          </a:prstGeom>
+          <a:noFill/>
+        </p:spPr>
+        <p:txBody>
+          <a:bodyPr wrap="square" lIns="0" rIns="0" tIns="0" bIns="0" anchor="t">
+            <a:spAutoFit/>
+          </a:bodyPr>
+          <a:lstStyle/>
+          <a:p>
+            <a:pPr algn="l">
+              <a:lnSpc>
+                <a:spcPct val="102000"/>
+              </a:lnSpc>
+            </a:pPr>
+            <a:r>
+              <a:rPr sz="850" b="1" i="1">
+                <a:solidFill>
+                  <a:srgbClr val="065A82"/>
+                </a:solidFill>
+                <a:latin typeface="Arial"/>
+              </a:rPr>
+              <a:t>[1] </a:t>
+            </a:r>
+            <a:r>
+              <a:rPr sz="850" i="1">
+                <a:solidFill>
+                  <a:srgbClr val="1C7293"/>
+                </a:solidFill>
+                <a:latin typeface="Arial"/>
+                <a:hlinkClick r:id="rId2"/>
+              </a:rPr>
+              <a:t>Russell &amp; Norvig — AIMA, 4-е изд. (2021)</a:t>
+            </a:r>
+            <a:r>
+              <a:rPr sz="850" i="1">
+                <a:solidFill>
+                  <a:srgbClr val="1C7293"/>
+                </a:solidFill>
+                <a:latin typeface="Arial"/>
+              </a:rPr>
+              <a:t>   ·   </a:t>
+            </a:r>
+            <a:r>
+              <a:rPr sz="850" b="1" i="1">
+                <a:solidFill>
+                  <a:srgbClr val="065A82"/>
+                </a:solidFill>
+                <a:latin typeface="Arial"/>
+              </a:rPr>
+              <a:t>[2] </a:t>
+            </a:r>
+            <a:r>
+              <a:rPr sz="850" i="1">
+                <a:solidFill>
+                  <a:srgbClr val="1C7293"/>
+                </a:solidFill>
+                <a:latin typeface="Arial"/>
+                <a:hlinkClick r:id="rId3"/>
+              </a:rPr>
+              <a:t>ISO/IEC 22989:2022</a:t>
+            </a:r>
+            <a:r>
+              <a:rPr sz="850" i="1">
+                <a:solidFill>
+                  <a:srgbClr val="1C7293"/>
+                </a:solidFill>
+                <a:latin typeface="Arial"/>
+              </a:rPr>
+              <a:t>   ·   </a:t>
+            </a:r>
+            <a:r>
+              <a:rPr sz="850" b="1" i="1">
+                <a:solidFill>
+                  <a:srgbClr val="065A82"/>
+                </a:solidFill>
+                <a:latin typeface="Arial"/>
+              </a:rPr>
+              <a:t>[3] </a:t>
+            </a:r>
+            <a:r>
+              <a:rPr sz="850" i="1">
+                <a:solidFill>
+                  <a:srgbClr val="1C7293"/>
+                </a:solidFill>
+                <a:latin typeface="Arial"/>
+                <a:hlinkClick r:id="rId4"/>
+              </a:rPr>
+              <a:t>Mitchell — Machine Learning (1997)</a:t>
+            </a:r>
+            <a:r>
+              <a:rPr sz="850" i="1">
+                <a:solidFill>
+                  <a:srgbClr val="1C7293"/>
+                </a:solidFill>
+                <a:latin typeface="Arial"/>
+              </a:rPr>
+              <a:t>   ·   </a:t>
+            </a:r>
+            <a:r>
+              <a:rPr sz="850" b="1" i="1">
+                <a:solidFill>
+                  <a:srgbClr val="065A82"/>
+                </a:solidFill>
+                <a:latin typeface="Arial"/>
+              </a:rPr>
+              <a:t>[4] </a:t>
+            </a:r>
+            <a:r>
+              <a:rPr sz="850" i="1">
+                <a:solidFill>
+                  <a:srgbClr val="1C7293"/>
+                </a:solidFill>
+                <a:latin typeface="Arial"/>
+                <a:hlinkClick r:id="rId5"/>
+              </a:rPr>
+              <a:t>Searle — Chinese Room (1980) / Turing (1950)</a:t>
+            </a:r>
+          </a:p>
+        </p:txBody>
+      </p:sp>
+      <p:sp>
+        <p:nvSpPr>
+          <p:cNvPr id="22" name="TextBox 21"/>
+          <p:cNvSpPr txBox="1"/>
+          <p:nvPr/>
+        </p:nvSpPr>
+        <p:spPr>
+          <a:xfrm>
+            <a:off x="11274552" y="6547104"/>
+            <a:ext cx="868680" cy="256032"/>
+          </a:xfrm>
+          <a:prstGeom prst="rect">
+            <a:avLst/>
+          </a:prstGeom>
+          <a:noFill/>
+        </p:spPr>
+        <p:txBody>
+          <a:bodyPr wrap="none" lIns="0" rIns="0" tIns="0" bIns="0">
+            <a:spAutoFit/>
+          </a:bodyPr>
+          <a:lstStyle/>
+          <a:p>
+            <a:pPr algn="r">
+              <a:lnSpc>
+                <a:spcPct val="100000"/>
+              </a:lnSpc>
+            </a:pPr>
+            <a:r>
+              <a:rPr sz="1000" i="1">
+                <a:solidFill>
+                  <a:srgbClr val="6B7685"/>
+                </a:solidFill>
+                <a:latin typeface="Arial"/>
+              </a:rPr>
+              <a:t>8 / 36</a:t>
             </a:r>
           </a:p>
         </p:txBody>
@@ -45957,7 +49632,29 @@
                 </a:solidFill>
                 <a:latin typeface="Arial"/>
               </a:rPr>
-              <a:t>Мак-Каллок и Питтс:
+              <a:t>Мак-Каллок и Питтс </a:t>
+            </a:r>
+            <a:r>
+              <a:rPr sz="598" baseline="30000" b="0" i="1">
+                <a:latin typeface="Arial"/>
+                <a:cs typeface="Arial"/>
+                <a:ea typeface="Arial"/>
+                <a:solidFill>
+                  <a:srgbClr val="1C7293"/>
+                </a:solidFill>
+              </a:rPr>
+              <a:t>[1]</a:t>
+            </a:r>
+            <a:r>
+              <a:rPr sz="1150" b="0" i="1">
+                <a:latin typeface="Arial"/>
+                <a:cs typeface="Arial"/>
+                <a:ea typeface="Arial"/>
+                <a:solidFill>
+                  <a:srgbClr val="21295C"/>
+                </a:solidFill>
+              </a:rPr>
+              <a:t>:
 формальный нейрон
 как логический элемент</a:t>
             </a:r>
@@ -46271,7 +49968,7 @@
         </p:nvSpPr>
         <p:spPr>
           <a:xfrm>
-            <a:off x="502920" y="5989320"/>
+            <a:off x="502920" y="5925312"/>
             <a:ext cx="11201400" cy="457200"/>
           </a:xfrm>
           <a:prstGeom prst="rect">
@@ -46298,6 +49995,94 @@
                 <a:latin typeface="Arial"/>
               </a:rPr>
               <a:t>Идея «нейросети» на теоретическом уровне старше самого термина «искусственный интеллект».</a:t>
+            </a:r>
+          </a:p>
+        </p:txBody>
+      </p:sp>
+      <p:sp>
+        <p:nvSpPr>
+          <p:cNvPr id="17" name="TextBox 16"/>
+          <p:cNvSpPr txBox="1"/>
+          <p:nvPr/>
+        </p:nvSpPr>
+        <p:spPr>
+          <a:xfrm>
+            <a:off x="502920" y="6455664"/>
+            <a:ext cx="11201400" cy="292608"/>
+          </a:xfrm>
+          <a:prstGeom prst="rect">
+            <a:avLst/>
+          </a:prstGeom>
+          <a:noFill/>
+        </p:spPr>
+        <p:txBody>
+          <a:bodyPr wrap="square" lIns="0" rIns="0" tIns="0" bIns="0" anchor="t">
+            <a:spAutoFit/>
+          </a:bodyPr>
+          <a:lstStyle/>
+          <a:p>
+            <a:pPr algn="l">
+              <a:lnSpc>
+                <a:spcPct val="102000"/>
+              </a:lnSpc>
+            </a:pPr>
+            <a:r>
+              <a:rPr sz="850" b="1" i="1">
+                <a:solidFill>
+                  <a:srgbClr val="065A82"/>
+                </a:solidFill>
+                <a:latin typeface="Arial"/>
+              </a:rPr>
+              <a:t>[1] </a:t>
+            </a:r>
+            <a:r>
+              <a:rPr sz="850" i="1">
+                <a:solidFill>
+                  <a:srgbClr val="1C7293"/>
+                </a:solidFill>
+                <a:latin typeface="Arial"/>
+                <a:hlinkClick r:id="rId3"/>
+              </a:rPr>
+              <a:t>McCulloch &amp; Pitts (1943)</a:t>
+            </a:r>
+          </a:p>
+        </p:txBody>
+      </p:sp>
+      <p:sp>
+        <p:nvSpPr>
+          <p:cNvPr id="18" name="TextBox 17"/>
+          <p:cNvSpPr txBox="1"/>
+          <p:nvPr/>
+        </p:nvSpPr>
+        <p:spPr>
+          <a:xfrm>
+            <a:off x="11274552" y="6547104"/>
+            <a:ext cx="868680" cy="256032"/>
+          </a:xfrm>
+          <a:prstGeom prst="rect">
+            <a:avLst/>
+          </a:prstGeom>
+          <a:noFill/>
+        </p:spPr>
+        <p:txBody>
+          <a:bodyPr wrap="none" lIns="0" rIns="0" tIns="0" bIns="0">
+            <a:spAutoFit/>
+          </a:bodyPr>
+          <a:lstStyle/>
+          <a:p>
+            <a:pPr algn="r">
+              <a:lnSpc>
+                <a:spcPct val="100000"/>
+              </a:lnSpc>
+            </a:pPr>
+            <a:r>
+              <a:rPr sz="1000" i="1">
+                <a:solidFill>
+                  <a:srgbClr val="6B7685"/>
+                </a:solidFill>
+                <a:latin typeface="Arial"/>
+              </a:rPr>
+              <a:t>9 / 36</a:t>
             </a:r>
           </a:p>
         </p:txBody>

--- a/library/lectures/lec-01/rendered/lec-01.pptx
+++ b/library/lectures/lec-01/rendered/lec-01.pptx
@@ -11,6 +11,9 @@
     <p:sldId id="259" r:id="rId11"/>
     <p:sldId id="260" r:id="rId12"/>
     <p:sldId id="261" r:id="rId13"/>
+    <p:sldId id="288" r:id="rId40"/>
+    <p:sldId id="289" r:id="rId41"/>
+    <p:sldId id="292" r:id="rId44"/>
     <p:sldId id="262" r:id="rId14"/>
     <p:sldId id="263" r:id="rId15"/>
     <p:sldId id="264" r:id="rId16"/>
@@ -19,12 +22,11 @@
     <p:sldId id="267" r:id="rId19"/>
     <p:sldId id="268" r:id="rId20"/>
     <p:sldId id="269" r:id="rId21"/>
+    <p:sldId id="271" r:id="rId23"/>
     <p:sldId id="270" r:id="rId22"/>
-    <p:sldId id="271" r:id="rId23"/>
     <p:sldId id="272" r:id="rId24"/>
     <p:sldId id="273" r:id="rId25"/>
     <p:sldId id="274" r:id="rId26"/>
-    <p:sldId id="275" r:id="rId27"/>
     <p:sldId id="276" r:id="rId28"/>
     <p:sldId id="277" r:id="rId29"/>
     <p:sldId id="278" r:id="rId30"/>
@@ -37,8 +39,6 @@
     <p:sldId id="285" r:id="rId37"/>
     <p:sldId id="286" r:id="rId38"/>
     <p:sldId id="287" r:id="rId39"/>
-    <p:sldId id="288" r:id="rId40"/>
-    <p:sldId id="289" r:id="rId41"/>
     <p:sldId id="290" r:id="rId42"/>
     <p:sldId id="291" r:id="rId43"/>
   </p:sldIdLst>
@@ -1742,111 +1742,6 @@
 </p:notes>
 </file>
 
-<file path=ppt/notesSlides/notesSlide20.xml><?xml version="1.0" encoding="utf-8"?>
-<p:notes xmlns:a="http://schemas.openxmlformats.org/drawingml/2006/main" xmlns:p="http://schemas.openxmlformats.org/presentationml/2006/main" xmlns:r="http://schemas.openxmlformats.org/officeDocument/2006/relationships">
-  <p:cSld>
-    <p:spTree>
-      <p:nvGrpSpPr>
-        <p:cNvPr id="1" name=""/>
-        <p:cNvGrpSpPr/>
-        <p:nvPr/>
-      </p:nvGrpSpPr>
-      <p:grpSpPr>
-        <a:xfrm>
-          <a:off x="0" y="0"/>
-          <a:ext cx="0" cy="0"/>
-          <a:chOff x="0" y="0"/>
-          <a:chExt cx="0" cy="0"/>
-        </a:xfrm>
-      </p:grpSpPr>
-      <p:sp>
-        <p:nvSpPr>
-          <p:cNvPr id="2" name="Slide Image Placeholder 1"/>
-          <p:cNvSpPr>
-            <a:spLocks noGrp="1"/>
-          </p:cNvSpPr>
-          <p:nvPr>
-            <p:ph type="sldImg" idx="2"/>
-          </p:nvPr>
-        </p:nvSpPr>
-        <p:spPr/>
-      </p:sp>
-      <p:sp>
-        <p:nvSpPr>
-          <p:cNvPr id="3" name="Notes Placeholder 2"/>
-          <p:cNvSpPr>
-            <a:spLocks noGrp="1"/>
-          </p:cNvSpPr>
-          <p:nvPr>
-            <p:ph type="body" idx="3" sz="quarter"/>
-          </p:nvPr>
-        </p:nvSpPr>
-        <p:spPr/>
-        <p:txBody>
-          <a:bodyPr/>
-          <a:lstStyle/>
-          <a:p>
-            <a:r>
-              <a:t>Чат — это модель, обёрнутая в текстовый интерфейс с памятью диалога в пределах сессии. Пользователь пишет сообщение, модель отвечает, история обоих сообщений включается в контекст следующего обращения. Это даёт ощущение разговора и позволяет уточнять задачу пошагово, что радикально меняет паттерн использования.</a:t>
-            </a:r>
-          </a:p>
-          <a:p>
-            <a:r>
-              <a:t>Современные чаты — это в первую очередь LLM-чаты, хотя бывают и мультимодальные: с возможностью передавать изображения, аудио, файлы. Канонические продукты вы знаете: ChatGPT, Claude, Gemini, DeepSeek Chat, GigaChat, YandexGPT, Mistral Le Chat. Между ними различия в качестве для разных задач, в длине контекстного окна, в стоимости, в доступности модальностей — но базовый паттерн взаимодействия один.</a:t>
-            </a:r>
-          </a:p>
-          <a:p>
-            <a:r>
-              <a:t>Возьмём конкретный пример. Инженер получает непонятный нормативный документ — скажем, ТЗ от смежного отдела с массой ссылок на стандарты и сложными формулировками. Задача — разобраться и составить чек-лист для собственной работы. Это типовой кейс для чата: разовая задача, требующая диалога, с уточнениями по ходу. Здесь не нужна отдельная специализированная модель, потому что нет потока однотипных задач. Не нужен агент, потому что не требуется автоматически открывать файлы и API. И нет специализированного приложения. Чат — оптимальный инструмент.</a:t>
-            </a:r>
-          </a:p>
-          <a:p>
-            <a:r>
-              <a:t>Важная оговорка для промышленных систем. Чистые чаты в том виде, как они есть «из коробки» — то есть просто LLM плюс UI плюс короткая память сессии — в корпоративной среде почти не встречаются. Почти везде, где речь идёт о реальном внедрении, чат расширен до агента [2]: хотя бы для того, чтобы хранить долгосрочную память между сессиями, или для того, чтобы искать ответ в корпоративной базе знаний через RAG (retrieval-augmented generation). Архитектуру агента — что именно добавляется к чату — разберём на следующем слайде.</a:t>
-            </a:r>
-          </a:p>
-          <a:p>
-            <a:r>
-              <a:t>Выбор чата — это инженерное решение о точке на шкале взаимодействия: где правильно выбран тип взаимодействия с AI, там система работает предсказуемо.</a:t>
-            </a:r>
-          </a:p>
-          <a:p>
-            <a:r>
-              <a:t>Источники:</a:t>
-            </a:r>
-          </a:p>
-          <a:p>
-            <a:r>
-              <a:t>[1] ВЦИОМ — «Нейросети в жизни россиян» (окт 2025) — проникновение AI-чатов в РФ; 51% пользуются раз в неделю+. https://wciom.ru/analytical-reviews/analiticheskii-obzor/neiroseti-v-nashei-zhizni [VFY-day-of]</a:t>
-            </a:r>
-          </a:p>
-          <a:p>
-            <a:r>
-              <a:t>[2] Dam et al. — Survey on LLM-based AI Chatbots (2024) — таксономия LLM-чатов; чистые чаты редки в проде (расширены до агентов). https://arxiv.org/abs/2406.16937</a:t>
-            </a:r>
-          </a:p>
-        </p:txBody>
-      </p:sp>
-      <p:sp>
-        <p:nvSpPr>
-          <p:cNvPr id="4" name="Slide Number Placeholder 3"/>
-          <p:cNvSpPr>
-            <a:spLocks noGrp="1"/>
-          </p:cNvSpPr>
-          <p:nvPr>
-            <p:ph type="sldNum" idx="5" sz="quarter"/>
-          </p:nvPr>
-        </p:nvSpPr>
-        <p:spPr/>
-      </p:sp>
-    </p:spTree>
-  </p:cSld>
-  <p:clrMapOvr>
-    <a:masterClrMapping/>
-  </p:clrMapOvr>
-</p:notes>
-</file>
-
 <file path=ppt/notesSlides/notesSlide21.xml><?xml version="1.0" encoding="utf-8"?>
 <p:notes xmlns:a="http://schemas.openxmlformats.org/drawingml/2006/main" xmlns:p="http://schemas.openxmlformats.org/presentationml/2006/main" xmlns:r="http://schemas.openxmlformats.org/officeDocument/2006/relationships">
   <p:cSld>
@@ -3578,6 +3473,86 @@
           <a:p>
             <a:r>
               <a:t>Если вопросов нет — не страшно. До встречи на следующей лекции.</a:t>
+            </a:r>
+          </a:p>
+        </p:txBody>
+      </p:sp>
+      <p:sp>
+        <p:nvSpPr>
+          <p:cNvPr id="4" name="Slide Number Placeholder 3"/>
+          <p:cNvSpPr>
+            <a:spLocks noGrp="1"/>
+          </p:cNvSpPr>
+          <p:nvPr>
+            <p:ph type="sldNum" idx="5" sz="quarter"/>
+          </p:nvPr>
+        </p:nvSpPr>
+        <p:spPr/>
+      </p:sp>
+    </p:spTree>
+  </p:cSld>
+  <p:clrMapOvr>
+    <a:masterClrMapping/>
+  </p:clrMapOvr>
+</p:notes>
+</file>
+
+<file path=ppt/notesSlides/notesSlide37.xml><?xml version="1.0" encoding="utf-8"?>
+<p:notes xmlns:a="http://schemas.openxmlformats.org/drawingml/2006/main" xmlns:p="http://schemas.openxmlformats.org/presentationml/2006/main" xmlns:r="http://schemas.openxmlformats.org/officeDocument/2006/relationships">
+  <p:cSld>
+    <p:spTree>
+      <p:nvGrpSpPr>
+        <p:cNvPr id="1" name=""/>
+        <p:cNvGrpSpPr/>
+        <p:nvPr/>
+      </p:nvGrpSpPr>
+      <p:grpSpPr>
+        <a:xfrm>
+          <a:off x="0" y="0"/>
+          <a:ext cx="0" cy="0"/>
+          <a:chOff x="0" y="0"/>
+          <a:chExt cx="0" cy="0"/>
+        </a:xfrm>
+      </p:grpSpPr>
+      <p:sp>
+        <p:nvSpPr>
+          <p:cNvPr id="2" name="Slide Image Placeholder 1"/>
+          <p:cNvSpPr>
+            <a:spLocks noGrp="1"/>
+          </p:cNvSpPr>
+          <p:nvPr>
+            <p:ph type="sldImg" idx="2"/>
+          </p:nvPr>
+        </p:nvSpPr>
+        <p:spPr/>
+      </p:sp>
+      <p:sp>
+        <p:nvSpPr>
+          <p:cNvPr id="3" name="Notes Placeholder 2"/>
+          <p:cNvSpPr>
+            <a:spLocks noGrp="1"/>
+          </p:cNvSpPr>
+          <p:nvPr>
+            <p:ph type="body" idx="3" sz="quarter"/>
+          </p:nvPr>
+        </p:nvSpPr>
+        <p:spPr/>
+        <p:txBody>
+          <a:bodyPr/>
+          <a:lstStyle/>
+          <a:p>
+            <a:r>
+              <a:t>Всё общение по курсу — в чате в мессенджере MAX. Отсканируйте QR-код камерой телефона или перейдите по ссылке max.ru/join/sHoHlhI4jvW_swcq5ZLowvz6G94m0IMhAwngxuxsEpI и вступите в чат до первой лекции.</a:t>
+            </a:r>
+          </a:p>
+          <a:p>
+            <a:r>
+              <a:t>Что там будет. Во-первых, объявления: расписание, любые изменения, важные новости — всё публикуется в чате, отдельно письма ждать не нужно. Во-вторых, материалы: слайды лекций и семинаров я выкладываю туда по мере проведения занятий, так что всё собрано в одном месте. В-третьих, вопросы: если что-то непонятно между парами — спрашивайте в чате, не обязательно копить до семинара.</a:t>
+            </a:r>
+          </a:p>
+          <a:p>
+            <a:r>
+              <a:t>Пожалуйста, вступите сегодня — так вы точно не пропустите первое объявление.</a:t>
             </a:r>
           </a:p>
         </p:txBody>
@@ -7854,7 +7829,7 @@
         </p:nvSpPr>
         <p:spPr>
           <a:xfrm>
-            <a:off x="2607564" y="2459736"/>
+            <a:off x="2121408" y="2459736"/>
             <a:ext cx="73152" cy="201168"/>
           </a:xfrm>
           <a:prstGeom prst="rect">
@@ -7899,7 +7874,7 @@
         <p:spPr>
           <a:xfrm>
             <a:off x="914400" y="1874519"/>
-            <a:ext cx="3459480" cy="384048"/>
+            <a:ext cx="2487168" cy="658368"/>
           </a:xfrm>
           <a:prstGeom prst="rect">
             <a:avLst/>
@@ -7918,7 +7893,7 @@
               </a:lnSpc>
             </a:pPr>
             <a:r>
-              <a:rPr sz="1250" b="0" i="0">
+              <a:rPr sz="1100" b="0" i="0">
                 <a:solidFill>
                   <a:srgbClr val="21295C"/>
                 </a:solidFill>
@@ -7938,7 +7913,7 @@
         <p:spPr>
           <a:xfrm>
             <a:off x="914400" y="2606040"/>
-            <a:ext cx="3459480" cy="292608"/>
+            <a:ext cx="2487168" cy="292608"/>
           </a:xfrm>
           <a:prstGeom prst="rect">
             <a:avLst/>
@@ -7976,7 +7951,7 @@
         </p:nvSpPr>
         <p:spPr>
           <a:xfrm>
-            <a:off x="6067044" y="2459736"/>
+            <a:off x="7333488" y="2459736"/>
             <a:ext cx="73152" cy="201168"/>
           </a:xfrm>
           <a:prstGeom prst="rect">
@@ -8020,8 +7995,8 @@
         </p:nvSpPr>
         <p:spPr>
           <a:xfrm>
-            <a:off x="4373880" y="1874519"/>
-            <a:ext cx="3459480" cy="384048"/>
+            <a:off x="6126480" y="1874519"/>
+            <a:ext cx="2487168" cy="658368"/>
           </a:xfrm>
           <a:prstGeom prst="rect">
             <a:avLst/>
@@ -8040,7 +8015,7 @@
               </a:lnSpc>
             </a:pPr>
             <a:r>
-              <a:rPr sz="1250" b="0" i="0">
+              <a:rPr sz="1100" b="0" i="0">
                 <a:solidFill>
                   <a:srgbClr val="21295C"/>
                 </a:solidFill>
@@ -8059,8 +8034,8 @@
         </p:nvSpPr>
         <p:spPr>
           <a:xfrm>
-            <a:off x="4373880" y="2606040"/>
-            <a:ext cx="3459480" cy="292608"/>
+            <a:off x="6126480" y="2606040"/>
+            <a:ext cx="2487168" cy="292608"/>
           </a:xfrm>
           <a:prstGeom prst="rect">
             <a:avLst/>
@@ -8098,7 +8073,7 @@
         </p:nvSpPr>
         <p:spPr>
           <a:xfrm>
-            <a:off x="9526523" y="2459736"/>
+            <a:off x="9939528" y="2459736"/>
             <a:ext cx="73152" cy="201168"/>
           </a:xfrm>
           <a:prstGeom prst="rect">
@@ -8142,8 +8117,8 @@
         </p:nvSpPr>
         <p:spPr>
           <a:xfrm>
-            <a:off x="7833360" y="1874519"/>
-            <a:ext cx="3459480" cy="384048"/>
+            <a:off x="8732520" y="1874519"/>
+            <a:ext cx="2487168" cy="658368"/>
           </a:xfrm>
           <a:prstGeom prst="rect">
             <a:avLst/>
@@ -8162,7 +8137,7 @@
               </a:lnSpc>
             </a:pPr>
             <a:r>
-              <a:rPr sz="1250" b="0" i="0">
+              <a:rPr sz="1100" b="0" i="0">
                 <a:solidFill>
                   <a:srgbClr val="21295C"/>
                 </a:solidFill>
@@ -8181,8 +8156,8 @@
         </p:nvSpPr>
         <p:spPr>
           <a:xfrm>
-            <a:off x="7833360" y="2606040"/>
-            <a:ext cx="3459480" cy="292608"/>
+            <a:off x="8732520" y="2606040"/>
+            <a:ext cx="2487168" cy="292608"/>
           </a:xfrm>
           <a:prstGeom prst="rect">
             <a:avLst/>
@@ -9622,8 +9597,130 @@
                 </a:solidFill>
                 <a:latin typeface="Arial"/>
               </a:rPr>
-              <a:t>10 / 36</a:t>
-            </a:r>
+              <a:t>13 / 36</a:t>
+            </a:r>
+          </a:p>
+        </p:txBody>
+      </p:sp>
+      <p:sp>
+        <p:nvSpPr>
+          <p:cNvPr id="8" name="TextBox 7"/>
+          <p:cNvSpPr txBox="1"/>
+          <p:nvPr/>
+        </p:nvSpPr>
+        <p:spPr>
+          <a:xfrm>
+            <a:off x="3520440" y="1874519"/>
+            <a:ext cx="2487168" cy="658368"/>
+          </a:xfrm>
+          <a:prstGeom prst="rect">
+            <a:avLst/>
+          </a:prstGeom>
+          <a:noFill/>
+        </p:spPr>
+        <p:txBody>
+          <a:bodyPr wrap="square" lIns="0" rIns="0" tIns="0" bIns="0" anchor="t">
+            <a:spAutoFit/>
+          </a:bodyPr>
+          <a:lstStyle/>
+          <a:p>
+            <a:pPr algn="ctr">
+              <a:lnSpc>
+                <a:spcPct val="105000"/>
+              </a:lnSpc>
+            </a:pPr>
+            <a:r>
+              <a:rPr sz="1100" b="0" i="0">
+                <a:solidFill>
+                  <a:srgbClr val="21295C"/>
+                </a:solidFill>
+                <a:latin typeface="Arial"/>
+              </a:rPr>
+              <a:t>Дартмутский семинар — рождение термина «AI»</a:t>
+            </a:r>
+          </a:p>
+        </p:txBody>
+      </p:sp>
+      <p:sp>
+        <p:nvSpPr>
+          <p:cNvPr id="9" name="TextBox 8"/>
+          <p:cNvSpPr txBox="1"/>
+          <p:nvPr/>
+        </p:nvSpPr>
+        <p:spPr>
+          <a:xfrm>
+            <a:off x="3520440" y="2606040"/>
+            <a:ext cx="2487168" cy="292608"/>
+          </a:xfrm>
+          <a:prstGeom prst="rect">
+            <a:avLst/>
+          </a:prstGeom>
+          <a:noFill/>
+        </p:spPr>
+        <p:txBody>
+          <a:bodyPr wrap="square" lIns="0" rIns="0" tIns="0" bIns="0" anchor="t">
+            <a:spAutoFit/>
+          </a:bodyPr>
+          <a:lstStyle/>
+          <a:p>
+            <a:pPr algn="ctr">
+              <a:lnSpc>
+                <a:spcPct val="115000"/>
+              </a:lnSpc>
+            </a:pPr>
+            <a:r>
+              <a:rPr sz="1450" b="1" i="0">
+                <a:solidFill>
+                  <a:srgbClr val="1C7293"/>
+                </a:solidFill>
+                <a:latin typeface="Arial"/>
+              </a:rPr>
+              <a:t>1956</a:t>
+            </a:r>
+          </a:p>
+        </p:txBody>
+      </p:sp>
+      <p:sp>
+        <p:nvSpPr>
+          <p:cNvPr id="7" name="Rectangle 6"/>
+          <p:cNvSpPr/>
+          <p:nvPr/>
+        </p:nvSpPr>
+        <p:spPr>
+          <a:xfrm>
+            <a:off x="4727448" y="2459736"/>
+            <a:ext cx="73152" cy="201168"/>
+          </a:xfrm>
+          <a:prstGeom prst="rect">
+            <a:avLst/>
+          </a:prstGeom>
+          <a:solidFill>
+            <a:srgbClr val="1C7293"/>
+          </a:solidFill>
+          <a:ln>
+            <a:noFill/>
+          </a:ln>
+          <a:effectLst/>
+        </p:spPr>
+        <p:style>
+          <a:lnRef idx="1">
+            <a:schemeClr val="accent1"/>
+          </a:lnRef>
+          <a:fillRef idx="3">
+            <a:schemeClr val="accent1"/>
+          </a:fillRef>
+          <a:effectRef idx="2">
+            <a:schemeClr val="accent1"/>
+          </a:effectRef>
+          <a:fontRef idx="minor">
+            <a:schemeClr val="lt1"/>
+          </a:fontRef>
+        </p:style>
+        <p:txBody>
+          <a:bodyPr rtlCol="0" anchor="ctr"/>
+          <a:lstStyle/>
+          <a:p>
+            <a:pPr algn="ctr"/>
           </a:p>
         </p:txBody>
       </p:sp>
@@ -10764,7 +10861,7 @@
                 </a:solidFill>
                 <a:latin typeface="Arial"/>
               </a:rPr>
-              <a:t>11 / 36</a:t>
+              <a:t>14 / 36</a:t>
             </a:r>
           </a:p>
         </p:txBody>
@@ -10821,7 +10918,7 @@
                 </a:solidFill>
                 <a:latin typeface="Arial"/>
               </a:rPr>
-              <a:t>AI стал инфраструктурой за 3 года: 900M пользователей, 51% разработчиков ежедневно, 46% Copilot-кода.</a:t>
+              <a:t>AI стал инфраструктурой за 3 года: ~1 млрд пользователей, 51% разработчиков ежедневно, 46% Copilot-кода.</a:t>
             </a:r>
           </a:p>
         </p:txBody>
@@ -10932,7 +11029,7 @@
                 </a:solidFill>
                 <a:latin typeface="Arial"/>
               </a:rPr>
-              <a:t>900M</a:t>
+              <a:t>1B</a:t>
             </a:r>
           </a:p>
         </p:txBody>
@@ -11010,7 +11107,7 @@
                 </a:solidFill>
                 <a:latin typeface="Arial"/>
               </a:rPr>
-              <a:t>ChatGPT, февраль 2026 </a:t>
+              <a:t>ChatGPT, август 2026 </a:t>
             </a:r>
             <a:r>
               <a:rPr sz="520" baseline="30000" b="0" i="1">
@@ -12079,7 +12176,7 @@
                 </a:solidFill>
                 <a:latin typeface="Arial"/>
               </a:rPr>
-              <a:t>12 / 36</a:t>
+              <a:t>15 / 36</a:t>
             </a:r>
           </a:p>
         </p:txBody>
@@ -13503,7 +13600,7 @@
                 </a:solidFill>
                 <a:latin typeface="Arial"/>
               </a:rPr>
-              <a:t>13 / 36</a:t>
+              <a:t>16 / 36</a:t>
             </a:r>
           </a:p>
         </p:txBody>
@@ -14645,7 +14742,7 @@
                 </a:solidFill>
                 <a:latin typeface="Arial"/>
               </a:rPr>
-              <a:t>14 / 36</a:t>
+              <a:t>17 / 36</a:t>
             </a:r>
           </a:p>
         </p:txBody>
@@ -15751,7 +15848,7 @@
                 </a:solidFill>
                 <a:latin typeface="Arial"/>
               </a:rPr>
-              <a:t>15 / 36</a:t>
+              <a:t>19 / 36</a:t>
             </a:r>
           </a:p>
         </p:txBody>
@@ -18747,7 +18844,7 @@
                 </a:solidFill>
                 <a:latin typeface="Arial"/>
               </a:rPr>
-              <a:t>16 / 36</a:t>
+              <a:t>18 / 36</a:t>
             </a:r>
           </a:p>
         </p:txBody>
@@ -19942,7 +20039,7 @@
                 </a:solidFill>
                 <a:latin typeface="Arial"/>
               </a:rPr>
-              <a:t>17 / 36</a:t>
+              <a:t>20 / 36</a:t>
             </a:r>
           </a:p>
         </p:txBody>
@@ -21881,7 +21978,7 @@
                 </a:solidFill>
                 <a:latin typeface="Arial"/>
               </a:rPr>
-              <a:t>18 / 36</a:t>
+              <a:t>21 / 36</a:t>
             </a:r>
           </a:p>
         </p:txBody>
@@ -23459,7 +23556,7 @@
                 </a:solidFill>
                 <a:latin typeface="Arial"/>
               </a:rPr>
-              <a:t>19 / 36</a:t>
+              <a:t>22 / 36</a:t>
             </a:r>
           </a:p>
         </p:txBody>
@@ -23699,867 +23796,6 @@
 </p:sld>
 </file>
 
-<file path=ppt/slides/slide20.xml><?xml version="1.0" encoding="utf-8"?>
-<p:sld xmlns:a="http://schemas.openxmlformats.org/drawingml/2006/main" xmlns:p="http://schemas.openxmlformats.org/presentationml/2006/main" xmlns:r="http://schemas.openxmlformats.org/officeDocument/2006/relationships">
-  <p:cSld>
-    <p:spTree>
-      <p:nvGrpSpPr>
-        <p:cNvPr id="1" name=""/>
-        <p:cNvGrpSpPr/>
-        <p:nvPr/>
-      </p:nvGrpSpPr>
-      <p:grpSpPr/>
-      <p:sp>
-        <p:nvSpPr>
-          <p:cNvPr id="2" name="Rounded Rectangle 1"/>
-          <p:cNvSpPr/>
-          <p:nvPr/>
-        </p:nvSpPr>
-        <p:spPr>
-          <a:xfrm>
-            <a:off x="502920" y="320040"/>
-            <a:ext cx="758952" cy="384048"/>
-          </a:xfrm>
-          <a:prstGeom prst="roundRect">
-            <a:avLst>
-              <a:gd name="adj" fmla="val 50000"/>
-            </a:avLst>
-          </a:prstGeom>
-          <a:solidFill>
-            <a:srgbClr val="21295C"/>
-          </a:solidFill>
-          <a:ln>
-            <a:noFill/>
-          </a:ln>
-          <a:effectLst/>
-        </p:spPr>
-        <p:style>
-          <a:lnRef idx="1">
-            <a:schemeClr val="accent1"/>
-          </a:lnRef>
-          <a:fillRef idx="3">
-            <a:schemeClr val="accent1"/>
-          </a:fillRef>
-          <a:effectRef idx="2">
-            <a:schemeClr val="accent1"/>
-          </a:effectRef>
-          <a:fontRef idx="minor">
-            <a:schemeClr val="lt1"/>
-          </a:fontRef>
-        </p:style>
-        <p:txBody>
-          <a:bodyPr rtlCol="0" anchor="ctr" lIns="45720" rIns="45720" tIns="36576" bIns="36576" wrap="none"/>
-          <a:lstStyle/>
-          <a:p>
-            <a:pPr algn="ctr"/>
-            <a:r>
-              <a:rPr sz="1300" b="1">
-                <a:solidFill>
-                  <a:srgbClr val="FFFFFF"/>
-                </a:solidFill>
-                <a:latin typeface="Arial"/>
-              </a:rPr>
-              <a:t>ЧАТ</a:t>
-            </a:r>
-          </a:p>
-        </p:txBody>
-      </p:sp>
-      <p:sp>
-        <p:nvSpPr>
-          <p:cNvPr id="3" name="TextBox 2"/>
-          <p:cNvSpPr txBox="1"/>
-          <p:nvPr/>
-        </p:nvSpPr>
-        <p:spPr>
-          <a:xfrm>
-            <a:off x="502920" y="777240"/>
-            <a:ext cx="11247120" cy="1051560"/>
-          </a:xfrm>
-          <a:prstGeom prst="rect">
-            <a:avLst/>
-          </a:prstGeom>
-          <a:noFill/>
-        </p:spPr>
-        <p:txBody>
-          <a:bodyPr wrap="square" lIns="0" rIns="0" tIns="0" bIns="0" anchor="t">
-            <a:spAutoFit/>
-          </a:bodyPr>
-          <a:lstStyle/>
-          <a:p>
-            <a:pPr algn="l">
-              <a:lnSpc>
-                <a:spcPct val="118000"/>
-              </a:lnSpc>
-            </a:pPr>
-            <a:r>
-              <a:rPr sz="2800" b="1" i="0">
-                <a:solidFill>
-                  <a:srgbClr val="21295C"/>
-                </a:solidFill>
-                <a:latin typeface="Arial"/>
-              </a:rPr>
-              <a:t>Чат = модель + интерфейс + память диалога.</a:t>
-            </a:r>
-          </a:p>
-        </p:txBody>
-      </p:sp>
-      <p:sp>
-        <p:nvSpPr>
-          <p:cNvPr id="4" name="Rounded Rectangle 3"/>
-          <p:cNvSpPr/>
-          <p:nvPr/>
-        </p:nvSpPr>
-        <p:spPr>
-          <a:xfrm>
-            <a:off x="502920" y="1965960"/>
-            <a:ext cx="5943600" cy="4114800"/>
-          </a:xfrm>
-          <a:prstGeom prst="roundRect">
-            <a:avLst>
-              <a:gd name="adj" fmla="val 7407"/>
-            </a:avLst>
-          </a:prstGeom>
-          <a:solidFill>
-            <a:srgbClr val="F4F7FA"/>
-          </a:solidFill>
-          <a:ln w="19050">
-            <a:solidFill>
-              <a:srgbClr val="1C7293"/>
-            </a:solidFill>
-          </a:ln>
-          <a:effectLst/>
-        </p:spPr>
-        <p:style>
-          <a:lnRef idx="1">
-            <a:schemeClr val="accent1"/>
-          </a:lnRef>
-          <a:fillRef idx="3">
-            <a:schemeClr val="accent1"/>
-          </a:fillRef>
-          <a:effectRef idx="2">
-            <a:schemeClr val="accent1"/>
-          </a:effectRef>
-          <a:fontRef idx="minor">
-            <a:schemeClr val="lt1"/>
-          </a:fontRef>
-        </p:style>
-        <p:txBody>
-          <a:bodyPr rtlCol="0" anchor="ctr"/>
-          <a:lstStyle/>
-          <a:p>
-            <a:pPr algn="ctr"/>
-          </a:p>
-        </p:txBody>
-      </p:sp>
-      <p:sp>
-        <p:nvSpPr>
-          <p:cNvPr id="5" name="TextBox 4"/>
-          <p:cNvSpPr txBox="1"/>
-          <p:nvPr/>
-        </p:nvSpPr>
-        <p:spPr>
-          <a:xfrm>
-            <a:off x="777240" y="2194560"/>
-            <a:ext cx="5394960" cy="365760"/>
-          </a:xfrm>
-          <a:prstGeom prst="rect">
-            <a:avLst/>
-          </a:prstGeom>
-          <a:noFill/>
-        </p:spPr>
-        <p:txBody>
-          <a:bodyPr wrap="square" lIns="0" rIns="0" tIns="0" bIns="0" anchor="t">
-            <a:spAutoFit/>
-          </a:bodyPr>
-          <a:lstStyle/>
-          <a:p>
-            <a:pPr algn="l">
-              <a:lnSpc>
-                <a:spcPct val="115000"/>
-              </a:lnSpc>
-            </a:pPr>
-            <a:r>
-              <a:rPr sz="1400" b="1" i="0">
-                <a:solidFill>
-                  <a:srgbClr val="028090"/>
-                </a:solidFill>
-                <a:latin typeface="Arial"/>
-              </a:rPr>
-              <a:t>Кейс — типовой для чата</a:t>
-            </a:r>
-          </a:p>
-        </p:txBody>
-      </p:sp>
-      <p:sp>
-        <p:nvSpPr>
-          <p:cNvPr id="6" name="TextBox 5"/>
-          <p:cNvSpPr txBox="1"/>
-          <p:nvPr/>
-        </p:nvSpPr>
-        <p:spPr>
-          <a:xfrm>
-            <a:off x="777240" y="2606039"/>
-            <a:ext cx="5394960" cy="868680"/>
-          </a:xfrm>
-          <a:prstGeom prst="rect">
-            <a:avLst/>
-          </a:prstGeom>
-          <a:noFill/>
-        </p:spPr>
-        <p:txBody>
-          <a:bodyPr wrap="square" lIns="0" rIns="0" tIns="0" bIns="0" anchor="t">
-            <a:spAutoFit/>
-          </a:bodyPr>
-          <a:lstStyle/>
-          <a:p>
-            <a:pPr algn="l">
-              <a:lnSpc>
-                <a:spcPct val="130000"/>
-              </a:lnSpc>
-            </a:pPr>
-            <a:r>
-              <a:rPr sz="1500" b="0" i="0">
-                <a:solidFill>
-                  <a:srgbClr val="21295C"/>
-                </a:solidFill>
-                <a:latin typeface="Arial"/>
-              </a:rPr>
-              <a:t>Инженер получил непонятное ТЗ от смежного отдела, нужно составить чек-лист своей работы.</a:t>
-            </a:r>
-          </a:p>
-        </p:txBody>
-      </p:sp>
-      <p:sp>
-        <p:nvSpPr>
-          <p:cNvPr id="7" name="Rounded Rectangle 6"/>
-          <p:cNvSpPr/>
-          <p:nvPr/>
-        </p:nvSpPr>
-        <p:spPr>
-          <a:xfrm>
-            <a:off x="868680" y="3657600"/>
-            <a:ext cx="5212080" cy="1828800"/>
-          </a:xfrm>
-          <a:prstGeom prst="roundRect">
-            <a:avLst>
-              <a:gd name="adj" fmla="val 8000"/>
-            </a:avLst>
-          </a:prstGeom>
-          <a:solidFill>
-            <a:srgbClr val="FFFFFF"/>
-          </a:solidFill>
-          <a:ln w="12700">
-            <a:solidFill>
-              <a:srgbClr val="E5EAF0"/>
-            </a:solidFill>
-          </a:ln>
-          <a:effectLst/>
-        </p:spPr>
-        <p:style>
-          <a:lnRef idx="1">
-            <a:schemeClr val="accent1"/>
-          </a:lnRef>
-          <a:fillRef idx="3">
-            <a:schemeClr val="accent1"/>
-          </a:fillRef>
-          <a:effectRef idx="2">
-            <a:schemeClr val="accent1"/>
-          </a:effectRef>
-          <a:fontRef idx="minor">
-            <a:schemeClr val="lt1"/>
-          </a:fontRef>
-        </p:style>
-        <p:txBody>
-          <a:bodyPr rtlCol="0" anchor="ctr"/>
-          <a:lstStyle/>
-          <a:p>
-            <a:pPr algn="ctr"/>
-          </a:p>
-        </p:txBody>
-      </p:sp>
-      <p:sp>
-        <p:nvSpPr>
-          <p:cNvPr id="8" name="TextBox 7"/>
-          <p:cNvSpPr txBox="1"/>
-          <p:nvPr/>
-        </p:nvSpPr>
-        <p:spPr>
-          <a:xfrm>
-            <a:off x="1051560" y="3794760"/>
-            <a:ext cx="4846320" cy="1554480"/>
-          </a:xfrm>
-          <a:prstGeom prst="rect">
-            <a:avLst/>
-          </a:prstGeom>
-          <a:noFill/>
-        </p:spPr>
-        <p:txBody>
-          <a:bodyPr wrap="square" lIns="0" rIns="0" tIns="0" bIns="0" anchor="t">
-            <a:spAutoFit/>
-          </a:bodyPr>
-          <a:lstStyle/>
-          <a:p>
-            <a:pPr algn="l">
-              <a:lnSpc>
-                <a:spcPct val="145000"/>
-              </a:lnSpc>
-            </a:pPr>
-            <a:r>
-              <a:rPr sz="1200" b="1" i="0">
-                <a:solidFill>
-                  <a:srgbClr val="065A82"/>
-                </a:solidFill>
-                <a:latin typeface="Arial"/>
-              </a:rPr>
-              <a:t>Вы:  </a:t>
-            </a:r>
-            <a:r>
-              <a:rPr sz="1200" b="0" i="0">
-                <a:solidFill>
-                  <a:srgbClr val="21295C"/>
-                </a:solidFill>
-                <a:latin typeface="Arial"/>
-              </a:rPr>
-              <a:t>Объясни пункт 4.2 ТЗ простыми словами.</a:t>
-            </a:r>
-          </a:p>
-          <a:p>
-            <a:pPr algn="l">
-              <a:lnSpc>
-                <a:spcPct val="145000"/>
-              </a:lnSpc>
-            </a:pPr>
-            <a:r>
-              <a:rPr sz="1200" b="1" i="0">
-                <a:solidFill>
-                  <a:srgbClr val="028090"/>
-                </a:solidFill>
-                <a:latin typeface="Arial"/>
-              </a:rPr>
-              <a:t>Чат:  </a:t>
-            </a:r>
-            <a:r>
-              <a:rPr sz="1200" b="0" i="0">
-                <a:solidFill>
-                  <a:srgbClr val="21295C"/>
-                </a:solidFill>
-                <a:latin typeface="Arial"/>
-              </a:rPr>
-              <a:t>Это требование к…</a:t>
-            </a:r>
-          </a:p>
-          <a:p>
-            <a:pPr algn="l">
-              <a:lnSpc>
-                <a:spcPct val="145000"/>
-              </a:lnSpc>
-            </a:pPr>
-            <a:r>
-              <a:rPr sz="1200" b="1" i="0">
-                <a:solidFill>
-                  <a:srgbClr val="065A82"/>
-                </a:solidFill>
-                <a:latin typeface="Arial"/>
-              </a:rPr>
-              <a:t>Вы:  </a:t>
-            </a:r>
-            <a:r>
-              <a:rPr sz="1200" b="0" i="0">
-                <a:solidFill>
-                  <a:srgbClr val="21295C"/>
-                </a:solidFill>
-                <a:latin typeface="Arial"/>
-              </a:rPr>
-              <a:t>Составь чек-лист на 5 пунктов.</a:t>
-            </a:r>
-          </a:p>
-          <a:p>
-            <a:pPr algn="l">
-              <a:lnSpc>
-                <a:spcPct val="145000"/>
-              </a:lnSpc>
-            </a:pPr>
-            <a:r>
-              <a:rPr sz="1200" b="1" i="0">
-                <a:solidFill>
-                  <a:srgbClr val="028090"/>
-                </a:solidFill>
-                <a:latin typeface="Arial"/>
-              </a:rPr>
-              <a:t>Чат:  </a:t>
-            </a:r>
-            <a:r>
-              <a:rPr sz="1200" b="0" i="0">
-                <a:solidFill>
-                  <a:srgbClr val="21295C"/>
-                </a:solidFill>
-                <a:latin typeface="Arial"/>
-              </a:rPr>
-              <a:t>1. Проверить…  2. Согласовать…  3. …</a:t>
-            </a:r>
-          </a:p>
-        </p:txBody>
-      </p:sp>
-      <p:sp>
-        <p:nvSpPr>
-          <p:cNvPr id="9" name="TextBox 8"/>
-          <p:cNvSpPr txBox="1"/>
-          <p:nvPr/>
-        </p:nvSpPr>
-        <p:spPr>
-          <a:xfrm>
-            <a:off x="777240" y="5623560"/>
-            <a:ext cx="5394960" cy="320040"/>
-          </a:xfrm>
-          <a:prstGeom prst="rect">
-            <a:avLst/>
-          </a:prstGeom>
-          <a:noFill/>
-        </p:spPr>
-        <p:txBody>
-          <a:bodyPr wrap="square" lIns="0" rIns="0" tIns="0" bIns="0" anchor="t">
-            <a:spAutoFit/>
-          </a:bodyPr>
-          <a:lstStyle/>
-          <a:p>
-            <a:pPr algn="l">
-              <a:lnSpc>
-                <a:spcPct val="130000"/>
-              </a:lnSpc>
-            </a:pPr>
-            <a:r>
-              <a:rPr sz="1100" b="0" i="1">
-                <a:solidFill>
-                  <a:srgbClr val="1C7293"/>
-                </a:solidFill>
-                <a:latin typeface="Arial"/>
-              </a:rPr>
-              <a:t>Разовая задача с уточнениями — оптимально для чата. Не модель, не агент, не приложение.</a:t>
-            </a:r>
-          </a:p>
-        </p:txBody>
-      </p:sp>
-      <p:sp>
-        <p:nvSpPr>
-          <p:cNvPr id="10" name="Rounded Rectangle 9"/>
-          <p:cNvSpPr/>
-          <p:nvPr/>
-        </p:nvSpPr>
-        <p:spPr>
-          <a:xfrm>
-            <a:off x="6766559" y="1965960"/>
-            <a:ext cx="4937760" cy="4114800"/>
-          </a:xfrm>
-          <a:prstGeom prst="roundRect">
-            <a:avLst>
-              <a:gd name="adj" fmla="val 7407"/>
-            </a:avLst>
-          </a:prstGeom>
-          <a:solidFill>
-            <a:srgbClr val="FEF5E0"/>
-          </a:solidFill>
-          <a:ln w="19050">
-            <a:solidFill>
-              <a:srgbClr val="F0AB00"/>
-            </a:solidFill>
-          </a:ln>
-          <a:effectLst/>
-        </p:spPr>
-        <p:style>
-          <a:lnRef idx="1">
-            <a:schemeClr val="accent1"/>
-          </a:lnRef>
-          <a:fillRef idx="3">
-            <a:schemeClr val="accent1"/>
-          </a:fillRef>
-          <a:effectRef idx="2">
-            <a:schemeClr val="accent1"/>
-          </a:effectRef>
-          <a:fontRef idx="minor">
-            <a:schemeClr val="lt1"/>
-          </a:fontRef>
-        </p:style>
-        <p:txBody>
-          <a:bodyPr rtlCol="0" anchor="ctr"/>
-          <a:lstStyle/>
-          <a:p>
-            <a:pPr algn="ctr"/>
-          </a:p>
-        </p:txBody>
-      </p:sp>
-      <p:sp>
-        <p:nvSpPr>
-          <p:cNvPr id="11" name="TextBox 10"/>
-          <p:cNvSpPr txBox="1"/>
-          <p:nvPr/>
-        </p:nvSpPr>
-        <p:spPr>
-          <a:xfrm>
-            <a:off x="7040879" y="2194560"/>
-            <a:ext cx="4389120" cy="365760"/>
-          </a:xfrm>
-          <a:prstGeom prst="rect">
-            <a:avLst/>
-          </a:prstGeom>
-          <a:noFill/>
-        </p:spPr>
-        <p:txBody>
-          <a:bodyPr wrap="square" lIns="0" rIns="0" tIns="0" bIns="0" anchor="t">
-            <a:spAutoFit/>
-          </a:bodyPr>
-          <a:lstStyle/>
-          <a:p>
-            <a:pPr algn="l">
-              <a:lnSpc>
-                <a:spcPct val="115000"/>
-              </a:lnSpc>
-            </a:pPr>
-            <a:r>
-              <a:rPr sz="1400" b="1" i="0">
-                <a:solidFill>
-                  <a:srgbClr val="21295C"/>
-                </a:solidFill>
-                <a:latin typeface="Arial"/>
-              </a:rPr>
-              <a:t>Оговорка для промышленных систем</a:t>
-            </a:r>
-          </a:p>
-        </p:txBody>
-      </p:sp>
-      <p:sp>
-        <p:nvSpPr>
-          <p:cNvPr id="12" name="TextBox 11"/>
-          <p:cNvSpPr txBox="1"/>
-          <p:nvPr/>
-        </p:nvSpPr>
-        <p:spPr>
-          <a:xfrm>
-            <a:off x="7040879" y="2743200"/>
-            <a:ext cx="4389120" cy="1280160"/>
-          </a:xfrm>
-          <a:prstGeom prst="rect">
-            <a:avLst/>
-          </a:prstGeom>
-          <a:noFill/>
-        </p:spPr>
-        <p:txBody>
-          <a:bodyPr wrap="square" lIns="0" rIns="0" tIns="0" bIns="0" anchor="t">
-            <a:spAutoFit/>
-          </a:bodyPr>
-          <a:lstStyle/>
-          <a:p>
-            <a:pPr algn="l">
-              <a:lnSpc>
-                <a:spcPct val="125000"/>
-              </a:lnSpc>
-            </a:pPr>
-            <a:r>
-              <a:rPr sz="1600" b="1" i="0">
-                <a:solidFill>
-                  <a:srgbClr val="21295C"/>
-                </a:solidFill>
-                <a:latin typeface="Arial"/>
-              </a:rPr>
-              <a:t>Чистые чаты почти не используются в промышленной эксплуатации.</a:t>
-            </a:r>
-          </a:p>
-        </p:txBody>
-      </p:sp>
-      <p:sp>
-        <p:nvSpPr>
-          <p:cNvPr id="13" name="TextBox 12"/>
-          <p:cNvSpPr txBox="1"/>
-          <p:nvPr/>
-        </p:nvSpPr>
-        <p:spPr>
-          <a:xfrm>
-            <a:off x="7040879" y="4114800"/>
-            <a:ext cx="4389120" cy="1828800"/>
-          </a:xfrm>
-          <a:prstGeom prst="rect">
-            <a:avLst/>
-          </a:prstGeom>
-          <a:noFill/>
-        </p:spPr>
-        <p:txBody>
-          <a:bodyPr wrap="square" lIns="0" rIns="0" tIns="0" bIns="0" anchor="t">
-            <a:spAutoFit/>
-          </a:bodyPr>
-          <a:lstStyle/>
-          <a:p>
-            <a:pPr algn="l">
-              <a:lnSpc>
-                <a:spcPct val="140000"/>
-              </a:lnSpc>
-            </a:pPr>
-            <a:r>
-              <a:rPr sz="1200" b="0" i="0">
-                <a:solidFill>
-                  <a:srgbClr val="21295C"/>
-                </a:solidFill>
-                <a:latin typeface="Arial"/>
-              </a:rPr>
-              <a:t>Почти везде они расширены до агентов </a:t>
-            </a:r>
-            <a:r>
-              <a:rPr sz="624" baseline="30000" b="0" i="1">
-                <a:latin typeface="Arial"/>
-                <a:cs typeface="Arial"/>
-                <a:ea typeface="Arial"/>
-                <a:solidFill>
-                  <a:srgbClr val="1C7293"/>
-                </a:solidFill>
-              </a:rPr>
-              <a:t>[1]</a:t>
-            </a:r>
-            <a:r>
-              <a:rPr sz="1200" b="0" i="0">
-                <a:latin typeface="Arial"/>
-                <a:cs typeface="Arial"/>
-                <a:ea typeface="Arial"/>
-                <a:solidFill>
-                  <a:srgbClr val="21295C"/>
-                </a:solidFill>
-              </a:rPr>
-              <a:t> </a:t>
-            </a:r>
-            <a:r>
-              <a:rPr sz="624" baseline="30000" b="0" i="1">
-                <a:latin typeface="Arial"/>
-                <a:cs typeface="Arial"/>
-                <a:ea typeface="Arial"/>
-                <a:solidFill>
-                  <a:srgbClr val="1C7293"/>
-                </a:solidFill>
-              </a:rPr>
-              <a:t>[2]</a:t>
-            </a:r>
-            <a:r>
-              <a:rPr sz="1200" b="0" i="0">
-                <a:latin typeface="Arial"/>
-                <a:cs typeface="Arial"/>
-                <a:ea typeface="Arial"/>
-                <a:solidFill>
-                  <a:srgbClr val="21295C"/>
-                </a:solidFill>
-              </a:rPr>
-              <a:t> — хотя бы для долгосрочной памяти и поиска по корпоративной базе (RAG).
-Архитектуру агента разберём на следующем слайде.</a:t>
-            </a:r>
-          </a:p>
-        </p:txBody>
-      </p:sp>
-      <p:sp>
-        <p:nvSpPr>
-          <p:cNvPr id="14" name="Rounded Rectangle 13"/>
-          <p:cNvSpPr/>
-          <p:nvPr/>
-        </p:nvSpPr>
-        <p:spPr>
-          <a:xfrm>
-            <a:off x="502920" y="5916168"/>
-            <a:ext cx="11201400" cy="457200"/>
-          </a:xfrm>
-          <a:prstGeom prst="roundRect">
-            <a:avLst>
-              <a:gd name="adj" fmla="val 12000"/>
-            </a:avLst>
-          </a:prstGeom>
-          <a:solidFill>
-            <a:srgbClr val="FEF5E0"/>
-          </a:solidFill>
-          <a:ln w="15240">
-            <a:solidFill>
-              <a:srgbClr val="F0AB00"/>
-            </a:solidFill>
-          </a:ln>
-          <a:effectLst/>
-        </p:spPr>
-        <p:style>
-          <a:lnRef idx="1">
-            <a:schemeClr val="accent1"/>
-          </a:lnRef>
-          <a:fillRef idx="3">
-            <a:schemeClr val="accent1"/>
-          </a:fillRef>
-          <a:effectRef idx="2">
-            <a:schemeClr val="accent1"/>
-          </a:effectRef>
-          <a:fontRef idx="minor">
-            <a:schemeClr val="lt1"/>
-          </a:fontRef>
-        </p:style>
-        <p:txBody>
-          <a:bodyPr rtlCol="0" anchor="ctr"/>
-          <a:lstStyle/>
-          <a:p>
-            <a:pPr algn="ctr"/>
-          </a:p>
-        </p:txBody>
-      </p:sp>
-      <p:sp>
-        <p:nvSpPr>
-          <p:cNvPr id="15" name="TextBox 14"/>
-          <p:cNvSpPr txBox="1"/>
-          <p:nvPr/>
-        </p:nvSpPr>
-        <p:spPr>
-          <a:xfrm>
-            <a:off x="685800" y="5989320"/>
-            <a:ext cx="10835640" cy="310896"/>
-          </a:xfrm>
-          <a:prstGeom prst="rect">
-            <a:avLst/>
-          </a:prstGeom>
-          <a:noFill/>
-        </p:spPr>
-        <p:txBody>
-          <a:bodyPr wrap="square" lIns="0" rIns="0" tIns="0" bIns="0" anchor="ctr">
-            <a:spAutoFit/>
-          </a:bodyPr>
-          <a:lstStyle/>
-          <a:p>
-            <a:pPr algn="l">
-              <a:lnSpc>
-                <a:spcPct val="125000"/>
-              </a:lnSpc>
-            </a:pPr>
-            <a:r>
-              <a:rPr sz="1300" b="1" i="0">
-                <a:solidFill>
-                  <a:srgbClr val="21295C"/>
-                </a:solidFill>
-                <a:latin typeface="Arial"/>
-              </a:rPr>
-              <a:t>Выбор чата — точка на шкале взаимодействия, не единственно верный вариант.</a:t>
-            </a:r>
-          </a:p>
-        </p:txBody>
-      </p:sp>
-      <p:sp>
-        <p:nvSpPr>
-          <p:cNvPr id="16" name="TextBox 15"/>
-          <p:cNvSpPr txBox="1"/>
-          <p:nvPr/>
-        </p:nvSpPr>
-        <p:spPr>
-          <a:xfrm>
-            <a:off x="502920" y="6455664"/>
-            <a:ext cx="11201400" cy="292608"/>
-          </a:xfrm>
-          <a:prstGeom prst="rect">
-            <a:avLst/>
-          </a:prstGeom>
-          <a:noFill/>
-        </p:spPr>
-        <p:txBody>
-          <a:bodyPr wrap="square" lIns="0" rIns="0" tIns="0" bIns="0" anchor="t">
-            <a:spAutoFit/>
-          </a:bodyPr>
-          <a:lstStyle/>
-          <a:p>
-            <a:pPr algn="l">
-              <a:lnSpc>
-                <a:spcPct val="102000"/>
-              </a:lnSpc>
-            </a:pPr>
-            <a:r>
-              <a:rPr sz="850" b="1" i="1">
-                <a:solidFill>
-                  <a:srgbClr val="065A82"/>
-                </a:solidFill>
-                <a:latin typeface="Arial"/>
-              </a:rPr>
-              <a:t>[1] </a:t>
-            </a:r>
-            <a:r>
-              <a:rPr sz="850" i="1">
-                <a:solidFill>
-                  <a:srgbClr val="1C7293"/>
-                </a:solidFill>
-                <a:latin typeface="Arial"/>
-                <a:hlinkClick r:id="rId2"/>
-              </a:rPr>
-              <a:t>ВЦИОМ — «Нейросети в жизни россиян» (окт 2025)</a:t>
-            </a:r>
-            <a:r>
-              <a:rPr sz="850" i="1">
-                <a:solidFill>
-                  <a:srgbClr val="1C7293"/>
-                </a:solidFill>
-                <a:latin typeface="Arial"/>
-              </a:rPr>
-              <a:t>   ·   </a:t>
-            </a:r>
-            <a:r>
-              <a:rPr sz="850" b="1" i="1">
-                <a:solidFill>
-                  <a:srgbClr val="065A82"/>
-                </a:solidFill>
-                <a:latin typeface="Arial"/>
-              </a:rPr>
-              <a:t>[2] </a:t>
-            </a:r>
-            <a:r>
-              <a:rPr sz="850" i="1">
-                <a:solidFill>
-                  <a:srgbClr val="1C7293"/>
-                </a:solidFill>
-                <a:latin typeface="Arial"/>
-                <a:hlinkClick r:id="rId3"/>
-              </a:rPr>
-              <a:t>Dam et al. — Survey on LLM-based AI Chatbots (2024)</a:t>
-            </a:r>
-          </a:p>
-        </p:txBody>
-      </p:sp>
-      <p:sp>
-        <p:nvSpPr>
-          <p:cNvPr id="17" name="TextBox 16"/>
-          <p:cNvSpPr txBox="1"/>
-          <p:nvPr/>
-        </p:nvSpPr>
-        <p:spPr>
-          <a:xfrm>
-            <a:off x="11274552" y="6547104"/>
-            <a:ext cx="868680" cy="256032"/>
-          </a:xfrm>
-          <a:prstGeom prst="rect">
-            <a:avLst/>
-          </a:prstGeom>
-          <a:noFill/>
-        </p:spPr>
-        <p:txBody>
-          <a:bodyPr wrap="none" lIns="0" rIns="0" tIns="0" bIns="0">
-            <a:spAutoFit/>
-          </a:bodyPr>
-          <a:lstStyle/>
-          <a:p>
-            <a:pPr algn="r">
-              <a:lnSpc>
-                <a:spcPct val="100000"/>
-              </a:lnSpc>
-            </a:pPr>
-            <a:r>
-              <a:rPr sz="1000" i="1">
-                <a:solidFill>
-                  <a:srgbClr val="6B7685"/>
-                </a:solidFill>
-                <a:latin typeface="Arial"/>
-              </a:rPr>
-              <a:t>20 / 36</a:t>
-            </a:r>
-          </a:p>
-        </p:txBody>
-      </p:sp>
-    </p:spTree>
-  </p:cSld>
-  <p:clrMapOvr>
-    <a:masterClrMapping/>
-  </p:clrMapOvr>
-</p:sld>
-</file>
-
 <file path=ppt/slides/slide21.xml><?xml version="1.0" encoding="utf-8"?>
 <p:sld xmlns:a="http://schemas.openxmlformats.org/drawingml/2006/main" xmlns:p="http://schemas.openxmlformats.org/presentationml/2006/main" xmlns:r="http://schemas.openxmlformats.org/officeDocument/2006/relationships">
   <p:cSld>
@@ -26463,7 +25699,7 @@
                 </a:solidFill>
                 <a:latin typeface="Arial"/>
               </a:rPr>
-              <a:t>21 / 36</a:t>
+              <a:t>23 / 36</a:t>
             </a:r>
           </a:p>
         </p:txBody>
@@ -28480,7 +27716,275 @@
                 </a:solidFill>
                 <a:latin typeface="Arial"/>
               </a:rPr>
-              <a:t>22 / 36</a:t>
+              <a:t>24 / 36</a:t>
+            </a:r>
+          </a:p>
+        </p:txBody>
+      </p:sp>
+      <p:sp>
+        <p:nvSpPr>
+          <p:cNvPr id="49" name="Rounded Rectangle 48"/>
+          <p:cNvSpPr/>
+          <p:nvPr/>
+        </p:nvSpPr>
+        <p:spPr>
+          <a:xfrm>
+            <a:off x="4599432" y="2788920"/>
+            <a:ext cx="7004304" cy="2606040"/>
+          </a:xfrm>
+          <a:prstGeom prst="roundRect">
+            <a:avLst>
+              <a:gd name="adj" fmla="val 5000"/>
+            </a:avLst>
+          </a:prstGeom>
+          <a:noFill/>
+          <a:ln w="20320">
+            <a:solidFill>
+              <a:srgbClr val="028090"/>
+            </a:solidFill>
+            <a:prstDash val="dash"/>
+          </a:ln>
+          <a:effectLst/>
+        </p:spPr>
+        <p:style>
+          <a:lnRef idx="1">
+            <a:schemeClr val="accent1"/>
+          </a:lnRef>
+          <a:fillRef idx="3">
+            <a:schemeClr val="accent1"/>
+          </a:fillRef>
+          <a:effectRef idx="2">
+            <a:schemeClr val="accent1"/>
+          </a:effectRef>
+          <a:fontRef idx="minor">
+            <a:schemeClr val="lt1"/>
+          </a:fontRef>
+        </p:style>
+        <p:txBody>
+          <a:bodyPr rtlCol="0" anchor="ctr"/>
+          <a:lstStyle/>
+          <a:p>
+            <a:pPr algn="ctr"/>
+          </a:p>
+        </p:txBody>
+      </p:sp>
+      <p:sp>
+        <p:nvSpPr>
+          <p:cNvPr id="50" name="TextBox 49"/>
+          <p:cNvSpPr txBox="1"/>
+          <p:nvPr/>
+        </p:nvSpPr>
+        <p:spPr>
+          <a:xfrm rot="16200000">
+            <a:off x="10744200" y="3611880"/>
+            <a:ext cx="2377440" cy="365760"/>
+          </a:xfrm>
+          <a:prstGeom prst="rect">
+            <a:avLst/>
+          </a:prstGeom>
+          <a:noFill/>
+        </p:spPr>
+        <p:txBody>
+          <a:bodyPr wrap="none">
+            <a:spAutoFit/>
+          </a:bodyPr>
+          <a:lstStyle/>
+          <a:p>
+            <a:pPr algn="ctr"/>
+            <a:r>
+              <a:rPr sz="1100" b="1">
+                <a:solidFill>
+                  <a:srgbClr val="028090"/>
+                </a:solidFill>
+              </a:rPr>
+              <a:t>цикл: обработка одного файла</a:t>
+            </a:r>
+          </a:p>
+        </p:txBody>
+      </p:sp>
+      <p:sp>
+        <p:nvSpPr>
+          <p:cNvPr id="51" name="Rectangle 50"/>
+          <p:cNvSpPr/>
+          <p:nvPr/>
+        </p:nvSpPr>
+        <p:spPr>
+          <a:xfrm>
+            <a:off x="4539996" y="3017520"/>
+            <a:ext cx="50292" cy="2743200"/>
+          </a:xfrm>
+          <a:prstGeom prst="rect">
+            <a:avLst/>
+          </a:prstGeom>
+          <a:solidFill>
+            <a:srgbClr val="028090"/>
+          </a:solidFill>
+          <a:ln>
+            <a:noFill/>
+          </a:ln>
+          <a:effectLst/>
+        </p:spPr>
+        <p:style>
+          <a:lnRef idx="1">
+            <a:schemeClr val="accent1"/>
+          </a:lnRef>
+          <a:fillRef idx="3">
+            <a:schemeClr val="accent1"/>
+          </a:fillRef>
+          <a:effectRef idx="2">
+            <a:schemeClr val="accent1"/>
+          </a:effectRef>
+          <a:fontRef idx="minor">
+            <a:schemeClr val="lt1"/>
+          </a:fontRef>
+        </p:style>
+        <p:txBody>
+          <a:bodyPr rtlCol="0" anchor="ctr"/>
+          <a:lstStyle/>
+          <a:p>
+            <a:pPr algn="ctr"/>
+          </a:p>
+        </p:txBody>
+      </p:sp>
+      <p:sp>
+        <p:nvSpPr>
+          <p:cNvPr id="52" name="Rectangle 51"/>
+          <p:cNvSpPr/>
+          <p:nvPr/>
+        </p:nvSpPr>
+        <p:spPr>
+          <a:xfrm>
+            <a:off x="4539996" y="5715000"/>
+            <a:ext cx="274320" cy="50292"/>
+          </a:xfrm>
+          <a:prstGeom prst="rect">
+            <a:avLst/>
+          </a:prstGeom>
+          <a:solidFill>
+            <a:srgbClr val="028090"/>
+          </a:solidFill>
+          <a:ln>
+            <a:noFill/>
+          </a:ln>
+          <a:effectLst/>
+        </p:spPr>
+        <p:style>
+          <a:lnRef idx="1">
+            <a:schemeClr val="accent1"/>
+          </a:lnRef>
+          <a:fillRef idx="3">
+            <a:schemeClr val="accent1"/>
+          </a:fillRef>
+          <a:effectRef idx="2">
+            <a:schemeClr val="accent1"/>
+          </a:effectRef>
+          <a:fontRef idx="minor">
+            <a:schemeClr val="lt1"/>
+          </a:fontRef>
+        </p:style>
+        <p:txBody>
+          <a:bodyPr rtlCol="0" anchor="ctr"/>
+          <a:lstStyle/>
+          <a:p>
+            <a:pPr algn="ctr"/>
+          </a:p>
+        </p:txBody>
+      </p:sp>
+      <p:sp>
+        <p:nvSpPr>
+          <p:cNvPr id="53" name="Isosceles Triangle 52"/>
+          <p:cNvSpPr/>
+          <p:nvPr/>
+        </p:nvSpPr>
+        <p:spPr>
+          <a:xfrm>
+            <a:off x="4485132" y="2834640"/>
+            <a:ext cx="164592" cy="201168"/>
+          </a:xfrm>
+          <a:prstGeom prst="triangle">
+            <a:avLst/>
+          </a:prstGeom>
+          <a:solidFill>
+            <a:srgbClr val="028090"/>
+          </a:solidFill>
+          <a:ln>
+            <a:noFill/>
+          </a:ln>
+          <a:effectLst/>
+        </p:spPr>
+        <p:style>
+          <a:lnRef idx="1">
+            <a:schemeClr val="accent1"/>
+          </a:lnRef>
+          <a:fillRef idx="3">
+            <a:schemeClr val="accent1"/>
+          </a:fillRef>
+          <a:effectRef idx="2">
+            <a:schemeClr val="accent1"/>
+          </a:effectRef>
+          <a:fontRef idx="minor">
+            <a:schemeClr val="lt1"/>
+          </a:fontRef>
+        </p:style>
+        <p:txBody>
+          <a:bodyPr rtlCol="0" anchor="ctr"/>
+          <a:lstStyle/>
+          <a:p>
+            <a:pPr algn="ctr"/>
+          </a:p>
+        </p:txBody>
+      </p:sp>
+      <p:sp>
+        <p:nvSpPr>
+          <p:cNvPr id="54" name="Rounded Rectangle 53"/>
+          <p:cNvSpPr/>
+          <p:nvPr/>
+        </p:nvSpPr>
+        <p:spPr>
+          <a:xfrm>
+            <a:off x="4754880" y="5907024"/>
+            <a:ext cx="2331720" cy="292608"/>
+          </a:xfrm>
+          <a:prstGeom prst="roundRect">
+            <a:avLst>
+              <a:gd name="adj" fmla="val 50000"/>
+            </a:avLst>
+          </a:prstGeom>
+          <a:solidFill>
+            <a:srgbClr val="F0AB00"/>
+          </a:solidFill>
+          <a:ln>
+            <a:noFill/>
+          </a:ln>
+          <a:effectLst/>
+        </p:spPr>
+        <p:style>
+          <a:lnRef idx="1">
+            <a:schemeClr val="accent1"/>
+          </a:lnRef>
+          <a:fillRef idx="3">
+            <a:schemeClr val="accent1"/>
+          </a:fillRef>
+          <a:effectRef idx="2">
+            <a:schemeClr val="accent1"/>
+          </a:effectRef>
+          <a:fontRef idx="minor">
+            <a:schemeClr val="lt1"/>
+          </a:fontRef>
+        </p:style>
+        <p:txBody>
+          <a:bodyPr rtlCol="0" anchor="ctr" lIns="45720" rIns="45720" tIns="36576" bIns="36576" wrap="none"/>
+          <a:lstStyle/>
+          <a:p>
+            <a:pPr algn="ctr"/>
+            <a:r>
+              <a:rPr sz="1100" b="1">
+                <a:solidFill>
+                  <a:srgbClr val="21295C"/>
+                </a:solidFill>
+                <a:latin typeface="Arial"/>
+              </a:rPr>
+              <a:t>↻  повторить × 200 файлов</a:t>
             </a:r>
           </a:p>
         </p:txBody>
@@ -30273,7 +29777,7 @@
                 </a:solidFill>
                 <a:latin typeface="Arial"/>
               </a:rPr>
-              <a:t>23 / 36</a:t>
+              <a:t>25 / 36</a:t>
             </a:r>
           </a:p>
         </p:txBody>
@@ -31647,7 +31151,7 @@
                 </a:solidFill>
                 <a:latin typeface="Arial"/>
               </a:rPr>
-              <a:t>24 / 36</a:t>
+              <a:t>26 / 36</a:t>
             </a:r>
           </a:p>
         </p:txBody>
@@ -32905,7 +32409,7 @@
                 </a:solidFill>
                 <a:latin typeface="Arial"/>
               </a:rPr>
-              <a:t>25 / 36</a:t>
+              <a:t>27 / 36</a:t>
             </a:r>
           </a:p>
         </p:txBody>
@@ -34207,7 +33711,7 @@
                 </a:solidFill>
                 <a:latin typeface="Arial"/>
               </a:rPr>
-              <a:t>26 / 36</a:t>
+              <a:t>28 / 36</a:t>
             </a:r>
           </a:p>
         </p:txBody>
@@ -35389,7 +34893,7 @@
                 </a:solidFill>
                 <a:latin typeface="Arial"/>
               </a:rPr>
-              <a:t>27 / 36</a:t>
+              <a:t>29 / 36</a:t>
             </a:r>
           </a:p>
         </p:txBody>
@@ -36606,7 +36110,7 @@
                 </a:solidFill>
                 <a:latin typeface="Arial"/>
               </a:rPr>
-              <a:t>28 / 36</a:t>
+              <a:t>30 / 36</a:t>
             </a:r>
           </a:p>
         </p:txBody>
@@ -37579,7 +37083,7 @@
                 </a:solidFill>
                 <a:latin typeface="Arial"/>
               </a:rPr>
-              <a:t>29 / 36</a:t>
+              <a:t>31 / 36</a:t>
             </a:r>
           </a:p>
         </p:txBody>
@@ -39493,7 +38997,7 @@
                 </a:solidFill>
                 <a:latin typeface="Arial"/>
               </a:rPr>
-              <a:t>30 / 36</a:t>
+              <a:t>32 / 36</a:t>
             </a:r>
           </a:p>
         </p:txBody>
@@ -40635,7 +40139,7 @@
                 </a:solidFill>
                 <a:latin typeface="Arial"/>
               </a:rPr>
-              <a:t>31 / 36</a:t>
+              <a:t>33 / 36</a:t>
             </a:r>
           </a:p>
         </p:txBody>
@@ -41316,7 +40820,7 @@
                 </a:solidFill>
                 <a:latin typeface="Arial"/>
               </a:rPr>
-              <a:t>32 / 36</a:t>
+              <a:t>34 / 36</a:t>
             </a:r>
           </a:p>
         </p:txBody>
@@ -42845,7 +42349,7 @@
                 </a:solidFill>
                 <a:latin typeface="Arial"/>
               </a:rPr>
-              <a:t>33 / 36</a:t>
+              <a:t>7 / 36</a:t>
             </a:r>
           </a:p>
         </p:txBody>
@@ -42958,7 +42462,7 @@
                 </a:solidFill>
                 <a:latin typeface="Arial"/>
               </a:rPr>
-              <a:t>  =  10 </a:t>
+              <a:t>  =  40 </a:t>
             </a:r>
             <a:r>
               <a:rPr sz="1400" b="0" i="1">
@@ -42967,7 +42471,7 @@
                 </a:solidFill>
                 <a:latin typeface="Arial"/>
               </a:rPr>
-              <a:t>(посещаемость)</a:t>
+              <a:t>(экзамен)</a:t>
             </a:r>
             <a:r>
               <a:rPr sz="3000" b="1" i="0">
@@ -42976,7 +42480,7 @@
                 </a:solidFill>
                 <a:latin typeface="Arial"/>
               </a:rPr>
-              <a:t>  +  30 </a:t>
+              <a:t/>
             </a:r>
             <a:r>
               <a:rPr sz="1400" b="0" i="1">
@@ -42985,7 +42489,7 @@
                 </a:solidFill>
                 <a:latin typeface="Arial"/>
               </a:rPr>
-              <a:t>(экзамен)</a:t>
+              <a:t/>
             </a:r>
             <a:r>
               <a:rPr sz="3000" b="1" i="0">
@@ -43081,7 +42585,7 @@
                 </a:solidFill>
                 <a:latin typeface="Arial"/>
               </a:rPr>
-              <a:t>34 / 36</a:t>
+              <a:t>8 / 36</a:t>
             </a:r>
           </a:p>
         </p:txBody>
@@ -43960,6 +43464,1054 @@
                 <a:latin typeface="Arial"/>
               </a:rPr>
               <a:t>36 / 36</a:t>
+            </a:r>
+          </a:p>
+        </p:txBody>
+      </p:sp>
+      <p:sp>
+        <p:nvSpPr>
+          <p:cNvPr id="5" name="Rounded Rectangle 4"/>
+          <p:cNvSpPr/>
+          <p:nvPr/>
+        </p:nvSpPr>
+        <p:spPr>
+          <a:xfrm>
+            <a:off x="8869680" y="3886200"/>
+            <a:ext cx="2834640" cy="2331720"/>
+          </a:xfrm>
+          <a:prstGeom prst="roundRect">
+            <a:avLst>
+              <a:gd name="adj" fmla="val 13071"/>
+            </a:avLst>
+          </a:prstGeom>
+          <a:solidFill>
+            <a:srgbClr val="FFFFFF"/>
+          </a:solidFill>
+          <a:ln w="20320">
+            <a:solidFill>
+              <a:srgbClr val="1C7293"/>
+            </a:solidFill>
+          </a:ln>
+          <a:effectLst/>
+        </p:spPr>
+        <p:style>
+          <a:lnRef idx="1">
+            <a:schemeClr val="accent1"/>
+          </a:lnRef>
+          <a:fillRef idx="3">
+            <a:schemeClr val="accent1"/>
+          </a:fillRef>
+          <a:effectRef idx="2">
+            <a:schemeClr val="accent1"/>
+          </a:effectRef>
+          <a:fontRef idx="minor">
+            <a:schemeClr val="lt1"/>
+          </a:fontRef>
+        </p:style>
+        <p:txBody>
+          <a:bodyPr rtlCol="0" anchor="ctr"/>
+          <a:lstStyle/>
+          <a:p>
+            <a:pPr algn="ctr"/>
+          </a:p>
+        </p:txBody>
+      </p:sp>
+      <p:pic>
+        <p:nvPicPr>
+          <p:cNvPr id="6" name="Picture 5" descr="max-qr.png"/>
+          <p:cNvPicPr>
+            <a:picLocks noChangeAspect="1"/>
+          </p:cNvPicPr>
+          <p:nvPr/>
+        </p:nvPicPr>
+        <p:blipFill>
+          <a:blip r:embed="rId3"/>
+          <a:stretch>
+            <a:fillRect/>
+          </a:stretch>
+        </p:blipFill>
+        <p:spPr>
+          <a:xfrm>
+            <a:off x="9578340" y="4087368"/>
+            <a:ext cx="1417320" cy="1417320"/>
+          </a:xfrm>
+          <a:prstGeom prst="rect">
+            <a:avLst/>
+          </a:prstGeom>
+        </p:spPr>
+      </p:pic>
+      <p:sp>
+        <p:nvSpPr>
+          <p:cNvPr id="7" name="TextBox 6"/>
+          <p:cNvSpPr txBox="1"/>
+          <p:nvPr/>
+        </p:nvSpPr>
+        <p:spPr>
+          <a:xfrm>
+            <a:off x="9006840" y="5586984"/>
+            <a:ext cx="2560320" cy="292608"/>
+          </a:xfrm>
+          <a:prstGeom prst="rect">
+            <a:avLst/>
+          </a:prstGeom>
+          <a:noFill/>
+        </p:spPr>
+        <p:txBody>
+          <a:bodyPr wrap="square" lIns="0" rIns="0" tIns="0" bIns="0" anchor="t">
+            <a:spAutoFit/>
+          </a:bodyPr>
+          <a:lstStyle/>
+          <a:p>
+            <a:pPr algn="ctr">
+              <a:lnSpc>
+                <a:spcPct val="115000"/>
+              </a:lnSpc>
+            </a:pPr>
+            <a:r>
+              <a:rPr sz="1300" b="1" i="0">
+                <a:solidFill>
+                  <a:srgbClr val="21295C"/>
+                </a:solidFill>
+                <a:latin typeface="Arial"/>
+              </a:rPr>
+              <a:t>Чат курса в MAX</a:t>
+            </a:r>
+          </a:p>
+        </p:txBody>
+      </p:sp>
+      <p:sp>
+        <p:nvSpPr>
+          <p:cNvPr id="8" name="TextBox 7"/>
+          <p:cNvSpPr txBox="1"/>
+          <p:nvPr/>
+        </p:nvSpPr>
+        <p:spPr>
+          <a:xfrm>
+            <a:off x="8979407" y="5861304"/>
+            <a:ext cx="2615184" cy="365760"/>
+          </a:xfrm>
+          <a:prstGeom prst="rect">
+            <a:avLst/>
+          </a:prstGeom>
+          <a:noFill/>
+        </p:spPr>
+        <p:txBody>
+          <a:bodyPr wrap="square" lIns="0" rIns="0" tIns="0" bIns="0" anchor="t">
+            <a:spAutoFit/>
+          </a:bodyPr>
+          <a:lstStyle/>
+          <a:p>
+            <a:pPr algn="ctr">
+              <a:lnSpc>
+                <a:spcPct val="115000"/>
+              </a:lnSpc>
+            </a:pPr>
+            <a:r>
+              <a:rPr sz="950" b="0" i="0">
+                <a:solidFill>
+                  <a:srgbClr val="065A82"/>
+                </a:solidFill>
+                <a:latin typeface="Arial"/>
+              </a:rPr>
+              <a:t>max.ru/join/sHoHlhI4jvW…</a:t>
+            </a:r>
+          </a:p>
+        </p:txBody>
+      </p:sp>
+    </p:spTree>
+  </p:cSld>
+  <p:clrMapOvr>
+    <a:masterClrMapping/>
+  </p:clrMapOvr>
+</p:sld>
+</file>
+
+<file path=ppt/slides/slide37.xml><?xml version="1.0" encoding="utf-8"?>
+<p:sld xmlns:a="http://schemas.openxmlformats.org/drawingml/2006/main" xmlns:p="http://schemas.openxmlformats.org/presentationml/2006/main" xmlns:r="http://schemas.openxmlformats.org/officeDocument/2006/relationships">
+  <p:cSld>
+    <p:bg>
+      <p:bgPr>
+        <a:solidFill>
+          <a:srgbClr val="FFFFFF"/>
+        </a:solidFill>
+        <a:effectLst/>
+      </p:bgPr>
+    </p:bg>
+    <p:spTree>
+      <p:nvGrpSpPr>
+        <p:cNvPr id="1" name=""/>
+        <p:cNvGrpSpPr/>
+        <p:nvPr/>
+      </p:nvGrpSpPr>
+      <p:grpSpPr/>
+      <p:sp>
+        <p:nvSpPr>
+          <p:cNvPr id="2" name="Title 1"/>
+          <p:cNvSpPr>
+            <a:spLocks noGrp="1"/>
+          </p:cNvSpPr>
+          <p:nvPr>
+            <p:ph type="title"/>
+          </p:nvPr>
+        </p:nvSpPr>
+        <p:spPr/>
+        <p:txBody>
+          <a:bodyPr/>
+          <a:lstStyle/>
+          <a:p/>
+        </p:txBody>
+      </p:sp>
+      <p:sp>
+        <p:nvSpPr>
+          <p:cNvPr id="3" name="TextBox 2"/>
+          <p:cNvSpPr txBox="1"/>
+          <p:nvPr/>
+        </p:nvSpPr>
+        <p:spPr>
+          <a:xfrm>
+            <a:off x="502920" y="411480"/>
+            <a:ext cx="11247120" cy="731520"/>
+          </a:xfrm>
+          <a:prstGeom prst="rect">
+            <a:avLst/>
+          </a:prstGeom>
+          <a:noFill/>
+        </p:spPr>
+        <p:txBody>
+          <a:bodyPr wrap="square" lIns="0" rIns="0" tIns="0" bIns="0" anchor="t">
+            <a:spAutoFit/>
+          </a:bodyPr>
+          <a:lstStyle/>
+          <a:p>
+            <a:pPr algn="l">
+              <a:lnSpc>
+                <a:spcPct val="115000"/>
+              </a:lnSpc>
+            </a:pPr>
+            <a:r>
+              <a:rPr sz="2800" b="1" i="0">
+                <a:solidFill>
+                  <a:srgbClr val="21295C"/>
+                </a:solidFill>
+                <a:latin typeface="Arial"/>
+              </a:rPr>
+              <a:t>Чат курса в MAX — всё важное в одном месте</a:t>
+            </a:r>
+          </a:p>
+        </p:txBody>
+      </p:sp>
+      <p:sp>
+        <p:nvSpPr>
+          <p:cNvPr id="4" name="TextBox 3"/>
+          <p:cNvSpPr txBox="1"/>
+          <p:nvPr/>
+        </p:nvSpPr>
+        <p:spPr>
+          <a:xfrm>
+            <a:off x="502920" y="1188720"/>
+            <a:ext cx="11247120" cy="457200"/>
+          </a:xfrm>
+          <a:prstGeom prst="rect">
+            <a:avLst/>
+          </a:prstGeom>
+          <a:noFill/>
+        </p:spPr>
+        <p:txBody>
+          <a:bodyPr wrap="square" lIns="0" rIns="0" tIns="0" bIns="0" anchor="t">
+            <a:spAutoFit/>
+          </a:bodyPr>
+          <a:lstStyle/>
+          <a:p>
+            <a:pPr algn="l">
+              <a:lnSpc>
+                <a:spcPct val="115000"/>
+              </a:lnSpc>
+            </a:pPr>
+            <a:r>
+              <a:rPr sz="1700" b="1" i="0">
+                <a:solidFill>
+                  <a:srgbClr val="028090"/>
+                </a:solidFill>
+                <a:latin typeface="Arial"/>
+              </a:rPr>
+              <a:t>Чат группы: «Отраслевое использование ИИ 2026»</a:t>
+            </a:r>
+          </a:p>
+        </p:txBody>
+      </p:sp>
+      <p:sp>
+        <p:nvSpPr>
+          <p:cNvPr id="5" name="Rounded Rectangle 4"/>
+          <p:cNvSpPr/>
+          <p:nvPr/>
+        </p:nvSpPr>
+        <p:spPr>
+          <a:xfrm>
+            <a:off x="822960" y="1783080"/>
+            <a:ext cx="3657600" cy="3977639"/>
+          </a:xfrm>
+          <a:prstGeom prst="roundRect">
+            <a:avLst>
+              <a:gd name="adj" fmla="val 8333"/>
+            </a:avLst>
+          </a:prstGeom>
+          <a:solidFill>
+            <a:srgbClr val="FFFFFF"/>
+          </a:solidFill>
+          <a:ln w="22860">
+            <a:solidFill>
+              <a:srgbClr val="1C7293"/>
+            </a:solidFill>
+          </a:ln>
+          <a:effectLst/>
+        </p:spPr>
+        <p:style>
+          <a:lnRef idx="1">
+            <a:schemeClr val="accent1"/>
+          </a:lnRef>
+          <a:fillRef idx="3">
+            <a:schemeClr val="accent1"/>
+          </a:fillRef>
+          <a:effectRef idx="2">
+            <a:schemeClr val="accent1"/>
+          </a:effectRef>
+          <a:fontRef idx="minor">
+            <a:schemeClr val="lt1"/>
+          </a:fontRef>
+        </p:style>
+        <p:txBody>
+          <a:bodyPr rtlCol="0" anchor="ctr"/>
+          <a:lstStyle/>
+          <a:p>
+            <a:pPr algn="ctr"/>
+          </a:p>
+        </p:txBody>
+      </p:sp>
+      <p:pic>
+        <p:nvPicPr>
+          <p:cNvPr id="6" name="Picture 5" descr="s04b-max-qr.png"/>
+          <p:cNvPicPr>
+            <a:picLocks noChangeAspect="1"/>
+          </p:cNvPicPr>
+          <p:nvPr/>
+        </p:nvPicPr>
+        <p:blipFill>
+          <a:blip r:embed="rId2"/>
+          <a:stretch>
+            <a:fillRect/>
+          </a:stretch>
+        </p:blipFill>
+        <p:spPr>
+          <a:xfrm>
+            <a:off x="1485900" y="2039112"/>
+            <a:ext cx="2331720" cy="2331720"/>
+          </a:xfrm>
+          <a:prstGeom prst="rect">
+            <a:avLst/>
+          </a:prstGeom>
+        </p:spPr>
+      </p:pic>
+      <p:sp>
+        <p:nvSpPr>
+          <p:cNvPr id="7" name="TextBox 6"/>
+          <p:cNvSpPr txBox="1"/>
+          <p:nvPr/>
+        </p:nvSpPr>
+        <p:spPr>
+          <a:xfrm>
+            <a:off x="1005840" y="4507992"/>
+            <a:ext cx="3291840" cy="365760"/>
+          </a:xfrm>
+          <a:prstGeom prst="rect">
+            <a:avLst/>
+          </a:prstGeom>
+          <a:noFill/>
+        </p:spPr>
+        <p:txBody>
+          <a:bodyPr wrap="square" lIns="0" rIns="0" tIns="0" bIns="0" anchor="t">
+            <a:spAutoFit/>
+          </a:bodyPr>
+          <a:lstStyle/>
+          <a:p>
+            <a:pPr algn="ctr">
+              <a:lnSpc>
+                <a:spcPct val="115000"/>
+              </a:lnSpc>
+            </a:pPr>
+            <a:r>
+              <a:rPr sz="1400" b="1" i="0">
+                <a:solidFill>
+                  <a:srgbClr val="21295C"/>
+                </a:solidFill>
+                <a:latin typeface="Arial"/>
+              </a:rPr>
+              <a:t>Отсканируйте камерой телефона</a:t>
+            </a:r>
+          </a:p>
+        </p:txBody>
+      </p:sp>
+      <p:sp>
+        <p:nvSpPr>
+          <p:cNvPr id="8" name="TextBox 7"/>
+          <p:cNvSpPr txBox="1"/>
+          <p:nvPr/>
+        </p:nvSpPr>
+        <p:spPr>
+          <a:xfrm>
+            <a:off x="960120" y="4928616"/>
+            <a:ext cx="3383280" cy="731520"/>
+          </a:xfrm>
+          <a:prstGeom prst="rect">
+            <a:avLst/>
+          </a:prstGeom>
+          <a:noFill/>
+        </p:spPr>
+        <p:txBody>
+          <a:bodyPr wrap="square" lIns="0" rIns="0" tIns="0" bIns="0" anchor="t">
+            <a:spAutoFit/>
+          </a:bodyPr>
+          <a:lstStyle/>
+          <a:p>
+            <a:pPr algn="ctr">
+              <a:lnSpc>
+                <a:spcPct val="112000"/>
+              </a:lnSpc>
+            </a:pPr>
+            <a:r>
+              <a:rPr sz="1000" b="0" i="0">
+                <a:solidFill>
+                  <a:srgbClr val="065A82"/>
+                </a:solidFill>
+                <a:latin typeface="Arial"/>
+              </a:rPr>
+              <a:t>max.ru/join/sHoHlhI4jvW_swcq5ZLowvz6G94m0IMhAwngxuxsEpI</a:t>
+            </a:r>
+          </a:p>
+        </p:txBody>
+      </p:sp>
+      <p:sp>
+        <p:nvSpPr>
+          <p:cNvPr id="9" name="Rounded Rectangle 8"/>
+          <p:cNvSpPr/>
+          <p:nvPr/>
+        </p:nvSpPr>
+        <p:spPr>
+          <a:xfrm>
+            <a:off x="4937760" y="1783080"/>
+            <a:ext cx="6766560" cy="1234440"/>
+          </a:xfrm>
+          <a:prstGeom prst="roundRect">
+            <a:avLst>
+              <a:gd name="adj" fmla="val 24691"/>
+            </a:avLst>
+          </a:prstGeom>
+          <a:solidFill>
+            <a:srgbClr val="F4F7FA"/>
+          </a:solidFill>
+          <a:ln w="19050">
+            <a:solidFill>
+              <a:srgbClr val="1C7293"/>
+            </a:solidFill>
+          </a:ln>
+          <a:effectLst/>
+        </p:spPr>
+        <p:style>
+          <a:lnRef idx="1">
+            <a:schemeClr val="accent1"/>
+          </a:lnRef>
+          <a:fillRef idx="3">
+            <a:schemeClr val="accent1"/>
+          </a:fillRef>
+          <a:effectRef idx="2">
+            <a:schemeClr val="accent1"/>
+          </a:effectRef>
+          <a:fontRef idx="minor">
+            <a:schemeClr val="lt1"/>
+          </a:fontRef>
+        </p:style>
+        <p:txBody>
+          <a:bodyPr rtlCol="0" anchor="ctr"/>
+          <a:lstStyle/>
+          <a:p>
+            <a:pPr algn="ctr"/>
+          </a:p>
+        </p:txBody>
+      </p:sp>
+      <p:sp>
+        <p:nvSpPr>
+          <p:cNvPr id="10" name="Rounded Rectangle 9"/>
+          <p:cNvSpPr/>
+          <p:nvPr/>
+        </p:nvSpPr>
+        <p:spPr>
+          <a:xfrm>
+            <a:off x="5157216" y="2057400"/>
+            <a:ext cx="566928" cy="566928"/>
+          </a:xfrm>
+          <a:prstGeom prst="roundRect">
+            <a:avLst>
+              <a:gd name="adj" fmla="val 26000"/>
+            </a:avLst>
+          </a:prstGeom>
+          <a:solidFill>
+            <a:srgbClr val="028090"/>
+          </a:solidFill>
+          <a:ln>
+            <a:noFill/>
+          </a:ln>
+          <a:effectLst/>
+        </p:spPr>
+        <p:style>
+          <a:lnRef idx="1">
+            <a:schemeClr val="accent1"/>
+          </a:lnRef>
+          <a:fillRef idx="3">
+            <a:schemeClr val="accent1"/>
+          </a:fillRef>
+          <a:effectRef idx="2">
+            <a:schemeClr val="accent1"/>
+          </a:effectRef>
+          <a:fontRef idx="minor">
+            <a:schemeClr val="lt1"/>
+          </a:fontRef>
+        </p:style>
+        <p:txBody>
+          <a:bodyPr rtlCol="0" anchor="ctr"/>
+          <a:lstStyle/>
+          <a:p>
+            <a:pPr algn="ctr"/>
+          </a:p>
+        </p:txBody>
+      </p:sp>
+      <p:pic>
+        <p:nvPicPr>
+          <p:cNvPr id="11" name="Picture 10" descr="bell-FFFFFF-64.png"/>
+          <p:cNvPicPr>
+            <a:picLocks noChangeAspect="1"/>
+          </p:cNvPicPr>
+          <p:nvPr/>
+        </p:nvPicPr>
+        <p:blipFill>
+          <a:blip r:embed="rId3"/>
+          <a:stretch>
+            <a:fillRect/>
+          </a:stretch>
+        </p:blipFill>
+        <p:spPr>
+          <a:xfrm>
+            <a:off x="5259263" y="2159447"/>
+            <a:ext cx="351495" cy="351495"/>
+          </a:xfrm>
+          <a:prstGeom prst="rect">
+            <a:avLst/>
+          </a:prstGeom>
+        </p:spPr>
+      </p:pic>
+      <p:sp>
+        <p:nvSpPr>
+          <p:cNvPr id="12" name="TextBox 11"/>
+          <p:cNvSpPr txBox="1"/>
+          <p:nvPr/>
+        </p:nvSpPr>
+        <p:spPr>
+          <a:xfrm>
+            <a:off x="5989320" y="2002536"/>
+            <a:ext cx="5486400" cy="365760"/>
+          </a:xfrm>
+          <a:prstGeom prst="rect">
+            <a:avLst/>
+          </a:prstGeom>
+          <a:noFill/>
+        </p:spPr>
+        <p:txBody>
+          <a:bodyPr wrap="square" lIns="0" rIns="0" tIns="0" bIns="0" anchor="t">
+            <a:spAutoFit/>
+          </a:bodyPr>
+          <a:lstStyle/>
+          <a:p>
+            <a:pPr algn="l">
+              <a:lnSpc>
+                <a:spcPct val="115000"/>
+              </a:lnSpc>
+            </a:pPr>
+            <a:r>
+              <a:rPr sz="1600" b="1" i="0">
+                <a:solidFill>
+                  <a:srgbClr val="21295C"/>
+                </a:solidFill>
+                <a:latin typeface="Arial"/>
+              </a:rPr>
+              <a:t>Объявления</a:t>
+            </a:r>
+          </a:p>
+        </p:txBody>
+      </p:sp>
+      <p:sp>
+        <p:nvSpPr>
+          <p:cNvPr id="13" name="TextBox 12"/>
+          <p:cNvSpPr txBox="1"/>
+          <p:nvPr/>
+        </p:nvSpPr>
+        <p:spPr>
+          <a:xfrm>
+            <a:off x="5989320" y="2404872"/>
+            <a:ext cx="5486400" cy="502920"/>
+          </a:xfrm>
+          <a:prstGeom prst="rect">
+            <a:avLst/>
+          </a:prstGeom>
+          <a:noFill/>
+        </p:spPr>
+        <p:txBody>
+          <a:bodyPr wrap="square" lIns="0" rIns="0" tIns="0" bIns="0" anchor="t">
+            <a:spAutoFit/>
+          </a:bodyPr>
+          <a:lstStyle/>
+          <a:p>
+            <a:pPr algn="l">
+              <a:lnSpc>
+                <a:spcPct val="112000"/>
+              </a:lnSpc>
+            </a:pPr>
+            <a:r>
+              <a:rPr sz="1250" b="0" i="0">
+                <a:solidFill>
+                  <a:srgbClr val="6B7685"/>
+                </a:solidFill>
+                <a:latin typeface="Arial"/>
+              </a:rPr>
+              <a:t>Расписание, изменения, важные новости курса — в одном месте.</a:t>
+            </a:r>
+          </a:p>
+        </p:txBody>
+      </p:sp>
+      <p:sp>
+        <p:nvSpPr>
+          <p:cNvPr id="14" name="Rounded Rectangle 13"/>
+          <p:cNvSpPr/>
+          <p:nvPr/>
+        </p:nvSpPr>
+        <p:spPr>
+          <a:xfrm>
+            <a:off x="4937760" y="3154680"/>
+            <a:ext cx="6766560" cy="1234440"/>
+          </a:xfrm>
+          <a:prstGeom prst="roundRect">
+            <a:avLst>
+              <a:gd name="adj" fmla="val 24691"/>
+            </a:avLst>
+          </a:prstGeom>
+          <a:solidFill>
+            <a:srgbClr val="F4F7FA"/>
+          </a:solidFill>
+          <a:ln w="19050">
+            <a:solidFill>
+              <a:srgbClr val="1C7293"/>
+            </a:solidFill>
+          </a:ln>
+          <a:effectLst/>
+        </p:spPr>
+        <p:style>
+          <a:lnRef idx="1">
+            <a:schemeClr val="accent1"/>
+          </a:lnRef>
+          <a:fillRef idx="3">
+            <a:schemeClr val="accent1"/>
+          </a:fillRef>
+          <a:effectRef idx="2">
+            <a:schemeClr val="accent1"/>
+          </a:effectRef>
+          <a:fontRef idx="minor">
+            <a:schemeClr val="lt1"/>
+          </a:fontRef>
+        </p:style>
+        <p:txBody>
+          <a:bodyPr rtlCol="0" anchor="ctr"/>
+          <a:lstStyle/>
+          <a:p>
+            <a:pPr algn="ctr"/>
+          </a:p>
+        </p:txBody>
+      </p:sp>
+      <p:sp>
+        <p:nvSpPr>
+          <p:cNvPr id="15" name="Rounded Rectangle 14"/>
+          <p:cNvSpPr/>
+          <p:nvPr/>
+        </p:nvSpPr>
+        <p:spPr>
+          <a:xfrm>
+            <a:off x="5157216" y="3429000"/>
+            <a:ext cx="566928" cy="566928"/>
+          </a:xfrm>
+          <a:prstGeom prst="roundRect">
+            <a:avLst>
+              <a:gd name="adj" fmla="val 26000"/>
+            </a:avLst>
+          </a:prstGeom>
+          <a:solidFill>
+            <a:srgbClr val="028090"/>
+          </a:solidFill>
+          <a:ln>
+            <a:noFill/>
+          </a:ln>
+          <a:effectLst/>
+        </p:spPr>
+        <p:style>
+          <a:lnRef idx="1">
+            <a:schemeClr val="accent1"/>
+          </a:lnRef>
+          <a:fillRef idx="3">
+            <a:schemeClr val="accent1"/>
+          </a:fillRef>
+          <a:effectRef idx="2">
+            <a:schemeClr val="accent1"/>
+          </a:effectRef>
+          <a:fontRef idx="minor">
+            <a:schemeClr val="lt1"/>
+          </a:fontRef>
+        </p:style>
+        <p:txBody>
+          <a:bodyPr rtlCol="0" anchor="ctr"/>
+          <a:lstStyle/>
+          <a:p>
+            <a:pPr algn="ctr"/>
+          </a:p>
+        </p:txBody>
+      </p:sp>
+      <p:pic>
+        <p:nvPicPr>
+          <p:cNvPr id="16" name="Picture 15" descr="book-open-FFFFFF-64.png"/>
+          <p:cNvPicPr>
+            <a:picLocks noChangeAspect="1"/>
+          </p:cNvPicPr>
+          <p:nvPr/>
+        </p:nvPicPr>
+        <p:blipFill>
+          <a:blip r:embed="rId4"/>
+          <a:stretch>
+            <a:fillRect/>
+          </a:stretch>
+        </p:blipFill>
+        <p:spPr>
+          <a:xfrm>
+            <a:off x="5259263" y="3531047"/>
+            <a:ext cx="351495" cy="351495"/>
+          </a:xfrm>
+          <a:prstGeom prst="rect">
+            <a:avLst/>
+          </a:prstGeom>
+        </p:spPr>
+      </p:pic>
+      <p:sp>
+        <p:nvSpPr>
+          <p:cNvPr id="17" name="TextBox 16"/>
+          <p:cNvSpPr txBox="1"/>
+          <p:nvPr/>
+        </p:nvSpPr>
+        <p:spPr>
+          <a:xfrm>
+            <a:off x="5989320" y="3374136"/>
+            <a:ext cx="5486400" cy="365760"/>
+          </a:xfrm>
+          <a:prstGeom prst="rect">
+            <a:avLst/>
+          </a:prstGeom>
+          <a:noFill/>
+        </p:spPr>
+        <p:txBody>
+          <a:bodyPr wrap="square" lIns="0" rIns="0" tIns="0" bIns="0" anchor="t">
+            <a:spAutoFit/>
+          </a:bodyPr>
+          <a:lstStyle/>
+          <a:p>
+            <a:pPr algn="l">
+              <a:lnSpc>
+                <a:spcPct val="115000"/>
+              </a:lnSpc>
+            </a:pPr>
+            <a:r>
+              <a:rPr sz="1600" b="1" i="0">
+                <a:solidFill>
+                  <a:srgbClr val="21295C"/>
+                </a:solidFill>
+                <a:latin typeface="Arial"/>
+              </a:rPr>
+              <a:t>Материалы лекций и семинаров</a:t>
+            </a:r>
+          </a:p>
+        </p:txBody>
+      </p:sp>
+      <p:sp>
+        <p:nvSpPr>
+          <p:cNvPr id="18" name="TextBox 17"/>
+          <p:cNvSpPr txBox="1"/>
+          <p:nvPr/>
+        </p:nvSpPr>
+        <p:spPr>
+          <a:xfrm>
+            <a:off x="5989320" y="3776472"/>
+            <a:ext cx="5486400" cy="502920"/>
+          </a:xfrm>
+          <a:prstGeom prst="rect">
+            <a:avLst/>
+          </a:prstGeom>
+          <a:noFill/>
+        </p:spPr>
+        <p:txBody>
+          <a:bodyPr wrap="square" lIns="0" rIns="0" tIns="0" bIns="0" anchor="t">
+            <a:spAutoFit/>
+          </a:bodyPr>
+          <a:lstStyle/>
+          <a:p>
+            <a:pPr algn="l">
+              <a:lnSpc>
+                <a:spcPct val="112000"/>
+              </a:lnSpc>
+            </a:pPr>
+            <a:r>
+              <a:rPr sz="1250" b="0" i="0">
+                <a:solidFill>
+                  <a:srgbClr val="6B7685"/>
+                </a:solidFill>
+                <a:latin typeface="Arial"/>
+              </a:rPr>
+              <a:t>Слайды и материалы появляются в чате по мере проведения занятий.</a:t>
+            </a:r>
+          </a:p>
+        </p:txBody>
+      </p:sp>
+      <p:sp>
+        <p:nvSpPr>
+          <p:cNvPr id="19" name="Rounded Rectangle 18"/>
+          <p:cNvSpPr/>
+          <p:nvPr/>
+        </p:nvSpPr>
+        <p:spPr>
+          <a:xfrm>
+            <a:off x="4937760" y="4526280"/>
+            <a:ext cx="6766560" cy="1234440"/>
+          </a:xfrm>
+          <a:prstGeom prst="roundRect">
+            <a:avLst>
+              <a:gd name="adj" fmla="val 24691"/>
+            </a:avLst>
+          </a:prstGeom>
+          <a:solidFill>
+            <a:srgbClr val="F4F7FA"/>
+          </a:solidFill>
+          <a:ln w="19050">
+            <a:solidFill>
+              <a:srgbClr val="1C7293"/>
+            </a:solidFill>
+          </a:ln>
+          <a:effectLst/>
+        </p:spPr>
+        <p:style>
+          <a:lnRef idx="1">
+            <a:schemeClr val="accent1"/>
+          </a:lnRef>
+          <a:fillRef idx="3">
+            <a:schemeClr val="accent1"/>
+          </a:fillRef>
+          <a:effectRef idx="2">
+            <a:schemeClr val="accent1"/>
+          </a:effectRef>
+          <a:fontRef idx="minor">
+            <a:schemeClr val="lt1"/>
+          </a:fontRef>
+        </p:style>
+        <p:txBody>
+          <a:bodyPr rtlCol="0" anchor="ctr"/>
+          <a:lstStyle/>
+          <a:p>
+            <a:pPr algn="ctr"/>
+          </a:p>
+        </p:txBody>
+      </p:sp>
+      <p:sp>
+        <p:nvSpPr>
+          <p:cNvPr id="20" name="Rounded Rectangle 19"/>
+          <p:cNvSpPr/>
+          <p:nvPr/>
+        </p:nvSpPr>
+        <p:spPr>
+          <a:xfrm>
+            <a:off x="5157216" y="4800600"/>
+            <a:ext cx="566928" cy="566928"/>
+          </a:xfrm>
+          <a:prstGeom prst="roundRect">
+            <a:avLst>
+              <a:gd name="adj" fmla="val 26000"/>
+            </a:avLst>
+          </a:prstGeom>
+          <a:solidFill>
+            <a:srgbClr val="028090"/>
+          </a:solidFill>
+          <a:ln>
+            <a:noFill/>
+          </a:ln>
+          <a:effectLst/>
+        </p:spPr>
+        <p:style>
+          <a:lnRef idx="1">
+            <a:schemeClr val="accent1"/>
+          </a:lnRef>
+          <a:fillRef idx="3">
+            <a:schemeClr val="accent1"/>
+          </a:fillRef>
+          <a:effectRef idx="2">
+            <a:schemeClr val="accent1"/>
+          </a:effectRef>
+          <a:fontRef idx="minor">
+            <a:schemeClr val="lt1"/>
+          </a:fontRef>
+        </p:style>
+        <p:txBody>
+          <a:bodyPr rtlCol="0" anchor="ctr"/>
+          <a:lstStyle/>
+          <a:p>
+            <a:pPr algn="ctr"/>
+          </a:p>
+        </p:txBody>
+      </p:sp>
+      <p:pic>
+        <p:nvPicPr>
+          <p:cNvPr id="21" name="Picture 20" descr="message-square-quote-FFFFFF-64.png"/>
+          <p:cNvPicPr>
+            <a:picLocks noChangeAspect="1"/>
+          </p:cNvPicPr>
+          <p:nvPr/>
+        </p:nvPicPr>
+        <p:blipFill>
+          <a:blip r:embed="rId5"/>
+          <a:stretch>
+            <a:fillRect/>
+          </a:stretch>
+        </p:blipFill>
+        <p:spPr>
+          <a:xfrm>
+            <a:off x="5259263" y="4902647"/>
+            <a:ext cx="351495" cy="351495"/>
+          </a:xfrm>
+          <a:prstGeom prst="rect">
+            <a:avLst/>
+          </a:prstGeom>
+        </p:spPr>
+      </p:pic>
+      <p:sp>
+        <p:nvSpPr>
+          <p:cNvPr id="22" name="TextBox 21"/>
+          <p:cNvSpPr txBox="1"/>
+          <p:nvPr/>
+        </p:nvSpPr>
+        <p:spPr>
+          <a:xfrm>
+            <a:off x="5989320" y="4745736"/>
+            <a:ext cx="5486400" cy="365760"/>
+          </a:xfrm>
+          <a:prstGeom prst="rect">
+            <a:avLst/>
+          </a:prstGeom>
+          <a:noFill/>
+        </p:spPr>
+        <p:txBody>
+          <a:bodyPr wrap="square" lIns="0" rIns="0" tIns="0" bIns="0" anchor="t">
+            <a:spAutoFit/>
+          </a:bodyPr>
+          <a:lstStyle/>
+          <a:p>
+            <a:pPr algn="l">
+              <a:lnSpc>
+                <a:spcPct val="115000"/>
+              </a:lnSpc>
+            </a:pPr>
+            <a:r>
+              <a:rPr sz="1600" b="1" i="0">
+                <a:solidFill>
+                  <a:srgbClr val="21295C"/>
+                </a:solidFill>
+                <a:latin typeface="Arial"/>
+              </a:rPr>
+              <a:t>Вопросы между занятиями</a:t>
+            </a:r>
+          </a:p>
+        </p:txBody>
+      </p:sp>
+      <p:sp>
+        <p:nvSpPr>
+          <p:cNvPr id="23" name="TextBox 22"/>
+          <p:cNvSpPr txBox="1"/>
+          <p:nvPr/>
+        </p:nvSpPr>
+        <p:spPr>
+          <a:xfrm>
+            <a:off x="5989320" y="5148072"/>
+            <a:ext cx="5486400" cy="502920"/>
+          </a:xfrm>
+          <a:prstGeom prst="rect">
+            <a:avLst/>
+          </a:prstGeom>
+          <a:noFill/>
+        </p:spPr>
+        <p:txBody>
+          <a:bodyPr wrap="square" lIns="0" rIns="0" tIns="0" bIns="0" anchor="t">
+            <a:spAutoFit/>
+          </a:bodyPr>
+          <a:lstStyle/>
+          <a:p>
+            <a:pPr algn="l">
+              <a:lnSpc>
+                <a:spcPct val="112000"/>
+              </a:lnSpc>
+            </a:pPr>
+            <a:r>
+              <a:rPr sz="1250" b="0" i="0">
+                <a:solidFill>
+                  <a:srgbClr val="6B7685"/>
+                </a:solidFill>
+                <a:latin typeface="Arial"/>
+              </a:rPr>
+              <a:t>Можно задать вопрос по курсу и получить ответ, не дожидаясь пары.</a:t>
+            </a:r>
+          </a:p>
+        </p:txBody>
+      </p:sp>
+      <p:sp>
+        <p:nvSpPr>
+          <p:cNvPr id="9" name="TextBox 8"/>
+          <p:cNvSpPr txBox="1"/>
+          <p:nvPr/>
+        </p:nvSpPr>
+        <p:spPr>
+          <a:xfrm>
+            <a:off x="11274552" y="6547104"/>
+            <a:ext cx="868680" cy="256032"/>
+          </a:xfrm>
+          <a:prstGeom prst="rect">
+            <a:avLst/>
+          </a:prstGeom>
+          <a:noFill/>
+        </p:spPr>
+        <p:txBody>
+          <a:bodyPr wrap="none" lIns="0" rIns="0" tIns="0" bIns="0">
+            <a:spAutoFit/>
+          </a:bodyPr>
+          <a:lstStyle/>
+          <a:p>
+            <a:pPr algn="r">
+              <a:lnSpc>
+                <a:spcPct val="100000"/>
+              </a:lnSpc>
+            </a:pPr>
+            <a:r>
+              <a:rPr sz="1000" i="1">
+                <a:solidFill>
+                  <a:srgbClr val="6B7685"/>
+                </a:solidFill>
+                <a:latin typeface="Arial"/>
+              </a:rPr>
+              <a:t>9 / 36</a:t>
             </a:r>
           </a:p>
         </p:txBody>
@@ -48322,7 +48874,7 @@
                 </a:solidFill>
                 <a:latin typeface="Arial"/>
               </a:rPr>
-              <a:t>7 / 36</a:t>
+              <a:t>10 / 36</a:t>
             </a:r>
           </a:p>
         </p:txBody>
@@ -49342,7 +49894,7 @@
                 </a:solidFill>
                 <a:latin typeface="Arial"/>
               </a:rPr>
-              <a:t>8 / 36</a:t>
+              <a:t>11 / 36</a:t>
             </a:r>
           </a:p>
         </p:txBody>
@@ -50082,7 +50634,7 @@
                 </a:solidFill>
                 <a:latin typeface="Arial"/>
               </a:rPr>
-              <a:t>9 / 36</a:t>
+              <a:t>12 / 36</a:t>
             </a:r>
           </a:p>
         </p:txBody>
